--- a/proposition-deck/AToure Mother Africa Festival Proposal.pptx
+++ b/proposition-deck/AToure Mother Africa Festival Proposal.pptx
@@ -117,41 +117,41 @@
   <p:extLst>
     <p:ext uri="{521415D9-36F7-43E2-AB2F-B90AF26B5E84}">
       <p14:sectionLst xmlns:p14="http://schemas.microsoft.com/office/powerpoint/2010/main">
-        <p14:section name="Opening" id="{aa8baa7d-8338-22a5-99e6-4e24a1b377b5}">
+        <p14:section name="Opening" id="{04354458-7b03-ce9b-95cc-f23c95f8a679}">
           <p14:sldIdLst>
             <p14:sldId id="256"/>
           </p14:sldIdLst>
         </p14:section>
-        <p14:section name="Where we stand" id="{aba76259-1a75-8fa7-cf68-9506f57f1825}">
+        <p14:section name="Where we stand" id="{807591e4-ca4d-c80c-cc28-ce535a68e555}">
           <p14:sldIdLst>
             <p14:sldId id="257"/>
             <p14:sldId id="258"/>
           </p14:sldIdLst>
         </p14:section>
-        <p14:section name="The AToure answer" id="{8fbff4dd-0f60-fca7-674e-98a0450b65f7}">
+        <p14:section name="The AToure answer" id="{2ccc0e7f-3be1-42a2-112b-fb520960a4d3}">
           <p14:sldIdLst>
             <p14:sldId id="259"/>
             <p14:sldId id="260"/>
           </p14:sldIdLst>
         </p14:section>
-        <p14:section name="Visibility" id="{a14b0a46-d7db-7e45-7523-93a132ffbc8d}">
+        <p14:section name="Visibility" id="{4f0cc013-ed16-31c1-f320-f00396fed880}">
           <p14:sldIdLst>
             <p14:sldId id="261"/>
             <p14:sldId id="262"/>
           </p14:sldIdLst>
         </p14:section>
-        <p14:section name="The visibility report" id="{e6abcbe9-abe5-ce5d-fde4-f3cc194975c3}">
+        <p14:section name="The visibility report" id="{8eb308de-b9cd-c380-2333-b7c85db1df64}">
           <p14:sldIdLst>
             <p14:sldId id="263"/>
             <p14:sldId id="264"/>
           </p14:sldIdLst>
         </p14:section>
-        <p14:section name="Proof" id="{fc2ba310-1718-3c19-c4d3-1b42352da6c1}">
+        <p14:section name="Proof" id="{bea4a2c9-a6c1-f697-9fc4-ba3a437d0f2e}">
           <p14:sldIdLst>
             <p14:sldId id="265"/>
           </p14:sldIdLst>
         </p14:section>
-        <p14:section name="The ask" id="{a0f92758-4b69-4ac4-53cf-e76757a44841}">
+        <p14:section name="The ask" id="{28a184f7-8718-fd31-4fd0-645d471964e1}">
           <p14:sldIdLst>
             <p14:sldId id="266"/>
           </p14:sldIdLst>
@@ -648,7 +648,7 @@
           <a:p>
             <a:r>
               <a:rPr lang="en-US" dirty="0"/>
-              <a:t>This is not a new capability. In Abidjan, AToure built the IShowSpeed operation from zero, and ran Race Weekend Abidjan, its own event, with partner brands and Ivorian creators. In Morocco it delivered the AFCON mascot reveal with CAF and the FRMF. The Ashton Hall tour covered five countries end to end. Confirm the Ashton Hall figure before presenting: the decks use 1.57 billion, the website uses the media kit figure.</a:t>
+              <a:t>This is not a new capability. In Abidjan, AToure built the IShowSpeed operation from zero. In Morocco it delivered the AFCON mascot reveal with CAF and the Royal Moroccan Football Federation. The Ashton Hall tour covered five countries, managed end to end.</a:t>
             </a:r>
             <a:endParaRPr lang="en-US" dirty="0"/>
           </a:p>
@@ -824,7 +824,7 @@
           <a:p>
             <a:r>
               <a:rPr lang="en-US" dirty="0"/>
-              <a:t>Everything on the left comes from the festival’s own posters and press material. Ask the team to correct anything we have wrong. The right side is what any festival needs once it starts selling its audience to sponsors. Present it as the next stage, not as a list of faults.</a:t>
+              <a:t>Everything on the left comes from public reporting and the festival’s own announcements, so ask the team to correct anything we have wrong. 15,000 and 40 percent are the figures reported for the first edition in December 2022. 20,000 is what the organisers expect for the 5th edition, not a result. The 1 billion FCFA figure is the festival’s weight as a sponsorship instrument. The right side is what any festival needs once it sells its audience to sponsors: present it as the next stage, not as a list of faults. Sources: Africa Radio, Music In Africa, Abidjan.net, Liferadio, France 24, Pulse and allAfrica.</a:t>
             </a:r>
             <a:endParaRPr lang="en-US" dirty="0"/>
           </a:p>
@@ -1264,7 +1264,7 @@
           <a:p>
             <a:r>
               <a:rPr lang="en-US" dirty="0"/>
-              <a:t>Sponsors are paying for visibility, and creators are one of the best ways to deliver it. Sponsor mentions go into every brief, creators are guided to each activation and stage banner on both nights, and every partner gets its own page in the report. That page is what helps the festival renew its sponsors for 2027. Any media value is an estimate and is labelled as one.</a:t>
+              <a:t>Sponsors are paying for visibility, and creators are one of the best ways to deliver it. Sponsor mentions go into every brief, creators are guided to each activation and stage banner on both nights, and every partner gets its own page in the report. The revenue model is the same chain as before, seen from the sponsor’s side: more creators bring more visibility, visibility meets the brands’ goals, and met goals bring sponsor money back for 2027. Any media value is an estimate and is labelled as one.</a:t>
             </a:r>
             <a:endParaRPr lang="en-US" dirty="0"/>
           </a:p>
@@ -3544,7 +3544,7 @@
         <p:spPr>
           <a:xfrm>
             <a:off x="548640" y="1783080"/>
-            <a:ext cx="3615240" cy="2514600"/>
+            <a:ext cx="3943898" cy="2743200"/>
           </a:xfrm>
           <a:prstGeom prst="rect">
             <a:avLst/>
@@ -3559,7 +3559,7 @@
         </p:nvSpPr>
         <p:spPr>
           <a:xfrm>
-            <a:off x="658368" y="3895344"/>
+            <a:off x="658368" y="4123944"/>
             <a:ext cx="796442" cy="292608"/>
           </a:xfrm>
           <a:prstGeom prst="roundRect">
@@ -3583,7 +3583,7 @@
         </p:nvSpPr>
         <p:spPr>
           <a:xfrm>
-            <a:off x="658368" y="3895344"/>
+            <a:off x="658368" y="4123944"/>
             <a:ext cx="796442" cy="292608"/>
           </a:xfrm>
           <a:prstGeom prst="rect">
@@ -3619,8 +3619,8 @@
         </p:nvSpPr>
         <p:spPr>
           <a:xfrm>
-            <a:off x="548640" y="4434840"/>
-            <a:ext cx="3615240" cy="457200"/>
+            <a:off x="548640" y="4663440"/>
+            <a:ext cx="3943898" cy="457200"/>
           </a:xfrm>
           <a:prstGeom prst="rect">
             <a:avLst/>
@@ -3655,8 +3655,8 @@
         </p:nvSpPr>
         <p:spPr>
           <a:xfrm>
-            <a:off x="548640" y="4937760"/>
-            <a:ext cx="3615240" cy="777240"/>
+            <a:off x="548640" y="5138928"/>
+            <a:ext cx="3943898" cy="685800"/>
           </a:xfrm>
           <a:prstGeom prst="rect">
             <a:avLst/>
@@ -3699,8 +3699,8 @@
         </p:blipFill>
         <p:spPr>
           <a:xfrm>
-            <a:off x="4438200" y="1783080"/>
-            <a:ext cx="1679194" cy="2514600"/>
+            <a:off x="4766858" y="1783080"/>
+            <a:ext cx="1831848" cy="2743200"/>
           </a:xfrm>
           <a:prstGeom prst="rect">
             <a:avLst/>
@@ -3715,7 +3715,7 @@
         </p:nvSpPr>
         <p:spPr>
           <a:xfrm>
-            <a:off x="4547928" y="3895344"/>
+            <a:off x="4876586" y="4123944"/>
             <a:ext cx="796442" cy="292608"/>
           </a:xfrm>
           <a:prstGeom prst="roundRect">
@@ -3739,7 +3739,7 @@
         </p:nvSpPr>
         <p:spPr>
           <a:xfrm>
-            <a:off x="4547928" y="3895344"/>
+            <a:off x="4876586" y="4123944"/>
             <a:ext cx="796442" cy="292608"/>
           </a:xfrm>
           <a:prstGeom prst="rect">
@@ -3775,8 +3775,8 @@
         </p:nvSpPr>
         <p:spPr>
           <a:xfrm>
-            <a:off x="4438200" y="4434840"/>
-            <a:ext cx="1679194" cy="457200"/>
+            <a:off x="4766858" y="4663440"/>
+            <a:ext cx="1831848" cy="457200"/>
           </a:xfrm>
           <a:prstGeom prst="rect">
             <a:avLst/>
@@ -3811,8 +3811,8 @@
         </p:nvSpPr>
         <p:spPr>
           <a:xfrm>
-            <a:off x="4438200" y="4937760"/>
-            <a:ext cx="1679194" cy="777240"/>
+            <a:off x="4766858" y="5138928"/>
+            <a:ext cx="1831848" cy="685800"/>
           </a:xfrm>
           <a:prstGeom prst="rect">
             <a:avLst/>
@@ -3855,8 +3855,8 @@
         </p:blipFill>
         <p:spPr>
           <a:xfrm>
-            <a:off x="6391714" y="1783080"/>
-            <a:ext cx="2011680" cy="2514600"/>
+            <a:off x="6873026" y="1783080"/>
+            <a:ext cx="2194560" cy="2743200"/>
           </a:xfrm>
           <a:prstGeom prst="rect">
             <a:avLst/>
@@ -3871,7 +3871,7 @@
         </p:nvSpPr>
         <p:spPr>
           <a:xfrm>
-            <a:off x="6501442" y="3895344"/>
+            <a:off x="6982754" y="4123944"/>
             <a:ext cx="662940" cy="292608"/>
           </a:xfrm>
           <a:prstGeom prst="roundRect">
@@ -3895,7 +3895,7 @@
         </p:nvSpPr>
         <p:spPr>
           <a:xfrm>
-            <a:off x="6501442" y="3895344"/>
+            <a:off x="6982754" y="4123944"/>
             <a:ext cx="662940" cy="292608"/>
           </a:xfrm>
           <a:prstGeom prst="rect">
@@ -3931,8 +3931,8 @@
         </p:nvSpPr>
         <p:spPr>
           <a:xfrm>
-            <a:off x="6391714" y="4434840"/>
-            <a:ext cx="2011680" cy="457200"/>
+            <a:off x="6873026" y="4663440"/>
+            <a:ext cx="2194560" cy="457200"/>
           </a:xfrm>
           <a:prstGeom prst="rect">
             <a:avLst/>
@@ -3967,8 +3967,8 @@
         </p:nvSpPr>
         <p:spPr>
           <a:xfrm>
-            <a:off x="6391714" y="4937760"/>
-            <a:ext cx="2011680" cy="777240"/>
+            <a:off x="6873026" y="5138928"/>
+            <a:ext cx="2194560" cy="685800"/>
           </a:xfrm>
           <a:prstGeom prst="rect">
             <a:avLst/>
@@ -4003,12 +4003,12 @@
         </p:nvSpPr>
         <p:spPr>
           <a:xfrm>
-            <a:off x="8677714" y="1783080"/>
-            <a:ext cx="2965342" cy="2514600"/>
+            <a:off x="9387626" y="1783080"/>
+            <a:ext cx="2255429" cy="2743200"/>
           </a:xfrm>
           <a:prstGeom prst="roundRect">
             <a:avLst>
-              <a:gd name="adj" fmla="val 3636"/>
+              <a:gd name="adj" fmla="val 4054"/>
             </a:avLst>
           </a:prstGeom>
           <a:solidFill>
@@ -4032,8 +4032,8 @@
         </p:nvSpPr>
         <p:spPr>
           <a:xfrm>
-            <a:off x="8906314" y="2057400"/>
-            <a:ext cx="2508142" cy="548640"/>
+            <a:off x="9588794" y="2011680"/>
+            <a:ext cx="1889669" cy="256032"/>
           </a:xfrm>
           <a:prstGeom prst="rect">
             <a:avLst/>
@@ -4054,7 +4054,7 @@
                   <a:schemeClr val="accent1"/>
                 </a:solidFill>
               </a:rPr>
-              <a:t>RACE WEEKEND ABIDJAN 2026</a:t>
+              <a:t>WHAT ATOURE DID</a:t>
             </a:r>
             <a:endParaRPr lang="en-GB" sz="1100" dirty="0"/>
           </a:p>
@@ -4068,8 +4068,8 @@
         </p:nvSpPr>
         <p:spPr>
           <a:xfrm>
-            <a:off x="8906314" y="2679192"/>
-            <a:ext cx="2508142" cy="1463040"/>
+            <a:off x="9588794" y="2423160"/>
+            <a:ext cx="1889669" cy="1965960"/>
           </a:xfrm>
           <a:prstGeom prst="rect">
             <a:avLst/>
@@ -4081,127 +4081,110 @@
           <a:bodyPr wrap="square" lIns="0" tIns="0" rIns="0" bIns="0" rtlCol="0" anchor="t"/>
           <a:lstStyle/>
           <a:p>
+            <a:pPr marL="177800" indent="-177800">
+              <a:spcAft>
+                <a:spcPts val="800"/>
+              </a:spcAft>
+              <a:buSzPct val="100000"/>
+              <a:buChar char="•"/>
+            </a:pPr>
+            <a:r>
+              <a:rPr lang="en-GB" altLang="en-US" sz="1200" dirty="0">
+                <a:solidFill>
+                  <a:schemeClr val="accent5"/>
+                </a:solidFill>
+              </a:rPr>
+              <a:t>Operations built from zero in Abidjan</a:t>
+            </a:r>
+            <a:endParaRPr lang="en-GB" sz="1200" dirty="0"/>
+          </a:p>
+          <a:p>
+            <a:pPr marL="177800" indent="-177800">
+              <a:spcAft>
+                <a:spcPts val="800"/>
+              </a:spcAft>
+              <a:buSzPct val="100000"/>
+              <a:buChar char="•"/>
+            </a:pPr>
+            <a:r>
+              <a:rPr lang="en-GB" altLang="en-US" sz="1200" dirty="0">
+                <a:solidFill>
+                  <a:schemeClr val="accent5"/>
+                </a:solidFill>
+              </a:rPr>
+              <a:t>State visas, permits and security</a:t>
+            </a:r>
+            <a:endParaRPr lang="en-GB" sz="1200" dirty="0"/>
+          </a:p>
+          <a:p>
+            <a:pPr marL="177800" indent="-177800">
+              <a:spcAft>
+                <a:spcPts val="800"/>
+              </a:spcAft>
+              <a:buSzPct val="100000"/>
+              <a:buChar char="•"/>
+            </a:pPr>
+            <a:r>
+              <a:rPr lang="en-GB" altLang="en-US" sz="1200" dirty="0">
+                <a:solidFill>
+                  <a:schemeClr val="accent5"/>
+                </a:solidFill>
+              </a:rPr>
+              <a:t>Sponsors and partners brought in</a:t>
+            </a:r>
+            <a:endParaRPr lang="en-GB" sz="1200" dirty="0"/>
+          </a:p>
+          <a:p>
+            <a:pPr marL="177800" indent="-177800">
+              <a:spcAft>
+                <a:spcPts val="800"/>
+              </a:spcAft>
+              <a:buSzPct val="100000"/>
+              <a:buChar char="•"/>
+            </a:pPr>
+            <a:r>
+              <a:rPr lang="en-GB" altLang="en-US" sz="1200" dirty="0">
+                <a:solidFill>
+                  <a:schemeClr val="accent5"/>
+                </a:solidFill>
+              </a:rPr>
+              <a:t>Creators managed end to end</a:t>
+            </a:r>
+            <a:endParaRPr lang="en-GB" sz="1200" dirty="0"/>
+          </a:p>
+        </p:txBody>
+      </p:sp>
+      <p:sp>
+        <p:nvSpPr>
+          <p:cNvPr id="28" name="Text 19"/>
+          <p:cNvSpPr txBox="1"/>
+          <p:nvPr/>
+        </p:nvSpPr>
+        <p:spPr>
+          <a:xfrm>
+            <a:off x="548640" y="5943600"/>
+            <a:ext cx="11094415" cy="237744"/>
+          </a:xfrm>
+          <a:prstGeom prst="rect">
+            <a:avLst/>
+          </a:prstGeom>
+          <a:noFill/>
+          <a:ln/>
+        </p:spPr>
+        <p:txBody>
+          <a:bodyPr wrap="square" lIns="0" tIns="0" rIns="0" bIns="0" rtlCol="0" anchor="t"/>
+          <a:lstStyle/>
+          <a:p>
             <a:pPr indent="0" marL="0">
               <a:buNone/>
             </a:pPr>
             <a:r>
-              <a:rPr lang="en-GB" altLang="en-US" sz="1800" dirty="0">
-                <a:solidFill>
-                  <a:schemeClr val="bg1"/>
-                </a:solidFill>
-                <a:latin typeface="+mj-lt" pitchFamily="34" charset="0"/>
-                <a:ea typeface="+mj-lt" pitchFamily="34" charset="-122"/>
-                <a:cs typeface="+mj-lt" pitchFamily="34" charset="-120"/>
-              </a:rPr>
-              <a:t>AToure’s own event: the first premium Formula 1 activation staged in Côte d’Ivoire.</a:t>
-            </a:r>
-            <a:endParaRPr lang="en-GB" sz="1800" dirty="0"/>
-          </a:p>
-        </p:txBody>
-      </p:sp>
-      <p:sp>
-        <p:nvSpPr>
-          <p:cNvPr id="28" name="Text 19"/>
-          <p:cNvSpPr txBox="1"/>
-          <p:nvPr/>
-        </p:nvSpPr>
-        <p:spPr>
-          <a:xfrm>
-            <a:off x="8677714" y="4434840"/>
-            <a:ext cx="2965342" cy="457200"/>
-          </a:xfrm>
-          <a:prstGeom prst="rect">
-            <a:avLst/>
-          </a:prstGeom>
-          <a:noFill/>
-          <a:ln/>
-        </p:spPr>
-        <p:txBody>
-          <a:bodyPr wrap="square" lIns="0" tIns="0" rIns="0" bIns="0" rtlCol="0" anchor="t"/>
-          <a:lstStyle/>
-          <a:p>
-            <a:pPr indent="0" marL="0">
-              <a:buNone/>
-            </a:pPr>
-            <a:r>
-              <a:rPr lang="en-GB" altLang="en-US" sz="2800" dirty="0">
-                <a:solidFill>
-                  <a:schemeClr val="accent4"/>
-                </a:solidFill>
-              </a:rPr>
-              <a:t>600</a:t>
-            </a:r>
-            <a:endParaRPr lang="en-GB" sz="2800" dirty="0"/>
-          </a:p>
-        </p:txBody>
-      </p:sp>
-      <p:sp>
-        <p:nvSpPr>
-          <p:cNvPr id="29" name="Text 20"/>
-          <p:cNvSpPr txBox="1"/>
-          <p:nvPr/>
-        </p:nvSpPr>
-        <p:spPr>
-          <a:xfrm>
-            <a:off x="8677714" y="4937760"/>
-            <a:ext cx="2965342" cy="777240"/>
-          </a:xfrm>
-          <a:prstGeom prst="rect">
-            <a:avLst/>
-          </a:prstGeom>
-          <a:noFill/>
-          <a:ln/>
-        </p:spPr>
-        <p:txBody>
-          <a:bodyPr wrap="square" lIns="0" tIns="0" rIns="0" bIns="0" rtlCol="0" anchor="t"/>
-          <a:lstStyle/>
-          <a:p>
-            <a:pPr indent="0" marL="0">
-              <a:buNone/>
-            </a:pPr>
-            <a:r>
-              <a:rPr lang="en-GB" altLang="en-US" sz="1100" dirty="0">
+              <a:rPr lang="en-GB" altLang="en-US" sz="1000" dirty="0">
                 <a:solidFill>
                   <a:schemeClr val="accent5"/>
                 </a:solidFill>
               </a:rPr>
-              <a:t>Guests over two days, with 9 partner brands and 7 Ivorian creators booked.</a:t>
-            </a:r>
-            <a:endParaRPr lang="en-GB" sz="1100" dirty="0"/>
-          </a:p>
-        </p:txBody>
-      </p:sp>
-      <p:sp>
-        <p:nvSpPr>
-          <p:cNvPr id="30" name="Text 21"/>
-          <p:cNvSpPr txBox="1"/>
-          <p:nvPr/>
-        </p:nvSpPr>
-        <p:spPr>
-          <a:xfrm>
-            <a:off x="548640" y="5897880"/>
-            <a:ext cx="11094415" cy="237744"/>
-          </a:xfrm>
-          <a:prstGeom prst="rect">
-            <a:avLst/>
-          </a:prstGeom>
-          <a:noFill/>
-          <a:ln/>
-        </p:spPr>
-        <p:txBody>
-          <a:bodyPr wrap="square" lIns="0" tIns="0" rIns="0" bIns="0" rtlCol="0" anchor="t"/>
-          <a:lstStyle/>
-          <a:p>
-            <a:pPr indent="0" marL="0">
-              <a:buNone/>
-            </a:pPr>
-            <a:r>
-              <a:rPr lang="en-GB" altLang="en-US" sz="1000" dirty="0">
-                <a:solidFill>
-                  <a:schemeClr val="accent5"/>
-                </a:solidFill>
-              </a:rPr>
-              <a:t>Sources: Instagram and YouTube analytics, tour figures supplied by the client, AToure event records.</a:t>
+              <a:t>Sources: Instagram and YouTube analytics, tour figures supplied by the client.</a:t>
             </a:r>
             <a:endParaRPr lang="en-GB" sz="1000" dirty="0"/>
           </a:p>
@@ -5421,12 +5404,10 @@
         <p:spPr>
           <a:xfrm>
             <a:off x="548640" y="1783080"/>
-            <a:ext cx="2971800" cy="1965960"/>
-          </a:xfrm>
-          <a:prstGeom prst="roundRect">
-            <a:avLst>
-              <a:gd name="adj" fmla="val 4651"/>
-            </a:avLst>
+            <a:ext cx="3086100" cy="1097280"/>
+          </a:xfrm>
+          <a:prstGeom prst="rect">
+            <a:avLst/>
           </a:prstGeom>
           <a:solidFill>
             <a:schemeClr val="bg1"/>
@@ -5439,13 +5420,6 @@
             </a:solidFill>
             <a:prstDash val="solid"/>
           </a:ln>
-          <a:effectLst>
-            <a:outerShdw sx="100000" sy="100000" kx="0" ky="0" algn="bl" rotWithShape="0" blurRad="127000" dist="38100" dir="5400000">
-              <a:srgbClr val="133524">
-                <a:alpha val="10000"/>
-              </a:srgbClr>
-            </a:outerShdw>
-          </a:effectLst>
         </p:spPr>
       </p:sp>
       <p:sp>
@@ -5456,52 +5430,28 @@
         </p:nvSpPr>
         <p:spPr>
           <a:xfrm>
-            <a:off x="822960" y="2057400"/>
-            <a:ext cx="502920" cy="502920"/>
-          </a:xfrm>
-          <a:prstGeom prst="ellipse">
+            <a:off x="548640" y="1783080"/>
+            <a:ext cx="3086100" cy="45720"/>
+          </a:xfrm>
+          <a:prstGeom prst="rect">
             <a:avLst/>
           </a:prstGeom>
           <a:solidFill>
-            <a:schemeClr val="accent2"/>
+            <a:schemeClr val="accent1"/>
           </a:solidFill>
           <a:ln/>
         </p:spPr>
       </p:sp>
-      <p:pic>
-        <p:nvPicPr>
-          <p:cNvPr id="10" name="Image 2" descr="preencoded.png">    </p:cNvPr>
-          <p:cNvPicPr>
-            <a:picLocks noChangeAspect="1"/>
-          </p:cNvPicPr>
-          <p:nvPr/>
-        </p:nvPicPr>
-        <p:blipFill>
-          <a:blip r:embed="rId3"/>
-          <a:stretch>
-            <a:fillRect/>
-          </a:stretch>
-        </p:blipFill>
-        <p:spPr>
-          <a:xfrm>
-            <a:off x="943661" y="2178101"/>
-            <a:ext cx="261518" cy="261518"/>
-          </a:xfrm>
-          <a:prstGeom prst="rect">
-            <a:avLst/>
-          </a:prstGeom>
-        </p:spPr>
-      </p:pic>
-      <p:sp>
-        <p:nvSpPr>
-          <p:cNvPr id="11" name="Text 5"/>
-          <p:cNvSpPr txBox="1"/>
-          <p:nvPr/>
-        </p:nvSpPr>
-        <p:spPr>
-          <a:xfrm>
-            <a:off x="822960" y="2679192"/>
-            <a:ext cx="2423160" cy="347472"/>
+      <p:sp>
+        <p:nvSpPr>
+          <p:cNvPr id="10" name="Text 5"/>
+          <p:cNvSpPr txBox="1"/>
+          <p:nvPr/>
+        </p:nvSpPr>
+        <p:spPr>
+          <a:xfrm>
+            <a:off x="777240" y="1929384"/>
+            <a:ext cx="2628900" cy="457200"/>
           </a:xfrm>
           <a:prstGeom prst="rect">
             <a:avLst/>
@@ -5517,30 +5467,27 @@
               <a:buNone/>
             </a:pPr>
             <a:r>
-              <a:rPr lang="en-GB" altLang="en-US" sz="2000" dirty="0">
-                <a:solidFill>
-                  <a:schemeClr val="tx1"/>
-                </a:solidFill>
-                <a:latin typeface="+mj-lt" pitchFamily="34" charset="0"/>
-                <a:ea typeface="+mj-lt" pitchFamily="34" charset="-122"/>
-                <a:cs typeface="+mj-lt" pitchFamily="34" charset="-120"/>
-              </a:rPr>
-              <a:t>Four editions</a:t>
-            </a:r>
-            <a:endParaRPr lang="en-GB" sz="2000" dirty="0"/>
-          </a:p>
-        </p:txBody>
-      </p:sp>
-      <p:sp>
-        <p:nvSpPr>
-          <p:cNvPr id="12" name="Text 6"/>
-          <p:cNvSpPr txBox="1"/>
-          <p:nvPr/>
-        </p:nvSpPr>
-        <p:spPr>
-          <a:xfrm>
-            <a:off x="822960" y="3063240"/>
-            <a:ext cx="2423160" cy="640080"/>
+              <a:rPr lang="en-GB" altLang="en-US" sz="2800" b="1" dirty="0">
+                <a:solidFill>
+                  <a:schemeClr val="accent3"/>
+                </a:solidFill>
+              </a:rPr>
+              <a:t>15,000+</a:t>
+            </a:r>
+            <a:endParaRPr lang="en-GB" sz="2800" dirty="0"/>
+          </a:p>
+        </p:txBody>
+      </p:sp>
+      <p:sp>
+        <p:nvSpPr>
+          <p:cNvPr id="11" name="Text 6"/>
+          <p:cNvSpPr txBox="1"/>
+          <p:nvPr/>
+        </p:nvSpPr>
+        <p:spPr>
+          <a:xfrm>
+            <a:off x="777240" y="2423160"/>
+            <a:ext cx="2674620" cy="384048"/>
           </a:xfrm>
           <a:prstGeom prst="rect">
             <a:avLst/>
@@ -5556,32 +5503,30 @@
               <a:buNone/>
             </a:pPr>
             <a:r>
-              <a:rPr lang="en-GB" altLang="en-US" sz="1300" dirty="0">
+              <a:rPr lang="en-GB" altLang="en-US" sz="1200" dirty="0">
                 <a:solidFill>
                   <a:schemeClr val="tx2"/>
                 </a:solidFill>
               </a:rPr>
-              <a:t>The 4th edition ran at Marcory Zone 4 on 27 and 28 December 2025.</a:t>
-            </a:r>
-            <a:endParaRPr lang="en-GB" sz="1300" dirty="0"/>
-          </a:p>
-        </p:txBody>
-      </p:sp>
-      <p:sp>
-        <p:nvSpPr>
-          <p:cNvPr id="13" name="Shape 7"/>
+              <a:t>Festival goers at the first edition, December 2022</a:t>
+            </a:r>
+            <a:endParaRPr lang="en-GB" sz="1200" dirty="0"/>
+          </a:p>
+        </p:txBody>
+      </p:sp>
+      <p:sp>
+        <p:nvSpPr>
+          <p:cNvPr id="12" name="Shape 7"/>
           <p:cNvSpPr/>
           <p:nvPr/>
         </p:nvSpPr>
         <p:spPr>
           <a:xfrm>
-            <a:off x="3749040" y="1783080"/>
-            <a:ext cx="2971800" cy="1965960"/>
-          </a:xfrm>
-          <a:prstGeom prst="roundRect">
-            <a:avLst>
-              <a:gd name="adj" fmla="val 4651"/>
-            </a:avLst>
+            <a:off x="3863340" y="1783080"/>
+            <a:ext cx="3086100" cy="1097280"/>
+          </a:xfrm>
+          <a:prstGeom prst="rect">
+            <a:avLst/>
           </a:prstGeom>
           <a:solidFill>
             <a:schemeClr val="bg1"/>
@@ -5594,69 +5539,38 @@
             </a:solidFill>
             <a:prstDash val="solid"/>
           </a:ln>
-          <a:effectLst>
-            <a:outerShdw sx="100000" sy="100000" kx="0" ky="0" algn="bl" rotWithShape="0" blurRad="127000" dist="38100" dir="5400000">
-              <a:srgbClr val="133524">
-                <a:alpha val="10000"/>
-              </a:srgbClr>
-            </a:outerShdw>
-          </a:effectLst>
-        </p:spPr>
-      </p:sp>
-      <p:sp>
-        <p:nvSpPr>
-          <p:cNvPr id="14" name="Shape 8"/>
+        </p:spPr>
+      </p:sp>
+      <p:sp>
+        <p:nvSpPr>
+          <p:cNvPr id="13" name="Shape 8"/>
           <p:cNvSpPr/>
           <p:nvPr/>
         </p:nvSpPr>
         <p:spPr>
           <a:xfrm>
-            <a:off x="4023360" y="2057400"/>
-            <a:ext cx="502920" cy="502920"/>
-          </a:xfrm>
-          <a:prstGeom prst="ellipse">
+            <a:off x="3863340" y="1783080"/>
+            <a:ext cx="3086100" cy="45720"/>
+          </a:xfrm>
+          <a:prstGeom prst="rect">
             <a:avLst/>
           </a:prstGeom>
           <a:solidFill>
-            <a:schemeClr val="accent2"/>
+            <a:schemeClr val="accent1"/>
           </a:solidFill>
           <a:ln/>
         </p:spPr>
       </p:sp>
-      <p:pic>
-        <p:nvPicPr>
-          <p:cNvPr id="15" name="Image 3" descr="preencoded.png">    </p:cNvPr>
-          <p:cNvPicPr>
-            <a:picLocks noChangeAspect="1"/>
-          </p:cNvPicPr>
-          <p:nvPr/>
-        </p:nvPicPr>
-        <p:blipFill>
-          <a:blip r:embed="rId4"/>
-          <a:stretch>
-            <a:fillRect/>
-          </a:stretch>
-        </p:blipFill>
-        <p:spPr>
-          <a:xfrm>
-            <a:off x="4144061" y="2178101"/>
-            <a:ext cx="261518" cy="261518"/>
-          </a:xfrm>
-          <a:prstGeom prst="rect">
-            <a:avLst/>
-          </a:prstGeom>
-        </p:spPr>
-      </p:pic>
-      <p:sp>
-        <p:nvSpPr>
-          <p:cNvPr id="16" name="Text 9"/>
-          <p:cNvSpPr txBox="1"/>
-          <p:nvPr/>
-        </p:nvSpPr>
-        <p:spPr>
-          <a:xfrm>
-            <a:off x="4023360" y="2679192"/>
-            <a:ext cx="2423160" cy="347472"/>
+      <p:sp>
+        <p:nvSpPr>
+          <p:cNvPr id="14" name="Text 9"/>
+          <p:cNvSpPr txBox="1"/>
+          <p:nvPr/>
+        </p:nvSpPr>
+        <p:spPr>
+          <a:xfrm>
+            <a:off x="4091940" y="1929384"/>
+            <a:ext cx="2628900" cy="457200"/>
           </a:xfrm>
           <a:prstGeom prst="rect">
             <a:avLst/>
@@ -5672,30 +5586,27 @@
               <a:buNone/>
             </a:pPr>
             <a:r>
-              <a:rPr lang="en-GB" altLang="en-US" sz="2000" dirty="0">
-                <a:solidFill>
-                  <a:schemeClr val="tx1"/>
-                </a:solidFill>
-                <a:latin typeface="+mj-lt" pitchFamily="34" charset="0"/>
-                <a:ea typeface="+mj-lt" pitchFamily="34" charset="-122"/>
-                <a:cs typeface="+mj-lt" pitchFamily="34" charset="-120"/>
-              </a:rPr>
-              <a:t>Davido for year five</a:t>
-            </a:r>
-            <a:endParaRPr lang="en-GB" sz="2000" dirty="0"/>
-          </a:p>
-        </p:txBody>
-      </p:sp>
-      <p:sp>
-        <p:nvSpPr>
-          <p:cNvPr id="17" name="Text 10"/>
-          <p:cNvSpPr txBox="1"/>
-          <p:nvPr/>
-        </p:nvSpPr>
-        <p:spPr>
-          <a:xfrm>
-            <a:off x="4023360" y="3063240"/>
-            <a:ext cx="2423160" cy="640080"/>
+              <a:rPr lang="en-GB" altLang="en-US" sz="2800" b="1" dirty="0">
+                <a:solidFill>
+                  <a:schemeClr val="accent3"/>
+                </a:solidFill>
+              </a:rPr>
+              <a:t>40%</a:t>
+            </a:r>
+            <a:endParaRPr lang="en-GB" sz="2800" dirty="0"/>
+          </a:p>
+        </p:txBody>
+      </p:sp>
+      <p:sp>
+        <p:nvSpPr>
+          <p:cNvPr id="15" name="Text 10"/>
+          <p:cNvSpPr txBox="1"/>
+          <p:nvPr/>
+        </p:nvSpPr>
+        <p:spPr>
+          <a:xfrm>
+            <a:off x="4091940" y="2423160"/>
+            <a:ext cx="2674620" cy="384048"/>
           </a:xfrm>
           <a:prstGeom prst="rect">
             <a:avLst/>
@@ -5711,32 +5622,30 @@
               <a:buNone/>
             </a:pPr>
             <a:r>
-              <a:rPr lang="en-GB" altLang="en-US" sz="1300" dirty="0">
+              <a:rPr lang="en-GB" altLang="en-US" sz="1200" dirty="0">
                 <a:solidFill>
                   <a:schemeClr val="tx2"/>
                 </a:solidFill>
               </a:rPr>
-              <a:t>Davido headlines the 5th edition, the festival’s anniversary year.</a:t>
-            </a:r>
-            <a:endParaRPr lang="en-GB" sz="1300" dirty="0"/>
-          </a:p>
-        </p:txBody>
-      </p:sp>
-      <p:sp>
-        <p:nvSpPr>
-          <p:cNvPr id="18" name="Shape 11"/>
+              <a:t>Of them came from other countries, as reported</a:t>
+            </a:r>
+            <a:endParaRPr lang="en-GB" sz="1200" dirty="0"/>
+          </a:p>
+        </p:txBody>
+      </p:sp>
+      <p:sp>
+        <p:nvSpPr>
+          <p:cNvPr id="16" name="Shape 11"/>
           <p:cNvSpPr/>
           <p:nvPr/>
         </p:nvSpPr>
         <p:spPr>
           <a:xfrm>
-            <a:off x="548640" y="3977640"/>
-            <a:ext cx="2971800" cy="1965960"/>
-          </a:xfrm>
-          <a:prstGeom prst="roundRect">
-            <a:avLst>
-              <a:gd name="adj" fmla="val 4651"/>
-            </a:avLst>
+            <a:off x="548640" y="3044952"/>
+            <a:ext cx="3086100" cy="1097280"/>
+          </a:xfrm>
+          <a:prstGeom prst="rect">
+            <a:avLst/>
           </a:prstGeom>
           <a:solidFill>
             <a:schemeClr val="bg1"/>
@@ -5749,27 +5658,132 @@
             </a:solidFill>
             <a:prstDash val="solid"/>
           </a:ln>
-          <a:effectLst>
-            <a:outerShdw sx="100000" sy="100000" kx="0" ky="0" algn="bl" rotWithShape="0" blurRad="127000" dist="38100" dir="5400000">
-              <a:srgbClr val="133524">
-                <a:alpha val="10000"/>
-              </a:srgbClr>
-            </a:outerShdw>
-          </a:effectLst>
-        </p:spPr>
-      </p:sp>
-      <p:sp>
-        <p:nvSpPr>
-          <p:cNvPr id="19" name="Shape 12"/>
+        </p:spPr>
+      </p:sp>
+      <p:sp>
+        <p:nvSpPr>
+          <p:cNvPr id="17" name="Shape 12"/>
           <p:cNvSpPr/>
           <p:nvPr/>
         </p:nvSpPr>
         <p:spPr>
           <a:xfrm>
-            <a:off x="822960" y="4251960"/>
-            <a:ext cx="502920" cy="502920"/>
-          </a:xfrm>
-          <a:prstGeom prst="ellipse">
+            <a:off x="548640" y="3044952"/>
+            <a:ext cx="3086100" cy="45720"/>
+          </a:xfrm>
+          <a:prstGeom prst="rect">
+            <a:avLst/>
+          </a:prstGeom>
+          <a:solidFill>
+            <a:schemeClr val="accent1"/>
+          </a:solidFill>
+          <a:ln/>
+        </p:spPr>
+      </p:sp>
+      <p:sp>
+        <p:nvSpPr>
+          <p:cNvPr id="18" name="Text 13"/>
+          <p:cNvSpPr txBox="1"/>
+          <p:nvPr/>
+        </p:nvSpPr>
+        <p:spPr>
+          <a:xfrm>
+            <a:off x="777240" y="3191256"/>
+            <a:ext cx="2628900" cy="457200"/>
+          </a:xfrm>
+          <a:prstGeom prst="rect">
+            <a:avLst/>
+          </a:prstGeom>
+          <a:noFill/>
+          <a:ln/>
+        </p:spPr>
+        <p:txBody>
+          <a:bodyPr wrap="square" lIns="0" tIns="0" rIns="0" bIns="0" rtlCol="0" anchor="t"/>
+          <a:lstStyle/>
+          <a:p>
+            <a:pPr indent="0" marL="0">
+              <a:buNone/>
+            </a:pPr>
+            <a:r>
+              <a:rPr lang="en-GB" altLang="en-US" sz="2800" b="1" dirty="0">
+                <a:solidFill>
+                  <a:schemeClr val="accent3"/>
+                </a:solidFill>
+              </a:rPr>
+              <a:t>20,000+</a:t>
+            </a:r>
+            <a:endParaRPr lang="en-GB" sz="2800" dirty="0"/>
+          </a:p>
+        </p:txBody>
+      </p:sp>
+      <p:sp>
+        <p:nvSpPr>
+          <p:cNvPr id="19" name="Text 14"/>
+          <p:cNvSpPr txBox="1"/>
+          <p:nvPr/>
+        </p:nvSpPr>
+        <p:spPr>
+          <a:xfrm>
+            <a:off x="777240" y="3685032"/>
+            <a:ext cx="2674620" cy="384048"/>
+          </a:xfrm>
+          <a:prstGeom prst="rect">
+            <a:avLst/>
+          </a:prstGeom>
+          <a:noFill/>
+          <a:ln/>
+        </p:spPr>
+        <p:txBody>
+          <a:bodyPr wrap="square" lIns="0" tIns="0" rIns="0" bIns="0" rtlCol="0" anchor="t"/>
+          <a:lstStyle/>
+          <a:p>
+            <a:pPr indent="0" marL="0">
+              <a:buNone/>
+            </a:pPr>
+            <a:r>
+              <a:rPr lang="en-GB" altLang="en-US" sz="1200" dirty="0">
+                <a:solidFill>
+                  <a:schemeClr val="tx2"/>
+                </a:solidFill>
+              </a:rPr>
+              <a:t>Expected at the 5th edition, according to the organisers</a:t>
+            </a:r>
+            <a:endParaRPr lang="en-GB" sz="1200" dirty="0"/>
+          </a:p>
+        </p:txBody>
+      </p:sp>
+      <p:sp>
+        <p:nvSpPr>
+          <p:cNvPr id="20" name="Shape 15"/>
+          <p:cNvSpPr/>
+          <p:nvPr/>
+        </p:nvSpPr>
+        <p:spPr>
+          <a:xfrm>
+            <a:off x="3863340" y="3044952"/>
+            <a:ext cx="3086100" cy="1097280"/>
+          </a:xfrm>
+          <a:prstGeom prst="rect">
+            <a:avLst/>
+          </a:prstGeom>
+          <a:solidFill>
+            <a:schemeClr val="tx1"/>
+          </a:solidFill>
+          <a:ln/>
+        </p:spPr>
+      </p:sp>
+      <p:sp>
+        <p:nvSpPr>
+          <p:cNvPr id="21" name="Shape 16"/>
+          <p:cNvSpPr/>
+          <p:nvPr/>
+        </p:nvSpPr>
+        <p:spPr>
+          <a:xfrm>
+            <a:off x="3863340" y="3044952"/>
+            <a:ext cx="3086100" cy="45720"/>
+          </a:xfrm>
+          <a:prstGeom prst="rect">
             <a:avLst/>
           </a:prstGeom>
           <a:solidFill>
@@ -5778,9 +5792,814 @@
           <a:ln/>
         </p:spPr>
       </p:sp>
+      <p:sp>
+        <p:nvSpPr>
+          <p:cNvPr id="22" name="Text 17"/>
+          <p:cNvSpPr txBox="1"/>
+          <p:nvPr/>
+        </p:nvSpPr>
+        <p:spPr>
+          <a:xfrm>
+            <a:off x="4091940" y="3191256"/>
+            <a:ext cx="2628900" cy="457200"/>
+          </a:xfrm>
+          <a:prstGeom prst="rect">
+            <a:avLst/>
+          </a:prstGeom>
+          <a:noFill/>
+          <a:ln/>
+        </p:spPr>
+        <p:txBody>
+          <a:bodyPr wrap="square" lIns="0" tIns="0" rIns="0" bIns="0" rtlCol="0" anchor="t"/>
+          <a:lstStyle/>
+          <a:p>
+            <a:pPr indent="0" marL="0">
+              <a:buNone/>
+            </a:pPr>
+            <a:r>
+              <a:rPr lang="en-GB" altLang="en-US" sz="2800" b="1" dirty="0">
+                <a:solidFill>
+                  <a:schemeClr val="accent4"/>
+                </a:solidFill>
+              </a:rPr>
+              <a:t>1B+ FCFA</a:t>
+            </a:r>
+            <a:endParaRPr lang="en-GB" sz="2800" dirty="0"/>
+          </a:p>
+        </p:txBody>
+      </p:sp>
+      <p:sp>
+        <p:nvSpPr>
+          <p:cNvPr id="23" name="Text 18"/>
+          <p:cNvSpPr txBox="1"/>
+          <p:nvPr/>
+        </p:nvSpPr>
+        <p:spPr>
+          <a:xfrm>
+            <a:off x="4091940" y="3685032"/>
+            <a:ext cx="2674620" cy="384048"/>
+          </a:xfrm>
+          <a:prstGeom prst="rect">
+            <a:avLst/>
+          </a:prstGeom>
+          <a:noFill/>
+          <a:ln/>
+        </p:spPr>
+        <p:txBody>
+          <a:bodyPr wrap="square" lIns="0" tIns="0" rIns="0" bIns="0" rtlCol="0" anchor="t"/>
+          <a:lstStyle/>
+          <a:p>
+            <a:pPr indent="0" marL="0">
+              <a:buNone/>
+            </a:pPr>
+            <a:r>
+              <a:rPr lang="en-GB" altLang="en-US" sz="1200" dirty="0">
+                <a:solidFill>
+                  <a:schemeClr val="accent5"/>
+                </a:solidFill>
+              </a:rPr>
+              <a:t>Over 1 billion FCFA: the festival as a sponsorship instrument</a:t>
+            </a:r>
+            <a:endParaRPr lang="en-GB" sz="1200" dirty="0"/>
+          </a:p>
+        </p:txBody>
+      </p:sp>
+      <p:sp>
+        <p:nvSpPr>
+          <p:cNvPr id="24" name="Text 19"/>
+          <p:cNvSpPr txBox="1"/>
+          <p:nvPr/>
+        </p:nvSpPr>
+        <p:spPr>
+          <a:xfrm>
+            <a:off x="548640" y="4370832"/>
+            <a:ext cx="3657600" cy="256032"/>
+          </a:xfrm>
+          <a:prstGeom prst="rect">
+            <a:avLst/>
+          </a:prstGeom>
+          <a:noFill/>
+          <a:ln/>
+        </p:spPr>
+        <p:txBody>
+          <a:bodyPr wrap="square" lIns="0" tIns="0" rIns="0" bIns="0" rtlCol="0" anchor="t"/>
+          <a:lstStyle/>
+          <a:p>
+            <a:pPr indent="0" marL="0">
+              <a:buNone/>
+            </a:pPr>
+            <a:r>
+              <a:rPr lang="en-GB" altLang="en-US" sz="1100" b="1" spc="300" kern="0" dirty="0">
+                <a:solidFill>
+                  <a:schemeClr val="accent3"/>
+                </a:solidFill>
+              </a:rPr>
+              <a:t>THE STORY SO FAR</a:t>
+            </a:r>
+            <a:endParaRPr lang="en-GB" sz="1100" dirty="0"/>
+          </a:p>
+        </p:txBody>
+      </p:sp>
+      <p:sp>
+        <p:nvSpPr>
+          <p:cNvPr id="25" name="Shape 20"/>
+          <p:cNvSpPr/>
+          <p:nvPr/>
+        </p:nvSpPr>
+        <p:spPr>
+          <a:xfrm>
+            <a:off x="548640" y="4846320"/>
+            <a:ext cx="6400800" cy="0"/>
+          </a:xfrm>
+          <a:prstGeom prst="line">
+            <a:avLst/>
+          </a:prstGeom>
+          <a:noFill/>
+          <a:ln w="19050">
+            <a:solidFill>
+              <a:schemeClr val="accent1"/>
+            </a:solidFill>
+            <a:prstDash val="solid"/>
+          </a:ln>
+        </p:spPr>
+      </p:sp>
+      <p:sp>
+        <p:nvSpPr>
+          <p:cNvPr id="26" name="Shape 21"/>
+          <p:cNvSpPr/>
+          <p:nvPr/>
+        </p:nvSpPr>
+        <p:spPr>
+          <a:xfrm>
+            <a:off x="548640" y="4773168"/>
+            <a:ext cx="146304" cy="146304"/>
+          </a:xfrm>
+          <a:prstGeom prst="ellipse">
+            <a:avLst/>
+          </a:prstGeom>
+          <a:solidFill>
+            <a:schemeClr val="accent1"/>
+          </a:solidFill>
+          <a:ln/>
+        </p:spPr>
+      </p:sp>
+      <p:sp>
+        <p:nvSpPr>
+          <p:cNvPr id="27" name="Text 22"/>
+          <p:cNvSpPr txBox="1"/>
+          <p:nvPr/>
+        </p:nvSpPr>
+        <p:spPr>
+          <a:xfrm>
+            <a:off x="548640" y="4983480"/>
+            <a:ext cx="1188720" cy="237744"/>
+          </a:xfrm>
+          <a:prstGeom prst="rect">
+            <a:avLst/>
+          </a:prstGeom>
+          <a:noFill/>
+          <a:ln/>
+        </p:spPr>
+        <p:txBody>
+          <a:bodyPr wrap="square" lIns="0" tIns="0" rIns="0" bIns="0" rtlCol="0" anchor="t"/>
+          <a:lstStyle/>
+          <a:p>
+            <a:pPr indent="0" marL="0">
+              <a:buNone/>
+            </a:pPr>
+            <a:r>
+              <a:rPr lang="en-GB" altLang="en-US" sz="1300" b="1" dirty="0">
+                <a:solidFill>
+                  <a:schemeClr val="tx1"/>
+                </a:solidFill>
+              </a:rPr>
+              <a:t>2022</a:t>
+            </a:r>
+            <a:endParaRPr lang="en-GB" sz="1300" dirty="0"/>
+          </a:p>
+        </p:txBody>
+      </p:sp>
+      <p:sp>
+        <p:nvSpPr>
+          <p:cNvPr id="28" name="Text 23"/>
+          <p:cNvSpPr txBox="1"/>
+          <p:nvPr/>
+        </p:nvSpPr>
+        <p:spPr>
+          <a:xfrm>
+            <a:off x="548640" y="5248656"/>
+            <a:ext cx="1188720" cy="640080"/>
+          </a:xfrm>
+          <a:prstGeom prst="rect">
+            <a:avLst/>
+          </a:prstGeom>
+          <a:noFill/>
+          <a:ln/>
+        </p:spPr>
+        <p:txBody>
+          <a:bodyPr wrap="square" lIns="0" tIns="0" rIns="0" bIns="0" rtlCol="0" anchor="t"/>
+          <a:lstStyle/>
+          <a:p>
+            <a:pPr indent="0" marL="0">
+              <a:buNone/>
+            </a:pPr>
+            <a:r>
+              <a:rPr lang="en-GB" altLang="en-US" sz="1050" dirty="0">
+                <a:solidFill>
+                  <a:schemeClr val="tx2"/>
+                </a:solidFill>
+              </a:rPr>
+              <a:t>First edition, 28 to 30 December in Abidjan</a:t>
+            </a:r>
+            <a:endParaRPr lang="en-GB" sz="1050" dirty="0"/>
+          </a:p>
+        </p:txBody>
+      </p:sp>
+      <p:sp>
+        <p:nvSpPr>
+          <p:cNvPr id="29" name="Shape 24"/>
+          <p:cNvSpPr/>
+          <p:nvPr/>
+        </p:nvSpPr>
+        <p:spPr>
+          <a:xfrm>
+            <a:off x="1828800" y="4773168"/>
+            <a:ext cx="146304" cy="146304"/>
+          </a:xfrm>
+          <a:prstGeom prst="ellipse">
+            <a:avLst/>
+          </a:prstGeom>
+          <a:solidFill>
+            <a:schemeClr val="accent1"/>
+          </a:solidFill>
+          <a:ln/>
+        </p:spPr>
+      </p:sp>
+      <p:sp>
+        <p:nvSpPr>
+          <p:cNvPr id="30" name="Text 25"/>
+          <p:cNvSpPr txBox="1"/>
+          <p:nvPr/>
+        </p:nvSpPr>
+        <p:spPr>
+          <a:xfrm>
+            <a:off x="1828800" y="4983480"/>
+            <a:ext cx="1188720" cy="237744"/>
+          </a:xfrm>
+          <a:prstGeom prst="rect">
+            <a:avLst/>
+          </a:prstGeom>
+          <a:noFill/>
+          <a:ln/>
+        </p:spPr>
+        <p:txBody>
+          <a:bodyPr wrap="square" lIns="0" tIns="0" rIns="0" bIns="0" rtlCol="0" anchor="t"/>
+          <a:lstStyle/>
+          <a:p>
+            <a:pPr indent="0" marL="0">
+              <a:buNone/>
+            </a:pPr>
+            <a:r>
+              <a:rPr lang="en-GB" altLang="en-US" sz="1300" b="1" dirty="0">
+                <a:solidFill>
+                  <a:schemeClr val="tx1"/>
+                </a:solidFill>
+              </a:rPr>
+              <a:t>2023</a:t>
+            </a:r>
+            <a:endParaRPr lang="en-GB" sz="1300" dirty="0"/>
+          </a:p>
+        </p:txBody>
+      </p:sp>
+      <p:sp>
+        <p:nvSpPr>
+          <p:cNvPr id="31" name="Text 26"/>
+          <p:cNvSpPr txBox="1"/>
+          <p:nvPr/>
+        </p:nvSpPr>
+        <p:spPr>
+          <a:xfrm>
+            <a:off x="1828800" y="5248656"/>
+            <a:ext cx="1188720" cy="640080"/>
+          </a:xfrm>
+          <a:prstGeom prst="rect">
+            <a:avLst/>
+          </a:prstGeom>
+          <a:noFill/>
+          <a:ln/>
+        </p:spPr>
+        <p:txBody>
+          <a:bodyPr wrap="square" lIns="0" tIns="0" rIns="0" bIns="0" rtlCol="0" anchor="t"/>
+          <a:lstStyle/>
+          <a:p>
+            <a:pPr indent="0" marL="0">
+              <a:buNone/>
+            </a:pPr>
+            <a:r>
+              <a:rPr lang="en-GB" altLang="en-US" sz="1050" dirty="0">
+                <a:solidFill>
+                  <a:schemeClr val="tx2"/>
+                </a:solidFill>
+              </a:rPr>
+              <a:t>2nd edition: Aya Nakamura, Ayra Starr</a:t>
+            </a:r>
+            <a:endParaRPr lang="en-GB" sz="1050" dirty="0"/>
+          </a:p>
+        </p:txBody>
+      </p:sp>
+      <p:sp>
+        <p:nvSpPr>
+          <p:cNvPr id="32" name="Shape 27"/>
+          <p:cNvSpPr/>
+          <p:nvPr/>
+        </p:nvSpPr>
+        <p:spPr>
+          <a:xfrm>
+            <a:off x="3108960" y="4773168"/>
+            <a:ext cx="146304" cy="146304"/>
+          </a:xfrm>
+          <a:prstGeom prst="ellipse">
+            <a:avLst/>
+          </a:prstGeom>
+          <a:solidFill>
+            <a:schemeClr val="accent1"/>
+          </a:solidFill>
+          <a:ln/>
+        </p:spPr>
+      </p:sp>
+      <p:sp>
+        <p:nvSpPr>
+          <p:cNvPr id="33" name="Text 28"/>
+          <p:cNvSpPr txBox="1"/>
+          <p:nvPr/>
+        </p:nvSpPr>
+        <p:spPr>
+          <a:xfrm>
+            <a:off x="3108960" y="4983480"/>
+            <a:ext cx="1188720" cy="237744"/>
+          </a:xfrm>
+          <a:prstGeom prst="rect">
+            <a:avLst/>
+          </a:prstGeom>
+          <a:noFill/>
+          <a:ln/>
+        </p:spPr>
+        <p:txBody>
+          <a:bodyPr wrap="square" lIns="0" tIns="0" rIns="0" bIns="0" rtlCol="0" anchor="t"/>
+          <a:lstStyle/>
+          <a:p>
+            <a:pPr indent="0" marL="0">
+              <a:buNone/>
+            </a:pPr>
+            <a:r>
+              <a:rPr lang="en-GB" altLang="en-US" sz="1300" b="1" dirty="0">
+                <a:solidFill>
+                  <a:schemeClr val="tx1"/>
+                </a:solidFill>
+              </a:rPr>
+              <a:t>2024</a:t>
+            </a:r>
+            <a:endParaRPr lang="en-GB" sz="1300" dirty="0"/>
+          </a:p>
+        </p:txBody>
+      </p:sp>
+      <p:sp>
+        <p:nvSpPr>
+          <p:cNvPr id="34" name="Text 29"/>
+          <p:cNvSpPr txBox="1"/>
+          <p:nvPr/>
+        </p:nvSpPr>
+        <p:spPr>
+          <a:xfrm>
+            <a:off x="3108960" y="5248656"/>
+            <a:ext cx="1188720" cy="640080"/>
+          </a:xfrm>
+          <a:prstGeom prst="rect">
+            <a:avLst/>
+          </a:prstGeom>
+          <a:noFill/>
+          <a:ln/>
+        </p:spPr>
+        <p:txBody>
+          <a:bodyPr wrap="square" lIns="0" tIns="0" rIns="0" bIns="0" rtlCol="0" anchor="t"/>
+          <a:lstStyle/>
+          <a:p>
+            <a:pPr indent="0" marL="0">
+              <a:buNone/>
+            </a:pPr>
+            <a:r>
+              <a:rPr lang="en-GB" altLang="en-US" sz="1050" dirty="0">
+                <a:solidFill>
+                  <a:schemeClr val="tx2"/>
+                </a:solidFill>
+              </a:rPr>
+              <a:t>3rd edition: Dadju and Tayc</a:t>
+            </a:r>
+            <a:endParaRPr lang="en-GB" sz="1050" dirty="0"/>
+          </a:p>
+        </p:txBody>
+      </p:sp>
+      <p:sp>
+        <p:nvSpPr>
+          <p:cNvPr id="35" name="Shape 30"/>
+          <p:cNvSpPr/>
+          <p:nvPr/>
+        </p:nvSpPr>
+        <p:spPr>
+          <a:xfrm>
+            <a:off x="4389120" y="4773168"/>
+            <a:ext cx="146304" cy="146304"/>
+          </a:xfrm>
+          <a:prstGeom prst="ellipse">
+            <a:avLst/>
+          </a:prstGeom>
+          <a:solidFill>
+            <a:schemeClr val="accent1"/>
+          </a:solidFill>
+          <a:ln/>
+        </p:spPr>
+      </p:sp>
+      <p:sp>
+        <p:nvSpPr>
+          <p:cNvPr id="36" name="Text 31"/>
+          <p:cNvSpPr txBox="1"/>
+          <p:nvPr/>
+        </p:nvSpPr>
+        <p:spPr>
+          <a:xfrm>
+            <a:off x="4389120" y="4983480"/>
+            <a:ext cx="1188720" cy="237744"/>
+          </a:xfrm>
+          <a:prstGeom prst="rect">
+            <a:avLst/>
+          </a:prstGeom>
+          <a:noFill/>
+          <a:ln/>
+        </p:spPr>
+        <p:txBody>
+          <a:bodyPr wrap="square" lIns="0" tIns="0" rIns="0" bIns="0" rtlCol="0" anchor="t"/>
+          <a:lstStyle/>
+          <a:p>
+            <a:pPr indent="0" marL="0">
+              <a:buNone/>
+            </a:pPr>
+            <a:r>
+              <a:rPr lang="en-GB" altLang="en-US" sz="1300" b="1" dirty="0">
+                <a:solidFill>
+                  <a:schemeClr val="tx1"/>
+                </a:solidFill>
+              </a:rPr>
+              <a:t>2025</a:t>
+            </a:r>
+            <a:endParaRPr lang="en-GB" sz="1300" dirty="0"/>
+          </a:p>
+        </p:txBody>
+      </p:sp>
+      <p:sp>
+        <p:nvSpPr>
+          <p:cNvPr id="37" name="Text 32"/>
+          <p:cNvSpPr txBox="1"/>
+          <p:nvPr/>
+        </p:nvSpPr>
+        <p:spPr>
+          <a:xfrm>
+            <a:off x="4389120" y="5248656"/>
+            <a:ext cx="1188720" cy="640080"/>
+          </a:xfrm>
+          <a:prstGeom prst="rect">
+            <a:avLst/>
+          </a:prstGeom>
+          <a:noFill/>
+          <a:ln/>
+        </p:spPr>
+        <p:txBody>
+          <a:bodyPr wrap="square" lIns="0" tIns="0" rIns="0" bIns="0" rtlCol="0" anchor="t"/>
+          <a:lstStyle/>
+          <a:p>
+            <a:pPr indent="0" marL="0">
+              <a:buNone/>
+            </a:pPr>
+            <a:r>
+              <a:rPr lang="en-GB" altLang="en-US" sz="1050" dirty="0">
+                <a:solidFill>
+                  <a:schemeClr val="tx2"/>
+                </a:solidFill>
+              </a:rPr>
+              <a:t>4th edition: Gims, Asake. On France 24</a:t>
+            </a:r>
+            <a:endParaRPr lang="en-GB" sz="1050" dirty="0"/>
+          </a:p>
+        </p:txBody>
+      </p:sp>
+      <p:sp>
+        <p:nvSpPr>
+          <p:cNvPr id="38" name="Shape 33"/>
+          <p:cNvSpPr/>
+          <p:nvPr/>
+        </p:nvSpPr>
+        <p:spPr>
+          <a:xfrm>
+            <a:off x="5669280" y="4773168"/>
+            <a:ext cx="146304" cy="146304"/>
+          </a:xfrm>
+          <a:prstGeom prst="ellipse">
+            <a:avLst/>
+          </a:prstGeom>
+          <a:solidFill>
+            <a:schemeClr val="accent2"/>
+          </a:solidFill>
+          <a:ln/>
+        </p:spPr>
+      </p:sp>
+      <p:sp>
+        <p:nvSpPr>
+          <p:cNvPr id="39" name="Text 34"/>
+          <p:cNvSpPr txBox="1"/>
+          <p:nvPr/>
+        </p:nvSpPr>
+        <p:spPr>
+          <a:xfrm>
+            <a:off x="5669280" y="4983480"/>
+            <a:ext cx="1188720" cy="237744"/>
+          </a:xfrm>
+          <a:prstGeom prst="rect">
+            <a:avLst/>
+          </a:prstGeom>
+          <a:noFill/>
+          <a:ln/>
+        </p:spPr>
+        <p:txBody>
+          <a:bodyPr wrap="square" lIns="0" tIns="0" rIns="0" bIns="0" rtlCol="0" anchor="t"/>
+          <a:lstStyle/>
+          <a:p>
+            <a:pPr indent="0" marL="0">
+              <a:buNone/>
+            </a:pPr>
+            <a:r>
+              <a:rPr lang="en-GB" altLang="en-US" sz="1300" b="1" dirty="0">
+                <a:solidFill>
+                  <a:schemeClr val="accent3"/>
+                </a:solidFill>
+              </a:rPr>
+              <a:t>2026</a:t>
+            </a:r>
+            <a:endParaRPr lang="en-GB" sz="1300" dirty="0"/>
+          </a:p>
+        </p:txBody>
+      </p:sp>
+      <p:sp>
+        <p:nvSpPr>
+          <p:cNvPr id="40" name="Text 35"/>
+          <p:cNvSpPr txBox="1"/>
+          <p:nvPr/>
+        </p:nvSpPr>
+        <p:spPr>
+          <a:xfrm>
+            <a:off x="5669280" y="5248656"/>
+            <a:ext cx="1188720" cy="640080"/>
+          </a:xfrm>
+          <a:prstGeom prst="rect">
+            <a:avLst/>
+          </a:prstGeom>
+          <a:noFill/>
+          <a:ln/>
+        </p:spPr>
+        <p:txBody>
+          <a:bodyPr wrap="square" lIns="0" tIns="0" rIns="0" bIns="0" rtlCol="0" anchor="t"/>
+          <a:lstStyle/>
+          <a:p>
+            <a:pPr indent="0" marL="0">
+              <a:buNone/>
+            </a:pPr>
+            <a:r>
+              <a:rPr lang="en-GB" altLang="en-US" sz="1050" dirty="0">
+                <a:solidFill>
+                  <a:schemeClr val="tx2"/>
+                </a:solidFill>
+              </a:rPr>
+              <a:t>5th edition: Davido headlines</a:t>
+            </a:r>
+            <a:endParaRPr lang="en-GB" sz="1050" dirty="0"/>
+          </a:p>
+        </p:txBody>
+      </p:sp>
+      <p:sp>
+        <p:nvSpPr>
+          <p:cNvPr id="41" name="Text 36"/>
+          <p:cNvSpPr txBox="1"/>
+          <p:nvPr/>
+        </p:nvSpPr>
+        <p:spPr>
+          <a:xfrm>
+            <a:off x="548640" y="5989320"/>
+            <a:ext cx="6400800" cy="274320"/>
+          </a:xfrm>
+          <a:prstGeom prst="rect">
+            <a:avLst/>
+          </a:prstGeom>
+          <a:noFill/>
+          <a:ln/>
+        </p:spPr>
+        <p:txBody>
+          <a:bodyPr wrap="square" lIns="0" tIns="0" rIns="0" bIns="0" rtlCol="0" anchor="t"/>
+          <a:lstStyle/>
+          <a:p>
+            <a:pPr indent="0" marL="0">
+              <a:buNone/>
+            </a:pPr>
+            <a:r>
+              <a:rPr lang="en-GB" altLang="en-US" sz="950" i="1" dirty="0">
+                <a:solidFill>
+                  <a:schemeClr val="tx2"/>
+                </a:solidFill>
+              </a:rPr>
+              <a:t>Sources: Africa Radio, Music In Africa, Abidjan.net, Liferadio, France 24, Pulse, allAfrica. 20,000+ is the organisers’ expected figure.</a:t>
+            </a:r>
+            <a:endParaRPr lang="en-GB" sz="950" dirty="0"/>
+          </a:p>
+        </p:txBody>
+      </p:sp>
+      <p:sp>
+        <p:nvSpPr>
+          <p:cNvPr id="42" name="Shape 37"/>
+          <p:cNvSpPr/>
+          <p:nvPr/>
+        </p:nvSpPr>
+        <p:spPr>
+          <a:xfrm>
+            <a:off x="7178040" y="1783080"/>
+            <a:ext cx="4465015" cy="4251960"/>
+          </a:xfrm>
+          <a:prstGeom prst="roundRect">
+            <a:avLst>
+              <a:gd name="adj" fmla="val 2151"/>
+            </a:avLst>
+          </a:prstGeom>
+          <a:solidFill>
+            <a:schemeClr val="tx1"/>
+          </a:solidFill>
+          <a:ln/>
+        </p:spPr>
+      </p:sp>
+      <p:sp>
+        <p:nvSpPr>
+          <p:cNvPr id="43" name="Text 38"/>
+          <p:cNvSpPr txBox="1"/>
+          <p:nvPr/>
+        </p:nvSpPr>
+        <p:spPr>
+          <a:xfrm>
+            <a:off x="7452360" y="2029968"/>
+            <a:ext cx="3931920" cy="256032"/>
+          </a:xfrm>
+          <a:prstGeom prst="rect">
+            <a:avLst/>
+          </a:prstGeom>
+          <a:noFill/>
+          <a:ln/>
+        </p:spPr>
+        <p:txBody>
+          <a:bodyPr wrap="square" lIns="0" tIns="0" rIns="0" bIns="0" rtlCol="0" anchor="t"/>
+          <a:lstStyle/>
+          <a:p>
+            <a:pPr indent="0" marL="0">
+              <a:buNone/>
+            </a:pPr>
+            <a:r>
+              <a:rPr lang="en-GB" altLang="en-US" sz="1100" b="1" spc="300" kern="0" dirty="0">
+                <a:solidFill>
+                  <a:schemeClr val="accent1"/>
+                </a:solidFill>
+              </a:rPr>
+              <a:t>WHAT THE 5TH EDITION NEEDS</a:t>
+            </a:r>
+            <a:endParaRPr lang="en-GB" sz="1100" dirty="0"/>
+          </a:p>
+        </p:txBody>
+      </p:sp>
       <p:pic>
         <p:nvPicPr>
-          <p:cNvPr id="20" name="Image 4" descr="preencoded.png">    </p:cNvPr>
+          <p:cNvPr id="44" name="Image 2" descr="preencoded.png">    </p:cNvPr>
+          <p:cNvPicPr>
+            <a:picLocks noChangeAspect="1"/>
+          </p:cNvPicPr>
+          <p:nvPr/>
+        </p:nvPicPr>
+        <p:blipFill>
+          <a:blip r:embed="rId3"/>
+          <a:stretch>
+            <a:fillRect/>
+          </a:stretch>
+        </p:blipFill>
+        <p:spPr>
+          <a:xfrm>
+            <a:off x="7452360" y="2532888"/>
+            <a:ext cx="256032" cy="256032"/>
+          </a:xfrm>
+          <a:prstGeom prst="rect">
+            <a:avLst/>
+          </a:prstGeom>
+        </p:spPr>
+      </p:pic>
+      <p:sp>
+        <p:nvSpPr>
+          <p:cNvPr id="45" name="Text 39"/>
+          <p:cNvSpPr txBox="1"/>
+          <p:nvPr/>
+        </p:nvSpPr>
+        <p:spPr>
+          <a:xfrm>
+            <a:off x="7863840" y="2514600"/>
+            <a:ext cx="3520440" cy="457200"/>
+          </a:xfrm>
+          <a:prstGeom prst="rect">
+            <a:avLst/>
+          </a:prstGeom>
+          <a:noFill/>
+          <a:ln/>
+        </p:spPr>
+        <p:txBody>
+          <a:bodyPr wrap="square" lIns="0" tIns="0" rIns="0" bIns="0" rtlCol="0" anchor="t"/>
+          <a:lstStyle/>
+          <a:p>
+            <a:pPr indent="0" marL="0">
+              <a:buNone/>
+            </a:pPr>
+            <a:r>
+              <a:rPr lang="en-GB" altLang="en-US" sz="1400" dirty="0">
+                <a:solidFill>
+                  <a:schemeClr val="bg1"/>
+                </a:solidFill>
+              </a:rPr>
+              <a:t>Creators chosen for the audiences the festival wants most</a:t>
+            </a:r>
+            <a:endParaRPr lang="en-GB" sz="1400" dirty="0"/>
+          </a:p>
+        </p:txBody>
+      </p:sp>
+      <p:pic>
+        <p:nvPicPr>
+          <p:cNvPr id="46" name="Image 3" descr="preencoded.png">    </p:cNvPr>
+          <p:cNvPicPr>
+            <a:picLocks noChangeAspect="1"/>
+          </p:cNvPicPr>
+          <p:nvPr/>
+        </p:nvPicPr>
+        <p:blipFill>
+          <a:blip r:embed="rId4"/>
+          <a:stretch>
+            <a:fillRect/>
+          </a:stretch>
+        </p:blipFill>
+        <p:spPr>
+          <a:xfrm>
+            <a:off x="7452360" y="3246120"/>
+            <a:ext cx="256032" cy="256032"/>
+          </a:xfrm>
+          <a:prstGeom prst="rect">
+            <a:avLst/>
+          </a:prstGeom>
+        </p:spPr>
+      </p:pic>
+      <p:sp>
+        <p:nvSpPr>
+          <p:cNvPr id="47" name="Text 40"/>
+          <p:cNvSpPr txBox="1"/>
+          <p:nvPr/>
+        </p:nvSpPr>
+        <p:spPr>
+          <a:xfrm>
+            <a:off x="7863840" y="3227832"/>
+            <a:ext cx="3520440" cy="457200"/>
+          </a:xfrm>
+          <a:prstGeom prst="rect">
+            <a:avLst/>
+          </a:prstGeom>
+          <a:noFill/>
+          <a:ln/>
+        </p:spPr>
+        <p:txBody>
+          <a:bodyPr wrap="square" lIns="0" tIns="0" rIns="0" bIns="0" rtlCol="0" anchor="t"/>
+          <a:lstStyle/>
+          <a:p>
+            <a:pPr indent="0" marL="0">
+              <a:buNone/>
+            </a:pPr>
+            <a:r>
+              <a:rPr lang="en-GB" altLang="en-US" sz="1400" dirty="0">
+                <a:solidFill>
+                  <a:schemeClr val="bg1"/>
+                </a:solidFill>
+              </a:rPr>
+              <a:t>Set deliverables and key messages for every creator</a:t>
+            </a:r>
+            <a:endParaRPr lang="en-GB" sz="1400" dirty="0"/>
+          </a:p>
+        </p:txBody>
+      </p:sp>
+      <p:pic>
+        <p:nvPicPr>
+          <p:cNvPr id="48" name="Image 4" descr="preencoded.png">    </p:cNvPr>
           <p:cNvPicPr>
             <a:picLocks noChangeAspect="1"/>
           </p:cNvPicPr>
@@ -5794,8 +6613,8 @@
         </p:blipFill>
         <p:spPr>
           <a:xfrm>
-            <a:off x="943661" y="4372661"/>
-            <a:ext cx="261518" cy="261518"/>
+            <a:off x="7452360" y="3959352"/>
+            <a:ext cx="256032" cy="256032"/>
           </a:xfrm>
           <a:prstGeom prst="rect">
             <a:avLst/>
@@ -5804,14 +6623,14 @@
       </p:pic>
       <p:sp>
         <p:nvSpPr>
-          <p:cNvPr id="21" name="Text 13"/>
-          <p:cNvSpPr txBox="1"/>
-          <p:nvPr/>
-        </p:nvSpPr>
-        <p:spPr>
-          <a:xfrm>
-            <a:off x="822960" y="4873752"/>
-            <a:ext cx="2423160" cy="347472"/>
+          <p:cNvPr id="49" name="Text 41"/>
+          <p:cNvSpPr txBox="1"/>
+          <p:nvPr/>
+        </p:nvSpPr>
+        <p:spPr>
+          <a:xfrm>
+            <a:off x="7863840" y="3941064"/>
+            <a:ext cx="3520440" cy="457200"/>
           </a:xfrm>
           <a:prstGeom prst="rect">
             <a:avLst/>
@@ -5827,115 +6646,20 @@
               <a:buNone/>
             </a:pPr>
             <a:r>
-              <a:rPr lang="en-GB" altLang="en-US" sz="2000" dirty="0">
-                <a:solidFill>
-                  <a:schemeClr val="tx1"/>
-                </a:solidFill>
-                <a:latin typeface="+mj-lt" pitchFamily="34" charset="0"/>
-                <a:ea typeface="+mj-lt" pitchFamily="34" charset="-122"/>
-                <a:cs typeface="+mj-lt" pitchFamily="34" charset="-120"/>
-              </a:rPr>
-              <a:t>Sponsors on board</a:t>
-            </a:r>
-            <a:endParaRPr lang="en-GB" sz="2000" dirty="0"/>
-          </a:p>
-        </p:txBody>
-      </p:sp>
-      <p:sp>
-        <p:nvSpPr>
-          <p:cNvPr id="22" name="Text 14"/>
-          <p:cNvSpPr txBox="1"/>
-          <p:nvPr/>
-        </p:nvSpPr>
-        <p:spPr>
-          <a:xfrm>
-            <a:off x="822960" y="5257800"/>
-            <a:ext cx="2423160" cy="640080"/>
-          </a:xfrm>
-          <a:prstGeom prst="rect">
-            <a:avLst/>
-          </a:prstGeom>
-          <a:noFill/>
-          <a:ln/>
-        </p:spPr>
-        <p:txBody>
-          <a:bodyPr wrap="square" lIns="0" tIns="0" rIns="0" bIns="0" rtlCol="0" anchor="t"/>
-          <a:lstStyle/>
-          <a:p>
-            <a:pPr indent="0" marL="0">
-              <a:buNone/>
-            </a:pPr>
-            <a:r>
-              <a:rPr lang="en-GB" altLang="en-US" sz="1300" dirty="0">
-                <a:solidFill>
-                  <a:schemeClr val="tx2"/>
-                </a:solidFill>
-              </a:rPr>
-              <a:t>Partner brands already back the festival, as the press launch showed.</a:t>
-            </a:r>
-            <a:endParaRPr lang="en-GB" sz="1300" dirty="0"/>
-          </a:p>
-        </p:txBody>
-      </p:sp>
-      <p:sp>
-        <p:nvSpPr>
-          <p:cNvPr id="23" name="Shape 15"/>
-          <p:cNvSpPr/>
-          <p:nvPr/>
-        </p:nvSpPr>
-        <p:spPr>
-          <a:xfrm>
-            <a:off x="3749040" y="3977640"/>
-            <a:ext cx="2971800" cy="1965960"/>
-          </a:xfrm>
-          <a:prstGeom prst="roundRect">
-            <a:avLst>
-              <a:gd name="adj" fmla="val 4651"/>
-            </a:avLst>
-          </a:prstGeom>
-          <a:solidFill>
-            <a:schemeClr val="bg1"/>
-          </a:solidFill>
-          <a:ln w="9525">
-            <a:solidFill>
-              <a:schemeClr val="tx2">
-                <a:alpha val="28000"/>
-              </a:schemeClr>
-            </a:solidFill>
-            <a:prstDash val="solid"/>
-          </a:ln>
-          <a:effectLst>
-            <a:outerShdw sx="100000" sy="100000" kx="0" ky="0" algn="bl" rotWithShape="0" blurRad="127000" dist="38100" dir="5400000">
-              <a:srgbClr val="133524">
-                <a:alpha val="10000"/>
-              </a:srgbClr>
-            </a:outerShdw>
-          </a:effectLst>
-        </p:spPr>
-      </p:sp>
-      <p:sp>
-        <p:nvSpPr>
-          <p:cNvPr id="24" name="Shape 16"/>
-          <p:cNvSpPr/>
-          <p:nvPr/>
-        </p:nvSpPr>
-        <p:spPr>
-          <a:xfrm>
-            <a:off x="4023360" y="4251960"/>
-            <a:ext cx="502920" cy="502920"/>
-          </a:xfrm>
-          <a:prstGeom prst="ellipse">
-            <a:avLst/>
-          </a:prstGeom>
-          <a:solidFill>
-            <a:schemeClr val="accent2"/>
-          </a:solidFill>
-          <a:ln/>
-        </p:spPr>
+              <a:rPr lang="en-GB" altLang="en-US" sz="1400" dirty="0">
+                <a:solidFill>
+                  <a:schemeClr val="bg1"/>
+                </a:solidFill>
+              </a:rPr>
+              <a:t>A clear view of what each creator posts, and when</a:t>
+            </a:r>
+            <a:endParaRPr lang="en-GB" sz="1400" dirty="0"/>
+          </a:p>
+        </p:txBody>
       </p:sp>
       <p:pic>
         <p:nvPicPr>
-          <p:cNvPr id="25" name="Image 5" descr="preencoded.png">    </p:cNvPr>
+          <p:cNvPr id="50" name="Image 5" descr="preencoded.png">    </p:cNvPr>
           <p:cNvPicPr>
             <a:picLocks noChangeAspect="1"/>
           </p:cNvPicPr>
@@ -5949,8 +6673,8 @@
         </p:blipFill>
         <p:spPr>
           <a:xfrm>
-            <a:off x="4144061" y="4372661"/>
-            <a:ext cx="261518" cy="261518"/>
+            <a:off x="7452360" y="4672584"/>
+            <a:ext cx="256032" cy="256032"/>
           </a:xfrm>
           <a:prstGeom prst="rect">
             <a:avLst/>
@@ -5959,14 +6683,14 @@
       </p:pic>
       <p:sp>
         <p:nvSpPr>
-          <p:cNvPr id="26" name="Text 17"/>
-          <p:cNvSpPr txBox="1"/>
-          <p:nvPr/>
-        </p:nvSpPr>
-        <p:spPr>
-          <a:xfrm>
-            <a:off x="4023360" y="4873752"/>
-            <a:ext cx="2423160" cy="347472"/>
+          <p:cNvPr id="51" name="Text 42"/>
+          <p:cNvSpPr txBox="1"/>
+          <p:nvPr/>
+        </p:nvSpPr>
+        <p:spPr>
+          <a:xfrm>
+            <a:off x="7863840" y="4654296"/>
+            <a:ext cx="3520440" cy="457200"/>
           </a:xfrm>
           <a:prstGeom prst="rect">
             <a:avLst/>
@@ -5982,117 +6706,20 @@
               <a:buNone/>
             </a:pPr>
             <a:r>
-              <a:rPr lang="en-GB" altLang="en-US" sz="2000" dirty="0">
-                <a:solidFill>
-                  <a:schemeClr val="tx1"/>
-                </a:solidFill>
-                <a:latin typeface="+mj-lt" pitchFamily="34" charset="0"/>
-                <a:ea typeface="+mj-lt" pitchFamily="34" charset="-122"/>
-                <a:cs typeface="+mj-lt" pitchFamily="34" charset="-120"/>
-              </a:rPr>
-              <a:t>Tickets sold online</a:t>
-            </a:r>
-            <a:endParaRPr lang="en-GB" sz="2000" dirty="0"/>
-          </a:p>
-        </p:txBody>
-      </p:sp>
-      <p:sp>
-        <p:nvSpPr>
-          <p:cNvPr id="27" name="Text 18"/>
-          <p:cNvSpPr txBox="1"/>
-          <p:nvPr/>
-        </p:nvSpPr>
-        <p:spPr>
-          <a:xfrm>
-            <a:off x="4023360" y="5257800"/>
-            <a:ext cx="2423160" cy="640080"/>
-          </a:xfrm>
-          <a:prstGeom prst="rect">
-            <a:avLst/>
-          </a:prstGeom>
-          <a:noFill/>
-          <a:ln/>
-        </p:spPr>
-        <p:txBody>
-          <a:bodyPr wrap="square" lIns="0" tIns="0" rIns="0" bIns="0" rtlCol="0" anchor="t"/>
-          <a:lstStyle/>
-          <a:p>
-            <a:pPr indent="0" marL="0">
-              <a:buNone/>
-            </a:pPr>
-            <a:r>
-              <a:rPr lang="en-GB" altLang="en-US" sz="1300" dirty="0">
-                <a:solidFill>
-                  <a:schemeClr val="tx2"/>
-                </a:solidFill>
-              </a:rPr>
-              <a:t>Sales run online through maf.tikerama.com, ready for tracked links.</a:t>
-            </a:r>
-            <a:endParaRPr lang="en-GB" sz="1300" dirty="0"/>
-          </a:p>
-        </p:txBody>
-      </p:sp>
-      <p:sp>
-        <p:nvSpPr>
-          <p:cNvPr id="28" name="Shape 19"/>
-          <p:cNvSpPr/>
-          <p:nvPr/>
-        </p:nvSpPr>
-        <p:spPr>
-          <a:xfrm>
-            <a:off x="7086600" y="1783080"/>
-            <a:ext cx="4553712" cy="4160520"/>
-          </a:xfrm>
-          <a:prstGeom prst="roundRect">
-            <a:avLst>
-              <a:gd name="adj" fmla="val 2198"/>
-            </a:avLst>
-          </a:prstGeom>
-          <a:solidFill>
-            <a:schemeClr val="tx1"/>
-          </a:solidFill>
-          <a:ln/>
-        </p:spPr>
-      </p:sp>
-      <p:sp>
-        <p:nvSpPr>
-          <p:cNvPr id="29" name="Text 20"/>
-          <p:cNvSpPr txBox="1"/>
-          <p:nvPr/>
-        </p:nvSpPr>
-        <p:spPr>
-          <a:xfrm>
-            <a:off x="7360920" y="2029968"/>
-            <a:ext cx="4023360" cy="256032"/>
-          </a:xfrm>
-          <a:prstGeom prst="rect">
-            <a:avLst/>
-          </a:prstGeom>
-          <a:noFill/>
-          <a:ln/>
-        </p:spPr>
-        <p:txBody>
-          <a:bodyPr wrap="square" lIns="0" tIns="0" rIns="0" bIns="0" rtlCol="0" anchor="t"/>
-          <a:lstStyle/>
-          <a:p>
-            <a:pPr indent="0" marL="0">
-              <a:buNone/>
-            </a:pPr>
-            <a:r>
-              <a:rPr lang="en-GB" altLang="en-US" sz="1100" b="1" spc="300" kern="0" dirty="0">
-                <a:solidFill>
-                  <a:schemeClr val="accent1"/>
-                </a:solidFill>
-              </a:rPr>
-              <a:t>WHAT THE 5TH EDITION NEEDS</a:t>
-            </a:r>
-            <a:endParaRPr lang="en-GB" sz="1100" dirty="0"/>
+              <a:rPr lang="en-GB" altLang="en-US" sz="1400" dirty="0">
+                <a:solidFill>
+                  <a:schemeClr val="bg1"/>
+                </a:solidFill>
+              </a:rPr>
+              <a:t>Sponsor visibility the festival can prove, partner by partner</a:t>
+            </a:r>
+            <a:endParaRPr lang="en-GB" sz="1400" dirty="0"/>
           </a:p>
         </p:txBody>
       </p:sp>
       <p:pic>
         <p:nvPicPr>
-          <p:cNvPr id="30" name="Image 6" descr="preencoded.png">    </p:cNvPr>
+          <p:cNvPr id="52" name="Image 6" descr="preencoded.png">    </p:cNvPr>
           <p:cNvPicPr>
             <a:picLocks noChangeAspect="1"/>
           </p:cNvPicPr>
@@ -6106,7 +6733,7 @@
         </p:blipFill>
         <p:spPr>
           <a:xfrm>
-            <a:off x="7360920" y="2505456"/>
+            <a:off x="7452360" y="5385816"/>
             <a:ext cx="256032" cy="256032"/>
           </a:xfrm>
           <a:prstGeom prst="rect">
@@ -6116,254 +6743,14 @@
       </p:pic>
       <p:sp>
         <p:nvSpPr>
-          <p:cNvPr id="31" name="Text 21"/>
-          <p:cNvSpPr txBox="1"/>
-          <p:nvPr/>
-        </p:nvSpPr>
-        <p:spPr>
-          <a:xfrm>
-            <a:off x="7772400" y="2487168"/>
-            <a:ext cx="3611880" cy="457200"/>
-          </a:xfrm>
-          <a:prstGeom prst="rect">
-            <a:avLst/>
-          </a:prstGeom>
-          <a:noFill/>
-          <a:ln/>
-        </p:spPr>
-        <p:txBody>
-          <a:bodyPr wrap="square" lIns="0" tIns="0" rIns="0" bIns="0" rtlCol="0" anchor="t"/>
-          <a:lstStyle/>
-          <a:p>
-            <a:pPr indent="0" marL="0">
-              <a:buNone/>
-            </a:pPr>
-            <a:r>
-              <a:rPr lang="en-GB" altLang="en-US" sz="1400" dirty="0">
-                <a:solidFill>
-                  <a:schemeClr val="bg1"/>
-                </a:solidFill>
-              </a:rPr>
-              <a:t>Creators chosen for the audiences the festival wants most</a:t>
-            </a:r>
-            <a:endParaRPr lang="en-GB" sz="1400" dirty="0"/>
-          </a:p>
-        </p:txBody>
-      </p:sp>
-      <p:pic>
-        <p:nvPicPr>
-          <p:cNvPr id="32" name="Image 7" descr="preencoded.png">    </p:cNvPr>
-          <p:cNvPicPr>
-            <a:picLocks noChangeAspect="1"/>
-          </p:cNvPicPr>
-          <p:nvPr/>
-        </p:nvPicPr>
-        <p:blipFill>
-          <a:blip r:embed="rId8"/>
-          <a:stretch>
-            <a:fillRect/>
-          </a:stretch>
-        </p:blipFill>
-        <p:spPr>
-          <a:xfrm>
-            <a:off x="7360920" y="3191256"/>
-            <a:ext cx="256032" cy="256032"/>
-          </a:xfrm>
-          <a:prstGeom prst="rect">
-            <a:avLst/>
-          </a:prstGeom>
-        </p:spPr>
-      </p:pic>
-      <p:sp>
-        <p:nvSpPr>
-          <p:cNvPr id="33" name="Text 22"/>
-          <p:cNvSpPr txBox="1"/>
-          <p:nvPr/>
-        </p:nvSpPr>
-        <p:spPr>
-          <a:xfrm>
-            <a:off x="7772400" y="3172968"/>
-            <a:ext cx="3611880" cy="457200"/>
-          </a:xfrm>
-          <a:prstGeom prst="rect">
-            <a:avLst/>
-          </a:prstGeom>
-          <a:noFill/>
-          <a:ln/>
-        </p:spPr>
-        <p:txBody>
-          <a:bodyPr wrap="square" lIns="0" tIns="0" rIns="0" bIns="0" rtlCol="0" anchor="t"/>
-          <a:lstStyle/>
-          <a:p>
-            <a:pPr indent="0" marL="0">
-              <a:buNone/>
-            </a:pPr>
-            <a:r>
-              <a:rPr lang="en-GB" altLang="en-US" sz="1400" dirty="0">
-                <a:solidFill>
-                  <a:schemeClr val="bg1"/>
-                </a:solidFill>
-              </a:rPr>
-              <a:t>Set deliverables and key messages for every creator</a:t>
-            </a:r>
-            <a:endParaRPr lang="en-GB" sz="1400" dirty="0"/>
-          </a:p>
-        </p:txBody>
-      </p:sp>
-      <p:pic>
-        <p:nvPicPr>
-          <p:cNvPr id="34" name="Image 8" descr="preencoded.png">    </p:cNvPr>
-          <p:cNvPicPr>
-            <a:picLocks noChangeAspect="1"/>
-          </p:cNvPicPr>
-          <p:nvPr/>
-        </p:nvPicPr>
-        <p:blipFill>
-          <a:blip r:embed="rId9"/>
-          <a:stretch>
-            <a:fillRect/>
-          </a:stretch>
-        </p:blipFill>
-        <p:spPr>
-          <a:xfrm>
-            <a:off x="7360920" y="3877056"/>
-            <a:ext cx="256032" cy="256032"/>
-          </a:xfrm>
-          <a:prstGeom prst="rect">
-            <a:avLst/>
-          </a:prstGeom>
-        </p:spPr>
-      </p:pic>
-      <p:sp>
-        <p:nvSpPr>
-          <p:cNvPr id="35" name="Text 23"/>
-          <p:cNvSpPr txBox="1"/>
-          <p:nvPr/>
-        </p:nvSpPr>
-        <p:spPr>
-          <a:xfrm>
-            <a:off x="7772400" y="3858768"/>
-            <a:ext cx="3611880" cy="457200"/>
-          </a:xfrm>
-          <a:prstGeom prst="rect">
-            <a:avLst/>
-          </a:prstGeom>
-          <a:noFill/>
-          <a:ln/>
-        </p:spPr>
-        <p:txBody>
-          <a:bodyPr wrap="square" lIns="0" tIns="0" rIns="0" bIns="0" rtlCol="0" anchor="t"/>
-          <a:lstStyle/>
-          <a:p>
-            <a:pPr indent="0" marL="0">
-              <a:buNone/>
-            </a:pPr>
-            <a:r>
-              <a:rPr lang="en-GB" altLang="en-US" sz="1400" dirty="0">
-                <a:solidFill>
-                  <a:schemeClr val="bg1"/>
-                </a:solidFill>
-              </a:rPr>
-              <a:t>A clear view of what each creator posts, and when</a:t>
-            </a:r>
-            <a:endParaRPr lang="en-GB" sz="1400" dirty="0"/>
-          </a:p>
-        </p:txBody>
-      </p:sp>
-      <p:pic>
-        <p:nvPicPr>
-          <p:cNvPr id="36" name="Image 9" descr="preencoded.png">    </p:cNvPr>
-          <p:cNvPicPr>
-            <a:picLocks noChangeAspect="1"/>
-          </p:cNvPicPr>
-          <p:nvPr/>
-        </p:nvPicPr>
-        <p:blipFill>
-          <a:blip r:embed="rId10"/>
-          <a:stretch>
-            <a:fillRect/>
-          </a:stretch>
-        </p:blipFill>
-        <p:spPr>
-          <a:xfrm>
-            <a:off x="7360920" y="4562856"/>
-            <a:ext cx="256032" cy="256032"/>
-          </a:xfrm>
-          <a:prstGeom prst="rect">
-            <a:avLst/>
-          </a:prstGeom>
-        </p:spPr>
-      </p:pic>
-      <p:sp>
-        <p:nvSpPr>
-          <p:cNvPr id="37" name="Text 24"/>
-          <p:cNvSpPr txBox="1"/>
-          <p:nvPr/>
-        </p:nvSpPr>
-        <p:spPr>
-          <a:xfrm>
-            <a:off x="7772400" y="4544568"/>
-            <a:ext cx="3611880" cy="457200"/>
-          </a:xfrm>
-          <a:prstGeom prst="rect">
-            <a:avLst/>
-          </a:prstGeom>
-          <a:noFill/>
-          <a:ln/>
-        </p:spPr>
-        <p:txBody>
-          <a:bodyPr wrap="square" lIns="0" tIns="0" rIns="0" bIns="0" rtlCol="0" anchor="t"/>
-          <a:lstStyle/>
-          <a:p>
-            <a:pPr indent="0" marL="0">
-              <a:buNone/>
-            </a:pPr>
-            <a:r>
-              <a:rPr lang="en-GB" altLang="en-US" sz="1400" dirty="0">
-                <a:solidFill>
-                  <a:schemeClr val="bg1"/>
-                </a:solidFill>
-              </a:rPr>
-              <a:t>Sponsor visibility the festival can prove, partner by partner</a:t>
-            </a:r>
-            <a:endParaRPr lang="en-GB" sz="1400" dirty="0"/>
-          </a:p>
-        </p:txBody>
-      </p:sp>
-      <p:pic>
-        <p:nvPicPr>
-          <p:cNvPr id="38" name="Image 10" descr="preencoded.png">    </p:cNvPr>
-          <p:cNvPicPr>
-            <a:picLocks noChangeAspect="1"/>
-          </p:cNvPicPr>
-          <p:nvPr/>
-        </p:nvPicPr>
-        <p:blipFill>
-          <a:blip r:embed="rId11"/>
-          <a:stretch>
-            <a:fillRect/>
-          </a:stretch>
-        </p:blipFill>
-        <p:spPr>
-          <a:xfrm>
-            <a:off x="7360920" y="5248656"/>
-            <a:ext cx="256032" cy="256032"/>
-          </a:xfrm>
-          <a:prstGeom prst="rect">
-            <a:avLst/>
-          </a:prstGeom>
-        </p:spPr>
-      </p:pic>
-      <p:sp>
-        <p:nvSpPr>
-          <p:cNvPr id="39" name="Text 25"/>
-          <p:cNvSpPr txBox="1"/>
-          <p:nvPr/>
-        </p:nvSpPr>
-        <p:spPr>
-          <a:xfrm>
-            <a:off x="7772400" y="5230368"/>
-            <a:ext cx="3611880" cy="457200"/>
+          <p:cNvPr id="53" name="Text 43"/>
+          <p:cNvSpPr txBox="1"/>
+          <p:nvPr/>
+        </p:nvSpPr>
+        <p:spPr>
+          <a:xfrm>
+            <a:off x="7863840" y="5367528"/>
+            <a:ext cx="3520440" cy="457200"/>
           </a:xfrm>
           <a:prstGeom prst="rect">
             <a:avLst/>
@@ -11666,7 +12053,7 @@
         <p:spPr>
           <a:xfrm>
             <a:off x="548640" y="1783080"/>
-            <a:ext cx="4297680" cy="2697480"/>
+            <a:ext cx="3657600" cy="2295728"/>
           </a:xfrm>
           <a:prstGeom prst="rect">
             <a:avLst/>
@@ -11681,7 +12068,7 @@
         </p:nvSpPr>
         <p:spPr>
           <a:xfrm>
-            <a:off x="685800" y="4050792"/>
+            <a:off x="658368" y="3676472"/>
             <a:ext cx="2598725" cy="292608"/>
           </a:xfrm>
           <a:prstGeom prst="roundRect">
@@ -11705,7 +12092,7 @@
         </p:nvSpPr>
         <p:spPr>
           <a:xfrm>
-            <a:off x="685800" y="4050792"/>
+            <a:off x="658368" y="3676472"/>
             <a:ext cx="2598725" cy="292608"/>
           </a:xfrm>
           <a:prstGeom prst="rect">
@@ -11735,53 +12122,14 @@
       </p:sp>
       <p:sp>
         <p:nvSpPr>
-          <p:cNvPr id="11" name="Text 5"/>
-          <p:cNvSpPr txBox="1"/>
-          <p:nvPr/>
-        </p:nvSpPr>
-        <p:spPr>
-          <a:xfrm>
-            <a:off x="548640" y="4709160"/>
-            <a:ext cx="4297680" cy="822960"/>
-          </a:xfrm>
-          <a:prstGeom prst="rect">
-            <a:avLst/>
-          </a:prstGeom>
-          <a:noFill/>
-          <a:ln/>
-        </p:spPr>
-        <p:txBody>
-          <a:bodyPr wrap="square" lIns="0" tIns="0" rIns="0" bIns="0" rtlCol="0" anchor="t"/>
-          <a:lstStyle/>
-          <a:p>
-            <a:pPr indent="0" marL="0">
-              <a:buNone/>
-            </a:pPr>
-            <a:r>
-              <a:rPr lang="en-GB" altLang="en-US" sz="2000" dirty="0">
-                <a:solidFill>
-                  <a:schemeClr val="accent3"/>
-                </a:solidFill>
-                <a:latin typeface="+mj-lt" pitchFamily="34" charset="0"/>
-                <a:ea typeface="+mj-lt" pitchFamily="34" charset="-122"/>
-                <a:cs typeface="+mj-lt" pitchFamily="34" charset="-120"/>
-              </a:rPr>
-              <a:t>Sponsors buy proven visibility. The report is how the festival proves it.</a:t>
-            </a:r>
-            <a:endParaRPr lang="en-GB" sz="2000" dirty="0"/>
-          </a:p>
-        </p:txBody>
-      </p:sp>
-      <p:sp>
-        <p:nvSpPr>
-          <p:cNvPr id="12" name="Shape 6"/>
+          <p:cNvPr id="11" name="Shape 5"/>
           <p:cNvSpPr/>
           <p:nvPr/>
         </p:nvSpPr>
         <p:spPr>
           <a:xfrm>
-            <a:off x="5349240" y="1783080"/>
-            <a:ext cx="502920" cy="502920"/>
+            <a:off x="4526280" y="1783080"/>
+            <a:ext cx="457200" cy="457200"/>
           </a:xfrm>
           <a:prstGeom prst="ellipse">
             <a:avLst/>
@@ -11794,7 +12142,7 @@
       </p:sp>
       <p:pic>
         <p:nvPicPr>
-          <p:cNvPr id="13" name="Image 3" descr="preencoded.png">    </p:cNvPr>
+          <p:cNvPr id="12" name="Image 3" descr="preencoded.png">    </p:cNvPr>
           <p:cNvPicPr>
             <a:picLocks noChangeAspect="1"/>
           </p:cNvPicPr>
@@ -11808,8 +12156,8 @@
         </p:blipFill>
         <p:spPr>
           <a:xfrm>
-            <a:off x="5469941" y="1903781"/>
-            <a:ext cx="261518" cy="261518"/>
+            <a:off x="4636008" y="1892808"/>
+            <a:ext cx="237744" cy="237744"/>
           </a:xfrm>
           <a:prstGeom prst="rect">
             <a:avLst/>
@@ -11818,14 +12166,14 @@
       </p:pic>
       <p:sp>
         <p:nvSpPr>
-          <p:cNvPr id="14" name="Text 7"/>
-          <p:cNvSpPr txBox="1"/>
-          <p:nvPr/>
-        </p:nvSpPr>
-        <p:spPr>
-          <a:xfrm>
-            <a:off x="6080760" y="1764792"/>
-            <a:ext cx="5532120" cy="347472"/>
+          <p:cNvPr id="13" name="Text 6"/>
+          <p:cNvSpPr txBox="1"/>
+          <p:nvPr/>
+        </p:nvSpPr>
+        <p:spPr>
+          <a:xfrm>
+            <a:off x="5120640" y="1755648"/>
+            <a:ext cx="2834640" cy="329184"/>
           </a:xfrm>
           <a:prstGeom prst="rect">
             <a:avLst/>
@@ -11841,7 +12189,7 @@
               <a:buNone/>
             </a:pPr>
             <a:r>
-              <a:rPr lang="en-GB" altLang="en-US" sz="2000" dirty="0">
+              <a:rPr lang="en-GB" altLang="en-US" sz="1800" dirty="0">
                 <a:solidFill>
                   <a:schemeClr val="tx1"/>
                 </a:solidFill>
@@ -11851,20 +12199,20 @@
               </a:rPr>
               <a:t>Written into every brief</a:t>
             </a:r>
-            <a:endParaRPr lang="en-GB" sz="2000" dirty="0"/>
-          </a:p>
-        </p:txBody>
-      </p:sp>
-      <p:sp>
-        <p:nvSpPr>
-          <p:cNvPr id="15" name="Text 8"/>
-          <p:cNvSpPr txBox="1"/>
-          <p:nvPr/>
-        </p:nvSpPr>
-        <p:spPr>
-          <a:xfrm>
-            <a:off x="6080760" y="2130552"/>
-            <a:ext cx="5532120" cy="457200"/>
+            <a:endParaRPr lang="en-GB" sz="1800" dirty="0"/>
+          </a:p>
+        </p:txBody>
+      </p:sp>
+      <p:sp>
+        <p:nvSpPr>
+          <p:cNvPr id="14" name="Text 7"/>
+          <p:cNvSpPr txBox="1"/>
+          <p:nvPr/>
+        </p:nvSpPr>
+        <p:spPr>
+          <a:xfrm>
+            <a:off x="5120640" y="2112264"/>
+            <a:ext cx="2834640" cy="685800"/>
           </a:xfrm>
           <a:prstGeom prst="rect">
             <a:avLst/>
@@ -11880,27 +12228,27 @@
               <a:buNone/>
             </a:pPr>
             <a:r>
-              <a:rPr lang="en-GB" altLang="en-US" sz="1400" dirty="0">
+              <a:rPr lang="en-GB" altLang="en-US" sz="1250" dirty="0">
                 <a:solidFill>
                   <a:schemeClr val="tx2"/>
                 </a:solidFill>
               </a:rPr>
               <a:t>Sponsor mentions agreed in advance, so partners appear naturally.</a:t>
             </a:r>
-            <a:endParaRPr lang="en-GB" sz="1400" dirty="0"/>
-          </a:p>
-        </p:txBody>
-      </p:sp>
-      <p:sp>
-        <p:nvSpPr>
-          <p:cNvPr id="16" name="Shape 9"/>
+            <a:endParaRPr lang="en-GB" sz="1250" dirty="0"/>
+          </a:p>
+        </p:txBody>
+      </p:sp>
+      <p:sp>
+        <p:nvSpPr>
+          <p:cNvPr id="15" name="Shape 8"/>
           <p:cNvSpPr/>
           <p:nvPr/>
         </p:nvSpPr>
         <p:spPr>
           <a:xfrm>
-            <a:off x="5349240" y="2807208"/>
-            <a:ext cx="502920" cy="502920"/>
+            <a:off x="8129016" y="1783080"/>
+            <a:ext cx="457200" cy="457200"/>
           </a:xfrm>
           <a:prstGeom prst="ellipse">
             <a:avLst/>
@@ -11913,7 +12261,7 @@
       </p:sp>
       <p:pic>
         <p:nvPicPr>
-          <p:cNvPr id="17" name="Image 4" descr="preencoded.png">    </p:cNvPr>
+          <p:cNvPr id="16" name="Image 4" descr="preencoded.png">    </p:cNvPr>
           <p:cNvPicPr>
             <a:picLocks noChangeAspect="1"/>
           </p:cNvPicPr>
@@ -11927,8 +12275,8 @@
         </p:blipFill>
         <p:spPr>
           <a:xfrm>
-            <a:off x="5469941" y="2927909"/>
-            <a:ext cx="261518" cy="261518"/>
+            <a:off x="8238744" y="1892808"/>
+            <a:ext cx="237744" cy="237744"/>
           </a:xfrm>
           <a:prstGeom prst="rect">
             <a:avLst/>
@@ -11937,14 +12285,14 @@
       </p:pic>
       <p:sp>
         <p:nvSpPr>
-          <p:cNvPr id="18" name="Text 10"/>
-          <p:cNvSpPr txBox="1"/>
-          <p:nvPr/>
-        </p:nvSpPr>
-        <p:spPr>
-          <a:xfrm>
-            <a:off x="6080760" y="2788920"/>
-            <a:ext cx="5532120" cy="347472"/>
+          <p:cNvPr id="17" name="Text 9"/>
+          <p:cNvSpPr txBox="1"/>
+          <p:nvPr/>
+        </p:nvSpPr>
+        <p:spPr>
+          <a:xfrm>
+            <a:off x="8723376" y="1755648"/>
+            <a:ext cx="2834640" cy="329184"/>
           </a:xfrm>
           <a:prstGeom prst="rect">
             <a:avLst/>
@@ -11960,7 +12308,7 @@
               <a:buNone/>
             </a:pPr>
             <a:r>
-              <a:rPr lang="en-GB" altLang="en-US" sz="2000" dirty="0">
+              <a:rPr lang="en-GB" altLang="en-US" sz="1800" dirty="0">
                 <a:solidFill>
                   <a:schemeClr val="tx1"/>
                 </a:solidFill>
@@ -11970,20 +12318,20 @@
               </a:rPr>
               <a:t>Branding in shot</a:t>
             </a:r>
-            <a:endParaRPr lang="en-GB" sz="2000" dirty="0"/>
-          </a:p>
-        </p:txBody>
-      </p:sp>
-      <p:sp>
-        <p:nvSpPr>
-          <p:cNvPr id="19" name="Text 11"/>
-          <p:cNvSpPr txBox="1"/>
-          <p:nvPr/>
-        </p:nvSpPr>
-        <p:spPr>
-          <a:xfrm>
-            <a:off x="6080760" y="3154680"/>
-            <a:ext cx="5532120" cy="457200"/>
+            <a:endParaRPr lang="en-GB" sz="1800" dirty="0"/>
+          </a:p>
+        </p:txBody>
+      </p:sp>
+      <p:sp>
+        <p:nvSpPr>
+          <p:cNvPr id="18" name="Text 10"/>
+          <p:cNvSpPr txBox="1"/>
+          <p:nvPr/>
+        </p:nvSpPr>
+        <p:spPr>
+          <a:xfrm>
+            <a:off x="8723376" y="2112264"/>
+            <a:ext cx="2834640" cy="685800"/>
           </a:xfrm>
           <a:prstGeom prst="rect">
             <a:avLst/>
@@ -11999,27 +12347,27 @@
               <a:buNone/>
             </a:pPr>
             <a:r>
-              <a:rPr lang="en-GB" altLang="en-US" sz="1400" dirty="0">
+              <a:rPr lang="en-GB" altLang="en-US" sz="1250" dirty="0">
                 <a:solidFill>
                   <a:schemeClr val="tx2"/>
                 </a:solidFill>
               </a:rPr>
               <a:t>Creators guided to every activation and stage banner on both nights.</a:t>
             </a:r>
-            <a:endParaRPr lang="en-GB" sz="1400" dirty="0"/>
-          </a:p>
-        </p:txBody>
-      </p:sp>
-      <p:sp>
-        <p:nvSpPr>
-          <p:cNvPr id="20" name="Shape 12"/>
+            <a:endParaRPr lang="en-GB" sz="1250" dirty="0"/>
+          </a:p>
+        </p:txBody>
+      </p:sp>
+      <p:sp>
+        <p:nvSpPr>
+          <p:cNvPr id="19" name="Shape 11"/>
           <p:cNvSpPr/>
           <p:nvPr/>
         </p:nvSpPr>
         <p:spPr>
           <a:xfrm>
-            <a:off x="5349240" y="3831336"/>
-            <a:ext cx="502920" cy="502920"/>
+            <a:off x="4526280" y="2971800"/>
+            <a:ext cx="457200" cy="457200"/>
           </a:xfrm>
           <a:prstGeom prst="ellipse">
             <a:avLst/>
@@ -12032,7 +12380,7 @@
       </p:sp>
       <p:pic>
         <p:nvPicPr>
-          <p:cNvPr id="21" name="Image 5" descr="preencoded.png">    </p:cNvPr>
+          <p:cNvPr id="20" name="Image 5" descr="preencoded.png">    </p:cNvPr>
           <p:cNvPicPr>
             <a:picLocks noChangeAspect="1"/>
           </p:cNvPicPr>
@@ -12046,8 +12394,8 @@
         </p:blipFill>
         <p:spPr>
           <a:xfrm>
-            <a:off x="5469941" y="3952037"/>
-            <a:ext cx="261518" cy="261518"/>
+            <a:off x="4636008" y="3081528"/>
+            <a:ext cx="237744" cy="237744"/>
           </a:xfrm>
           <a:prstGeom prst="rect">
             <a:avLst/>
@@ -12056,14 +12404,14 @@
       </p:pic>
       <p:sp>
         <p:nvSpPr>
-          <p:cNvPr id="22" name="Text 13"/>
-          <p:cNvSpPr txBox="1"/>
-          <p:nvPr/>
-        </p:nvSpPr>
-        <p:spPr>
-          <a:xfrm>
-            <a:off x="6080760" y="3813048"/>
-            <a:ext cx="5532120" cy="347472"/>
+          <p:cNvPr id="21" name="Text 12"/>
+          <p:cNvSpPr txBox="1"/>
+          <p:nvPr/>
+        </p:nvSpPr>
+        <p:spPr>
+          <a:xfrm>
+            <a:off x="5120640" y="2944368"/>
+            <a:ext cx="2834640" cy="329184"/>
           </a:xfrm>
           <a:prstGeom prst="rect">
             <a:avLst/>
@@ -12079,7 +12427,7 @@
               <a:buNone/>
             </a:pPr>
             <a:r>
-              <a:rPr lang="en-GB" altLang="en-US" sz="2000" dirty="0">
+              <a:rPr lang="en-GB" altLang="en-US" sz="1800" dirty="0">
                 <a:solidFill>
                   <a:schemeClr val="tx1"/>
                 </a:solidFill>
@@ -12087,22 +12435,22 @@
                 <a:ea typeface="+mj-lt" pitchFamily="34" charset="-122"/>
                 <a:cs typeface="+mj-lt" pitchFamily="34" charset="-120"/>
               </a:rPr>
-              <a:t>A page per sponsor in the report</a:t>
-            </a:r>
-            <a:endParaRPr lang="en-GB" sz="2000" dirty="0"/>
-          </a:p>
-        </p:txBody>
-      </p:sp>
-      <p:sp>
-        <p:nvSpPr>
-          <p:cNvPr id="23" name="Text 14"/>
-          <p:cNvSpPr txBox="1"/>
-          <p:nvPr/>
-        </p:nvSpPr>
-        <p:spPr>
-          <a:xfrm>
-            <a:off x="6080760" y="4178808"/>
-            <a:ext cx="5532120" cy="457200"/>
+              <a:t>A page per sponsor</a:t>
+            </a:r>
+            <a:endParaRPr lang="en-GB" sz="1800" dirty="0"/>
+          </a:p>
+        </p:txBody>
+      </p:sp>
+      <p:sp>
+        <p:nvSpPr>
+          <p:cNvPr id="22" name="Text 13"/>
+          <p:cNvSpPr txBox="1"/>
+          <p:nvPr/>
+        </p:nvSpPr>
+        <p:spPr>
+          <a:xfrm>
+            <a:off x="5120640" y="3300984"/>
+            <a:ext cx="2834640" cy="685800"/>
           </a:xfrm>
           <a:prstGeom prst="rect">
             <a:avLst/>
@@ -12118,27 +12466,27 @@
               <a:buNone/>
             </a:pPr>
             <a:r>
-              <a:rPr lang="en-GB" altLang="en-US" sz="1400" dirty="0">
+              <a:rPr lang="en-GB" altLang="en-US" sz="1250" dirty="0">
                 <a:solidFill>
                   <a:schemeClr val="tx2"/>
                 </a:solidFill>
               </a:rPr>
               <a:t>Posts, views, screen time and a media value, clearly labelled as estimated.</a:t>
             </a:r>
-            <a:endParaRPr lang="en-GB" sz="1400" dirty="0"/>
-          </a:p>
-        </p:txBody>
-      </p:sp>
-      <p:sp>
-        <p:nvSpPr>
-          <p:cNvPr id="24" name="Shape 15"/>
+            <a:endParaRPr lang="en-GB" sz="1250" dirty="0"/>
+          </a:p>
+        </p:txBody>
+      </p:sp>
+      <p:sp>
+        <p:nvSpPr>
+          <p:cNvPr id="23" name="Shape 14"/>
           <p:cNvSpPr/>
           <p:nvPr/>
         </p:nvSpPr>
         <p:spPr>
           <a:xfrm>
-            <a:off x="5349240" y="4855464"/>
-            <a:ext cx="502920" cy="502920"/>
+            <a:off x="8129016" y="2971800"/>
+            <a:ext cx="457200" cy="457200"/>
           </a:xfrm>
           <a:prstGeom prst="ellipse">
             <a:avLst/>
@@ -12151,7 +12499,7 @@
       </p:sp>
       <p:pic>
         <p:nvPicPr>
-          <p:cNvPr id="25" name="Image 6" descr="preencoded.png">    </p:cNvPr>
+          <p:cNvPr id="24" name="Image 6" descr="preencoded.png">    </p:cNvPr>
           <p:cNvPicPr>
             <a:picLocks noChangeAspect="1"/>
           </p:cNvPicPr>
@@ -12165,8 +12513,8 @@
         </p:blipFill>
         <p:spPr>
           <a:xfrm>
-            <a:off x="5469941" y="4976165"/>
-            <a:ext cx="261518" cy="261518"/>
+            <a:off x="8238744" y="3081528"/>
+            <a:ext cx="237744" cy="237744"/>
           </a:xfrm>
           <a:prstGeom prst="rect">
             <a:avLst/>
@@ -12175,14 +12523,14 @@
       </p:pic>
       <p:sp>
         <p:nvSpPr>
-          <p:cNvPr id="26" name="Text 16"/>
-          <p:cNvSpPr txBox="1"/>
-          <p:nvPr/>
-        </p:nvSpPr>
-        <p:spPr>
-          <a:xfrm>
-            <a:off x="6080760" y="4837176"/>
-            <a:ext cx="5532120" cy="347472"/>
+          <p:cNvPr id="25" name="Text 15"/>
+          <p:cNvSpPr txBox="1"/>
+          <p:nvPr/>
+        </p:nvSpPr>
+        <p:spPr>
+          <a:xfrm>
+            <a:off x="8723376" y="2944368"/>
+            <a:ext cx="2834640" cy="329184"/>
           </a:xfrm>
           <a:prstGeom prst="rect">
             <a:avLst/>
@@ -12198,7 +12546,7 @@
               <a:buNone/>
             </a:pPr>
             <a:r>
-              <a:rPr lang="en-GB" altLang="en-US" sz="2000" dirty="0">
+              <a:rPr lang="en-GB" altLang="en-US" sz="1800" dirty="0">
                 <a:solidFill>
                   <a:schemeClr val="tx1"/>
                 </a:solidFill>
@@ -12206,22 +12554,22 @@
                 <a:ea typeface="+mj-lt" pitchFamily="34" charset="-122"/>
                 <a:cs typeface="+mj-lt" pitchFamily="34" charset="-120"/>
               </a:rPr>
-              <a:t>Content the partners can reuse</a:t>
-            </a:r>
-            <a:endParaRPr lang="en-GB" sz="2000" dirty="0"/>
-          </a:p>
-        </p:txBody>
-      </p:sp>
-      <p:sp>
-        <p:nvSpPr>
-          <p:cNvPr id="27" name="Text 17"/>
-          <p:cNvSpPr txBox="1"/>
-          <p:nvPr/>
-        </p:nvSpPr>
-        <p:spPr>
-          <a:xfrm>
-            <a:off x="6080760" y="5202936"/>
-            <a:ext cx="5532120" cy="457200"/>
+              <a:t>Reusable content</a:t>
+            </a:r>
+            <a:endParaRPr lang="en-GB" sz="1800" dirty="0"/>
+          </a:p>
+        </p:txBody>
+      </p:sp>
+      <p:sp>
+        <p:nvSpPr>
+          <p:cNvPr id="26" name="Text 16"/>
+          <p:cNvSpPr txBox="1"/>
+          <p:nvPr/>
+        </p:nvSpPr>
+        <p:spPr>
+          <a:xfrm>
+            <a:off x="8723376" y="3300984"/>
+            <a:ext cx="2834640" cy="685800"/>
           </a:xfrm>
           <a:prstGeom prst="rect">
             <a:avLst/>
@@ -12237,14 +12585,481 @@
               <a:buNone/>
             </a:pPr>
             <a:r>
-              <a:rPr lang="en-GB" altLang="en-US" sz="1400" dirty="0">
+              <a:rPr lang="en-GB" altLang="en-US" sz="1250" dirty="0">
                 <a:solidFill>
                   <a:schemeClr val="tx2"/>
                 </a:solidFill>
               </a:rPr>
               <a:t>The festival and its sponsors can share the best pieces again.</a:t>
             </a:r>
-            <a:endParaRPr lang="en-GB" sz="1400" dirty="0"/>
+            <a:endParaRPr lang="en-GB" sz="1250" dirty="0"/>
+          </a:p>
+        </p:txBody>
+      </p:sp>
+      <p:sp>
+        <p:nvSpPr>
+          <p:cNvPr id="27" name="Shape 17"/>
+          <p:cNvSpPr/>
+          <p:nvPr/>
+        </p:nvSpPr>
+        <p:spPr>
+          <a:xfrm>
+            <a:off x="548640" y="4343400"/>
+            <a:ext cx="11094415" cy="1737360"/>
+          </a:xfrm>
+          <a:prstGeom prst="roundRect">
+            <a:avLst>
+              <a:gd name="adj" fmla="val 4211"/>
+            </a:avLst>
+          </a:prstGeom>
+          <a:solidFill>
+            <a:schemeClr val="tx1"/>
+          </a:solidFill>
+          <a:ln w="22225">
+            <a:solidFill>
+              <a:schemeClr val="accent1"/>
+            </a:solidFill>
+            <a:prstDash val="solid"/>
+          </a:ln>
+          <a:effectLst>
+            <a:outerShdw sx="100000" sy="100000" kx="0" ky="0" algn="bl" rotWithShape="0" blurRad="228600" dist="50800" dir="5400000">
+              <a:srgbClr val="C8A951">
+                <a:alpha val="30000"/>
+              </a:srgbClr>
+            </a:outerShdw>
+          </a:effectLst>
+        </p:spPr>
+      </p:sp>
+      <p:sp>
+        <p:nvSpPr>
+          <p:cNvPr id="28" name="Text 18"/>
+          <p:cNvSpPr txBox="1"/>
+          <p:nvPr/>
+        </p:nvSpPr>
+        <p:spPr>
+          <a:xfrm>
+            <a:off x="822960" y="4544568"/>
+            <a:ext cx="3108960" cy="365760"/>
+          </a:xfrm>
+          <a:prstGeom prst="rect">
+            <a:avLst/>
+          </a:prstGeom>
+          <a:noFill/>
+          <a:ln/>
+        </p:spPr>
+        <p:txBody>
+          <a:bodyPr wrap="square" lIns="0" tIns="0" rIns="0" bIns="0" rtlCol="0" anchor="ctr"/>
+          <a:lstStyle/>
+          <a:p>
+            <a:pPr indent="0" marL="0">
+              <a:buNone/>
+            </a:pPr>
+            <a:r>
+              <a:rPr lang="en-GB" altLang="en-US" sz="1700" b="1" spc="100" kern="0" dirty="0">
+                <a:solidFill>
+                  <a:schemeClr val="accent1"/>
+                </a:solidFill>
+              </a:rPr>
+              <a:t>THE REVENUE MODEL</a:t>
+            </a:r>
+            <a:endParaRPr lang="en-GB" sz="1700" dirty="0"/>
+          </a:p>
+        </p:txBody>
+      </p:sp>
+      <p:sp>
+        <p:nvSpPr>
+          <p:cNvPr id="29" name="Text 19"/>
+          <p:cNvSpPr txBox="1"/>
+          <p:nvPr/>
+        </p:nvSpPr>
+        <p:spPr>
+          <a:xfrm>
+            <a:off x="3291840" y="4544568"/>
+            <a:ext cx="8076895" cy="365760"/>
+          </a:xfrm>
+          <a:prstGeom prst="rect">
+            <a:avLst/>
+          </a:prstGeom>
+          <a:noFill/>
+          <a:ln/>
+        </p:spPr>
+        <p:txBody>
+          <a:bodyPr wrap="square" lIns="0" tIns="0" rIns="0" bIns="0" rtlCol="0" anchor="ctr"/>
+          <a:lstStyle/>
+          <a:p>
+            <a:pPr algn="r" indent="0" marL="0">
+              <a:buNone/>
+            </a:pPr>
+            <a:r>
+              <a:rPr lang="en-GB" altLang="en-US" sz="950" b="1" spc="200" kern="0" dirty="0">
+                <a:solidFill>
+                  <a:schemeClr val="bg1"/>
+                </a:solidFill>
+              </a:rPr>
+              <a:t>WHERE THE NEW MONEY COMES FROM</a:t>
+            </a:r>
+            <a:endParaRPr lang="en-GB" sz="950" dirty="0"/>
+          </a:p>
+        </p:txBody>
+      </p:sp>
+      <p:sp>
+        <p:nvSpPr>
+          <p:cNvPr id="30" name="Shape 20"/>
+          <p:cNvSpPr/>
+          <p:nvPr/>
+        </p:nvSpPr>
+        <p:spPr>
+          <a:xfrm>
+            <a:off x="822960" y="5120640"/>
+            <a:ext cx="2274812" cy="731520"/>
+          </a:xfrm>
+          <a:prstGeom prst="roundRect">
+            <a:avLst>
+              <a:gd name="adj" fmla="val 7500"/>
+            </a:avLst>
+          </a:prstGeom>
+          <a:solidFill>
+            <a:schemeClr val="accent6"/>
+          </a:solidFill>
+          <a:ln w="6350">
+            <a:solidFill>
+              <a:schemeClr val="accent5">
+                <a:alpha val="25000"/>
+              </a:schemeClr>
+            </a:solidFill>
+            <a:prstDash val="solid"/>
+          </a:ln>
+        </p:spPr>
+      </p:sp>
+      <p:sp>
+        <p:nvSpPr>
+          <p:cNvPr id="31" name="Text 21"/>
+          <p:cNvSpPr txBox="1"/>
+          <p:nvPr/>
+        </p:nvSpPr>
+        <p:spPr>
+          <a:xfrm>
+            <a:off x="877824" y="5120640"/>
+            <a:ext cx="2165084" cy="731520"/>
+          </a:xfrm>
+          <a:prstGeom prst="rect">
+            <a:avLst/>
+          </a:prstGeom>
+          <a:noFill/>
+          <a:ln/>
+        </p:spPr>
+        <p:txBody>
+          <a:bodyPr wrap="square" lIns="0" tIns="0" rIns="0" bIns="0" rtlCol="0" anchor="ctr"/>
+          <a:lstStyle/>
+          <a:p>
+            <a:pPr algn="ctr" indent="0" marL="0">
+              <a:buNone/>
+            </a:pPr>
+            <a:r>
+              <a:rPr lang="en-GB" altLang="en-US" sz="1150" b="1" dirty="0">
+                <a:solidFill>
+                  <a:schemeClr val="bg1"/>
+                </a:solidFill>
+              </a:rPr>
+              <a:t>MORE CREATORS</a:t>
+            </a:r>
+            <a:endParaRPr lang="en-GB" sz="1150" dirty="0"/>
+          </a:p>
+        </p:txBody>
+      </p:sp>
+      <p:sp>
+        <p:nvSpPr>
+          <p:cNvPr id="32" name="Text 22"/>
+          <p:cNvSpPr txBox="1"/>
+          <p:nvPr/>
+        </p:nvSpPr>
+        <p:spPr>
+          <a:xfrm>
+            <a:off x="3097772" y="5120640"/>
+            <a:ext cx="292608" cy="731520"/>
+          </a:xfrm>
+          <a:prstGeom prst="rect">
+            <a:avLst/>
+          </a:prstGeom>
+          <a:noFill/>
+          <a:ln/>
+        </p:spPr>
+        <p:txBody>
+          <a:bodyPr wrap="square" lIns="0" tIns="0" rIns="0" bIns="0" rtlCol="0" anchor="ctr"/>
+          <a:lstStyle/>
+          <a:p>
+            <a:pPr algn="ctr" indent="0" marL="0">
+              <a:buNone/>
+            </a:pPr>
+            <a:r>
+              <a:rPr lang="en-GB" altLang="en-US" sz="1800" dirty="0">
+                <a:solidFill>
+                  <a:schemeClr val="accent1"/>
+                </a:solidFill>
+              </a:rPr>
+              <a:t>→</a:t>
+            </a:r>
+            <a:endParaRPr lang="en-GB" sz="1800" dirty="0"/>
+          </a:p>
+        </p:txBody>
+      </p:sp>
+      <p:sp>
+        <p:nvSpPr>
+          <p:cNvPr id="33" name="Shape 23"/>
+          <p:cNvSpPr/>
+          <p:nvPr/>
+        </p:nvSpPr>
+        <p:spPr>
+          <a:xfrm>
+            <a:off x="3390380" y="5120640"/>
+            <a:ext cx="2274812" cy="731520"/>
+          </a:xfrm>
+          <a:prstGeom prst="roundRect">
+            <a:avLst>
+              <a:gd name="adj" fmla="val 7500"/>
+            </a:avLst>
+          </a:prstGeom>
+          <a:solidFill>
+            <a:schemeClr val="accent6"/>
+          </a:solidFill>
+          <a:ln w="6350">
+            <a:solidFill>
+              <a:schemeClr val="accent5">
+                <a:alpha val="25000"/>
+              </a:schemeClr>
+            </a:solidFill>
+            <a:prstDash val="solid"/>
+          </a:ln>
+        </p:spPr>
+      </p:sp>
+      <p:sp>
+        <p:nvSpPr>
+          <p:cNvPr id="34" name="Text 24"/>
+          <p:cNvSpPr txBox="1"/>
+          <p:nvPr/>
+        </p:nvSpPr>
+        <p:spPr>
+          <a:xfrm>
+            <a:off x="3445244" y="5120640"/>
+            <a:ext cx="2165084" cy="731520"/>
+          </a:xfrm>
+          <a:prstGeom prst="rect">
+            <a:avLst/>
+          </a:prstGeom>
+          <a:noFill/>
+          <a:ln/>
+        </p:spPr>
+        <p:txBody>
+          <a:bodyPr wrap="square" lIns="0" tIns="0" rIns="0" bIns="0" rtlCol="0" anchor="ctr"/>
+          <a:lstStyle/>
+          <a:p>
+            <a:pPr algn="ctr" indent="0" marL="0">
+              <a:buNone/>
+            </a:pPr>
+            <a:r>
+              <a:rPr lang="en-GB" altLang="en-US" sz="1150" b="1" dirty="0">
+                <a:solidFill>
+                  <a:schemeClr val="bg1"/>
+                </a:solidFill>
+              </a:rPr>
+              <a:t>MORE VISIBILITY</a:t>
+            </a:r>
+            <a:endParaRPr lang="en-GB" sz="1150" dirty="0"/>
+          </a:p>
+        </p:txBody>
+      </p:sp>
+      <p:sp>
+        <p:nvSpPr>
+          <p:cNvPr id="35" name="Text 25"/>
+          <p:cNvSpPr txBox="1"/>
+          <p:nvPr/>
+        </p:nvSpPr>
+        <p:spPr>
+          <a:xfrm>
+            <a:off x="5665192" y="5120640"/>
+            <a:ext cx="292608" cy="731520"/>
+          </a:xfrm>
+          <a:prstGeom prst="rect">
+            <a:avLst/>
+          </a:prstGeom>
+          <a:noFill/>
+          <a:ln/>
+        </p:spPr>
+        <p:txBody>
+          <a:bodyPr wrap="square" lIns="0" tIns="0" rIns="0" bIns="0" rtlCol="0" anchor="ctr"/>
+          <a:lstStyle/>
+          <a:p>
+            <a:pPr algn="ctr" indent="0" marL="0">
+              <a:buNone/>
+            </a:pPr>
+            <a:r>
+              <a:rPr lang="en-GB" altLang="en-US" sz="1800" dirty="0">
+                <a:solidFill>
+                  <a:schemeClr val="accent1"/>
+                </a:solidFill>
+              </a:rPr>
+              <a:t>→</a:t>
+            </a:r>
+            <a:endParaRPr lang="en-GB" sz="1800" dirty="0"/>
+          </a:p>
+        </p:txBody>
+      </p:sp>
+      <p:sp>
+        <p:nvSpPr>
+          <p:cNvPr id="36" name="Shape 26"/>
+          <p:cNvSpPr/>
+          <p:nvPr/>
+        </p:nvSpPr>
+        <p:spPr>
+          <a:xfrm>
+            <a:off x="5957800" y="5120640"/>
+            <a:ext cx="2274812" cy="731520"/>
+          </a:xfrm>
+          <a:prstGeom prst="roundRect">
+            <a:avLst>
+              <a:gd name="adj" fmla="val 7500"/>
+            </a:avLst>
+          </a:prstGeom>
+          <a:solidFill>
+            <a:schemeClr val="accent6"/>
+          </a:solidFill>
+          <a:ln w="6350">
+            <a:solidFill>
+              <a:schemeClr val="accent5">
+                <a:alpha val="25000"/>
+              </a:schemeClr>
+            </a:solidFill>
+            <a:prstDash val="solid"/>
+          </a:ln>
+        </p:spPr>
+      </p:sp>
+      <p:sp>
+        <p:nvSpPr>
+          <p:cNvPr id="37" name="Text 27"/>
+          <p:cNvSpPr txBox="1"/>
+          <p:nvPr/>
+        </p:nvSpPr>
+        <p:spPr>
+          <a:xfrm>
+            <a:off x="6012664" y="5120640"/>
+            <a:ext cx="2165084" cy="731520"/>
+          </a:xfrm>
+          <a:prstGeom prst="rect">
+            <a:avLst/>
+          </a:prstGeom>
+          <a:noFill/>
+          <a:ln/>
+        </p:spPr>
+        <p:txBody>
+          <a:bodyPr wrap="square" lIns="0" tIns="0" rIns="0" bIns="0" rtlCol="0" anchor="ctr"/>
+          <a:lstStyle/>
+          <a:p>
+            <a:pPr algn="ctr" indent="0" marL="0">
+              <a:buNone/>
+            </a:pPr>
+            <a:r>
+              <a:rPr lang="en-GB" altLang="en-US" sz="1150" b="1" dirty="0">
+                <a:solidFill>
+                  <a:schemeClr val="bg1"/>
+                </a:solidFill>
+              </a:rPr>
+              <a:t>BRAND KPIS MET</a:t>
+            </a:r>
+            <a:endParaRPr lang="en-GB" sz="1150" dirty="0"/>
+          </a:p>
+        </p:txBody>
+      </p:sp>
+      <p:sp>
+        <p:nvSpPr>
+          <p:cNvPr id="38" name="Text 28"/>
+          <p:cNvSpPr txBox="1"/>
+          <p:nvPr/>
+        </p:nvSpPr>
+        <p:spPr>
+          <a:xfrm>
+            <a:off x="8232612" y="5120640"/>
+            <a:ext cx="292608" cy="731520"/>
+          </a:xfrm>
+          <a:prstGeom prst="rect">
+            <a:avLst/>
+          </a:prstGeom>
+          <a:noFill/>
+          <a:ln/>
+        </p:spPr>
+        <p:txBody>
+          <a:bodyPr wrap="square" lIns="0" tIns="0" rIns="0" bIns="0" rtlCol="0" anchor="ctr"/>
+          <a:lstStyle/>
+          <a:p>
+            <a:pPr algn="ctr" indent="0" marL="0">
+              <a:buNone/>
+            </a:pPr>
+            <a:r>
+              <a:rPr lang="en-GB" altLang="en-US" sz="1800" dirty="0">
+                <a:solidFill>
+                  <a:schemeClr val="accent1"/>
+                </a:solidFill>
+              </a:rPr>
+              <a:t>→</a:t>
+            </a:r>
+            <a:endParaRPr lang="en-GB" sz="1800" dirty="0"/>
+          </a:p>
+        </p:txBody>
+      </p:sp>
+      <p:sp>
+        <p:nvSpPr>
+          <p:cNvPr id="39" name="Shape 29"/>
+          <p:cNvSpPr/>
+          <p:nvPr/>
+        </p:nvSpPr>
+        <p:spPr>
+          <a:xfrm>
+            <a:off x="8525220" y="5120640"/>
+            <a:ext cx="2843515" cy="731520"/>
+          </a:xfrm>
+          <a:prstGeom prst="roundRect">
+            <a:avLst>
+              <a:gd name="adj" fmla="val 7500"/>
+            </a:avLst>
+          </a:prstGeom>
+          <a:solidFill>
+            <a:schemeClr val="accent1"/>
+          </a:solidFill>
+          <a:ln/>
+        </p:spPr>
+      </p:sp>
+      <p:sp>
+        <p:nvSpPr>
+          <p:cNvPr id="40" name="Text 30"/>
+          <p:cNvSpPr txBox="1"/>
+          <p:nvPr/>
+        </p:nvSpPr>
+        <p:spPr>
+          <a:xfrm>
+            <a:off x="8580084" y="5120640"/>
+            <a:ext cx="2733787" cy="731520"/>
+          </a:xfrm>
+          <a:prstGeom prst="rect">
+            <a:avLst/>
+          </a:prstGeom>
+          <a:noFill/>
+          <a:ln/>
+        </p:spPr>
+        <p:txBody>
+          <a:bodyPr wrap="square" lIns="0" tIns="0" rIns="0" bIns="0" rtlCol="0" anchor="ctr"/>
+          <a:lstStyle/>
+          <a:p>
+            <a:pPr algn="ctr" indent="0" marL="0">
+              <a:buNone/>
+            </a:pPr>
+            <a:r>
+              <a:rPr lang="en-GB" altLang="en-US" sz="1150" b="1" dirty="0">
+                <a:solidFill>
+                  <a:schemeClr val="tx1"/>
+                </a:solidFill>
+              </a:rPr>
+              <a:t>SPONSOR AND INVESTOR MONEY</a:t>
+            </a:r>
+            <a:endParaRPr lang="en-GB" sz="1150" dirty="0"/>
           </a:p>
         </p:txBody>
       </p:sp>

--- a/proposition-deck/AToure Mother Africa Festival Proposal.pptx
+++ b/proposition-deck/AToure Mother Africa Festival Proposal.pptx
@@ -117,41 +117,41 @@
   <p:extLst>
     <p:ext uri="{521415D9-36F7-43E2-AB2F-B90AF26B5E84}">
       <p14:sectionLst xmlns:p14="http://schemas.microsoft.com/office/powerpoint/2010/main">
-        <p14:section name="Opening" id="{04354458-7b03-ce9b-95cc-f23c95f8a679}">
+        <p14:section name="Opening" id="{250c2eca-894e-41e1-0899-23d88bbe86cd}">
           <p14:sldIdLst>
             <p14:sldId id="256"/>
           </p14:sldIdLst>
         </p14:section>
-        <p14:section name="Where we stand" id="{807591e4-ca4d-c80c-cc28-ce535a68e555}">
+        <p14:section name="Where we stand" id="{00c2d038-d408-13f2-700a-4d52439472ad}">
           <p14:sldIdLst>
             <p14:sldId id="257"/>
             <p14:sldId id="258"/>
           </p14:sldIdLst>
         </p14:section>
-        <p14:section name="The AToure answer" id="{2ccc0e7f-3be1-42a2-112b-fb520960a4d3}">
+        <p14:section name="The AToure answer" id="{fcecd234-7045-e72b-f288-e32676b133af}">
           <p14:sldIdLst>
             <p14:sldId id="259"/>
             <p14:sldId id="260"/>
           </p14:sldIdLst>
         </p14:section>
-        <p14:section name="Visibility" id="{4f0cc013-ed16-31c1-f320-f00396fed880}">
+        <p14:section name="Visibility" id="{112061c7-b307-7a32-59b5-2126a98ce7fa}">
           <p14:sldIdLst>
             <p14:sldId id="261"/>
             <p14:sldId id="262"/>
           </p14:sldIdLst>
         </p14:section>
-        <p14:section name="The visibility report" id="{8eb308de-b9cd-c380-2333-b7c85db1df64}">
+        <p14:section name="The visibility report" id="{1e7f2a57-748a-2016-9ef1-acf4ac32d03d}">
           <p14:sldIdLst>
             <p14:sldId id="263"/>
             <p14:sldId id="264"/>
           </p14:sldIdLst>
         </p14:section>
-        <p14:section name="Proof" id="{bea4a2c9-a6c1-f697-9fc4-ba3a437d0f2e}">
+        <p14:section name="Proof" id="{87168272-fd2b-175f-9b7b-c2ea1c087d18}">
           <p14:sldIdLst>
             <p14:sldId id="265"/>
           </p14:sldIdLst>
         </p14:section>
-        <p14:section name="The ask" id="{28a184f7-8718-fd31-4fd0-645d471964e1}">
+        <p14:section name="The ask" id="{9747eb90-a63e-1ac4-a639-3967d4d288be}">
           <p14:sldIdLst>
             <p14:sldId id="266"/>
           </p14:sldIdLst>
@@ -3544,7 +3544,7 @@
         <p:spPr>
           <a:xfrm>
             <a:off x="548640" y="1783080"/>
-            <a:ext cx="3943898" cy="2743200"/>
+            <a:ext cx="4929872" cy="3429000"/>
           </a:xfrm>
           <a:prstGeom prst="rect">
             <a:avLst/>
@@ -3559,7 +3559,7 @@
         </p:nvSpPr>
         <p:spPr>
           <a:xfrm>
-            <a:off x="658368" y="4123944"/>
+            <a:off x="658368" y="4809744"/>
             <a:ext cx="796442" cy="292608"/>
           </a:xfrm>
           <a:prstGeom prst="roundRect">
@@ -3583,7 +3583,7 @@
         </p:nvSpPr>
         <p:spPr>
           <a:xfrm>
-            <a:off x="658368" y="4123944"/>
+            <a:off x="658368" y="4809744"/>
             <a:ext cx="796442" cy="292608"/>
           </a:xfrm>
           <a:prstGeom prst="rect">
@@ -3619,8 +3619,8 @@
         </p:nvSpPr>
         <p:spPr>
           <a:xfrm>
-            <a:off x="548640" y="4663440"/>
-            <a:ext cx="3943898" cy="457200"/>
+            <a:off x="548640" y="5321808"/>
+            <a:ext cx="4929872" cy="411480"/>
           </a:xfrm>
           <a:prstGeom prst="rect">
             <a:avLst/>
@@ -3636,14 +3636,14 @@
               <a:buNone/>
             </a:pPr>
             <a:r>
-              <a:rPr lang="en-GB" altLang="en-US" sz="2800" dirty="0">
+              <a:rPr lang="en-GB" altLang="en-US" sz="2600" dirty="0">
                 <a:solidFill>
                   <a:schemeClr val="accent4"/>
                 </a:solidFill>
               </a:rPr>
               <a:t>55.8M</a:t>
             </a:r>
-            <a:endParaRPr lang="en-GB" sz="2800" dirty="0"/>
+            <a:endParaRPr lang="en-GB" sz="2600" dirty="0"/>
           </a:p>
         </p:txBody>
       </p:sp>
@@ -3655,8 +3655,8 @@
         </p:nvSpPr>
         <p:spPr>
           <a:xfrm>
-            <a:off x="548640" y="5138928"/>
-            <a:ext cx="3943898" cy="685800"/>
+            <a:off x="548640" y="5733288"/>
+            <a:ext cx="4929872" cy="347472"/>
           </a:xfrm>
           <a:prstGeom prst="rect">
             <a:avLst/>
@@ -3672,14 +3672,14 @@
               <a:buNone/>
             </a:pPr>
             <a:r>
-              <a:rPr lang="en-GB" altLang="en-US" sz="1100" dirty="0">
+              <a:rPr lang="en-GB" altLang="en-US" sz="1050" dirty="0">
                 <a:solidFill>
                   <a:schemeClr val="accent5"/>
                 </a:solidFill>
               </a:rPr>
               <a:t>Instagram views on one reel. IShowSpeed in Côte d’Ivoire.</a:t>
             </a:r>
-            <a:endParaRPr lang="en-GB" sz="1100" dirty="0"/>
+            <a:endParaRPr lang="en-GB" sz="1050" dirty="0"/>
           </a:p>
         </p:txBody>
       </p:sp>
@@ -3699,8 +3699,8 @@
         </p:blipFill>
         <p:spPr>
           <a:xfrm>
-            <a:off x="4766858" y="1783080"/>
-            <a:ext cx="1831848" cy="2743200"/>
+            <a:off x="6044279" y="1783080"/>
+            <a:ext cx="2289810" cy="3429000"/>
           </a:xfrm>
           <a:prstGeom prst="rect">
             <a:avLst/>
@@ -3715,8 +3715,8 @@
         </p:nvSpPr>
         <p:spPr>
           <a:xfrm>
-            <a:off x="4876586" y="4123944"/>
-            <a:ext cx="796442" cy="292608"/>
+            <a:off x="6154007" y="4809744"/>
+            <a:ext cx="1664208" cy="292608"/>
           </a:xfrm>
           <a:prstGeom prst="roundRect">
             <a:avLst>
@@ -3739,8 +3739,8 @@
         </p:nvSpPr>
         <p:spPr>
           <a:xfrm>
-            <a:off x="4876586" y="4123944"/>
-            <a:ext cx="796442" cy="292608"/>
+            <a:off x="6154007" y="4809744"/>
+            <a:ext cx="1664208" cy="292608"/>
           </a:xfrm>
           <a:prstGeom prst="rect">
             <a:avLst/>
@@ -3761,7 +3761,7 @@
                   <a:schemeClr val="bg1"/>
                 </a:solidFill>
               </a:rPr>
-              <a:t>Morocco</a:t>
+              <a:t>Morocco, AFCON Final</a:t>
             </a:r>
             <a:endParaRPr lang="en-GB" sz="1000" dirty="0"/>
           </a:p>
@@ -3775,8 +3775,8 @@
         </p:nvSpPr>
         <p:spPr>
           <a:xfrm>
-            <a:off x="4766858" y="4663440"/>
-            <a:ext cx="1831848" cy="457200"/>
+            <a:off x="6044279" y="5321808"/>
+            <a:ext cx="2289810" cy="411480"/>
           </a:xfrm>
           <a:prstGeom prst="rect">
             <a:avLst/>
@@ -3792,14 +3792,14 @@
               <a:buNone/>
             </a:pPr>
             <a:r>
-              <a:rPr lang="en-GB" altLang="en-US" sz="2800" dirty="0">
+              <a:rPr lang="en-GB" altLang="en-US" sz="2600" dirty="0">
                 <a:solidFill>
                   <a:schemeClr val="accent4"/>
                 </a:solidFill>
               </a:rPr>
               <a:t>16M</a:t>
             </a:r>
-            <a:endParaRPr lang="en-GB" sz="2800" dirty="0"/>
+            <a:endParaRPr lang="en-GB" sz="2600" dirty="0"/>
           </a:p>
         </p:txBody>
       </p:sp>
@@ -3811,8 +3811,8 @@
         </p:nvSpPr>
         <p:spPr>
           <a:xfrm>
-            <a:off x="4766858" y="5138928"/>
-            <a:ext cx="1831848" cy="685800"/>
+            <a:off x="6044279" y="5733288"/>
+            <a:ext cx="2289810" cy="347472"/>
           </a:xfrm>
           <a:prstGeom prst="rect">
             <a:avLst/>
@@ -3828,14 +3828,14 @@
               <a:buNone/>
             </a:pPr>
             <a:r>
-              <a:rPr lang="en-GB" altLang="en-US" sz="1100" dirty="0">
+              <a:rPr lang="en-GB" altLang="en-US" sz="1050" dirty="0">
                 <a:solidFill>
                   <a:schemeClr val="accent5"/>
                 </a:solidFill>
               </a:rPr>
-              <a:t>Live stream views of the AFCON mascot reveal, with CAF and the FRMF.</a:t>
-            </a:r>
-            <a:endParaRPr lang="en-GB" sz="1100" dirty="0"/>
+              <a:t>Live stream views of the AFCON mascot reveal.</a:t>
+            </a:r>
+            <a:endParaRPr lang="en-GB" sz="1050" dirty="0"/>
           </a:p>
         </p:txBody>
       </p:sp>
@@ -3855,8 +3855,8 @@
         </p:blipFill>
         <p:spPr>
           <a:xfrm>
-            <a:off x="6873026" y="1783080"/>
-            <a:ext cx="2194560" cy="2743200"/>
+            <a:off x="8899855" y="1783080"/>
+            <a:ext cx="2743200" cy="3429000"/>
           </a:xfrm>
           <a:prstGeom prst="rect">
             <a:avLst/>
@@ -3871,7 +3871,7 @@
         </p:nvSpPr>
         <p:spPr>
           <a:xfrm>
-            <a:off x="6982754" y="4123944"/>
+            <a:off x="9009583" y="4809744"/>
             <a:ext cx="662940" cy="292608"/>
           </a:xfrm>
           <a:prstGeom prst="roundRect">
@@ -3895,7 +3895,7 @@
         </p:nvSpPr>
         <p:spPr>
           <a:xfrm>
-            <a:off x="6982754" y="4123944"/>
+            <a:off x="9009583" y="4809744"/>
             <a:ext cx="662940" cy="292608"/>
           </a:xfrm>
           <a:prstGeom prst="rect">
@@ -3931,8 +3931,8 @@
         </p:nvSpPr>
         <p:spPr>
           <a:xfrm>
-            <a:off x="6873026" y="4663440"/>
-            <a:ext cx="2194560" cy="457200"/>
+            <a:off x="8899855" y="5321808"/>
+            <a:ext cx="2743200" cy="411480"/>
           </a:xfrm>
           <a:prstGeom prst="rect">
             <a:avLst/>
@@ -3948,14 +3948,14 @@
               <a:buNone/>
             </a:pPr>
             <a:r>
-              <a:rPr lang="en-GB" altLang="en-US" sz="2800" dirty="0">
+              <a:rPr lang="en-GB" altLang="en-US" sz="2600" dirty="0">
                 <a:solidFill>
                   <a:schemeClr val="accent4"/>
                 </a:solidFill>
               </a:rPr>
               <a:t>1.57B</a:t>
             </a:r>
-            <a:endParaRPr lang="en-GB" sz="2800" dirty="0"/>
+            <a:endParaRPr lang="en-GB" sz="2600" dirty="0"/>
           </a:p>
         </p:txBody>
       </p:sp>
@@ -3967,8 +3967,8 @@
         </p:nvSpPr>
         <p:spPr>
           <a:xfrm>
-            <a:off x="6873026" y="5138928"/>
-            <a:ext cx="2194560" cy="685800"/>
+            <a:off x="8899855" y="5733288"/>
+            <a:ext cx="2743200" cy="347472"/>
           </a:xfrm>
           <a:prstGeom prst="rect">
             <a:avLst/>
@@ -3984,56 +3984,27 @@
               <a:buNone/>
             </a:pPr>
             <a:r>
-              <a:rPr lang="en-GB" altLang="en-US" sz="1100" dirty="0">
+              <a:rPr lang="en-GB" altLang="en-US" sz="1050" dirty="0">
                 <a:solidFill>
                   <a:schemeClr val="accent5"/>
                 </a:solidFill>
               </a:rPr>
               <a:t>Tour views across five countries, managed end to end.</a:t>
             </a:r>
-            <a:endParaRPr lang="en-GB" sz="1100" dirty="0"/>
-          </a:p>
-        </p:txBody>
-      </p:sp>
-      <p:sp>
-        <p:nvSpPr>
-          <p:cNvPr id="25" name="Shape 16"/>
-          <p:cNvSpPr/>
-          <p:nvPr/>
-        </p:nvSpPr>
-        <p:spPr>
-          <a:xfrm>
-            <a:off x="9387626" y="1783080"/>
-            <a:ext cx="2255429" cy="2743200"/>
-          </a:xfrm>
-          <a:prstGeom prst="roundRect">
-            <a:avLst>
-              <a:gd name="adj" fmla="val 4054"/>
-            </a:avLst>
-          </a:prstGeom>
-          <a:solidFill>
-            <a:schemeClr val="accent6"/>
-          </a:solidFill>
-          <a:ln w="9525">
-            <a:solidFill>
-              <a:schemeClr val="accent1">
-                <a:alpha val="45000"/>
-              </a:schemeClr>
-            </a:solidFill>
-            <a:prstDash val="solid"/>
-          </a:ln>
-        </p:spPr>
-      </p:sp>
-      <p:sp>
-        <p:nvSpPr>
-          <p:cNvPr id="26" name="Text 17"/>
-          <p:cNvSpPr txBox="1"/>
-          <p:nvPr/>
-        </p:nvSpPr>
-        <p:spPr>
-          <a:xfrm>
-            <a:off x="9588794" y="2011680"/>
-            <a:ext cx="1889669" cy="256032"/>
+            <a:endParaRPr lang="en-GB" sz="1050" dirty="0"/>
+          </a:p>
+        </p:txBody>
+      </p:sp>
+      <p:sp>
+        <p:nvSpPr>
+          <p:cNvPr id="25" name="Text 16"/>
+          <p:cNvSpPr txBox="1"/>
+          <p:nvPr/>
+        </p:nvSpPr>
+        <p:spPr>
+          <a:xfrm>
+            <a:off x="548640" y="6144768"/>
+            <a:ext cx="11094415" cy="201168"/>
           </a:xfrm>
           <a:prstGeom prst="rect">
             <a:avLst/>
@@ -4049,144 +4020,14 @@
               <a:buNone/>
             </a:pPr>
             <a:r>
-              <a:rPr lang="en-GB" altLang="en-US" sz="1100" b="1" spc="300" kern="0" dirty="0">
-                <a:solidFill>
-                  <a:schemeClr val="accent1"/>
-                </a:solidFill>
-              </a:rPr>
-              <a:t>WHAT ATOURE DID</a:t>
-            </a:r>
-            <a:endParaRPr lang="en-GB" sz="1100" dirty="0"/>
-          </a:p>
-        </p:txBody>
-      </p:sp>
-      <p:sp>
-        <p:nvSpPr>
-          <p:cNvPr id="27" name="Text 18"/>
-          <p:cNvSpPr txBox="1"/>
-          <p:nvPr/>
-        </p:nvSpPr>
-        <p:spPr>
-          <a:xfrm>
-            <a:off x="9588794" y="2423160"/>
-            <a:ext cx="1889669" cy="1965960"/>
-          </a:xfrm>
-          <a:prstGeom prst="rect">
-            <a:avLst/>
-          </a:prstGeom>
-          <a:noFill/>
-          <a:ln/>
-        </p:spPr>
-        <p:txBody>
-          <a:bodyPr wrap="square" lIns="0" tIns="0" rIns="0" bIns="0" rtlCol="0" anchor="t"/>
-          <a:lstStyle/>
-          <a:p>
-            <a:pPr marL="177800" indent="-177800">
-              <a:spcAft>
-                <a:spcPts val="800"/>
-              </a:spcAft>
-              <a:buSzPct val="100000"/>
-              <a:buChar char="•"/>
-            </a:pPr>
-            <a:r>
-              <a:rPr lang="en-GB" altLang="en-US" sz="1200" dirty="0">
+              <a:rPr lang="en-GB" altLang="en-US" sz="900" dirty="0">
                 <a:solidFill>
                   <a:schemeClr val="accent5"/>
                 </a:solidFill>
               </a:rPr>
-              <a:t>Operations built from zero in Abidjan</a:t>
-            </a:r>
-            <a:endParaRPr lang="en-GB" sz="1200" dirty="0"/>
-          </a:p>
-          <a:p>
-            <a:pPr marL="177800" indent="-177800">
-              <a:spcAft>
-                <a:spcPts val="800"/>
-              </a:spcAft>
-              <a:buSzPct val="100000"/>
-              <a:buChar char="•"/>
-            </a:pPr>
-            <a:r>
-              <a:rPr lang="en-GB" altLang="en-US" sz="1200" dirty="0">
-                <a:solidFill>
-                  <a:schemeClr val="accent5"/>
-                </a:solidFill>
-              </a:rPr>
-              <a:t>State visas, permits and security</a:t>
-            </a:r>
-            <a:endParaRPr lang="en-GB" sz="1200" dirty="0"/>
-          </a:p>
-          <a:p>
-            <a:pPr marL="177800" indent="-177800">
-              <a:spcAft>
-                <a:spcPts val="800"/>
-              </a:spcAft>
-              <a:buSzPct val="100000"/>
-              <a:buChar char="•"/>
-            </a:pPr>
-            <a:r>
-              <a:rPr lang="en-GB" altLang="en-US" sz="1200" dirty="0">
-                <a:solidFill>
-                  <a:schemeClr val="accent5"/>
-                </a:solidFill>
-              </a:rPr>
-              <a:t>Sponsors and partners brought in</a:t>
-            </a:r>
-            <a:endParaRPr lang="en-GB" sz="1200" dirty="0"/>
-          </a:p>
-          <a:p>
-            <a:pPr marL="177800" indent="-177800">
-              <a:spcAft>
-                <a:spcPts val="800"/>
-              </a:spcAft>
-              <a:buSzPct val="100000"/>
-              <a:buChar char="•"/>
-            </a:pPr>
-            <a:r>
-              <a:rPr lang="en-GB" altLang="en-US" sz="1200" dirty="0">
-                <a:solidFill>
-                  <a:schemeClr val="accent5"/>
-                </a:solidFill>
-              </a:rPr>
-              <a:t>Creators managed end to end</a:t>
-            </a:r>
-            <a:endParaRPr lang="en-GB" sz="1200" dirty="0"/>
-          </a:p>
-        </p:txBody>
-      </p:sp>
-      <p:sp>
-        <p:nvSpPr>
-          <p:cNvPr id="28" name="Text 19"/>
-          <p:cNvSpPr txBox="1"/>
-          <p:nvPr/>
-        </p:nvSpPr>
-        <p:spPr>
-          <a:xfrm>
-            <a:off x="548640" y="5943600"/>
-            <a:ext cx="11094415" cy="237744"/>
-          </a:xfrm>
-          <a:prstGeom prst="rect">
-            <a:avLst/>
-          </a:prstGeom>
-          <a:noFill/>
-          <a:ln/>
-        </p:spPr>
-        <p:txBody>
-          <a:bodyPr wrap="square" lIns="0" tIns="0" rIns="0" bIns="0" rtlCol="0" anchor="t"/>
-          <a:lstStyle/>
-          <a:p>
-            <a:pPr indent="0" marL="0">
-              <a:buNone/>
-            </a:pPr>
-            <a:r>
-              <a:rPr lang="en-GB" altLang="en-US" sz="1000" dirty="0">
-                <a:solidFill>
-                  <a:schemeClr val="accent5"/>
-                </a:solidFill>
-              </a:rPr>
               <a:t>Sources: Instagram and YouTube analytics, tour figures supplied by the client.</a:t>
             </a:r>
-            <a:endParaRPr lang="en-GB" sz="1000" dirty="0"/>
+            <a:endParaRPr lang="en-GB" sz="900" dirty="0"/>
           </a:p>
         </p:txBody>
       </p:sp>

--- a/proposition-deck/AToure Mother Africa Festival Proposal.pptx
+++ b/proposition-deck/AToure Mother Africa Festival Proposal.pptx
@@ -117,41 +117,41 @@
   <p:extLst>
     <p:ext uri="{521415D9-36F7-43E2-AB2F-B90AF26B5E84}">
       <p14:sectionLst xmlns:p14="http://schemas.microsoft.com/office/powerpoint/2010/main">
-        <p14:section name="Opening" id="{250c2eca-894e-41e1-0899-23d88bbe86cd}">
+        <p14:section name="Opening" id="{0a4d33fa-f2c4-ae50-61a1-d070f0b47e5f}">
           <p14:sldIdLst>
             <p14:sldId id="256"/>
           </p14:sldIdLst>
         </p14:section>
-        <p14:section name="Where we stand" id="{00c2d038-d408-13f2-700a-4d52439472ad}">
+        <p14:section name="Where we stand" id="{cde2ba44-b78f-8a02-fd81-129a32e7b7dd}">
           <p14:sldIdLst>
             <p14:sldId id="257"/>
             <p14:sldId id="258"/>
           </p14:sldIdLst>
         </p14:section>
-        <p14:section name="The AToure answer" id="{fcecd234-7045-e72b-f288-e32676b133af}">
+        <p14:section name="The AToure answer" id="{ceeebc9c-8ac9-f1a0-ee74-72a9d957be83}">
           <p14:sldIdLst>
             <p14:sldId id="259"/>
             <p14:sldId id="260"/>
           </p14:sldIdLst>
         </p14:section>
-        <p14:section name="Visibility" id="{112061c7-b307-7a32-59b5-2126a98ce7fa}">
+        <p14:section name="Visibility" id="{3b69fa0d-1995-668f-d320-f35445c926c7}">
           <p14:sldIdLst>
             <p14:sldId id="261"/>
             <p14:sldId id="262"/>
           </p14:sldIdLst>
         </p14:section>
-        <p14:section name="The visibility report" id="{1e7f2a57-748a-2016-9ef1-acf4ac32d03d}">
+        <p14:section name="The visibility report" id="{81698a7a-df62-7082-27d4-73a9adb31b74}">
           <p14:sldIdLst>
             <p14:sldId id="263"/>
             <p14:sldId id="264"/>
           </p14:sldIdLst>
         </p14:section>
-        <p14:section name="Proof" id="{87168272-fd2b-175f-9b7b-c2ea1c087d18}">
+        <p14:section name="Proof" id="{d9ae477a-e6d6-2737-895c-c692adf1566d}">
           <p14:sldIdLst>
             <p14:sldId id="265"/>
           </p14:sldIdLst>
         </p14:section>
-        <p14:section name="The ask" id="{9747eb90-a63e-1ac4-a639-3967d4d288be}">
+        <p14:section name="The ask" id="{f58007ae-1434-e264-4278-563b1ec01c3c}">
           <p14:sldIdLst>
             <p14:sldId id="266"/>
           </p14:sldIdLst>
@@ -1440,7 +1440,7 @@
           <a:p>
             <a:r>
               <a:rPr lang="en-US" dirty="0"/>
-              <a:t>Three fixed dates. A one page weekly pulse during the build up, so effort moves to the creators who are working. A check 48 hours after the festival: who posted, where, against which brief. The full report on day 14, by 11 January 2027, as a PDF for the board and sponsors with a web version. The page on the right is a sample layout only; it shows no figures.</a:t>
+              <a:t>Three fixed dates. A one page weekly pulse during the build up, so effort moves to the creators who are working. A check 48 hours after the festival: who posted, where, against which brief. The full report on day 14, by 11 January 2027, as a PDF for the board and sponsors with a web version. The page on the right is a sample layout: its figures are illustrative, to show the format, and are not a forecast for the festival.</a:t>
             </a:r>
             <a:endParaRPr lang="en-US" dirty="0"/>
           </a:p>
@@ -15594,27 +15594,39 @@
       </p:sp>
       <p:sp>
         <p:nvSpPr>
-          <p:cNvPr id="30" name="Shape 21"/>
-          <p:cNvSpPr/>
-          <p:nvPr/>
-        </p:nvSpPr>
-        <p:spPr>
-          <a:xfrm>
-            <a:off x="7388352" y="2980944"/>
-            <a:ext cx="1005840" cy="201168"/>
-          </a:xfrm>
-          <a:prstGeom prst="roundRect">
-            <a:avLst>
-              <a:gd name="adj" fmla="val 18182"/>
-            </a:avLst>
-          </a:prstGeom>
-          <a:solidFill>
-            <a:schemeClr val="tx2">
-              <a:alpha val="28000"/>
-            </a:schemeClr>
-          </a:solidFill>
-          <a:ln/>
-        </p:spPr>
+          <p:cNvPr id="30" name="Text 21"/>
+          <p:cNvSpPr txBox="1"/>
+          <p:nvPr/>
+        </p:nvSpPr>
+        <p:spPr>
+          <a:xfrm>
+            <a:off x="7388352" y="2907792"/>
+            <a:ext cx="1737360" cy="347472"/>
+          </a:xfrm>
+          <a:prstGeom prst="rect">
+            <a:avLst/>
+          </a:prstGeom>
+          <a:noFill/>
+          <a:ln/>
+        </p:spPr>
+        <p:txBody>
+          <a:bodyPr wrap="square" lIns="0" tIns="0" rIns="0" bIns="0" rtlCol="0" anchor="t"/>
+          <a:lstStyle/>
+          <a:p>
+            <a:pPr indent="0" marL="0">
+              <a:buNone/>
+            </a:pPr>
+            <a:r>
+              <a:rPr lang="en-GB" altLang="en-US" sz="1800" b="1" dirty="0">
+                <a:solidFill>
+                  <a:schemeClr val="tx1"/>
+                </a:solidFill>
+              </a:rPr>
+              <a:t>3,200,000</a:t>
+            </a:r>
+            <a:endParaRPr lang="en-GB" sz="1800" dirty="0"/>
+          </a:p>
+        </p:txBody>
       </p:sp>
       <p:sp>
         <p:nvSpPr>
@@ -15624,8 +15636,8 @@
         </p:nvSpPr>
         <p:spPr>
           <a:xfrm>
-            <a:off x="7388352" y="3255264"/>
-            <a:ext cx="1737360" cy="201168"/>
+            <a:off x="7388352" y="3273552"/>
+            <a:ext cx="1783080" cy="201168"/>
           </a:xfrm>
           <a:prstGeom prst="rect">
             <a:avLst/>
@@ -15676,27 +15688,39 @@
       </p:sp>
       <p:sp>
         <p:nvSpPr>
-          <p:cNvPr id="33" name="Shape 24"/>
-          <p:cNvSpPr/>
-          <p:nvPr/>
-        </p:nvSpPr>
-        <p:spPr>
-          <a:xfrm>
-            <a:off x="9509760" y="2980944"/>
-            <a:ext cx="1005840" cy="201168"/>
-          </a:xfrm>
-          <a:prstGeom prst="roundRect">
-            <a:avLst>
-              <a:gd name="adj" fmla="val 18182"/>
-            </a:avLst>
-          </a:prstGeom>
-          <a:solidFill>
-            <a:schemeClr val="tx2">
-              <a:alpha val="28000"/>
-            </a:schemeClr>
-          </a:solidFill>
-          <a:ln/>
-        </p:spPr>
+          <p:cNvPr id="33" name="Text 24"/>
+          <p:cNvSpPr txBox="1"/>
+          <p:nvPr/>
+        </p:nvSpPr>
+        <p:spPr>
+          <a:xfrm>
+            <a:off x="9509760" y="2907792"/>
+            <a:ext cx="1737360" cy="347472"/>
+          </a:xfrm>
+          <a:prstGeom prst="rect">
+            <a:avLst/>
+          </a:prstGeom>
+          <a:noFill/>
+          <a:ln/>
+        </p:spPr>
+        <p:txBody>
+          <a:bodyPr wrap="square" lIns="0" tIns="0" rIns="0" bIns="0" rtlCol="0" anchor="t"/>
+          <a:lstStyle/>
+          <a:p>
+            <a:pPr indent="0" marL="0">
+              <a:buNone/>
+            </a:pPr>
+            <a:r>
+              <a:rPr lang="en-GB" altLang="en-US" sz="1800" b="1" dirty="0">
+                <a:solidFill>
+                  <a:schemeClr val="tx1"/>
+                </a:solidFill>
+              </a:rPr>
+              <a:t>1,450,000</a:t>
+            </a:r>
+            <a:endParaRPr lang="en-GB" sz="1800" dirty="0"/>
+          </a:p>
+        </p:txBody>
       </p:sp>
       <p:sp>
         <p:nvSpPr>
@@ -15706,8 +15730,8 @@
         </p:nvSpPr>
         <p:spPr>
           <a:xfrm>
-            <a:off x="9509760" y="3255264"/>
-            <a:ext cx="1737360" cy="201168"/>
+            <a:off x="9509760" y="3273552"/>
+            <a:ext cx="1783080" cy="201168"/>
           </a:xfrm>
           <a:prstGeom prst="rect">
             <a:avLst/>
@@ -15758,27 +15782,39 @@
       </p:sp>
       <p:sp>
         <p:nvSpPr>
-          <p:cNvPr id="36" name="Shape 27"/>
-          <p:cNvSpPr/>
-          <p:nvPr/>
-        </p:nvSpPr>
-        <p:spPr>
-          <a:xfrm>
-            <a:off x="7388352" y="3849624"/>
-            <a:ext cx="1005840" cy="201168"/>
-          </a:xfrm>
-          <a:prstGeom prst="roundRect">
-            <a:avLst>
-              <a:gd name="adj" fmla="val 18182"/>
-            </a:avLst>
-          </a:prstGeom>
-          <a:solidFill>
-            <a:schemeClr val="tx2">
-              <a:alpha val="28000"/>
-            </a:schemeClr>
-          </a:solidFill>
-          <a:ln/>
-        </p:spPr>
+          <p:cNvPr id="36" name="Text 27"/>
+          <p:cNvSpPr txBox="1"/>
+          <p:nvPr/>
+        </p:nvSpPr>
+        <p:spPr>
+          <a:xfrm>
+            <a:off x="7388352" y="3776472"/>
+            <a:ext cx="1737360" cy="347472"/>
+          </a:xfrm>
+          <a:prstGeom prst="rect">
+            <a:avLst/>
+          </a:prstGeom>
+          <a:noFill/>
+          <a:ln/>
+        </p:spPr>
+        <p:txBody>
+          <a:bodyPr wrap="square" lIns="0" tIns="0" rIns="0" bIns="0" rtlCol="0" anchor="t"/>
+          <a:lstStyle/>
+          <a:p>
+            <a:pPr indent="0" marL="0">
+              <a:buNone/>
+            </a:pPr>
+            <a:r>
+              <a:rPr lang="en-GB" altLang="en-US" sz="1800" b="1" dirty="0">
+                <a:solidFill>
+                  <a:schemeClr val="tx1"/>
+                </a:solidFill>
+              </a:rPr>
+              <a:t>64</a:t>
+            </a:r>
+            <a:endParaRPr lang="en-GB" sz="1800" dirty="0"/>
+          </a:p>
+        </p:txBody>
       </p:sp>
       <p:sp>
         <p:nvSpPr>
@@ -15788,8 +15824,8 @@
         </p:nvSpPr>
         <p:spPr>
           <a:xfrm>
-            <a:off x="7388352" y="4123944"/>
-            <a:ext cx="1737360" cy="201168"/>
+            <a:off x="7388352" y="4142232"/>
+            <a:ext cx="1783080" cy="201168"/>
           </a:xfrm>
           <a:prstGeom prst="rect">
             <a:avLst/>
@@ -15810,7 +15846,7 @@
                   <a:schemeClr val="tx2"/>
                 </a:solidFill>
               </a:rPr>
-              <a:t>Posts checked</a:t>
+              <a:t>Posts checked against the brief</a:t>
             </a:r>
             <a:endParaRPr lang="en-GB" sz="1000" dirty="0"/>
           </a:p>
@@ -15840,27 +15876,39 @@
       </p:sp>
       <p:sp>
         <p:nvSpPr>
-          <p:cNvPr id="39" name="Shape 30"/>
-          <p:cNvSpPr/>
-          <p:nvPr/>
-        </p:nvSpPr>
-        <p:spPr>
-          <a:xfrm>
-            <a:off x="9509760" y="3849624"/>
-            <a:ext cx="1005840" cy="201168"/>
-          </a:xfrm>
-          <a:prstGeom prst="roundRect">
-            <a:avLst>
-              <a:gd name="adj" fmla="val 18182"/>
-            </a:avLst>
-          </a:prstGeom>
-          <a:solidFill>
-            <a:schemeClr val="tx2">
-              <a:alpha val="28000"/>
-            </a:schemeClr>
-          </a:solidFill>
-          <a:ln/>
-        </p:spPr>
+          <p:cNvPr id="39" name="Text 30"/>
+          <p:cNvSpPr txBox="1"/>
+          <p:nvPr/>
+        </p:nvSpPr>
+        <p:spPr>
+          <a:xfrm>
+            <a:off x="9509760" y="3776472"/>
+            <a:ext cx="1737360" cy="347472"/>
+          </a:xfrm>
+          <a:prstGeom prst="rect">
+            <a:avLst/>
+          </a:prstGeom>
+          <a:noFill/>
+          <a:ln/>
+        </p:spPr>
+        <p:txBody>
+          <a:bodyPr wrap="square" lIns="0" tIns="0" rIns="0" bIns="0" rtlCol="0" anchor="t"/>
+          <a:lstStyle/>
+          <a:p>
+            <a:pPr indent="0" marL="0">
+              <a:buNone/>
+            </a:pPr>
+            <a:r>
+              <a:rPr lang="en-GB" altLang="en-US" sz="1800" b="1" dirty="0">
+                <a:solidFill>
+                  <a:schemeClr val="tx1"/>
+                </a:solidFill>
+              </a:rPr>
+              <a:t>18</a:t>
+            </a:r>
+            <a:endParaRPr lang="en-GB" sz="1800" dirty="0"/>
+          </a:p>
+        </p:txBody>
       </p:sp>
       <p:sp>
         <p:nvSpPr>
@@ -15870,8 +15918,8 @@
         </p:nvSpPr>
         <p:spPr>
           <a:xfrm>
-            <a:off x="9509760" y="4123944"/>
-            <a:ext cx="1737360" cy="201168"/>
+            <a:off x="9509760" y="4142232"/>
+            <a:ext cx="1783080" cy="201168"/>
           </a:xfrm>
           <a:prstGeom prst="rect">
             <a:avLst/>
@@ -15979,7 +16027,7 @@
         <p:spPr>
           <a:xfrm>
             <a:off x="8275320" y="4946904"/>
-            <a:ext cx="2651760" cy="146304"/>
+            <a:ext cx="2468880" cy="146304"/>
           </a:xfrm>
           <a:prstGeom prst="roundRect">
             <a:avLst>
@@ -16000,6 +16048,42 @@
         </p:nvSpPr>
         <p:spPr>
           <a:xfrm>
+            <a:off x="10835640" y="4910328"/>
+            <a:ext cx="548640" cy="219456"/>
+          </a:xfrm>
+          <a:prstGeom prst="rect">
+            <a:avLst/>
+          </a:prstGeom>
+          <a:noFill/>
+          <a:ln/>
+        </p:spPr>
+        <p:txBody>
+          <a:bodyPr wrap="square" lIns="0" tIns="0" rIns="0" bIns="0" rtlCol="0" anchor="ctr"/>
+          <a:lstStyle/>
+          <a:p>
+            <a:pPr indent="0" marL="0">
+              <a:buNone/>
+            </a:pPr>
+            <a:r>
+              <a:rPr lang="en-GB" altLang="en-US" sz="1000" b="1" dirty="0">
+                <a:solidFill>
+                  <a:schemeClr val="tx1"/>
+                </a:solidFill>
+              </a:rPr>
+              <a:t>52%</a:t>
+            </a:r>
+            <a:endParaRPr lang="en-GB" sz="1000" dirty="0"/>
+          </a:p>
+        </p:txBody>
+      </p:sp>
+      <p:sp>
+        <p:nvSpPr>
+          <p:cNvPr id="45" name="Text 36"/>
+          <p:cNvSpPr txBox="1"/>
+          <p:nvPr/>
+        </p:nvSpPr>
+        <p:spPr>
+          <a:xfrm>
             <a:off x="7223760" y="5239512"/>
             <a:ext cx="1005840" cy="219456"/>
           </a:xfrm>
@@ -16030,14 +16114,14 @@
       </p:sp>
       <p:sp>
         <p:nvSpPr>
-          <p:cNvPr id="45" name="Shape 36"/>
+          <p:cNvPr id="46" name="Shape 37"/>
           <p:cNvSpPr/>
           <p:nvPr/>
         </p:nvSpPr>
         <p:spPr>
           <a:xfrm>
             <a:off x="8275320" y="5276088"/>
-            <a:ext cx="2011680" cy="146304"/>
+            <a:ext cx="1804182" cy="146304"/>
           </a:xfrm>
           <a:prstGeom prst="roundRect">
             <a:avLst>
@@ -16052,7 +16136,43 @@
       </p:sp>
       <p:sp>
         <p:nvSpPr>
-          <p:cNvPr id="46" name="Text 37"/>
+          <p:cNvPr id="47" name="Text 38"/>
+          <p:cNvSpPr txBox="1"/>
+          <p:nvPr/>
+        </p:nvSpPr>
+        <p:spPr>
+          <a:xfrm>
+            <a:off x="10170942" y="5239512"/>
+            <a:ext cx="548640" cy="219456"/>
+          </a:xfrm>
+          <a:prstGeom prst="rect">
+            <a:avLst/>
+          </a:prstGeom>
+          <a:noFill/>
+          <a:ln/>
+        </p:spPr>
+        <p:txBody>
+          <a:bodyPr wrap="square" lIns="0" tIns="0" rIns="0" bIns="0" rtlCol="0" anchor="ctr"/>
+          <a:lstStyle/>
+          <a:p>
+            <a:pPr indent="0" marL="0">
+              <a:buNone/>
+            </a:pPr>
+            <a:r>
+              <a:rPr lang="en-GB" altLang="en-US" sz="1000" b="1" dirty="0">
+                <a:solidFill>
+                  <a:schemeClr val="tx1"/>
+                </a:solidFill>
+              </a:rPr>
+              <a:t>38%</a:t>
+            </a:r>
+            <a:endParaRPr lang="en-GB" sz="1000" dirty="0"/>
+          </a:p>
+        </p:txBody>
+      </p:sp>
+      <p:sp>
+        <p:nvSpPr>
+          <p:cNvPr id="48" name="Text 39"/>
           <p:cNvSpPr txBox="1"/>
           <p:nvPr/>
         </p:nvSpPr>
@@ -16088,14 +16208,14 @@
       </p:sp>
       <p:sp>
         <p:nvSpPr>
-          <p:cNvPr id="47" name="Shape 38"/>
+          <p:cNvPr id="49" name="Shape 40"/>
           <p:cNvSpPr/>
           <p:nvPr/>
         </p:nvSpPr>
         <p:spPr>
           <a:xfrm>
             <a:off x="8275320" y="5605272"/>
-            <a:ext cx="1005840" cy="146304"/>
+            <a:ext cx="474785" cy="146304"/>
           </a:xfrm>
           <a:prstGeom prst="roundRect">
             <a:avLst>
@@ -16110,14 +16230,50 @@
       </p:sp>
       <p:sp>
         <p:nvSpPr>
-          <p:cNvPr id="48" name="Text 39"/>
+          <p:cNvPr id="50" name="Text 41"/>
+          <p:cNvSpPr txBox="1"/>
+          <p:nvPr/>
+        </p:nvSpPr>
+        <p:spPr>
+          <a:xfrm>
+            <a:off x="8841545" y="5568696"/>
+            <a:ext cx="548640" cy="219456"/>
+          </a:xfrm>
+          <a:prstGeom prst="rect">
+            <a:avLst/>
+          </a:prstGeom>
+          <a:noFill/>
+          <a:ln/>
+        </p:spPr>
+        <p:txBody>
+          <a:bodyPr wrap="square" lIns="0" tIns="0" rIns="0" bIns="0" rtlCol="0" anchor="ctr"/>
+          <a:lstStyle/>
+          <a:p>
+            <a:pPr indent="0" marL="0">
+              <a:buNone/>
+            </a:pPr>
+            <a:r>
+              <a:rPr lang="en-GB" altLang="en-US" sz="1000" b="1" dirty="0">
+                <a:solidFill>
+                  <a:schemeClr val="tx1"/>
+                </a:solidFill>
+              </a:rPr>
+              <a:t>10%</a:t>
+            </a:r>
+            <a:endParaRPr lang="en-GB" sz="1000" dirty="0"/>
+          </a:p>
+        </p:txBody>
+      </p:sp>
+      <p:sp>
+        <p:nvSpPr>
+          <p:cNvPr id="51" name="Text 42"/>
           <p:cNvSpPr txBox="1"/>
           <p:nvPr/>
         </p:nvSpPr>
         <p:spPr>
           <a:xfrm>
             <a:off x="7223760" y="5879592"/>
-            <a:ext cx="3657600" cy="201168"/>
+            <a:ext cx="4114800" cy="201168"/>
           </a:xfrm>
           <a:prstGeom prst="rect">
             <a:avLst/>
@@ -16133,12 +16289,12 @@
               <a:buNone/>
             </a:pPr>
             <a:r>
-              <a:rPr lang="en-GB" altLang="en-US" sz="1000" i="1" dirty="0">
-                <a:solidFill>
-                  <a:schemeClr val="tx2"/>
-                </a:solidFill>
-              </a:rPr>
-              <a:t>Sample layout. No figures shown.</a:t>
+              <a:rPr lang="en-GB" altLang="en-US" sz="1000" b="1" i="1" dirty="0">
+                <a:solidFill>
+                  <a:schemeClr val="accent3"/>
+                </a:solidFill>
+              </a:rPr>
+              <a:t>Sample layout. Figures are illustrative.</a:t>
             </a:r>
             <a:endParaRPr lang="en-GB" sz="1000" dirty="0"/>
           </a:p>

--- a/proposition-deck/AToure Mother Africa Festival Proposal.pptx
+++ b/proposition-deck/AToure Mother Africa Festival Proposal.pptx
@@ -16,9 +16,10 @@
     <p:sldId id="264" r:id="rId10"/>
     <p:sldId id="265" r:id="rId11"/>
     <p:sldId id="266" r:id="rId12"/>
+    <p:sldId id="267" r:id="rId13"/>
   </p:sldIdLst>
   <p:notesMasterIdLst>
-    <p:notesMasterId r:id="rId13"/>
+    <p:notesMasterId r:id="rId14"/>
   </p:notesMasterIdLst>
   <p:sldSz cx="12192000" cy="6858000"/>
   <p:notesSz cx="6858000" cy="12192000"/>
@@ -117,43 +118,48 @@
   <p:extLst>
     <p:ext uri="{521415D9-36F7-43E2-AB2F-B90AF26B5E84}">
       <p14:sectionLst xmlns:p14="http://schemas.microsoft.com/office/powerpoint/2010/main">
-        <p14:section name="Opening" id="{0a4d33fa-f2c4-ae50-61a1-d070f0b47e5f}">
+        <p14:section name="Opening" id="{e9d823ba-517e-451a-dec3-ef48890800cf}">
           <p14:sldIdLst>
             <p14:sldId id="256"/>
           </p14:sldIdLst>
         </p14:section>
-        <p14:section name="Where we stand" id="{cde2ba44-b78f-8a02-fd81-129a32e7b7dd}">
+        <p14:section name="Where we stand" id="{e704da62-8eed-aa05-9858-a35f7291fd8a}">
           <p14:sldIdLst>
             <p14:sldId id="257"/>
             <p14:sldId id="258"/>
           </p14:sldIdLst>
         </p14:section>
-        <p14:section name="The AToure answer" id="{ceeebc9c-8ac9-f1a0-ee74-72a9d957be83}">
+        <p14:section name="The AToure answer" id="{ad20d08e-4202-66f1-c3e9-d63233b85155}">
           <p14:sldIdLst>
             <p14:sldId id="259"/>
             <p14:sldId id="260"/>
           </p14:sldIdLst>
         </p14:section>
-        <p14:section name="Visibility" id="{3b69fa0d-1995-668f-d320-f35445c926c7}">
+        <p14:section name="Visibility" id="{ee888e28-299d-c58d-25f5-31079faf35ae}">
           <p14:sldIdLst>
             <p14:sldId id="261"/>
             <p14:sldId id="262"/>
           </p14:sldIdLst>
         </p14:section>
-        <p14:section name="The visibility report" id="{81698a7a-df62-7082-27d4-73a9adb31b74}">
+        <p14:section name="The visibility report" id="{254b141b-a8c1-e114-ccdf-8d9e117b551d}">
           <p14:sldIdLst>
             <p14:sldId id="263"/>
             <p14:sldId id="264"/>
           </p14:sldIdLst>
         </p14:section>
-        <p14:section name="Proof" id="{d9ae477a-e6d6-2737-895c-c692adf1566d}">
+        <p14:section name="Proof" id="{b655f4d8-652a-9039-22be-aaea13b93d49}">
           <p14:sldIdLst>
             <p14:sldId id="265"/>
           </p14:sldIdLst>
         </p14:section>
-        <p14:section name="The ask" id="{f58007ae-1434-e264-4278-563b1ec01c3c}">
+        <p14:section name="The ask" id="{d594762d-027f-7d1a-ab47-c4429139153d}">
           <p14:sldIdLst>
             <p14:sldId id="266"/>
+          </p14:sldIdLst>
+        </p14:section>
+        <p14:section name="Appendix" id="{c8fc9484-ace8-b5d0-fc4e-9e39da93f8ae}">
+          <p14:sldIdLst>
+            <p14:sldId id="267"/>
           </p14:sldIdLst>
         </p14:section>
       </p14:sectionLst>
@@ -760,6 +766,94 @@
             <a:fld id="{F7021451-1387-4CA6-816F-3879F97B5CBC}" type="slidenum">
               <a:rPr lang="en-US"/>
               <a:t>11</a:t>
+            </a:fld>
+            <a:endParaRPr lang="en-US"/>
+          </a:p>
+        </p:txBody>
+      </p:sp>
+    </p:spTree>
+    <p:extLst>
+      <p:ext uri="{BB962C8B-B14F-4D97-AF65-F5344CB8AC3E}">
+        <p14:creationId xmlns:p14="http://schemas.microsoft.com/office/powerpoint/2010/main" val="1024086991"/>
+      </p:ext>
+    </p:extLst>
+  </p:cSld>
+  <p:clrMapOvr>
+    <a:masterClrMapping/>
+  </p:clrMapOvr>
+</p:notes>
+</file>
+
+<file path=ppt/notesSlides/notesSlide12.xml><?xml version="1.0" encoding="utf-8"?>
+<p:notes xmlns:a="http://schemas.openxmlformats.org/drawingml/2006/main" xmlns:r="http://schemas.openxmlformats.org/officeDocument/2006/relationships" xmlns:p="http://schemas.openxmlformats.org/presentationml/2006/main">
+  <p:cSld>
+    <p:spTree>
+      <p:nvGrpSpPr>
+        <p:cNvPr id="1" name=""/>
+        <p:cNvGrpSpPr/>
+        <p:nvPr/>
+      </p:nvGrpSpPr>
+      <p:grpSpPr>
+        <a:xfrm>
+          <a:off x="0" y="0"/>
+          <a:ext cx="0" cy="0"/>
+          <a:chOff x="0" y="0"/>
+          <a:chExt cx="0" cy="0"/>
+        </a:xfrm>
+      </p:grpSpPr>
+      <p:sp>
+        <p:nvSpPr>
+          <p:cNvPr id="2" name="Slide Image Placeholder 1"/>
+          <p:cNvSpPr>
+            <a:spLocks noGrp="1" noRot="1" noChangeAspect="1"/>
+          </p:cNvSpPr>
+          <p:nvPr>
+            <p:ph type="sldImg"/>
+          </p:nvPr>
+        </p:nvSpPr>
+        <p:spPr/>
+      </p:sp>
+      <p:sp>
+        <p:nvSpPr>
+          <p:cNvPr id="3" name="Notes Placeholder 2"/>
+          <p:cNvSpPr>
+            <a:spLocks noGrp="1"/>
+          </p:cNvSpPr>
+          <p:nvPr>
+            <p:ph type="body" idx="1"/>
+          </p:nvPr>
+        </p:nvSpPr>
+        <p:spPr/>
+        <p:txBody>
+          <a:bodyPr/>
+          <a:lstStyle/>
+          <a:p>
+            <a:r>
+              <a:rPr lang="en-US" dirty="0"/>
+              <a:t>Page 2 of the sample report, to show the depth behind the headline numbers: every creator with posts, views, interactions and ticket clicks, where the audience was, and what each partner received. The figures are illustrative and add up to page 1; they are not a forecast. The full report also lists every post with its link and time, and ends with recommendations for the next edition.</a:t>
+            </a:r>
+            <a:endParaRPr lang="en-US" dirty="0"/>
+          </a:p>
+        </p:txBody>
+      </p:sp>
+      <p:sp>
+        <p:nvSpPr>
+          <p:cNvPr id="4" name="Slide Number Placeholder 3"/>
+          <p:cNvSpPr>
+            <a:spLocks noGrp="1"/>
+          </p:cNvSpPr>
+          <p:nvPr>
+            <p:ph type="sldNum" sz="quarter" idx="10"/>
+          </p:nvPr>
+        </p:nvSpPr>
+        <p:spPr/>
+        <p:txBody>
+          <a:bodyPr/>
+          <a:lstStyle/>
+          <a:p>
+            <a:fld id="{F7021451-1387-4CA6-816F-3879F97B5CBC}" type="slidenum">
+              <a:rPr lang="en-US"/>
+              <a:t>12</a:t>
             </a:fld>
             <a:endParaRPr lang="en-US"/>
           </a:p>
@@ -5059,6 +5153,4404 @@
 </p:sld>
 </file>
 
+<file path=ppt/slides/slide12.xml><?xml version="1.0" encoding="utf-8"?>
+<p:sld xmlns:a="http://schemas.openxmlformats.org/drawingml/2006/main" xmlns:r="http://schemas.openxmlformats.org/officeDocument/2006/relationships" xmlns:p="http://schemas.openxmlformats.org/presentationml/2006/main">
+  <p:cSld name="Slide 12">
+    <p:spTree>
+      <p:nvGrpSpPr>
+        <p:cNvPr id="1" name=""/>
+        <p:cNvGrpSpPr/>
+        <p:nvPr/>
+      </p:nvGrpSpPr>
+      <p:grpSpPr>
+        <a:xfrm>
+          <a:off x="0" y="0"/>
+          <a:ext cx="0" cy="0"/>
+          <a:chOff x="0" y="0"/>
+          <a:chExt cx="0" cy="0"/>
+        </a:xfrm>
+      </p:grpSpPr>
+      <p:sp>
+        <p:nvSpPr>
+          <p:cNvPr id="2" name="Text 0"/>
+          <p:cNvSpPr/>
+          <p:nvPr>
+            <p:ph idx="100" type="body" hasCustomPrompt="1"/>
+          </p:nvPr>
+        </p:nvSpPr>
+        <p:spPr>
+          <a:xfrm>
+            <a:off x="548640" y="411480"/>
+            <a:ext cx="11094415" cy="256032"/>
+          </a:xfrm>
+          <a:prstGeom prst="rect">
+            <a:avLst/>
+          </a:prstGeom>
+          <a:noFill/>
+          <a:ln/>
+        </p:spPr>
+        <p:txBody>
+          <a:bodyPr wrap="square" lIns="0" tIns="0" rIns="0" bIns="0" rtlCol="0" anchor="t"/>
+          <a:lstStyle/>
+          <a:p>
+            <a:pPr algn="l" indent="0" marL="0">
+              <a:buNone/>
+            </a:pPr>
+            <a:r>
+              <a:rPr lang="en-GB" altLang="en-US" sz="1100" b="1" spc="300" kern="0" dirty="0">
+                <a:solidFill>
+                  <a:schemeClr val="accent3"/>
+                </a:solidFill>
+              </a:rPr>
+              <a:t>APPENDIX  ·  SAMPLE REPORT, PAGE 2</a:t>
+            </a:r>
+            <a:endParaRPr lang="en-GB" sz="1100" dirty="0"/>
+          </a:p>
+        </p:txBody>
+      </p:sp>
+      <p:sp>
+        <p:nvSpPr>
+          <p:cNvPr id="3" name="Text 0"/>
+          <p:cNvSpPr/>
+          <p:nvPr>
+            <p:ph idx="101" type="title" hasCustomPrompt="1"/>
+          </p:nvPr>
+        </p:nvSpPr>
+        <p:spPr>
+          <a:xfrm>
+            <a:off x="548640" y="676656"/>
+            <a:ext cx="11094415" cy="777240"/>
+          </a:xfrm>
+          <a:prstGeom prst="rect">
+            <a:avLst/>
+          </a:prstGeom>
+          <a:noFill/>
+          <a:ln/>
+        </p:spPr>
+        <p:txBody>
+          <a:bodyPr wrap="square" lIns="0" tIns="0" rIns="0" bIns="0" rtlCol="0" anchor="t"/>
+          <a:lstStyle/>
+          <a:p>
+            <a:pPr algn="l" indent="0" marL="0">
+              <a:buNone/>
+            </a:pPr>
+            <a:r>
+              <a:rPr lang="en-GB" altLang="en-US" sz="3800" dirty="0">
+                <a:solidFill>
+                  <a:schemeClr val="tx1"/>
+                </a:solidFill>
+              </a:rPr>
+              <a:t>The detailed breakdown</a:t>
+            </a:r>
+            <a:endParaRPr lang="en-GB" sz="3800" dirty="0"/>
+          </a:p>
+        </p:txBody>
+      </p:sp>
+      <p:pic>
+        <p:nvPicPr>
+          <p:cNvPr id="5" name="Image 0" descr="AToure Management &amp; Consulting">    </p:cNvPr>
+          <p:cNvPicPr>
+            <a:picLocks noChangeAspect="1"/>
+          </p:cNvPicPr>
+          <p:nvPr/>
+        </p:nvPicPr>
+        <p:blipFill>
+          <a:blip r:embed="rId1"/>
+          <a:stretch>
+            <a:fillRect/>
+          </a:stretch>
+        </p:blipFill>
+        <p:spPr>
+          <a:xfrm>
+            <a:off x="9098280" y="301752"/>
+            <a:ext cx="1417320" cy="226771"/>
+          </a:xfrm>
+          <a:prstGeom prst="rect">
+            <a:avLst/>
+          </a:prstGeom>
+        </p:spPr>
+      </p:pic>
+      <p:sp>
+        <p:nvSpPr>
+          <p:cNvPr id="6" name="Text 2"/>
+          <p:cNvSpPr txBox="1"/>
+          <p:nvPr/>
+        </p:nvSpPr>
+        <p:spPr>
+          <a:xfrm>
+            <a:off x="10570464" y="246888"/>
+            <a:ext cx="329184" cy="329184"/>
+          </a:xfrm>
+          <a:prstGeom prst="rect">
+            <a:avLst/>
+          </a:prstGeom>
+          <a:noFill/>
+          <a:ln/>
+        </p:spPr>
+        <p:txBody>
+          <a:bodyPr wrap="square" lIns="0" tIns="0" rIns="0" bIns="0" rtlCol="0" anchor="ctr"/>
+          <a:lstStyle/>
+          <a:p>
+            <a:pPr algn="ctr" indent="0" marL="0">
+              <a:buNone/>
+            </a:pPr>
+            <a:r>
+              <a:rPr lang="en-GB" altLang="en-US" sz="1600" dirty="0">
+                <a:solidFill>
+                  <a:schemeClr val="accent3"/>
+                </a:solidFill>
+              </a:rPr>
+              <a:t>×</a:t>
+            </a:r>
+            <a:endParaRPr lang="en-GB" sz="1600" dirty="0"/>
+          </a:p>
+        </p:txBody>
+      </p:sp>
+      <p:pic>
+        <p:nvPicPr>
+          <p:cNvPr id="7" name="Image 1" descr="Mother Africa Festival">    </p:cNvPr>
+          <p:cNvPicPr>
+            <a:picLocks noChangeAspect="1"/>
+          </p:cNvPicPr>
+          <p:nvPr/>
+        </p:nvPicPr>
+        <p:blipFill>
+          <a:blip r:embed="rId2"/>
+          <a:stretch>
+            <a:fillRect/>
+          </a:stretch>
+        </p:blipFill>
+        <p:spPr>
+          <a:xfrm>
+            <a:off x="10984687" y="182880"/>
+            <a:ext cx="657231" cy="466344"/>
+          </a:xfrm>
+          <a:prstGeom prst="rect">
+            <a:avLst/>
+          </a:prstGeom>
+        </p:spPr>
+      </p:pic>
+      <p:sp>
+        <p:nvSpPr>
+          <p:cNvPr id="8" name="Shape 3"/>
+          <p:cNvSpPr/>
+          <p:nvPr/>
+        </p:nvSpPr>
+        <p:spPr>
+          <a:xfrm>
+            <a:off x="548640" y="1783080"/>
+            <a:ext cx="11094415" cy="4434840"/>
+          </a:xfrm>
+          <a:prstGeom prst="roundRect">
+            <a:avLst>
+              <a:gd name="adj" fmla="val 1649"/>
+            </a:avLst>
+          </a:prstGeom>
+          <a:solidFill>
+            <a:schemeClr val="bg1"/>
+          </a:solidFill>
+          <a:ln w="9525">
+            <a:solidFill>
+              <a:schemeClr val="tx2">
+                <a:alpha val="28000"/>
+              </a:schemeClr>
+            </a:solidFill>
+            <a:prstDash val="solid"/>
+          </a:ln>
+          <a:effectLst>
+            <a:outerShdw sx="100000" sy="100000" kx="0" ky="0" algn="bl" rotWithShape="0" blurRad="127000" dist="38100" dir="5400000">
+              <a:srgbClr val="133524">
+                <a:alpha val="10000"/>
+              </a:srgbClr>
+            </a:outerShdw>
+          </a:effectLst>
+        </p:spPr>
+      </p:sp>
+      <p:sp>
+        <p:nvSpPr>
+          <p:cNvPr id="9" name="Text 4"/>
+          <p:cNvSpPr txBox="1"/>
+          <p:nvPr/>
+        </p:nvSpPr>
+        <p:spPr>
+          <a:xfrm>
+            <a:off x="822960" y="1984248"/>
+            <a:ext cx="3657600" cy="201168"/>
+          </a:xfrm>
+          <a:prstGeom prst="rect">
+            <a:avLst/>
+          </a:prstGeom>
+          <a:noFill/>
+          <a:ln/>
+        </p:spPr>
+        <p:txBody>
+          <a:bodyPr wrap="square" lIns="0" tIns="0" rIns="0" bIns="0" rtlCol="0" anchor="t"/>
+          <a:lstStyle/>
+          <a:p>
+            <a:pPr indent="0" marL="0">
+              <a:buNone/>
+            </a:pPr>
+            <a:r>
+              <a:rPr lang="en-GB" altLang="en-US" sz="900" b="1" spc="300" kern="0" dirty="0">
+                <a:solidFill>
+                  <a:schemeClr val="accent3"/>
+                </a:solidFill>
+              </a:rPr>
+              <a:t>VISIBILITY REPORT  ·  PAGE 2</a:t>
+            </a:r>
+            <a:endParaRPr lang="en-GB" sz="900" dirty="0"/>
+          </a:p>
+        </p:txBody>
+      </p:sp>
+      <p:sp>
+        <p:nvSpPr>
+          <p:cNvPr id="10" name="Text 5"/>
+          <p:cNvSpPr txBox="1"/>
+          <p:nvPr/>
+        </p:nvSpPr>
+        <p:spPr>
+          <a:xfrm>
+            <a:off x="822960" y="2185416"/>
+            <a:ext cx="5486400" cy="365760"/>
+          </a:xfrm>
+          <a:prstGeom prst="rect">
+            <a:avLst/>
+          </a:prstGeom>
+          <a:noFill/>
+          <a:ln/>
+        </p:spPr>
+        <p:txBody>
+          <a:bodyPr wrap="square" lIns="0" tIns="0" rIns="0" bIns="0" rtlCol="0" anchor="t"/>
+          <a:lstStyle/>
+          <a:p>
+            <a:pPr indent="0" marL="0">
+              <a:buNone/>
+            </a:pPr>
+            <a:r>
+              <a:rPr lang="en-GB" altLang="en-US" sz="1800" dirty="0">
+                <a:solidFill>
+                  <a:schemeClr val="tx1"/>
+                </a:solidFill>
+                <a:latin typeface="+mj-lt" pitchFamily="34" charset="0"/>
+                <a:ea typeface="+mj-lt" pitchFamily="34" charset="-122"/>
+                <a:cs typeface="+mj-lt" pitchFamily="34" charset="-120"/>
+              </a:rPr>
+              <a:t>Mother Africa Festival 2026</a:t>
+            </a:r>
+            <a:endParaRPr lang="en-GB" sz="1800" dirty="0"/>
+          </a:p>
+        </p:txBody>
+      </p:sp>
+      <p:pic>
+        <p:nvPicPr>
+          <p:cNvPr id="11" name="Image 2" descr="Mother Africa Festival">    </p:cNvPr>
+          <p:cNvPicPr>
+            <a:picLocks noChangeAspect="1"/>
+          </p:cNvPicPr>
+          <p:nvPr/>
+        </p:nvPicPr>
+        <p:blipFill>
+          <a:blip r:embed="rId3"/>
+          <a:stretch>
+            <a:fillRect/>
+          </a:stretch>
+        </p:blipFill>
+        <p:spPr>
+          <a:xfrm>
+            <a:off x="10865815" y="1984248"/>
+            <a:ext cx="541249" cy="384048"/>
+          </a:xfrm>
+          <a:prstGeom prst="rect">
+            <a:avLst/>
+          </a:prstGeom>
+        </p:spPr>
+      </p:pic>
+      <p:sp>
+        <p:nvSpPr>
+          <p:cNvPr id="12" name="Shape 6"/>
+          <p:cNvSpPr/>
+          <p:nvPr/>
+        </p:nvSpPr>
+        <p:spPr>
+          <a:xfrm>
+            <a:off x="822960" y="2624328"/>
+            <a:ext cx="10545775" cy="0"/>
+          </a:xfrm>
+          <a:prstGeom prst="line">
+            <a:avLst/>
+          </a:prstGeom>
+          <a:noFill/>
+          <a:ln w="12700">
+            <a:solidFill>
+              <a:schemeClr val="accent1"/>
+            </a:solidFill>
+            <a:prstDash val="solid"/>
+          </a:ln>
+        </p:spPr>
+      </p:sp>
+      <p:sp>
+        <p:nvSpPr>
+          <p:cNvPr id="13" name="Text 7"/>
+          <p:cNvSpPr txBox="1"/>
+          <p:nvPr/>
+        </p:nvSpPr>
+        <p:spPr>
+          <a:xfrm>
+            <a:off x="822960" y="2770632"/>
+            <a:ext cx="3657600" cy="256032"/>
+          </a:xfrm>
+          <a:prstGeom prst="rect">
+            <a:avLst/>
+          </a:prstGeom>
+          <a:noFill/>
+          <a:ln/>
+        </p:spPr>
+        <p:txBody>
+          <a:bodyPr wrap="square" lIns="0" tIns="0" rIns="0" bIns="0" rtlCol="0" anchor="t"/>
+          <a:lstStyle/>
+          <a:p>
+            <a:pPr indent="0" marL="0">
+              <a:buNone/>
+            </a:pPr>
+            <a:r>
+              <a:rPr lang="en-GB" altLang="en-US" sz="1100" b="1" spc="300" kern="0" dirty="0">
+                <a:solidFill>
+                  <a:schemeClr val="accent3"/>
+                </a:solidFill>
+              </a:rPr>
+              <a:t>BY CREATOR</a:t>
+            </a:r>
+            <a:endParaRPr lang="en-GB" sz="1100" dirty="0"/>
+          </a:p>
+        </p:txBody>
+      </p:sp>
+      <p:graphicFrame>
+        <p:nvGraphicFramePr>
+          <p:cNvPr id="13" name="Sample table by creator"/>
+          <p:cNvGraphicFramePr>
+            <a:graphicFrameLocks noGrp="1"/>
+          </p:cNvGraphicFramePr>
+          <p:nvPr>
+            <p:extLst>
+              <p:ext uri="{D42A27DB-BD31-4B8C-83A1-F6EECF244321}">
+                <p14:modId xmlns:p14="http://schemas.microsoft.com/office/powerpoint/2010/main" val="1579011935"/>
+              </p:ext>
+            </p:extLst>
+          </p:nvPr>
+        </p:nvGraphicFramePr>
+        <p:xfrm>
+          <a:off x="822960" y="3026664"/>
+          <a:ext cx="6126480" cy="914400"/>
+        </p:xfrm>
+        <a:graphic>
+          <a:graphicData uri="http://schemas.openxmlformats.org/drawingml/2006/table">
+            <a:tbl>
+              <a:tblPr/>
+              <a:tblGrid>
+                <a:gridCol w="1828800"/>
+                <a:gridCol w="731520"/>
+                <a:gridCol w="1188720"/>
+                <a:gridCol w="1188720"/>
+                <a:gridCol w="1188720"/>
+              </a:tblGrid>
+              <a:tr h="274320">
+                <a:tc>
+                  <a:txBody>
+                    <a:bodyPr/>
+                    <a:lstStyle/>
+                    <a:p>
+                      <a:pPr indent="0" marL="0">
+                        <a:buNone/>
+                      </a:pPr>
+                      <a:r>
+                        <a:rPr lang="en-US" sz="1000" b="1" dirty="0">
+                          <a:solidFill>
+                            <a:schemeClr val="bg1"/>
+                          </a:solidFill>
+                        </a:rPr>
+                        <a:t>Creator</a:t>
+                      </a:r>
+                      <a:endParaRPr lang="en-US" sz="1000" dirty="0"/>
+                    </a:p>
+                  </a:txBody>
+                  <a:tcPr marL="128016" marR="128016" marT="54864" marB="54864" anchor="ctr">
+                    <a:lnL w="9525" cap="flat" cmpd="sng" algn="ctr">
+                      <a:solidFill>
+                        <a:srgbClr val="E3EDE6"/>
+                      </a:solidFill>
+                      <a:prstDash val="solid"/>
+                      <a:round/>
+                      <a:headEnd type="none" w="med" len="med"/>
+                      <a:tailEnd type="none" w="med" len="med"/>
+                    </a:lnL>
+                    <a:lnR w="9525" cap="flat" cmpd="sng" algn="ctr">
+                      <a:solidFill>
+                        <a:srgbClr val="E3EDE6"/>
+                      </a:solidFill>
+                      <a:prstDash val="solid"/>
+                      <a:round/>
+                      <a:headEnd type="none" w="med" len="med"/>
+                      <a:tailEnd type="none" w="med" len="med"/>
+                    </a:lnR>
+                    <a:lnT w="9525" cap="flat" cmpd="sng" algn="ctr">
+                      <a:solidFill>
+                        <a:srgbClr val="E3EDE6"/>
+                      </a:solidFill>
+                      <a:prstDash val="solid"/>
+                      <a:round/>
+                      <a:headEnd type="none" w="med" len="med"/>
+                      <a:tailEnd type="none" w="med" len="med"/>
+                    </a:lnT>
+                    <a:lnB w="9525" cap="flat" cmpd="sng" algn="ctr">
+                      <a:solidFill>
+                        <a:srgbClr val="E3EDE6"/>
+                      </a:solidFill>
+                      <a:prstDash val="solid"/>
+                      <a:round/>
+                      <a:headEnd type="none" w="med" len="med"/>
+                      <a:tailEnd type="none" w="med" len="med"/>
+                    </a:lnB>
+                    <a:solidFill>
+                      <a:schemeClr val="tx1"/>
+                    </a:solidFill>
+                  </a:tcPr>
+                </a:tc>
+                <a:tc>
+                  <a:txBody>
+                    <a:bodyPr/>
+                    <a:lstStyle/>
+                    <a:p>
+                      <a:pPr indent="0" marL="0">
+                        <a:buNone/>
+                      </a:pPr>
+                      <a:r>
+                        <a:rPr lang="en-US" sz="1000" b="1" dirty="0">
+                          <a:solidFill>
+                            <a:schemeClr val="bg1"/>
+                          </a:solidFill>
+                        </a:rPr>
+                        <a:t>Posts</a:t>
+                      </a:r>
+                      <a:endParaRPr lang="en-US" sz="1000" dirty="0"/>
+                    </a:p>
+                  </a:txBody>
+                  <a:tcPr marL="128016" marR="128016" marT="54864" marB="54864" anchor="ctr">
+                    <a:lnL w="9525" cap="flat" cmpd="sng" algn="ctr">
+                      <a:solidFill>
+                        <a:srgbClr val="E3EDE6"/>
+                      </a:solidFill>
+                      <a:prstDash val="solid"/>
+                      <a:round/>
+                      <a:headEnd type="none" w="med" len="med"/>
+                      <a:tailEnd type="none" w="med" len="med"/>
+                    </a:lnL>
+                    <a:lnR w="9525" cap="flat" cmpd="sng" algn="ctr">
+                      <a:solidFill>
+                        <a:srgbClr val="E3EDE6"/>
+                      </a:solidFill>
+                      <a:prstDash val="solid"/>
+                      <a:round/>
+                      <a:headEnd type="none" w="med" len="med"/>
+                      <a:tailEnd type="none" w="med" len="med"/>
+                    </a:lnR>
+                    <a:lnT w="9525" cap="flat" cmpd="sng" algn="ctr">
+                      <a:solidFill>
+                        <a:srgbClr val="E3EDE6"/>
+                      </a:solidFill>
+                      <a:prstDash val="solid"/>
+                      <a:round/>
+                      <a:headEnd type="none" w="med" len="med"/>
+                      <a:tailEnd type="none" w="med" len="med"/>
+                    </a:lnT>
+                    <a:lnB w="9525" cap="flat" cmpd="sng" algn="ctr">
+                      <a:solidFill>
+                        <a:srgbClr val="E3EDE6"/>
+                      </a:solidFill>
+                      <a:prstDash val="solid"/>
+                      <a:round/>
+                      <a:headEnd type="none" w="med" len="med"/>
+                      <a:tailEnd type="none" w="med" len="med"/>
+                    </a:lnB>
+                    <a:solidFill>
+                      <a:schemeClr val="tx1"/>
+                    </a:solidFill>
+                  </a:tcPr>
+                </a:tc>
+                <a:tc>
+                  <a:txBody>
+                    <a:bodyPr/>
+                    <a:lstStyle/>
+                    <a:p>
+                      <a:pPr indent="0" marL="0">
+                        <a:buNone/>
+                      </a:pPr>
+                      <a:r>
+                        <a:rPr lang="en-US" sz="1000" b="1" dirty="0">
+                          <a:solidFill>
+                            <a:schemeClr val="bg1"/>
+                          </a:solidFill>
+                        </a:rPr>
+                        <a:t>Views</a:t>
+                      </a:r>
+                      <a:endParaRPr lang="en-US" sz="1000" dirty="0"/>
+                    </a:p>
+                  </a:txBody>
+                  <a:tcPr marL="128016" marR="128016" marT="54864" marB="54864" anchor="ctr">
+                    <a:lnL w="9525" cap="flat" cmpd="sng" algn="ctr">
+                      <a:solidFill>
+                        <a:srgbClr val="E3EDE6"/>
+                      </a:solidFill>
+                      <a:prstDash val="solid"/>
+                      <a:round/>
+                      <a:headEnd type="none" w="med" len="med"/>
+                      <a:tailEnd type="none" w="med" len="med"/>
+                    </a:lnL>
+                    <a:lnR w="9525" cap="flat" cmpd="sng" algn="ctr">
+                      <a:solidFill>
+                        <a:srgbClr val="E3EDE6"/>
+                      </a:solidFill>
+                      <a:prstDash val="solid"/>
+                      <a:round/>
+                      <a:headEnd type="none" w="med" len="med"/>
+                      <a:tailEnd type="none" w="med" len="med"/>
+                    </a:lnR>
+                    <a:lnT w="9525" cap="flat" cmpd="sng" algn="ctr">
+                      <a:solidFill>
+                        <a:srgbClr val="E3EDE6"/>
+                      </a:solidFill>
+                      <a:prstDash val="solid"/>
+                      <a:round/>
+                      <a:headEnd type="none" w="med" len="med"/>
+                      <a:tailEnd type="none" w="med" len="med"/>
+                    </a:lnT>
+                    <a:lnB w="9525" cap="flat" cmpd="sng" algn="ctr">
+                      <a:solidFill>
+                        <a:srgbClr val="E3EDE6"/>
+                      </a:solidFill>
+                      <a:prstDash val="solid"/>
+                      <a:round/>
+                      <a:headEnd type="none" w="med" len="med"/>
+                      <a:tailEnd type="none" w="med" len="med"/>
+                    </a:lnB>
+                    <a:solidFill>
+                      <a:schemeClr val="tx1"/>
+                    </a:solidFill>
+                  </a:tcPr>
+                </a:tc>
+                <a:tc>
+                  <a:txBody>
+                    <a:bodyPr/>
+                    <a:lstStyle/>
+                    <a:p>
+                      <a:pPr indent="0" marL="0">
+                        <a:buNone/>
+                      </a:pPr>
+                      <a:r>
+                        <a:rPr lang="en-US" sz="1000" b="1" dirty="0">
+                          <a:solidFill>
+                            <a:schemeClr val="bg1"/>
+                          </a:solidFill>
+                        </a:rPr>
+                        <a:t>Interactions</a:t>
+                      </a:r>
+                      <a:endParaRPr lang="en-US" sz="1000" dirty="0"/>
+                    </a:p>
+                  </a:txBody>
+                  <a:tcPr marL="128016" marR="128016" marT="54864" marB="54864" anchor="ctr">
+                    <a:lnL w="9525" cap="flat" cmpd="sng" algn="ctr">
+                      <a:solidFill>
+                        <a:srgbClr val="E3EDE6"/>
+                      </a:solidFill>
+                      <a:prstDash val="solid"/>
+                      <a:round/>
+                      <a:headEnd type="none" w="med" len="med"/>
+                      <a:tailEnd type="none" w="med" len="med"/>
+                    </a:lnL>
+                    <a:lnR w="9525" cap="flat" cmpd="sng" algn="ctr">
+                      <a:solidFill>
+                        <a:srgbClr val="E3EDE6"/>
+                      </a:solidFill>
+                      <a:prstDash val="solid"/>
+                      <a:round/>
+                      <a:headEnd type="none" w="med" len="med"/>
+                      <a:tailEnd type="none" w="med" len="med"/>
+                    </a:lnR>
+                    <a:lnT w="9525" cap="flat" cmpd="sng" algn="ctr">
+                      <a:solidFill>
+                        <a:srgbClr val="E3EDE6"/>
+                      </a:solidFill>
+                      <a:prstDash val="solid"/>
+                      <a:round/>
+                      <a:headEnd type="none" w="med" len="med"/>
+                      <a:tailEnd type="none" w="med" len="med"/>
+                    </a:lnT>
+                    <a:lnB w="9525" cap="flat" cmpd="sng" algn="ctr">
+                      <a:solidFill>
+                        <a:srgbClr val="E3EDE6"/>
+                      </a:solidFill>
+                      <a:prstDash val="solid"/>
+                      <a:round/>
+                      <a:headEnd type="none" w="med" len="med"/>
+                      <a:tailEnd type="none" w="med" len="med"/>
+                    </a:lnB>
+                    <a:solidFill>
+                      <a:schemeClr val="tx1"/>
+                    </a:solidFill>
+                  </a:tcPr>
+                </a:tc>
+                <a:tc>
+                  <a:txBody>
+                    <a:bodyPr/>
+                    <a:lstStyle/>
+                    <a:p>
+                      <a:pPr indent="0" marL="0">
+                        <a:buNone/>
+                      </a:pPr>
+                      <a:r>
+                        <a:rPr lang="en-US" sz="1000" b="1" dirty="0">
+                          <a:solidFill>
+                            <a:schemeClr val="bg1"/>
+                          </a:solidFill>
+                        </a:rPr>
+                        <a:t>Ticket clicks</a:t>
+                      </a:r>
+                      <a:endParaRPr lang="en-US" sz="1000" dirty="0"/>
+                    </a:p>
+                  </a:txBody>
+                  <a:tcPr marL="128016" marR="128016" marT="54864" marB="54864" anchor="ctr">
+                    <a:lnL w="9525" cap="flat" cmpd="sng" algn="ctr">
+                      <a:solidFill>
+                        <a:srgbClr val="E3EDE6"/>
+                      </a:solidFill>
+                      <a:prstDash val="solid"/>
+                      <a:round/>
+                      <a:headEnd type="none" w="med" len="med"/>
+                      <a:tailEnd type="none" w="med" len="med"/>
+                    </a:lnL>
+                    <a:lnR w="9525" cap="flat" cmpd="sng" algn="ctr">
+                      <a:solidFill>
+                        <a:srgbClr val="E3EDE6"/>
+                      </a:solidFill>
+                      <a:prstDash val="solid"/>
+                      <a:round/>
+                      <a:headEnd type="none" w="med" len="med"/>
+                      <a:tailEnd type="none" w="med" len="med"/>
+                    </a:lnR>
+                    <a:lnT w="9525" cap="flat" cmpd="sng" algn="ctr">
+                      <a:solidFill>
+                        <a:srgbClr val="E3EDE6"/>
+                      </a:solidFill>
+                      <a:prstDash val="solid"/>
+                      <a:round/>
+                      <a:headEnd type="none" w="med" len="med"/>
+                      <a:tailEnd type="none" w="med" len="med"/>
+                    </a:lnT>
+                    <a:lnB w="9525" cap="flat" cmpd="sng" algn="ctr">
+                      <a:solidFill>
+                        <a:srgbClr val="E3EDE6"/>
+                      </a:solidFill>
+                      <a:prstDash val="solid"/>
+                      <a:round/>
+                      <a:headEnd type="none" w="med" len="med"/>
+                      <a:tailEnd type="none" w="med" len="med"/>
+                    </a:lnB>
+                    <a:solidFill>
+                      <a:schemeClr val="tx1"/>
+                    </a:solidFill>
+                  </a:tcPr>
+                </a:tc>
+              </a:tr>
+              <a:tr h="274320">
+                <a:tc>
+                  <a:txBody>
+                    <a:bodyPr/>
+                    <a:lstStyle/>
+                    <a:p>
+                      <a:pPr indent="0" marL="0">
+                        <a:buNone/>
+                      </a:pPr>
+                      <a:r>
+                        <a:rPr lang="en-US" sz="1000" b="1" dirty="0">
+                          <a:solidFill>
+                            <a:schemeClr val="tx1"/>
+                          </a:solidFill>
+                        </a:rPr>
+                        <a:t>Creator A</a:t>
+                      </a:r>
+                      <a:endParaRPr lang="en-US" sz="1000" dirty="0"/>
+                    </a:p>
+                  </a:txBody>
+                  <a:tcPr marL="128016" marR="128016" marT="54864" marB="54864" anchor="ctr">
+                    <a:lnL w="9525" cap="flat" cmpd="sng" algn="ctr">
+                      <a:solidFill>
+                        <a:srgbClr val="E3EDE6"/>
+                      </a:solidFill>
+                      <a:prstDash val="solid"/>
+                      <a:round/>
+                      <a:headEnd type="none" w="med" len="med"/>
+                      <a:tailEnd type="none" w="med" len="med"/>
+                    </a:lnL>
+                    <a:lnR w="9525" cap="flat" cmpd="sng" algn="ctr">
+                      <a:solidFill>
+                        <a:srgbClr val="E3EDE6"/>
+                      </a:solidFill>
+                      <a:prstDash val="solid"/>
+                      <a:round/>
+                      <a:headEnd type="none" w="med" len="med"/>
+                      <a:tailEnd type="none" w="med" len="med"/>
+                    </a:lnR>
+                    <a:lnT w="9525" cap="flat" cmpd="sng" algn="ctr">
+                      <a:solidFill>
+                        <a:srgbClr val="E3EDE6"/>
+                      </a:solidFill>
+                      <a:prstDash val="solid"/>
+                      <a:round/>
+                      <a:headEnd type="none" w="med" len="med"/>
+                      <a:tailEnd type="none" w="med" len="med"/>
+                    </a:lnT>
+                    <a:lnB w="9525" cap="flat" cmpd="sng" algn="ctr">
+                      <a:solidFill>
+                        <a:srgbClr val="E3EDE6"/>
+                      </a:solidFill>
+                      <a:prstDash val="solid"/>
+                      <a:round/>
+                      <a:headEnd type="none" w="med" len="med"/>
+                      <a:tailEnd type="none" w="med" len="med"/>
+                    </a:lnB>
+                    <a:solidFill>
+                      <a:schemeClr val="bg1"/>
+                    </a:solidFill>
+                  </a:tcPr>
+                </a:tc>
+                <a:tc>
+                  <a:txBody>
+                    <a:bodyPr/>
+                    <a:lstStyle/>
+                    <a:p>
+                      <a:pPr indent="0" marL="0">
+                        <a:buNone/>
+                      </a:pPr>
+                      <a:r>
+                        <a:rPr lang="en-US" sz="1000" dirty="0">
+                          <a:solidFill>
+                            <a:schemeClr val="tx2"/>
+                          </a:solidFill>
+                        </a:rPr>
+                        <a:t>6</a:t>
+                      </a:r>
+                      <a:endParaRPr lang="en-US" sz="1000" dirty="0"/>
+                    </a:p>
+                  </a:txBody>
+                  <a:tcPr marL="128016" marR="128016" marT="54864" marB="54864" anchor="ctr">
+                    <a:lnL w="9525" cap="flat" cmpd="sng" algn="ctr">
+                      <a:solidFill>
+                        <a:srgbClr val="E3EDE6"/>
+                      </a:solidFill>
+                      <a:prstDash val="solid"/>
+                      <a:round/>
+                      <a:headEnd type="none" w="med" len="med"/>
+                      <a:tailEnd type="none" w="med" len="med"/>
+                    </a:lnL>
+                    <a:lnR w="9525" cap="flat" cmpd="sng" algn="ctr">
+                      <a:solidFill>
+                        <a:srgbClr val="E3EDE6"/>
+                      </a:solidFill>
+                      <a:prstDash val="solid"/>
+                      <a:round/>
+                      <a:headEnd type="none" w="med" len="med"/>
+                      <a:tailEnd type="none" w="med" len="med"/>
+                    </a:lnR>
+                    <a:lnT w="9525" cap="flat" cmpd="sng" algn="ctr">
+                      <a:solidFill>
+                        <a:srgbClr val="E3EDE6"/>
+                      </a:solidFill>
+                      <a:prstDash val="solid"/>
+                      <a:round/>
+                      <a:headEnd type="none" w="med" len="med"/>
+                      <a:tailEnd type="none" w="med" len="med"/>
+                    </a:lnT>
+                    <a:lnB w="9525" cap="flat" cmpd="sng" algn="ctr">
+                      <a:solidFill>
+                        <a:srgbClr val="E3EDE6"/>
+                      </a:solidFill>
+                      <a:prstDash val="solid"/>
+                      <a:round/>
+                      <a:headEnd type="none" w="med" len="med"/>
+                      <a:tailEnd type="none" w="med" len="med"/>
+                    </a:lnB>
+                    <a:solidFill>
+                      <a:schemeClr val="bg1"/>
+                    </a:solidFill>
+                  </a:tcPr>
+                </a:tc>
+                <a:tc>
+                  <a:txBody>
+                    <a:bodyPr/>
+                    <a:lstStyle/>
+                    <a:p>
+                      <a:pPr indent="0" marL="0">
+                        <a:buNone/>
+                      </a:pPr>
+                      <a:r>
+                        <a:rPr lang="en-US" sz="1000" dirty="0">
+                          <a:solidFill>
+                            <a:schemeClr val="tx2"/>
+                          </a:solidFill>
+                        </a:rPr>
+                        <a:t>820,000</a:t>
+                      </a:r>
+                      <a:endParaRPr lang="en-US" sz="1000" dirty="0"/>
+                    </a:p>
+                  </a:txBody>
+                  <a:tcPr marL="128016" marR="128016" marT="54864" marB="54864" anchor="ctr">
+                    <a:lnL w="9525" cap="flat" cmpd="sng" algn="ctr">
+                      <a:solidFill>
+                        <a:srgbClr val="E3EDE6"/>
+                      </a:solidFill>
+                      <a:prstDash val="solid"/>
+                      <a:round/>
+                      <a:headEnd type="none" w="med" len="med"/>
+                      <a:tailEnd type="none" w="med" len="med"/>
+                    </a:lnL>
+                    <a:lnR w="9525" cap="flat" cmpd="sng" algn="ctr">
+                      <a:solidFill>
+                        <a:srgbClr val="E3EDE6"/>
+                      </a:solidFill>
+                      <a:prstDash val="solid"/>
+                      <a:round/>
+                      <a:headEnd type="none" w="med" len="med"/>
+                      <a:tailEnd type="none" w="med" len="med"/>
+                    </a:lnR>
+                    <a:lnT w="9525" cap="flat" cmpd="sng" algn="ctr">
+                      <a:solidFill>
+                        <a:srgbClr val="E3EDE6"/>
+                      </a:solidFill>
+                      <a:prstDash val="solid"/>
+                      <a:round/>
+                      <a:headEnd type="none" w="med" len="med"/>
+                      <a:tailEnd type="none" w="med" len="med"/>
+                    </a:lnT>
+                    <a:lnB w="9525" cap="flat" cmpd="sng" algn="ctr">
+                      <a:solidFill>
+                        <a:srgbClr val="E3EDE6"/>
+                      </a:solidFill>
+                      <a:prstDash val="solid"/>
+                      <a:round/>
+                      <a:headEnd type="none" w="med" len="med"/>
+                      <a:tailEnd type="none" w="med" len="med"/>
+                    </a:lnB>
+                    <a:solidFill>
+                      <a:schemeClr val="bg1"/>
+                    </a:solidFill>
+                  </a:tcPr>
+                </a:tc>
+                <a:tc>
+                  <a:txBody>
+                    <a:bodyPr/>
+                    <a:lstStyle/>
+                    <a:p>
+                      <a:pPr indent="0" marL="0">
+                        <a:buNone/>
+                      </a:pPr>
+                      <a:r>
+                        <a:rPr lang="en-US" sz="1000" dirty="0">
+                          <a:solidFill>
+                            <a:schemeClr val="tx2"/>
+                          </a:solidFill>
+                        </a:rPr>
+                        <a:t>61,000</a:t>
+                      </a:r>
+                      <a:endParaRPr lang="en-US" sz="1000" dirty="0"/>
+                    </a:p>
+                  </a:txBody>
+                  <a:tcPr marL="128016" marR="128016" marT="54864" marB="54864" anchor="ctr">
+                    <a:lnL w="9525" cap="flat" cmpd="sng" algn="ctr">
+                      <a:solidFill>
+                        <a:srgbClr val="E3EDE6"/>
+                      </a:solidFill>
+                      <a:prstDash val="solid"/>
+                      <a:round/>
+                      <a:headEnd type="none" w="med" len="med"/>
+                      <a:tailEnd type="none" w="med" len="med"/>
+                    </a:lnL>
+                    <a:lnR w="9525" cap="flat" cmpd="sng" algn="ctr">
+                      <a:solidFill>
+                        <a:srgbClr val="E3EDE6"/>
+                      </a:solidFill>
+                      <a:prstDash val="solid"/>
+                      <a:round/>
+                      <a:headEnd type="none" w="med" len="med"/>
+                      <a:tailEnd type="none" w="med" len="med"/>
+                    </a:lnR>
+                    <a:lnT w="9525" cap="flat" cmpd="sng" algn="ctr">
+                      <a:solidFill>
+                        <a:srgbClr val="E3EDE6"/>
+                      </a:solidFill>
+                      <a:prstDash val="solid"/>
+                      <a:round/>
+                      <a:headEnd type="none" w="med" len="med"/>
+                      <a:tailEnd type="none" w="med" len="med"/>
+                    </a:lnT>
+                    <a:lnB w="9525" cap="flat" cmpd="sng" algn="ctr">
+                      <a:solidFill>
+                        <a:srgbClr val="E3EDE6"/>
+                      </a:solidFill>
+                      <a:prstDash val="solid"/>
+                      <a:round/>
+                      <a:headEnd type="none" w="med" len="med"/>
+                      <a:tailEnd type="none" w="med" len="med"/>
+                    </a:lnB>
+                    <a:solidFill>
+                      <a:schemeClr val="bg1"/>
+                    </a:solidFill>
+                  </a:tcPr>
+                </a:tc>
+                <a:tc>
+                  <a:txBody>
+                    <a:bodyPr/>
+                    <a:lstStyle/>
+                    <a:p>
+                      <a:pPr indent="0" marL="0">
+                        <a:buNone/>
+                      </a:pPr>
+                      <a:r>
+                        <a:rPr lang="en-US" sz="1000" dirty="0">
+                          <a:solidFill>
+                            <a:schemeClr val="tx2"/>
+                          </a:solidFill>
+                        </a:rPr>
+                        <a:t>2,100</a:t>
+                      </a:r>
+                      <a:endParaRPr lang="en-US" sz="1000" dirty="0"/>
+                    </a:p>
+                  </a:txBody>
+                  <a:tcPr marL="128016" marR="128016" marT="54864" marB="54864" anchor="ctr">
+                    <a:lnL w="9525" cap="flat" cmpd="sng" algn="ctr">
+                      <a:solidFill>
+                        <a:srgbClr val="E3EDE6"/>
+                      </a:solidFill>
+                      <a:prstDash val="solid"/>
+                      <a:round/>
+                      <a:headEnd type="none" w="med" len="med"/>
+                      <a:tailEnd type="none" w="med" len="med"/>
+                    </a:lnL>
+                    <a:lnR w="9525" cap="flat" cmpd="sng" algn="ctr">
+                      <a:solidFill>
+                        <a:srgbClr val="E3EDE6"/>
+                      </a:solidFill>
+                      <a:prstDash val="solid"/>
+                      <a:round/>
+                      <a:headEnd type="none" w="med" len="med"/>
+                      <a:tailEnd type="none" w="med" len="med"/>
+                    </a:lnR>
+                    <a:lnT w="9525" cap="flat" cmpd="sng" algn="ctr">
+                      <a:solidFill>
+                        <a:srgbClr val="E3EDE6"/>
+                      </a:solidFill>
+                      <a:prstDash val="solid"/>
+                      <a:round/>
+                      <a:headEnd type="none" w="med" len="med"/>
+                      <a:tailEnd type="none" w="med" len="med"/>
+                    </a:lnT>
+                    <a:lnB w="9525" cap="flat" cmpd="sng" algn="ctr">
+                      <a:solidFill>
+                        <a:srgbClr val="E3EDE6"/>
+                      </a:solidFill>
+                      <a:prstDash val="solid"/>
+                      <a:round/>
+                      <a:headEnd type="none" w="med" len="med"/>
+                      <a:tailEnd type="none" w="med" len="med"/>
+                    </a:lnB>
+                    <a:solidFill>
+                      <a:schemeClr val="bg1"/>
+                    </a:solidFill>
+                  </a:tcPr>
+                </a:tc>
+              </a:tr>
+              <a:tr h="274320">
+                <a:tc>
+                  <a:txBody>
+                    <a:bodyPr/>
+                    <a:lstStyle/>
+                    <a:p>
+                      <a:pPr indent="0" marL="0">
+                        <a:buNone/>
+                      </a:pPr>
+                      <a:r>
+                        <a:rPr lang="en-US" sz="1000" b="1" dirty="0">
+                          <a:solidFill>
+                            <a:schemeClr val="tx1"/>
+                          </a:solidFill>
+                        </a:rPr>
+                        <a:t>Creator B</a:t>
+                      </a:r>
+                      <a:endParaRPr lang="en-US" sz="1000" dirty="0"/>
+                    </a:p>
+                  </a:txBody>
+                  <a:tcPr marL="128016" marR="128016" marT="54864" marB="54864" anchor="ctr">
+                    <a:lnL w="9525" cap="flat" cmpd="sng" algn="ctr">
+                      <a:solidFill>
+                        <a:srgbClr val="E3EDE6"/>
+                      </a:solidFill>
+                      <a:prstDash val="solid"/>
+                      <a:round/>
+                      <a:headEnd type="none" w="med" len="med"/>
+                      <a:tailEnd type="none" w="med" len="med"/>
+                    </a:lnL>
+                    <a:lnR w="9525" cap="flat" cmpd="sng" algn="ctr">
+                      <a:solidFill>
+                        <a:srgbClr val="E3EDE6"/>
+                      </a:solidFill>
+                      <a:prstDash val="solid"/>
+                      <a:round/>
+                      <a:headEnd type="none" w="med" len="med"/>
+                      <a:tailEnd type="none" w="med" len="med"/>
+                    </a:lnR>
+                    <a:lnT w="9525" cap="flat" cmpd="sng" algn="ctr">
+                      <a:solidFill>
+                        <a:srgbClr val="E3EDE6"/>
+                      </a:solidFill>
+                      <a:prstDash val="solid"/>
+                      <a:round/>
+                      <a:headEnd type="none" w="med" len="med"/>
+                      <a:tailEnd type="none" w="med" len="med"/>
+                    </a:lnT>
+                    <a:lnB w="9525" cap="flat" cmpd="sng" algn="ctr">
+                      <a:solidFill>
+                        <a:srgbClr val="E3EDE6"/>
+                      </a:solidFill>
+                      <a:prstDash val="solid"/>
+                      <a:round/>
+                      <a:headEnd type="none" w="med" len="med"/>
+                      <a:tailEnd type="none" w="med" len="med"/>
+                    </a:lnB>
+                    <a:solidFill>
+                      <a:schemeClr val="bg1"/>
+                    </a:solidFill>
+                  </a:tcPr>
+                </a:tc>
+                <a:tc>
+                  <a:txBody>
+                    <a:bodyPr/>
+                    <a:lstStyle/>
+                    <a:p>
+                      <a:pPr indent="0" marL="0">
+                        <a:buNone/>
+                      </a:pPr>
+                      <a:r>
+                        <a:rPr lang="en-US" sz="1000" dirty="0">
+                          <a:solidFill>
+                            <a:schemeClr val="tx2"/>
+                          </a:solidFill>
+                        </a:rPr>
+                        <a:t>5</a:t>
+                      </a:r>
+                      <a:endParaRPr lang="en-US" sz="1000" dirty="0"/>
+                    </a:p>
+                  </a:txBody>
+                  <a:tcPr marL="128016" marR="128016" marT="54864" marB="54864" anchor="ctr">
+                    <a:lnL w="9525" cap="flat" cmpd="sng" algn="ctr">
+                      <a:solidFill>
+                        <a:srgbClr val="E3EDE6"/>
+                      </a:solidFill>
+                      <a:prstDash val="solid"/>
+                      <a:round/>
+                      <a:headEnd type="none" w="med" len="med"/>
+                      <a:tailEnd type="none" w="med" len="med"/>
+                    </a:lnL>
+                    <a:lnR w="9525" cap="flat" cmpd="sng" algn="ctr">
+                      <a:solidFill>
+                        <a:srgbClr val="E3EDE6"/>
+                      </a:solidFill>
+                      <a:prstDash val="solid"/>
+                      <a:round/>
+                      <a:headEnd type="none" w="med" len="med"/>
+                      <a:tailEnd type="none" w="med" len="med"/>
+                    </a:lnR>
+                    <a:lnT w="9525" cap="flat" cmpd="sng" algn="ctr">
+                      <a:solidFill>
+                        <a:srgbClr val="E3EDE6"/>
+                      </a:solidFill>
+                      <a:prstDash val="solid"/>
+                      <a:round/>
+                      <a:headEnd type="none" w="med" len="med"/>
+                      <a:tailEnd type="none" w="med" len="med"/>
+                    </a:lnT>
+                    <a:lnB w="9525" cap="flat" cmpd="sng" algn="ctr">
+                      <a:solidFill>
+                        <a:srgbClr val="E3EDE6"/>
+                      </a:solidFill>
+                      <a:prstDash val="solid"/>
+                      <a:round/>
+                      <a:headEnd type="none" w="med" len="med"/>
+                      <a:tailEnd type="none" w="med" len="med"/>
+                    </a:lnB>
+                    <a:solidFill>
+                      <a:schemeClr val="bg1"/>
+                    </a:solidFill>
+                  </a:tcPr>
+                </a:tc>
+                <a:tc>
+                  <a:txBody>
+                    <a:bodyPr/>
+                    <a:lstStyle/>
+                    <a:p>
+                      <a:pPr indent="0" marL="0">
+                        <a:buNone/>
+                      </a:pPr>
+                      <a:r>
+                        <a:rPr lang="en-US" sz="1000" dirty="0">
+                          <a:solidFill>
+                            <a:schemeClr val="tx2"/>
+                          </a:solidFill>
+                        </a:rPr>
+                        <a:t>610,000</a:t>
+                      </a:r>
+                      <a:endParaRPr lang="en-US" sz="1000" dirty="0"/>
+                    </a:p>
+                  </a:txBody>
+                  <a:tcPr marL="128016" marR="128016" marT="54864" marB="54864" anchor="ctr">
+                    <a:lnL w="9525" cap="flat" cmpd="sng" algn="ctr">
+                      <a:solidFill>
+                        <a:srgbClr val="E3EDE6"/>
+                      </a:solidFill>
+                      <a:prstDash val="solid"/>
+                      <a:round/>
+                      <a:headEnd type="none" w="med" len="med"/>
+                      <a:tailEnd type="none" w="med" len="med"/>
+                    </a:lnL>
+                    <a:lnR w="9525" cap="flat" cmpd="sng" algn="ctr">
+                      <a:solidFill>
+                        <a:srgbClr val="E3EDE6"/>
+                      </a:solidFill>
+                      <a:prstDash val="solid"/>
+                      <a:round/>
+                      <a:headEnd type="none" w="med" len="med"/>
+                      <a:tailEnd type="none" w="med" len="med"/>
+                    </a:lnR>
+                    <a:lnT w="9525" cap="flat" cmpd="sng" algn="ctr">
+                      <a:solidFill>
+                        <a:srgbClr val="E3EDE6"/>
+                      </a:solidFill>
+                      <a:prstDash val="solid"/>
+                      <a:round/>
+                      <a:headEnd type="none" w="med" len="med"/>
+                      <a:tailEnd type="none" w="med" len="med"/>
+                    </a:lnT>
+                    <a:lnB w="9525" cap="flat" cmpd="sng" algn="ctr">
+                      <a:solidFill>
+                        <a:srgbClr val="E3EDE6"/>
+                      </a:solidFill>
+                      <a:prstDash val="solid"/>
+                      <a:round/>
+                      <a:headEnd type="none" w="med" len="med"/>
+                      <a:tailEnd type="none" w="med" len="med"/>
+                    </a:lnB>
+                    <a:solidFill>
+                      <a:schemeClr val="bg1"/>
+                    </a:solidFill>
+                  </a:tcPr>
+                </a:tc>
+                <a:tc>
+                  <a:txBody>
+                    <a:bodyPr/>
+                    <a:lstStyle/>
+                    <a:p>
+                      <a:pPr indent="0" marL="0">
+                        <a:buNone/>
+                      </a:pPr>
+                      <a:r>
+                        <a:rPr lang="en-US" sz="1000" dirty="0">
+                          <a:solidFill>
+                            <a:schemeClr val="tx2"/>
+                          </a:solidFill>
+                        </a:rPr>
+                        <a:t>48,500</a:t>
+                      </a:r>
+                      <a:endParaRPr lang="en-US" sz="1000" dirty="0"/>
+                    </a:p>
+                  </a:txBody>
+                  <a:tcPr marL="128016" marR="128016" marT="54864" marB="54864" anchor="ctr">
+                    <a:lnL w="9525" cap="flat" cmpd="sng" algn="ctr">
+                      <a:solidFill>
+                        <a:srgbClr val="E3EDE6"/>
+                      </a:solidFill>
+                      <a:prstDash val="solid"/>
+                      <a:round/>
+                      <a:headEnd type="none" w="med" len="med"/>
+                      <a:tailEnd type="none" w="med" len="med"/>
+                    </a:lnL>
+                    <a:lnR w="9525" cap="flat" cmpd="sng" algn="ctr">
+                      <a:solidFill>
+                        <a:srgbClr val="E3EDE6"/>
+                      </a:solidFill>
+                      <a:prstDash val="solid"/>
+                      <a:round/>
+                      <a:headEnd type="none" w="med" len="med"/>
+                      <a:tailEnd type="none" w="med" len="med"/>
+                    </a:lnR>
+                    <a:lnT w="9525" cap="flat" cmpd="sng" algn="ctr">
+                      <a:solidFill>
+                        <a:srgbClr val="E3EDE6"/>
+                      </a:solidFill>
+                      <a:prstDash val="solid"/>
+                      <a:round/>
+                      <a:headEnd type="none" w="med" len="med"/>
+                      <a:tailEnd type="none" w="med" len="med"/>
+                    </a:lnT>
+                    <a:lnB w="9525" cap="flat" cmpd="sng" algn="ctr">
+                      <a:solidFill>
+                        <a:srgbClr val="E3EDE6"/>
+                      </a:solidFill>
+                      <a:prstDash val="solid"/>
+                      <a:round/>
+                      <a:headEnd type="none" w="med" len="med"/>
+                      <a:tailEnd type="none" w="med" len="med"/>
+                    </a:lnB>
+                    <a:solidFill>
+                      <a:schemeClr val="bg1"/>
+                    </a:solidFill>
+                  </a:tcPr>
+                </a:tc>
+                <a:tc>
+                  <a:txBody>
+                    <a:bodyPr/>
+                    <a:lstStyle/>
+                    <a:p>
+                      <a:pPr indent="0" marL="0">
+                        <a:buNone/>
+                      </a:pPr>
+                      <a:r>
+                        <a:rPr lang="en-US" sz="1000" dirty="0">
+                          <a:solidFill>
+                            <a:schemeClr val="tx2"/>
+                          </a:solidFill>
+                        </a:rPr>
+                        <a:t>1,650</a:t>
+                      </a:r>
+                      <a:endParaRPr lang="en-US" sz="1000" dirty="0"/>
+                    </a:p>
+                  </a:txBody>
+                  <a:tcPr marL="128016" marR="128016" marT="54864" marB="54864" anchor="ctr">
+                    <a:lnL w="9525" cap="flat" cmpd="sng" algn="ctr">
+                      <a:solidFill>
+                        <a:srgbClr val="E3EDE6"/>
+                      </a:solidFill>
+                      <a:prstDash val="solid"/>
+                      <a:round/>
+                      <a:headEnd type="none" w="med" len="med"/>
+                      <a:tailEnd type="none" w="med" len="med"/>
+                    </a:lnL>
+                    <a:lnR w="9525" cap="flat" cmpd="sng" algn="ctr">
+                      <a:solidFill>
+                        <a:srgbClr val="E3EDE6"/>
+                      </a:solidFill>
+                      <a:prstDash val="solid"/>
+                      <a:round/>
+                      <a:headEnd type="none" w="med" len="med"/>
+                      <a:tailEnd type="none" w="med" len="med"/>
+                    </a:lnR>
+                    <a:lnT w="9525" cap="flat" cmpd="sng" algn="ctr">
+                      <a:solidFill>
+                        <a:srgbClr val="E3EDE6"/>
+                      </a:solidFill>
+                      <a:prstDash val="solid"/>
+                      <a:round/>
+                      <a:headEnd type="none" w="med" len="med"/>
+                      <a:tailEnd type="none" w="med" len="med"/>
+                    </a:lnT>
+                    <a:lnB w="9525" cap="flat" cmpd="sng" algn="ctr">
+                      <a:solidFill>
+                        <a:srgbClr val="E3EDE6"/>
+                      </a:solidFill>
+                      <a:prstDash val="solid"/>
+                      <a:round/>
+                      <a:headEnd type="none" w="med" len="med"/>
+                      <a:tailEnd type="none" w="med" len="med"/>
+                    </a:lnB>
+                    <a:solidFill>
+                      <a:schemeClr val="bg1"/>
+                    </a:solidFill>
+                  </a:tcPr>
+                </a:tc>
+              </a:tr>
+              <a:tr h="274320">
+                <a:tc>
+                  <a:txBody>
+                    <a:bodyPr/>
+                    <a:lstStyle/>
+                    <a:p>
+                      <a:pPr indent="0" marL="0">
+                        <a:buNone/>
+                      </a:pPr>
+                      <a:r>
+                        <a:rPr lang="en-US" sz="1000" b="1" dirty="0">
+                          <a:solidFill>
+                            <a:schemeClr val="tx1"/>
+                          </a:solidFill>
+                        </a:rPr>
+                        <a:t>Creator C</a:t>
+                      </a:r>
+                      <a:endParaRPr lang="en-US" sz="1000" dirty="0"/>
+                    </a:p>
+                  </a:txBody>
+                  <a:tcPr marL="128016" marR="128016" marT="54864" marB="54864" anchor="ctr">
+                    <a:lnL w="9525" cap="flat" cmpd="sng" algn="ctr">
+                      <a:solidFill>
+                        <a:srgbClr val="E3EDE6"/>
+                      </a:solidFill>
+                      <a:prstDash val="solid"/>
+                      <a:round/>
+                      <a:headEnd type="none" w="med" len="med"/>
+                      <a:tailEnd type="none" w="med" len="med"/>
+                    </a:lnL>
+                    <a:lnR w="9525" cap="flat" cmpd="sng" algn="ctr">
+                      <a:solidFill>
+                        <a:srgbClr val="E3EDE6"/>
+                      </a:solidFill>
+                      <a:prstDash val="solid"/>
+                      <a:round/>
+                      <a:headEnd type="none" w="med" len="med"/>
+                      <a:tailEnd type="none" w="med" len="med"/>
+                    </a:lnR>
+                    <a:lnT w="9525" cap="flat" cmpd="sng" algn="ctr">
+                      <a:solidFill>
+                        <a:srgbClr val="E3EDE6"/>
+                      </a:solidFill>
+                      <a:prstDash val="solid"/>
+                      <a:round/>
+                      <a:headEnd type="none" w="med" len="med"/>
+                      <a:tailEnd type="none" w="med" len="med"/>
+                    </a:lnT>
+                    <a:lnB w="9525" cap="flat" cmpd="sng" algn="ctr">
+                      <a:solidFill>
+                        <a:srgbClr val="E3EDE6"/>
+                      </a:solidFill>
+                      <a:prstDash val="solid"/>
+                      <a:round/>
+                      <a:headEnd type="none" w="med" len="med"/>
+                      <a:tailEnd type="none" w="med" len="med"/>
+                    </a:lnB>
+                    <a:solidFill>
+                      <a:schemeClr val="bg1"/>
+                    </a:solidFill>
+                  </a:tcPr>
+                </a:tc>
+                <a:tc>
+                  <a:txBody>
+                    <a:bodyPr/>
+                    <a:lstStyle/>
+                    <a:p>
+                      <a:pPr indent="0" marL="0">
+                        <a:buNone/>
+                      </a:pPr>
+                      <a:r>
+                        <a:rPr lang="en-US" sz="1000" dirty="0">
+                          <a:solidFill>
+                            <a:schemeClr val="tx2"/>
+                          </a:solidFill>
+                        </a:rPr>
+                        <a:t>4</a:t>
+                      </a:r>
+                      <a:endParaRPr lang="en-US" sz="1000" dirty="0"/>
+                    </a:p>
+                  </a:txBody>
+                  <a:tcPr marL="128016" marR="128016" marT="54864" marB="54864" anchor="ctr">
+                    <a:lnL w="9525" cap="flat" cmpd="sng" algn="ctr">
+                      <a:solidFill>
+                        <a:srgbClr val="E3EDE6"/>
+                      </a:solidFill>
+                      <a:prstDash val="solid"/>
+                      <a:round/>
+                      <a:headEnd type="none" w="med" len="med"/>
+                      <a:tailEnd type="none" w="med" len="med"/>
+                    </a:lnL>
+                    <a:lnR w="9525" cap="flat" cmpd="sng" algn="ctr">
+                      <a:solidFill>
+                        <a:srgbClr val="E3EDE6"/>
+                      </a:solidFill>
+                      <a:prstDash val="solid"/>
+                      <a:round/>
+                      <a:headEnd type="none" w="med" len="med"/>
+                      <a:tailEnd type="none" w="med" len="med"/>
+                    </a:lnR>
+                    <a:lnT w="9525" cap="flat" cmpd="sng" algn="ctr">
+                      <a:solidFill>
+                        <a:srgbClr val="E3EDE6"/>
+                      </a:solidFill>
+                      <a:prstDash val="solid"/>
+                      <a:round/>
+                      <a:headEnd type="none" w="med" len="med"/>
+                      <a:tailEnd type="none" w="med" len="med"/>
+                    </a:lnT>
+                    <a:lnB w="9525" cap="flat" cmpd="sng" algn="ctr">
+                      <a:solidFill>
+                        <a:srgbClr val="E3EDE6"/>
+                      </a:solidFill>
+                      <a:prstDash val="solid"/>
+                      <a:round/>
+                      <a:headEnd type="none" w="med" len="med"/>
+                      <a:tailEnd type="none" w="med" len="med"/>
+                    </a:lnB>
+                    <a:solidFill>
+                      <a:schemeClr val="bg1"/>
+                    </a:solidFill>
+                  </a:tcPr>
+                </a:tc>
+                <a:tc>
+                  <a:txBody>
+                    <a:bodyPr/>
+                    <a:lstStyle/>
+                    <a:p>
+                      <a:pPr indent="0" marL="0">
+                        <a:buNone/>
+                      </a:pPr>
+                      <a:r>
+                        <a:rPr lang="en-US" sz="1000" dirty="0">
+                          <a:solidFill>
+                            <a:schemeClr val="tx2"/>
+                          </a:solidFill>
+                        </a:rPr>
+                        <a:t>455,000</a:t>
+                      </a:r>
+                      <a:endParaRPr lang="en-US" sz="1000" dirty="0"/>
+                    </a:p>
+                  </a:txBody>
+                  <a:tcPr marL="128016" marR="128016" marT="54864" marB="54864" anchor="ctr">
+                    <a:lnL w="9525" cap="flat" cmpd="sng" algn="ctr">
+                      <a:solidFill>
+                        <a:srgbClr val="E3EDE6"/>
+                      </a:solidFill>
+                      <a:prstDash val="solid"/>
+                      <a:round/>
+                      <a:headEnd type="none" w="med" len="med"/>
+                      <a:tailEnd type="none" w="med" len="med"/>
+                    </a:lnL>
+                    <a:lnR w="9525" cap="flat" cmpd="sng" algn="ctr">
+                      <a:solidFill>
+                        <a:srgbClr val="E3EDE6"/>
+                      </a:solidFill>
+                      <a:prstDash val="solid"/>
+                      <a:round/>
+                      <a:headEnd type="none" w="med" len="med"/>
+                      <a:tailEnd type="none" w="med" len="med"/>
+                    </a:lnR>
+                    <a:lnT w="9525" cap="flat" cmpd="sng" algn="ctr">
+                      <a:solidFill>
+                        <a:srgbClr val="E3EDE6"/>
+                      </a:solidFill>
+                      <a:prstDash val="solid"/>
+                      <a:round/>
+                      <a:headEnd type="none" w="med" len="med"/>
+                      <a:tailEnd type="none" w="med" len="med"/>
+                    </a:lnT>
+                    <a:lnB w="9525" cap="flat" cmpd="sng" algn="ctr">
+                      <a:solidFill>
+                        <a:srgbClr val="E3EDE6"/>
+                      </a:solidFill>
+                      <a:prstDash val="solid"/>
+                      <a:round/>
+                      <a:headEnd type="none" w="med" len="med"/>
+                      <a:tailEnd type="none" w="med" len="med"/>
+                    </a:lnB>
+                    <a:solidFill>
+                      <a:schemeClr val="bg1"/>
+                    </a:solidFill>
+                  </a:tcPr>
+                </a:tc>
+                <a:tc>
+                  <a:txBody>
+                    <a:bodyPr/>
+                    <a:lstStyle/>
+                    <a:p>
+                      <a:pPr indent="0" marL="0">
+                        <a:buNone/>
+                      </a:pPr>
+                      <a:r>
+                        <a:rPr lang="en-US" sz="1000" dirty="0">
+                          <a:solidFill>
+                            <a:schemeClr val="tx2"/>
+                          </a:solidFill>
+                        </a:rPr>
+                        <a:t>39,200</a:t>
+                      </a:r>
+                      <a:endParaRPr lang="en-US" sz="1000" dirty="0"/>
+                    </a:p>
+                  </a:txBody>
+                  <a:tcPr marL="128016" marR="128016" marT="54864" marB="54864" anchor="ctr">
+                    <a:lnL w="9525" cap="flat" cmpd="sng" algn="ctr">
+                      <a:solidFill>
+                        <a:srgbClr val="E3EDE6"/>
+                      </a:solidFill>
+                      <a:prstDash val="solid"/>
+                      <a:round/>
+                      <a:headEnd type="none" w="med" len="med"/>
+                      <a:tailEnd type="none" w="med" len="med"/>
+                    </a:lnL>
+                    <a:lnR w="9525" cap="flat" cmpd="sng" algn="ctr">
+                      <a:solidFill>
+                        <a:srgbClr val="E3EDE6"/>
+                      </a:solidFill>
+                      <a:prstDash val="solid"/>
+                      <a:round/>
+                      <a:headEnd type="none" w="med" len="med"/>
+                      <a:tailEnd type="none" w="med" len="med"/>
+                    </a:lnR>
+                    <a:lnT w="9525" cap="flat" cmpd="sng" algn="ctr">
+                      <a:solidFill>
+                        <a:srgbClr val="E3EDE6"/>
+                      </a:solidFill>
+                      <a:prstDash val="solid"/>
+                      <a:round/>
+                      <a:headEnd type="none" w="med" len="med"/>
+                      <a:tailEnd type="none" w="med" len="med"/>
+                    </a:lnT>
+                    <a:lnB w="9525" cap="flat" cmpd="sng" algn="ctr">
+                      <a:solidFill>
+                        <a:srgbClr val="E3EDE6"/>
+                      </a:solidFill>
+                      <a:prstDash val="solid"/>
+                      <a:round/>
+                      <a:headEnd type="none" w="med" len="med"/>
+                      <a:tailEnd type="none" w="med" len="med"/>
+                    </a:lnB>
+                    <a:solidFill>
+                      <a:schemeClr val="bg1"/>
+                    </a:solidFill>
+                  </a:tcPr>
+                </a:tc>
+                <a:tc>
+                  <a:txBody>
+                    <a:bodyPr/>
+                    <a:lstStyle/>
+                    <a:p>
+                      <a:pPr indent="0" marL="0">
+                        <a:buNone/>
+                      </a:pPr>
+                      <a:r>
+                        <a:rPr lang="en-US" sz="1000" dirty="0">
+                          <a:solidFill>
+                            <a:schemeClr val="tx2"/>
+                          </a:solidFill>
+                        </a:rPr>
+                        <a:t>1,240</a:t>
+                      </a:r>
+                      <a:endParaRPr lang="en-US" sz="1000" dirty="0"/>
+                    </a:p>
+                  </a:txBody>
+                  <a:tcPr marL="128016" marR="128016" marT="54864" marB="54864" anchor="ctr">
+                    <a:lnL w="9525" cap="flat" cmpd="sng" algn="ctr">
+                      <a:solidFill>
+                        <a:srgbClr val="E3EDE6"/>
+                      </a:solidFill>
+                      <a:prstDash val="solid"/>
+                      <a:round/>
+                      <a:headEnd type="none" w="med" len="med"/>
+                      <a:tailEnd type="none" w="med" len="med"/>
+                    </a:lnL>
+                    <a:lnR w="9525" cap="flat" cmpd="sng" algn="ctr">
+                      <a:solidFill>
+                        <a:srgbClr val="E3EDE6"/>
+                      </a:solidFill>
+                      <a:prstDash val="solid"/>
+                      <a:round/>
+                      <a:headEnd type="none" w="med" len="med"/>
+                      <a:tailEnd type="none" w="med" len="med"/>
+                    </a:lnR>
+                    <a:lnT w="9525" cap="flat" cmpd="sng" algn="ctr">
+                      <a:solidFill>
+                        <a:srgbClr val="E3EDE6"/>
+                      </a:solidFill>
+                      <a:prstDash val="solid"/>
+                      <a:round/>
+                      <a:headEnd type="none" w="med" len="med"/>
+                      <a:tailEnd type="none" w="med" len="med"/>
+                    </a:lnT>
+                    <a:lnB w="9525" cap="flat" cmpd="sng" algn="ctr">
+                      <a:solidFill>
+                        <a:srgbClr val="E3EDE6"/>
+                      </a:solidFill>
+                      <a:prstDash val="solid"/>
+                      <a:round/>
+                      <a:headEnd type="none" w="med" len="med"/>
+                      <a:tailEnd type="none" w="med" len="med"/>
+                    </a:lnB>
+                    <a:solidFill>
+                      <a:schemeClr val="bg1"/>
+                    </a:solidFill>
+                  </a:tcPr>
+                </a:tc>
+              </a:tr>
+              <a:tr h="274320">
+                <a:tc>
+                  <a:txBody>
+                    <a:bodyPr/>
+                    <a:lstStyle/>
+                    <a:p>
+                      <a:pPr indent="0" marL="0">
+                        <a:buNone/>
+                      </a:pPr>
+                      <a:r>
+                        <a:rPr lang="en-US" sz="1000" b="1" dirty="0">
+                          <a:solidFill>
+                            <a:schemeClr val="tx1"/>
+                          </a:solidFill>
+                        </a:rPr>
+                        <a:t>Creator D</a:t>
+                      </a:r>
+                      <a:endParaRPr lang="en-US" sz="1000" dirty="0"/>
+                    </a:p>
+                  </a:txBody>
+                  <a:tcPr marL="128016" marR="128016" marT="54864" marB="54864" anchor="ctr">
+                    <a:lnL w="9525" cap="flat" cmpd="sng" algn="ctr">
+                      <a:solidFill>
+                        <a:srgbClr val="E3EDE6"/>
+                      </a:solidFill>
+                      <a:prstDash val="solid"/>
+                      <a:round/>
+                      <a:headEnd type="none" w="med" len="med"/>
+                      <a:tailEnd type="none" w="med" len="med"/>
+                    </a:lnL>
+                    <a:lnR w="9525" cap="flat" cmpd="sng" algn="ctr">
+                      <a:solidFill>
+                        <a:srgbClr val="E3EDE6"/>
+                      </a:solidFill>
+                      <a:prstDash val="solid"/>
+                      <a:round/>
+                      <a:headEnd type="none" w="med" len="med"/>
+                      <a:tailEnd type="none" w="med" len="med"/>
+                    </a:lnR>
+                    <a:lnT w="9525" cap="flat" cmpd="sng" algn="ctr">
+                      <a:solidFill>
+                        <a:srgbClr val="E3EDE6"/>
+                      </a:solidFill>
+                      <a:prstDash val="solid"/>
+                      <a:round/>
+                      <a:headEnd type="none" w="med" len="med"/>
+                      <a:tailEnd type="none" w="med" len="med"/>
+                    </a:lnT>
+                    <a:lnB w="9525" cap="flat" cmpd="sng" algn="ctr">
+                      <a:solidFill>
+                        <a:srgbClr val="E3EDE6"/>
+                      </a:solidFill>
+                      <a:prstDash val="solid"/>
+                      <a:round/>
+                      <a:headEnd type="none" w="med" len="med"/>
+                      <a:tailEnd type="none" w="med" len="med"/>
+                    </a:lnB>
+                    <a:solidFill>
+                      <a:schemeClr val="bg1"/>
+                    </a:solidFill>
+                  </a:tcPr>
+                </a:tc>
+                <a:tc>
+                  <a:txBody>
+                    <a:bodyPr/>
+                    <a:lstStyle/>
+                    <a:p>
+                      <a:pPr indent="0" marL="0">
+                        <a:buNone/>
+                      </a:pPr>
+                      <a:r>
+                        <a:rPr lang="en-US" sz="1000" dirty="0">
+                          <a:solidFill>
+                            <a:schemeClr val="tx2"/>
+                          </a:solidFill>
+                        </a:rPr>
+                        <a:t>4</a:t>
+                      </a:r>
+                      <a:endParaRPr lang="en-US" sz="1000" dirty="0"/>
+                    </a:p>
+                  </a:txBody>
+                  <a:tcPr marL="128016" marR="128016" marT="54864" marB="54864" anchor="ctr">
+                    <a:lnL w="9525" cap="flat" cmpd="sng" algn="ctr">
+                      <a:solidFill>
+                        <a:srgbClr val="E3EDE6"/>
+                      </a:solidFill>
+                      <a:prstDash val="solid"/>
+                      <a:round/>
+                      <a:headEnd type="none" w="med" len="med"/>
+                      <a:tailEnd type="none" w="med" len="med"/>
+                    </a:lnL>
+                    <a:lnR w="9525" cap="flat" cmpd="sng" algn="ctr">
+                      <a:solidFill>
+                        <a:srgbClr val="E3EDE6"/>
+                      </a:solidFill>
+                      <a:prstDash val="solid"/>
+                      <a:round/>
+                      <a:headEnd type="none" w="med" len="med"/>
+                      <a:tailEnd type="none" w="med" len="med"/>
+                    </a:lnR>
+                    <a:lnT w="9525" cap="flat" cmpd="sng" algn="ctr">
+                      <a:solidFill>
+                        <a:srgbClr val="E3EDE6"/>
+                      </a:solidFill>
+                      <a:prstDash val="solid"/>
+                      <a:round/>
+                      <a:headEnd type="none" w="med" len="med"/>
+                      <a:tailEnd type="none" w="med" len="med"/>
+                    </a:lnT>
+                    <a:lnB w="9525" cap="flat" cmpd="sng" algn="ctr">
+                      <a:solidFill>
+                        <a:srgbClr val="E3EDE6"/>
+                      </a:solidFill>
+                      <a:prstDash val="solid"/>
+                      <a:round/>
+                      <a:headEnd type="none" w="med" len="med"/>
+                      <a:tailEnd type="none" w="med" len="med"/>
+                    </a:lnB>
+                    <a:solidFill>
+                      <a:schemeClr val="bg1"/>
+                    </a:solidFill>
+                  </a:tcPr>
+                </a:tc>
+                <a:tc>
+                  <a:txBody>
+                    <a:bodyPr/>
+                    <a:lstStyle/>
+                    <a:p>
+                      <a:pPr indent="0" marL="0">
+                        <a:buNone/>
+                      </a:pPr>
+                      <a:r>
+                        <a:rPr lang="en-US" sz="1000" dirty="0">
+                          <a:solidFill>
+                            <a:schemeClr val="tx2"/>
+                          </a:solidFill>
+                        </a:rPr>
+                        <a:t>380,000</a:t>
+                      </a:r>
+                      <a:endParaRPr lang="en-US" sz="1000" dirty="0"/>
+                    </a:p>
+                  </a:txBody>
+                  <a:tcPr marL="128016" marR="128016" marT="54864" marB="54864" anchor="ctr">
+                    <a:lnL w="9525" cap="flat" cmpd="sng" algn="ctr">
+                      <a:solidFill>
+                        <a:srgbClr val="E3EDE6"/>
+                      </a:solidFill>
+                      <a:prstDash val="solid"/>
+                      <a:round/>
+                      <a:headEnd type="none" w="med" len="med"/>
+                      <a:tailEnd type="none" w="med" len="med"/>
+                    </a:lnL>
+                    <a:lnR w="9525" cap="flat" cmpd="sng" algn="ctr">
+                      <a:solidFill>
+                        <a:srgbClr val="E3EDE6"/>
+                      </a:solidFill>
+                      <a:prstDash val="solid"/>
+                      <a:round/>
+                      <a:headEnd type="none" w="med" len="med"/>
+                      <a:tailEnd type="none" w="med" len="med"/>
+                    </a:lnR>
+                    <a:lnT w="9525" cap="flat" cmpd="sng" algn="ctr">
+                      <a:solidFill>
+                        <a:srgbClr val="E3EDE6"/>
+                      </a:solidFill>
+                      <a:prstDash val="solid"/>
+                      <a:round/>
+                      <a:headEnd type="none" w="med" len="med"/>
+                      <a:tailEnd type="none" w="med" len="med"/>
+                    </a:lnT>
+                    <a:lnB w="9525" cap="flat" cmpd="sng" algn="ctr">
+                      <a:solidFill>
+                        <a:srgbClr val="E3EDE6"/>
+                      </a:solidFill>
+                      <a:prstDash val="solid"/>
+                      <a:round/>
+                      <a:headEnd type="none" w="med" len="med"/>
+                      <a:tailEnd type="none" w="med" len="med"/>
+                    </a:lnB>
+                    <a:solidFill>
+                      <a:schemeClr val="bg1"/>
+                    </a:solidFill>
+                  </a:tcPr>
+                </a:tc>
+                <a:tc>
+                  <a:txBody>
+                    <a:bodyPr/>
+                    <a:lstStyle/>
+                    <a:p>
+                      <a:pPr indent="0" marL="0">
+                        <a:buNone/>
+                      </a:pPr>
+                      <a:r>
+                        <a:rPr lang="en-US" sz="1000" dirty="0">
+                          <a:solidFill>
+                            <a:schemeClr val="tx2"/>
+                          </a:solidFill>
+                        </a:rPr>
+                        <a:t>27,800</a:t>
+                      </a:r>
+                      <a:endParaRPr lang="en-US" sz="1000" dirty="0"/>
+                    </a:p>
+                  </a:txBody>
+                  <a:tcPr marL="128016" marR="128016" marT="54864" marB="54864" anchor="ctr">
+                    <a:lnL w="9525" cap="flat" cmpd="sng" algn="ctr">
+                      <a:solidFill>
+                        <a:srgbClr val="E3EDE6"/>
+                      </a:solidFill>
+                      <a:prstDash val="solid"/>
+                      <a:round/>
+                      <a:headEnd type="none" w="med" len="med"/>
+                      <a:tailEnd type="none" w="med" len="med"/>
+                    </a:lnL>
+                    <a:lnR w="9525" cap="flat" cmpd="sng" algn="ctr">
+                      <a:solidFill>
+                        <a:srgbClr val="E3EDE6"/>
+                      </a:solidFill>
+                      <a:prstDash val="solid"/>
+                      <a:round/>
+                      <a:headEnd type="none" w="med" len="med"/>
+                      <a:tailEnd type="none" w="med" len="med"/>
+                    </a:lnR>
+                    <a:lnT w="9525" cap="flat" cmpd="sng" algn="ctr">
+                      <a:solidFill>
+                        <a:srgbClr val="E3EDE6"/>
+                      </a:solidFill>
+                      <a:prstDash val="solid"/>
+                      <a:round/>
+                      <a:headEnd type="none" w="med" len="med"/>
+                      <a:tailEnd type="none" w="med" len="med"/>
+                    </a:lnT>
+                    <a:lnB w="9525" cap="flat" cmpd="sng" algn="ctr">
+                      <a:solidFill>
+                        <a:srgbClr val="E3EDE6"/>
+                      </a:solidFill>
+                      <a:prstDash val="solid"/>
+                      <a:round/>
+                      <a:headEnd type="none" w="med" len="med"/>
+                      <a:tailEnd type="none" w="med" len="med"/>
+                    </a:lnB>
+                    <a:solidFill>
+                      <a:schemeClr val="bg1"/>
+                    </a:solidFill>
+                  </a:tcPr>
+                </a:tc>
+                <a:tc>
+                  <a:txBody>
+                    <a:bodyPr/>
+                    <a:lstStyle/>
+                    <a:p>
+                      <a:pPr indent="0" marL="0">
+                        <a:buNone/>
+                      </a:pPr>
+                      <a:r>
+                        <a:rPr lang="en-US" sz="1000" dirty="0">
+                          <a:solidFill>
+                            <a:schemeClr val="tx2"/>
+                          </a:solidFill>
+                        </a:rPr>
+                        <a:t>980</a:t>
+                      </a:r>
+                      <a:endParaRPr lang="en-US" sz="1000" dirty="0"/>
+                    </a:p>
+                  </a:txBody>
+                  <a:tcPr marL="128016" marR="128016" marT="54864" marB="54864" anchor="ctr">
+                    <a:lnL w="9525" cap="flat" cmpd="sng" algn="ctr">
+                      <a:solidFill>
+                        <a:srgbClr val="E3EDE6"/>
+                      </a:solidFill>
+                      <a:prstDash val="solid"/>
+                      <a:round/>
+                      <a:headEnd type="none" w="med" len="med"/>
+                      <a:tailEnd type="none" w="med" len="med"/>
+                    </a:lnL>
+                    <a:lnR w="9525" cap="flat" cmpd="sng" algn="ctr">
+                      <a:solidFill>
+                        <a:srgbClr val="E3EDE6"/>
+                      </a:solidFill>
+                      <a:prstDash val="solid"/>
+                      <a:round/>
+                      <a:headEnd type="none" w="med" len="med"/>
+                      <a:tailEnd type="none" w="med" len="med"/>
+                    </a:lnR>
+                    <a:lnT w="9525" cap="flat" cmpd="sng" algn="ctr">
+                      <a:solidFill>
+                        <a:srgbClr val="E3EDE6"/>
+                      </a:solidFill>
+                      <a:prstDash val="solid"/>
+                      <a:round/>
+                      <a:headEnd type="none" w="med" len="med"/>
+                      <a:tailEnd type="none" w="med" len="med"/>
+                    </a:lnT>
+                    <a:lnB w="9525" cap="flat" cmpd="sng" algn="ctr">
+                      <a:solidFill>
+                        <a:srgbClr val="E3EDE6"/>
+                      </a:solidFill>
+                      <a:prstDash val="solid"/>
+                      <a:round/>
+                      <a:headEnd type="none" w="med" len="med"/>
+                      <a:tailEnd type="none" w="med" len="med"/>
+                    </a:lnB>
+                    <a:solidFill>
+                      <a:schemeClr val="bg1"/>
+                    </a:solidFill>
+                  </a:tcPr>
+                </a:tc>
+              </a:tr>
+              <a:tr h="274320">
+                <a:tc>
+                  <a:txBody>
+                    <a:bodyPr/>
+                    <a:lstStyle/>
+                    <a:p>
+                      <a:pPr indent="0" marL="0">
+                        <a:buNone/>
+                      </a:pPr>
+                      <a:r>
+                        <a:rPr lang="en-US" sz="1000" b="1" dirty="0">
+                          <a:solidFill>
+                            <a:schemeClr val="tx1"/>
+                          </a:solidFill>
+                        </a:rPr>
+                        <a:t>Creator E</a:t>
+                      </a:r>
+                      <a:endParaRPr lang="en-US" sz="1000" dirty="0"/>
+                    </a:p>
+                  </a:txBody>
+                  <a:tcPr marL="128016" marR="128016" marT="54864" marB="54864" anchor="ctr">
+                    <a:lnL w="9525" cap="flat" cmpd="sng" algn="ctr">
+                      <a:solidFill>
+                        <a:srgbClr val="E3EDE6"/>
+                      </a:solidFill>
+                      <a:prstDash val="solid"/>
+                      <a:round/>
+                      <a:headEnd type="none" w="med" len="med"/>
+                      <a:tailEnd type="none" w="med" len="med"/>
+                    </a:lnL>
+                    <a:lnR w="9525" cap="flat" cmpd="sng" algn="ctr">
+                      <a:solidFill>
+                        <a:srgbClr val="E3EDE6"/>
+                      </a:solidFill>
+                      <a:prstDash val="solid"/>
+                      <a:round/>
+                      <a:headEnd type="none" w="med" len="med"/>
+                      <a:tailEnd type="none" w="med" len="med"/>
+                    </a:lnR>
+                    <a:lnT w="9525" cap="flat" cmpd="sng" algn="ctr">
+                      <a:solidFill>
+                        <a:srgbClr val="E3EDE6"/>
+                      </a:solidFill>
+                      <a:prstDash val="solid"/>
+                      <a:round/>
+                      <a:headEnd type="none" w="med" len="med"/>
+                      <a:tailEnd type="none" w="med" len="med"/>
+                    </a:lnT>
+                    <a:lnB w="9525" cap="flat" cmpd="sng" algn="ctr">
+                      <a:solidFill>
+                        <a:srgbClr val="E3EDE6"/>
+                      </a:solidFill>
+                      <a:prstDash val="solid"/>
+                      <a:round/>
+                      <a:headEnd type="none" w="med" len="med"/>
+                      <a:tailEnd type="none" w="med" len="med"/>
+                    </a:lnB>
+                    <a:solidFill>
+                      <a:schemeClr val="bg1"/>
+                    </a:solidFill>
+                  </a:tcPr>
+                </a:tc>
+                <a:tc>
+                  <a:txBody>
+                    <a:bodyPr/>
+                    <a:lstStyle/>
+                    <a:p>
+                      <a:pPr indent="0" marL="0">
+                        <a:buNone/>
+                      </a:pPr>
+                      <a:r>
+                        <a:rPr lang="en-US" sz="1000" dirty="0">
+                          <a:solidFill>
+                            <a:schemeClr val="tx2"/>
+                          </a:solidFill>
+                        </a:rPr>
+                        <a:t>3</a:t>
+                      </a:r>
+                      <a:endParaRPr lang="en-US" sz="1000" dirty="0"/>
+                    </a:p>
+                  </a:txBody>
+                  <a:tcPr marL="128016" marR="128016" marT="54864" marB="54864" anchor="ctr">
+                    <a:lnL w="9525" cap="flat" cmpd="sng" algn="ctr">
+                      <a:solidFill>
+                        <a:srgbClr val="E3EDE6"/>
+                      </a:solidFill>
+                      <a:prstDash val="solid"/>
+                      <a:round/>
+                      <a:headEnd type="none" w="med" len="med"/>
+                      <a:tailEnd type="none" w="med" len="med"/>
+                    </a:lnL>
+                    <a:lnR w="9525" cap="flat" cmpd="sng" algn="ctr">
+                      <a:solidFill>
+                        <a:srgbClr val="E3EDE6"/>
+                      </a:solidFill>
+                      <a:prstDash val="solid"/>
+                      <a:round/>
+                      <a:headEnd type="none" w="med" len="med"/>
+                      <a:tailEnd type="none" w="med" len="med"/>
+                    </a:lnR>
+                    <a:lnT w="9525" cap="flat" cmpd="sng" algn="ctr">
+                      <a:solidFill>
+                        <a:srgbClr val="E3EDE6"/>
+                      </a:solidFill>
+                      <a:prstDash val="solid"/>
+                      <a:round/>
+                      <a:headEnd type="none" w="med" len="med"/>
+                      <a:tailEnd type="none" w="med" len="med"/>
+                    </a:lnT>
+                    <a:lnB w="9525" cap="flat" cmpd="sng" algn="ctr">
+                      <a:solidFill>
+                        <a:srgbClr val="E3EDE6"/>
+                      </a:solidFill>
+                      <a:prstDash val="solid"/>
+                      <a:round/>
+                      <a:headEnd type="none" w="med" len="med"/>
+                      <a:tailEnd type="none" w="med" len="med"/>
+                    </a:lnB>
+                    <a:solidFill>
+                      <a:schemeClr val="bg1"/>
+                    </a:solidFill>
+                  </a:tcPr>
+                </a:tc>
+                <a:tc>
+                  <a:txBody>
+                    <a:bodyPr/>
+                    <a:lstStyle/>
+                    <a:p>
+                      <a:pPr indent="0" marL="0">
+                        <a:buNone/>
+                      </a:pPr>
+                      <a:r>
+                        <a:rPr lang="en-US" sz="1000" dirty="0">
+                          <a:solidFill>
+                            <a:schemeClr val="tx2"/>
+                          </a:solidFill>
+                        </a:rPr>
+                        <a:t>290,000</a:t>
+                      </a:r>
+                      <a:endParaRPr lang="en-US" sz="1000" dirty="0"/>
+                    </a:p>
+                  </a:txBody>
+                  <a:tcPr marL="128016" marR="128016" marT="54864" marB="54864" anchor="ctr">
+                    <a:lnL w="9525" cap="flat" cmpd="sng" algn="ctr">
+                      <a:solidFill>
+                        <a:srgbClr val="E3EDE6"/>
+                      </a:solidFill>
+                      <a:prstDash val="solid"/>
+                      <a:round/>
+                      <a:headEnd type="none" w="med" len="med"/>
+                      <a:tailEnd type="none" w="med" len="med"/>
+                    </a:lnL>
+                    <a:lnR w="9525" cap="flat" cmpd="sng" algn="ctr">
+                      <a:solidFill>
+                        <a:srgbClr val="E3EDE6"/>
+                      </a:solidFill>
+                      <a:prstDash val="solid"/>
+                      <a:round/>
+                      <a:headEnd type="none" w="med" len="med"/>
+                      <a:tailEnd type="none" w="med" len="med"/>
+                    </a:lnR>
+                    <a:lnT w="9525" cap="flat" cmpd="sng" algn="ctr">
+                      <a:solidFill>
+                        <a:srgbClr val="E3EDE6"/>
+                      </a:solidFill>
+                      <a:prstDash val="solid"/>
+                      <a:round/>
+                      <a:headEnd type="none" w="med" len="med"/>
+                      <a:tailEnd type="none" w="med" len="med"/>
+                    </a:lnT>
+                    <a:lnB w="9525" cap="flat" cmpd="sng" algn="ctr">
+                      <a:solidFill>
+                        <a:srgbClr val="E3EDE6"/>
+                      </a:solidFill>
+                      <a:prstDash val="solid"/>
+                      <a:round/>
+                      <a:headEnd type="none" w="med" len="med"/>
+                      <a:tailEnd type="none" w="med" len="med"/>
+                    </a:lnB>
+                    <a:solidFill>
+                      <a:schemeClr val="bg1"/>
+                    </a:solidFill>
+                  </a:tcPr>
+                </a:tc>
+                <a:tc>
+                  <a:txBody>
+                    <a:bodyPr/>
+                    <a:lstStyle/>
+                    <a:p>
+                      <a:pPr indent="0" marL="0">
+                        <a:buNone/>
+                      </a:pPr>
+                      <a:r>
+                        <a:rPr lang="en-US" sz="1000" dirty="0">
+                          <a:solidFill>
+                            <a:schemeClr val="tx2"/>
+                          </a:solidFill>
+                        </a:rPr>
+                        <a:t>22,100</a:t>
+                      </a:r>
+                      <a:endParaRPr lang="en-US" sz="1000" dirty="0"/>
+                    </a:p>
+                  </a:txBody>
+                  <a:tcPr marL="128016" marR="128016" marT="54864" marB="54864" anchor="ctr">
+                    <a:lnL w="9525" cap="flat" cmpd="sng" algn="ctr">
+                      <a:solidFill>
+                        <a:srgbClr val="E3EDE6"/>
+                      </a:solidFill>
+                      <a:prstDash val="solid"/>
+                      <a:round/>
+                      <a:headEnd type="none" w="med" len="med"/>
+                      <a:tailEnd type="none" w="med" len="med"/>
+                    </a:lnL>
+                    <a:lnR w="9525" cap="flat" cmpd="sng" algn="ctr">
+                      <a:solidFill>
+                        <a:srgbClr val="E3EDE6"/>
+                      </a:solidFill>
+                      <a:prstDash val="solid"/>
+                      <a:round/>
+                      <a:headEnd type="none" w="med" len="med"/>
+                      <a:tailEnd type="none" w="med" len="med"/>
+                    </a:lnR>
+                    <a:lnT w="9525" cap="flat" cmpd="sng" algn="ctr">
+                      <a:solidFill>
+                        <a:srgbClr val="E3EDE6"/>
+                      </a:solidFill>
+                      <a:prstDash val="solid"/>
+                      <a:round/>
+                      <a:headEnd type="none" w="med" len="med"/>
+                      <a:tailEnd type="none" w="med" len="med"/>
+                    </a:lnT>
+                    <a:lnB w="9525" cap="flat" cmpd="sng" algn="ctr">
+                      <a:solidFill>
+                        <a:srgbClr val="E3EDE6"/>
+                      </a:solidFill>
+                      <a:prstDash val="solid"/>
+                      <a:round/>
+                      <a:headEnd type="none" w="med" len="med"/>
+                      <a:tailEnd type="none" w="med" len="med"/>
+                    </a:lnB>
+                    <a:solidFill>
+                      <a:schemeClr val="bg1"/>
+                    </a:solidFill>
+                  </a:tcPr>
+                </a:tc>
+                <a:tc>
+                  <a:txBody>
+                    <a:bodyPr/>
+                    <a:lstStyle/>
+                    <a:p>
+                      <a:pPr indent="0" marL="0">
+                        <a:buNone/>
+                      </a:pPr>
+                      <a:r>
+                        <a:rPr lang="en-US" sz="1000" dirty="0">
+                          <a:solidFill>
+                            <a:schemeClr val="tx2"/>
+                          </a:solidFill>
+                        </a:rPr>
+                        <a:t>730</a:t>
+                      </a:r>
+                      <a:endParaRPr lang="en-US" sz="1000" dirty="0"/>
+                    </a:p>
+                  </a:txBody>
+                  <a:tcPr marL="128016" marR="128016" marT="54864" marB="54864" anchor="ctr">
+                    <a:lnL w="9525" cap="flat" cmpd="sng" algn="ctr">
+                      <a:solidFill>
+                        <a:srgbClr val="E3EDE6"/>
+                      </a:solidFill>
+                      <a:prstDash val="solid"/>
+                      <a:round/>
+                      <a:headEnd type="none" w="med" len="med"/>
+                      <a:tailEnd type="none" w="med" len="med"/>
+                    </a:lnL>
+                    <a:lnR w="9525" cap="flat" cmpd="sng" algn="ctr">
+                      <a:solidFill>
+                        <a:srgbClr val="E3EDE6"/>
+                      </a:solidFill>
+                      <a:prstDash val="solid"/>
+                      <a:round/>
+                      <a:headEnd type="none" w="med" len="med"/>
+                      <a:tailEnd type="none" w="med" len="med"/>
+                    </a:lnR>
+                    <a:lnT w="9525" cap="flat" cmpd="sng" algn="ctr">
+                      <a:solidFill>
+                        <a:srgbClr val="E3EDE6"/>
+                      </a:solidFill>
+                      <a:prstDash val="solid"/>
+                      <a:round/>
+                      <a:headEnd type="none" w="med" len="med"/>
+                      <a:tailEnd type="none" w="med" len="med"/>
+                    </a:lnT>
+                    <a:lnB w="9525" cap="flat" cmpd="sng" algn="ctr">
+                      <a:solidFill>
+                        <a:srgbClr val="E3EDE6"/>
+                      </a:solidFill>
+                      <a:prstDash val="solid"/>
+                      <a:round/>
+                      <a:headEnd type="none" w="med" len="med"/>
+                      <a:tailEnd type="none" w="med" len="med"/>
+                    </a:lnB>
+                    <a:solidFill>
+                      <a:schemeClr val="bg1"/>
+                    </a:solidFill>
+                  </a:tcPr>
+                </a:tc>
+              </a:tr>
+              <a:tr h="274320">
+                <a:tc>
+                  <a:txBody>
+                    <a:bodyPr/>
+                    <a:lstStyle/>
+                    <a:p>
+                      <a:pPr indent="0" marL="0">
+                        <a:buNone/>
+                      </a:pPr>
+                      <a:r>
+                        <a:rPr lang="en-US" sz="1000" b="1" dirty="0">
+                          <a:solidFill>
+                            <a:schemeClr val="tx1"/>
+                          </a:solidFill>
+                        </a:rPr>
+                        <a:t>13 other creators</a:t>
+                      </a:r>
+                      <a:endParaRPr lang="en-US" sz="1000" dirty="0"/>
+                    </a:p>
+                  </a:txBody>
+                  <a:tcPr marL="128016" marR="128016" marT="54864" marB="54864" anchor="ctr">
+                    <a:lnL w="9525" cap="flat" cmpd="sng" algn="ctr">
+                      <a:solidFill>
+                        <a:srgbClr val="E3EDE6"/>
+                      </a:solidFill>
+                      <a:prstDash val="solid"/>
+                      <a:round/>
+                      <a:headEnd type="none" w="med" len="med"/>
+                      <a:tailEnd type="none" w="med" len="med"/>
+                    </a:lnL>
+                    <a:lnR w="9525" cap="flat" cmpd="sng" algn="ctr">
+                      <a:solidFill>
+                        <a:srgbClr val="E3EDE6"/>
+                      </a:solidFill>
+                      <a:prstDash val="solid"/>
+                      <a:round/>
+                      <a:headEnd type="none" w="med" len="med"/>
+                      <a:tailEnd type="none" w="med" len="med"/>
+                    </a:lnR>
+                    <a:lnT w="9525" cap="flat" cmpd="sng" algn="ctr">
+                      <a:solidFill>
+                        <a:srgbClr val="E3EDE6"/>
+                      </a:solidFill>
+                      <a:prstDash val="solid"/>
+                      <a:round/>
+                      <a:headEnd type="none" w="med" len="med"/>
+                      <a:tailEnd type="none" w="med" len="med"/>
+                    </a:lnT>
+                    <a:lnB w="9525" cap="flat" cmpd="sng" algn="ctr">
+                      <a:solidFill>
+                        <a:srgbClr val="E3EDE6"/>
+                      </a:solidFill>
+                      <a:prstDash val="solid"/>
+                      <a:round/>
+                      <a:headEnd type="none" w="med" len="med"/>
+                      <a:tailEnd type="none" w="med" len="med"/>
+                    </a:lnB>
+                    <a:solidFill>
+                      <a:schemeClr val="bg1"/>
+                    </a:solidFill>
+                  </a:tcPr>
+                </a:tc>
+                <a:tc>
+                  <a:txBody>
+                    <a:bodyPr/>
+                    <a:lstStyle/>
+                    <a:p>
+                      <a:pPr indent="0" marL="0">
+                        <a:buNone/>
+                      </a:pPr>
+                      <a:r>
+                        <a:rPr lang="en-US" sz="1000" dirty="0">
+                          <a:solidFill>
+                            <a:schemeClr val="tx2"/>
+                          </a:solidFill>
+                        </a:rPr>
+                        <a:t>42</a:t>
+                      </a:r>
+                      <a:endParaRPr lang="en-US" sz="1000" dirty="0"/>
+                    </a:p>
+                  </a:txBody>
+                  <a:tcPr marL="128016" marR="128016" marT="54864" marB="54864" anchor="ctr">
+                    <a:lnL w="9525" cap="flat" cmpd="sng" algn="ctr">
+                      <a:solidFill>
+                        <a:srgbClr val="E3EDE6"/>
+                      </a:solidFill>
+                      <a:prstDash val="solid"/>
+                      <a:round/>
+                      <a:headEnd type="none" w="med" len="med"/>
+                      <a:tailEnd type="none" w="med" len="med"/>
+                    </a:lnL>
+                    <a:lnR w="9525" cap="flat" cmpd="sng" algn="ctr">
+                      <a:solidFill>
+                        <a:srgbClr val="E3EDE6"/>
+                      </a:solidFill>
+                      <a:prstDash val="solid"/>
+                      <a:round/>
+                      <a:headEnd type="none" w="med" len="med"/>
+                      <a:tailEnd type="none" w="med" len="med"/>
+                    </a:lnR>
+                    <a:lnT w="9525" cap="flat" cmpd="sng" algn="ctr">
+                      <a:solidFill>
+                        <a:srgbClr val="E3EDE6"/>
+                      </a:solidFill>
+                      <a:prstDash val="solid"/>
+                      <a:round/>
+                      <a:headEnd type="none" w="med" len="med"/>
+                      <a:tailEnd type="none" w="med" len="med"/>
+                    </a:lnT>
+                    <a:lnB w="9525" cap="flat" cmpd="sng" algn="ctr">
+                      <a:solidFill>
+                        <a:srgbClr val="E3EDE6"/>
+                      </a:solidFill>
+                      <a:prstDash val="solid"/>
+                      <a:round/>
+                      <a:headEnd type="none" w="med" len="med"/>
+                      <a:tailEnd type="none" w="med" len="med"/>
+                    </a:lnB>
+                    <a:solidFill>
+                      <a:schemeClr val="bg1"/>
+                    </a:solidFill>
+                  </a:tcPr>
+                </a:tc>
+                <a:tc>
+                  <a:txBody>
+                    <a:bodyPr/>
+                    <a:lstStyle/>
+                    <a:p>
+                      <a:pPr indent="0" marL="0">
+                        <a:buNone/>
+                      </a:pPr>
+                      <a:r>
+                        <a:rPr lang="en-US" sz="1000" dirty="0">
+                          <a:solidFill>
+                            <a:schemeClr val="tx2"/>
+                          </a:solidFill>
+                        </a:rPr>
+                        <a:t>645,000</a:t>
+                      </a:r>
+                      <a:endParaRPr lang="en-US" sz="1000" dirty="0"/>
+                    </a:p>
+                  </a:txBody>
+                  <a:tcPr marL="128016" marR="128016" marT="54864" marB="54864" anchor="ctr">
+                    <a:lnL w="9525" cap="flat" cmpd="sng" algn="ctr">
+                      <a:solidFill>
+                        <a:srgbClr val="E3EDE6"/>
+                      </a:solidFill>
+                      <a:prstDash val="solid"/>
+                      <a:round/>
+                      <a:headEnd type="none" w="med" len="med"/>
+                      <a:tailEnd type="none" w="med" len="med"/>
+                    </a:lnL>
+                    <a:lnR w="9525" cap="flat" cmpd="sng" algn="ctr">
+                      <a:solidFill>
+                        <a:srgbClr val="E3EDE6"/>
+                      </a:solidFill>
+                      <a:prstDash val="solid"/>
+                      <a:round/>
+                      <a:headEnd type="none" w="med" len="med"/>
+                      <a:tailEnd type="none" w="med" len="med"/>
+                    </a:lnR>
+                    <a:lnT w="9525" cap="flat" cmpd="sng" algn="ctr">
+                      <a:solidFill>
+                        <a:srgbClr val="E3EDE6"/>
+                      </a:solidFill>
+                      <a:prstDash val="solid"/>
+                      <a:round/>
+                      <a:headEnd type="none" w="med" len="med"/>
+                      <a:tailEnd type="none" w="med" len="med"/>
+                    </a:lnT>
+                    <a:lnB w="9525" cap="flat" cmpd="sng" algn="ctr">
+                      <a:solidFill>
+                        <a:srgbClr val="E3EDE6"/>
+                      </a:solidFill>
+                      <a:prstDash val="solid"/>
+                      <a:round/>
+                      <a:headEnd type="none" w="med" len="med"/>
+                      <a:tailEnd type="none" w="med" len="med"/>
+                    </a:lnB>
+                    <a:solidFill>
+                      <a:schemeClr val="bg1"/>
+                    </a:solidFill>
+                  </a:tcPr>
+                </a:tc>
+                <a:tc>
+                  <a:txBody>
+                    <a:bodyPr/>
+                    <a:lstStyle/>
+                    <a:p>
+                      <a:pPr indent="0" marL="0">
+                        <a:buNone/>
+                      </a:pPr>
+                      <a:r>
+                        <a:rPr lang="en-US" sz="1000" dirty="0">
+                          <a:solidFill>
+                            <a:schemeClr val="tx2"/>
+                          </a:solidFill>
+                        </a:rPr>
+                        <a:t>51,400</a:t>
+                      </a:r>
+                      <a:endParaRPr lang="en-US" sz="1000" dirty="0"/>
+                    </a:p>
+                  </a:txBody>
+                  <a:tcPr marL="128016" marR="128016" marT="54864" marB="54864" anchor="ctr">
+                    <a:lnL w="9525" cap="flat" cmpd="sng" algn="ctr">
+                      <a:solidFill>
+                        <a:srgbClr val="E3EDE6"/>
+                      </a:solidFill>
+                      <a:prstDash val="solid"/>
+                      <a:round/>
+                      <a:headEnd type="none" w="med" len="med"/>
+                      <a:tailEnd type="none" w="med" len="med"/>
+                    </a:lnL>
+                    <a:lnR w="9525" cap="flat" cmpd="sng" algn="ctr">
+                      <a:solidFill>
+                        <a:srgbClr val="E3EDE6"/>
+                      </a:solidFill>
+                      <a:prstDash val="solid"/>
+                      <a:round/>
+                      <a:headEnd type="none" w="med" len="med"/>
+                      <a:tailEnd type="none" w="med" len="med"/>
+                    </a:lnR>
+                    <a:lnT w="9525" cap="flat" cmpd="sng" algn="ctr">
+                      <a:solidFill>
+                        <a:srgbClr val="E3EDE6"/>
+                      </a:solidFill>
+                      <a:prstDash val="solid"/>
+                      <a:round/>
+                      <a:headEnd type="none" w="med" len="med"/>
+                      <a:tailEnd type="none" w="med" len="med"/>
+                    </a:lnT>
+                    <a:lnB w="9525" cap="flat" cmpd="sng" algn="ctr">
+                      <a:solidFill>
+                        <a:srgbClr val="E3EDE6"/>
+                      </a:solidFill>
+                      <a:prstDash val="solid"/>
+                      <a:round/>
+                      <a:headEnd type="none" w="med" len="med"/>
+                      <a:tailEnd type="none" w="med" len="med"/>
+                    </a:lnB>
+                    <a:solidFill>
+                      <a:schemeClr val="bg1"/>
+                    </a:solidFill>
+                  </a:tcPr>
+                </a:tc>
+                <a:tc>
+                  <a:txBody>
+                    <a:bodyPr/>
+                    <a:lstStyle/>
+                    <a:p>
+                      <a:pPr indent="0" marL="0">
+                        <a:buNone/>
+                      </a:pPr>
+                      <a:r>
+                        <a:rPr lang="en-US" sz="1000" dirty="0">
+                          <a:solidFill>
+                            <a:schemeClr val="tx2"/>
+                          </a:solidFill>
+                        </a:rPr>
+                        <a:t>2,700</a:t>
+                      </a:r>
+                      <a:endParaRPr lang="en-US" sz="1000" dirty="0"/>
+                    </a:p>
+                  </a:txBody>
+                  <a:tcPr marL="128016" marR="128016" marT="54864" marB="54864" anchor="ctr">
+                    <a:lnL w="9525" cap="flat" cmpd="sng" algn="ctr">
+                      <a:solidFill>
+                        <a:srgbClr val="E3EDE6"/>
+                      </a:solidFill>
+                      <a:prstDash val="solid"/>
+                      <a:round/>
+                      <a:headEnd type="none" w="med" len="med"/>
+                      <a:tailEnd type="none" w="med" len="med"/>
+                    </a:lnL>
+                    <a:lnR w="9525" cap="flat" cmpd="sng" algn="ctr">
+                      <a:solidFill>
+                        <a:srgbClr val="E3EDE6"/>
+                      </a:solidFill>
+                      <a:prstDash val="solid"/>
+                      <a:round/>
+                      <a:headEnd type="none" w="med" len="med"/>
+                      <a:tailEnd type="none" w="med" len="med"/>
+                    </a:lnR>
+                    <a:lnT w="9525" cap="flat" cmpd="sng" algn="ctr">
+                      <a:solidFill>
+                        <a:srgbClr val="E3EDE6"/>
+                      </a:solidFill>
+                      <a:prstDash val="solid"/>
+                      <a:round/>
+                      <a:headEnd type="none" w="med" len="med"/>
+                      <a:tailEnd type="none" w="med" len="med"/>
+                    </a:lnT>
+                    <a:lnB w="9525" cap="flat" cmpd="sng" algn="ctr">
+                      <a:solidFill>
+                        <a:srgbClr val="E3EDE6"/>
+                      </a:solidFill>
+                      <a:prstDash val="solid"/>
+                      <a:round/>
+                      <a:headEnd type="none" w="med" len="med"/>
+                      <a:tailEnd type="none" w="med" len="med"/>
+                    </a:lnB>
+                    <a:solidFill>
+                      <a:schemeClr val="bg1"/>
+                    </a:solidFill>
+                  </a:tcPr>
+                </a:tc>
+              </a:tr>
+              <a:tr h="274320">
+                <a:tc>
+                  <a:txBody>
+                    <a:bodyPr/>
+                    <a:lstStyle/>
+                    <a:p>
+                      <a:pPr indent="0" marL="0">
+                        <a:buNone/>
+                      </a:pPr>
+                      <a:r>
+                        <a:rPr lang="en-US" sz="1000" b="1" dirty="0">
+                          <a:solidFill>
+                            <a:schemeClr val="tx1"/>
+                          </a:solidFill>
+                        </a:rPr>
+                        <a:t>Total</a:t>
+                      </a:r>
+                      <a:endParaRPr lang="en-US" sz="1000" dirty="0"/>
+                    </a:p>
+                  </a:txBody>
+                  <a:tcPr marL="128016" marR="128016" marT="54864" marB="54864" anchor="ctr">
+                    <a:lnL w="9525" cap="flat" cmpd="sng" algn="ctr">
+                      <a:solidFill>
+                        <a:srgbClr val="E3EDE6"/>
+                      </a:solidFill>
+                      <a:prstDash val="solid"/>
+                      <a:round/>
+                      <a:headEnd type="none" w="med" len="med"/>
+                      <a:tailEnd type="none" w="med" len="med"/>
+                    </a:lnL>
+                    <a:lnR w="9525" cap="flat" cmpd="sng" algn="ctr">
+                      <a:solidFill>
+                        <a:srgbClr val="E3EDE6"/>
+                      </a:solidFill>
+                      <a:prstDash val="solid"/>
+                      <a:round/>
+                      <a:headEnd type="none" w="med" len="med"/>
+                      <a:tailEnd type="none" w="med" len="med"/>
+                    </a:lnR>
+                    <a:lnT w="9525" cap="flat" cmpd="sng" algn="ctr">
+                      <a:solidFill>
+                        <a:srgbClr val="E3EDE6"/>
+                      </a:solidFill>
+                      <a:prstDash val="solid"/>
+                      <a:round/>
+                      <a:headEnd type="none" w="med" len="med"/>
+                      <a:tailEnd type="none" w="med" len="med"/>
+                    </a:lnT>
+                    <a:lnB w="9525" cap="flat" cmpd="sng" algn="ctr">
+                      <a:solidFill>
+                        <a:srgbClr val="E3EDE6"/>
+                      </a:solidFill>
+                      <a:prstDash val="solid"/>
+                      <a:round/>
+                      <a:headEnd type="none" w="med" len="med"/>
+                      <a:tailEnd type="none" w="med" len="med"/>
+                    </a:lnB>
+                    <a:solidFill>
+                      <a:schemeClr val="bg1"/>
+                    </a:solidFill>
+                  </a:tcPr>
+                </a:tc>
+                <a:tc>
+                  <a:txBody>
+                    <a:bodyPr/>
+                    <a:lstStyle/>
+                    <a:p>
+                      <a:pPr indent="0" marL="0">
+                        <a:buNone/>
+                      </a:pPr>
+                      <a:r>
+                        <a:rPr lang="en-US" sz="1000" dirty="0">
+                          <a:solidFill>
+                            <a:schemeClr val="tx2"/>
+                          </a:solidFill>
+                        </a:rPr>
+                        <a:t>64</a:t>
+                      </a:r>
+                      <a:endParaRPr lang="en-US" sz="1000" dirty="0"/>
+                    </a:p>
+                  </a:txBody>
+                  <a:tcPr marL="128016" marR="128016" marT="54864" marB="54864" anchor="ctr">
+                    <a:lnL w="9525" cap="flat" cmpd="sng" algn="ctr">
+                      <a:solidFill>
+                        <a:srgbClr val="E3EDE6"/>
+                      </a:solidFill>
+                      <a:prstDash val="solid"/>
+                      <a:round/>
+                      <a:headEnd type="none" w="med" len="med"/>
+                      <a:tailEnd type="none" w="med" len="med"/>
+                    </a:lnL>
+                    <a:lnR w="9525" cap="flat" cmpd="sng" algn="ctr">
+                      <a:solidFill>
+                        <a:srgbClr val="E3EDE6"/>
+                      </a:solidFill>
+                      <a:prstDash val="solid"/>
+                      <a:round/>
+                      <a:headEnd type="none" w="med" len="med"/>
+                      <a:tailEnd type="none" w="med" len="med"/>
+                    </a:lnR>
+                    <a:lnT w="9525" cap="flat" cmpd="sng" algn="ctr">
+                      <a:solidFill>
+                        <a:srgbClr val="E3EDE6"/>
+                      </a:solidFill>
+                      <a:prstDash val="solid"/>
+                      <a:round/>
+                      <a:headEnd type="none" w="med" len="med"/>
+                      <a:tailEnd type="none" w="med" len="med"/>
+                    </a:lnT>
+                    <a:lnB w="9525" cap="flat" cmpd="sng" algn="ctr">
+                      <a:solidFill>
+                        <a:srgbClr val="E3EDE6"/>
+                      </a:solidFill>
+                      <a:prstDash val="solid"/>
+                      <a:round/>
+                      <a:headEnd type="none" w="med" len="med"/>
+                      <a:tailEnd type="none" w="med" len="med"/>
+                    </a:lnB>
+                    <a:solidFill>
+                      <a:schemeClr val="bg1"/>
+                    </a:solidFill>
+                  </a:tcPr>
+                </a:tc>
+                <a:tc>
+                  <a:txBody>
+                    <a:bodyPr/>
+                    <a:lstStyle/>
+                    <a:p>
+                      <a:pPr indent="0" marL="0">
+                        <a:buNone/>
+                      </a:pPr>
+                      <a:r>
+                        <a:rPr lang="en-US" sz="1000" dirty="0">
+                          <a:solidFill>
+                            <a:schemeClr val="tx2"/>
+                          </a:solidFill>
+                        </a:rPr>
+                        <a:t>3,200,000</a:t>
+                      </a:r>
+                      <a:endParaRPr lang="en-US" sz="1000" dirty="0"/>
+                    </a:p>
+                  </a:txBody>
+                  <a:tcPr marL="128016" marR="128016" marT="54864" marB="54864" anchor="ctr">
+                    <a:lnL w="9525" cap="flat" cmpd="sng" algn="ctr">
+                      <a:solidFill>
+                        <a:srgbClr val="E3EDE6"/>
+                      </a:solidFill>
+                      <a:prstDash val="solid"/>
+                      <a:round/>
+                      <a:headEnd type="none" w="med" len="med"/>
+                      <a:tailEnd type="none" w="med" len="med"/>
+                    </a:lnL>
+                    <a:lnR w="9525" cap="flat" cmpd="sng" algn="ctr">
+                      <a:solidFill>
+                        <a:srgbClr val="E3EDE6"/>
+                      </a:solidFill>
+                      <a:prstDash val="solid"/>
+                      <a:round/>
+                      <a:headEnd type="none" w="med" len="med"/>
+                      <a:tailEnd type="none" w="med" len="med"/>
+                    </a:lnR>
+                    <a:lnT w="9525" cap="flat" cmpd="sng" algn="ctr">
+                      <a:solidFill>
+                        <a:srgbClr val="E3EDE6"/>
+                      </a:solidFill>
+                      <a:prstDash val="solid"/>
+                      <a:round/>
+                      <a:headEnd type="none" w="med" len="med"/>
+                      <a:tailEnd type="none" w="med" len="med"/>
+                    </a:lnT>
+                    <a:lnB w="9525" cap="flat" cmpd="sng" algn="ctr">
+                      <a:solidFill>
+                        <a:srgbClr val="E3EDE6"/>
+                      </a:solidFill>
+                      <a:prstDash val="solid"/>
+                      <a:round/>
+                      <a:headEnd type="none" w="med" len="med"/>
+                      <a:tailEnd type="none" w="med" len="med"/>
+                    </a:lnB>
+                    <a:solidFill>
+                      <a:schemeClr val="bg1"/>
+                    </a:solidFill>
+                  </a:tcPr>
+                </a:tc>
+                <a:tc>
+                  <a:txBody>
+                    <a:bodyPr/>
+                    <a:lstStyle/>
+                    <a:p>
+                      <a:pPr indent="0" marL="0">
+                        <a:buNone/>
+                      </a:pPr>
+                      <a:r>
+                        <a:rPr lang="en-US" sz="1000" dirty="0">
+                          <a:solidFill>
+                            <a:schemeClr val="tx2"/>
+                          </a:solidFill>
+                        </a:rPr>
+                        <a:t>250,000</a:t>
+                      </a:r>
+                      <a:endParaRPr lang="en-US" sz="1000" dirty="0"/>
+                    </a:p>
+                  </a:txBody>
+                  <a:tcPr marL="128016" marR="128016" marT="54864" marB="54864" anchor="ctr">
+                    <a:lnL w="9525" cap="flat" cmpd="sng" algn="ctr">
+                      <a:solidFill>
+                        <a:srgbClr val="E3EDE6"/>
+                      </a:solidFill>
+                      <a:prstDash val="solid"/>
+                      <a:round/>
+                      <a:headEnd type="none" w="med" len="med"/>
+                      <a:tailEnd type="none" w="med" len="med"/>
+                    </a:lnL>
+                    <a:lnR w="9525" cap="flat" cmpd="sng" algn="ctr">
+                      <a:solidFill>
+                        <a:srgbClr val="E3EDE6"/>
+                      </a:solidFill>
+                      <a:prstDash val="solid"/>
+                      <a:round/>
+                      <a:headEnd type="none" w="med" len="med"/>
+                      <a:tailEnd type="none" w="med" len="med"/>
+                    </a:lnR>
+                    <a:lnT w="9525" cap="flat" cmpd="sng" algn="ctr">
+                      <a:solidFill>
+                        <a:srgbClr val="E3EDE6"/>
+                      </a:solidFill>
+                      <a:prstDash val="solid"/>
+                      <a:round/>
+                      <a:headEnd type="none" w="med" len="med"/>
+                      <a:tailEnd type="none" w="med" len="med"/>
+                    </a:lnT>
+                    <a:lnB w="9525" cap="flat" cmpd="sng" algn="ctr">
+                      <a:solidFill>
+                        <a:srgbClr val="E3EDE6"/>
+                      </a:solidFill>
+                      <a:prstDash val="solid"/>
+                      <a:round/>
+                      <a:headEnd type="none" w="med" len="med"/>
+                      <a:tailEnd type="none" w="med" len="med"/>
+                    </a:lnB>
+                    <a:solidFill>
+                      <a:schemeClr val="bg1"/>
+                    </a:solidFill>
+                  </a:tcPr>
+                </a:tc>
+                <a:tc>
+                  <a:txBody>
+                    <a:bodyPr/>
+                    <a:lstStyle/>
+                    <a:p>
+                      <a:pPr indent="0" marL="0">
+                        <a:buNone/>
+                      </a:pPr>
+                      <a:r>
+                        <a:rPr lang="en-US" sz="1000" dirty="0">
+                          <a:solidFill>
+                            <a:schemeClr val="tx2"/>
+                          </a:solidFill>
+                        </a:rPr>
+                        <a:t>9,400</a:t>
+                      </a:r>
+                      <a:endParaRPr lang="en-US" sz="1000" dirty="0"/>
+                    </a:p>
+                  </a:txBody>
+                  <a:tcPr marL="128016" marR="128016" marT="54864" marB="54864" anchor="ctr">
+                    <a:lnL w="9525" cap="flat" cmpd="sng" algn="ctr">
+                      <a:solidFill>
+                        <a:srgbClr val="E3EDE6"/>
+                      </a:solidFill>
+                      <a:prstDash val="solid"/>
+                      <a:round/>
+                      <a:headEnd type="none" w="med" len="med"/>
+                      <a:tailEnd type="none" w="med" len="med"/>
+                    </a:lnL>
+                    <a:lnR w="9525" cap="flat" cmpd="sng" algn="ctr">
+                      <a:solidFill>
+                        <a:srgbClr val="E3EDE6"/>
+                      </a:solidFill>
+                      <a:prstDash val="solid"/>
+                      <a:round/>
+                      <a:headEnd type="none" w="med" len="med"/>
+                      <a:tailEnd type="none" w="med" len="med"/>
+                    </a:lnR>
+                    <a:lnT w="9525" cap="flat" cmpd="sng" algn="ctr">
+                      <a:solidFill>
+                        <a:srgbClr val="E3EDE6"/>
+                      </a:solidFill>
+                      <a:prstDash val="solid"/>
+                      <a:round/>
+                      <a:headEnd type="none" w="med" len="med"/>
+                      <a:tailEnd type="none" w="med" len="med"/>
+                    </a:lnT>
+                    <a:lnB w="9525" cap="flat" cmpd="sng" algn="ctr">
+                      <a:solidFill>
+                        <a:srgbClr val="E3EDE6"/>
+                      </a:solidFill>
+                      <a:prstDash val="solid"/>
+                      <a:round/>
+                      <a:headEnd type="none" w="med" len="med"/>
+                      <a:tailEnd type="none" w="med" len="med"/>
+                    </a:lnB>
+                    <a:solidFill>
+                      <a:schemeClr val="bg1"/>
+                    </a:solidFill>
+                  </a:tcPr>
+                </a:tc>
+              </a:tr>
+            </a:tbl>
+          </a:graphicData>
+        </a:graphic>
+      </p:graphicFrame>
+      <p:sp>
+        <p:nvSpPr>
+          <p:cNvPr id="15" name="Text 8"/>
+          <p:cNvSpPr txBox="1"/>
+          <p:nvPr/>
+        </p:nvSpPr>
+        <p:spPr>
+          <a:xfrm>
+            <a:off x="822960" y="5550408"/>
+            <a:ext cx="6309360" cy="237744"/>
+          </a:xfrm>
+          <a:prstGeom prst="rect">
+            <a:avLst/>
+          </a:prstGeom>
+          <a:noFill/>
+          <a:ln/>
+        </p:spPr>
+        <p:txBody>
+          <a:bodyPr wrap="square" lIns="0" tIns="0" rIns="0" bIns="0" rtlCol="0" anchor="t"/>
+          <a:lstStyle/>
+          <a:p>
+            <a:pPr indent="0" marL="0">
+              <a:buNone/>
+            </a:pPr>
+            <a:r>
+              <a:rPr lang="en-GB" altLang="en-US" sz="1000" dirty="0">
+                <a:solidFill>
+                  <a:schemeClr val="tx2"/>
+                </a:solidFill>
+              </a:rPr>
+              <a:t>Also in the full report: every post with its link, platform and time, and recommendations for the next edition.</a:t>
+            </a:r>
+            <a:endParaRPr lang="en-GB" sz="1000" dirty="0"/>
+          </a:p>
+        </p:txBody>
+      </p:sp>
+      <p:sp>
+        <p:nvSpPr>
+          <p:cNvPr id="16" name="Text 9"/>
+          <p:cNvSpPr txBox="1"/>
+          <p:nvPr/>
+        </p:nvSpPr>
+        <p:spPr>
+          <a:xfrm>
+            <a:off x="7269480" y="2770632"/>
+            <a:ext cx="2743200" cy="256032"/>
+          </a:xfrm>
+          <a:prstGeom prst="rect">
+            <a:avLst/>
+          </a:prstGeom>
+          <a:noFill/>
+          <a:ln/>
+        </p:spPr>
+        <p:txBody>
+          <a:bodyPr wrap="square" lIns="0" tIns="0" rIns="0" bIns="0" rtlCol="0" anchor="t"/>
+          <a:lstStyle/>
+          <a:p>
+            <a:pPr indent="0" marL="0">
+              <a:buNone/>
+            </a:pPr>
+            <a:r>
+              <a:rPr lang="en-GB" altLang="en-US" sz="1100" b="1" spc="300" kern="0" dirty="0">
+                <a:solidFill>
+                  <a:schemeClr val="accent3"/>
+                </a:solidFill>
+              </a:rPr>
+              <a:t>AUDIENCE</a:t>
+            </a:r>
+            <a:endParaRPr lang="en-GB" sz="1100" dirty="0"/>
+          </a:p>
+        </p:txBody>
+      </p:sp>
+      <p:sp>
+        <p:nvSpPr>
+          <p:cNvPr id="17" name="Text 10"/>
+          <p:cNvSpPr txBox="1"/>
+          <p:nvPr/>
+        </p:nvSpPr>
+        <p:spPr>
+          <a:xfrm>
+            <a:off x="7269480" y="3063240"/>
+            <a:ext cx="1417320" cy="219456"/>
+          </a:xfrm>
+          <a:prstGeom prst="rect">
+            <a:avLst/>
+          </a:prstGeom>
+          <a:noFill/>
+          <a:ln/>
+        </p:spPr>
+        <p:txBody>
+          <a:bodyPr wrap="square" lIns="0" tIns="0" rIns="0" bIns="0" rtlCol="0" anchor="ctr"/>
+          <a:lstStyle/>
+          <a:p>
+            <a:pPr indent="0" marL="0">
+              <a:buNone/>
+            </a:pPr>
+            <a:r>
+              <a:rPr lang="en-GB" altLang="en-US" sz="1000" dirty="0">
+                <a:solidFill>
+                  <a:schemeClr val="tx2"/>
+                </a:solidFill>
+              </a:rPr>
+              <a:t>Côte d’Ivoire</a:t>
+            </a:r>
+            <a:endParaRPr lang="en-GB" sz="1000" dirty="0"/>
+          </a:p>
+        </p:txBody>
+      </p:sp>
+      <p:sp>
+        <p:nvSpPr>
+          <p:cNvPr id="18" name="Shape 11"/>
+          <p:cNvSpPr/>
+          <p:nvPr/>
+        </p:nvSpPr>
+        <p:spPr>
+          <a:xfrm>
+            <a:off x="8732520" y="3099816"/>
+            <a:ext cx="1737360" cy="146304"/>
+          </a:xfrm>
+          <a:prstGeom prst="roundRect">
+            <a:avLst>
+              <a:gd name="adj" fmla="val 18750"/>
+            </a:avLst>
+          </a:prstGeom>
+          <a:solidFill>
+            <a:schemeClr val="accent2"/>
+          </a:solidFill>
+          <a:ln/>
+        </p:spPr>
+      </p:sp>
+      <p:sp>
+        <p:nvSpPr>
+          <p:cNvPr id="19" name="Text 12"/>
+          <p:cNvSpPr txBox="1"/>
+          <p:nvPr/>
+        </p:nvSpPr>
+        <p:spPr>
+          <a:xfrm>
+            <a:off x="10561320" y="3063240"/>
+            <a:ext cx="548640" cy="219456"/>
+          </a:xfrm>
+          <a:prstGeom prst="rect">
+            <a:avLst/>
+          </a:prstGeom>
+          <a:noFill/>
+          <a:ln/>
+        </p:spPr>
+        <p:txBody>
+          <a:bodyPr wrap="square" lIns="0" tIns="0" rIns="0" bIns="0" rtlCol="0" anchor="ctr"/>
+          <a:lstStyle/>
+          <a:p>
+            <a:pPr indent="0" marL="0">
+              <a:buNone/>
+            </a:pPr>
+            <a:r>
+              <a:rPr lang="en-GB" altLang="en-US" sz="1000" b="1" dirty="0">
+                <a:solidFill>
+                  <a:schemeClr val="tx1"/>
+                </a:solidFill>
+              </a:rPr>
+              <a:t>58%</a:t>
+            </a:r>
+            <a:endParaRPr lang="en-GB" sz="1000" dirty="0"/>
+          </a:p>
+        </p:txBody>
+      </p:sp>
+      <p:sp>
+        <p:nvSpPr>
+          <p:cNvPr id="20" name="Text 13"/>
+          <p:cNvSpPr txBox="1"/>
+          <p:nvPr/>
+        </p:nvSpPr>
+        <p:spPr>
+          <a:xfrm>
+            <a:off x="7269480" y="3374136"/>
+            <a:ext cx="1417320" cy="219456"/>
+          </a:xfrm>
+          <a:prstGeom prst="rect">
+            <a:avLst/>
+          </a:prstGeom>
+          <a:noFill/>
+          <a:ln/>
+        </p:spPr>
+        <p:txBody>
+          <a:bodyPr wrap="square" lIns="0" tIns="0" rIns="0" bIns="0" rtlCol="0" anchor="ctr"/>
+          <a:lstStyle/>
+          <a:p>
+            <a:pPr indent="0" marL="0">
+              <a:buNone/>
+            </a:pPr>
+            <a:r>
+              <a:rPr lang="en-GB" altLang="en-US" sz="1000" dirty="0">
+                <a:solidFill>
+                  <a:schemeClr val="tx2"/>
+                </a:solidFill>
+              </a:rPr>
+              <a:t>Diaspora abroad</a:t>
+            </a:r>
+            <a:endParaRPr lang="en-GB" sz="1000" dirty="0"/>
+          </a:p>
+        </p:txBody>
+      </p:sp>
+      <p:sp>
+        <p:nvSpPr>
+          <p:cNvPr id="21" name="Shape 14"/>
+          <p:cNvSpPr/>
+          <p:nvPr/>
+        </p:nvSpPr>
+        <p:spPr>
+          <a:xfrm>
+            <a:off x="8732520" y="3410712"/>
+            <a:ext cx="718908" cy="146304"/>
+          </a:xfrm>
+          <a:prstGeom prst="roundRect">
+            <a:avLst>
+              <a:gd name="adj" fmla="val 18750"/>
+            </a:avLst>
+          </a:prstGeom>
+          <a:solidFill>
+            <a:schemeClr val="accent1"/>
+          </a:solidFill>
+          <a:ln/>
+        </p:spPr>
+      </p:sp>
+      <p:sp>
+        <p:nvSpPr>
+          <p:cNvPr id="22" name="Text 15"/>
+          <p:cNvSpPr txBox="1"/>
+          <p:nvPr/>
+        </p:nvSpPr>
+        <p:spPr>
+          <a:xfrm>
+            <a:off x="9542868" y="3374136"/>
+            <a:ext cx="548640" cy="219456"/>
+          </a:xfrm>
+          <a:prstGeom prst="rect">
+            <a:avLst/>
+          </a:prstGeom>
+          <a:noFill/>
+          <a:ln/>
+        </p:spPr>
+        <p:txBody>
+          <a:bodyPr wrap="square" lIns="0" tIns="0" rIns="0" bIns="0" rtlCol="0" anchor="ctr"/>
+          <a:lstStyle/>
+          <a:p>
+            <a:pPr indent="0" marL="0">
+              <a:buNone/>
+            </a:pPr>
+            <a:r>
+              <a:rPr lang="en-GB" altLang="en-US" sz="1000" b="1" dirty="0">
+                <a:solidFill>
+                  <a:schemeClr val="tx1"/>
+                </a:solidFill>
+              </a:rPr>
+              <a:t>24%</a:t>
+            </a:r>
+            <a:endParaRPr lang="en-GB" sz="1000" dirty="0"/>
+          </a:p>
+        </p:txBody>
+      </p:sp>
+      <p:sp>
+        <p:nvSpPr>
+          <p:cNvPr id="23" name="Text 16"/>
+          <p:cNvSpPr txBox="1"/>
+          <p:nvPr/>
+        </p:nvSpPr>
+        <p:spPr>
+          <a:xfrm>
+            <a:off x="7269480" y="3685032"/>
+            <a:ext cx="1417320" cy="219456"/>
+          </a:xfrm>
+          <a:prstGeom prst="rect">
+            <a:avLst/>
+          </a:prstGeom>
+          <a:noFill/>
+          <a:ln/>
+        </p:spPr>
+        <p:txBody>
+          <a:bodyPr wrap="square" lIns="0" tIns="0" rIns="0" bIns="0" rtlCol="0" anchor="ctr"/>
+          <a:lstStyle/>
+          <a:p>
+            <a:pPr indent="0" marL="0">
+              <a:buNone/>
+            </a:pPr>
+            <a:r>
+              <a:rPr lang="en-GB" altLang="en-US" sz="1000" dirty="0">
+                <a:solidFill>
+                  <a:schemeClr val="tx2"/>
+                </a:solidFill>
+              </a:rPr>
+              <a:t>Rest of Africa</a:t>
+            </a:r>
+            <a:endParaRPr lang="en-GB" sz="1000" dirty="0"/>
+          </a:p>
+        </p:txBody>
+      </p:sp>
+      <p:sp>
+        <p:nvSpPr>
+          <p:cNvPr id="24" name="Shape 17"/>
+          <p:cNvSpPr/>
+          <p:nvPr/>
+        </p:nvSpPr>
+        <p:spPr>
+          <a:xfrm>
+            <a:off x="8732520" y="3721608"/>
+            <a:ext cx="539181" cy="146304"/>
+          </a:xfrm>
+          <a:prstGeom prst="roundRect">
+            <a:avLst>
+              <a:gd name="adj" fmla="val 18750"/>
+            </a:avLst>
+          </a:prstGeom>
+          <a:solidFill>
+            <a:schemeClr val="accent1"/>
+          </a:solidFill>
+          <a:ln/>
+        </p:spPr>
+      </p:sp>
+      <p:sp>
+        <p:nvSpPr>
+          <p:cNvPr id="25" name="Text 18"/>
+          <p:cNvSpPr txBox="1"/>
+          <p:nvPr/>
+        </p:nvSpPr>
+        <p:spPr>
+          <a:xfrm>
+            <a:off x="9363141" y="3685032"/>
+            <a:ext cx="548640" cy="219456"/>
+          </a:xfrm>
+          <a:prstGeom prst="rect">
+            <a:avLst/>
+          </a:prstGeom>
+          <a:noFill/>
+          <a:ln/>
+        </p:spPr>
+        <p:txBody>
+          <a:bodyPr wrap="square" lIns="0" tIns="0" rIns="0" bIns="0" rtlCol="0" anchor="ctr"/>
+          <a:lstStyle/>
+          <a:p>
+            <a:pPr indent="0" marL="0">
+              <a:buNone/>
+            </a:pPr>
+            <a:r>
+              <a:rPr lang="en-GB" altLang="en-US" sz="1000" b="1" dirty="0">
+                <a:solidFill>
+                  <a:schemeClr val="tx1"/>
+                </a:solidFill>
+              </a:rPr>
+              <a:t>18%</a:t>
+            </a:r>
+            <a:endParaRPr lang="en-GB" sz="1000" dirty="0"/>
+          </a:p>
+        </p:txBody>
+      </p:sp>
+      <p:sp>
+        <p:nvSpPr>
+          <p:cNvPr id="26" name="Text 19"/>
+          <p:cNvSpPr txBox="1"/>
+          <p:nvPr/>
+        </p:nvSpPr>
+        <p:spPr>
+          <a:xfrm>
+            <a:off x="7269480" y="4069080"/>
+            <a:ext cx="2743200" cy="256032"/>
+          </a:xfrm>
+          <a:prstGeom prst="rect">
+            <a:avLst/>
+          </a:prstGeom>
+          <a:noFill/>
+          <a:ln/>
+        </p:spPr>
+        <p:txBody>
+          <a:bodyPr wrap="square" lIns="0" tIns="0" rIns="0" bIns="0" rtlCol="0" anchor="t"/>
+          <a:lstStyle/>
+          <a:p>
+            <a:pPr indent="0" marL="0">
+              <a:buNone/>
+            </a:pPr>
+            <a:r>
+              <a:rPr lang="en-GB" altLang="en-US" sz="1100" b="1" spc="300" kern="0" dirty="0">
+                <a:solidFill>
+                  <a:schemeClr val="accent3"/>
+                </a:solidFill>
+              </a:rPr>
+              <a:t>SPONSOR VALUE</a:t>
+            </a:r>
+            <a:endParaRPr lang="en-GB" sz="1100" dirty="0"/>
+          </a:p>
+        </p:txBody>
+      </p:sp>
+      <p:graphicFrame>
+        <p:nvGraphicFramePr>
+          <p:cNvPr id="25" name="Sample table by sponsor"/>
+          <p:cNvGraphicFramePr>
+            <a:graphicFrameLocks noGrp="1"/>
+          </p:cNvGraphicFramePr>
+          <p:nvPr>
+            <p:extLst>
+              <p:ext uri="{D42A27DB-BD31-4B8C-83A1-F6EECF244321}">
+                <p14:modId xmlns:p14="http://schemas.microsoft.com/office/powerpoint/2010/main" val="1579011935"/>
+              </p:ext>
+            </p:extLst>
+          </p:nvPr>
+        </p:nvGraphicFramePr>
+        <p:xfrm>
+          <a:off x="7269480" y="4343400"/>
+          <a:ext cx="4099255" cy="914400"/>
+        </p:xfrm>
+        <a:graphic>
+          <a:graphicData uri="http://schemas.openxmlformats.org/drawingml/2006/table">
+            <a:tbl>
+              <a:tblPr/>
+              <a:tblGrid>
+                <a:gridCol w="822960"/>
+                <a:gridCol w="914400"/>
+                <a:gridCol w="914400"/>
+                <a:gridCol w="1447495"/>
+              </a:tblGrid>
+              <a:tr h="274320">
+                <a:tc>
+                  <a:txBody>
+                    <a:bodyPr/>
+                    <a:lstStyle/>
+                    <a:p>
+                      <a:pPr indent="0" marL="0">
+                        <a:buNone/>
+                      </a:pPr>
+                      <a:r>
+                        <a:rPr lang="en-US" sz="1000" b="1" dirty="0">
+                          <a:solidFill>
+                            <a:schemeClr val="bg1"/>
+                          </a:solidFill>
+                        </a:rPr>
+                        <a:t>Partner</a:t>
+                      </a:r>
+                      <a:endParaRPr lang="en-US" sz="1000" dirty="0"/>
+                    </a:p>
+                  </a:txBody>
+                  <a:tcPr marL="128016" marR="128016" marT="54864" marB="54864" anchor="ctr">
+                    <a:lnL w="9525" cap="flat" cmpd="sng" algn="ctr">
+                      <a:solidFill>
+                        <a:srgbClr val="E3EDE6"/>
+                      </a:solidFill>
+                      <a:prstDash val="solid"/>
+                      <a:round/>
+                      <a:headEnd type="none" w="med" len="med"/>
+                      <a:tailEnd type="none" w="med" len="med"/>
+                    </a:lnL>
+                    <a:lnR w="9525" cap="flat" cmpd="sng" algn="ctr">
+                      <a:solidFill>
+                        <a:srgbClr val="E3EDE6"/>
+                      </a:solidFill>
+                      <a:prstDash val="solid"/>
+                      <a:round/>
+                      <a:headEnd type="none" w="med" len="med"/>
+                      <a:tailEnd type="none" w="med" len="med"/>
+                    </a:lnR>
+                    <a:lnT w="9525" cap="flat" cmpd="sng" algn="ctr">
+                      <a:solidFill>
+                        <a:srgbClr val="E3EDE6"/>
+                      </a:solidFill>
+                      <a:prstDash val="solid"/>
+                      <a:round/>
+                      <a:headEnd type="none" w="med" len="med"/>
+                      <a:tailEnd type="none" w="med" len="med"/>
+                    </a:lnT>
+                    <a:lnB w="9525" cap="flat" cmpd="sng" algn="ctr">
+                      <a:solidFill>
+                        <a:srgbClr val="E3EDE6"/>
+                      </a:solidFill>
+                      <a:prstDash val="solid"/>
+                      <a:round/>
+                      <a:headEnd type="none" w="med" len="med"/>
+                      <a:tailEnd type="none" w="med" len="med"/>
+                    </a:lnB>
+                    <a:solidFill>
+                      <a:schemeClr val="tx1"/>
+                    </a:solidFill>
+                  </a:tcPr>
+                </a:tc>
+                <a:tc>
+                  <a:txBody>
+                    <a:bodyPr/>
+                    <a:lstStyle/>
+                    <a:p>
+                      <a:pPr indent="0" marL="0">
+                        <a:buNone/>
+                      </a:pPr>
+                      <a:r>
+                        <a:rPr lang="en-US" sz="1000" b="1" dirty="0">
+                          <a:solidFill>
+                            <a:schemeClr val="bg1"/>
+                          </a:solidFill>
+                        </a:rPr>
+                        <a:t>Moments</a:t>
+                      </a:r>
+                      <a:endParaRPr lang="en-US" sz="1000" dirty="0"/>
+                    </a:p>
+                  </a:txBody>
+                  <a:tcPr marL="128016" marR="128016" marT="54864" marB="54864" anchor="ctr">
+                    <a:lnL w="9525" cap="flat" cmpd="sng" algn="ctr">
+                      <a:solidFill>
+                        <a:srgbClr val="E3EDE6"/>
+                      </a:solidFill>
+                      <a:prstDash val="solid"/>
+                      <a:round/>
+                      <a:headEnd type="none" w="med" len="med"/>
+                      <a:tailEnd type="none" w="med" len="med"/>
+                    </a:lnL>
+                    <a:lnR w="9525" cap="flat" cmpd="sng" algn="ctr">
+                      <a:solidFill>
+                        <a:srgbClr val="E3EDE6"/>
+                      </a:solidFill>
+                      <a:prstDash val="solid"/>
+                      <a:round/>
+                      <a:headEnd type="none" w="med" len="med"/>
+                      <a:tailEnd type="none" w="med" len="med"/>
+                    </a:lnR>
+                    <a:lnT w="9525" cap="flat" cmpd="sng" algn="ctr">
+                      <a:solidFill>
+                        <a:srgbClr val="E3EDE6"/>
+                      </a:solidFill>
+                      <a:prstDash val="solid"/>
+                      <a:round/>
+                      <a:headEnd type="none" w="med" len="med"/>
+                      <a:tailEnd type="none" w="med" len="med"/>
+                    </a:lnT>
+                    <a:lnB w="9525" cap="flat" cmpd="sng" algn="ctr">
+                      <a:solidFill>
+                        <a:srgbClr val="E3EDE6"/>
+                      </a:solidFill>
+                      <a:prstDash val="solid"/>
+                      <a:round/>
+                      <a:headEnd type="none" w="med" len="med"/>
+                      <a:tailEnd type="none" w="med" len="med"/>
+                    </a:lnB>
+                    <a:solidFill>
+                      <a:schemeClr val="tx1"/>
+                    </a:solidFill>
+                  </a:tcPr>
+                </a:tc>
+                <a:tc>
+                  <a:txBody>
+                    <a:bodyPr/>
+                    <a:lstStyle/>
+                    <a:p>
+                      <a:pPr indent="0" marL="0">
+                        <a:buNone/>
+                      </a:pPr>
+                      <a:r>
+                        <a:rPr lang="en-US" sz="1000" b="1" dirty="0">
+                          <a:solidFill>
+                            <a:schemeClr val="bg1"/>
+                          </a:solidFill>
+                        </a:rPr>
+                        <a:t>Screen time</a:t>
+                      </a:r>
+                      <a:endParaRPr lang="en-US" sz="1000" dirty="0"/>
+                    </a:p>
+                  </a:txBody>
+                  <a:tcPr marL="128016" marR="128016" marT="54864" marB="54864" anchor="ctr">
+                    <a:lnL w="9525" cap="flat" cmpd="sng" algn="ctr">
+                      <a:solidFill>
+                        <a:srgbClr val="E3EDE6"/>
+                      </a:solidFill>
+                      <a:prstDash val="solid"/>
+                      <a:round/>
+                      <a:headEnd type="none" w="med" len="med"/>
+                      <a:tailEnd type="none" w="med" len="med"/>
+                    </a:lnL>
+                    <a:lnR w="9525" cap="flat" cmpd="sng" algn="ctr">
+                      <a:solidFill>
+                        <a:srgbClr val="E3EDE6"/>
+                      </a:solidFill>
+                      <a:prstDash val="solid"/>
+                      <a:round/>
+                      <a:headEnd type="none" w="med" len="med"/>
+                      <a:tailEnd type="none" w="med" len="med"/>
+                    </a:lnR>
+                    <a:lnT w="9525" cap="flat" cmpd="sng" algn="ctr">
+                      <a:solidFill>
+                        <a:srgbClr val="E3EDE6"/>
+                      </a:solidFill>
+                      <a:prstDash val="solid"/>
+                      <a:round/>
+                      <a:headEnd type="none" w="med" len="med"/>
+                      <a:tailEnd type="none" w="med" len="med"/>
+                    </a:lnT>
+                    <a:lnB w="9525" cap="flat" cmpd="sng" algn="ctr">
+                      <a:solidFill>
+                        <a:srgbClr val="E3EDE6"/>
+                      </a:solidFill>
+                      <a:prstDash val="solid"/>
+                      <a:round/>
+                      <a:headEnd type="none" w="med" len="med"/>
+                      <a:tailEnd type="none" w="med" len="med"/>
+                    </a:lnB>
+                    <a:solidFill>
+                      <a:schemeClr val="tx1"/>
+                    </a:solidFill>
+                  </a:tcPr>
+                </a:tc>
+                <a:tc>
+                  <a:txBody>
+                    <a:bodyPr/>
+                    <a:lstStyle/>
+                    <a:p>
+                      <a:pPr indent="0" marL="0">
+                        <a:buNone/>
+                      </a:pPr>
+                      <a:r>
+                        <a:rPr lang="en-US" sz="1000" b="1" dirty="0">
+                          <a:solidFill>
+                            <a:schemeClr val="bg1"/>
+                          </a:solidFill>
+                        </a:rPr>
+                        <a:t>Media value, estimated</a:t>
+                      </a:r>
+                      <a:endParaRPr lang="en-US" sz="1000" dirty="0"/>
+                    </a:p>
+                  </a:txBody>
+                  <a:tcPr marL="128016" marR="128016" marT="54864" marB="54864" anchor="ctr">
+                    <a:lnL w="9525" cap="flat" cmpd="sng" algn="ctr">
+                      <a:solidFill>
+                        <a:srgbClr val="E3EDE6"/>
+                      </a:solidFill>
+                      <a:prstDash val="solid"/>
+                      <a:round/>
+                      <a:headEnd type="none" w="med" len="med"/>
+                      <a:tailEnd type="none" w="med" len="med"/>
+                    </a:lnL>
+                    <a:lnR w="9525" cap="flat" cmpd="sng" algn="ctr">
+                      <a:solidFill>
+                        <a:srgbClr val="E3EDE6"/>
+                      </a:solidFill>
+                      <a:prstDash val="solid"/>
+                      <a:round/>
+                      <a:headEnd type="none" w="med" len="med"/>
+                      <a:tailEnd type="none" w="med" len="med"/>
+                    </a:lnR>
+                    <a:lnT w="9525" cap="flat" cmpd="sng" algn="ctr">
+                      <a:solidFill>
+                        <a:srgbClr val="E3EDE6"/>
+                      </a:solidFill>
+                      <a:prstDash val="solid"/>
+                      <a:round/>
+                      <a:headEnd type="none" w="med" len="med"/>
+                      <a:tailEnd type="none" w="med" len="med"/>
+                    </a:lnT>
+                    <a:lnB w="9525" cap="flat" cmpd="sng" algn="ctr">
+                      <a:solidFill>
+                        <a:srgbClr val="E3EDE6"/>
+                      </a:solidFill>
+                      <a:prstDash val="solid"/>
+                      <a:round/>
+                      <a:headEnd type="none" w="med" len="med"/>
+                      <a:tailEnd type="none" w="med" len="med"/>
+                    </a:lnB>
+                    <a:solidFill>
+                      <a:schemeClr val="tx1"/>
+                    </a:solidFill>
+                  </a:tcPr>
+                </a:tc>
+              </a:tr>
+              <a:tr h="274320">
+                <a:tc>
+                  <a:txBody>
+                    <a:bodyPr/>
+                    <a:lstStyle/>
+                    <a:p>
+                      <a:pPr indent="0" marL="0">
+                        <a:buNone/>
+                      </a:pPr>
+                      <a:r>
+                        <a:rPr lang="en-US" sz="1000" b="1" dirty="0">
+                          <a:solidFill>
+                            <a:schemeClr val="tx1"/>
+                          </a:solidFill>
+                        </a:rPr>
+                        <a:t>Partner A</a:t>
+                      </a:r>
+                      <a:endParaRPr lang="en-US" sz="1000" dirty="0"/>
+                    </a:p>
+                  </a:txBody>
+                  <a:tcPr marL="128016" marR="128016" marT="54864" marB="54864" anchor="ctr">
+                    <a:lnL w="9525" cap="flat" cmpd="sng" algn="ctr">
+                      <a:solidFill>
+                        <a:srgbClr val="E3EDE6"/>
+                      </a:solidFill>
+                      <a:prstDash val="solid"/>
+                      <a:round/>
+                      <a:headEnd type="none" w="med" len="med"/>
+                      <a:tailEnd type="none" w="med" len="med"/>
+                    </a:lnL>
+                    <a:lnR w="9525" cap="flat" cmpd="sng" algn="ctr">
+                      <a:solidFill>
+                        <a:srgbClr val="E3EDE6"/>
+                      </a:solidFill>
+                      <a:prstDash val="solid"/>
+                      <a:round/>
+                      <a:headEnd type="none" w="med" len="med"/>
+                      <a:tailEnd type="none" w="med" len="med"/>
+                    </a:lnR>
+                    <a:lnT w="9525" cap="flat" cmpd="sng" algn="ctr">
+                      <a:solidFill>
+                        <a:srgbClr val="E3EDE6"/>
+                      </a:solidFill>
+                      <a:prstDash val="solid"/>
+                      <a:round/>
+                      <a:headEnd type="none" w="med" len="med"/>
+                      <a:tailEnd type="none" w="med" len="med"/>
+                    </a:lnT>
+                    <a:lnB w="9525" cap="flat" cmpd="sng" algn="ctr">
+                      <a:solidFill>
+                        <a:srgbClr val="E3EDE6"/>
+                      </a:solidFill>
+                      <a:prstDash val="solid"/>
+                      <a:round/>
+                      <a:headEnd type="none" w="med" len="med"/>
+                      <a:tailEnd type="none" w="med" len="med"/>
+                    </a:lnB>
+                    <a:solidFill>
+                      <a:schemeClr val="bg1"/>
+                    </a:solidFill>
+                  </a:tcPr>
+                </a:tc>
+                <a:tc>
+                  <a:txBody>
+                    <a:bodyPr/>
+                    <a:lstStyle/>
+                    <a:p>
+                      <a:pPr indent="0" marL="0">
+                        <a:buNone/>
+                      </a:pPr>
+                      <a:r>
+                        <a:rPr lang="en-US" sz="1000" dirty="0">
+                          <a:solidFill>
+                            <a:schemeClr val="tx2"/>
+                          </a:solidFill>
+                        </a:rPr>
+                        <a:t>42</a:t>
+                      </a:r>
+                      <a:endParaRPr lang="en-US" sz="1000" dirty="0"/>
+                    </a:p>
+                  </a:txBody>
+                  <a:tcPr marL="128016" marR="128016" marT="54864" marB="54864" anchor="ctr">
+                    <a:lnL w="9525" cap="flat" cmpd="sng" algn="ctr">
+                      <a:solidFill>
+                        <a:srgbClr val="E3EDE6"/>
+                      </a:solidFill>
+                      <a:prstDash val="solid"/>
+                      <a:round/>
+                      <a:headEnd type="none" w="med" len="med"/>
+                      <a:tailEnd type="none" w="med" len="med"/>
+                    </a:lnL>
+                    <a:lnR w="9525" cap="flat" cmpd="sng" algn="ctr">
+                      <a:solidFill>
+                        <a:srgbClr val="E3EDE6"/>
+                      </a:solidFill>
+                      <a:prstDash val="solid"/>
+                      <a:round/>
+                      <a:headEnd type="none" w="med" len="med"/>
+                      <a:tailEnd type="none" w="med" len="med"/>
+                    </a:lnR>
+                    <a:lnT w="9525" cap="flat" cmpd="sng" algn="ctr">
+                      <a:solidFill>
+                        <a:srgbClr val="E3EDE6"/>
+                      </a:solidFill>
+                      <a:prstDash val="solid"/>
+                      <a:round/>
+                      <a:headEnd type="none" w="med" len="med"/>
+                      <a:tailEnd type="none" w="med" len="med"/>
+                    </a:lnT>
+                    <a:lnB w="9525" cap="flat" cmpd="sng" algn="ctr">
+                      <a:solidFill>
+                        <a:srgbClr val="E3EDE6"/>
+                      </a:solidFill>
+                      <a:prstDash val="solid"/>
+                      <a:round/>
+                      <a:headEnd type="none" w="med" len="med"/>
+                      <a:tailEnd type="none" w="med" len="med"/>
+                    </a:lnB>
+                    <a:solidFill>
+                      <a:schemeClr val="bg1"/>
+                    </a:solidFill>
+                  </a:tcPr>
+                </a:tc>
+                <a:tc>
+                  <a:txBody>
+                    <a:bodyPr/>
+                    <a:lstStyle/>
+                    <a:p>
+                      <a:pPr indent="0" marL="0">
+                        <a:buNone/>
+                      </a:pPr>
+                      <a:r>
+                        <a:rPr lang="en-US" sz="1000" dirty="0">
+                          <a:solidFill>
+                            <a:schemeClr val="tx2"/>
+                          </a:solidFill>
+                        </a:rPr>
+                        <a:t>6 min 10 s</a:t>
+                      </a:r>
+                      <a:endParaRPr lang="en-US" sz="1000" dirty="0"/>
+                    </a:p>
+                  </a:txBody>
+                  <a:tcPr marL="128016" marR="128016" marT="54864" marB="54864" anchor="ctr">
+                    <a:lnL w="9525" cap="flat" cmpd="sng" algn="ctr">
+                      <a:solidFill>
+                        <a:srgbClr val="E3EDE6"/>
+                      </a:solidFill>
+                      <a:prstDash val="solid"/>
+                      <a:round/>
+                      <a:headEnd type="none" w="med" len="med"/>
+                      <a:tailEnd type="none" w="med" len="med"/>
+                    </a:lnL>
+                    <a:lnR w="9525" cap="flat" cmpd="sng" algn="ctr">
+                      <a:solidFill>
+                        <a:srgbClr val="E3EDE6"/>
+                      </a:solidFill>
+                      <a:prstDash val="solid"/>
+                      <a:round/>
+                      <a:headEnd type="none" w="med" len="med"/>
+                      <a:tailEnd type="none" w="med" len="med"/>
+                    </a:lnR>
+                    <a:lnT w="9525" cap="flat" cmpd="sng" algn="ctr">
+                      <a:solidFill>
+                        <a:srgbClr val="E3EDE6"/>
+                      </a:solidFill>
+                      <a:prstDash val="solid"/>
+                      <a:round/>
+                      <a:headEnd type="none" w="med" len="med"/>
+                      <a:tailEnd type="none" w="med" len="med"/>
+                    </a:lnT>
+                    <a:lnB w="9525" cap="flat" cmpd="sng" algn="ctr">
+                      <a:solidFill>
+                        <a:srgbClr val="E3EDE6"/>
+                      </a:solidFill>
+                      <a:prstDash val="solid"/>
+                      <a:round/>
+                      <a:headEnd type="none" w="med" len="med"/>
+                      <a:tailEnd type="none" w="med" len="med"/>
+                    </a:lnB>
+                    <a:solidFill>
+                      <a:schemeClr val="bg1"/>
+                    </a:solidFill>
+                  </a:tcPr>
+                </a:tc>
+                <a:tc>
+                  <a:txBody>
+                    <a:bodyPr/>
+                    <a:lstStyle/>
+                    <a:p>
+                      <a:pPr indent="0" marL="0">
+                        <a:buNone/>
+                      </a:pPr>
+                      <a:r>
+                        <a:rPr lang="en-US" sz="1000" dirty="0">
+                          <a:solidFill>
+                            <a:schemeClr val="tx2"/>
+                          </a:solidFill>
+                        </a:rPr>
+                        <a:t>18.5M FCFA</a:t>
+                      </a:r>
+                      <a:endParaRPr lang="en-US" sz="1000" dirty="0"/>
+                    </a:p>
+                  </a:txBody>
+                  <a:tcPr marL="128016" marR="128016" marT="54864" marB="54864" anchor="ctr">
+                    <a:lnL w="9525" cap="flat" cmpd="sng" algn="ctr">
+                      <a:solidFill>
+                        <a:srgbClr val="E3EDE6"/>
+                      </a:solidFill>
+                      <a:prstDash val="solid"/>
+                      <a:round/>
+                      <a:headEnd type="none" w="med" len="med"/>
+                      <a:tailEnd type="none" w="med" len="med"/>
+                    </a:lnL>
+                    <a:lnR w="9525" cap="flat" cmpd="sng" algn="ctr">
+                      <a:solidFill>
+                        <a:srgbClr val="E3EDE6"/>
+                      </a:solidFill>
+                      <a:prstDash val="solid"/>
+                      <a:round/>
+                      <a:headEnd type="none" w="med" len="med"/>
+                      <a:tailEnd type="none" w="med" len="med"/>
+                    </a:lnR>
+                    <a:lnT w="9525" cap="flat" cmpd="sng" algn="ctr">
+                      <a:solidFill>
+                        <a:srgbClr val="E3EDE6"/>
+                      </a:solidFill>
+                      <a:prstDash val="solid"/>
+                      <a:round/>
+                      <a:headEnd type="none" w="med" len="med"/>
+                      <a:tailEnd type="none" w="med" len="med"/>
+                    </a:lnT>
+                    <a:lnB w="9525" cap="flat" cmpd="sng" algn="ctr">
+                      <a:solidFill>
+                        <a:srgbClr val="E3EDE6"/>
+                      </a:solidFill>
+                      <a:prstDash val="solid"/>
+                      <a:round/>
+                      <a:headEnd type="none" w="med" len="med"/>
+                      <a:tailEnd type="none" w="med" len="med"/>
+                    </a:lnB>
+                    <a:solidFill>
+                      <a:schemeClr val="bg1"/>
+                    </a:solidFill>
+                  </a:tcPr>
+                </a:tc>
+              </a:tr>
+              <a:tr h="274320">
+                <a:tc>
+                  <a:txBody>
+                    <a:bodyPr/>
+                    <a:lstStyle/>
+                    <a:p>
+                      <a:pPr indent="0" marL="0">
+                        <a:buNone/>
+                      </a:pPr>
+                      <a:r>
+                        <a:rPr lang="en-US" sz="1000" b="1" dirty="0">
+                          <a:solidFill>
+                            <a:schemeClr val="tx1"/>
+                          </a:solidFill>
+                        </a:rPr>
+                        <a:t>Partner B</a:t>
+                      </a:r>
+                      <a:endParaRPr lang="en-US" sz="1000" dirty="0"/>
+                    </a:p>
+                  </a:txBody>
+                  <a:tcPr marL="128016" marR="128016" marT="54864" marB="54864" anchor="ctr">
+                    <a:lnL w="9525" cap="flat" cmpd="sng" algn="ctr">
+                      <a:solidFill>
+                        <a:srgbClr val="E3EDE6"/>
+                      </a:solidFill>
+                      <a:prstDash val="solid"/>
+                      <a:round/>
+                      <a:headEnd type="none" w="med" len="med"/>
+                      <a:tailEnd type="none" w="med" len="med"/>
+                    </a:lnL>
+                    <a:lnR w="9525" cap="flat" cmpd="sng" algn="ctr">
+                      <a:solidFill>
+                        <a:srgbClr val="E3EDE6"/>
+                      </a:solidFill>
+                      <a:prstDash val="solid"/>
+                      <a:round/>
+                      <a:headEnd type="none" w="med" len="med"/>
+                      <a:tailEnd type="none" w="med" len="med"/>
+                    </a:lnR>
+                    <a:lnT w="9525" cap="flat" cmpd="sng" algn="ctr">
+                      <a:solidFill>
+                        <a:srgbClr val="E3EDE6"/>
+                      </a:solidFill>
+                      <a:prstDash val="solid"/>
+                      <a:round/>
+                      <a:headEnd type="none" w="med" len="med"/>
+                      <a:tailEnd type="none" w="med" len="med"/>
+                    </a:lnT>
+                    <a:lnB w="9525" cap="flat" cmpd="sng" algn="ctr">
+                      <a:solidFill>
+                        <a:srgbClr val="E3EDE6"/>
+                      </a:solidFill>
+                      <a:prstDash val="solid"/>
+                      <a:round/>
+                      <a:headEnd type="none" w="med" len="med"/>
+                      <a:tailEnd type="none" w="med" len="med"/>
+                    </a:lnB>
+                    <a:solidFill>
+                      <a:schemeClr val="bg1"/>
+                    </a:solidFill>
+                  </a:tcPr>
+                </a:tc>
+                <a:tc>
+                  <a:txBody>
+                    <a:bodyPr/>
+                    <a:lstStyle/>
+                    <a:p>
+                      <a:pPr indent="0" marL="0">
+                        <a:buNone/>
+                      </a:pPr>
+                      <a:r>
+                        <a:rPr lang="en-US" sz="1000" dirty="0">
+                          <a:solidFill>
+                            <a:schemeClr val="tx2"/>
+                          </a:solidFill>
+                        </a:rPr>
+                        <a:t>31</a:t>
+                      </a:r>
+                      <a:endParaRPr lang="en-US" sz="1000" dirty="0"/>
+                    </a:p>
+                  </a:txBody>
+                  <a:tcPr marL="128016" marR="128016" marT="54864" marB="54864" anchor="ctr">
+                    <a:lnL w="9525" cap="flat" cmpd="sng" algn="ctr">
+                      <a:solidFill>
+                        <a:srgbClr val="E3EDE6"/>
+                      </a:solidFill>
+                      <a:prstDash val="solid"/>
+                      <a:round/>
+                      <a:headEnd type="none" w="med" len="med"/>
+                      <a:tailEnd type="none" w="med" len="med"/>
+                    </a:lnL>
+                    <a:lnR w="9525" cap="flat" cmpd="sng" algn="ctr">
+                      <a:solidFill>
+                        <a:srgbClr val="E3EDE6"/>
+                      </a:solidFill>
+                      <a:prstDash val="solid"/>
+                      <a:round/>
+                      <a:headEnd type="none" w="med" len="med"/>
+                      <a:tailEnd type="none" w="med" len="med"/>
+                    </a:lnR>
+                    <a:lnT w="9525" cap="flat" cmpd="sng" algn="ctr">
+                      <a:solidFill>
+                        <a:srgbClr val="E3EDE6"/>
+                      </a:solidFill>
+                      <a:prstDash val="solid"/>
+                      <a:round/>
+                      <a:headEnd type="none" w="med" len="med"/>
+                      <a:tailEnd type="none" w="med" len="med"/>
+                    </a:lnT>
+                    <a:lnB w="9525" cap="flat" cmpd="sng" algn="ctr">
+                      <a:solidFill>
+                        <a:srgbClr val="E3EDE6"/>
+                      </a:solidFill>
+                      <a:prstDash val="solid"/>
+                      <a:round/>
+                      <a:headEnd type="none" w="med" len="med"/>
+                      <a:tailEnd type="none" w="med" len="med"/>
+                    </a:lnB>
+                    <a:solidFill>
+                      <a:schemeClr val="bg1"/>
+                    </a:solidFill>
+                  </a:tcPr>
+                </a:tc>
+                <a:tc>
+                  <a:txBody>
+                    <a:bodyPr/>
+                    <a:lstStyle/>
+                    <a:p>
+                      <a:pPr indent="0" marL="0">
+                        <a:buNone/>
+                      </a:pPr>
+                      <a:r>
+                        <a:rPr lang="en-US" sz="1000" dirty="0">
+                          <a:solidFill>
+                            <a:schemeClr val="tx2"/>
+                          </a:solidFill>
+                        </a:rPr>
+                        <a:t>4 min 25 s</a:t>
+                      </a:r>
+                      <a:endParaRPr lang="en-US" sz="1000" dirty="0"/>
+                    </a:p>
+                  </a:txBody>
+                  <a:tcPr marL="128016" marR="128016" marT="54864" marB="54864" anchor="ctr">
+                    <a:lnL w="9525" cap="flat" cmpd="sng" algn="ctr">
+                      <a:solidFill>
+                        <a:srgbClr val="E3EDE6"/>
+                      </a:solidFill>
+                      <a:prstDash val="solid"/>
+                      <a:round/>
+                      <a:headEnd type="none" w="med" len="med"/>
+                      <a:tailEnd type="none" w="med" len="med"/>
+                    </a:lnL>
+                    <a:lnR w="9525" cap="flat" cmpd="sng" algn="ctr">
+                      <a:solidFill>
+                        <a:srgbClr val="E3EDE6"/>
+                      </a:solidFill>
+                      <a:prstDash val="solid"/>
+                      <a:round/>
+                      <a:headEnd type="none" w="med" len="med"/>
+                      <a:tailEnd type="none" w="med" len="med"/>
+                    </a:lnR>
+                    <a:lnT w="9525" cap="flat" cmpd="sng" algn="ctr">
+                      <a:solidFill>
+                        <a:srgbClr val="E3EDE6"/>
+                      </a:solidFill>
+                      <a:prstDash val="solid"/>
+                      <a:round/>
+                      <a:headEnd type="none" w="med" len="med"/>
+                      <a:tailEnd type="none" w="med" len="med"/>
+                    </a:lnT>
+                    <a:lnB w="9525" cap="flat" cmpd="sng" algn="ctr">
+                      <a:solidFill>
+                        <a:srgbClr val="E3EDE6"/>
+                      </a:solidFill>
+                      <a:prstDash val="solid"/>
+                      <a:round/>
+                      <a:headEnd type="none" w="med" len="med"/>
+                      <a:tailEnd type="none" w="med" len="med"/>
+                    </a:lnB>
+                    <a:solidFill>
+                      <a:schemeClr val="bg1"/>
+                    </a:solidFill>
+                  </a:tcPr>
+                </a:tc>
+                <a:tc>
+                  <a:txBody>
+                    <a:bodyPr/>
+                    <a:lstStyle/>
+                    <a:p>
+                      <a:pPr indent="0" marL="0">
+                        <a:buNone/>
+                      </a:pPr>
+                      <a:r>
+                        <a:rPr lang="en-US" sz="1000" dirty="0">
+                          <a:solidFill>
+                            <a:schemeClr val="tx2"/>
+                          </a:solidFill>
+                        </a:rPr>
+                        <a:t>12.7M FCFA</a:t>
+                      </a:r>
+                      <a:endParaRPr lang="en-US" sz="1000" dirty="0"/>
+                    </a:p>
+                  </a:txBody>
+                  <a:tcPr marL="128016" marR="128016" marT="54864" marB="54864" anchor="ctr">
+                    <a:lnL w="9525" cap="flat" cmpd="sng" algn="ctr">
+                      <a:solidFill>
+                        <a:srgbClr val="E3EDE6"/>
+                      </a:solidFill>
+                      <a:prstDash val="solid"/>
+                      <a:round/>
+                      <a:headEnd type="none" w="med" len="med"/>
+                      <a:tailEnd type="none" w="med" len="med"/>
+                    </a:lnL>
+                    <a:lnR w="9525" cap="flat" cmpd="sng" algn="ctr">
+                      <a:solidFill>
+                        <a:srgbClr val="E3EDE6"/>
+                      </a:solidFill>
+                      <a:prstDash val="solid"/>
+                      <a:round/>
+                      <a:headEnd type="none" w="med" len="med"/>
+                      <a:tailEnd type="none" w="med" len="med"/>
+                    </a:lnR>
+                    <a:lnT w="9525" cap="flat" cmpd="sng" algn="ctr">
+                      <a:solidFill>
+                        <a:srgbClr val="E3EDE6"/>
+                      </a:solidFill>
+                      <a:prstDash val="solid"/>
+                      <a:round/>
+                      <a:headEnd type="none" w="med" len="med"/>
+                      <a:tailEnd type="none" w="med" len="med"/>
+                    </a:lnT>
+                    <a:lnB w="9525" cap="flat" cmpd="sng" algn="ctr">
+                      <a:solidFill>
+                        <a:srgbClr val="E3EDE6"/>
+                      </a:solidFill>
+                      <a:prstDash val="solid"/>
+                      <a:round/>
+                      <a:headEnd type="none" w="med" len="med"/>
+                      <a:tailEnd type="none" w="med" len="med"/>
+                    </a:lnB>
+                    <a:solidFill>
+                      <a:schemeClr val="bg1"/>
+                    </a:solidFill>
+                  </a:tcPr>
+                </a:tc>
+              </a:tr>
+              <a:tr h="274320">
+                <a:tc>
+                  <a:txBody>
+                    <a:bodyPr/>
+                    <a:lstStyle/>
+                    <a:p>
+                      <a:pPr indent="0" marL="0">
+                        <a:buNone/>
+                      </a:pPr>
+                      <a:r>
+                        <a:rPr lang="en-US" sz="1000" b="1" dirty="0">
+                          <a:solidFill>
+                            <a:schemeClr val="tx1"/>
+                          </a:solidFill>
+                        </a:rPr>
+                        <a:t>Partner C</a:t>
+                      </a:r>
+                      <a:endParaRPr lang="en-US" sz="1000" dirty="0"/>
+                    </a:p>
+                  </a:txBody>
+                  <a:tcPr marL="128016" marR="128016" marT="54864" marB="54864" anchor="ctr">
+                    <a:lnL w="9525" cap="flat" cmpd="sng" algn="ctr">
+                      <a:solidFill>
+                        <a:srgbClr val="E3EDE6"/>
+                      </a:solidFill>
+                      <a:prstDash val="solid"/>
+                      <a:round/>
+                      <a:headEnd type="none" w="med" len="med"/>
+                      <a:tailEnd type="none" w="med" len="med"/>
+                    </a:lnL>
+                    <a:lnR w="9525" cap="flat" cmpd="sng" algn="ctr">
+                      <a:solidFill>
+                        <a:srgbClr val="E3EDE6"/>
+                      </a:solidFill>
+                      <a:prstDash val="solid"/>
+                      <a:round/>
+                      <a:headEnd type="none" w="med" len="med"/>
+                      <a:tailEnd type="none" w="med" len="med"/>
+                    </a:lnR>
+                    <a:lnT w="9525" cap="flat" cmpd="sng" algn="ctr">
+                      <a:solidFill>
+                        <a:srgbClr val="E3EDE6"/>
+                      </a:solidFill>
+                      <a:prstDash val="solid"/>
+                      <a:round/>
+                      <a:headEnd type="none" w="med" len="med"/>
+                      <a:tailEnd type="none" w="med" len="med"/>
+                    </a:lnT>
+                    <a:lnB w="9525" cap="flat" cmpd="sng" algn="ctr">
+                      <a:solidFill>
+                        <a:srgbClr val="E3EDE6"/>
+                      </a:solidFill>
+                      <a:prstDash val="solid"/>
+                      <a:round/>
+                      <a:headEnd type="none" w="med" len="med"/>
+                      <a:tailEnd type="none" w="med" len="med"/>
+                    </a:lnB>
+                    <a:solidFill>
+                      <a:schemeClr val="bg1"/>
+                    </a:solidFill>
+                  </a:tcPr>
+                </a:tc>
+                <a:tc>
+                  <a:txBody>
+                    <a:bodyPr/>
+                    <a:lstStyle/>
+                    <a:p>
+                      <a:pPr indent="0" marL="0">
+                        <a:buNone/>
+                      </a:pPr>
+                      <a:r>
+                        <a:rPr lang="en-US" sz="1000" dirty="0">
+                          <a:solidFill>
+                            <a:schemeClr val="tx2"/>
+                          </a:solidFill>
+                        </a:rPr>
+                        <a:t>18</a:t>
+                      </a:r>
+                      <a:endParaRPr lang="en-US" sz="1000" dirty="0"/>
+                    </a:p>
+                  </a:txBody>
+                  <a:tcPr marL="128016" marR="128016" marT="54864" marB="54864" anchor="ctr">
+                    <a:lnL w="9525" cap="flat" cmpd="sng" algn="ctr">
+                      <a:solidFill>
+                        <a:srgbClr val="E3EDE6"/>
+                      </a:solidFill>
+                      <a:prstDash val="solid"/>
+                      <a:round/>
+                      <a:headEnd type="none" w="med" len="med"/>
+                      <a:tailEnd type="none" w="med" len="med"/>
+                    </a:lnL>
+                    <a:lnR w="9525" cap="flat" cmpd="sng" algn="ctr">
+                      <a:solidFill>
+                        <a:srgbClr val="E3EDE6"/>
+                      </a:solidFill>
+                      <a:prstDash val="solid"/>
+                      <a:round/>
+                      <a:headEnd type="none" w="med" len="med"/>
+                      <a:tailEnd type="none" w="med" len="med"/>
+                    </a:lnR>
+                    <a:lnT w="9525" cap="flat" cmpd="sng" algn="ctr">
+                      <a:solidFill>
+                        <a:srgbClr val="E3EDE6"/>
+                      </a:solidFill>
+                      <a:prstDash val="solid"/>
+                      <a:round/>
+                      <a:headEnd type="none" w="med" len="med"/>
+                      <a:tailEnd type="none" w="med" len="med"/>
+                    </a:lnT>
+                    <a:lnB w="9525" cap="flat" cmpd="sng" algn="ctr">
+                      <a:solidFill>
+                        <a:srgbClr val="E3EDE6"/>
+                      </a:solidFill>
+                      <a:prstDash val="solid"/>
+                      <a:round/>
+                      <a:headEnd type="none" w="med" len="med"/>
+                      <a:tailEnd type="none" w="med" len="med"/>
+                    </a:lnB>
+                    <a:solidFill>
+                      <a:schemeClr val="bg1"/>
+                    </a:solidFill>
+                  </a:tcPr>
+                </a:tc>
+                <a:tc>
+                  <a:txBody>
+                    <a:bodyPr/>
+                    <a:lstStyle/>
+                    <a:p>
+                      <a:pPr indent="0" marL="0">
+                        <a:buNone/>
+                      </a:pPr>
+                      <a:r>
+                        <a:rPr lang="en-US" sz="1000" dirty="0">
+                          <a:solidFill>
+                            <a:schemeClr val="tx2"/>
+                          </a:solidFill>
+                        </a:rPr>
+                        <a:t>2 min 40 s</a:t>
+                      </a:r>
+                      <a:endParaRPr lang="en-US" sz="1000" dirty="0"/>
+                    </a:p>
+                  </a:txBody>
+                  <a:tcPr marL="128016" marR="128016" marT="54864" marB="54864" anchor="ctr">
+                    <a:lnL w="9525" cap="flat" cmpd="sng" algn="ctr">
+                      <a:solidFill>
+                        <a:srgbClr val="E3EDE6"/>
+                      </a:solidFill>
+                      <a:prstDash val="solid"/>
+                      <a:round/>
+                      <a:headEnd type="none" w="med" len="med"/>
+                      <a:tailEnd type="none" w="med" len="med"/>
+                    </a:lnL>
+                    <a:lnR w="9525" cap="flat" cmpd="sng" algn="ctr">
+                      <a:solidFill>
+                        <a:srgbClr val="E3EDE6"/>
+                      </a:solidFill>
+                      <a:prstDash val="solid"/>
+                      <a:round/>
+                      <a:headEnd type="none" w="med" len="med"/>
+                      <a:tailEnd type="none" w="med" len="med"/>
+                    </a:lnR>
+                    <a:lnT w="9525" cap="flat" cmpd="sng" algn="ctr">
+                      <a:solidFill>
+                        <a:srgbClr val="E3EDE6"/>
+                      </a:solidFill>
+                      <a:prstDash val="solid"/>
+                      <a:round/>
+                      <a:headEnd type="none" w="med" len="med"/>
+                      <a:tailEnd type="none" w="med" len="med"/>
+                    </a:lnT>
+                    <a:lnB w="9525" cap="flat" cmpd="sng" algn="ctr">
+                      <a:solidFill>
+                        <a:srgbClr val="E3EDE6"/>
+                      </a:solidFill>
+                      <a:prstDash val="solid"/>
+                      <a:round/>
+                      <a:headEnd type="none" w="med" len="med"/>
+                      <a:tailEnd type="none" w="med" len="med"/>
+                    </a:lnB>
+                    <a:solidFill>
+                      <a:schemeClr val="bg1"/>
+                    </a:solidFill>
+                  </a:tcPr>
+                </a:tc>
+                <a:tc>
+                  <a:txBody>
+                    <a:bodyPr/>
+                    <a:lstStyle/>
+                    <a:p>
+                      <a:pPr indent="0" marL="0">
+                        <a:buNone/>
+                      </a:pPr>
+                      <a:r>
+                        <a:rPr lang="en-US" sz="1000" dirty="0">
+                          <a:solidFill>
+                            <a:schemeClr val="tx2"/>
+                          </a:solidFill>
+                        </a:rPr>
+                        <a:t>7.3M FCFA</a:t>
+                      </a:r>
+                      <a:endParaRPr lang="en-US" sz="1000" dirty="0"/>
+                    </a:p>
+                  </a:txBody>
+                  <a:tcPr marL="128016" marR="128016" marT="54864" marB="54864" anchor="ctr">
+                    <a:lnL w="9525" cap="flat" cmpd="sng" algn="ctr">
+                      <a:solidFill>
+                        <a:srgbClr val="E3EDE6"/>
+                      </a:solidFill>
+                      <a:prstDash val="solid"/>
+                      <a:round/>
+                      <a:headEnd type="none" w="med" len="med"/>
+                      <a:tailEnd type="none" w="med" len="med"/>
+                    </a:lnL>
+                    <a:lnR w="9525" cap="flat" cmpd="sng" algn="ctr">
+                      <a:solidFill>
+                        <a:srgbClr val="E3EDE6"/>
+                      </a:solidFill>
+                      <a:prstDash val="solid"/>
+                      <a:round/>
+                      <a:headEnd type="none" w="med" len="med"/>
+                      <a:tailEnd type="none" w="med" len="med"/>
+                    </a:lnR>
+                    <a:lnT w="9525" cap="flat" cmpd="sng" algn="ctr">
+                      <a:solidFill>
+                        <a:srgbClr val="E3EDE6"/>
+                      </a:solidFill>
+                      <a:prstDash val="solid"/>
+                      <a:round/>
+                      <a:headEnd type="none" w="med" len="med"/>
+                      <a:tailEnd type="none" w="med" len="med"/>
+                    </a:lnT>
+                    <a:lnB w="9525" cap="flat" cmpd="sng" algn="ctr">
+                      <a:solidFill>
+                        <a:srgbClr val="E3EDE6"/>
+                      </a:solidFill>
+                      <a:prstDash val="solid"/>
+                      <a:round/>
+                      <a:headEnd type="none" w="med" len="med"/>
+                      <a:tailEnd type="none" w="med" len="med"/>
+                    </a:lnB>
+                    <a:solidFill>
+                      <a:schemeClr val="bg1"/>
+                    </a:solidFill>
+                  </a:tcPr>
+                </a:tc>
+              </a:tr>
+            </a:tbl>
+          </a:graphicData>
+        </a:graphic>
+      </p:graphicFrame>
+      <p:sp>
+        <p:nvSpPr>
+          <p:cNvPr id="28" name="Text 20"/>
+          <p:cNvSpPr txBox="1"/>
+          <p:nvPr/>
+        </p:nvSpPr>
+        <p:spPr>
+          <a:xfrm>
+            <a:off x="822960" y="5879592"/>
+            <a:ext cx="3657600" cy="219456"/>
+          </a:xfrm>
+          <a:prstGeom prst="rect">
+            <a:avLst/>
+          </a:prstGeom>
+          <a:noFill/>
+          <a:ln/>
+        </p:spPr>
+        <p:txBody>
+          <a:bodyPr wrap="square" lIns="0" tIns="0" rIns="0" bIns="0" rtlCol="0" anchor="t"/>
+          <a:lstStyle/>
+          <a:p>
+            <a:pPr indent="0" marL="0">
+              <a:buNone/>
+            </a:pPr>
+            <a:r>
+              <a:rPr lang="en-GB" altLang="en-US" sz="1000" b="1" i="1" dirty="0">
+                <a:solidFill>
+                  <a:schemeClr val="accent3"/>
+                </a:solidFill>
+              </a:rPr>
+              <a:t>Sample layout. Figures are illustrative.</a:t>
+            </a:r>
+            <a:endParaRPr lang="en-GB" sz="1000" dirty="0"/>
+          </a:p>
+        </p:txBody>
+      </p:sp>
+      <p:sp>
+        <p:nvSpPr>
+          <p:cNvPr id="29" name="Text 21"/>
+          <p:cNvSpPr txBox="1"/>
+          <p:nvPr/>
+        </p:nvSpPr>
+        <p:spPr>
+          <a:xfrm>
+            <a:off x="9539935" y="5879592"/>
+            <a:ext cx="1828800" cy="219456"/>
+          </a:xfrm>
+          <a:prstGeom prst="rect">
+            <a:avLst/>
+          </a:prstGeom>
+          <a:noFill/>
+          <a:ln/>
+        </p:spPr>
+        <p:txBody>
+          <a:bodyPr wrap="square" lIns="0" tIns="0" rIns="0" bIns="0" rtlCol="0" anchor="t"/>
+          <a:lstStyle/>
+          <a:p>
+            <a:pPr algn="r" indent="0" marL="0">
+              <a:buNone/>
+            </a:pPr>
+            <a:r>
+              <a:rPr lang="en-GB" altLang="en-US" sz="1000" b="1" u="sng" dirty="0">
+                <a:solidFill>
+                  <a:schemeClr val="accent3"/>
+                </a:solidFill>
+                <a:hlinkClick r:id="rId4" action="ppaction://hlinksldjump" tooltip="Reports on fixed dates">
+                  <a:extLst>
+                    <a:ext uri="{A12FA001-AC4F-418D-AE19-62706E023703}">
+                      <ahyp:hlinkClr xmlns:ahyp="http://schemas.microsoft.com/office/drawing/2018/hyperlinkcolor" val="tx"/>
+                    </a:ext>
+                  </a:extLst>
+                </a:hlinkClick>
+              </a:rPr>
+              <a:t>←  Back to page 1</a:t>
+            </a:r>
+            <a:endParaRPr lang="en-GB" sz="1000" dirty="0"/>
+          </a:p>
+        </p:txBody>
+      </p:sp>
+      <p:sp>
+        <p:nvSpPr>
+          <p:cNvPr id="25" name="Slide Number Placeholder 0"/>
+          <p:cNvSpPr>
+            <a:spLocks noGrp="1"/>
+          </p:cNvSpPr>
+          <p:nvPr>
+            <p:ph type="sldNum" sz="quarter" idx="4294967295"/>
+          </p:nvPr>
+        </p:nvSpPr>
+        <p:spPr>
+          <a:xfrm>
+            <a:off x="11094415" y="6437376"/>
+            <a:ext cx="548640" cy="237744"/>
+          </a:xfrm>
+          <a:prstGeom prst="rect">
+            <a:avLst/>
+          </a:prstGeom>
+          <a:extLst>
+            <a:ext uri="{C572A759-6A51-4108-AA02-DFA0A04FC94B}">
+              <ma14:wrappingTextBoxFlag xmlns:ma14="http://schemas.microsoft.com/office/mac/drawingml/2011/main" val="0"/>
+            </a:ext>
+          </a:extLst>
+        </p:spPr>
+        <p:txBody>
+          <a:bodyPr lIns="0" tIns="0" rIns="0" bIns="0"/>
+          <a:lstStyle>
+            <a:lvl1pPr>
+              <a:defRPr sz="1000">
+                <a:solidFill>
+                  <a:schemeClr val="tx2"/>
+                </a:solidFill>
+              </a:defRPr>
+            </a:lvl1pPr>
+          </a:lstStyle>
+          <a:p>
+            <a:pPr algn="r"/>
+            <a:fld id="{F7021451-1387-4CA6-816F-3879F97B5CBC}" type="slidenum">
+              <a:rPr b="0" lang="en-US"/>
+              <a:t>12</a:t>
+            </a:fld>
+            <a:endParaRPr lang="en-US"/>
+          </a:p>
+        </p:txBody>
+      </p:sp>
+    </p:spTree>
+  </p:cSld>
+  <p:clrMapOvr>
+    <a:masterClrMapping/>
+  </p:clrMapOvr>
+</p:sld>
+</file>
+
 <file path=ppt/slides/slide2.xml><?xml version="1.0" encoding="utf-8"?>
 <p:sld xmlns:a="http://schemas.openxmlformats.org/drawingml/2006/main" xmlns:r="http://schemas.openxmlformats.org/officeDocument/2006/relationships" xmlns:p="http://schemas.openxmlformats.org/presentationml/2006/main">
   <p:cSld name="Slide 2">
@@ -15074,7 +19566,7 @@
         </p:nvSpPr>
         <p:spPr>
           <a:xfrm>
-            <a:off x="548640" y="3154680"/>
+            <a:off x="548640" y="3063240"/>
             <a:ext cx="594360" cy="594360"/>
           </a:xfrm>
           <a:prstGeom prst="ellipse">
@@ -15102,7 +19594,7 @@
         </p:blipFill>
         <p:spPr>
           <a:xfrm>
-            <a:off x="691286" y="3297326"/>
+            <a:off x="691286" y="3205886"/>
             <a:ext cx="309067" cy="309067"/>
           </a:xfrm>
           <a:prstGeom prst="rect">
@@ -15118,7 +19610,7 @@
         </p:nvSpPr>
         <p:spPr>
           <a:xfrm>
-            <a:off x="1371600" y="3118104"/>
+            <a:off x="1371600" y="3026664"/>
             <a:ext cx="5029200" cy="384048"/>
           </a:xfrm>
           <a:prstGeom prst="rect">
@@ -15157,7 +19649,7 @@
         </p:nvSpPr>
         <p:spPr>
           <a:xfrm>
-            <a:off x="1371600" y="3538728"/>
+            <a:off x="1371600" y="3447288"/>
             <a:ext cx="5029200" cy="256032"/>
           </a:xfrm>
           <a:prstGeom prst="rect">
@@ -15193,7 +19685,7 @@
         </p:nvSpPr>
         <p:spPr>
           <a:xfrm>
-            <a:off x="1371600" y="3840480"/>
+            <a:off x="1371600" y="3749040"/>
             <a:ext cx="5120640" cy="548640"/>
           </a:xfrm>
           <a:prstGeom prst="rect">
@@ -15229,7 +19721,7 @@
         </p:nvSpPr>
         <p:spPr>
           <a:xfrm>
-            <a:off x="548640" y="4480560"/>
+            <a:off x="548640" y="4297680"/>
             <a:ext cx="594360" cy="594360"/>
           </a:xfrm>
           <a:prstGeom prst="ellipse">
@@ -15257,7 +19749,7 @@
         </p:blipFill>
         <p:spPr>
           <a:xfrm>
-            <a:off x="691286" y="4623206"/>
+            <a:off x="691286" y="4440326"/>
             <a:ext cx="309067" cy="309067"/>
           </a:xfrm>
           <a:prstGeom prst="rect">
@@ -15273,7 +19765,7 @@
         </p:nvSpPr>
         <p:spPr>
           <a:xfrm>
-            <a:off x="1371600" y="4443984"/>
+            <a:off x="1371600" y="4261104"/>
             <a:ext cx="5029200" cy="384048"/>
           </a:xfrm>
           <a:prstGeom prst="rect">
@@ -15312,7 +19804,7 @@
         </p:nvSpPr>
         <p:spPr>
           <a:xfrm>
-            <a:off x="1371600" y="4864608"/>
+            <a:off x="1371600" y="4681728"/>
             <a:ext cx="5029200" cy="256032"/>
           </a:xfrm>
           <a:prstGeom prst="rect">
@@ -15348,7 +19840,7 @@
         </p:nvSpPr>
         <p:spPr>
           <a:xfrm>
-            <a:off x="1371600" y="5166360"/>
+            <a:off x="1371600" y="4983480"/>
             <a:ext cx="5120640" cy="548640"/>
           </a:xfrm>
           <a:prstGeom prst="rect">
@@ -15370,7 +19862,7 @@
                   <a:schemeClr val="tx2"/>
                 </a:solidFill>
               </a:rPr>
-              <a:t>Every post and figure, audiences, tickets, sponsor pages and recommendations for 2027.</a:t>
+              <a:t>Every post and figure, audiences, tickets and sponsor pages, as a PDF with a web version.</a:t>
             </a:r>
             <a:endParaRPr lang="en-GB" sz="1400" dirty="0"/>
           </a:p>
@@ -15378,54 +19870,117 @@
       </p:sp>
       <p:sp>
         <p:nvSpPr>
-          <p:cNvPr id="23" name="Text 15"/>
-          <p:cNvSpPr txBox="1"/>
-          <p:nvPr/>
-        </p:nvSpPr>
-        <p:spPr>
-          <a:xfrm>
-            <a:off x="1371600" y="5852160"/>
-            <a:ext cx="5120640" cy="274320"/>
-          </a:xfrm>
-          <a:prstGeom prst="rect">
-            <a:avLst/>
-          </a:prstGeom>
-          <a:noFill/>
-          <a:ln/>
-        </p:spPr>
-        <p:txBody>
-          <a:bodyPr wrap="square" lIns="0" tIns="0" rIns="0" bIns="0" rtlCol="0" anchor="t"/>
-          <a:lstStyle/>
-          <a:p>
-            <a:pPr indent="0" marL="0">
-              <a:buNone/>
-            </a:pPr>
-            <a:r>
-              <a:rPr lang="en-GB" altLang="en-US" sz="1200" dirty="0">
-                <a:solidFill>
-                  <a:schemeClr val="accent3"/>
-                </a:solidFill>
-              </a:rPr>
-              <a:t>Delivered as a PDF for the board and sponsors, with a web version.</a:t>
-            </a:r>
-            <a:endParaRPr lang="en-GB" sz="1200" dirty="0"/>
-          </a:p>
-        </p:txBody>
-      </p:sp>
-      <p:sp>
-        <p:nvSpPr>
-          <p:cNvPr id="24" name="Shape 16"/>
+          <p:cNvPr id="23" name="Shape 15"/>
           <p:cNvSpPr/>
           <p:nvPr/>
         </p:nvSpPr>
         <p:spPr>
           <a:xfrm>
-            <a:off x="6949440" y="1783080"/>
-            <a:ext cx="4690872" cy="4389120"/>
+            <a:off x="1371600" y="5833872"/>
+            <a:ext cx="4114800" cy="384048"/>
           </a:xfrm>
           <a:prstGeom prst="roundRect">
             <a:avLst>
-              <a:gd name="adj" fmla="val 1667"/>
+              <a:gd name="adj" fmla="val 50000"/>
+            </a:avLst>
+          </a:prstGeom>
+          <a:solidFill>
+            <a:schemeClr val="bg1"/>
+          </a:solidFill>
+          <a:ln w="12700">
+            <a:solidFill>
+              <a:schemeClr val="accent3"/>
+            </a:solidFill>
+            <a:prstDash val="solid"/>
+          </a:ln>
+        </p:spPr>
+      </p:sp>
+      <p:sp>
+        <p:nvSpPr>
+          <p:cNvPr id="24" name="Text 16"/>
+          <p:cNvSpPr txBox="1"/>
+          <p:nvPr/>
+        </p:nvSpPr>
+        <p:spPr>
+          <a:xfrm>
+            <a:off x="1371600" y="5833872"/>
+            <a:ext cx="4114800" cy="384048"/>
+          </a:xfrm>
+          <a:prstGeom prst="rect">
+            <a:avLst/>
+          </a:prstGeom>
+          <a:noFill/>
+          <a:ln/>
+        </p:spPr>
+        <p:txBody>
+          <a:bodyPr wrap="square" lIns="0" tIns="0" rIns="0" bIns="0" rtlCol="0" anchor="ctr"/>
+          <a:lstStyle/>
+          <a:p>
+            <a:pPr algn="ctr" indent="0" marL="0">
+              <a:buNone/>
+            </a:pPr>
+            <a:r>
+              <a:rPr lang="en-GB" altLang="en-US" sz="1200" b="1" u="sng" dirty="0">
+                <a:solidFill>
+                  <a:schemeClr val="accent3"/>
+                </a:solidFill>
+                <a:hlinkClick r:id="rId6" action="ppaction://hlinksldjump" tooltip="Sample report, page 2">
+                  <a:extLst>
+                    <a:ext uri="{A12FA001-AC4F-418D-AE19-62706E023703}">
+                      <ahyp:hlinkClr xmlns:ahyp="http://schemas.microsoft.com/office/drawing/2018/hyperlinkcolor" val="tx"/>
+                    </a:ext>
+                  </a:extLst>
+                </a:hlinkClick>
+              </a:rPr>
+              <a:t>See page 2: the detailed breakdown  →</a:t>
+            </a:r>
+            <a:endParaRPr lang="en-GB" sz="1200" dirty="0"/>
+          </a:p>
+        </p:txBody>
+      </p:sp>
+      <p:sp>
+        <p:nvSpPr>
+          <p:cNvPr id="25" name="Sample report page 2"/>
+          <p:cNvSpPr/>
+          <p:nvPr/>
+        </p:nvSpPr>
+        <p:spPr>
+          <a:xfrm>
+            <a:off x="6949440" y="1874520"/>
+            <a:ext cx="4690872" cy="4343400"/>
+          </a:xfrm>
+          <a:prstGeom prst="roundRect">
+            <a:avLst>
+              <a:gd name="adj" fmla="val 1684"/>
+            </a:avLst>
+          </a:prstGeom>
+          <a:solidFill>
+            <a:schemeClr val="bg1"/>
+          </a:solidFill>
+          <a:ln w="9525">
+            <a:solidFill>
+              <a:schemeClr val="tx2">
+                <a:alpha val="40000"/>
+              </a:schemeClr>
+            </a:solidFill>
+            <a:prstDash val="solid"/>
+          </a:ln>
+        </p:spPr>
+      </p:sp>
+      <p:sp>
+        <p:nvSpPr>
+          <p:cNvPr id="26" name="Shape 18"/>
+          <p:cNvSpPr/>
+          <p:nvPr/>
+        </p:nvSpPr>
+        <p:spPr>
+          <a:xfrm>
+            <a:off x="6812280" y="1737360"/>
+            <a:ext cx="4690872" cy="4343400"/>
+          </a:xfrm>
+          <a:prstGeom prst="roundRect">
+            <a:avLst>
+              <a:gd name="adj" fmla="val 1684"/>
             </a:avLst>
           </a:prstGeom>
           <a:solidFill>
@@ -15450,14 +20005,14 @@
       </p:sp>
       <p:sp>
         <p:nvSpPr>
-          <p:cNvPr id="25" name="Text 17"/>
+          <p:cNvPr id="27" name="Text 19"/>
           <p:cNvSpPr txBox="1"/>
           <p:nvPr/>
         </p:nvSpPr>
         <p:spPr>
           <a:xfrm>
-            <a:off x="7223760" y="2011680"/>
-            <a:ext cx="2743200" cy="201168"/>
+            <a:off x="7086600" y="1965960"/>
+            <a:ext cx="3291840" cy="201168"/>
           </a:xfrm>
           <a:prstGeom prst="rect">
             <a:avLst/>
@@ -15478,7 +20033,7 @@
                   <a:schemeClr val="accent3"/>
                 </a:solidFill>
               </a:rPr>
-              <a:t>VISIBILITY REPORT</a:t>
+              <a:t>VISIBILITY REPORT  ·  PAGE 1</a:t>
             </a:r>
             <a:endParaRPr lang="en-GB" sz="900" dirty="0"/>
           </a:p>
@@ -15486,13 +20041,13 @@
       </p:sp>
       <p:sp>
         <p:nvSpPr>
-          <p:cNvPr id="26" name="Text 18"/>
+          <p:cNvPr id="28" name="Text 20"/>
           <p:cNvSpPr txBox="1"/>
           <p:nvPr/>
         </p:nvSpPr>
         <p:spPr>
           <a:xfrm>
-            <a:off x="7223760" y="2212848"/>
+            <a:off x="7086600" y="2167128"/>
             <a:ext cx="3657600" cy="365760"/>
           </a:xfrm>
           <a:prstGeom prst="rect">
@@ -15525,21 +20080,21 @@
       </p:sp>
       <p:pic>
         <p:nvPicPr>
-          <p:cNvPr id="27" name="Image 5" descr="Mother Africa Festival">    </p:cNvPr>
+          <p:cNvPr id="29" name="Image 5" descr="Mother Africa Festival">    </p:cNvPr>
           <p:cNvPicPr>
             <a:picLocks noChangeAspect="1"/>
           </p:cNvPicPr>
           <p:nvPr/>
         </p:nvPicPr>
         <p:blipFill>
-          <a:blip r:embed="rId6"/>
+          <a:blip r:embed="rId7"/>
           <a:stretch>
             <a:fillRect/>
           </a:stretch>
         </p:blipFill>
         <p:spPr>
           <a:xfrm>
-            <a:off x="10863072" y="2011680"/>
+            <a:off x="10725912" y="1965960"/>
             <a:ext cx="541249" cy="384048"/>
           </a:xfrm>
           <a:prstGeom prst="rect">
@@ -15549,13 +20104,13 @@
       </p:pic>
       <p:sp>
         <p:nvSpPr>
-          <p:cNvPr id="28" name="Shape 19"/>
+          <p:cNvPr id="30" name="Shape 21"/>
           <p:cNvSpPr/>
           <p:nvPr/>
         </p:nvSpPr>
         <p:spPr>
           <a:xfrm>
-            <a:off x="7223760" y="2651760"/>
+            <a:off x="7086600" y="2606040"/>
             <a:ext cx="4142232" cy="0"/>
           </a:xfrm>
           <a:prstGeom prst="line">
@@ -15572,13 +20127,13 @@
       </p:sp>
       <p:sp>
         <p:nvSpPr>
-          <p:cNvPr id="29" name="Shape 20"/>
+          <p:cNvPr id="31" name="Shape 22"/>
           <p:cNvSpPr/>
           <p:nvPr/>
         </p:nvSpPr>
         <p:spPr>
           <a:xfrm>
-            <a:off x="7223760" y="2834640"/>
+            <a:off x="7086600" y="2788920"/>
             <a:ext cx="2011680" cy="731520"/>
           </a:xfrm>
           <a:prstGeom prst="roundRect">
@@ -15594,13 +20149,13 @@
       </p:sp>
       <p:sp>
         <p:nvSpPr>
-          <p:cNvPr id="30" name="Text 21"/>
+          <p:cNvPr id="32" name="Text 23"/>
           <p:cNvSpPr txBox="1"/>
           <p:nvPr/>
         </p:nvSpPr>
         <p:spPr>
           <a:xfrm>
-            <a:off x="7388352" y="2907792"/>
+            <a:off x="7251192" y="2862072"/>
             <a:ext cx="1737360" cy="347472"/>
           </a:xfrm>
           <a:prstGeom prst="rect">
@@ -15630,13 +20185,13 @@
       </p:sp>
       <p:sp>
         <p:nvSpPr>
-          <p:cNvPr id="31" name="Text 22"/>
+          <p:cNvPr id="33" name="Text 24"/>
           <p:cNvSpPr txBox="1"/>
           <p:nvPr/>
         </p:nvSpPr>
         <p:spPr>
           <a:xfrm>
-            <a:off x="7388352" y="3273552"/>
+            <a:off x="7251192" y="3227832"/>
             <a:ext cx="1783080" cy="201168"/>
           </a:xfrm>
           <a:prstGeom prst="rect">
@@ -15666,13 +20221,13 @@
       </p:sp>
       <p:sp>
         <p:nvSpPr>
-          <p:cNvPr id="32" name="Shape 23"/>
+          <p:cNvPr id="34" name="Shape 25"/>
           <p:cNvSpPr/>
           <p:nvPr/>
         </p:nvSpPr>
         <p:spPr>
           <a:xfrm>
-            <a:off x="9345168" y="2834640"/>
+            <a:off x="9208008" y="2788920"/>
             <a:ext cx="2011680" cy="731520"/>
           </a:xfrm>
           <a:prstGeom prst="roundRect">
@@ -15688,13 +20243,13 @@
       </p:sp>
       <p:sp>
         <p:nvSpPr>
-          <p:cNvPr id="33" name="Text 24"/>
+          <p:cNvPr id="35" name="Text 26"/>
           <p:cNvSpPr txBox="1"/>
           <p:nvPr/>
         </p:nvSpPr>
         <p:spPr>
           <a:xfrm>
-            <a:off x="9509760" y="2907792"/>
+            <a:off x="9372600" y="2862072"/>
             <a:ext cx="1737360" cy="347472"/>
           </a:xfrm>
           <a:prstGeom prst="rect">
@@ -15724,13 +20279,13 @@
       </p:sp>
       <p:sp>
         <p:nvSpPr>
-          <p:cNvPr id="34" name="Text 25"/>
+          <p:cNvPr id="36" name="Text 27"/>
           <p:cNvSpPr txBox="1"/>
           <p:nvPr/>
         </p:nvSpPr>
         <p:spPr>
           <a:xfrm>
-            <a:off x="9509760" y="3273552"/>
+            <a:off x="9372600" y="3227832"/>
             <a:ext cx="1783080" cy="201168"/>
           </a:xfrm>
           <a:prstGeom prst="rect">
@@ -15760,13 +20315,13 @@
       </p:sp>
       <p:sp>
         <p:nvSpPr>
-          <p:cNvPr id="35" name="Shape 26"/>
+          <p:cNvPr id="37" name="Shape 28"/>
           <p:cNvSpPr/>
           <p:nvPr/>
         </p:nvSpPr>
         <p:spPr>
           <a:xfrm>
-            <a:off x="7223760" y="3703320"/>
+            <a:off x="7086600" y="3657600"/>
             <a:ext cx="2011680" cy="731520"/>
           </a:xfrm>
           <a:prstGeom prst="roundRect">
@@ -15782,13 +20337,13 @@
       </p:sp>
       <p:sp>
         <p:nvSpPr>
-          <p:cNvPr id="36" name="Text 27"/>
+          <p:cNvPr id="38" name="Text 29"/>
           <p:cNvSpPr txBox="1"/>
           <p:nvPr/>
         </p:nvSpPr>
         <p:spPr>
           <a:xfrm>
-            <a:off x="7388352" y="3776472"/>
+            <a:off x="7251192" y="3730752"/>
             <a:ext cx="1737360" cy="347472"/>
           </a:xfrm>
           <a:prstGeom prst="rect">
@@ -15818,13 +20373,13 @@
       </p:sp>
       <p:sp>
         <p:nvSpPr>
-          <p:cNvPr id="37" name="Text 28"/>
+          <p:cNvPr id="39" name="Text 30"/>
           <p:cNvSpPr txBox="1"/>
           <p:nvPr/>
         </p:nvSpPr>
         <p:spPr>
           <a:xfrm>
-            <a:off x="7388352" y="4142232"/>
+            <a:off x="7251192" y="4096512"/>
             <a:ext cx="1783080" cy="201168"/>
           </a:xfrm>
           <a:prstGeom prst="rect">
@@ -15854,13 +20409,13 @@
       </p:sp>
       <p:sp>
         <p:nvSpPr>
-          <p:cNvPr id="38" name="Shape 29"/>
+          <p:cNvPr id="40" name="Shape 31"/>
           <p:cNvSpPr/>
           <p:nvPr/>
         </p:nvSpPr>
         <p:spPr>
           <a:xfrm>
-            <a:off x="9345168" y="3703320"/>
+            <a:off x="9208008" y="3657600"/>
             <a:ext cx="2011680" cy="731520"/>
           </a:xfrm>
           <a:prstGeom prst="roundRect">
@@ -15876,86 +20431,14 @@
       </p:sp>
       <p:sp>
         <p:nvSpPr>
-          <p:cNvPr id="39" name="Text 30"/>
-          <p:cNvSpPr txBox="1"/>
-          <p:nvPr/>
-        </p:nvSpPr>
-        <p:spPr>
-          <a:xfrm>
-            <a:off x="9509760" y="3776472"/>
-            <a:ext cx="1737360" cy="347472"/>
-          </a:xfrm>
-          <a:prstGeom prst="rect">
-            <a:avLst/>
-          </a:prstGeom>
-          <a:noFill/>
-          <a:ln/>
-        </p:spPr>
-        <p:txBody>
-          <a:bodyPr wrap="square" lIns="0" tIns="0" rIns="0" bIns="0" rtlCol="0" anchor="t"/>
-          <a:lstStyle/>
-          <a:p>
-            <a:pPr indent="0" marL="0">
-              <a:buNone/>
-            </a:pPr>
-            <a:r>
-              <a:rPr lang="en-GB" altLang="en-US" sz="1800" b="1" dirty="0">
-                <a:solidFill>
-                  <a:schemeClr val="tx1"/>
-                </a:solidFill>
-              </a:rPr>
-              <a:t>18</a:t>
-            </a:r>
-            <a:endParaRPr lang="en-GB" sz="1800" dirty="0"/>
-          </a:p>
-        </p:txBody>
-      </p:sp>
-      <p:sp>
-        <p:nvSpPr>
-          <p:cNvPr id="40" name="Text 31"/>
-          <p:cNvSpPr txBox="1"/>
-          <p:nvPr/>
-        </p:nvSpPr>
-        <p:spPr>
-          <a:xfrm>
-            <a:off x="9509760" y="4142232"/>
-            <a:ext cx="1783080" cy="201168"/>
-          </a:xfrm>
-          <a:prstGeom prst="rect">
-            <a:avLst/>
-          </a:prstGeom>
-          <a:noFill/>
-          <a:ln/>
-        </p:spPr>
-        <p:txBody>
-          <a:bodyPr wrap="square" lIns="0" tIns="0" rIns="0" bIns="0" rtlCol="0" anchor="t"/>
-          <a:lstStyle/>
-          <a:p>
-            <a:pPr indent="0" marL="0">
-              <a:buNone/>
-            </a:pPr>
-            <a:r>
-              <a:rPr lang="en-GB" altLang="en-US" sz="1000" dirty="0">
-                <a:solidFill>
-                  <a:schemeClr val="tx2"/>
-                </a:solidFill>
-              </a:rPr>
-              <a:t>Creators</a:t>
-            </a:r>
-            <a:endParaRPr lang="en-GB" sz="1000" dirty="0"/>
-          </a:p>
-        </p:txBody>
-      </p:sp>
-      <p:sp>
-        <p:nvSpPr>
           <p:cNvPr id="41" name="Text 32"/>
           <p:cNvSpPr txBox="1"/>
           <p:nvPr/>
         </p:nvSpPr>
         <p:spPr>
           <a:xfrm>
-            <a:off x="7223760" y="4617720"/>
-            <a:ext cx="2743200" cy="201168"/>
+            <a:off x="9372600" y="3730752"/>
+            <a:ext cx="1737360" cy="347472"/>
           </a:xfrm>
           <a:prstGeom prst="rect">
             <a:avLst/>
@@ -15971,14 +20454,14 @@
               <a:buNone/>
             </a:pPr>
             <a:r>
-              <a:rPr lang="en-GB" altLang="en-US" sz="900" b="1" spc="300" kern="0" dirty="0">
-                <a:solidFill>
-                  <a:schemeClr val="accent3"/>
-                </a:solidFill>
-              </a:rPr>
-              <a:t>VIEWS BY PLATFORM</a:t>
-            </a:r>
-            <a:endParaRPr lang="en-GB" sz="900" dirty="0"/>
+              <a:rPr lang="en-GB" altLang="en-US" sz="1800" b="1" dirty="0">
+                <a:solidFill>
+                  <a:schemeClr val="tx1"/>
+                </a:solidFill>
+              </a:rPr>
+              <a:t>18</a:t>
+            </a:r>
+            <a:endParaRPr lang="en-GB" sz="1800" dirty="0"/>
           </a:p>
         </p:txBody>
       </p:sp>
@@ -15990,7 +20473,79 @@
         </p:nvSpPr>
         <p:spPr>
           <a:xfrm>
-            <a:off x="7223760" y="4910328"/>
+            <a:off x="9372600" y="4096512"/>
+            <a:ext cx="1783080" cy="201168"/>
+          </a:xfrm>
+          <a:prstGeom prst="rect">
+            <a:avLst/>
+          </a:prstGeom>
+          <a:noFill/>
+          <a:ln/>
+        </p:spPr>
+        <p:txBody>
+          <a:bodyPr wrap="square" lIns="0" tIns="0" rIns="0" bIns="0" rtlCol="0" anchor="t"/>
+          <a:lstStyle/>
+          <a:p>
+            <a:pPr indent="0" marL="0">
+              <a:buNone/>
+            </a:pPr>
+            <a:r>
+              <a:rPr lang="en-GB" altLang="en-US" sz="1000" dirty="0">
+                <a:solidFill>
+                  <a:schemeClr val="tx2"/>
+                </a:solidFill>
+              </a:rPr>
+              <a:t>Creators</a:t>
+            </a:r>
+            <a:endParaRPr lang="en-GB" sz="1000" dirty="0"/>
+          </a:p>
+        </p:txBody>
+      </p:sp>
+      <p:sp>
+        <p:nvSpPr>
+          <p:cNvPr id="43" name="Text 34"/>
+          <p:cNvSpPr txBox="1"/>
+          <p:nvPr/>
+        </p:nvSpPr>
+        <p:spPr>
+          <a:xfrm>
+            <a:off x="7086600" y="4572000"/>
+            <a:ext cx="2743200" cy="201168"/>
+          </a:xfrm>
+          <a:prstGeom prst="rect">
+            <a:avLst/>
+          </a:prstGeom>
+          <a:noFill/>
+          <a:ln/>
+        </p:spPr>
+        <p:txBody>
+          <a:bodyPr wrap="square" lIns="0" tIns="0" rIns="0" bIns="0" rtlCol="0" anchor="t"/>
+          <a:lstStyle/>
+          <a:p>
+            <a:pPr indent="0" marL="0">
+              <a:buNone/>
+            </a:pPr>
+            <a:r>
+              <a:rPr lang="en-GB" altLang="en-US" sz="900" b="1" spc="300" kern="0" dirty="0">
+                <a:solidFill>
+                  <a:schemeClr val="accent3"/>
+                </a:solidFill>
+              </a:rPr>
+              <a:t>VIEWS BY PLATFORM</a:t>
+            </a:r>
+            <a:endParaRPr lang="en-GB" sz="900" dirty="0"/>
+          </a:p>
+        </p:txBody>
+      </p:sp>
+      <p:sp>
+        <p:nvSpPr>
+          <p:cNvPr id="44" name="Text 35"/>
+          <p:cNvSpPr txBox="1"/>
+          <p:nvPr/>
+        </p:nvSpPr>
+        <p:spPr>
+          <a:xfrm>
+            <a:off x="7086600" y="4864608"/>
             <a:ext cx="1005840" cy="219456"/>
           </a:xfrm>
           <a:prstGeom prst="rect">
@@ -16020,13 +20575,13 @@
       </p:sp>
       <p:sp>
         <p:nvSpPr>
-          <p:cNvPr id="43" name="Shape 34"/>
+          <p:cNvPr id="45" name="Shape 36"/>
           <p:cNvSpPr/>
           <p:nvPr/>
         </p:nvSpPr>
         <p:spPr>
           <a:xfrm>
-            <a:off x="8275320" y="4946904"/>
+            <a:off x="8138160" y="4901184"/>
             <a:ext cx="2468880" cy="146304"/>
           </a:xfrm>
           <a:prstGeom prst="roundRect">
@@ -16042,13 +20597,13 @@
       </p:sp>
       <p:sp>
         <p:nvSpPr>
-          <p:cNvPr id="44" name="Text 35"/>
+          <p:cNvPr id="46" name="Text 37"/>
           <p:cNvSpPr txBox="1"/>
           <p:nvPr/>
         </p:nvSpPr>
         <p:spPr>
           <a:xfrm>
-            <a:off x="10835640" y="4910328"/>
+            <a:off x="10698480" y="4864608"/>
             <a:ext cx="548640" cy="219456"/>
           </a:xfrm>
           <a:prstGeom prst="rect">
@@ -16078,13 +20633,13 @@
       </p:sp>
       <p:sp>
         <p:nvSpPr>
-          <p:cNvPr id="45" name="Text 36"/>
+          <p:cNvPr id="47" name="Text 38"/>
           <p:cNvSpPr txBox="1"/>
           <p:nvPr/>
         </p:nvSpPr>
         <p:spPr>
           <a:xfrm>
-            <a:off x="7223760" y="5239512"/>
+            <a:off x="7086600" y="5193792"/>
             <a:ext cx="1005840" cy="219456"/>
           </a:xfrm>
           <a:prstGeom prst="rect">
@@ -16114,13 +20669,13 @@
       </p:sp>
       <p:sp>
         <p:nvSpPr>
-          <p:cNvPr id="46" name="Shape 37"/>
+          <p:cNvPr id="48" name="Shape 39"/>
           <p:cNvSpPr/>
           <p:nvPr/>
         </p:nvSpPr>
         <p:spPr>
           <a:xfrm>
-            <a:off x="8275320" y="5276088"/>
+            <a:off x="8138160" y="5230368"/>
             <a:ext cx="1804182" cy="146304"/>
           </a:xfrm>
           <a:prstGeom prst="roundRect">
@@ -16136,13 +20691,13 @@
       </p:sp>
       <p:sp>
         <p:nvSpPr>
-          <p:cNvPr id="47" name="Text 38"/>
+          <p:cNvPr id="49" name="Text 40"/>
           <p:cNvSpPr txBox="1"/>
           <p:nvPr/>
         </p:nvSpPr>
         <p:spPr>
           <a:xfrm>
-            <a:off x="10170942" y="5239512"/>
+            <a:off x="10033782" y="5193792"/>
             <a:ext cx="548640" cy="219456"/>
           </a:xfrm>
           <a:prstGeom prst="rect">
@@ -16172,13 +20727,13 @@
       </p:sp>
       <p:sp>
         <p:nvSpPr>
-          <p:cNvPr id="48" name="Text 39"/>
+          <p:cNvPr id="50" name="Text 41"/>
           <p:cNvSpPr txBox="1"/>
           <p:nvPr/>
         </p:nvSpPr>
         <p:spPr>
           <a:xfrm>
-            <a:off x="7223760" y="5568696"/>
+            <a:off x="7086600" y="5522976"/>
             <a:ext cx="1005840" cy="219456"/>
           </a:xfrm>
           <a:prstGeom prst="rect">
@@ -16208,13 +20763,13 @@
       </p:sp>
       <p:sp>
         <p:nvSpPr>
-          <p:cNvPr id="49" name="Shape 40"/>
+          <p:cNvPr id="51" name="Shape 42"/>
           <p:cNvSpPr/>
           <p:nvPr/>
         </p:nvSpPr>
         <p:spPr>
           <a:xfrm>
-            <a:off x="8275320" y="5605272"/>
+            <a:off x="8138160" y="5559552"/>
             <a:ext cx="474785" cy="146304"/>
           </a:xfrm>
           <a:prstGeom prst="roundRect">
@@ -16230,13 +20785,13 @@
       </p:sp>
       <p:sp>
         <p:nvSpPr>
-          <p:cNvPr id="50" name="Text 41"/>
+          <p:cNvPr id="52" name="Text 43"/>
           <p:cNvSpPr txBox="1"/>
           <p:nvPr/>
         </p:nvSpPr>
         <p:spPr>
           <a:xfrm>
-            <a:off x="8841545" y="5568696"/>
+            <a:off x="8704385" y="5522976"/>
             <a:ext cx="548640" cy="219456"/>
           </a:xfrm>
           <a:prstGeom prst="rect">
@@ -16266,14 +20821,14 @@
       </p:sp>
       <p:sp>
         <p:nvSpPr>
-          <p:cNvPr id="51" name="Text 42"/>
+          <p:cNvPr id="53" name="Text 44"/>
           <p:cNvSpPr txBox="1"/>
           <p:nvPr/>
         </p:nvSpPr>
         <p:spPr>
           <a:xfrm>
-            <a:off x="7223760" y="5879592"/>
-            <a:ext cx="4114800" cy="201168"/>
+            <a:off x="7086600" y="5779008"/>
+            <a:ext cx="2926080" cy="201168"/>
           </a:xfrm>
           <a:prstGeom prst="rect">
             <a:avLst/>
@@ -16295,6 +20850,49 @@
                 </a:solidFill>
               </a:rPr>
               <a:t>Sample layout. Figures are illustrative.</a:t>
+            </a:r>
+            <a:endParaRPr lang="en-GB" sz="1000" dirty="0"/>
+          </a:p>
+        </p:txBody>
+      </p:sp>
+      <p:sp>
+        <p:nvSpPr>
+          <p:cNvPr id="54" name="Text 45"/>
+          <p:cNvSpPr txBox="1"/>
+          <p:nvPr/>
+        </p:nvSpPr>
+        <p:spPr>
+          <a:xfrm>
+            <a:off x="10222992" y="5779008"/>
+            <a:ext cx="1005840" cy="201168"/>
+          </a:xfrm>
+          <a:prstGeom prst="rect">
+            <a:avLst/>
+          </a:prstGeom>
+          <a:noFill/>
+          <a:ln/>
+        </p:spPr>
+        <p:txBody>
+          <a:bodyPr wrap="square" lIns="0" tIns="0" rIns="0" bIns="0" rtlCol="0" anchor="t"/>
+          <a:lstStyle/>
+          <a:p>
+            <a:pPr algn="r" indent="0" marL="0">
+              <a:buNone/>
+            </a:pPr>
+            <a:r>
+              <a:rPr lang="en-GB" altLang="en-US" sz="1000" b="1" u="sng" dirty="0">
+                <a:solidFill>
+                  <a:schemeClr val="accent3"/>
+                </a:solidFill>
+                <a:hlinkClick r:id="rId8" action="ppaction://hlinksldjump" tooltip="Sample report, page 2">
+                  <a:extLst>
+                    <a:ext uri="{A12FA001-AC4F-418D-AE19-62706E023703}">
+                      <ahyp:hlinkClr xmlns:ahyp="http://schemas.microsoft.com/office/drawing/2018/hyperlinkcolor" val="tx"/>
+                    </a:ext>
+                  </a:extLst>
+                </a:hlinkClick>
+              </a:rPr>
+              <a:t>Page 2  →</a:t>
             </a:r>
             <a:endParaRPr lang="en-GB" sz="1000" dirty="0"/>
           </a:p>

--- a/proposition-deck/AToure Mother Africa Festival Proposal.pptx
+++ b/proposition-deck/AToure Mother Africa Festival Proposal.pptx
@@ -118,46 +118,50 @@
   <p:extLst>
     <p:ext uri="{521415D9-36F7-43E2-AB2F-B90AF26B5E84}">
       <p14:sectionLst xmlns:p14="http://schemas.microsoft.com/office/powerpoint/2010/main">
-        <p14:section name="Opening" id="{e9d823ba-517e-451a-dec3-ef48890800cf}">
+        <p14:section name="Opening" id="{80000311-732c-2d10-74c1-8efbadcfd056}">
           <p14:sldIdLst>
             <p14:sldId id="256"/>
           </p14:sldIdLst>
         </p14:section>
-        <p14:section name="Where we stand" id="{e704da62-8eed-aa05-9858-a35f7291fd8a}">
+        <p14:section name="Where we stand" id="{1663daec-388d-495c-fe94-427393a3f80f}">
           <p14:sldIdLst>
             <p14:sldId id="257"/>
             <p14:sldId id="258"/>
           </p14:sldIdLst>
         </p14:section>
-        <p14:section name="The AToure answer" id="{ad20d08e-4202-66f1-c3e9-d63233b85155}">
+        <p14:section name="The AToure answer" id="{c4371925-ff2f-1cea-2456-8ca85570c1b7}">
           <p14:sldIdLst>
             <p14:sldId id="259"/>
             <p14:sldId id="260"/>
           </p14:sldIdLst>
         </p14:section>
-        <p14:section name="Visibility" id="{ee888e28-299d-c58d-25f5-31079faf35ae}">
+        <p14:section name="Visibility" id="{c4edc138-bade-a0e0-46d3-34e86f8c404c}">
           <p14:sldIdLst>
             <p14:sldId id="261"/>
             <p14:sldId id="262"/>
           </p14:sldIdLst>
         </p14:section>
-        <p14:section name="The visibility report" id="{254b141b-a8c1-e114-ccdf-8d9e117b551d}">
+        <p14:section name="The visibility report" id="{5dda36f6-aa59-b648-bb8b-fadc0856c663}">
           <p14:sldIdLst>
             <p14:sldId id="263"/>
+          </p14:sldIdLst>
+        </p14:section>
+        <p14:section name="The proposal" id="{f715338a-5bd7-82c4-3c5f-fc8150f012a6}">
+          <p14:sldIdLst>
             <p14:sldId id="264"/>
           </p14:sldIdLst>
         </p14:section>
-        <p14:section name="Proof" id="{b655f4d8-652a-9039-22be-aaea13b93d49}">
+        <p14:section name="Proof" id="{6149dafd-314a-ad9b-edce-93772ad636da}">
           <p14:sldIdLst>
             <p14:sldId id="265"/>
           </p14:sldIdLst>
         </p14:section>
-        <p14:section name="The ask" id="{d594762d-027f-7d1a-ab47-c4429139153d}">
+        <p14:section name="The ask" id="{1f219f9a-85e9-adac-4f90-dd4e91e6f4aa}">
           <p14:sldIdLst>
             <p14:sldId id="266"/>
           </p14:sldIdLst>
         </p14:section>
-        <p14:section name="Appendix" id="{c8fc9484-ace8-b5d0-fc4e-9e39da93f8ae}">
+        <p14:section name="Appendix" id="{9394e37a-130a-0729-3c1f-061fea9af12c}">
           <p14:sldIdLst>
             <p14:sldId id="267"/>
           </p14:sldIdLst>
@@ -1094,7 +1098,7 @@
           <a:p>
             <a:r>
               <a:rPr lang="en-US" dirty="0"/>
-              <a:t>Three layers, run by one team. Talent access brings the right creators. Creator management means AToure runs them on the ground as the operator, not as a middleman. The visibility report turns everything they post into numbers the festival can put in front of sponsors. The report is the product: it is what makes the creator spend provable.</a:t>
+              <a:t>Two columns: what the festival provides, in orange, and what AToure delivers, in gold. The festival’s side is small on purpose: access for the creators, its brand guidelines and key messages, the ticket links, and one contact on production. Everything else is AToure’s: the creators, running them on the ground as the operator, and the report that makes the visibility provable.</a:t>
             </a:r>
             <a:endParaRPr lang="en-US" dirty="0"/>
           </a:p>
@@ -1446,7 +1450,7 @@
           <a:p>
             <a:r>
               <a:rPr lang="en-US" dirty="0"/>
-              <a:t>Seven things, and for each one where the number comes from. Creators send their analytics as screen recordings, which is written into their agreement. Ticket clicks come from tracked links; codes only if the festival supplies them, to confirm with Tikerama. Targets for each line are agreed with the festival before the build up starts.</a:t>
+              <a:t>Three fixed dates. A one page weekly pulse during the build up, so effort moves to the creators who are working. A check 48 hours after the festival: who posted, where, against which brief. The full report on day 14, by 11 January 2027, as a PDF for the board and sponsors with a web version. The page on the right is a sample layout: its figures are illustrative, to show the format, and are not a forecast for the festival.</a:t>
             </a:r>
             <a:endParaRPr lang="en-US" dirty="0"/>
           </a:p>
@@ -1534,7 +1538,7 @@
           <a:p>
             <a:r>
               <a:rPr lang="en-US" dirty="0"/>
-              <a:t>Three fixed dates. A one page weekly pulse during the build up, so effort moves to the creators who are working. A check 48 hours after the festival: who posted, where, against which brief. The full report on day 14, by 11 January 2027, as a PDF for the board and sponsors with a web version. The page on the right is a sample layout: its figures are illustrative, to show the format, and are not a forecast for the festival.</a:t>
+              <a:t>This is a trial, not a long term ask. One edition: AToure runs the creators and delivers one full report on a fixed date. The trial is what earns the conversation about 2027. There is no price on this slide on purpose: scope and fees are agreed once the festival says yes.</a:t>
             </a:r>
             <a:endParaRPr lang="en-US" dirty="0"/>
           </a:p>
@@ -5240,7 +5244,7 @@
                   <a:schemeClr val="tx1"/>
                 </a:solidFill>
               </a:rPr>
-              <a:t>The detailed breakdown</a:t>
+              <a:t>Every number breaks down, creator by creator</a:t>
             </a:r>
             <a:endParaRPr lang="en-GB" sz="3800" dirty="0"/>
           </a:p>
@@ -8021,8 +8025,8 @@
         </p:nvSpPr>
         <p:spPr>
           <a:xfrm>
-            <a:off x="822960" y="5550408"/>
-            <a:ext cx="6309360" cy="237744"/>
+            <a:off x="822960" y="5486400"/>
+            <a:ext cx="6309360" cy="384048"/>
           </a:xfrm>
           <a:prstGeom prst="rect">
             <a:avLst/>
@@ -8043,7 +8047,7 @@
                   <a:schemeClr val="tx2"/>
                 </a:solidFill>
               </a:rPr>
-              <a:t>Also in the full report: every post with its link, platform and time, and recommendations for the next edition.</a:t>
+              <a:t>The full report also lists every post with its link, platform and time, and ends with recommendations. Every figure comes from creator analytics, tracked links or ticketing data; anything modelled is labelled estimated.</a:t>
             </a:r>
             <a:endParaRPr lang="en-GB" sz="1000" dirty="0"/>
           </a:p>
@@ -8426,10 +8430,10 @@
             <a:tbl>
               <a:tblPr/>
               <a:tblGrid>
-                <a:gridCol w="822960"/>
+                <a:gridCol w="960120"/>
+                <a:gridCol w="868680"/>
                 <a:gridCol w="914400"/>
-                <a:gridCol w="914400"/>
-                <a:gridCol w="1447495"/>
+                <a:gridCol w="1356055"/>
               </a:tblGrid>
               <a:tr h="274320">
                 <a:tc>
@@ -9427,7 +9431,7 @@
         </p:nvSpPr>
         <p:spPr>
           <a:xfrm>
-            <a:off x="822960" y="5879592"/>
+            <a:off x="822960" y="5925312"/>
             <a:ext cx="3657600" cy="219456"/>
           </a:xfrm>
           <a:prstGeom prst="rect">
@@ -9463,7 +9467,7 @@
         </p:nvSpPr>
         <p:spPr>
           <a:xfrm>
-            <a:off x="9539935" y="5879592"/>
+            <a:off x="9539935" y="5925312"/>
             <a:ext cx="1828800" cy="219456"/>
           </a:xfrm>
           <a:prstGeom prst="rect">
@@ -9484,7 +9488,7 @@
                 <a:solidFill>
                   <a:schemeClr val="accent3"/>
                 </a:solidFill>
-                <a:hlinkClick r:id="rId4" action="ppaction://hlinksldjump" tooltip="Reports on fixed dates">
+                <a:hlinkClick r:id="rId4" action="ppaction://hlinksldjump" tooltip="Back to the report">
                   <a:extLst>
                     <a:ext uri="{A12FA001-AC4F-418D-AE19-62706E023703}">
                       <ahyp:hlinkClr xmlns:ahyp="http://schemas.microsoft.com/office/drawing/2018/hyperlinkcolor" val="tx"/>
@@ -12524,7 +12528,7 @@
                   <a:schemeClr val="tx1"/>
                 </a:solidFill>
               </a:rPr>
-              <a:t>Three layers, one operator</a:t>
+              <a:t>Mother Africa gives access. AToure does the rest</a:t>
             </a:r>
             <a:endParaRPr lang="en-GB" sz="3800" dirty="0"/>
           </a:p>
@@ -12623,31 +12627,15 @@
         <p:spPr>
           <a:xfrm>
             <a:off x="548640" y="1783080"/>
-            <a:ext cx="3511296" cy="3200400"/>
-          </a:xfrm>
-          <a:prstGeom prst="roundRect">
-            <a:avLst>
-              <a:gd name="adj" fmla="val 2857"/>
-            </a:avLst>
+            <a:ext cx="5396332" cy="3246120"/>
+          </a:xfrm>
+          <a:prstGeom prst="rect">
+            <a:avLst/>
           </a:prstGeom>
           <a:solidFill>
-            <a:schemeClr val="bg1"/>
+            <a:srgbClr val="FCE9DA"/>
           </a:solidFill>
-          <a:ln w="9525">
-            <a:solidFill>
-              <a:schemeClr val="tx2">
-                <a:alpha val="28000"/>
-              </a:schemeClr>
-            </a:solidFill>
-            <a:prstDash val="solid"/>
-          </a:ln>
-          <a:effectLst>
-            <a:outerShdw sx="100000" sy="100000" kx="0" ky="0" algn="bl" rotWithShape="0" blurRad="127000" dist="38100" dir="5400000">
-              <a:srgbClr val="133524">
-                <a:alpha val="10000"/>
-              </a:srgbClr>
-            </a:outerShdw>
-          </a:effectLst>
+          <a:ln/>
         </p:spPr>
       </p:sp>
       <p:sp>
@@ -12659,7 +12647,83 @@
         <p:spPr>
           <a:xfrm>
             <a:off x="548640" y="1783080"/>
-            <a:ext cx="3511296" cy="457200"/>
+            <a:ext cx="5396332" cy="457200"/>
+          </a:xfrm>
+          <a:prstGeom prst="rect">
+            <a:avLst/>
+          </a:prstGeom>
+          <a:solidFill>
+            <a:schemeClr val="accent2"/>
+          </a:solidFill>
+          <a:ln/>
+        </p:spPr>
+      </p:sp>
+      <p:sp>
+        <p:nvSpPr>
+          <p:cNvPr id="10" name="Text 5"/>
+          <p:cNvSpPr txBox="1"/>
+          <p:nvPr/>
+        </p:nvSpPr>
+        <p:spPr>
+          <a:xfrm>
+            <a:off x="822960" y="1783080"/>
+            <a:ext cx="4939132" cy="457200"/>
+          </a:xfrm>
+          <a:prstGeom prst="rect">
+            <a:avLst/>
+          </a:prstGeom>
+          <a:noFill/>
+          <a:ln/>
+        </p:spPr>
+        <p:txBody>
+          <a:bodyPr wrap="square" lIns="0" tIns="0" rIns="0" bIns="0" rtlCol="0" anchor="ctr"/>
+          <a:lstStyle/>
+          <a:p>
+            <a:pPr indent="0" marL="0">
+              <a:buNone/>
+            </a:pPr>
+            <a:r>
+              <a:rPr lang="en-GB" altLang="en-US" sz="1200" b="1" spc="200" kern="0" dirty="0">
+                <a:solidFill>
+                  <a:schemeClr val="tx1"/>
+                </a:solidFill>
+              </a:rPr>
+              <a:t>WHAT MOTHER AFRICA PROVIDES</a:t>
+            </a:r>
+            <a:endParaRPr lang="en-GB" sz="1200" dirty="0"/>
+          </a:p>
+        </p:txBody>
+      </p:sp>
+      <p:sp>
+        <p:nvSpPr>
+          <p:cNvPr id="11" name="Shape 6"/>
+          <p:cNvSpPr/>
+          <p:nvPr/>
+        </p:nvSpPr>
+        <p:spPr>
+          <a:xfrm>
+            <a:off x="6246724" y="1783080"/>
+            <a:ext cx="5396332" cy="3246120"/>
+          </a:xfrm>
+          <a:prstGeom prst="rect">
+            <a:avLst/>
+          </a:prstGeom>
+          <a:solidFill>
+            <a:srgbClr val="F7F1E0"/>
+          </a:solidFill>
+          <a:ln/>
+        </p:spPr>
+      </p:sp>
+      <p:sp>
+        <p:nvSpPr>
+          <p:cNvPr id="12" name="Shape 7"/>
+          <p:cNvSpPr/>
+          <p:nvPr/>
+        </p:nvSpPr>
+        <p:spPr>
+          <a:xfrm>
+            <a:off x="6246724" y="1783080"/>
+            <a:ext cx="5396332" cy="457200"/>
           </a:xfrm>
           <a:prstGeom prst="rect">
             <a:avLst/>
@@ -12672,14 +12736,14 @@
       </p:sp>
       <p:sp>
         <p:nvSpPr>
-          <p:cNvPr id="10" name="Text 5"/>
-          <p:cNvSpPr txBox="1"/>
-          <p:nvPr/>
-        </p:nvSpPr>
-        <p:spPr>
-          <a:xfrm>
-            <a:off x="777240" y="1783080"/>
-            <a:ext cx="914400" cy="457200"/>
+          <p:cNvPr id="13" name="Text 8"/>
+          <p:cNvSpPr txBox="1"/>
+          <p:nvPr/>
+        </p:nvSpPr>
+        <p:spPr>
+          <a:xfrm>
+            <a:off x="6521044" y="1783080"/>
+            <a:ext cx="4939132" cy="457200"/>
           </a:xfrm>
           <a:prstGeom prst="rect">
             <a:avLst/>
@@ -12695,12 +12759,388 @@
               <a:buNone/>
             </a:pPr>
             <a:r>
-              <a:rPr lang="en-GB" altLang="en-US" sz="1300" b="1" spc="200" kern="0" dirty="0">
+              <a:rPr lang="en-GB" altLang="en-US" sz="1200" b="1" spc="200" kern="0" dirty="0">
                 <a:solidFill>
                   <a:schemeClr val="tx1"/>
                 </a:solidFill>
               </a:rPr>
-              <a:t>01</a:t>
+              <a:t>WHAT ATOURE DELIVERS</a:t>
+            </a:r>
+            <a:endParaRPr lang="en-GB" sz="1200" dirty="0"/>
+          </a:p>
+        </p:txBody>
+      </p:sp>
+      <p:sp>
+        <p:nvSpPr>
+          <p:cNvPr id="14" name="Shape 9"/>
+          <p:cNvSpPr/>
+          <p:nvPr/>
+        </p:nvSpPr>
+        <p:spPr>
+          <a:xfrm>
+            <a:off x="822960" y="2450592"/>
+            <a:ext cx="438912" cy="438912"/>
+          </a:xfrm>
+          <a:prstGeom prst="ellipse">
+            <a:avLst/>
+          </a:prstGeom>
+          <a:solidFill>
+            <a:schemeClr val="accent2"/>
+          </a:solidFill>
+          <a:ln/>
+        </p:spPr>
+      </p:sp>
+      <p:pic>
+        <p:nvPicPr>
+          <p:cNvPr id="15" name="Image 2" descr="preencoded.png">    </p:cNvPr>
+          <p:cNvPicPr>
+            <a:picLocks noChangeAspect="1"/>
+          </p:cNvPicPr>
+          <p:nvPr/>
+        </p:nvPicPr>
+        <p:blipFill>
+          <a:blip r:embed="rId3"/>
+          <a:stretch>
+            <a:fillRect/>
+          </a:stretch>
+        </p:blipFill>
+        <p:spPr>
+          <a:xfrm>
+            <a:off x="928299" y="2555931"/>
+            <a:ext cx="228234" cy="228234"/>
+          </a:xfrm>
+          <a:prstGeom prst="rect">
+            <a:avLst/>
+          </a:prstGeom>
+        </p:spPr>
+      </p:pic>
+      <p:sp>
+        <p:nvSpPr>
+          <p:cNvPr id="16" name="Text 10"/>
+          <p:cNvSpPr txBox="1"/>
+          <p:nvPr/>
+        </p:nvSpPr>
+        <p:spPr>
+          <a:xfrm>
+            <a:off x="1417320" y="2450592"/>
+            <a:ext cx="4299052" cy="438912"/>
+          </a:xfrm>
+          <a:prstGeom prst="rect">
+            <a:avLst/>
+          </a:prstGeom>
+          <a:noFill/>
+          <a:ln/>
+        </p:spPr>
+        <p:txBody>
+          <a:bodyPr wrap="square" lIns="0" tIns="0" rIns="0" bIns="0" rtlCol="0" anchor="ctr"/>
+          <a:lstStyle/>
+          <a:p>
+            <a:pPr indent="0" marL="0">
+              <a:buNone/>
+            </a:pPr>
+            <a:r>
+              <a:rPr lang="en-GB" altLang="en-US" sz="1400" dirty="0">
+                <a:solidFill>
+                  <a:schemeClr val="tx1"/>
+                </a:solidFill>
+              </a:rPr>
+              <a:t>Accreditation and access zones for the creators</a:t>
+            </a:r>
+            <a:endParaRPr lang="en-GB" sz="1400" dirty="0"/>
+          </a:p>
+        </p:txBody>
+      </p:sp>
+      <p:sp>
+        <p:nvSpPr>
+          <p:cNvPr id="17" name="Shape 11"/>
+          <p:cNvSpPr/>
+          <p:nvPr/>
+        </p:nvSpPr>
+        <p:spPr>
+          <a:xfrm>
+            <a:off x="822960" y="3090672"/>
+            <a:ext cx="438912" cy="438912"/>
+          </a:xfrm>
+          <a:prstGeom prst="ellipse">
+            <a:avLst/>
+          </a:prstGeom>
+          <a:solidFill>
+            <a:schemeClr val="accent2"/>
+          </a:solidFill>
+          <a:ln/>
+        </p:spPr>
+      </p:sp>
+      <p:pic>
+        <p:nvPicPr>
+          <p:cNvPr id="18" name="Image 3" descr="preencoded.png">    </p:cNvPr>
+          <p:cNvPicPr>
+            <a:picLocks noChangeAspect="1"/>
+          </p:cNvPicPr>
+          <p:nvPr/>
+        </p:nvPicPr>
+        <p:blipFill>
+          <a:blip r:embed="rId4"/>
+          <a:stretch>
+            <a:fillRect/>
+          </a:stretch>
+        </p:blipFill>
+        <p:spPr>
+          <a:xfrm>
+            <a:off x="928299" y="3196011"/>
+            <a:ext cx="228234" cy="228234"/>
+          </a:xfrm>
+          <a:prstGeom prst="rect">
+            <a:avLst/>
+          </a:prstGeom>
+        </p:spPr>
+      </p:pic>
+      <p:sp>
+        <p:nvSpPr>
+          <p:cNvPr id="19" name="Text 12"/>
+          <p:cNvSpPr txBox="1"/>
+          <p:nvPr/>
+        </p:nvSpPr>
+        <p:spPr>
+          <a:xfrm>
+            <a:off x="1417320" y="3090672"/>
+            <a:ext cx="4299052" cy="438912"/>
+          </a:xfrm>
+          <a:prstGeom prst="rect">
+            <a:avLst/>
+          </a:prstGeom>
+          <a:noFill/>
+          <a:ln/>
+        </p:spPr>
+        <p:txBody>
+          <a:bodyPr wrap="square" lIns="0" tIns="0" rIns="0" bIns="0" rtlCol="0" anchor="ctr"/>
+          <a:lstStyle/>
+          <a:p>
+            <a:pPr indent="0" marL="0">
+              <a:buNone/>
+            </a:pPr>
+            <a:r>
+              <a:rPr lang="en-GB" altLang="en-US" sz="1400" dirty="0">
+                <a:solidFill>
+                  <a:schemeClr val="tx1"/>
+                </a:solidFill>
+              </a:rPr>
+              <a:t>Brand guidelines and the key messages</a:t>
+            </a:r>
+            <a:endParaRPr lang="en-GB" sz="1400" dirty="0"/>
+          </a:p>
+        </p:txBody>
+      </p:sp>
+      <p:sp>
+        <p:nvSpPr>
+          <p:cNvPr id="20" name="Shape 13"/>
+          <p:cNvSpPr/>
+          <p:nvPr/>
+        </p:nvSpPr>
+        <p:spPr>
+          <a:xfrm>
+            <a:off x="822960" y="3730752"/>
+            <a:ext cx="438912" cy="438912"/>
+          </a:xfrm>
+          <a:prstGeom prst="ellipse">
+            <a:avLst/>
+          </a:prstGeom>
+          <a:solidFill>
+            <a:schemeClr val="accent2"/>
+          </a:solidFill>
+          <a:ln/>
+        </p:spPr>
+      </p:sp>
+      <p:pic>
+        <p:nvPicPr>
+          <p:cNvPr id="21" name="Image 4" descr="preencoded.png">    </p:cNvPr>
+          <p:cNvPicPr>
+            <a:picLocks noChangeAspect="1"/>
+          </p:cNvPicPr>
+          <p:nvPr/>
+        </p:nvPicPr>
+        <p:blipFill>
+          <a:blip r:embed="rId5"/>
+          <a:stretch>
+            <a:fillRect/>
+          </a:stretch>
+        </p:blipFill>
+        <p:spPr>
+          <a:xfrm>
+            <a:off x="928299" y="3836091"/>
+            <a:ext cx="228234" cy="228234"/>
+          </a:xfrm>
+          <a:prstGeom prst="rect">
+            <a:avLst/>
+          </a:prstGeom>
+        </p:spPr>
+      </p:pic>
+      <p:sp>
+        <p:nvSpPr>
+          <p:cNvPr id="22" name="Text 14"/>
+          <p:cNvSpPr txBox="1"/>
+          <p:nvPr/>
+        </p:nvSpPr>
+        <p:spPr>
+          <a:xfrm>
+            <a:off x="1417320" y="3730752"/>
+            <a:ext cx="4299052" cy="438912"/>
+          </a:xfrm>
+          <a:prstGeom prst="rect">
+            <a:avLst/>
+          </a:prstGeom>
+          <a:noFill/>
+          <a:ln/>
+        </p:spPr>
+        <p:txBody>
+          <a:bodyPr wrap="square" lIns="0" tIns="0" rIns="0" bIns="0" rtlCol="0" anchor="ctr"/>
+          <a:lstStyle/>
+          <a:p>
+            <a:pPr indent="0" marL="0">
+              <a:buNone/>
+            </a:pPr>
+            <a:r>
+              <a:rPr lang="en-GB" altLang="en-US" sz="1400" dirty="0">
+                <a:solidFill>
+                  <a:schemeClr val="tx1"/>
+                </a:solidFill>
+              </a:rPr>
+              <a:t>Ticket links, and codes if the festival wants them</a:t>
+            </a:r>
+            <a:endParaRPr lang="en-GB" sz="1400" dirty="0"/>
+          </a:p>
+        </p:txBody>
+      </p:sp>
+      <p:sp>
+        <p:nvSpPr>
+          <p:cNvPr id="23" name="Shape 15"/>
+          <p:cNvSpPr/>
+          <p:nvPr/>
+        </p:nvSpPr>
+        <p:spPr>
+          <a:xfrm>
+            <a:off x="822960" y="4370832"/>
+            <a:ext cx="438912" cy="438912"/>
+          </a:xfrm>
+          <a:prstGeom prst="ellipse">
+            <a:avLst/>
+          </a:prstGeom>
+          <a:solidFill>
+            <a:schemeClr val="accent2"/>
+          </a:solidFill>
+          <a:ln/>
+        </p:spPr>
+      </p:sp>
+      <p:pic>
+        <p:nvPicPr>
+          <p:cNvPr id="24" name="Image 5" descr="preencoded.png">    </p:cNvPr>
+          <p:cNvPicPr>
+            <a:picLocks noChangeAspect="1"/>
+          </p:cNvPicPr>
+          <p:nvPr/>
+        </p:nvPicPr>
+        <p:blipFill>
+          <a:blip r:embed="rId6"/>
+          <a:stretch>
+            <a:fillRect/>
+          </a:stretch>
+        </p:blipFill>
+        <p:spPr>
+          <a:xfrm>
+            <a:off x="928299" y="4476171"/>
+            <a:ext cx="228234" cy="228234"/>
+          </a:xfrm>
+          <a:prstGeom prst="rect">
+            <a:avLst/>
+          </a:prstGeom>
+        </p:spPr>
+      </p:pic>
+      <p:sp>
+        <p:nvSpPr>
+          <p:cNvPr id="25" name="Text 16"/>
+          <p:cNvSpPr txBox="1"/>
+          <p:nvPr/>
+        </p:nvSpPr>
+        <p:spPr>
+          <a:xfrm>
+            <a:off x="1417320" y="4370832"/>
+            <a:ext cx="4299052" cy="438912"/>
+          </a:xfrm>
+          <a:prstGeom prst="rect">
+            <a:avLst/>
+          </a:prstGeom>
+          <a:noFill/>
+          <a:ln/>
+        </p:spPr>
+        <p:txBody>
+          <a:bodyPr wrap="square" lIns="0" tIns="0" rIns="0" bIns="0" rtlCol="0" anchor="ctr"/>
+          <a:lstStyle/>
+          <a:p>
+            <a:pPr indent="0" marL="0">
+              <a:buNone/>
+            </a:pPr>
+            <a:r>
+              <a:rPr lang="en-GB" altLang="en-US" sz="1400" dirty="0">
+                <a:solidFill>
+                  <a:schemeClr val="tx1"/>
+                </a:solidFill>
+              </a:rPr>
+              <a:t>One contact on the production team</a:t>
+            </a:r>
+            <a:endParaRPr lang="en-GB" sz="1400" dirty="0"/>
+          </a:p>
+        </p:txBody>
+      </p:sp>
+      <p:sp>
+        <p:nvSpPr>
+          <p:cNvPr id="26" name="Shape 17"/>
+          <p:cNvSpPr/>
+          <p:nvPr/>
+        </p:nvSpPr>
+        <p:spPr>
+          <a:xfrm>
+            <a:off x="6521044" y="2450592"/>
+            <a:ext cx="438912" cy="438912"/>
+          </a:xfrm>
+          <a:prstGeom prst="ellipse">
+            <a:avLst/>
+          </a:prstGeom>
+          <a:solidFill>
+            <a:schemeClr val="accent1"/>
+          </a:solidFill>
+          <a:ln/>
+        </p:spPr>
+      </p:sp>
+      <p:sp>
+        <p:nvSpPr>
+          <p:cNvPr id="27" name="Text 18"/>
+          <p:cNvSpPr txBox="1"/>
+          <p:nvPr/>
+        </p:nvSpPr>
+        <p:spPr>
+          <a:xfrm>
+            <a:off x="6521044" y="2450592"/>
+            <a:ext cx="438912" cy="438912"/>
+          </a:xfrm>
+          <a:prstGeom prst="rect">
+            <a:avLst/>
+          </a:prstGeom>
+          <a:noFill/>
+          <a:ln/>
+        </p:spPr>
+        <p:txBody>
+          <a:bodyPr wrap="square" lIns="0" tIns="0" rIns="0" bIns="0" rtlCol="0" anchor="ctr"/>
+          <a:lstStyle/>
+          <a:p>
+            <a:pPr algn="ctr" indent="0" marL="0">
+              <a:buNone/>
+            </a:pPr>
+            <a:r>
+              <a:rPr lang="en-GB" altLang="en-US" sz="1300" b="1" dirty="0">
+                <a:solidFill>
+                  <a:schemeClr val="tx1"/>
+                </a:solidFill>
+              </a:rPr>
+              <a:t>1</a:t>
             </a:r>
             <a:endParaRPr lang="en-GB" sz="1300" dirty="0"/>
           </a:p>
@@ -12708,14 +13148,14 @@
       </p:sp>
       <p:sp>
         <p:nvSpPr>
-          <p:cNvPr id="11" name="Text 6"/>
-          <p:cNvSpPr txBox="1"/>
-          <p:nvPr/>
-        </p:nvSpPr>
-        <p:spPr>
-          <a:xfrm>
-            <a:off x="777240" y="2423160"/>
-            <a:ext cx="3108960" cy="411480"/>
+          <p:cNvPr id="28" name="Text 19"/>
+          <p:cNvSpPr txBox="1"/>
+          <p:nvPr/>
+        </p:nvSpPr>
+        <p:spPr>
+          <a:xfrm>
+            <a:off x="7115404" y="2404872"/>
+            <a:ext cx="4299052" cy="347472"/>
           </a:xfrm>
           <a:prstGeom prst="rect">
             <a:avLst/>
@@ -12731,7 +13171,7 @@
               <a:buNone/>
             </a:pPr>
             <a:r>
-              <a:rPr lang="en-GB" altLang="en-US" sz="2200" dirty="0">
+              <a:rPr lang="en-GB" altLang="en-US" sz="1800" dirty="0">
                 <a:solidFill>
                   <a:schemeClr val="tx1"/>
                 </a:solidFill>
@@ -12741,20 +13181,20 @@
               </a:rPr>
               <a:t>Talent access</a:t>
             </a:r>
-            <a:endParaRPr lang="en-GB" sz="2200" dirty="0"/>
-          </a:p>
-        </p:txBody>
-      </p:sp>
-      <p:sp>
-        <p:nvSpPr>
-          <p:cNvPr id="12" name="Text 7"/>
-          <p:cNvSpPr txBox="1"/>
-          <p:nvPr/>
-        </p:nvSpPr>
-        <p:spPr>
-          <a:xfrm>
-            <a:off x="777240" y="2926080"/>
-            <a:ext cx="3108960" cy="1965960"/>
+            <a:endParaRPr lang="en-GB" sz="1800" dirty="0"/>
+          </a:p>
+        </p:txBody>
+      </p:sp>
+      <p:sp>
+        <p:nvSpPr>
+          <p:cNvPr id="29" name="Text 20"/>
+          <p:cNvSpPr txBox="1"/>
+          <p:nvPr/>
+        </p:nvSpPr>
+        <p:spPr>
+          <a:xfrm>
+            <a:off x="7115404" y="2752344"/>
+            <a:ext cx="4299052" cy="310896"/>
           </a:xfrm>
           <a:prstGeom prst="rect">
             <a:avLst/>
@@ -12766,127 +13206,33 @@
           <a:bodyPr wrap="square" lIns="0" tIns="0" rIns="0" bIns="0" rtlCol="0" anchor="t"/>
           <a:lstStyle/>
           <a:p>
-            <a:pPr marL="177800" indent="-177800">
-              <a:spcAft>
-                <a:spcPts val="600"/>
-              </a:spcAft>
-              <a:buSzPct val="100000"/>
-              <a:buChar char="•"/>
-            </a:pPr>
-            <a:r>
-              <a:rPr lang="en-GB" altLang="en-US" sz="1400" dirty="0">
+            <a:pPr indent="0" marL="0">
+              <a:buNone/>
+            </a:pPr>
+            <a:r>
+              <a:rPr lang="en-GB" altLang="en-US" sz="1300" dirty="0">
                 <a:solidFill>
                   <a:schemeClr val="tx2"/>
                 </a:solidFill>
               </a:rPr>
               <a:t>Creators matched to the audiences Mother Africa wants</a:t>
             </a:r>
-            <a:endParaRPr lang="en-GB" sz="1400" dirty="0"/>
-          </a:p>
-          <a:p>
-            <a:pPr marL="177800" indent="-177800">
-              <a:spcAft>
-                <a:spcPts val="600"/>
-              </a:spcAft>
-              <a:buSzPct val="100000"/>
-              <a:buChar char="•"/>
-            </a:pPr>
-            <a:r>
-              <a:rPr lang="en-GB" altLang="en-US" sz="1400" dirty="0">
-                <a:solidFill>
-                  <a:schemeClr val="tx2"/>
-                </a:solidFill>
-              </a:rPr>
-              <a:t>Music, fashion and lifestyle voices in Abidjan and the diaspora</a:t>
-            </a:r>
-            <a:endParaRPr lang="en-GB" sz="1400" dirty="0"/>
-          </a:p>
-          <a:p>
-            <a:pPr marL="177800" indent="-177800">
-              <a:spcAft>
-                <a:spcPts val="600"/>
-              </a:spcAft>
-              <a:buSzPct val="100000"/>
-              <a:buChar char="•"/>
-            </a:pPr>
-            <a:r>
-              <a:rPr lang="en-GB" altLang="en-US" sz="1400" dirty="0">
-                <a:solidFill>
-                  <a:schemeClr val="tx2"/>
-                </a:solidFill>
-              </a:rPr>
-              <a:t>DJs and streamers for the headline sets</a:t>
-            </a:r>
-            <a:endParaRPr lang="en-GB" sz="1400" dirty="0"/>
-          </a:p>
-          <a:p>
-            <a:pPr marL="177800" indent="-177800">
-              <a:spcAft>
-                <a:spcPts val="600"/>
-              </a:spcAft>
-              <a:buSzPct val="100000"/>
-              <a:buChar char="•"/>
-            </a:pPr>
-            <a:r>
-              <a:rPr lang="en-GB" altLang="en-US" sz="1400" dirty="0">
-                <a:solidFill>
-                  <a:schemeClr val="tx2"/>
-                </a:solidFill>
-              </a:rPr>
-              <a:t>VIP invitations organised for talent</a:t>
-            </a:r>
-            <a:endParaRPr lang="en-GB" sz="1400" dirty="0"/>
-          </a:p>
-        </p:txBody>
-      </p:sp>
-      <p:sp>
-        <p:nvSpPr>
-          <p:cNvPr id="13" name="Shape 8"/>
+            <a:endParaRPr lang="en-GB" sz="1300" dirty="0"/>
+          </a:p>
+        </p:txBody>
+      </p:sp>
+      <p:sp>
+        <p:nvSpPr>
+          <p:cNvPr id="30" name="Shape 21"/>
           <p:cNvSpPr/>
           <p:nvPr/>
         </p:nvSpPr>
         <p:spPr>
           <a:xfrm>
-            <a:off x="4338828" y="1783080"/>
-            <a:ext cx="3511296" cy="3200400"/>
-          </a:xfrm>
-          <a:prstGeom prst="roundRect">
-            <a:avLst>
-              <a:gd name="adj" fmla="val 2857"/>
-            </a:avLst>
-          </a:prstGeom>
-          <a:solidFill>
-            <a:schemeClr val="bg1"/>
-          </a:solidFill>
-          <a:ln w="9525">
-            <a:solidFill>
-              <a:schemeClr val="tx2">
-                <a:alpha val="28000"/>
-              </a:schemeClr>
-            </a:solidFill>
-            <a:prstDash val="solid"/>
-          </a:ln>
-          <a:effectLst>
-            <a:outerShdw sx="100000" sy="100000" kx="0" ky="0" algn="bl" rotWithShape="0" blurRad="127000" dist="38100" dir="5400000">
-              <a:srgbClr val="133524">
-                <a:alpha val="10000"/>
-              </a:srgbClr>
-            </a:outerShdw>
-          </a:effectLst>
-        </p:spPr>
-      </p:sp>
-      <p:sp>
-        <p:nvSpPr>
-          <p:cNvPr id="14" name="Shape 9"/>
-          <p:cNvSpPr/>
-          <p:nvPr/>
-        </p:nvSpPr>
-        <p:spPr>
-          <a:xfrm>
-            <a:off x="4338828" y="1783080"/>
-            <a:ext cx="3511296" cy="457200"/>
-          </a:xfrm>
-          <a:prstGeom prst="rect">
+            <a:off x="6521044" y="3291840"/>
+            <a:ext cx="438912" cy="438912"/>
+          </a:xfrm>
+          <a:prstGeom prst="ellipse">
             <a:avLst/>
           </a:prstGeom>
           <a:solidFill>
@@ -12897,14 +13243,14 @@
       </p:sp>
       <p:sp>
         <p:nvSpPr>
-          <p:cNvPr id="15" name="Text 10"/>
-          <p:cNvSpPr txBox="1"/>
-          <p:nvPr/>
-        </p:nvSpPr>
-        <p:spPr>
-          <a:xfrm>
-            <a:off x="4567428" y="1783080"/>
-            <a:ext cx="914400" cy="457200"/>
+          <p:cNvPr id="31" name="Text 22"/>
+          <p:cNvSpPr txBox="1"/>
+          <p:nvPr/>
+        </p:nvSpPr>
+        <p:spPr>
+          <a:xfrm>
+            <a:off x="6521044" y="3291840"/>
+            <a:ext cx="438912" cy="438912"/>
           </a:xfrm>
           <a:prstGeom prst="rect">
             <a:avLst/>
@@ -12916,47 +13262,47 @@
           <a:bodyPr wrap="square" lIns="0" tIns="0" rIns="0" bIns="0" rtlCol="0" anchor="ctr"/>
           <a:lstStyle/>
           <a:p>
+            <a:pPr algn="ctr" indent="0" marL="0">
+              <a:buNone/>
+            </a:pPr>
+            <a:r>
+              <a:rPr lang="en-GB" altLang="en-US" sz="1300" b="1" dirty="0">
+                <a:solidFill>
+                  <a:schemeClr val="tx1"/>
+                </a:solidFill>
+              </a:rPr>
+              <a:t>2</a:t>
+            </a:r>
+            <a:endParaRPr lang="en-GB" sz="1300" dirty="0"/>
+          </a:p>
+        </p:txBody>
+      </p:sp>
+      <p:sp>
+        <p:nvSpPr>
+          <p:cNvPr id="32" name="Text 23"/>
+          <p:cNvSpPr txBox="1"/>
+          <p:nvPr/>
+        </p:nvSpPr>
+        <p:spPr>
+          <a:xfrm>
+            <a:off x="7115404" y="3246120"/>
+            <a:ext cx="4299052" cy="347472"/>
+          </a:xfrm>
+          <a:prstGeom prst="rect">
+            <a:avLst/>
+          </a:prstGeom>
+          <a:noFill/>
+          <a:ln/>
+        </p:spPr>
+        <p:txBody>
+          <a:bodyPr wrap="square" lIns="0" tIns="0" rIns="0" bIns="0" rtlCol="0" anchor="t"/>
+          <a:lstStyle/>
+          <a:p>
             <a:pPr indent="0" marL="0">
               <a:buNone/>
             </a:pPr>
             <a:r>
-              <a:rPr lang="en-GB" altLang="en-US" sz="1300" b="1" spc="200" kern="0" dirty="0">
-                <a:solidFill>
-                  <a:schemeClr val="tx1"/>
-                </a:solidFill>
-              </a:rPr>
-              <a:t>02</a:t>
-            </a:r>
-            <a:endParaRPr lang="en-GB" sz="1300" dirty="0"/>
-          </a:p>
-        </p:txBody>
-      </p:sp>
-      <p:sp>
-        <p:nvSpPr>
-          <p:cNvPr id="16" name="Text 11"/>
-          <p:cNvSpPr txBox="1"/>
-          <p:nvPr/>
-        </p:nvSpPr>
-        <p:spPr>
-          <a:xfrm>
-            <a:off x="4567428" y="2423160"/>
-            <a:ext cx="3108960" cy="411480"/>
-          </a:xfrm>
-          <a:prstGeom prst="rect">
-            <a:avLst/>
-          </a:prstGeom>
-          <a:noFill/>
-          <a:ln/>
-        </p:spPr>
-        <p:txBody>
-          <a:bodyPr wrap="square" lIns="0" tIns="0" rIns="0" bIns="0" rtlCol="0" anchor="t"/>
-          <a:lstStyle/>
-          <a:p>
-            <a:pPr indent="0" marL="0">
-              <a:buNone/>
-            </a:pPr>
-            <a:r>
-              <a:rPr lang="en-GB" altLang="en-US" sz="2200" dirty="0">
+              <a:rPr lang="en-GB" altLang="en-US" sz="1800" dirty="0">
                 <a:solidFill>
                   <a:schemeClr val="tx1"/>
                 </a:solidFill>
@@ -12964,22 +13310,22 @@
                 <a:ea typeface="+mj-lt" pitchFamily="34" charset="-122"/>
                 <a:cs typeface="+mj-lt" pitchFamily="34" charset="-120"/>
               </a:rPr>
-              <a:t>Creator management</a:t>
-            </a:r>
-            <a:endParaRPr lang="en-GB" sz="2200" dirty="0"/>
-          </a:p>
-        </p:txBody>
-      </p:sp>
-      <p:sp>
-        <p:nvSpPr>
-          <p:cNvPr id="17" name="Text 12"/>
-          <p:cNvSpPr txBox="1"/>
-          <p:nvPr/>
-        </p:nvSpPr>
-        <p:spPr>
-          <a:xfrm>
-            <a:off x="4567428" y="2926080"/>
-            <a:ext cx="3108960" cy="1965960"/>
+              <a:t>Creator management on the ground</a:t>
+            </a:r>
+            <a:endParaRPr lang="en-GB" sz="1800" dirty="0"/>
+          </a:p>
+        </p:txBody>
+      </p:sp>
+      <p:sp>
+        <p:nvSpPr>
+          <p:cNvPr id="33" name="Text 24"/>
+          <p:cNvSpPr txBox="1"/>
+          <p:nvPr/>
+        </p:nvSpPr>
+        <p:spPr>
+          <a:xfrm>
+            <a:off x="7115404" y="3593592"/>
+            <a:ext cx="4299052" cy="310896"/>
           </a:xfrm>
           <a:prstGeom prst="rect">
             <a:avLst/>
@@ -12991,127 +13337,33 @@
           <a:bodyPr wrap="square" lIns="0" tIns="0" rIns="0" bIns="0" rtlCol="0" anchor="t"/>
           <a:lstStyle/>
           <a:p>
-            <a:pPr marL="177800" indent="-177800">
-              <a:spcAft>
-                <a:spcPts val="600"/>
-              </a:spcAft>
-              <a:buSzPct val="100000"/>
-              <a:buChar char="•"/>
-            </a:pPr>
-            <a:r>
-              <a:rPr lang="en-GB" altLang="en-US" sz="1400" dirty="0">
+            <a:pPr indent="0" marL="0">
+              <a:buNone/>
+            </a:pPr>
+            <a:r>
+              <a:rPr lang="en-GB" altLang="en-US" sz="1300" dirty="0">
                 <a:solidFill>
                   <a:schemeClr val="tx2"/>
                 </a:solidFill>
               </a:rPr>
-              <a:t>Set deliverables agreed with every creator</a:t>
-            </a:r>
-            <a:endParaRPr lang="en-GB" sz="1400" dirty="0"/>
-          </a:p>
-          <a:p>
-            <a:pPr marL="177800" indent="-177800">
-              <a:spcAft>
-                <a:spcPts val="600"/>
-              </a:spcAft>
-              <a:buSzPct val="100000"/>
-              <a:buChar char="•"/>
-            </a:pPr>
-            <a:r>
-              <a:rPr lang="en-GB" altLang="en-US" sz="1400" dirty="0">
-                <a:solidFill>
-                  <a:schemeClr val="tx2"/>
-                </a:solidFill>
-              </a:rPr>
-              <a:t>Briefs with key messages, tags and the ticket link</a:t>
-            </a:r>
-            <a:endParaRPr lang="en-GB" sz="1400" dirty="0"/>
-          </a:p>
-          <a:p>
-            <a:pPr marL="177800" indent="-177800">
-              <a:spcAft>
-                <a:spcPts val="600"/>
-              </a:spcAft>
-              <a:buSzPct val="100000"/>
-              <a:buChar char="•"/>
-            </a:pPr>
-            <a:r>
-              <a:rPr lang="en-GB" altLang="en-US" sz="1400" dirty="0">
-                <a:solidFill>
-                  <a:schemeClr val="tx2"/>
-                </a:solidFill>
-              </a:rPr>
-              <a:t>Accreditation, scheduling and one point of contact</a:t>
-            </a:r>
-            <a:endParaRPr lang="en-GB" sz="1400" dirty="0"/>
-          </a:p>
-          <a:p>
-            <a:pPr marL="177800" indent="-177800">
-              <a:spcAft>
-                <a:spcPts val="600"/>
-              </a:spcAft>
-              <a:buSzPct val="100000"/>
-              <a:buChar char="•"/>
-            </a:pPr>
-            <a:r>
-              <a:rPr lang="en-GB" altLang="en-US" sz="1400" dirty="0">
-                <a:solidFill>
-                  <a:schemeClr val="tx2"/>
-                </a:solidFill>
-              </a:rPr>
-              <a:t>On site on both nights, in the moments that matter</a:t>
-            </a:r>
-            <a:endParaRPr lang="en-GB" sz="1400" dirty="0"/>
-          </a:p>
-        </p:txBody>
-      </p:sp>
-      <p:sp>
-        <p:nvSpPr>
-          <p:cNvPr id="18" name="Shape 13"/>
+              <a:t>Briefs, accreditation, approvals and one point of contact</a:t>
+            </a:r>
+            <a:endParaRPr lang="en-GB" sz="1300" dirty="0"/>
+          </a:p>
+        </p:txBody>
+      </p:sp>
+      <p:sp>
+        <p:nvSpPr>
+          <p:cNvPr id="34" name="Shape 25"/>
           <p:cNvSpPr/>
           <p:nvPr/>
         </p:nvSpPr>
         <p:spPr>
           <a:xfrm>
-            <a:off x="8129016" y="1783080"/>
-            <a:ext cx="3511296" cy="3200400"/>
-          </a:xfrm>
-          <a:prstGeom prst="roundRect">
-            <a:avLst>
-              <a:gd name="adj" fmla="val 2857"/>
-            </a:avLst>
-          </a:prstGeom>
-          <a:solidFill>
-            <a:schemeClr val="bg1"/>
-          </a:solidFill>
-          <a:ln w="9525">
-            <a:solidFill>
-              <a:schemeClr val="tx2">
-                <a:alpha val="28000"/>
-              </a:schemeClr>
-            </a:solidFill>
-            <a:prstDash val="solid"/>
-          </a:ln>
-          <a:effectLst>
-            <a:outerShdw sx="100000" sy="100000" kx="0" ky="0" algn="bl" rotWithShape="0" blurRad="127000" dist="38100" dir="5400000">
-              <a:srgbClr val="133524">
-                <a:alpha val="10000"/>
-              </a:srgbClr>
-            </a:outerShdw>
-          </a:effectLst>
-        </p:spPr>
-      </p:sp>
-      <p:sp>
-        <p:nvSpPr>
-          <p:cNvPr id="19" name="Shape 14"/>
-          <p:cNvSpPr/>
-          <p:nvPr/>
-        </p:nvSpPr>
-        <p:spPr>
-          <a:xfrm>
-            <a:off x="8129016" y="1783080"/>
-            <a:ext cx="3511296" cy="457200"/>
-          </a:xfrm>
-          <a:prstGeom prst="rect">
+            <a:off x="6521044" y="4133088"/>
+            <a:ext cx="438912" cy="438912"/>
+          </a:xfrm>
+          <a:prstGeom prst="ellipse">
             <a:avLst/>
           </a:prstGeom>
           <a:solidFill>
@@ -13122,14 +13374,14 @@
       </p:sp>
       <p:sp>
         <p:nvSpPr>
-          <p:cNvPr id="20" name="Text 15"/>
-          <p:cNvSpPr txBox="1"/>
-          <p:nvPr/>
-        </p:nvSpPr>
-        <p:spPr>
-          <a:xfrm>
-            <a:off x="8357616" y="1783080"/>
-            <a:ext cx="914400" cy="457200"/>
+          <p:cNvPr id="35" name="Text 26"/>
+          <p:cNvSpPr txBox="1"/>
+          <p:nvPr/>
+        </p:nvSpPr>
+        <p:spPr>
+          <a:xfrm>
+            <a:off x="6521044" y="4133088"/>
+            <a:ext cx="438912" cy="438912"/>
           </a:xfrm>
           <a:prstGeom prst="rect">
             <a:avLst/>
@@ -13141,47 +13393,47 @@
           <a:bodyPr wrap="square" lIns="0" tIns="0" rIns="0" bIns="0" rtlCol="0" anchor="ctr"/>
           <a:lstStyle/>
           <a:p>
+            <a:pPr algn="ctr" indent="0" marL="0">
+              <a:buNone/>
+            </a:pPr>
+            <a:r>
+              <a:rPr lang="en-GB" altLang="en-US" sz="1300" b="1" dirty="0">
+                <a:solidFill>
+                  <a:schemeClr val="tx1"/>
+                </a:solidFill>
+              </a:rPr>
+              <a:t>3</a:t>
+            </a:r>
+            <a:endParaRPr lang="en-GB" sz="1300" dirty="0"/>
+          </a:p>
+        </p:txBody>
+      </p:sp>
+      <p:sp>
+        <p:nvSpPr>
+          <p:cNvPr id="36" name="Text 27"/>
+          <p:cNvSpPr txBox="1"/>
+          <p:nvPr/>
+        </p:nvSpPr>
+        <p:spPr>
+          <a:xfrm>
+            <a:off x="7115404" y="4087368"/>
+            <a:ext cx="4299052" cy="347472"/>
+          </a:xfrm>
+          <a:prstGeom prst="rect">
+            <a:avLst/>
+          </a:prstGeom>
+          <a:noFill/>
+          <a:ln/>
+        </p:spPr>
+        <p:txBody>
+          <a:bodyPr wrap="square" lIns="0" tIns="0" rIns="0" bIns="0" rtlCol="0" anchor="t"/>
+          <a:lstStyle/>
+          <a:p>
             <a:pPr indent="0" marL="0">
               <a:buNone/>
             </a:pPr>
             <a:r>
-              <a:rPr lang="en-GB" altLang="en-US" sz="1300" b="1" spc="200" kern="0" dirty="0">
-                <a:solidFill>
-                  <a:schemeClr val="tx1"/>
-                </a:solidFill>
-              </a:rPr>
-              <a:t>03</a:t>
-            </a:r>
-            <a:endParaRPr lang="en-GB" sz="1300" dirty="0"/>
-          </a:p>
-        </p:txBody>
-      </p:sp>
-      <p:sp>
-        <p:nvSpPr>
-          <p:cNvPr id="21" name="Text 16"/>
-          <p:cNvSpPr txBox="1"/>
-          <p:nvPr/>
-        </p:nvSpPr>
-        <p:spPr>
-          <a:xfrm>
-            <a:off x="8357616" y="2423160"/>
-            <a:ext cx="3108960" cy="411480"/>
-          </a:xfrm>
-          <a:prstGeom prst="rect">
-            <a:avLst/>
-          </a:prstGeom>
-          <a:noFill/>
-          <a:ln/>
-        </p:spPr>
-        <p:txBody>
-          <a:bodyPr wrap="square" lIns="0" tIns="0" rIns="0" bIns="0" rtlCol="0" anchor="t"/>
-          <a:lstStyle/>
-          <a:p>
-            <a:pPr indent="0" marL="0">
-              <a:buNone/>
-            </a:pPr>
-            <a:r>
-              <a:rPr lang="en-GB" altLang="en-US" sz="2200" dirty="0">
+              <a:rPr lang="en-GB" altLang="en-US" sz="1800" dirty="0">
                 <a:solidFill>
                   <a:schemeClr val="tx1"/>
                 </a:solidFill>
@@ -13191,20 +13443,20 @@
               </a:rPr>
               <a:t>The visibility report</a:t>
             </a:r>
-            <a:endParaRPr lang="en-GB" sz="2200" dirty="0"/>
-          </a:p>
-        </p:txBody>
-      </p:sp>
-      <p:sp>
-        <p:nvSpPr>
-          <p:cNvPr id="22" name="Text 17"/>
-          <p:cNvSpPr txBox="1"/>
-          <p:nvPr/>
-        </p:nvSpPr>
-        <p:spPr>
-          <a:xfrm>
-            <a:off x="8357616" y="2926080"/>
-            <a:ext cx="3108960" cy="1965960"/>
+            <a:endParaRPr lang="en-GB" sz="1800" dirty="0"/>
+          </a:p>
+        </p:txBody>
+      </p:sp>
+      <p:sp>
+        <p:nvSpPr>
+          <p:cNvPr id="37" name="Text 28"/>
+          <p:cNvSpPr txBox="1"/>
+          <p:nvPr/>
+        </p:nvSpPr>
+        <p:spPr>
+          <a:xfrm>
+            <a:off x="7115404" y="4434840"/>
+            <a:ext cx="4299052" cy="310896"/>
           </a:xfrm>
           <a:prstGeom prst="rect">
             <a:avLst/>
@@ -13216,88 +13468,30 @@
           <a:bodyPr wrap="square" lIns="0" tIns="0" rIns="0" bIns="0" rtlCol="0" anchor="t"/>
           <a:lstStyle/>
           <a:p>
-            <a:pPr marL="177800" indent="-177800">
-              <a:spcAft>
-                <a:spcPts val="600"/>
-              </a:spcAft>
-              <a:buSzPct val="100000"/>
-              <a:buChar char="•"/>
-            </a:pPr>
-            <a:r>
-              <a:rPr lang="en-GB" altLang="en-US" sz="1400" dirty="0">
+            <a:pPr indent="0" marL="0">
+              <a:buNone/>
+            </a:pPr>
+            <a:r>
+              <a:rPr lang="en-GB" altLang="en-US" sz="1300" dirty="0">
                 <a:solidFill>
                   <a:schemeClr val="tx2"/>
                 </a:solidFill>
               </a:rPr>
               <a:t>A check at 48 hours, the full report on day 14</a:t>
             </a:r>
-            <a:endParaRPr lang="en-GB" sz="1400" dirty="0"/>
-          </a:p>
-          <a:p>
-            <a:pPr marL="177800" indent="-177800">
-              <a:spcAft>
-                <a:spcPts val="600"/>
-              </a:spcAft>
-              <a:buSzPct val="100000"/>
-              <a:buChar char="•"/>
-            </a:pPr>
-            <a:r>
-              <a:rPr lang="en-GB" altLang="en-US" sz="1400" dirty="0">
-                <a:solidFill>
-                  <a:schemeClr val="tx2"/>
-                </a:solidFill>
-              </a:rPr>
-              <a:t>Every post, every platform, in one document</a:t>
-            </a:r>
-            <a:endParaRPr lang="en-GB" sz="1400" dirty="0"/>
-          </a:p>
-          <a:p>
-            <a:pPr marL="177800" indent="-177800">
-              <a:spcAft>
-                <a:spcPts val="600"/>
-              </a:spcAft>
-              <a:buSzPct val="100000"/>
-              <a:buChar char="•"/>
-            </a:pPr>
-            <a:r>
-              <a:rPr lang="en-GB" altLang="en-US" sz="1400" dirty="0">
-                <a:solidFill>
-                  <a:schemeClr val="tx2"/>
-                </a:solidFill>
-              </a:rPr>
-              <a:t>Audiences, diaspora reach and ticket links</a:t>
-            </a:r>
-            <a:endParaRPr lang="en-GB" sz="1400" dirty="0"/>
-          </a:p>
-          <a:p>
-            <a:pPr marL="177800" indent="-177800">
-              <a:spcAft>
-                <a:spcPts val="600"/>
-              </a:spcAft>
-              <a:buSzPct val="100000"/>
-              <a:buChar char="•"/>
-            </a:pPr>
-            <a:r>
-              <a:rPr lang="en-GB" altLang="en-US" sz="1400" dirty="0">
-                <a:solidFill>
-                  <a:schemeClr val="tx2"/>
-                </a:solidFill>
-              </a:rPr>
-              <a:t>Sponsor value, partner by partner</a:t>
-            </a:r>
-            <a:endParaRPr lang="en-GB" sz="1400" dirty="0"/>
-          </a:p>
-        </p:txBody>
-      </p:sp>
-      <p:sp>
-        <p:nvSpPr>
-          <p:cNvPr id="23" name="Shape 18"/>
+            <a:endParaRPr lang="en-GB" sz="1300" dirty="0"/>
+          </a:p>
+        </p:txBody>
+      </p:sp>
+      <p:sp>
+        <p:nvSpPr>
+          <p:cNvPr id="38" name="Shape 29"/>
           <p:cNvSpPr/>
           <p:nvPr/>
         </p:nvSpPr>
         <p:spPr>
           <a:xfrm>
-            <a:off x="548640" y="5212080"/>
+            <a:off x="548640" y="5257800"/>
             <a:ext cx="11094415" cy="731520"/>
           </a:xfrm>
           <a:prstGeom prst="roundRect">
@@ -13313,13 +13507,13 @@
       </p:sp>
       <p:sp>
         <p:nvSpPr>
-          <p:cNvPr id="24" name="Text 19"/>
-          <p:cNvSpPr txBox="1"/>
-          <p:nvPr/>
-        </p:nvSpPr>
-        <p:spPr>
-          <a:xfrm>
-            <a:off x="822960" y="5212080"/>
+          <p:cNvPr id="39" name="Text 30"/>
+          <p:cNvSpPr txBox="1"/>
+          <p:nvPr/>
+        </p:nvSpPr>
+        <p:spPr>
+          <a:xfrm>
+            <a:off x="822960" y="5257800"/>
             <a:ext cx="10515600" cy="731520"/>
           </a:xfrm>
           <a:prstGeom prst="rect">
@@ -15223,7 +15417,7 @@
                   <a:schemeClr val="bg1"/>
                 </a:solidFill>
               </a:rPr>
-              <a:t>Visibility in three waves</a:t>
+              <a:t>Visibility builds in three waves</a:t>
             </a:r>
             <a:endParaRPr lang="en-GB" sz="3800" dirty="0"/>
           </a:p>
@@ -16279,7 +16473,7 @@
                   <a:schemeClr val="tx1"/>
                 </a:solidFill>
               </a:rPr>
-              <a:t>Visibility for every sponsor</a:t>
+              <a:t>Every sponsor gets visibility it can prove</a:t>
             </a:r>
             <a:endParaRPr lang="en-GB" sz="3800" dirty="0"/>
           </a:p>
@@ -17536,7 +17730,7 @@
                   <a:schemeClr val="tx1"/>
                 </a:solidFill>
               </a:rPr>
-              <a:t>What Mother Africa actually receives</a:t>
+              <a:t>Mother Africa gets the numbers on fixed dates</a:t>
             </a:r>
             <a:endParaRPr lang="en-GB" sz="3800" dirty="0"/>
           </a:p>
@@ -17626,1527 +17820,60 @@
           </a:prstGeom>
         </p:spPr>
       </p:pic>
-      <p:graphicFrame>
-        <p:nvGraphicFramePr>
-          <p:cNvPr id="9" name="Table"/>
-          <p:cNvGraphicFramePr>
-            <a:graphicFrameLocks noGrp="1"/>
-          </p:cNvGraphicFramePr>
-          <p:nvPr>
-            <p:extLst>
-              <p:ext uri="{D42A27DB-BD31-4B8C-83A1-F6EECF244321}">
-                <p14:modId xmlns:p14="http://schemas.microsoft.com/office/powerpoint/2010/main" val="1579011935"/>
-              </p:ext>
-            </p:extLst>
-          </p:nvPr>
-        </p:nvGraphicFramePr>
-        <p:xfrm>
-          <a:off x="548640" y="1783080"/>
-          <a:ext cx="11094415" cy="914400"/>
-        </p:xfrm>
-        <a:graphic>
-          <a:graphicData uri="http://schemas.openxmlformats.org/drawingml/2006/table">
-            <a:tbl>
-              <a:tblPr/>
-              <a:tblGrid>
-                <a:gridCol w="2194560"/>
-                <a:gridCol w="3657600"/>
-                <a:gridCol w="5242255"/>
-              </a:tblGrid>
-              <a:tr h="438912">
-                <a:tc>
-                  <a:txBody>
-                    <a:bodyPr/>
-                    <a:lstStyle/>
-                    <a:p>
-                      <a:pPr indent="0" marL="0">
-                        <a:buNone/>
-                      </a:pPr>
-                      <a:r>
-                        <a:rPr lang="en-US" sz="1300" b="1" dirty="0">
-                          <a:solidFill>
-                            <a:schemeClr val="bg1"/>
-                          </a:solidFill>
-                        </a:rPr>
-                        <a:t>What we measure</a:t>
-                      </a:r>
-                      <a:endParaRPr lang="en-US" sz="1300" dirty="0"/>
-                    </a:p>
-                  </a:txBody>
-                  <a:tcPr marL="128016" marR="128016" marT="54864" marB="54864" anchor="ctr">
-                    <a:lnL w="9525" cap="flat" cmpd="sng" algn="ctr">
-                      <a:solidFill>
-                        <a:srgbClr val="E3EDE6"/>
-                      </a:solidFill>
-                      <a:prstDash val="solid"/>
-                      <a:round/>
-                      <a:headEnd type="none" w="med" len="med"/>
-                      <a:tailEnd type="none" w="med" len="med"/>
-                    </a:lnL>
-                    <a:lnR w="9525" cap="flat" cmpd="sng" algn="ctr">
-                      <a:solidFill>
-                        <a:srgbClr val="E3EDE6"/>
-                      </a:solidFill>
-                      <a:prstDash val="solid"/>
-                      <a:round/>
-                      <a:headEnd type="none" w="med" len="med"/>
-                      <a:tailEnd type="none" w="med" len="med"/>
-                    </a:lnR>
-                    <a:lnT w="9525" cap="flat" cmpd="sng" algn="ctr">
-                      <a:solidFill>
-                        <a:srgbClr val="E3EDE6"/>
-                      </a:solidFill>
-                      <a:prstDash val="solid"/>
-                      <a:round/>
-                      <a:headEnd type="none" w="med" len="med"/>
-                      <a:tailEnd type="none" w="med" len="med"/>
-                    </a:lnT>
-                    <a:lnB w="9525" cap="flat" cmpd="sng" algn="ctr">
-                      <a:solidFill>
-                        <a:srgbClr val="E3EDE6"/>
-                      </a:solidFill>
-                      <a:prstDash val="solid"/>
-                      <a:round/>
-                      <a:headEnd type="none" w="med" len="med"/>
-                      <a:tailEnd type="none" w="med" len="med"/>
-                    </a:lnB>
-                    <a:solidFill>
-                      <a:schemeClr val="tx1"/>
-                    </a:solidFill>
-                  </a:tcPr>
-                </a:tc>
-                <a:tc>
-                  <a:txBody>
-                    <a:bodyPr/>
-                    <a:lstStyle/>
-                    <a:p>
-                      <a:pPr indent="0" marL="0">
-                        <a:buNone/>
-                      </a:pPr>
-                      <a:r>
-                        <a:rPr lang="en-US" sz="1300" b="1" dirty="0">
-                          <a:solidFill>
-                            <a:schemeClr val="bg1"/>
-                          </a:solidFill>
-                        </a:rPr>
-                        <a:t>What it tells the festival</a:t>
-                      </a:r>
-                      <a:endParaRPr lang="en-US" sz="1300" dirty="0"/>
-                    </a:p>
-                  </a:txBody>
-                  <a:tcPr marL="128016" marR="128016" marT="54864" marB="54864" anchor="ctr">
-                    <a:lnL w="9525" cap="flat" cmpd="sng" algn="ctr">
-                      <a:solidFill>
-                        <a:srgbClr val="E3EDE6"/>
-                      </a:solidFill>
-                      <a:prstDash val="solid"/>
-                      <a:round/>
-                      <a:headEnd type="none" w="med" len="med"/>
-                      <a:tailEnd type="none" w="med" len="med"/>
-                    </a:lnL>
-                    <a:lnR w="9525" cap="flat" cmpd="sng" algn="ctr">
-                      <a:solidFill>
-                        <a:srgbClr val="E3EDE6"/>
-                      </a:solidFill>
-                      <a:prstDash val="solid"/>
-                      <a:round/>
-                      <a:headEnd type="none" w="med" len="med"/>
-                      <a:tailEnd type="none" w="med" len="med"/>
-                    </a:lnR>
-                    <a:lnT w="9525" cap="flat" cmpd="sng" algn="ctr">
-                      <a:solidFill>
-                        <a:srgbClr val="E3EDE6"/>
-                      </a:solidFill>
-                      <a:prstDash val="solid"/>
-                      <a:round/>
-                      <a:headEnd type="none" w="med" len="med"/>
-                      <a:tailEnd type="none" w="med" len="med"/>
-                    </a:lnT>
-                    <a:lnB w="9525" cap="flat" cmpd="sng" algn="ctr">
-                      <a:solidFill>
-                        <a:srgbClr val="E3EDE6"/>
-                      </a:solidFill>
-                      <a:prstDash val="solid"/>
-                      <a:round/>
-                      <a:headEnd type="none" w="med" len="med"/>
-                      <a:tailEnd type="none" w="med" len="med"/>
-                    </a:lnB>
-                    <a:solidFill>
-                      <a:schemeClr val="tx1"/>
-                    </a:solidFill>
-                  </a:tcPr>
-                </a:tc>
-                <a:tc>
-                  <a:txBody>
-                    <a:bodyPr/>
-                    <a:lstStyle/>
-                    <a:p>
-                      <a:pPr indent="0" marL="0">
-                        <a:buNone/>
-                      </a:pPr>
-                      <a:r>
-                        <a:rPr lang="en-US" sz="1300" b="1" dirty="0">
-                          <a:solidFill>
-                            <a:schemeClr val="bg1"/>
-                          </a:solidFill>
-                        </a:rPr>
-                        <a:t>How we capture it</a:t>
-                      </a:r>
-                      <a:endParaRPr lang="en-US" sz="1300" dirty="0"/>
-                    </a:p>
-                  </a:txBody>
-                  <a:tcPr marL="128016" marR="128016" marT="54864" marB="54864" anchor="ctr">
-                    <a:lnL w="9525" cap="flat" cmpd="sng" algn="ctr">
-                      <a:solidFill>
-                        <a:srgbClr val="E3EDE6"/>
-                      </a:solidFill>
-                      <a:prstDash val="solid"/>
-                      <a:round/>
-                      <a:headEnd type="none" w="med" len="med"/>
-                      <a:tailEnd type="none" w="med" len="med"/>
-                    </a:lnL>
-                    <a:lnR w="9525" cap="flat" cmpd="sng" algn="ctr">
-                      <a:solidFill>
-                        <a:srgbClr val="E3EDE6"/>
-                      </a:solidFill>
-                      <a:prstDash val="solid"/>
-                      <a:round/>
-                      <a:headEnd type="none" w="med" len="med"/>
-                      <a:tailEnd type="none" w="med" len="med"/>
-                    </a:lnR>
-                    <a:lnT w="9525" cap="flat" cmpd="sng" algn="ctr">
-                      <a:solidFill>
-                        <a:srgbClr val="E3EDE6"/>
-                      </a:solidFill>
-                      <a:prstDash val="solid"/>
-                      <a:round/>
-                      <a:headEnd type="none" w="med" len="med"/>
-                      <a:tailEnd type="none" w="med" len="med"/>
-                    </a:lnT>
-                    <a:lnB w="9525" cap="flat" cmpd="sng" algn="ctr">
-                      <a:solidFill>
-                        <a:srgbClr val="E3EDE6"/>
-                      </a:solidFill>
-                      <a:prstDash val="solid"/>
-                      <a:round/>
-                      <a:headEnd type="none" w="med" len="med"/>
-                      <a:tailEnd type="none" w="med" len="med"/>
-                    </a:lnB>
-                    <a:solidFill>
-                      <a:schemeClr val="tx1"/>
-                    </a:solidFill>
-                  </a:tcPr>
-                </a:tc>
-              </a:tr>
-              <a:tr h="438912">
-                <a:tc>
-                  <a:txBody>
-                    <a:bodyPr/>
-                    <a:lstStyle/>
-                    <a:p>
-                      <a:pPr indent="0" marL="0">
-                        <a:buNone/>
-                      </a:pPr>
-                      <a:r>
-                        <a:rPr lang="en-US" sz="1300" b="1" dirty="0">
-                          <a:solidFill>
-                            <a:schemeClr val="tx1"/>
-                          </a:solidFill>
-                        </a:rPr>
-                        <a:t>Views and reach</a:t>
-                      </a:r>
-                      <a:endParaRPr lang="en-US" sz="1300" dirty="0"/>
-                    </a:p>
-                  </a:txBody>
-                  <a:tcPr marL="128016" marR="128016" marT="54864" marB="54864" anchor="ctr">
-                    <a:lnL w="9525" cap="flat" cmpd="sng" algn="ctr">
-                      <a:solidFill>
-                        <a:srgbClr val="E3EDE6"/>
-                      </a:solidFill>
-                      <a:prstDash val="solid"/>
-                      <a:round/>
-                      <a:headEnd type="none" w="med" len="med"/>
-                      <a:tailEnd type="none" w="med" len="med"/>
-                    </a:lnL>
-                    <a:lnR w="9525" cap="flat" cmpd="sng" algn="ctr">
-                      <a:solidFill>
-                        <a:srgbClr val="E3EDE6"/>
-                      </a:solidFill>
-                      <a:prstDash val="solid"/>
-                      <a:round/>
-                      <a:headEnd type="none" w="med" len="med"/>
-                      <a:tailEnd type="none" w="med" len="med"/>
-                    </a:lnR>
-                    <a:lnT w="9525" cap="flat" cmpd="sng" algn="ctr">
-                      <a:solidFill>
-                        <a:srgbClr val="E3EDE6"/>
-                      </a:solidFill>
-                      <a:prstDash val="solid"/>
-                      <a:round/>
-                      <a:headEnd type="none" w="med" len="med"/>
-                      <a:tailEnd type="none" w="med" len="med"/>
-                    </a:lnT>
-                    <a:lnB w="9525" cap="flat" cmpd="sng" algn="ctr">
-                      <a:solidFill>
-                        <a:srgbClr val="E3EDE6"/>
-                      </a:solidFill>
-                      <a:prstDash val="solid"/>
-                      <a:round/>
-                      <a:headEnd type="none" w="med" len="med"/>
-                      <a:tailEnd type="none" w="med" len="med"/>
-                    </a:lnB>
-                    <a:solidFill>
-                      <a:schemeClr val="bg1"/>
-                    </a:solidFill>
-                  </a:tcPr>
-                </a:tc>
-                <a:tc>
-                  <a:txBody>
-                    <a:bodyPr/>
-                    <a:lstStyle/>
-                    <a:p>
-                      <a:pPr indent="0" marL="0">
-                        <a:buNone/>
-                      </a:pPr>
-                      <a:r>
-                        <a:rPr lang="en-US" sz="1300" dirty="0">
-                          <a:solidFill>
-                            <a:schemeClr val="tx2"/>
-                          </a:solidFill>
-                        </a:rPr>
-                        <a:t>How far festival content travelled</a:t>
-                      </a:r>
-                      <a:endParaRPr lang="en-US" sz="1300" dirty="0"/>
-                    </a:p>
-                  </a:txBody>
-                  <a:tcPr marL="128016" marR="128016" marT="54864" marB="54864" anchor="ctr">
-                    <a:lnL w="9525" cap="flat" cmpd="sng" algn="ctr">
-                      <a:solidFill>
-                        <a:srgbClr val="E3EDE6"/>
-                      </a:solidFill>
-                      <a:prstDash val="solid"/>
-                      <a:round/>
-                      <a:headEnd type="none" w="med" len="med"/>
-                      <a:tailEnd type="none" w="med" len="med"/>
-                    </a:lnL>
-                    <a:lnR w="9525" cap="flat" cmpd="sng" algn="ctr">
-                      <a:solidFill>
-                        <a:srgbClr val="E3EDE6"/>
-                      </a:solidFill>
-                      <a:prstDash val="solid"/>
-                      <a:round/>
-                      <a:headEnd type="none" w="med" len="med"/>
-                      <a:tailEnd type="none" w="med" len="med"/>
-                    </a:lnR>
-                    <a:lnT w="9525" cap="flat" cmpd="sng" algn="ctr">
-                      <a:solidFill>
-                        <a:srgbClr val="E3EDE6"/>
-                      </a:solidFill>
-                      <a:prstDash val="solid"/>
-                      <a:round/>
-                      <a:headEnd type="none" w="med" len="med"/>
-                      <a:tailEnd type="none" w="med" len="med"/>
-                    </a:lnT>
-                    <a:lnB w="9525" cap="flat" cmpd="sng" algn="ctr">
-                      <a:solidFill>
-                        <a:srgbClr val="E3EDE6"/>
-                      </a:solidFill>
-                      <a:prstDash val="solid"/>
-                      <a:round/>
-                      <a:headEnd type="none" w="med" len="med"/>
-                      <a:tailEnd type="none" w="med" len="med"/>
-                    </a:lnB>
-                    <a:solidFill>
-                      <a:schemeClr val="bg1"/>
-                    </a:solidFill>
-                  </a:tcPr>
-                </a:tc>
-                <a:tc>
-                  <a:txBody>
-                    <a:bodyPr/>
-                    <a:lstStyle/>
-                    <a:p>
-                      <a:pPr indent="0" marL="0">
-                        <a:buNone/>
-                      </a:pPr>
-                      <a:r>
-                        <a:rPr lang="en-US" sz="1300" dirty="0">
-                          <a:solidFill>
-                            <a:schemeClr val="tx2"/>
-                          </a:solidFill>
-                        </a:rPr>
-                        <a:t>Screen recorded analytics from every creator</a:t>
-                      </a:r>
-                      <a:endParaRPr lang="en-US" sz="1300" dirty="0"/>
-                    </a:p>
-                  </a:txBody>
-                  <a:tcPr marL="128016" marR="128016" marT="54864" marB="54864" anchor="ctr">
-                    <a:lnL w="9525" cap="flat" cmpd="sng" algn="ctr">
-                      <a:solidFill>
-                        <a:srgbClr val="E3EDE6"/>
-                      </a:solidFill>
-                      <a:prstDash val="solid"/>
-                      <a:round/>
-                      <a:headEnd type="none" w="med" len="med"/>
-                      <a:tailEnd type="none" w="med" len="med"/>
-                    </a:lnL>
-                    <a:lnR w="9525" cap="flat" cmpd="sng" algn="ctr">
-                      <a:solidFill>
-                        <a:srgbClr val="E3EDE6"/>
-                      </a:solidFill>
-                      <a:prstDash val="solid"/>
-                      <a:round/>
-                      <a:headEnd type="none" w="med" len="med"/>
-                      <a:tailEnd type="none" w="med" len="med"/>
-                    </a:lnR>
-                    <a:lnT w="9525" cap="flat" cmpd="sng" algn="ctr">
-                      <a:solidFill>
-                        <a:srgbClr val="E3EDE6"/>
-                      </a:solidFill>
-                      <a:prstDash val="solid"/>
-                      <a:round/>
-                      <a:headEnd type="none" w="med" len="med"/>
-                      <a:tailEnd type="none" w="med" len="med"/>
-                    </a:lnT>
-                    <a:lnB w="9525" cap="flat" cmpd="sng" algn="ctr">
-                      <a:solidFill>
-                        <a:srgbClr val="E3EDE6"/>
-                      </a:solidFill>
-                      <a:prstDash val="solid"/>
-                      <a:round/>
-                      <a:headEnd type="none" w="med" len="med"/>
-                      <a:tailEnd type="none" w="med" len="med"/>
-                    </a:lnB>
-                    <a:solidFill>
-                      <a:schemeClr val="bg1"/>
-                    </a:solidFill>
-                  </a:tcPr>
-                </a:tc>
-              </a:tr>
-              <a:tr h="438912">
-                <a:tc>
-                  <a:txBody>
-                    <a:bodyPr/>
-                    <a:lstStyle/>
-                    <a:p>
-                      <a:pPr indent="0" marL="0">
-                        <a:buNone/>
-                      </a:pPr>
-                      <a:r>
-                        <a:rPr lang="en-US" sz="1300" b="1" dirty="0">
-                          <a:solidFill>
-                            <a:schemeClr val="tx1"/>
-                          </a:solidFill>
-                        </a:rPr>
-                        <a:t>Interactions</a:t>
-                      </a:r>
-                      <a:endParaRPr lang="en-US" sz="1300" dirty="0"/>
-                    </a:p>
-                  </a:txBody>
-                  <a:tcPr marL="128016" marR="128016" marT="54864" marB="54864" anchor="ctr">
-                    <a:lnL w="9525" cap="flat" cmpd="sng" algn="ctr">
-                      <a:solidFill>
-                        <a:srgbClr val="E3EDE6"/>
-                      </a:solidFill>
-                      <a:prstDash val="solid"/>
-                      <a:round/>
-                      <a:headEnd type="none" w="med" len="med"/>
-                      <a:tailEnd type="none" w="med" len="med"/>
-                    </a:lnL>
-                    <a:lnR w="9525" cap="flat" cmpd="sng" algn="ctr">
-                      <a:solidFill>
-                        <a:srgbClr val="E3EDE6"/>
-                      </a:solidFill>
-                      <a:prstDash val="solid"/>
-                      <a:round/>
-                      <a:headEnd type="none" w="med" len="med"/>
-                      <a:tailEnd type="none" w="med" len="med"/>
-                    </a:lnR>
-                    <a:lnT w="9525" cap="flat" cmpd="sng" algn="ctr">
-                      <a:solidFill>
-                        <a:srgbClr val="E3EDE6"/>
-                      </a:solidFill>
-                      <a:prstDash val="solid"/>
-                      <a:round/>
-                      <a:headEnd type="none" w="med" len="med"/>
-                      <a:tailEnd type="none" w="med" len="med"/>
-                    </a:lnT>
-                    <a:lnB w="9525" cap="flat" cmpd="sng" algn="ctr">
-                      <a:solidFill>
-                        <a:srgbClr val="E3EDE6"/>
-                      </a:solidFill>
-                      <a:prstDash val="solid"/>
-                      <a:round/>
-                      <a:headEnd type="none" w="med" len="med"/>
-                      <a:tailEnd type="none" w="med" len="med"/>
-                    </a:lnB>
-                    <a:solidFill>
-                      <a:schemeClr val="bg1"/>
-                    </a:solidFill>
-                  </a:tcPr>
-                </a:tc>
-                <a:tc>
-                  <a:txBody>
-                    <a:bodyPr/>
-                    <a:lstStyle/>
-                    <a:p>
-                      <a:pPr indent="0" marL="0">
-                        <a:buNone/>
-                      </a:pPr>
-                      <a:r>
-                        <a:rPr lang="en-US" sz="1300" dirty="0">
-                          <a:solidFill>
-                            <a:schemeClr val="tx2"/>
-                          </a:solidFill>
-                        </a:rPr>
-                        <a:t>Whether people cared enough to react</a:t>
-                      </a:r>
-                      <a:endParaRPr lang="en-US" sz="1300" dirty="0"/>
-                    </a:p>
-                  </a:txBody>
-                  <a:tcPr marL="128016" marR="128016" marT="54864" marB="54864" anchor="ctr">
-                    <a:lnL w="9525" cap="flat" cmpd="sng" algn="ctr">
-                      <a:solidFill>
-                        <a:srgbClr val="E3EDE6"/>
-                      </a:solidFill>
-                      <a:prstDash val="solid"/>
-                      <a:round/>
-                      <a:headEnd type="none" w="med" len="med"/>
-                      <a:tailEnd type="none" w="med" len="med"/>
-                    </a:lnL>
-                    <a:lnR w="9525" cap="flat" cmpd="sng" algn="ctr">
-                      <a:solidFill>
-                        <a:srgbClr val="E3EDE6"/>
-                      </a:solidFill>
-                      <a:prstDash val="solid"/>
-                      <a:round/>
-                      <a:headEnd type="none" w="med" len="med"/>
-                      <a:tailEnd type="none" w="med" len="med"/>
-                    </a:lnR>
-                    <a:lnT w="9525" cap="flat" cmpd="sng" algn="ctr">
-                      <a:solidFill>
-                        <a:srgbClr val="E3EDE6"/>
-                      </a:solidFill>
-                      <a:prstDash val="solid"/>
-                      <a:round/>
-                      <a:headEnd type="none" w="med" len="med"/>
-                      <a:tailEnd type="none" w="med" len="med"/>
-                    </a:lnT>
-                    <a:lnB w="9525" cap="flat" cmpd="sng" algn="ctr">
-                      <a:solidFill>
-                        <a:srgbClr val="E3EDE6"/>
-                      </a:solidFill>
-                      <a:prstDash val="solid"/>
-                      <a:round/>
-                      <a:headEnd type="none" w="med" len="med"/>
-                      <a:tailEnd type="none" w="med" len="med"/>
-                    </a:lnB>
-                    <a:solidFill>
-                      <a:schemeClr val="bg1"/>
-                    </a:solidFill>
-                  </a:tcPr>
-                </a:tc>
-                <a:tc>
-                  <a:txBody>
-                    <a:bodyPr/>
-                    <a:lstStyle/>
-                    <a:p>
-                      <a:pPr indent="0" marL="0">
-                        <a:buNone/>
-                      </a:pPr>
-                      <a:r>
-                        <a:rPr lang="en-US" sz="1300" dirty="0">
-                          <a:solidFill>
-                            <a:schemeClr val="tx2"/>
-                          </a:solidFill>
-                        </a:rPr>
-                        <a:t>Likes, comments, shares and saves, per post and per creator</a:t>
-                      </a:r>
-                      <a:endParaRPr lang="en-US" sz="1300" dirty="0"/>
-                    </a:p>
-                  </a:txBody>
-                  <a:tcPr marL="128016" marR="128016" marT="54864" marB="54864" anchor="ctr">
-                    <a:lnL w="9525" cap="flat" cmpd="sng" algn="ctr">
-                      <a:solidFill>
-                        <a:srgbClr val="E3EDE6"/>
-                      </a:solidFill>
-                      <a:prstDash val="solid"/>
-                      <a:round/>
-                      <a:headEnd type="none" w="med" len="med"/>
-                      <a:tailEnd type="none" w="med" len="med"/>
-                    </a:lnL>
-                    <a:lnR w="9525" cap="flat" cmpd="sng" algn="ctr">
-                      <a:solidFill>
-                        <a:srgbClr val="E3EDE6"/>
-                      </a:solidFill>
-                      <a:prstDash val="solid"/>
-                      <a:round/>
-                      <a:headEnd type="none" w="med" len="med"/>
-                      <a:tailEnd type="none" w="med" len="med"/>
-                    </a:lnR>
-                    <a:lnT w="9525" cap="flat" cmpd="sng" algn="ctr">
-                      <a:solidFill>
-                        <a:srgbClr val="E3EDE6"/>
-                      </a:solidFill>
-                      <a:prstDash val="solid"/>
-                      <a:round/>
-                      <a:headEnd type="none" w="med" len="med"/>
-                      <a:tailEnd type="none" w="med" len="med"/>
-                    </a:lnT>
-                    <a:lnB w="9525" cap="flat" cmpd="sng" algn="ctr">
-                      <a:solidFill>
-                        <a:srgbClr val="E3EDE6"/>
-                      </a:solidFill>
-                      <a:prstDash val="solid"/>
-                      <a:round/>
-                      <a:headEnd type="none" w="med" len="med"/>
-                      <a:tailEnd type="none" w="med" len="med"/>
-                    </a:lnB>
-                    <a:solidFill>
-                      <a:schemeClr val="bg1"/>
-                    </a:solidFill>
-                  </a:tcPr>
-                </a:tc>
-              </a:tr>
-              <a:tr h="438912">
-                <a:tc>
-                  <a:txBody>
-                    <a:bodyPr/>
-                    <a:lstStyle/>
-                    <a:p>
-                      <a:pPr indent="0" marL="0">
-                        <a:buNone/>
-                      </a:pPr>
-                      <a:r>
-                        <a:rPr lang="en-US" sz="1300" b="1" dirty="0">
-                          <a:solidFill>
-                            <a:schemeClr val="tx1"/>
-                          </a:solidFill>
-                        </a:rPr>
-                        <a:t>Audiences</a:t>
-                      </a:r>
-                      <a:endParaRPr lang="en-US" sz="1300" dirty="0"/>
-                    </a:p>
-                  </a:txBody>
-                  <a:tcPr marL="128016" marR="128016" marT="54864" marB="54864" anchor="ctr">
-                    <a:lnL w="9525" cap="flat" cmpd="sng" algn="ctr">
-                      <a:solidFill>
-                        <a:srgbClr val="E3EDE6"/>
-                      </a:solidFill>
-                      <a:prstDash val="solid"/>
-                      <a:round/>
-                      <a:headEnd type="none" w="med" len="med"/>
-                      <a:tailEnd type="none" w="med" len="med"/>
-                    </a:lnL>
-                    <a:lnR w="9525" cap="flat" cmpd="sng" algn="ctr">
-                      <a:solidFill>
-                        <a:srgbClr val="E3EDE6"/>
-                      </a:solidFill>
-                      <a:prstDash val="solid"/>
-                      <a:round/>
-                      <a:headEnd type="none" w="med" len="med"/>
-                      <a:tailEnd type="none" w="med" len="med"/>
-                    </a:lnR>
-                    <a:lnT w="9525" cap="flat" cmpd="sng" algn="ctr">
-                      <a:solidFill>
-                        <a:srgbClr val="E3EDE6"/>
-                      </a:solidFill>
-                      <a:prstDash val="solid"/>
-                      <a:round/>
-                      <a:headEnd type="none" w="med" len="med"/>
-                      <a:tailEnd type="none" w="med" len="med"/>
-                    </a:lnT>
-                    <a:lnB w="9525" cap="flat" cmpd="sng" algn="ctr">
-                      <a:solidFill>
-                        <a:srgbClr val="E3EDE6"/>
-                      </a:solidFill>
-                      <a:prstDash val="solid"/>
-                      <a:round/>
-                      <a:headEnd type="none" w="med" len="med"/>
-                      <a:tailEnd type="none" w="med" len="med"/>
-                    </a:lnB>
-                    <a:solidFill>
-                      <a:schemeClr val="bg1"/>
-                    </a:solidFill>
-                  </a:tcPr>
-                </a:tc>
-                <a:tc>
-                  <a:txBody>
-                    <a:bodyPr/>
-                    <a:lstStyle/>
-                    <a:p>
-                      <a:pPr indent="0" marL="0">
-                        <a:buNone/>
-                      </a:pPr>
-                      <a:r>
-                        <a:rPr lang="en-US" sz="1300" dirty="0">
-                          <a:solidFill>
-                            <a:schemeClr val="tx2"/>
-                          </a:solidFill>
-                        </a:rPr>
-                        <a:t>Who watched, and from where</a:t>
-                      </a:r>
-                      <a:endParaRPr lang="en-US" sz="1300" dirty="0"/>
-                    </a:p>
-                  </a:txBody>
-                  <a:tcPr marL="128016" marR="128016" marT="54864" marB="54864" anchor="ctr">
-                    <a:lnL w="9525" cap="flat" cmpd="sng" algn="ctr">
-                      <a:solidFill>
-                        <a:srgbClr val="E3EDE6"/>
-                      </a:solidFill>
-                      <a:prstDash val="solid"/>
-                      <a:round/>
-                      <a:headEnd type="none" w="med" len="med"/>
-                      <a:tailEnd type="none" w="med" len="med"/>
-                    </a:lnL>
-                    <a:lnR w="9525" cap="flat" cmpd="sng" algn="ctr">
-                      <a:solidFill>
-                        <a:srgbClr val="E3EDE6"/>
-                      </a:solidFill>
-                      <a:prstDash val="solid"/>
-                      <a:round/>
-                      <a:headEnd type="none" w="med" len="med"/>
-                      <a:tailEnd type="none" w="med" len="med"/>
-                    </a:lnR>
-                    <a:lnT w="9525" cap="flat" cmpd="sng" algn="ctr">
-                      <a:solidFill>
-                        <a:srgbClr val="E3EDE6"/>
-                      </a:solidFill>
-                      <a:prstDash val="solid"/>
-                      <a:round/>
-                      <a:headEnd type="none" w="med" len="med"/>
-                      <a:tailEnd type="none" w="med" len="med"/>
-                    </a:lnT>
-                    <a:lnB w="9525" cap="flat" cmpd="sng" algn="ctr">
-                      <a:solidFill>
-                        <a:srgbClr val="E3EDE6"/>
-                      </a:solidFill>
-                      <a:prstDash val="solid"/>
-                      <a:round/>
-                      <a:headEnd type="none" w="med" len="med"/>
-                      <a:tailEnd type="none" w="med" len="med"/>
-                    </a:lnB>
-                    <a:solidFill>
-                      <a:schemeClr val="bg1"/>
-                    </a:solidFill>
-                  </a:tcPr>
-                </a:tc>
-                <a:tc>
-                  <a:txBody>
-                    <a:bodyPr/>
-                    <a:lstStyle/>
-                    <a:p>
-                      <a:pPr indent="0" marL="0">
-                        <a:buNone/>
-                      </a:pPr>
-                      <a:r>
-                        <a:rPr lang="en-US" sz="1300" dirty="0">
-                          <a:solidFill>
-                            <a:schemeClr val="tx2"/>
-                          </a:solidFill>
-                        </a:rPr>
-                        <a:t>Countries, Côte d’Ivoire and diaspora, age and gender</a:t>
-                      </a:r>
-                      <a:endParaRPr lang="en-US" sz="1300" dirty="0"/>
-                    </a:p>
-                  </a:txBody>
-                  <a:tcPr marL="128016" marR="128016" marT="54864" marB="54864" anchor="ctr">
-                    <a:lnL w="9525" cap="flat" cmpd="sng" algn="ctr">
-                      <a:solidFill>
-                        <a:srgbClr val="E3EDE6"/>
-                      </a:solidFill>
-                      <a:prstDash val="solid"/>
-                      <a:round/>
-                      <a:headEnd type="none" w="med" len="med"/>
-                      <a:tailEnd type="none" w="med" len="med"/>
-                    </a:lnL>
-                    <a:lnR w="9525" cap="flat" cmpd="sng" algn="ctr">
-                      <a:solidFill>
-                        <a:srgbClr val="E3EDE6"/>
-                      </a:solidFill>
-                      <a:prstDash val="solid"/>
-                      <a:round/>
-                      <a:headEnd type="none" w="med" len="med"/>
-                      <a:tailEnd type="none" w="med" len="med"/>
-                    </a:lnR>
-                    <a:lnT w="9525" cap="flat" cmpd="sng" algn="ctr">
-                      <a:solidFill>
-                        <a:srgbClr val="E3EDE6"/>
-                      </a:solidFill>
-                      <a:prstDash val="solid"/>
-                      <a:round/>
-                      <a:headEnd type="none" w="med" len="med"/>
-                      <a:tailEnd type="none" w="med" len="med"/>
-                    </a:lnT>
-                    <a:lnB w="9525" cap="flat" cmpd="sng" algn="ctr">
-                      <a:solidFill>
-                        <a:srgbClr val="E3EDE6"/>
-                      </a:solidFill>
-                      <a:prstDash val="solid"/>
-                      <a:round/>
-                      <a:headEnd type="none" w="med" len="med"/>
-                      <a:tailEnd type="none" w="med" len="med"/>
-                    </a:lnB>
-                    <a:solidFill>
-                      <a:schemeClr val="bg1"/>
-                    </a:solidFill>
-                  </a:tcPr>
-                </a:tc>
-              </a:tr>
-              <a:tr h="438912">
-                <a:tc>
-                  <a:txBody>
-                    <a:bodyPr/>
-                    <a:lstStyle/>
-                    <a:p>
-                      <a:pPr indent="0" marL="0">
-                        <a:buNone/>
-                      </a:pPr>
-                      <a:r>
-                        <a:rPr lang="en-US" sz="1300" b="1" dirty="0">
-                          <a:solidFill>
-                            <a:schemeClr val="tx1"/>
-                          </a:solidFill>
-                        </a:rPr>
-                        <a:t>Tickets</a:t>
-                      </a:r>
-                      <a:endParaRPr lang="en-US" sz="1300" dirty="0"/>
-                    </a:p>
-                  </a:txBody>
-                  <a:tcPr marL="128016" marR="128016" marT="54864" marB="54864" anchor="ctr">
-                    <a:lnL w="9525" cap="flat" cmpd="sng" algn="ctr">
-                      <a:solidFill>
-                        <a:srgbClr val="E3EDE6"/>
-                      </a:solidFill>
-                      <a:prstDash val="solid"/>
-                      <a:round/>
-                      <a:headEnd type="none" w="med" len="med"/>
-                      <a:tailEnd type="none" w="med" len="med"/>
-                    </a:lnL>
-                    <a:lnR w="9525" cap="flat" cmpd="sng" algn="ctr">
-                      <a:solidFill>
-                        <a:srgbClr val="E3EDE6"/>
-                      </a:solidFill>
-                      <a:prstDash val="solid"/>
-                      <a:round/>
-                      <a:headEnd type="none" w="med" len="med"/>
-                      <a:tailEnd type="none" w="med" len="med"/>
-                    </a:lnR>
-                    <a:lnT w="9525" cap="flat" cmpd="sng" algn="ctr">
-                      <a:solidFill>
-                        <a:srgbClr val="E3EDE6"/>
-                      </a:solidFill>
-                      <a:prstDash val="solid"/>
-                      <a:round/>
-                      <a:headEnd type="none" w="med" len="med"/>
-                      <a:tailEnd type="none" w="med" len="med"/>
-                    </a:lnT>
-                    <a:lnB w="9525" cap="flat" cmpd="sng" algn="ctr">
-                      <a:solidFill>
-                        <a:srgbClr val="E3EDE6"/>
-                      </a:solidFill>
-                      <a:prstDash val="solid"/>
-                      <a:round/>
-                      <a:headEnd type="none" w="med" len="med"/>
-                      <a:tailEnd type="none" w="med" len="med"/>
-                    </a:lnB>
-                    <a:solidFill>
-                      <a:schemeClr val="bg1"/>
-                    </a:solidFill>
-                  </a:tcPr>
-                </a:tc>
-                <a:tc>
-                  <a:txBody>
-                    <a:bodyPr/>
-                    <a:lstStyle/>
-                    <a:p>
-                      <a:pPr indent="0" marL="0">
-                        <a:buNone/>
-                      </a:pPr>
-                      <a:r>
-                        <a:rPr lang="en-US" sz="1300" dirty="0">
-                          <a:solidFill>
-                            <a:schemeClr val="tx2"/>
-                          </a:solidFill>
-                        </a:rPr>
-                        <a:t>Which creators drove ticket sales</a:t>
-                      </a:r>
-                      <a:endParaRPr lang="en-US" sz="1300" dirty="0"/>
-                    </a:p>
-                  </a:txBody>
-                  <a:tcPr marL="128016" marR="128016" marT="54864" marB="54864" anchor="ctr">
-                    <a:lnL w="9525" cap="flat" cmpd="sng" algn="ctr">
-                      <a:solidFill>
-                        <a:srgbClr val="E3EDE6"/>
-                      </a:solidFill>
-                      <a:prstDash val="solid"/>
-                      <a:round/>
-                      <a:headEnd type="none" w="med" len="med"/>
-                      <a:tailEnd type="none" w="med" len="med"/>
-                    </a:lnL>
-                    <a:lnR w="9525" cap="flat" cmpd="sng" algn="ctr">
-                      <a:solidFill>
-                        <a:srgbClr val="E3EDE6"/>
-                      </a:solidFill>
-                      <a:prstDash val="solid"/>
-                      <a:round/>
-                      <a:headEnd type="none" w="med" len="med"/>
-                      <a:tailEnd type="none" w="med" len="med"/>
-                    </a:lnR>
-                    <a:lnT w="9525" cap="flat" cmpd="sng" algn="ctr">
-                      <a:solidFill>
-                        <a:srgbClr val="E3EDE6"/>
-                      </a:solidFill>
-                      <a:prstDash val="solid"/>
-                      <a:round/>
-                      <a:headEnd type="none" w="med" len="med"/>
-                      <a:tailEnd type="none" w="med" len="med"/>
-                    </a:lnT>
-                    <a:lnB w="9525" cap="flat" cmpd="sng" algn="ctr">
-                      <a:solidFill>
-                        <a:srgbClr val="E3EDE6"/>
-                      </a:solidFill>
-                      <a:prstDash val="solid"/>
-                      <a:round/>
-                      <a:headEnd type="none" w="med" len="med"/>
-                      <a:tailEnd type="none" w="med" len="med"/>
-                    </a:lnB>
-                    <a:solidFill>
-                      <a:schemeClr val="bg1"/>
-                    </a:solidFill>
-                  </a:tcPr>
-                </a:tc>
-                <a:tc>
-                  <a:txBody>
-                    <a:bodyPr/>
-                    <a:lstStyle/>
-                    <a:p>
-                      <a:pPr indent="0" marL="0">
-                        <a:buNone/>
-                      </a:pPr>
-                      <a:r>
-                        <a:rPr lang="en-US" sz="1300" dirty="0">
-                          <a:solidFill>
-                            <a:schemeClr val="tx2"/>
-                          </a:solidFill>
-                        </a:rPr>
-                        <a:t>Tracked links to maf.tikerama.com, and codes where supplied</a:t>
-                      </a:r>
-                      <a:endParaRPr lang="en-US" sz="1300" dirty="0"/>
-                    </a:p>
-                  </a:txBody>
-                  <a:tcPr marL="128016" marR="128016" marT="54864" marB="54864" anchor="ctr">
-                    <a:lnL w="9525" cap="flat" cmpd="sng" algn="ctr">
-                      <a:solidFill>
-                        <a:srgbClr val="E3EDE6"/>
-                      </a:solidFill>
-                      <a:prstDash val="solid"/>
-                      <a:round/>
-                      <a:headEnd type="none" w="med" len="med"/>
-                      <a:tailEnd type="none" w="med" len="med"/>
-                    </a:lnL>
-                    <a:lnR w="9525" cap="flat" cmpd="sng" algn="ctr">
-                      <a:solidFill>
-                        <a:srgbClr val="E3EDE6"/>
-                      </a:solidFill>
-                      <a:prstDash val="solid"/>
-                      <a:round/>
-                      <a:headEnd type="none" w="med" len="med"/>
-                      <a:tailEnd type="none" w="med" len="med"/>
-                    </a:lnR>
-                    <a:lnT w="9525" cap="flat" cmpd="sng" algn="ctr">
-                      <a:solidFill>
-                        <a:srgbClr val="E3EDE6"/>
-                      </a:solidFill>
-                      <a:prstDash val="solid"/>
-                      <a:round/>
-                      <a:headEnd type="none" w="med" len="med"/>
-                      <a:tailEnd type="none" w="med" len="med"/>
-                    </a:lnT>
-                    <a:lnB w="9525" cap="flat" cmpd="sng" algn="ctr">
-                      <a:solidFill>
-                        <a:srgbClr val="E3EDE6"/>
-                      </a:solidFill>
-                      <a:prstDash val="solid"/>
-                      <a:round/>
-                      <a:headEnd type="none" w="med" len="med"/>
-                      <a:tailEnd type="none" w="med" len="med"/>
-                    </a:lnB>
-                    <a:solidFill>
-                      <a:schemeClr val="bg1"/>
-                    </a:solidFill>
-                  </a:tcPr>
-                </a:tc>
-              </a:tr>
-              <a:tr h="438912">
-                <a:tc>
-                  <a:txBody>
-                    <a:bodyPr/>
-                    <a:lstStyle/>
-                    <a:p>
-                      <a:pPr indent="0" marL="0">
-                        <a:buNone/>
-                      </a:pPr>
-                      <a:r>
-                        <a:rPr lang="en-US" sz="1300" b="1" dirty="0">
-                          <a:solidFill>
-                            <a:schemeClr val="tx1"/>
-                          </a:solidFill>
-                        </a:rPr>
-                        <a:t>Festival accounts</a:t>
-                      </a:r>
-                      <a:endParaRPr lang="en-US" sz="1300" dirty="0"/>
-                    </a:p>
-                  </a:txBody>
-                  <a:tcPr marL="128016" marR="128016" marT="54864" marB="54864" anchor="ctr">
-                    <a:lnL w="9525" cap="flat" cmpd="sng" algn="ctr">
-                      <a:solidFill>
-                        <a:srgbClr val="E3EDE6"/>
-                      </a:solidFill>
-                      <a:prstDash val="solid"/>
-                      <a:round/>
-                      <a:headEnd type="none" w="med" len="med"/>
-                      <a:tailEnd type="none" w="med" len="med"/>
-                    </a:lnL>
-                    <a:lnR w="9525" cap="flat" cmpd="sng" algn="ctr">
-                      <a:solidFill>
-                        <a:srgbClr val="E3EDE6"/>
-                      </a:solidFill>
-                      <a:prstDash val="solid"/>
-                      <a:round/>
-                      <a:headEnd type="none" w="med" len="med"/>
-                      <a:tailEnd type="none" w="med" len="med"/>
-                    </a:lnR>
-                    <a:lnT w="9525" cap="flat" cmpd="sng" algn="ctr">
-                      <a:solidFill>
-                        <a:srgbClr val="E3EDE6"/>
-                      </a:solidFill>
-                      <a:prstDash val="solid"/>
-                      <a:round/>
-                      <a:headEnd type="none" w="med" len="med"/>
-                      <a:tailEnd type="none" w="med" len="med"/>
-                    </a:lnT>
-                    <a:lnB w="9525" cap="flat" cmpd="sng" algn="ctr">
-                      <a:solidFill>
-                        <a:srgbClr val="E3EDE6"/>
-                      </a:solidFill>
-                      <a:prstDash val="solid"/>
-                      <a:round/>
-                      <a:headEnd type="none" w="med" len="med"/>
-                      <a:tailEnd type="none" w="med" len="med"/>
-                    </a:lnB>
-                    <a:solidFill>
-                      <a:schemeClr val="bg1"/>
-                    </a:solidFill>
-                  </a:tcPr>
-                </a:tc>
-                <a:tc>
-                  <a:txBody>
-                    <a:bodyPr/>
-                    <a:lstStyle/>
-                    <a:p>
-                      <a:pPr indent="0" marL="0">
-                        <a:buNone/>
-                      </a:pPr>
-                      <a:r>
-                        <a:rPr lang="en-US" sz="1300" dirty="0">
-                          <a:solidFill>
-                            <a:schemeClr val="tx2"/>
-                          </a:solidFill>
-                        </a:rPr>
-                        <a:t>New followers for Mother Africa</a:t>
-                      </a:r>
-                      <a:endParaRPr lang="en-US" sz="1300" dirty="0"/>
-                    </a:p>
-                  </a:txBody>
-                  <a:tcPr marL="128016" marR="128016" marT="54864" marB="54864" anchor="ctr">
-                    <a:lnL w="9525" cap="flat" cmpd="sng" algn="ctr">
-                      <a:solidFill>
-                        <a:srgbClr val="E3EDE6"/>
-                      </a:solidFill>
-                      <a:prstDash val="solid"/>
-                      <a:round/>
-                      <a:headEnd type="none" w="med" len="med"/>
-                      <a:tailEnd type="none" w="med" len="med"/>
-                    </a:lnL>
-                    <a:lnR w="9525" cap="flat" cmpd="sng" algn="ctr">
-                      <a:solidFill>
-                        <a:srgbClr val="E3EDE6"/>
-                      </a:solidFill>
-                      <a:prstDash val="solid"/>
-                      <a:round/>
-                      <a:headEnd type="none" w="med" len="med"/>
-                      <a:tailEnd type="none" w="med" len="med"/>
-                    </a:lnR>
-                    <a:lnT w="9525" cap="flat" cmpd="sng" algn="ctr">
-                      <a:solidFill>
-                        <a:srgbClr val="E3EDE6"/>
-                      </a:solidFill>
-                      <a:prstDash val="solid"/>
-                      <a:round/>
-                      <a:headEnd type="none" w="med" len="med"/>
-                      <a:tailEnd type="none" w="med" len="med"/>
-                    </a:lnT>
-                    <a:lnB w="9525" cap="flat" cmpd="sng" algn="ctr">
-                      <a:solidFill>
-                        <a:srgbClr val="E3EDE6"/>
-                      </a:solidFill>
-                      <a:prstDash val="solid"/>
-                      <a:round/>
-                      <a:headEnd type="none" w="med" len="med"/>
-                      <a:tailEnd type="none" w="med" len="med"/>
-                    </a:lnB>
-                    <a:solidFill>
-                      <a:schemeClr val="bg1"/>
-                    </a:solidFill>
-                  </a:tcPr>
-                </a:tc>
-                <a:tc>
-                  <a:txBody>
-                    <a:bodyPr/>
-                    <a:lstStyle/>
-                    <a:p>
-                      <a:pPr indent="0" marL="0">
-                        <a:buNone/>
-                      </a:pPr>
-                      <a:r>
-                        <a:rPr lang="en-US" sz="1300" dirty="0">
-                          <a:solidFill>
-                            <a:schemeClr val="tx2"/>
-                          </a:solidFill>
-                        </a:rPr>
-                        <a:t>Account growth through the build up and the nights</a:t>
-                      </a:r>
-                      <a:endParaRPr lang="en-US" sz="1300" dirty="0"/>
-                    </a:p>
-                  </a:txBody>
-                  <a:tcPr marL="128016" marR="128016" marT="54864" marB="54864" anchor="ctr">
-                    <a:lnL w="9525" cap="flat" cmpd="sng" algn="ctr">
-                      <a:solidFill>
-                        <a:srgbClr val="E3EDE6"/>
-                      </a:solidFill>
-                      <a:prstDash val="solid"/>
-                      <a:round/>
-                      <a:headEnd type="none" w="med" len="med"/>
-                      <a:tailEnd type="none" w="med" len="med"/>
-                    </a:lnL>
-                    <a:lnR w="9525" cap="flat" cmpd="sng" algn="ctr">
-                      <a:solidFill>
-                        <a:srgbClr val="E3EDE6"/>
-                      </a:solidFill>
-                      <a:prstDash val="solid"/>
-                      <a:round/>
-                      <a:headEnd type="none" w="med" len="med"/>
-                      <a:tailEnd type="none" w="med" len="med"/>
-                    </a:lnR>
-                    <a:lnT w="9525" cap="flat" cmpd="sng" algn="ctr">
-                      <a:solidFill>
-                        <a:srgbClr val="E3EDE6"/>
-                      </a:solidFill>
-                      <a:prstDash val="solid"/>
-                      <a:round/>
-                      <a:headEnd type="none" w="med" len="med"/>
-                      <a:tailEnd type="none" w="med" len="med"/>
-                    </a:lnT>
-                    <a:lnB w="9525" cap="flat" cmpd="sng" algn="ctr">
-                      <a:solidFill>
-                        <a:srgbClr val="E3EDE6"/>
-                      </a:solidFill>
-                      <a:prstDash val="solid"/>
-                      <a:round/>
-                      <a:headEnd type="none" w="med" len="med"/>
-                      <a:tailEnd type="none" w="med" len="med"/>
-                    </a:lnB>
-                    <a:solidFill>
-                      <a:schemeClr val="bg1"/>
-                    </a:solidFill>
-                  </a:tcPr>
-                </a:tc>
-              </a:tr>
-              <a:tr h="438912">
-                <a:tc>
-                  <a:txBody>
-                    <a:bodyPr/>
-                    <a:lstStyle/>
-                    <a:p>
-                      <a:pPr indent="0" marL="0">
-                        <a:buNone/>
-                      </a:pPr>
-                      <a:r>
-                        <a:rPr lang="en-US" sz="1300" b="1" dirty="0">
-                          <a:solidFill>
-                            <a:schemeClr val="tx1"/>
-                          </a:solidFill>
-                        </a:rPr>
-                        <a:t>Conversation</a:t>
-                      </a:r>
-                      <a:endParaRPr lang="en-US" sz="1300" dirty="0"/>
-                    </a:p>
-                  </a:txBody>
-                  <a:tcPr marL="128016" marR="128016" marT="54864" marB="54864" anchor="ctr">
-                    <a:lnL w="9525" cap="flat" cmpd="sng" algn="ctr">
-                      <a:solidFill>
-                        <a:srgbClr val="E3EDE6"/>
-                      </a:solidFill>
-                      <a:prstDash val="solid"/>
-                      <a:round/>
-                      <a:headEnd type="none" w="med" len="med"/>
-                      <a:tailEnd type="none" w="med" len="med"/>
-                    </a:lnL>
-                    <a:lnR w="9525" cap="flat" cmpd="sng" algn="ctr">
-                      <a:solidFill>
-                        <a:srgbClr val="E3EDE6"/>
-                      </a:solidFill>
-                      <a:prstDash val="solid"/>
-                      <a:round/>
-                      <a:headEnd type="none" w="med" len="med"/>
-                      <a:tailEnd type="none" w="med" len="med"/>
-                    </a:lnR>
-                    <a:lnT w="9525" cap="flat" cmpd="sng" algn="ctr">
-                      <a:solidFill>
-                        <a:srgbClr val="E3EDE6"/>
-                      </a:solidFill>
-                      <a:prstDash val="solid"/>
-                      <a:round/>
-                      <a:headEnd type="none" w="med" len="med"/>
-                      <a:tailEnd type="none" w="med" len="med"/>
-                    </a:lnT>
-                    <a:lnB w="9525" cap="flat" cmpd="sng" algn="ctr">
-                      <a:solidFill>
-                        <a:srgbClr val="E3EDE6"/>
-                      </a:solidFill>
-                      <a:prstDash val="solid"/>
-                      <a:round/>
-                      <a:headEnd type="none" w="med" len="med"/>
-                      <a:tailEnd type="none" w="med" len="med"/>
-                    </a:lnB>
-                    <a:solidFill>
-                      <a:schemeClr val="bg1"/>
-                    </a:solidFill>
-                  </a:tcPr>
-                </a:tc>
-                <a:tc>
-                  <a:txBody>
-                    <a:bodyPr/>
-                    <a:lstStyle/>
-                    <a:p>
-                      <a:pPr indent="0" marL="0">
-                        <a:buNone/>
-                      </a:pPr>
-                      <a:r>
-                        <a:rPr lang="en-US" sz="1300" dirty="0">
-                          <a:solidFill>
-                            <a:schemeClr val="tx2"/>
-                          </a:solidFill>
-                        </a:rPr>
-                        <a:t>How much people talk about the festival</a:t>
-                      </a:r>
-                      <a:endParaRPr lang="en-US" sz="1300" dirty="0"/>
-                    </a:p>
-                  </a:txBody>
-                  <a:tcPr marL="128016" marR="128016" marT="54864" marB="54864" anchor="ctr">
-                    <a:lnL w="9525" cap="flat" cmpd="sng" algn="ctr">
-                      <a:solidFill>
-                        <a:srgbClr val="E3EDE6"/>
-                      </a:solidFill>
-                      <a:prstDash val="solid"/>
-                      <a:round/>
-                      <a:headEnd type="none" w="med" len="med"/>
-                      <a:tailEnd type="none" w="med" len="med"/>
-                    </a:lnL>
-                    <a:lnR w="9525" cap="flat" cmpd="sng" algn="ctr">
-                      <a:solidFill>
-                        <a:srgbClr val="E3EDE6"/>
-                      </a:solidFill>
-                      <a:prstDash val="solid"/>
-                      <a:round/>
-                      <a:headEnd type="none" w="med" len="med"/>
-                      <a:tailEnd type="none" w="med" len="med"/>
-                    </a:lnR>
-                    <a:lnT w="9525" cap="flat" cmpd="sng" algn="ctr">
-                      <a:solidFill>
-                        <a:srgbClr val="E3EDE6"/>
-                      </a:solidFill>
-                      <a:prstDash val="solid"/>
-                      <a:round/>
-                      <a:headEnd type="none" w="med" len="med"/>
-                      <a:tailEnd type="none" w="med" len="med"/>
-                    </a:lnT>
-                    <a:lnB w="9525" cap="flat" cmpd="sng" algn="ctr">
-                      <a:solidFill>
-                        <a:srgbClr val="E3EDE6"/>
-                      </a:solidFill>
-                      <a:prstDash val="solid"/>
-                      <a:round/>
-                      <a:headEnd type="none" w="med" len="med"/>
-                      <a:tailEnd type="none" w="med" len="med"/>
-                    </a:lnB>
-                    <a:solidFill>
-                      <a:schemeClr val="bg1"/>
-                    </a:solidFill>
-                  </a:tcPr>
-                </a:tc>
-                <a:tc>
-                  <a:txBody>
-                    <a:bodyPr/>
-                    <a:lstStyle/>
-                    <a:p>
-                      <a:pPr indent="0" marL="0">
-                        <a:buNone/>
-                      </a:pPr>
-                      <a:r>
-                        <a:rPr lang="en-US" sz="1300" dirty="0">
-                          <a:solidFill>
-                            <a:schemeClr val="tx2"/>
-                          </a:solidFill>
-                        </a:rPr>
-                        <a:t>Hashtag and mention tracking</a:t>
-                      </a:r>
-                      <a:endParaRPr lang="en-US" sz="1300" dirty="0"/>
-                    </a:p>
-                  </a:txBody>
-                  <a:tcPr marL="128016" marR="128016" marT="54864" marB="54864" anchor="ctr">
-                    <a:lnL w="9525" cap="flat" cmpd="sng" algn="ctr">
-                      <a:solidFill>
-                        <a:srgbClr val="E3EDE6"/>
-                      </a:solidFill>
-                      <a:prstDash val="solid"/>
-                      <a:round/>
-                      <a:headEnd type="none" w="med" len="med"/>
-                      <a:tailEnd type="none" w="med" len="med"/>
-                    </a:lnL>
-                    <a:lnR w="9525" cap="flat" cmpd="sng" algn="ctr">
-                      <a:solidFill>
-                        <a:srgbClr val="E3EDE6"/>
-                      </a:solidFill>
-                      <a:prstDash val="solid"/>
-                      <a:round/>
-                      <a:headEnd type="none" w="med" len="med"/>
-                      <a:tailEnd type="none" w="med" len="med"/>
-                    </a:lnR>
-                    <a:lnT w="9525" cap="flat" cmpd="sng" algn="ctr">
-                      <a:solidFill>
-                        <a:srgbClr val="E3EDE6"/>
-                      </a:solidFill>
-                      <a:prstDash val="solid"/>
-                      <a:round/>
-                      <a:headEnd type="none" w="med" len="med"/>
-                      <a:tailEnd type="none" w="med" len="med"/>
-                    </a:lnT>
-                    <a:lnB w="9525" cap="flat" cmpd="sng" algn="ctr">
-                      <a:solidFill>
-                        <a:srgbClr val="E3EDE6"/>
-                      </a:solidFill>
-                      <a:prstDash val="solid"/>
-                      <a:round/>
-                      <a:headEnd type="none" w="med" len="med"/>
-                      <a:tailEnd type="none" w="med" len="med"/>
-                    </a:lnB>
-                    <a:solidFill>
-                      <a:schemeClr val="bg1"/>
-                    </a:solidFill>
-                  </a:tcPr>
-                </a:tc>
-              </a:tr>
-              <a:tr h="438912">
-                <a:tc>
-                  <a:txBody>
-                    <a:bodyPr/>
-                    <a:lstStyle/>
-                    <a:p>
-                      <a:pPr indent="0" marL="0">
-                        <a:buNone/>
-                      </a:pPr>
-                      <a:r>
-                        <a:rPr lang="en-US" sz="1300" b="1" dirty="0">
-                          <a:solidFill>
-                            <a:schemeClr val="tx1"/>
-                          </a:solidFill>
-                        </a:rPr>
-                        <a:t>Sponsor value</a:t>
-                      </a:r>
-                      <a:endParaRPr lang="en-US" sz="1300" dirty="0"/>
-                    </a:p>
-                  </a:txBody>
-                  <a:tcPr marL="128016" marR="128016" marT="54864" marB="54864" anchor="ctr">
-                    <a:lnL w="9525" cap="flat" cmpd="sng" algn="ctr">
-                      <a:solidFill>
-                        <a:srgbClr val="E3EDE6"/>
-                      </a:solidFill>
-                      <a:prstDash val="solid"/>
-                      <a:round/>
-                      <a:headEnd type="none" w="med" len="med"/>
-                      <a:tailEnd type="none" w="med" len="med"/>
-                    </a:lnL>
-                    <a:lnR w="9525" cap="flat" cmpd="sng" algn="ctr">
-                      <a:solidFill>
-                        <a:srgbClr val="E3EDE6"/>
-                      </a:solidFill>
-                      <a:prstDash val="solid"/>
-                      <a:round/>
-                      <a:headEnd type="none" w="med" len="med"/>
-                      <a:tailEnd type="none" w="med" len="med"/>
-                    </a:lnR>
-                    <a:lnT w="9525" cap="flat" cmpd="sng" algn="ctr">
-                      <a:solidFill>
-                        <a:srgbClr val="E3EDE6"/>
-                      </a:solidFill>
-                      <a:prstDash val="solid"/>
-                      <a:round/>
-                      <a:headEnd type="none" w="med" len="med"/>
-                      <a:tailEnd type="none" w="med" len="med"/>
-                    </a:lnT>
-                    <a:lnB w="9525" cap="flat" cmpd="sng" algn="ctr">
-                      <a:solidFill>
-                        <a:srgbClr val="E3EDE6"/>
-                      </a:solidFill>
-                      <a:prstDash val="solid"/>
-                      <a:round/>
-                      <a:headEnd type="none" w="med" len="med"/>
-                      <a:tailEnd type="none" w="med" len="med"/>
-                    </a:lnB>
-                    <a:solidFill>
-                      <a:schemeClr val="bg1"/>
-                    </a:solidFill>
-                  </a:tcPr>
-                </a:tc>
-                <a:tc>
-                  <a:txBody>
-                    <a:bodyPr/>
-                    <a:lstStyle/>
-                    <a:p>
-                      <a:pPr indent="0" marL="0">
-                        <a:buNone/>
-                      </a:pPr>
-                      <a:r>
-                        <a:rPr lang="en-US" sz="1300" dirty="0">
-                          <a:solidFill>
-                            <a:schemeClr val="tx2"/>
-                          </a:solidFill>
-                        </a:rPr>
-                        <a:t>What each partner received</a:t>
-                      </a:r>
-                      <a:endParaRPr lang="en-US" sz="1300" dirty="0"/>
-                    </a:p>
-                  </a:txBody>
-                  <a:tcPr marL="128016" marR="128016" marT="54864" marB="54864" anchor="ctr">
-                    <a:lnL w="9525" cap="flat" cmpd="sng" algn="ctr">
-                      <a:solidFill>
-                        <a:srgbClr val="E3EDE6"/>
-                      </a:solidFill>
-                      <a:prstDash val="solid"/>
-                      <a:round/>
-                      <a:headEnd type="none" w="med" len="med"/>
-                      <a:tailEnd type="none" w="med" len="med"/>
-                    </a:lnL>
-                    <a:lnR w="9525" cap="flat" cmpd="sng" algn="ctr">
-                      <a:solidFill>
-                        <a:srgbClr val="E3EDE6"/>
-                      </a:solidFill>
-                      <a:prstDash val="solid"/>
-                      <a:round/>
-                      <a:headEnd type="none" w="med" len="med"/>
-                      <a:tailEnd type="none" w="med" len="med"/>
-                    </a:lnR>
-                    <a:lnT w="9525" cap="flat" cmpd="sng" algn="ctr">
-                      <a:solidFill>
-                        <a:srgbClr val="E3EDE6"/>
-                      </a:solidFill>
-                      <a:prstDash val="solid"/>
-                      <a:round/>
-                      <a:headEnd type="none" w="med" len="med"/>
-                      <a:tailEnd type="none" w="med" len="med"/>
-                    </a:lnT>
-                    <a:lnB w="9525" cap="flat" cmpd="sng" algn="ctr">
-                      <a:solidFill>
-                        <a:srgbClr val="E3EDE6"/>
-                      </a:solidFill>
-                      <a:prstDash val="solid"/>
-                      <a:round/>
-                      <a:headEnd type="none" w="med" len="med"/>
-                      <a:tailEnd type="none" w="med" len="med"/>
-                    </a:lnB>
-                    <a:solidFill>
-                      <a:schemeClr val="bg1"/>
-                    </a:solidFill>
-                  </a:tcPr>
-                </a:tc>
-                <a:tc>
-                  <a:txBody>
-                    <a:bodyPr/>
-                    <a:lstStyle/>
-                    <a:p>
-                      <a:pPr indent="0" marL="0">
-                        <a:buNone/>
-                      </a:pPr>
-                      <a:r>
-                        <a:rPr lang="en-US" sz="1300" dirty="0">
-                          <a:solidFill>
-                            <a:schemeClr val="tx2"/>
-                          </a:solidFill>
-                        </a:rPr>
-                        <a:t>On screen moments, screen time, estimated media value</a:t>
-                      </a:r>
-                      <a:endParaRPr lang="en-US" sz="1300" dirty="0"/>
-                    </a:p>
-                  </a:txBody>
-                  <a:tcPr marL="128016" marR="128016" marT="54864" marB="54864" anchor="ctr">
-                    <a:lnL w="9525" cap="flat" cmpd="sng" algn="ctr">
-                      <a:solidFill>
-                        <a:srgbClr val="E3EDE6"/>
-                      </a:solidFill>
-                      <a:prstDash val="solid"/>
-                      <a:round/>
-                      <a:headEnd type="none" w="med" len="med"/>
-                      <a:tailEnd type="none" w="med" len="med"/>
-                    </a:lnL>
-                    <a:lnR w="9525" cap="flat" cmpd="sng" algn="ctr">
-                      <a:solidFill>
-                        <a:srgbClr val="E3EDE6"/>
-                      </a:solidFill>
-                      <a:prstDash val="solid"/>
-                      <a:round/>
-                      <a:headEnd type="none" w="med" len="med"/>
-                      <a:tailEnd type="none" w="med" len="med"/>
-                    </a:lnR>
-                    <a:lnT w="9525" cap="flat" cmpd="sng" algn="ctr">
-                      <a:solidFill>
-                        <a:srgbClr val="E3EDE6"/>
-                      </a:solidFill>
-                      <a:prstDash val="solid"/>
-                      <a:round/>
-                      <a:headEnd type="none" w="med" len="med"/>
-                      <a:tailEnd type="none" w="med" len="med"/>
-                    </a:lnT>
-                    <a:lnB w="9525" cap="flat" cmpd="sng" algn="ctr">
-                      <a:solidFill>
-                        <a:srgbClr val="E3EDE6"/>
-                      </a:solidFill>
-                      <a:prstDash val="solid"/>
-                      <a:round/>
-                      <a:headEnd type="none" w="med" len="med"/>
-                      <a:tailEnd type="none" w="med" len="med"/>
-                    </a:lnB>
-                    <a:solidFill>
-                      <a:schemeClr val="bg1"/>
-                    </a:solidFill>
-                  </a:tcPr>
-                </a:tc>
-              </a:tr>
-            </a:tbl>
-          </a:graphicData>
-        </a:graphic>
-      </p:graphicFrame>
-      <p:sp>
-        <p:nvSpPr>
-          <p:cNvPr id="9" name="Text 3"/>
-          <p:cNvSpPr txBox="1"/>
-          <p:nvPr/>
-        </p:nvSpPr>
-        <p:spPr>
-          <a:xfrm>
-            <a:off x="548640" y="5623560"/>
-            <a:ext cx="11094415" cy="274320"/>
+      <p:sp>
+        <p:nvSpPr>
+          <p:cNvPr id="8" name="Shape 3"/>
+          <p:cNvSpPr/>
+          <p:nvPr/>
+        </p:nvSpPr>
+        <p:spPr>
+          <a:xfrm>
+            <a:off x="548640" y="1828800"/>
+            <a:ext cx="594360" cy="594360"/>
+          </a:xfrm>
+          <a:prstGeom prst="ellipse">
+            <a:avLst/>
+          </a:prstGeom>
+          <a:solidFill>
+            <a:schemeClr val="accent1"/>
+          </a:solidFill>
+          <a:ln/>
+        </p:spPr>
+      </p:sp>
+      <p:pic>
+        <p:nvPicPr>
+          <p:cNvPr id="9" name="Image 2" descr="preencoded.png">    </p:cNvPr>
+          <p:cNvPicPr>
+            <a:picLocks noChangeAspect="1"/>
+          </p:cNvPicPr>
+          <p:nvPr/>
+        </p:nvPicPr>
+        <p:blipFill>
+          <a:blip r:embed="rId3"/>
+          <a:stretch>
+            <a:fillRect/>
+          </a:stretch>
+        </p:blipFill>
+        <p:spPr>
+          <a:xfrm>
+            <a:off x="691286" y="1971446"/>
+            <a:ext cx="309067" cy="309067"/>
+          </a:xfrm>
+          <a:prstGeom prst="rect">
+            <a:avLst/>
+          </a:prstGeom>
+        </p:spPr>
+      </p:pic>
+      <p:sp>
+        <p:nvSpPr>
+          <p:cNvPr id="10" name="Text 4"/>
+          <p:cNvSpPr txBox="1"/>
+          <p:nvPr/>
+        </p:nvSpPr>
+        <p:spPr>
+          <a:xfrm>
+            <a:off x="1371600" y="1792224"/>
+            <a:ext cx="5029200" cy="384048"/>
           </a:xfrm>
           <a:prstGeom prst="rect">
             <a:avLst/>
@@ -19162,14 +17889,1429 @@
               <a:buNone/>
             </a:pPr>
             <a:r>
-              <a:rPr lang="en-GB" altLang="en-US" sz="1300" i="1" dirty="0">
+              <a:rPr lang="en-GB" altLang="en-US" sz="2200" dirty="0">
+                <a:solidFill>
+                  <a:schemeClr val="tx1"/>
+                </a:solidFill>
+                <a:latin typeface="+mj-lt" pitchFamily="34" charset="0"/>
+                <a:ea typeface="+mj-lt" pitchFamily="34" charset="-122"/>
+                <a:cs typeface="+mj-lt" pitchFamily="34" charset="-120"/>
+              </a:rPr>
+              <a:t>Weekly pulse</a:t>
+            </a:r>
+            <a:endParaRPr lang="en-GB" sz="2200" dirty="0"/>
+          </a:p>
+        </p:txBody>
+      </p:sp>
+      <p:sp>
+        <p:nvSpPr>
+          <p:cNvPr id="11" name="Text 5"/>
+          <p:cNvSpPr txBox="1"/>
+          <p:nvPr/>
+        </p:nvSpPr>
+        <p:spPr>
+          <a:xfrm>
+            <a:off x="1371600" y="2212848"/>
+            <a:ext cx="5029200" cy="256032"/>
+          </a:xfrm>
+          <a:prstGeom prst="rect">
+            <a:avLst/>
+          </a:prstGeom>
+          <a:noFill/>
+          <a:ln/>
+        </p:spPr>
+        <p:txBody>
+          <a:bodyPr wrap="square" lIns="0" tIns="0" rIns="0" bIns="0" rtlCol="0" anchor="t"/>
+          <a:lstStyle/>
+          <a:p>
+            <a:pPr indent="0" marL="0">
+              <a:buNone/>
+            </a:pPr>
+            <a:r>
+              <a:rPr lang="en-GB" altLang="en-US" sz="1100" b="1" spc="300" kern="0" dirty="0">
+                <a:solidFill>
+                  <a:schemeClr val="accent3"/>
+                </a:solidFill>
+              </a:rPr>
+              <a:t>EVERY MONDAY IN THE BUILD UP</a:t>
+            </a:r>
+            <a:endParaRPr lang="en-GB" sz="1100" dirty="0"/>
+          </a:p>
+        </p:txBody>
+      </p:sp>
+      <p:sp>
+        <p:nvSpPr>
+          <p:cNvPr id="12" name="Text 6"/>
+          <p:cNvSpPr txBox="1"/>
+          <p:nvPr/>
+        </p:nvSpPr>
+        <p:spPr>
+          <a:xfrm>
+            <a:off x="1371600" y="2514600"/>
+            <a:ext cx="5120640" cy="548640"/>
+          </a:xfrm>
+          <a:prstGeom prst="rect">
+            <a:avLst/>
+          </a:prstGeom>
+          <a:noFill/>
+          <a:ln/>
+        </p:spPr>
+        <p:txBody>
+          <a:bodyPr wrap="square" lIns="0" tIns="0" rIns="0" bIns="0" rtlCol="0" anchor="t"/>
+          <a:lstStyle/>
+          <a:p>
+            <a:pPr indent="0" marL="0">
+              <a:buNone/>
+            </a:pPr>
+            <a:r>
+              <a:rPr lang="en-GB" altLang="en-US" sz="1400" dirty="0">
                 <a:solidFill>
                   <a:schemeClr val="tx2"/>
                 </a:solidFill>
               </a:rPr>
-              <a:t>Every figure comes from creator analytics, tracked links or ticketing data. Anything modelled is labelled estimated.</a:t>
-            </a:r>
-            <a:endParaRPr lang="en-GB" sz="1300" dirty="0"/>
+              <a:t>One page: posts live, views, top creators, ticket links used and what changes next.</a:t>
+            </a:r>
+            <a:endParaRPr lang="en-GB" sz="1400" dirty="0"/>
+          </a:p>
+        </p:txBody>
+      </p:sp>
+      <p:sp>
+        <p:nvSpPr>
+          <p:cNvPr id="13" name="Shape 7"/>
+          <p:cNvSpPr/>
+          <p:nvPr/>
+        </p:nvSpPr>
+        <p:spPr>
+          <a:xfrm>
+            <a:off x="548640" y="3063240"/>
+            <a:ext cx="594360" cy="594360"/>
+          </a:xfrm>
+          <a:prstGeom prst="ellipse">
+            <a:avLst/>
+          </a:prstGeom>
+          <a:solidFill>
+            <a:schemeClr val="accent1"/>
+          </a:solidFill>
+          <a:ln/>
+        </p:spPr>
+      </p:sp>
+      <p:pic>
+        <p:nvPicPr>
+          <p:cNvPr id="14" name="Image 3" descr="preencoded.png">    </p:cNvPr>
+          <p:cNvPicPr>
+            <a:picLocks noChangeAspect="1"/>
+          </p:cNvPicPr>
+          <p:nvPr/>
+        </p:nvPicPr>
+        <p:blipFill>
+          <a:blip r:embed="rId4"/>
+          <a:stretch>
+            <a:fillRect/>
+          </a:stretch>
+        </p:blipFill>
+        <p:spPr>
+          <a:xfrm>
+            <a:off x="691286" y="3205886"/>
+            <a:ext cx="309067" cy="309067"/>
+          </a:xfrm>
+          <a:prstGeom prst="rect">
+            <a:avLst/>
+          </a:prstGeom>
+        </p:spPr>
+      </p:pic>
+      <p:sp>
+        <p:nvSpPr>
+          <p:cNvPr id="15" name="Text 8"/>
+          <p:cNvSpPr txBox="1"/>
+          <p:nvPr/>
+        </p:nvSpPr>
+        <p:spPr>
+          <a:xfrm>
+            <a:off x="1371600" y="3026664"/>
+            <a:ext cx="5029200" cy="384048"/>
+          </a:xfrm>
+          <a:prstGeom prst="rect">
+            <a:avLst/>
+          </a:prstGeom>
+          <a:noFill/>
+          <a:ln/>
+        </p:spPr>
+        <p:txBody>
+          <a:bodyPr wrap="square" lIns="0" tIns="0" rIns="0" bIns="0" rtlCol="0" anchor="t"/>
+          <a:lstStyle/>
+          <a:p>
+            <a:pPr indent="0" marL="0">
+              <a:buNone/>
+            </a:pPr>
+            <a:r>
+              <a:rPr lang="en-GB" altLang="en-US" sz="2200" dirty="0">
+                <a:solidFill>
+                  <a:schemeClr val="tx1"/>
+                </a:solidFill>
+                <a:latin typeface="+mj-lt" pitchFamily="34" charset="0"/>
+                <a:ea typeface="+mj-lt" pitchFamily="34" charset="-122"/>
+                <a:cs typeface="+mj-lt" pitchFamily="34" charset="-120"/>
+              </a:rPr>
+              <a:t>48 hour check</a:t>
+            </a:r>
+            <a:endParaRPr lang="en-GB" sz="2200" dirty="0"/>
+          </a:p>
+        </p:txBody>
+      </p:sp>
+      <p:sp>
+        <p:nvSpPr>
+          <p:cNvPr id="16" name="Text 9"/>
+          <p:cNvSpPr txBox="1"/>
+          <p:nvPr/>
+        </p:nvSpPr>
+        <p:spPr>
+          <a:xfrm>
+            <a:off x="1371600" y="3447288"/>
+            <a:ext cx="5029200" cy="256032"/>
+          </a:xfrm>
+          <a:prstGeom prst="rect">
+            <a:avLst/>
+          </a:prstGeom>
+          <a:noFill/>
+          <a:ln/>
+        </p:spPr>
+        <p:txBody>
+          <a:bodyPr wrap="square" lIns="0" tIns="0" rIns="0" bIns="0" rtlCol="0" anchor="t"/>
+          <a:lstStyle/>
+          <a:p>
+            <a:pPr indent="0" marL="0">
+              <a:buNone/>
+            </a:pPr>
+            <a:r>
+              <a:rPr lang="en-GB" altLang="en-US" sz="1100" b="1" spc="300" kern="0" dirty="0">
+                <a:solidFill>
+                  <a:schemeClr val="accent3"/>
+                </a:solidFill>
+              </a:rPr>
+              <a:t>BY 30 DECEMBER 2026</a:t>
+            </a:r>
+            <a:endParaRPr lang="en-GB" sz="1100" dirty="0"/>
+          </a:p>
+        </p:txBody>
+      </p:sp>
+      <p:sp>
+        <p:nvSpPr>
+          <p:cNvPr id="17" name="Text 10"/>
+          <p:cNvSpPr txBox="1"/>
+          <p:nvPr/>
+        </p:nvSpPr>
+        <p:spPr>
+          <a:xfrm>
+            <a:off x="1371600" y="3749040"/>
+            <a:ext cx="5120640" cy="548640"/>
+          </a:xfrm>
+          <a:prstGeom prst="rect">
+            <a:avLst/>
+          </a:prstGeom>
+          <a:noFill/>
+          <a:ln/>
+        </p:spPr>
+        <p:txBody>
+          <a:bodyPr wrap="square" lIns="0" tIns="0" rIns="0" bIns="0" rtlCol="0" anchor="t"/>
+          <a:lstStyle/>
+          <a:p>
+            <a:pPr indent="0" marL="0">
+              <a:buNone/>
+            </a:pPr>
+            <a:r>
+              <a:rPr lang="en-GB" altLang="en-US" sz="1400" dirty="0">
+                <a:solidFill>
+                  <a:schemeClr val="tx2"/>
+                </a:solidFill>
+              </a:rPr>
+              <a:t>Who posted, where, and against which brief. Anything missing is chased.</a:t>
+            </a:r>
+            <a:endParaRPr lang="en-GB" sz="1400" dirty="0"/>
+          </a:p>
+        </p:txBody>
+      </p:sp>
+      <p:sp>
+        <p:nvSpPr>
+          <p:cNvPr id="18" name="Shape 11"/>
+          <p:cNvSpPr/>
+          <p:nvPr/>
+        </p:nvSpPr>
+        <p:spPr>
+          <a:xfrm>
+            <a:off x="548640" y="4297680"/>
+            <a:ext cx="594360" cy="594360"/>
+          </a:xfrm>
+          <a:prstGeom prst="ellipse">
+            <a:avLst/>
+          </a:prstGeom>
+          <a:solidFill>
+            <a:schemeClr val="accent1"/>
+          </a:solidFill>
+          <a:ln/>
+        </p:spPr>
+      </p:sp>
+      <p:pic>
+        <p:nvPicPr>
+          <p:cNvPr id="19" name="Image 4" descr="preencoded.png">    </p:cNvPr>
+          <p:cNvPicPr>
+            <a:picLocks noChangeAspect="1"/>
+          </p:cNvPicPr>
+          <p:nvPr/>
+        </p:nvPicPr>
+        <p:blipFill>
+          <a:blip r:embed="rId5"/>
+          <a:stretch>
+            <a:fillRect/>
+          </a:stretch>
+        </p:blipFill>
+        <p:spPr>
+          <a:xfrm>
+            <a:off x="691286" y="4440326"/>
+            <a:ext cx="309067" cy="309067"/>
+          </a:xfrm>
+          <a:prstGeom prst="rect">
+            <a:avLst/>
+          </a:prstGeom>
+        </p:spPr>
+      </p:pic>
+      <p:sp>
+        <p:nvSpPr>
+          <p:cNvPr id="20" name="Text 12"/>
+          <p:cNvSpPr txBox="1"/>
+          <p:nvPr/>
+        </p:nvSpPr>
+        <p:spPr>
+          <a:xfrm>
+            <a:off x="1371600" y="4261104"/>
+            <a:ext cx="5029200" cy="384048"/>
+          </a:xfrm>
+          <a:prstGeom prst="rect">
+            <a:avLst/>
+          </a:prstGeom>
+          <a:noFill/>
+          <a:ln/>
+        </p:spPr>
+        <p:txBody>
+          <a:bodyPr wrap="square" lIns="0" tIns="0" rIns="0" bIns="0" rtlCol="0" anchor="t"/>
+          <a:lstStyle/>
+          <a:p>
+            <a:pPr indent="0" marL="0">
+              <a:buNone/>
+            </a:pPr>
+            <a:r>
+              <a:rPr lang="en-GB" altLang="en-US" sz="2200" dirty="0">
+                <a:solidFill>
+                  <a:schemeClr val="tx1"/>
+                </a:solidFill>
+                <a:latin typeface="+mj-lt" pitchFamily="34" charset="0"/>
+                <a:ea typeface="+mj-lt" pitchFamily="34" charset="-122"/>
+                <a:cs typeface="+mj-lt" pitchFamily="34" charset="-120"/>
+              </a:rPr>
+              <a:t>Full report</a:t>
+            </a:r>
+            <a:endParaRPr lang="en-GB" sz="2200" dirty="0"/>
+          </a:p>
+        </p:txBody>
+      </p:sp>
+      <p:sp>
+        <p:nvSpPr>
+          <p:cNvPr id="21" name="Text 13"/>
+          <p:cNvSpPr txBox="1"/>
+          <p:nvPr/>
+        </p:nvSpPr>
+        <p:spPr>
+          <a:xfrm>
+            <a:off x="1371600" y="4681728"/>
+            <a:ext cx="5029200" cy="256032"/>
+          </a:xfrm>
+          <a:prstGeom prst="rect">
+            <a:avLst/>
+          </a:prstGeom>
+          <a:noFill/>
+          <a:ln/>
+        </p:spPr>
+        <p:txBody>
+          <a:bodyPr wrap="square" lIns="0" tIns="0" rIns="0" bIns="0" rtlCol="0" anchor="t"/>
+          <a:lstStyle/>
+          <a:p>
+            <a:pPr indent="0" marL="0">
+              <a:buNone/>
+            </a:pPr>
+            <a:r>
+              <a:rPr lang="en-GB" altLang="en-US" sz="1100" b="1" spc="300" kern="0" dirty="0">
+                <a:solidFill>
+                  <a:schemeClr val="accent3"/>
+                </a:solidFill>
+              </a:rPr>
+              <a:t>DAY 14, BY 11 JANUARY 2027</a:t>
+            </a:r>
+            <a:endParaRPr lang="en-GB" sz="1100" dirty="0"/>
+          </a:p>
+        </p:txBody>
+      </p:sp>
+      <p:sp>
+        <p:nvSpPr>
+          <p:cNvPr id="22" name="Text 14"/>
+          <p:cNvSpPr txBox="1"/>
+          <p:nvPr/>
+        </p:nvSpPr>
+        <p:spPr>
+          <a:xfrm>
+            <a:off x="1371600" y="4983480"/>
+            <a:ext cx="5120640" cy="548640"/>
+          </a:xfrm>
+          <a:prstGeom prst="rect">
+            <a:avLst/>
+          </a:prstGeom>
+          <a:noFill/>
+          <a:ln/>
+        </p:spPr>
+        <p:txBody>
+          <a:bodyPr wrap="square" lIns="0" tIns="0" rIns="0" bIns="0" rtlCol="0" anchor="t"/>
+          <a:lstStyle/>
+          <a:p>
+            <a:pPr indent="0" marL="0">
+              <a:buNone/>
+            </a:pPr>
+            <a:r>
+              <a:rPr lang="en-GB" altLang="en-US" sz="1400" dirty="0">
+                <a:solidFill>
+                  <a:schemeClr val="tx2"/>
+                </a:solidFill>
+              </a:rPr>
+              <a:t>Every post and figure, audiences, tickets and sponsor pages, as a PDF with a web version.</a:t>
+            </a:r>
+            <a:endParaRPr lang="en-GB" sz="1400" dirty="0"/>
+          </a:p>
+        </p:txBody>
+      </p:sp>
+      <p:sp>
+        <p:nvSpPr>
+          <p:cNvPr id="23" name="Shape 15"/>
+          <p:cNvSpPr/>
+          <p:nvPr/>
+        </p:nvSpPr>
+        <p:spPr>
+          <a:xfrm>
+            <a:off x="1371600" y="5833872"/>
+            <a:ext cx="4114800" cy="384048"/>
+          </a:xfrm>
+          <a:prstGeom prst="roundRect">
+            <a:avLst>
+              <a:gd name="adj" fmla="val 50000"/>
+            </a:avLst>
+          </a:prstGeom>
+          <a:solidFill>
+            <a:schemeClr val="bg1"/>
+          </a:solidFill>
+          <a:ln w="12700">
+            <a:solidFill>
+              <a:schemeClr val="accent3"/>
+            </a:solidFill>
+            <a:prstDash val="solid"/>
+          </a:ln>
+        </p:spPr>
+      </p:sp>
+      <p:sp>
+        <p:nvSpPr>
+          <p:cNvPr id="24" name="Text 16"/>
+          <p:cNvSpPr txBox="1"/>
+          <p:nvPr/>
+        </p:nvSpPr>
+        <p:spPr>
+          <a:xfrm>
+            <a:off x="1371600" y="5833872"/>
+            <a:ext cx="4114800" cy="384048"/>
+          </a:xfrm>
+          <a:prstGeom prst="rect">
+            <a:avLst/>
+          </a:prstGeom>
+          <a:noFill/>
+          <a:ln/>
+        </p:spPr>
+        <p:txBody>
+          <a:bodyPr wrap="square" lIns="0" tIns="0" rIns="0" bIns="0" rtlCol="0" anchor="ctr"/>
+          <a:lstStyle/>
+          <a:p>
+            <a:pPr algn="ctr" indent="0" marL="0">
+              <a:buNone/>
+            </a:pPr>
+            <a:r>
+              <a:rPr lang="en-GB" altLang="en-US" sz="1200" b="1" u="sng" dirty="0">
+                <a:solidFill>
+                  <a:schemeClr val="accent3"/>
+                </a:solidFill>
+                <a:hlinkClick r:id="rId6" action="ppaction://hlinksldjump" tooltip="Sample report, page 2">
+                  <a:extLst>
+                    <a:ext uri="{A12FA001-AC4F-418D-AE19-62706E023703}">
+                      <ahyp:hlinkClr xmlns:ahyp="http://schemas.microsoft.com/office/drawing/2018/hyperlinkcolor" val="tx"/>
+                    </a:ext>
+                  </a:extLst>
+                </a:hlinkClick>
+              </a:rPr>
+              <a:t>See page 2: the detailed breakdown  →</a:t>
+            </a:r>
+            <a:endParaRPr lang="en-GB" sz="1200" dirty="0"/>
+          </a:p>
+        </p:txBody>
+      </p:sp>
+      <p:sp>
+        <p:nvSpPr>
+          <p:cNvPr id="25" name="Sample report page 2"/>
+          <p:cNvSpPr/>
+          <p:nvPr/>
+        </p:nvSpPr>
+        <p:spPr>
+          <a:xfrm>
+            <a:off x="6949440" y="1874520"/>
+            <a:ext cx="4690872" cy="4343400"/>
+          </a:xfrm>
+          <a:prstGeom prst="roundRect">
+            <a:avLst>
+              <a:gd name="adj" fmla="val 1684"/>
+            </a:avLst>
+          </a:prstGeom>
+          <a:solidFill>
+            <a:schemeClr val="bg1"/>
+          </a:solidFill>
+          <a:ln w="9525">
+            <a:solidFill>
+              <a:schemeClr val="tx2">
+                <a:alpha val="40000"/>
+              </a:schemeClr>
+            </a:solidFill>
+            <a:prstDash val="solid"/>
+          </a:ln>
+        </p:spPr>
+      </p:sp>
+      <p:sp>
+        <p:nvSpPr>
+          <p:cNvPr id="26" name="Shape 18"/>
+          <p:cNvSpPr/>
+          <p:nvPr/>
+        </p:nvSpPr>
+        <p:spPr>
+          <a:xfrm>
+            <a:off x="6812280" y="1737360"/>
+            <a:ext cx="4690872" cy="4343400"/>
+          </a:xfrm>
+          <a:prstGeom prst="roundRect">
+            <a:avLst>
+              <a:gd name="adj" fmla="val 1684"/>
+            </a:avLst>
+          </a:prstGeom>
+          <a:solidFill>
+            <a:schemeClr val="bg1"/>
+          </a:solidFill>
+          <a:ln w="9525">
+            <a:solidFill>
+              <a:schemeClr val="tx2">
+                <a:alpha val="28000"/>
+              </a:schemeClr>
+            </a:solidFill>
+            <a:prstDash val="solid"/>
+          </a:ln>
+          <a:effectLst>
+            <a:outerShdw sx="100000" sy="100000" kx="0" ky="0" algn="bl" rotWithShape="0" blurRad="127000" dist="38100" dir="5400000">
+              <a:srgbClr val="133524">
+                <a:alpha val="10000"/>
+              </a:srgbClr>
+            </a:outerShdw>
+          </a:effectLst>
+        </p:spPr>
+      </p:sp>
+      <p:sp>
+        <p:nvSpPr>
+          <p:cNvPr id="27" name="Text 19"/>
+          <p:cNvSpPr txBox="1"/>
+          <p:nvPr/>
+        </p:nvSpPr>
+        <p:spPr>
+          <a:xfrm>
+            <a:off x="7086600" y="1965960"/>
+            <a:ext cx="3291840" cy="201168"/>
+          </a:xfrm>
+          <a:prstGeom prst="rect">
+            <a:avLst/>
+          </a:prstGeom>
+          <a:noFill/>
+          <a:ln/>
+        </p:spPr>
+        <p:txBody>
+          <a:bodyPr wrap="square" lIns="0" tIns="0" rIns="0" bIns="0" rtlCol="0" anchor="t"/>
+          <a:lstStyle/>
+          <a:p>
+            <a:pPr indent="0" marL="0">
+              <a:buNone/>
+            </a:pPr>
+            <a:r>
+              <a:rPr lang="en-GB" altLang="en-US" sz="900" b="1" spc="300" kern="0" dirty="0">
+                <a:solidFill>
+                  <a:schemeClr val="accent3"/>
+                </a:solidFill>
+              </a:rPr>
+              <a:t>VISIBILITY REPORT  ·  PAGE 1</a:t>
+            </a:r>
+            <a:endParaRPr lang="en-GB" sz="900" dirty="0"/>
+          </a:p>
+        </p:txBody>
+      </p:sp>
+      <p:sp>
+        <p:nvSpPr>
+          <p:cNvPr id="28" name="Text 20"/>
+          <p:cNvSpPr txBox="1"/>
+          <p:nvPr/>
+        </p:nvSpPr>
+        <p:spPr>
+          <a:xfrm>
+            <a:off x="7086600" y="2167128"/>
+            <a:ext cx="3657600" cy="365760"/>
+          </a:xfrm>
+          <a:prstGeom prst="rect">
+            <a:avLst/>
+          </a:prstGeom>
+          <a:noFill/>
+          <a:ln/>
+        </p:spPr>
+        <p:txBody>
+          <a:bodyPr wrap="square" lIns="0" tIns="0" rIns="0" bIns="0" rtlCol="0" anchor="t"/>
+          <a:lstStyle/>
+          <a:p>
+            <a:pPr indent="0" marL="0">
+              <a:buNone/>
+            </a:pPr>
+            <a:r>
+              <a:rPr lang="en-GB" altLang="en-US" sz="1800" dirty="0">
+                <a:solidFill>
+                  <a:schemeClr val="tx1"/>
+                </a:solidFill>
+                <a:latin typeface="+mj-lt" pitchFamily="34" charset="0"/>
+                <a:ea typeface="+mj-lt" pitchFamily="34" charset="-122"/>
+                <a:cs typeface="+mj-lt" pitchFamily="34" charset="-120"/>
+              </a:rPr>
+              <a:t>Mother Africa Festival 2026</a:t>
+            </a:r>
+            <a:endParaRPr lang="en-GB" sz="1800" dirty="0"/>
+          </a:p>
+        </p:txBody>
+      </p:sp>
+      <p:pic>
+        <p:nvPicPr>
+          <p:cNvPr id="29" name="Image 5" descr="Mother Africa Festival">    </p:cNvPr>
+          <p:cNvPicPr>
+            <a:picLocks noChangeAspect="1"/>
+          </p:cNvPicPr>
+          <p:nvPr/>
+        </p:nvPicPr>
+        <p:blipFill>
+          <a:blip r:embed="rId7"/>
+          <a:stretch>
+            <a:fillRect/>
+          </a:stretch>
+        </p:blipFill>
+        <p:spPr>
+          <a:xfrm>
+            <a:off x="10725912" y="1965960"/>
+            <a:ext cx="541249" cy="384048"/>
+          </a:xfrm>
+          <a:prstGeom prst="rect">
+            <a:avLst/>
+          </a:prstGeom>
+        </p:spPr>
+      </p:pic>
+      <p:sp>
+        <p:nvSpPr>
+          <p:cNvPr id="30" name="Shape 21"/>
+          <p:cNvSpPr/>
+          <p:nvPr/>
+        </p:nvSpPr>
+        <p:spPr>
+          <a:xfrm>
+            <a:off x="7086600" y="2606040"/>
+            <a:ext cx="4142232" cy="0"/>
+          </a:xfrm>
+          <a:prstGeom prst="line">
+            <a:avLst/>
+          </a:prstGeom>
+          <a:noFill/>
+          <a:ln w="12700">
+            <a:solidFill>
+              <a:schemeClr val="accent1"/>
+            </a:solidFill>
+            <a:prstDash val="solid"/>
+          </a:ln>
+        </p:spPr>
+      </p:sp>
+      <p:sp>
+        <p:nvSpPr>
+          <p:cNvPr id="31" name="Shape 22"/>
+          <p:cNvSpPr/>
+          <p:nvPr/>
+        </p:nvSpPr>
+        <p:spPr>
+          <a:xfrm>
+            <a:off x="7086600" y="2788920"/>
+            <a:ext cx="2011680" cy="731520"/>
+          </a:xfrm>
+          <a:prstGeom prst="roundRect">
+            <a:avLst>
+              <a:gd name="adj" fmla="val 7500"/>
+            </a:avLst>
+          </a:prstGeom>
+          <a:solidFill>
+            <a:schemeClr val="bg2"/>
+          </a:solidFill>
+          <a:ln/>
+        </p:spPr>
+      </p:sp>
+      <p:sp>
+        <p:nvSpPr>
+          <p:cNvPr id="32" name="Text 23"/>
+          <p:cNvSpPr txBox="1"/>
+          <p:nvPr/>
+        </p:nvSpPr>
+        <p:spPr>
+          <a:xfrm>
+            <a:off x="7251192" y="2862072"/>
+            <a:ext cx="1737360" cy="347472"/>
+          </a:xfrm>
+          <a:prstGeom prst="rect">
+            <a:avLst/>
+          </a:prstGeom>
+          <a:noFill/>
+          <a:ln/>
+        </p:spPr>
+        <p:txBody>
+          <a:bodyPr wrap="square" lIns="0" tIns="0" rIns="0" bIns="0" rtlCol="0" anchor="t"/>
+          <a:lstStyle/>
+          <a:p>
+            <a:pPr indent="0" marL="0">
+              <a:buNone/>
+            </a:pPr>
+            <a:r>
+              <a:rPr lang="en-GB" altLang="en-US" sz="1800" b="1" dirty="0">
+                <a:solidFill>
+                  <a:schemeClr val="tx1"/>
+                </a:solidFill>
+              </a:rPr>
+              <a:t>3,200,000</a:t>
+            </a:r>
+            <a:endParaRPr lang="en-GB" sz="1800" dirty="0"/>
+          </a:p>
+        </p:txBody>
+      </p:sp>
+      <p:sp>
+        <p:nvSpPr>
+          <p:cNvPr id="33" name="Text 24"/>
+          <p:cNvSpPr txBox="1"/>
+          <p:nvPr/>
+        </p:nvSpPr>
+        <p:spPr>
+          <a:xfrm>
+            <a:off x="7251192" y="3227832"/>
+            <a:ext cx="1783080" cy="201168"/>
+          </a:xfrm>
+          <a:prstGeom prst="rect">
+            <a:avLst/>
+          </a:prstGeom>
+          <a:noFill/>
+          <a:ln/>
+        </p:spPr>
+        <p:txBody>
+          <a:bodyPr wrap="square" lIns="0" tIns="0" rIns="0" bIns="0" rtlCol="0" anchor="t"/>
+          <a:lstStyle/>
+          <a:p>
+            <a:pPr indent="0" marL="0">
+              <a:buNone/>
+            </a:pPr>
+            <a:r>
+              <a:rPr lang="en-GB" altLang="en-US" sz="1000" dirty="0">
+                <a:solidFill>
+                  <a:schemeClr val="tx2"/>
+                </a:solidFill>
+              </a:rPr>
+              <a:t>Total views</a:t>
+            </a:r>
+            <a:endParaRPr lang="en-GB" sz="1000" dirty="0"/>
+          </a:p>
+        </p:txBody>
+      </p:sp>
+      <p:sp>
+        <p:nvSpPr>
+          <p:cNvPr id="34" name="Shape 25"/>
+          <p:cNvSpPr/>
+          <p:nvPr/>
+        </p:nvSpPr>
+        <p:spPr>
+          <a:xfrm>
+            <a:off x="9208008" y="2788920"/>
+            <a:ext cx="2011680" cy="731520"/>
+          </a:xfrm>
+          <a:prstGeom prst="roundRect">
+            <a:avLst>
+              <a:gd name="adj" fmla="val 7500"/>
+            </a:avLst>
+          </a:prstGeom>
+          <a:solidFill>
+            <a:schemeClr val="bg2"/>
+          </a:solidFill>
+          <a:ln/>
+        </p:spPr>
+      </p:sp>
+      <p:sp>
+        <p:nvSpPr>
+          <p:cNvPr id="35" name="Text 26"/>
+          <p:cNvSpPr txBox="1"/>
+          <p:nvPr/>
+        </p:nvSpPr>
+        <p:spPr>
+          <a:xfrm>
+            <a:off x="9372600" y="2862072"/>
+            <a:ext cx="1737360" cy="347472"/>
+          </a:xfrm>
+          <a:prstGeom prst="rect">
+            <a:avLst/>
+          </a:prstGeom>
+          <a:noFill/>
+          <a:ln/>
+        </p:spPr>
+        <p:txBody>
+          <a:bodyPr wrap="square" lIns="0" tIns="0" rIns="0" bIns="0" rtlCol="0" anchor="t"/>
+          <a:lstStyle/>
+          <a:p>
+            <a:pPr indent="0" marL="0">
+              <a:buNone/>
+            </a:pPr>
+            <a:r>
+              <a:rPr lang="en-GB" altLang="en-US" sz="1800" b="1" dirty="0">
+                <a:solidFill>
+                  <a:schemeClr val="tx1"/>
+                </a:solidFill>
+              </a:rPr>
+              <a:t>1,450,000</a:t>
+            </a:r>
+            <a:endParaRPr lang="en-GB" sz="1800" dirty="0"/>
+          </a:p>
+        </p:txBody>
+      </p:sp>
+      <p:sp>
+        <p:nvSpPr>
+          <p:cNvPr id="36" name="Text 27"/>
+          <p:cNvSpPr txBox="1"/>
+          <p:nvPr/>
+        </p:nvSpPr>
+        <p:spPr>
+          <a:xfrm>
+            <a:off x="9372600" y="3227832"/>
+            <a:ext cx="1783080" cy="201168"/>
+          </a:xfrm>
+          <a:prstGeom prst="rect">
+            <a:avLst/>
+          </a:prstGeom>
+          <a:noFill/>
+          <a:ln/>
+        </p:spPr>
+        <p:txBody>
+          <a:bodyPr wrap="square" lIns="0" tIns="0" rIns="0" bIns="0" rtlCol="0" anchor="t"/>
+          <a:lstStyle/>
+          <a:p>
+            <a:pPr indent="0" marL="0">
+              <a:buNone/>
+            </a:pPr>
+            <a:r>
+              <a:rPr lang="en-GB" altLang="en-US" sz="1000" dirty="0">
+                <a:solidFill>
+                  <a:schemeClr val="tx2"/>
+                </a:solidFill>
+              </a:rPr>
+              <a:t>Accounts reached</a:t>
+            </a:r>
+            <a:endParaRPr lang="en-GB" sz="1000" dirty="0"/>
+          </a:p>
+        </p:txBody>
+      </p:sp>
+      <p:sp>
+        <p:nvSpPr>
+          <p:cNvPr id="37" name="Shape 28"/>
+          <p:cNvSpPr/>
+          <p:nvPr/>
+        </p:nvSpPr>
+        <p:spPr>
+          <a:xfrm>
+            <a:off x="7086600" y="3657600"/>
+            <a:ext cx="2011680" cy="731520"/>
+          </a:xfrm>
+          <a:prstGeom prst="roundRect">
+            <a:avLst>
+              <a:gd name="adj" fmla="val 7500"/>
+            </a:avLst>
+          </a:prstGeom>
+          <a:solidFill>
+            <a:schemeClr val="bg2"/>
+          </a:solidFill>
+          <a:ln/>
+        </p:spPr>
+      </p:sp>
+      <p:sp>
+        <p:nvSpPr>
+          <p:cNvPr id="38" name="Text 29"/>
+          <p:cNvSpPr txBox="1"/>
+          <p:nvPr/>
+        </p:nvSpPr>
+        <p:spPr>
+          <a:xfrm>
+            <a:off x="7251192" y="3730752"/>
+            <a:ext cx="1737360" cy="347472"/>
+          </a:xfrm>
+          <a:prstGeom prst="rect">
+            <a:avLst/>
+          </a:prstGeom>
+          <a:noFill/>
+          <a:ln/>
+        </p:spPr>
+        <p:txBody>
+          <a:bodyPr wrap="square" lIns="0" tIns="0" rIns="0" bIns="0" rtlCol="0" anchor="t"/>
+          <a:lstStyle/>
+          <a:p>
+            <a:pPr indent="0" marL="0">
+              <a:buNone/>
+            </a:pPr>
+            <a:r>
+              <a:rPr lang="en-GB" altLang="en-US" sz="1800" b="1" dirty="0">
+                <a:solidFill>
+                  <a:schemeClr val="tx1"/>
+                </a:solidFill>
+              </a:rPr>
+              <a:t>64</a:t>
+            </a:r>
+            <a:endParaRPr lang="en-GB" sz="1800" dirty="0"/>
+          </a:p>
+        </p:txBody>
+      </p:sp>
+      <p:sp>
+        <p:nvSpPr>
+          <p:cNvPr id="39" name="Text 30"/>
+          <p:cNvSpPr txBox="1"/>
+          <p:nvPr/>
+        </p:nvSpPr>
+        <p:spPr>
+          <a:xfrm>
+            <a:off x="7251192" y="4096512"/>
+            <a:ext cx="1783080" cy="201168"/>
+          </a:xfrm>
+          <a:prstGeom prst="rect">
+            <a:avLst/>
+          </a:prstGeom>
+          <a:noFill/>
+          <a:ln/>
+        </p:spPr>
+        <p:txBody>
+          <a:bodyPr wrap="square" lIns="0" tIns="0" rIns="0" bIns="0" rtlCol="0" anchor="t"/>
+          <a:lstStyle/>
+          <a:p>
+            <a:pPr indent="0" marL="0">
+              <a:buNone/>
+            </a:pPr>
+            <a:r>
+              <a:rPr lang="en-GB" altLang="en-US" sz="1000" dirty="0">
+                <a:solidFill>
+                  <a:schemeClr val="tx2"/>
+                </a:solidFill>
+              </a:rPr>
+              <a:t>Posts checked against the brief</a:t>
+            </a:r>
+            <a:endParaRPr lang="en-GB" sz="1000" dirty="0"/>
+          </a:p>
+        </p:txBody>
+      </p:sp>
+      <p:sp>
+        <p:nvSpPr>
+          <p:cNvPr id="40" name="Shape 31"/>
+          <p:cNvSpPr/>
+          <p:nvPr/>
+        </p:nvSpPr>
+        <p:spPr>
+          <a:xfrm>
+            <a:off x="9208008" y="3657600"/>
+            <a:ext cx="2011680" cy="731520"/>
+          </a:xfrm>
+          <a:prstGeom prst="roundRect">
+            <a:avLst>
+              <a:gd name="adj" fmla="val 7500"/>
+            </a:avLst>
+          </a:prstGeom>
+          <a:solidFill>
+            <a:schemeClr val="bg2"/>
+          </a:solidFill>
+          <a:ln/>
+        </p:spPr>
+      </p:sp>
+      <p:sp>
+        <p:nvSpPr>
+          <p:cNvPr id="41" name="Text 32"/>
+          <p:cNvSpPr txBox="1"/>
+          <p:nvPr/>
+        </p:nvSpPr>
+        <p:spPr>
+          <a:xfrm>
+            <a:off x="9372600" y="3730752"/>
+            <a:ext cx="1737360" cy="347472"/>
+          </a:xfrm>
+          <a:prstGeom prst="rect">
+            <a:avLst/>
+          </a:prstGeom>
+          <a:noFill/>
+          <a:ln/>
+        </p:spPr>
+        <p:txBody>
+          <a:bodyPr wrap="square" lIns="0" tIns="0" rIns="0" bIns="0" rtlCol="0" anchor="t"/>
+          <a:lstStyle/>
+          <a:p>
+            <a:pPr indent="0" marL="0">
+              <a:buNone/>
+            </a:pPr>
+            <a:r>
+              <a:rPr lang="en-GB" altLang="en-US" sz="1800" b="1" dirty="0">
+                <a:solidFill>
+                  <a:schemeClr val="tx1"/>
+                </a:solidFill>
+              </a:rPr>
+              <a:t>18</a:t>
+            </a:r>
+            <a:endParaRPr lang="en-GB" sz="1800" dirty="0"/>
+          </a:p>
+        </p:txBody>
+      </p:sp>
+      <p:sp>
+        <p:nvSpPr>
+          <p:cNvPr id="42" name="Text 33"/>
+          <p:cNvSpPr txBox="1"/>
+          <p:nvPr/>
+        </p:nvSpPr>
+        <p:spPr>
+          <a:xfrm>
+            <a:off x="9372600" y="4096512"/>
+            <a:ext cx="1783080" cy="201168"/>
+          </a:xfrm>
+          <a:prstGeom prst="rect">
+            <a:avLst/>
+          </a:prstGeom>
+          <a:noFill/>
+          <a:ln/>
+        </p:spPr>
+        <p:txBody>
+          <a:bodyPr wrap="square" lIns="0" tIns="0" rIns="0" bIns="0" rtlCol="0" anchor="t"/>
+          <a:lstStyle/>
+          <a:p>
+            <a:pPr indent="0" marL="0">
+              <a:buNone/>
+            </a:pPr>
+            <a:r>
+              <a:rPr lang="en-GB" altLang="en-US" sz="1000" dirty="0">
+                <a:solidFill>
+                  <a:schemeClr val="tx2"/>
+                </a:solidFill>
+              </a:rPr>
+              <a:t>Creators</a:t>
+            </a:r>
+            <a:endParaRPr lang="en-GB" sz="1000" dirty="0"/>
+          </a:p>
+        </p:txBody>
+      </p:sp>
+      <p:sp>
+        <p:nvSpPr>
+          <p:cNvPr id="43" name="Text 34"/>
+          <p:cNvSpPr txBox="1"/>
+          <p:nvPr/>
+        </p:nvSpPr>
+        <p:spPr>
+          <a:xfrm>
+            <a:off x="7086600" y="4572000"/>
+            <a:ext cx="2743200" cy="201168"/>
+          </a:xfrm>
+          <a:prstGeom prst="rect">
+            <a:avLst/>
+          </a:prstGeom>
+          <a:noFill/>
+          <a:ln/>
+        </p:spPr>
+        <p:txBody>
+          <a:bodyPr wrap="square" lIns="0" tIns="0" rIns="0" bIns="0" rtlCol="0" anchor="t"/>
+          <a:lstStyle/>
+          <a:p>
+            <a:pPr indent="0" marL="0">
+              <a:buNone/>
+            </a:pPr>
+            <a:r>
+              <a:rPr lang="en-GB" altLang="en-US" sz="900" b="1" spc="300" kern="0" dirty="0">
+                <a:solidFill>
+                  <a:schemeClr val="accent3"/>
+                </a:solidFill>
+              </a:rPr>
+              <a:t>VIEWS BY PLATFORM</a:t>
+            </a:r>
+            <a:endParaRPr lang="en-GB" sz="900" dirty="0"/>
+          </a:p>
+        </p:txBody>
+      </p:sp>
+      <p:sp>
+        <p:nvSpPr>
+          <p:cNvPr id="44" name="Text 35"/>
+          <p:cNvSpPr txBox="1"/>
+          <p:nvPr/>
+        </p:nvSpPr>
+        <p:spPr>
+          <a:xfrm>
+            <a:off x="7086600" y="4864608"/>
+            <a:ext cx="1005840" cy="219456"/>
+          </a:xfrm>
+          <a:prstGeom prst="rect">
+            <a:avLst/>
+          </a:prstGeom>
+          <a:noFill/>
+          <a:ln/>
+        </p:spPr>
+        <p:txBody>
+          <a:bodyPr wrap="square" lIns="0" tIns="0" rIns="0" bIns="0" rtlCol="0" anchor="ctr"/>
+          <a:lstStyle/>
+          <a:p>
+            <a:pPr indent="0" marL="0">
+              <a:buNone/>
+            </a:pPr>
+            <a:r>
+              <a:rPr lang="en-GB" altLang="en-US" sz="1000" dirty="0">
+                <a:solidFill>
+                  <a:schemeClr val="tx2"/>
+                </a:solidFill>
+              </a:rPr>
+              <a:t>Instagram</a:t>
+            </a:r>
+            <a:endParaRPr lang="en-GB" sz="1000" dirty="0"/>
+          </a:p>
+        </p:txBody>
+      </p:sp>
+      <p:sp>
+        <p:nvSpPr>
+          <p:cNvPr id="45" name="Shape 36"/>
+          <p:cNvSpPr/>
+          <p:nvPr/>
+        </p:nvSpPr>
+        <p:spPr>
+          <a:xfrm>
+            <a:off x="8138160" y="4901184"/>
+            <a:ext cx="2468880" cy="146304"/>
+          </a:xfrm>
+          <a:prstGeom prst="roundRect">
+            <a:avLst>
+              <a:gd name="adj" fmla="val 18750"/>
+            </a:avLst>
+          </a:prstGeom>
+          <a:solidFill>
+            <a:schemeClr val="accent2"/>
+          </a:solidFill>
+          <a:ln/>
+        </p:spPr>
+      </p:sp>
+      <p:sp>
+        <p:nvSpPr>
+          <p:cNvPr id="46" name="Text 37"/>
+          <p:cNvSpPr txBox="1"/>
+          <p:nvPr/>
+        </p:nvSpPr>
+        <p:spPr>
+          <a:xfrm>
+            <a:off x="10698480" y="4864608"/>
+            <a:ext cx="548640" cy="219456"/>
+          </a:xfrm>
+          <a:prstGeom prst="rect">
+            <a:avLst/>
+          </a:prstGeom>
+          <a:noFill/>
+          <a:ln/>
+        </p:spPr>
+        <p:txBody>
+          <a:bodyPr wrap="square" lIns="0" tIns="0" rIns="0" bIns="0" rtlCol="0" anchor="ctr"/>
+          <a:lstStyle/>
+          <a:p>
+            <a:pPr indent="0" marL="0">
+              <a:buNone/>
+            </a:pPr>
+            <a:r>
+              <a:rPr lang="en-GB" altLang="en-US" sz="1000" b="1" dirty="0">
+                <a:solidFill>
+                  <a:schemeClr val="tx1"/>
+                </a:solidFill>
+              </a:rPr>
+              <a:t>52%</a:t>
+            </a:r>
+            <a:endParaRPr lang="en-GB" sz="1000" dirty="0"/>
+          </a:p>
+        </p:txBody>
+      </p:sp>
+      <p:sp>
+        <p:nvSpPr>
+          <p:cNvPr id="47" name="Text 38"/>
+          <p:cNvSpPr txBox="1"/>
+          <p:nvPr/>
+        </p:nvSpPr>
+        <p:spPr>
+          <a:xfrm>
+            <a:off x="7086600" y="5193792"/>
+            <a:ext cx="1005840" cy="219456"/>
+          </a:xfrm>
+          <a:prstGeom prst="rect">
+            <a:avLst/>
+          </a:prstGeom>
+          <a:noFill/>
+          <a:ln/>
+        </p:spPr>
+        <p:txBody>
+          <a:bodyPr wrap="square" lIns="0" tIns="0" rIns="0" bIns="0" rtlCol="0" anchor="ctr"/>
+          <a:lstStyle/>
+          <a:p>
+            <a:pPr indent="0" marL="0">
+              <a:buNone/>
+            </a:pPr>
+            <a:r>
+              <a:rPr lang="en-GB" altLang="en-US" sz="1000" dirty="0">
+                <a:solidFill>
+                  <a:schemeClr val="tx2"/>
+                </a:solidFill>
+              </a:rPr>
+              <a:t>TikTok</a:t>
+            </a:r>
+            <a:endParaRPr lang="en-GB" sz="1000" dirty="0"/>
+          </a:p>
+        </p:txBody>
+      </p:sp>
+      <p:sp>
+        <p:nvSpPr>
+          <p:cNvPr id="48" name="Shape 39"/>
+          <p:cNvSpPr/>
+          <p:nvPr/>
+        </p:nvSpPr>
+        <p:spPr>
+          <a:xfrm>
+            <a:off x="8138160" y="5230368"/>
+            <a:ext cx="1804182" cy="146304"/>
+          </a:xfrm>
+          <a:prstGeom prst="roundRect">
+            <a:avLst>
+              <a:gd name="adj" fmla="val 18750"/>
+            </a:avLst>
+          </a:prstGeom>
+          <a:solidFill>
+            <a:schemeClr val="accent1"/>
+          </a:solidFill>
+          <a:ln/>
+        </p:spPr>
+      </p:sp>
+      <p:sp>
+        <p:nvSpPr>
+          <p:cNvPr id="49" name="Text 40"/>
+          <p:cNvSpPr txBox="1"/>
+          <p:nvPr/>
+        </p:nvSpPr>
+        <p:spPr>
+          <a:xfrm>
+            <a:off x="10033782" y="5193792"/>
+            <a:ext cx="548640" cy="219456"/>
+          </a:xfrm>
+          <a:prstGeom prst="rect">
+            <a:avLst/>
+          </a:prstGeom>
+          <a:noFill/>
+          <a:ln/>
+        </p:spPr>
+        <p:txBody>
+          <a:bodyPr wrap="square" lIns="0" tIns="0" rIns="0" bIns="0" rtlCol="0" anchor="ctr"/>
+          <a:lstStyle/>
+          <a:p>
+            <a:pPr indent="0" marL="0">
+              <a:buNone/>
+            </a:pPr>
+            <a:r>
+              <a:rPr lang="en-GB" altLang="en-US" sz="1000" b="1" dirty="0">
+                <a:solidFill>
+                  <a:schemeClr val="tx1"/>
+                </a:solidFill>
+              </a:rPr>
+              <a:t>38%</a:t>
+            </a:r>
+            <a:endParaRPr lang="en-GB" sz="1000" dirty="0"/>
+          </a:p>
+        </p:txBody>
+      </p:sp>
+      <p:sp>
+        <p:nvSpPr>
+          <p:cNvPr id="50" name="Text 41"/>
+          <p:cNvSpPr txBox="1"/>
+          <p:nvPr/>
+        </p:nvSpPr>
+        <p:spPr>
+          <a:xfrm>
+            <a:off x="7086600" y="5522976"/>
+            <a:ext cx="1005840" cy="219456"/>
+          </a:xfrm>
+          <a:prstGeom prst="rect">
+            <a:avLst/>
+          </a:prstGeom>
+          <a:noFill/>
+          <a:ln/>
+        </p:spPr>
+        <p:txBody>
+          <a:bodyPr wrap="square" lIns="0" tIns="0" rIns="0" bIns="0" rtlCol="0" anchor="ctr"/>
+          <a:lstStyle/>
+          <a:p>
+            <a:pPr indent="0" marL="0">
+              <a:buNone/>
+            </a:pPr>
+            <a:r>
+              <a:rPr lang="en-GB" altLang="en-US" sz="1000" dirty="0">
+                <a:solidFill>
+                  <a:schemeClr val="tx2"/>
+                </a:solidFill>
+              </a:rPr>
+              <a:t>YouTube</a:t>
+            </a:r>
+            <a:endParaRPr lang="en-GB" sz="1000" dirty="0"/>
+          </a:p>
+        </p:txBody>
+      </p:sp>
+      <p:sp>
+        <p:nvSpPr>
+          <p:cNvPr id="51" name="Shape 42"/>
+          <p:cNvSpPr/>
+          <p:nvPr/>
+        </p:nvSpPr>
+        <p:spPr>
+          <a:xfrm>
+            <a:off x="8138160" y="5559552"/>
+            <a:ext cx="474785" cy="146304"/>
+          </a:xfrm>
+          <a:prstGeom prst="roundRect">
+            <a:avLst>
+              <a:gd name="adj" fmla="val 18750"/>
+            </a:avLst>
+          </a:prstGeom>
+          <a:solidFill>
+            <a:schemeClr val="accent1"/>
+          </a:solidFill>
+          <a:ln/>
+        </p:spPr>
+      </p:sp>
+      <p:sp>
+        <p:nvSpPr>
+          <p:cNvPr id="52" name="Text 43"/>
+          <p:cNvSpPr txBox="1"/>
+          <p:nvPr/>
+        </p:nvSpPr>
+        <p:spPr>
+          <a:xfrm>
+            <a:off x="8704385" y="5522976"/>
+            <a:ext cx="548640" cy="219456"/>
+          </a:xfrm>
+          <a:prstGeom prst="rect">
+            <a:avLst/>
+          </a:prstGeom>
+          <a:noFill/>
+          <a:ln/>
+        </p:spPr>
+        <p:txBody>
+          <a:bodyPr wrap="square" lIns="0" tIns="0" rIns="0" bIns="0" rtlCol="0" anchor="ctr"/>
+          <a:lstStyle/>
+          <a:p>
+            <a:pPr indent="0" marL="0">
+              <a:buNone/>
+            </a:pPr>
+            <a:r>
+              <a:rPr lang="en-GB" altLang="en-US" sz="1000" b="1" dirty="0">
+                <a:solidFill>
+                  <a:schemeClr val="tx1"/>
+                </a:solidFill>
+              </a:rPr>
+              <a:t>10%</a:t>
+            </a:r>
+            <a:endParaRPr lang="en-GB" sz="1000" dirty="0"/>
+          </a:p>
+        </p:txBody>
+      </p:sp>
+      <p:sp>
+        <p:nvSpPr>
+          <p:cNvPr id="53" name="Text 44"/>
+          <p:cNvSpPr txBox="1"/>
+          <p:nvPr/>
+        </p:nvSpPr>
+        <p:spPr>
+          <a:xfrm>
+            <a:off x="7086600" y="5779008"/>
+            <a:ext cx="2926080" cy="201168"/>
+          </a:xfrm>
+          <a:prstGeom prst="rect">
+            <a:avLst/>
+          </a:prstGeom>
+          <a:noFill/>
+          <a:ln/>
+        </p:spPr>
+        <p:txBody>
+          <a:bodyPr wrap="square" lIns="0" tIns="0" rIns="0" bIns="0" rtlCol="0" anchor="t"/>
+          <a:lstStyle/>
+          <a:p>
+            <a:pPr indent="0" marL="0">
+              <a:buNone/>
+            </a:pPr>
+            <a:r>
+              <a:rPr lang="en-GB" altLang="en-US" sz="1000" b="1" i="1" dirty="0">
+                <a:solidFill>
+                  <a:schemeClr val="accent3"/>
+                </a:solidFill>
+              </a:rPr>
+              <a:t>Sample layout. Figures are illustrative.</a:t>
+            </a:r>
+            <a:endParaRPr lang="en-GB" sz="1000" dirty="0"/>
+          </a:p>
+        </p:txBody>
+      </p:sp>
+      <p:sp>
+        <p:nvSpPr>
+          <p:cNvPr id="54" name="Text 45"/>
+          <p:cNvSpPr txBox="1"/>
+          <p:nvPr/>
+        </p:nvSpPr>
+        <p:spPr>
+          <a:xfrm>
+            <a:off x="10222992" y="5779008"/>
+            <a:ext cx="1005840" cy="201168"/>
+          </a:xfrm>
+          <a:prstGeom prst="rect">
+            <a:avLst/>
+          </a:prstGeom>
+          <a:noFill/>
+          <a:ln/>
+        </p:spPr>
+        <p:txBody>
+          <a:bodyPr wrap="square" lIns="0" tIns="0" rIns="0" bIns="0" rtlCol="0" anchor="t"/>
+          <a:lstStyle/>
+          <a:p>
+            <a:pPr algn="r" indent="0" marL="0">
+              <a:buNone/>
+            </a:pPr>
+            <a:r>
+              <a:rPr lang="en-GB" altLang="en-US" sz="1000" b="1" u="sng" dirty="0">
+                <a:solidFill>
+                  <a:schemeClr val="accent3"/>
+                </a:solidFill>
+                <a:hlinkClick r:id="rId8" action="ppaction://hlinksldjump" tooltip="Sample report, page 2">
+                  <a:extLst>
+                    <a:ext uri="{A12FA001-AC4F-418D-AE19-62706E023703}">
+                      <ahyp:hlinkClr xmlns:ahyp="http://schemas.microsoft.com/office/drawing/2018/hyperlinkcolor" val="tx"/>
+                    </a:ext>
+                  </a:extLst>
+                </a:hlinkClick>
+              </a:rPr>
+              <a:t>Page 2  →</a:t>
+            </a:r>
+            <a:endParaRPr lang="en-GB" sz="1000" dirty="0"/>
           </a:p>
         </p:txBody>
       </p:sp>
@@ -19275,7 +19417,7 @@
                   <a:schemeClr val="accent3"/>
                 </a:solidFill>
               </a:rPr>
-              <a:t>THE VISIBILITY REPORT</a:t>
+              <a:t>THE PROPOSAL</a:t>
             </a:r>
             <a:endParaRPr lang="en-GB" sz="1100" dirty="0"/>
           </a:p>
@@ -19313,7 +19455,7 @@
                   <a:schemeClr val="tx1"/>
                 </a:solidFill>
               </a:rPr>
-              <a:t>Reports on fixed dates</a:t>
+              <a:t>A trial at the 5th edition. One full report</a:t>
             </a:r>
             <a:endParaRPr lang="en-GB" sz="3800" dirty="0"/>
           </a:p>
@@ -19405,16 +19547,55 @@
       </p:pic>
       <p:sp>
         <p:nvSpPr>
-          <p:cNvPr id="8" name="Shape 3"/>
+          <p:cNvPr id="8" name="Text 3"/>
+          <p:cNvSpPr txBox="1"/>
+          <p:nvPr/>
+        </p:nvSpPr>
+        <p:spPr>
+          <a:xfrm>
+            <a:off x="548640" y="1783080"/>
+            <a:ext cx="6492240" cy="868680"/>
+          </a:xfrm>
+          <a:prstGeom prst="rect">
+            <a:avLst/>
+          </a:prstGeom>
+          <a:noFill/>
+          <a:ln/>
+        </p:spPr>
+        <p:txBody>
+          <a:bodyPr wrap="square" lIns="0" tIns="0" rIns="0" bIns="0" rtlCol="0" anchor="t"/>
+          <a:lstStyle/>
+          <a:p>
+            <a:pPr indent="0" marL="0">
+              <a:lnSpc>
+                <a:spcPct val="110000"/>
+              </a:lnSpc>
+              <a:buNone/>
+            </a:pPr>
+            <a:r>
+              <a:rPr lang="en-GB" altLang="en-US" sz="1600" dirty="0">
+                <a:solidFill>
+                  <a:schemeClr val="tx2"/>
+                </a:solidFill>
+              </a:rPr>
+              <a:t>AToure manages the creator activation for the 5th edition and delivers a full visibility report on the festival, built to go to sponsors and partners.</a:t>
+            </a:r>
+            <a:endParaRPr lang="en-GB" sz="1600" dirty="0"/>
+          </a:p>
+        </p:txBody>
+      </p:sp>
+      <p:sp>
+        <p:nvSpPr>
+          <p:cNvPr id="9" name="Shape 4"/>
           <p:cNvSpPr/>
           <p:nvPr/>
         </p:nvSpPr>
         <p:spPr>
           <a:xfrm>
-            <a:off x="548640" y="1828800"/>
-            <a:ext cx="594360" cy="594360"/>
-          </a:xfrm>
-          <a:prstGeom prst="ellipse">
+            <a:off x="548640" y="2834640"/>
+            <a:ext cx="6492240" cy="384048"/>
+          </a:xfrm>
+          <a:prstGeom prst="rect">
             <a:avLst/>
           </a:prstGeom>
           <a:solidFill>
@@ -19423,565 +19604,55 @@
           <a:ln/>
         </p:spPr>
       </p:sp>
-      <p:pic>
-        <p:nvPicPr>
-          <p:cNvPr id="9" name="Image 2" descr="preencoded.png">    </p:cNvPr>
-          <p:cNvPicPr>
-            <a:picLocks noChangeAspect="1"/>
-          </p:cNvPicPr>
-          <p:nvPr/>
-        </p:nvPicPr>
-        <p:blipFill>
-          <a:blip r:embed="rId3"/>
-          <a:stretch>
-            <a:fillRect/>
-          </a:stretch>
-        </p:blipFill>
-        <p:spPr>
-          <a:xfrm>
-            <a:off x="691286" y="1971446"/>
-            <a:ext cx="309067" cy="309067"/>
-          </a:xfrm>
-          <a:prstGeom prst="rect">
-            <a:avLst/>
-          </a:prstGeom>
-        </p:spPr>
-      </p:pic>
-      <p:sp>
-        <p:nvSpPr>
-          <p:cNvPr id="10" name="Text 4"/>
-          <p:cNvSpPr txBox="1"/>
-          <p:nvPr/>
-        </p:nvSpPr>
-        <p:spPr>
-          <a:xfrm>
-            <a:off x="1371600" y="1792224"/>
-            <a:ext cx="5029200" cy="384048"/>
-          </a:xfrm>
-          <a:prstGeom prst="rect">
-            <a:avLst/>
-          </a:prstGeom>
-          <a:noFill/>
-          <a:ln/>
-        </p:spPr>
-        <p:txBody>
-          <a:bodyPr wrap="square" lIns="0" tIns="0" rIns="0" bIns="0" rtlCol="0" anchor="t"/>
+      <p:sp>
+        <p:nvSpPr>
+          <p:cNvPr id="10" name="Text 5"/>
+          <p:cNvSpPr txBox="1"/>
+          <p:nvPr/>
+        </p:nvSpPr>
+        <p:spPr>
+          <a:xfrm>
+            <a:off x="777240" y="2834640"/>
+            <a:ext cx="6035040" cy="384048"/>
+          </a:xfrm>
+          <a:prstGeom prst="rect">
+            <a:avLst/>
+          </a:prstGeom>
+          <a:noFill/>
+          <a:ln/>
+        </p:spPr>
+        <p:txBody>
+          <a:bodyPr wrap="square" lIns="0" tIns="0" rIns="0" bIns="0" rtlCol="0" anchor="ctr"/>
           <a:lstStyle/>
           <a:p>
             <a:pPr indent="0" marL="0">
               <a:buNone/>
             </a:pPr>
             <a:r>
-              <a:rPr lang="en-GB" altLang="en-US" sz="2200" dirty="0">
+              <a:rPr lang="en-GB" altLang="en-US" sz="1200" b="1" spc="300" kern="0" dirty="0">
                 <a:solidFill>
                   <a:schemeClr val="tx1"/>
                 </a:solidFill>
-                <a:latin typeface="+mj-lt" pitchFamily="34" charset="0"/>
-                <a:ea typeface="+mj-lt" pitchFamily="34" charset="-122"/>
-                <a:cs typeface="+mj-lt" pitchFamily="34" charset="-120"/>
-              </a:rPr>
-              <a:t>Weekly pulse</a:t>
-            </a:r>
-            <a:endParaRPr lang="en-GB" sz="2200" dirty="0"/>
-          </a:p>
-        </p:txBody>
-      </p:sp>
-      <p:sp>
-        <p:nvSpPr>
-          <p:cNvPr id="11" name="Text 5"/>
-          <p:cNvSpPr txBox="1"/>
-          <p:nvPr/>
-        </p:nvSpPr>
-        <p:spPr>
-          <a:xfrm>
-            <a:off x="1371600" y="2212848"/>
-            <a:ext cx="5029200" cy="256032"/>
-          </a:xfrm>
-          <a:prstGeom prst="rect">
-            <a:avLst/>
-          </a:prstGeom>
-          <a:noFill/>
-          <a:ln/>
-        </p:spPr>
-        <p:txBody>
-          <a:bodyPr wrap="square" lIns="0" tIns="0" rIns="0" bIns="0" rtlCol="0" anchor="t"/>
-          <a:lstStyle/>
-          <a:p>
-            <a:pPr indent="0" marL="0">
-              <a:buNone/>
-            </a:pPr>
-            <a:r>
-              <a:rPr lang="en-GB" altLang="en-US" sz="1100" b="1" spc="300" kern="0" dirty="0">
-                <a:solidFill>
-                  <a:schemeClr val="accent3"/>
-                </a:solidFill>
-              </a:rPr>
-              <a:t>EVERY MONDAY IN THE BUILD UP</a:t>
-            </a:r>
-            <a:endParaRPr lang="en-GB" sz="1100" dirty="0"/>
-          </a:p>
-        </p:txBody>
-      </p:sp>
-      <p:sp>
-        <p:nvSpPr>
-          <p:cNvPr id="12" name="Text 6"/>
-          <p:cNvSpPr txBox="1"/>
-          <p:nvPr/>
-        </p:nvSpPr>
-        <p:spPr>
-          <a:xfrm>
-            <a:off x="1371600" y="2514600"/>
-            <a:ext cx="5120640" cy="548640"/>
-          </a:xfrm>
-          <a:prstGeom prst="rect">
-            <a:avLst/>
-          </a:prstGeom>
-          <a:noFill/>
-          <a:ln/>
-        </p:spPr>
-        <p:txBody>
-          <a:bodyPr wrap="square" lIns="0" tIns="0" rIns="0" bIns="0" rtlCol="0" anchor="t"/>
-          <a:lstStyle/>
-          <a:p>
-            <a:pPr indent="0" marL="0">
-              <a:buNone/>
-            </a:pPr>
-            <a:r>
-              <a:rPr lang="en-GB" altLang="en-US" sz="1400" dirty="0">
-                <a:solidFill>
-                  <a:schemeClr val="tx2"/>
-                </a:solidFill>
-              </a:rPr>
-              <a:t>One page: posts live, views, top creators, ticket links used and what changes next.</a:t>
-            </a:r>
-            <a:endParaRPr lang="en-GB" sz="1400" dirty="0"/>
-          </a:p>
-        </p:txBody>
-      </p:sp>
-      <p:sp>
-        <p:nvSpPr>
-          <p:cNvPr id="13" name="Shape 7"/>
+              </a:rPr>
+              <a:t>THE ACTIVATION</a:t>
+            </a:r>
+            <a:endParaRPr lang="en-GB" sz="1200" dirty="0"/>
+          </a:p>
+        </p:txBody>
+      </p:sp>
+      <p:sp>
+        <p:nvSpPr>
+          <p:cNvPr id="11" name="Shape 6"/>
           <p:cNvSpPr/>
           <p:nvPr/>
         </p:nvSpPr>
         <p:spPr>
           <a:xfrm>
-            <a:off x="548640" y="3063240"/>
-            <a:ext cx="594360" cy="594360"/>
-          </a:xfrm>
-          <a:prstGeom prst="ellipse">
-            <a:avLst/>
-          </a:prstGeom>
-          <a:solidFill>
-            <a:schemeClr val="accent1"/>
-          </a:solidFill>
-          <a:ln/>
-        </p:spPr>
-      </p:sp>
-      <p:pic>
-        <p:nvPicPr>
-          <p:cNvPr id="14" name="Image 3" descr="preencoded.png">    </p:cNvPr>
-          <p:cNvPicPr>
-            <a:picLocks noChangeAspect="1"/>
-          </p:cNvPicPr>
-          <p:nvPr/>
-        </p:nvPicPr>
-        <p:blipFill>
-          <a:blip r:embed="rId4"/>
-          <a:stretch>
-            <a:fillRect/>
-          </a:stretch>
-        </p:blipFill>
-        <p:spPr>
-          <a:xfrm>
-            <a:off x="691286" y="3205886"/>
-            <a:ext cx="309067" cy="309067"/>
-          </a:xfrm>
-          <a:prstGeom prst="rect">
-            <a:avLst/>
-          </a:prstGeom>
-        </p:spPr>
-      </p:pic>
-      <p:sp>
-        <p:nvSpPr>
-          <p:cNvPr id="15" name="Text 8"/>
-          <p:cNvSpPr txBox="1"/>
-          <p:nvPr/>
-        </p:nvSpPr>
-        <p:spPr>
-          <a:xfrm>
-            <a:off x="1371600" y="3026664"/>
-            <a:ext cx="5029200" cy="384048"/>
-          </a:xfrm>
-          <a:prstGeom prst="rect">
-            <a:avLst/>
-          </a:prstGeom>
-          <a:noFill/>
-          <a:ln/>
-        </p:spPr>
-        <p:txBody>
-          <a:bodyPr wrap="square" lIns="0" tIns="0" rIns="0" bIns="0" rtlCol="0" anchor="t"/>
-          <a:lstStyle/>
-          <a:p>
-            <a:pPr indent="0" marL="0">
-              <a:buNone/>
-            </a:pPr>
-            <a:r>
-              <a:rPr lang="en-GB" altLang="en-US" sz="2200" dirty="0">
-                <a:solidFill>
-                  <a:schemeClr val="tx1"/>
-                </a:solidFill>
-                <a:latin typeface="+mj-lt" pitchFamily="34" charset="0"/>
-                <a:ea typeface="+mj-lt" pitchFamily="34" charset="-122"/>
-                <a:cs typeface="+mj-lt" pitchFamily="34" charset="-120"/>
-              </a:rPr>
-              <a:t>48 hour check</a:t>
-            </a:r>
-            <a:endParaRPr lang="en-GB" sz="2200" dirty="0"/>
-          </a:p>
-        </p:txBody>
-      </p:sp>
-      <p:sp>
-        <p:nvSpPr>
-          <p:cNvPr id="16" name="Text 9"/>
-          <p:cNvSpPr txBox="1"/>
-          <p:nvPr/>
-        </p:nvSpPr>
-        <p:spPr>
-          <a:xfrm>
-            <a:off x="1371600" y="3447288"/>
-            <a:ext cx="5029200" cy="256032"/>
-          </a:xfrm>
-          <a:prstGeom prst="rect">
-            <a:avLst/>
-          </a:prstGeom>
-          <a:noFill/>
-          <a:ln/>
-        </p:spPr>
-        <p:txBody>
-          <a:bodyPr wrap="square" lIns="0" tIns="0" rIns="0" bIns="0" rtlCol="0" anchor="t"/>
-          <a:lstStyle/>
-          <a:p>
-            <a:pPr indent="0" marL="0">
-              <a:buNone/>
-            </a:pPr>
-            <a:r>
-              <a:rPr lang="en-GB" altLang="en-US" sz="1100" b="1" spc="300" kern="0" dirty="0">
-                <a:solidFill>
-                  <a:schemeClr val="accent3"/>
-                </a:solidFill>
-              </a:rPr>
-              <a:t>BY 30 DECEMBER 2026</a:t>
-            </a:r>
-            <a:endParaRPr lang="en-GB" sz="1100" dirty="0"/>
-          </a:p>
-        </p:txBody>
-      </p:sp>
-      <p:sp>
-        <p:nvSpPr>
-          <p:cNvPr id="17" name="Text 10"/>
-          <p:cNvSpPr txBox="1"/>
-          <p:nvPr/>
-        </p:nvSpPr>
-        <p:spPr>
-          <a:xfrm>
-            <a:off x="1371600" y="3749040"/>
-            <a:ext cx="5120640" cy="548640"/>
-          </a:xfrm>
-          <a:prstGeom prst="rect">
-            <a:avLst/>
-          </a:prstGeom>
-          <a:noFill/>
-          <a:ln/>
-        </p:spPr>
-        <p:txBody>
-          <a:bodyPr wrap="square" lIns="0" tIns="0" rIns="0" bIns="0" rtlCol="0" anchor="t"/>
-          <a:lstStyle/>
-          <a:p>
-            <a:pPr indent="0" marL="0">
-              <a:buNone/>
-            </a:pPr>
-            <a:r>
-              <a:rPr lang="en-GB" altLang="en-US" sz="1400" dirty="0">
-                <a:solidFill>
-                  <a:schemeClr val="tx2"/>
-                </a:solidFill>
-              </a:rPr>
-              <a:t>Who posted, where, and against which brief. Anything missing is chased.</a:t>
-            </a:r>
-            <a:endParaRPr lang="en-GB" sz="1400" dirty="0"/>
-          </a:p>
-        </p:txBody>
-      </p:sp>
-      <p:sp>
-        <p:nvSpPr>
-          <p:cNvPr id="18" name="Shape 11"/>
-          <p:cNvSpPr/>
-          <p:nvPr/>
-        </p:nvSpPr>
-        <p:spPr>
-          <a:xfrm>
-            <a:off x="548640" y="4297680"/>
-            <a:ext cx="594360" cy="594360"/>
-          </a:xfrm>
-          <a:prstGeom prst="ellipse">
-            <a:avLst/>
-          </a:prstGeom>
-          <a:solidFill>
-            <a:schemeClr val="accent1"/>
-          </a:solidFill>
-          <a:ln/>
-        </p:spPr>
-      </p:sp>
-      <p:pic>
-        <p:nvPicPr>
-          <p:cNvPr id="19" name="Image 4" descr="preencoded.png">    </p:cNvPr>
-          <p:cNvPicPr>
-            <a:picLocks noChangeAspect="1"/>
-          </p:cNvPicPr>
-          <p:nvPr/>
-        </p:nvPicPr>
-        <p:blipFill>
-          <a:blip r:embed="rId5"/>
-          <a:stretch>
-            <a:fillRect/>
-          </a:stretch>
-        </p:blipFill>
-        <p:spPr>
-          <a:xfrm>
-            <a:off x="691286" y="4440326"/>
-            <a:ext cx="309067" cy="309067"/>
-          </a:xfrm>
-          <a:prstGeom prst="rect">
-            <a:avLst/>
-          </a:prstGeom>
-        </p:spPr>
-      </p:pic>
-      <p:sp>
-        <p:nvSpPr>
-          <p:cNvPr id="20" name="Text 12"/>
-          <p:cNvSpPr txBox="1"/>
-          <p:nvPr/>
-        </p:nvSpPr>
-        <p:spPr>
-          <a:xfrm>
-            <a:off x="1371600" y="4261104"/>
-            <a:ext cx="5029200" cy="384048"/>
-          </a:xfrm>
-          <a:prstGeom prst="rect">
-            <a:avLst/>
-          </a:prstGeom>
-          <a:noFill/>
-          <a:ln/>
-        </p:spPr>
-        <p:txBody>
-          <a:bodyPr wrap="square" lIns="0" tIns="0" rIns="0" bIns="0" rtlCol="0" anchor="t"/>
-          <a:lstStyle/>
-          <a:p>
-            <a:pPr indent="0" marL="0">
-              <a:buNone/>
-            </a:pPr>
-            <a:r>
-              <a:rPr lang="en-GB" altLang="en-US" sz="2200" dirty="0">
-                <a:solidFill>
-                  <a:schemeClr val="tx1"/>
-                </a:solidFill>
-                <a:latin typeface="+mj-lt" pitchFamily="34" charset="0"/>
-                <a:ea typeface="+mj-lt" pitchFamily="34" charset="-122"/>
-                <a:cs typeface="+mj-lt" pitchFamily="34" charset="-120"/>
-              </a:rPr>
-              <a:t>Full report</a:t>
-            </a:r>
-            <a:endParaRPr lang="en-GB" sz="2200" dirty="0"/>
-          </a:p>
-        </p:txBody>
-      </p:sp>
-      <p:sp>
-        <p:nvSpPr>
-          <p:cNvPr id="21" name="Text 13"/>
-          <p:cNvSpPr txBox="1"/>
-          <p:nvPr/>
-        </p:nvSpPr>
-        <p:spPr>
-          <a:xfrm>
-            <a:off x="1371600" y="4681728"/>
-            <a:ext cx="5029200" cy="256032"/>
-          </a:xfrm>
-          <a:prstGeom prst="rect">
-            <a:avLst/>
-          </a:prstGeom>
-          <a:noFill/>
-          <a:ln/>
-        </p:spPr>
-        <p:txBody>
-          <a:bodyPr wrap="square" lIns="0" tIns="0" rIns="0" bIns="0" rtlCol="0" anchor="t"/>
-          <a:lstStyle/>
-          <a:p>
-            <a:pPr indent="0" marL="0">
-              <a:buNone/>
-            </a:pPr>
-            <a:r>
-              <a:rPr lang="en-GB" altLang="en-US" sz="1100" b="1" spc="300" kern="0" dirty="0">
-                <a:solidFill>
-                  <a:schemeClr val="accent3"/>
-                </a:solidFill>
-              </a:rPr>
-              <a:t>DAY 14, BY 11 JANUARY 2027</a:t>
-            </a:r>
-            <a:endParaRPr lang="en-GB" sz="1100" dirty="0"/>
-          </a:p>
-        </p:txBody>
-      </p:sp>
-      <p:sp>
-        <p:nvSpPr>
-          <p:cNvPr id="22" name="Text 14"/>
-          <p:cNvSpPr txBox="1"/>
-          <p:nvPr/>
-        </p:nvSpPr>
-        <p:spPr>
-          <a:xfrm>
-            <a:off x="1371600" y="4983480"/>
-            <a:ext cx="5120640" cy="548640"/>
-          </a:xfrm>
-          <a:prstGeom prst="rect">
-            <a:avLst/>
-          </a:prstGeom>
-          <a:noFill/>
-          <a:ln/>
-        </p:spPr>
-        <p:txBody>
-          <a:bodyPr wrap="square" lIns="0" tIns="0" rIns="0" bIns="0" rtlCol="0" anchor="t"/>
-          <a:lstStyle/>
-          <a:p>
-            <a:pPr indent="0" marL="0">
-              <a:buNone/>
-            </a:pPr>
-            <a:r>
-              <a:rPr lang="en-GB" altLang="en-US" sz="1400" dirty="0">
-                <a:solidFill>
-                  <a:schemeClr val="tx2"/>
-                </a:solidFill>
-              </a:rPr>
-              <a:t>Every post and figure, audiences, tickets and sponsor pages, as a PDF with a web version.</a:t>
-            </a:r>
-            <a:endParaRPr lang="en-GB" sz="1400" dirty="0"/>
-          </a:p>
-        </p:txBody>
-      </p:sp>
-      <p:sp>
-        <p:nvSpPr>
-          <p:cNvPr id="23" name="Shape 15"/>
-          <p:cNvSpPr/>
-          <p:nvPr/>
-        </p:nvSpPr>
-        <p:spPr>
-          <a:xfrm>
-            <a:off x="1371600" y="5833872"/>
-            <a:ext cx="4114800" cy="384048"/>
-          </a:xfrm>
-          <a:prstGeom prst="roundRect">
-            <a:avLst>
-              <a:gd name="adj" fmla="val 50000"/>
-            </a:avLst>
-          </a:prstGeom>
-          <a:solidFill>
-            <a:schemeClr val="bg1"/>
-          </a:solidFill>
-          <a:ln w="12700">
-            <a:solidFill>
-              <a:schemeClr val="accent3"/>
-            </a:solidFill>
-            <a:prstDash val="solid"/>
-          </a:ln>
-        </p:spPr>
-      </p:sp>
-      <p:sp>
-        <p:nvSpPr>
-          <p:cNvPr id="24" name="Text 16"/>
-          <p:cNvSpPr txBox="1"/>
-          <p:nvPr/>
-        </p:nvSpPr>
-        <p:spPr>
-          <a:xfrm>
-            <a:off x="1371600" y="5833872"/>
-            <a:ext cx="4114800" cy="384048"/>
-          </a:xfrm>
-          <a:prstGeom prst="rect">
-            <a:avLst/>
-          </a:prstGeom>
-          <a:noFill/>
-          <a:ln/>
-        </p:spPr>
-        <p:txBody>
-          <a:bodyPr wrap="square" lIns="0" tIns="0" rIns="0" bIns="0" rtlCol="0" anchor="ctr"/>
-          <a:lstStyle/>
-          <a:p>
-            <a:pPr algn="ctr" indent="0" marL="0">
-              <a:buNone/>
-            </a:pPr>
-            <a:r>
-              <a:rPr lang="en-GB" altLang="en-US" sz="1200" b="1" u="sng" dirty="0">
-                <a:solidFill>
-                  <a:schemeClr val="accent3"/>
-                </a:solidFill>
-                <a:hlinkClick r:id="rId6" action="ppaction://hlinksldjump" tooltip="Sample report, page 2">
-                  <a:extLst>
-                    <a:ext uri="{A12FA001-AC4F-418D-AE19-62706E023703}">
-                      <ahyp:hlinkClr xmlns:ahyp="http://schemas.microsoft.com/office/drawing/2018/hyperlinkcolor" val="tx"/>
-                    </a:ext>
-                  </a:extLst>
-                </a:hlinkClick>
-              </a:rPr>
-              <a:t>See page 2: the detailed breakdown  →</a:t>
-            </a:r>
-            <a:endParaRPr lang="en-GB" sz="1200" dirty="0"/>
-          </a:p>
-        </p:txBody>
-      </p:sp>
-      <p:sp>
-        <p:nvSpPr>
-          <p:cNvPr id="25" name="Sample report page 2"/>
-          <p:cNvSpPr/>
-          <p:nvPr/>
-        </p:nvSpPr>
-        <p:spPr>
-          <a:xfrm>
-            <a:off x="6949440" y="1874520"/>
-            <a:ext cx="4690872" cy="4343400"/>
-          </a:xfrm>
-          <a:prstGeom prst="roundRect">
-            <a:avLst>
-              <a:gd name="adj" fmla="val 1684"/>
-            </a:avLst>
-          </a:prstGeom>
-          <a:solidFill>
-            <a:schemeClr val="bg1"/>
-          </a:solidFill>
-          <a:ln w="9525">
-            <a:solidFill>
-              <a:schemeClr val="tx2">
-                <a:alpha val="40000"/>
-              </a:schemeClr>
-            </a:solidFill>
-            <a:prstDash val="solid"/>
-          </a:ln>
-        </p:spPr>
-      </p:sp>
-      <p:sp>
-        <p:nvSpPr>
-          <p:cNvPr id="26" name="Shape 18"/>
-          <p:cNvSpPr/>
-          <p:nvPr/>
-        </p:nvSpPr>
-        <p:spPr>
-          <a:xfrm>
-            <a:off x="6812280" y="1737360"/>
-            <a:ext cx="4690872" cy="4343400"/>
-          </a:xfrm>
-          <a:prstGeom prst="roundRect">
-            <a:avLst>
-              <a:gd name="adj" fmla="val 1684"/>
-            </a:avLst>
+            <a:off x="548640" y="3218688"/>
+            <a:ext cx="6492240" cy="777240"/>
+          </a:xfrm>
+          <a:prstGeom prst="rect">
+            <a:avLst/>
           </a:prstGeom>
           <a:solidFill>
             <a:schemeClr val="bg1"/>
@@ -19994,25 +19665,18 @@
             </a:solidFill>
             <a:prstDash val="solid"/>
           </a:ln>
-          <a:effectLst>
-            <a:outerShdw sx="100000" sy="100000" kx="0" ky="0" algn="bl" rotWithShape="0" blurRad="127000" dist="38100" dir="5400000">
-              <a:srgbClr val="133524">
-                <a:alpha val="10000"/>
-              </a:srgbClr>
-            </a:outerShdw>
-          </a:effectLst>
-        </p:spPr>
-      </p:sp>
-      <p:sp>
-        <p:nvSpPr>
-          <p:cNvPr id="27" name="Text 19"/>
-          <p:cNvSpPr txBox="1"/>
-          <p:nvPr/>
-        </p:nvSpPr>
-        <p:spPr>
-          <a:xfrm>
-            <a:off x="7086600" y="1965960"/>
-            <a:ext cx="3291840" cy="201168"/>
+        </p:spPr>
+      </p:sp>
+      <p:sp>
+        <p:nvSpPr>
+          <p:cNvPr id="12" name="Text 7"/>
+          <p:cNvSpPr txBox="1"/>
+          <p:nvPr/>
+        </p:nvSpPr>
+        <p:spPr>
+          <a:xfrm>
+            <a:off x="777240" y="3291840"/>
+            <a:ext cx="6035040" cy="640080"/>
           </a:xfrm>
           <a:prstGeom prst="rect">
             <a:avLst/>
@@ -20028,74 +19692,215 @@
               <a:buNone/>
             </a:pPr>
             <a:r>
-              <a:rPr lang="en-GB" altLang="en-US" sz="900" b="1" spc="300" kern="0" dirty="0">
+              <a:rPr lang="en-GB" altLang="en-US" sz="1500" dirty="0">
+                <a:solidFill>
+                  <a:schemeClr val="tx1"/>
+                </a:solidFill>
+              </a:rPr>
+              <a:t>Creators matched to the festival’s audiences, managed on the ground before, during and after 27 and 28 December.</a:t>
+            </a:r>
+            <a:endParaRPr lang="en-GB" sz="1500" dirty="0"/>
+          </a:p>
+        </p:txBody>
+      </p:sp>
+      <p:sp>
+        <p:nvSpPr>
+          <p:cNvPr id="13" name="Shape 8"/>
+          <p:cNvSpPr/>
+          <p:nvPr/>
+        </p:nvSpPr>
+        <p:spPr>
+          <a:xfrm>
+            <a:off x="548640" y="4160520"/>
+            <a:ext cx="6492240" cy="384048"/>
+          </a:xfrm>
+          <a:prstGeom prst="rect">
+            <a:avLst/>
+          </a:prstGeom>
+          <a:solidFill>
+            <a:schemeClr val="accent2"/>
+          </a:solidFill>
+          <a:ln/>
+        </p:spPr>
+      </p:sp>
+      <p:sp>
+        <p:nvSpPr>
+          <p:cNvPr id="14" name="Text 9"/>
+          <p:cNvSpPr txBox="1"/>
+          <p:nvPr/>
+        </p:nvSpPr>
+        <p:spPr>
+          <a:xfrm>
+            <a:off x="777240" y="4160520"/>
+            <a:ext cx="6035040" cy="384048"/>
+          </a:xfrm>
+          <a:prstGeom prst="rect">
+            <a:avLst/>
+          </a:prstGeom>
+          <a:noFill/>
+          <a:ln/>
+        </p:spPr>
+        <p:txBody>
+          <a:bodyPr wrap="square" lIns="0" tIns="0" rIns="0" bIns="0" rtlCol="0" anchor="ctr"/>
+          <a:lstStyle/>
+          <a:p>
+            <a:pPr indent="0" marL="0">
+              <a:buNone/>
+            </a:pPr>
+            <a:r>
+              <a:rPr lang="en-GB" altLang="en-US" sz="1200" b="1" spc="300" kern="0" dirty="0">
+                <a:solidFill>
+                  <a:schemeClr val="tx1"/>
+                </a:solidFill>
+              </a:rPr>
+              <a:t>THE REPORT</a:t>
+            </a:r>
+            <a:endParaRPr lang="en-GB" sz="1200" dirty="0"/>
+          </a:p>
+        </p:txBody>
+      </p:sp>
+      <p:sp>
+        <p:nvSpPr>
+          <p:cNvPr id="15" name="Shape 10"/>
+          <p:cNvSpPr/>
+          <p:nvPr/>
+        </p:nvSpPr>
+        <p:spPr>
+          <a:xfrm>
+            <a:off x="548640" y="4544568"/>
+            <a:ext cx="6492240" cy="777240"/>
+          </a:xfrm>
+          <a:prstGeom prst="rect">
+            <a:avLst/>
+          </a:prstGeom>
+          <a:solidFill>
+            <a:schemeClr val="bg1"/>
+          </a:solidFill>
+          <a:ln w="9525">
+            <a:solidFill>
+              <a:schemeClr val="tx2">
+                <a:alpha val="28000"/>
+              </a:schemeClr>
+            </a:solidFill>
+            <a:prstDash val="solid"/>
+          </a:ln>
+        </p:spPr>
+      </p:sp>
+      <p:sp>
+        <p:nvSpPr>
+          <p:cNvPr id="16" name="Text 11"/>
+          <p:cNvSpPr txBox="1"/>
+          <p:nvPr/>
+        </p:nvSpPr>
+        <p:spPr>
+          <a:xfrm>
+            <a:off x="777240" y="4617720"/>
+            <a:ext cx="6035040" cy="640080"/>
+          </a:xfrm>
+          <a:prstGeom prst="rect">
+            <a:avLst/>
+          </a:prstGeom>
+          <a:noFill/>
+          <a:ln/>
+        </p:spPr>
+        <p:txBody>
+          <a:bodyPr wrap="square" lIns="0" tIns="0" rIns="0" bIns="0" rtlCol="0" anchor="t"/>
+          <a:lstStyle/>
+          <a:p>
+            <a:pPr indent="0" marL="0">
+              <a:buNone/>
+            </a:pPr>
+            <a:r>
+              <a:rPr lang="en-GB" altLang="en-US" sz="1500" dirty="0">
+                <a:solidFill>
+                  <a:schemeClr val="tx1"/>
+                </a:solidFill>
+              </a:rPr>
+              <a:t>A check at 48 hours and the full report on day 14, built for the festival team and for every sponsor.</a:t>
+            </a:r>
+            <a:endParaRPr lang="en-GB" sz="1500" dirty="0"/>
+          </a:p>
+        </p:txBody>
+      </p:sp>
+      <p:sp>
+        <p:nvSpPr>
+          <p:cNvPr id="17" name="Text 12"/>
+          <p:cNvSpPr txBox="1"/>
+          <p:nvPr/>
+        </p:nvSpPr>
+        <p:spPr>
+          <a:xfrm>
+            <a:off x="548640" y="5532120"/>
+            <a:ext cx="6492240" cy="502920"/>
+          </a:xfrm>
+          <a:prstGeom prst="rect">
+            <a:avLst/>
+          </a:prstGeom>
+          <a:noFill/>
+          <a:ln/>
+        </p:spPr>
+        <p:txBody>
+          <a:bodyPr wrap="square" lIns="0" tIns="0" rIns="0" bIns="0" rtlCol="0" anchor="t"/>
+          <a:lstStyle/>
+          <a:p>
+            <a:pPr indent="0" marL="0">
+              <a:buNone/>
+            </a:pPr>
+            <a:r>
+              <a:rPr lang="en-GB" altLang="en-US" sz="1900" dirty="0">
                 <a:solidFill>
                   <a:schemeClr val="accent3"/>
-                </a:solidFill>
-              </a:rPr>
-              <a:t>VISIBILITY REPORT  ·  PAGE 1</a:t>
-            </a:r>
-            <a:endParaRPr lang="en-GB" sz="900" dirty="0"/>
-          </a:p>
-        </p:txBody>
-      </p:sp>
-      <p:sp>
-        <p:nvSpPr>
-          <p:cNvPr id="28" name="Text 20"/>
-          <p:cNvSpPr txBox="1"/>
-          <p:nvPr/>
-        </p:nvSpPr>
-        <p:spPr>
-          <a:xfrm>
-            <a:off x="7086600" y="2167128"/>
-            <a:ext cx="3657600" cy="365760"/>
-          </a:xfrm>
-          <a:prstGeom prst="rect">
-            <a:avLst/>
-          </a:prstGeom>
-          <a:noFill/>
-          <a:ln/>
-        </p:spPr>
-        <p:txBody>
-          <a:bodyPr wrap="square" lIns="0" tIns="0" rIns="0" bIns="0" rtlCol="0" anchor="t"/>
-          <a:lstStyle/>
-          <a:p>
-            <a:pPr indent="0" marL="0">
-              <a:buNone/>
-            </a:pPr>
-            <a:r>
-              <a:rPr lang="en-GB" altLang="en-US" sz="1800" dirty="0">
-                <a:solidFill>
-                  <a:schemeClr val="tx1"/>
                 </a:solidFill>
                 <a:latin typeface="+mj-lt" pitchFamily="34" charset="0"/>
                 <a:ea typeface="+mj-lt" pitchFamily="34" charset="-122"/>
                 <a:cs typeface="+mj-lt" pitchFamily="34" charset="-120"/>
               </a:rPr>
-              <a:t>Mother Africa Festival 2026</a:t>
-            </a:r>
-            <a:endParaRPr lang="en-GB" sz="1800" dirty="0"/>
-          </a:p>
-        </p:txBody>
+              <a:t>A trial, not a long term commitment. It is what earns the conversation about 2027.</a:t>
+            </a:r>
+            <a:endParaRPr lang="en-GB" sz="1900" dirty="0"/>
+          </a:p>
+        </p:txBody>
+      </p:sp>
+      <p:sp>
+        <p:nvSpPr>
+          <p:cNvPr id="18" name="Shape 13"/>
+          <p:cNvSpPr/>
+          <p:nvPr/>
+        </p:nvSpPr>
+        <p:spPr>
+          <a:xfrm>
+            <a:off x="7452360" y="1783080"/>
+            <a:ext cx="4190695" cy="4251960"/>
+          </a:xfrm>
+          <a:prstGeom prst="roundRect">
+            <a:avLst>
+              <a:gd name="adj" fmla="val 2182"/>
+            </a:avLst>
+          </a:prstGeom>
+          <a:solidFill>
+            <a:schemeClr val="tx1"/>
+          </a:solidFill>
+          <a:ln/>
+        </p:spPr>
       </p:sp>
       <p:pic>
         <p:nvPicPr>
-          <p:cNvPr id="29" name="Image 5" descr="Mother Africa Festival">    </p:cNvPr>
+          <p:cNvPr id="19" name="Image 2" descr="Mother Africa Festival">    </p:cNvPr>
           <p:cNvPicPr>
             <a:picLocks noChangeAspect="1"/>
           </p:cNvPicPr>
           <p:nvPr/>
         </p:nvPicPr>
         <p:blipFill>
-          <a:blip r:embed="rId7"/>
+          <a:blip r:embed="rId3"/>
           <a:stretch>
             <a:fillRect/>
           </a:stretch>
         </p:blipFill>
         <p:spPr>
           <a:xfrm>
-            <a:off x="10725912" y="1965960"/>
-            <a:ext cx="541249" cy="384048"/>
+            <a:off x="8548974" y="2240280"/>
+            <a:ext cx="1997467" cy="1417320"/>
           </a:xfrm>
           <a:prstGeom prst="rect">
             <a:avLst/>
@@ -20104,59 +19909,74 @@
       </p:pic>
       <p:sp>
         <p:nvSpPr>
-          <p:cNvPr id="30" name="Shape 21"/>
-          <p:cNvSpPr/>
-          <p:nvPr/>
-        </p:nvSpPr>
-        <p:spPr>
-          <a:xfrm>
-            <a:off x="7086600" y="2606040"/>
-            <a:ext cx="4142232" cy="0"/>
-          </a:xfrm>
-          <a:prstGeom prst="line">
-            <a:avLst/>
-          </a:prstGeom>
-          <a:noFill/>
-          <a:ln w="12700">
-            <a:solidFill>
-              <a:schemeClr val="accent1"/>
-            </a:solidFill>
-            <a:prstDash val="solid"/>
-          </a:ln>
-        </p:spPr>
-      </p:sp>
-      <p:sp>
-        <p:nvSpPr>
-          <p:cNvPr id="31" name="Shape 22"/>
-          <p:cNvSpPr/>
-          <p:nvPr/>
-        </p:nvSpPr>
-        <p:spPr>
-          <a:xfrm>
-            <a:off x="7086600" y="2788920"/>
-            <a:ext cx="2011680" cy="731520"/>
-          </a:xfrm>
-          <a:prstGeom prst="roundRect">
-            <a:avLst>
-              <a:gd name="adj" fmla="val 7500"/>
-            </a:avLst>
-          </a:prstGeom>
-          <a:solidFill>
-            <a:schemeClr val="bg2"/>
-          </a:solidFill>
-          <a:ln/>
-        </p:spPr>
-      </p:sp>
-      <p:sp>
-        <p:nvSpPr>
-          <p:cNvPr id="32" name="Text 23"/>
-          <p:cNvSpPr txBox="1"/>
-          <p:nvPr/>
-        </p:nvSpPr>
-        <p:spPr>
-          <a:xfrm>
-            <a:off x="7251192" y="2862072"/>
-            <a:ext cx="1737360" cy="347472"/>
+          <p:cNvPr id="20" name="Text 14"/>
+          <p:cNvSpPr txBox="1"/>
+          <p:nvPr/>
+        </p:nvSpPr>
+        <p:spPr>
+          <a:xfrm>
+            <a:off x="7452360" y="3749040"/>
+            <a:ext cx="4190695" cy="548640"/>
+          </a:xfrm>
+          <a:prstGeom prst="rect">
+            <a:avLst/>
+          </a:prstGeom>
+          <a:noFill/>
+          <a:ln/>
+        </p:spPr>
+        <p:txBody>
+          <a:bodyPr wrap="square" lIns="0" tIns="0" rIns="0" bIns="0" rtlCol="0" anchor="ctr"/>
+          <a:lstStyle/>
+          <a:p>
+            <a:pPr algn="ctr" indent="0" marL="0">
+              <a:buNone/>
+            </a:pPr>
+            <a:r>
+              <a:rPr lang="en-GB" altLang="en-US" sz="3000" dirty="0">
+                <a:solidFill>
+                  <a:schemeClr val="accent1"/>
+                </a:solidFill>
+              </a:rPr>
+              <a:t>×</a:t>
+            </a:r>
+            <a:endParaRPr lang="en-GB" sz="3000" dirty="0"/>
+          </a:p>
+        </p:txBody>
+      </p:sp>
+      <p:pic>
+        <p:nvPicPr>
+          <p:cNvPr id="21" name="Image 3" descr="AToure Management &amp; Consulting">    </p:cNvPr>
+          <p:cNvPicPr>
+            <a:picLocks noChangeAspect="1"/>
+          </p:cNvPicPr>
+          <p:nvPr/>
+        </p:nvPicPr>
+        <p:blipFill>
+          <a:blip r:embed="rId4"/>
+          <a:stretch>
+            <a:fillRect/>
+          </a:stretch>
+        </p:blipFill>
+        <p:spPr>
+          <a:xfrm>
+            <a:off x="7993228" y="4480560"/>
+            <a:ext cx="3108960" cy="497434"/>
+          </a:xfrm>
+          <a:prstGeom prst="rect">
+            <a:avLst/>
+          </a:prstGeom>
+        </p:spPr>
+      </p:pic>
+      <p:sp>
+        <p:nvSpPr>
+          <p:cNvPr id="22" name="Text 15"/>
+          <p:cNvSpPr txBox="1"/>
+          <p:nvPr/>
+        </p:nvSpPr>
+        <p:spPr>
+          <a:xfrm>
+            <a:off x="7452360" y="5349240"/>
+            <a:ext cx="4190695" cy="274320"/>
           </a:xfrm>
           <a:prstGeom prst="rect">
             <a:avLst/>
@@ -20168,733 +19988,18 @@
           <a:bodyPr wrap="square" lIns="0" tIns="0" rIns="0" bIns="0" rtlCol="0" anchor="t"/>
           <a:lstStyle/>
           <a:p>
-            <a:pPr indent="0" marL="0">
-              <a:buNone/>
-            </a:pPr>
-            <a:r>
-              <a:rPr lang="en-GB" altLang="en-US" sz="1800" b="1" dirty="0">
-                <a:solidFill>
-                  <a:schemeClr val="tx1"/>
-                </a:solidFill>
-              </a:rPr>
-              <a:t>3,200,000</a:t>
-            </a:r>
-            <a:endParaRPr lang="en-GB" sz="1800" dirty="0"/>
-          </a:p>
-        </p:txBody>
-      </p:sp>
-      <p:sp>
-        <p:nvSpPr>
-          <p:cNvPr id="33" name="Text 24"/>
-          <p:cNvSpPr txBox="1"/>
-          <p:nvPr/>
-        </p:nvSpPr>
-        <p:spPr>
-          <a:xfrm>
-            <a:off x="7251192" y="3227832"/>
-            <a:ext cx="1783080" cy="201168"/>
-          </a:xfrm>
-          <a:prstGeom prst="rect">
-            <a:avLst/>
-          </a:prstGeom>
-          <a:noFill/>
-          <a:ln/>
-        </p:spPr>
-        <p:txBody>
-          <a:bodyPr wrap="square" lIns="0" tIns="0" rIns="0" bIns="0" rtlCol="0" anchor="t"/>
-          <a:lstStyle/>
-          <a:p>
-            <a:pPr indent="0" marL="0">
-              <a:buNone/>
-            </a:pPr>
-            <a:r>
-              <a:rPr lang="en-GB" altLang="en-US" sz="1000" dirty="0">
-                <a:solidFill>
-                  <a:schemeClr val="tx2"/>
-                </a:solidFill>
-              </a:rPr>
-              <a:t>Total views</a:t>
-            </a:r>
-            <a:endParaRPr lang="en-GB" sz="1000" dirty="0"/>
-          </a:p>
-        </p:txBody>
-      </p:sp>
-      <p:sp>
-        <p:nvSpPr>
-          <p:cNvPr id="34" name="Shape 25"/>
-          <p:cNvSpPr/>
-          <p:nvPr/>
-        </p:nvSpPr>
-        <p:spPr>
-          <a:xfrm>
-            <a:off x="9208008" y="2788920"/>
-            <a:ext cx="2011680" cy="731520"/>
-          </a:xfrm>
-          <a:prstGeom prst="roundRect">
-            <a:avLst>
-              <a:gd name="adj" fmla="val 7500"/>
-            </a:avLst>
-          </a:prstGeom>
-          <a:solidFill>
-            <a:schemeClr val="bg2"/>
-          </a:solidFill>
-          <a:ln/>
-        </p:spPr>
-      </p:sp>
-      <p:sp>
-        <p:nvSpPr>
-          <p:cNvPr id="35" name="Text 26"/>
-          <p:cNvSpPr txBox="1"/>
-          <p:nvPr/>
-        </p:nvSpPr>
-        <p:spPr>
-          <a:xfrm>
-            <a:off x="9372600" y="2862072"/>
-            <a:ext cx="1737360" cy="347472"/>
-          </a:xfrm>
-          <a:prstGeom prst="rect">
-            <a:avLst/>
-          </a:prstGeom>
-          <a:noFill/>
-          <a:ln/>
-        </p:spPr>
-        <p:txBody>
-          <a:bodyPr wrap="square" lIns="0" tIns="0" rIns="0" bIns="0" rtlCol="0" anchor="t"/>
-          <a:lstStyle/>
-          <a:p>
-            <a:pPr indent="0" marL="0">
-              <a:buNone/>
-            </a:pPr>
-            <a:r>
-              <a:rPr lang="en-GB" altLang="en-US" sz="1800" b="1" dirty="0">
-                <a:solidFill>
-                  <a:schemeClr val="tx1"/>
-                </a:solidFill>
-              </a:rPr>
-              <a:t>1,450,000</a:t>
-            </a:r>
-            <a:endParaRPr lang="en-GB" sz="1800" dirty="0"/>
-          </a:p>
-        </p:txBody>
-      </p:sp>
-      <p:sp>
-        <p:nvSpPr>
-          <p:cNvPr id="36" name="Text 27"/>
-          <p:cNvSpPr txBox="1"/>
-          <p:nvPr/>
-        </p:nvSpPr>
-        <p:spPr>
-          <a:xfrm>
-            <a:off x="9372600" y="3227832"/>
-            <a:ext cx="1783080" cy="201168"/>
-          </a:xfrm>
-          <a:prstGeom prst="rect">
-            <a:avLst/>
-          </a:prstGeom>
-          <a:noFill/>
-          <a:ln/>
-        </p:spPr>
-        <p:txBody>
-          <a:bodyPr wrap="square" lIns="0" tIns="0" rIns="0" bIns="0" rtlCol="0" anchor="t"/>
-          <a:lstStyle/>
-          <a:p>
-            <a:pPr indent="0" marL="0">
-              <a:buNone/>
-            </a:pPr>
-            <a:r>
-              <a:rPr lang="en-GB" altLang="en-US" sz="1000" dirty="0">
-                <a:solidFill>
-                  <a:schemeClr val="tx2"/>
-                </a:solidFill>
-              </a:rPr>
-              <a:t>Accounts reached</a:t>
-            </a:r>
-            <a:endParaRPr lang="en-GB" sz="1000" dirty="0"/>
-          </a:p>
-        </p:txBody>
-      </p:sp>
-      <p:sp>
-        <p:nvSpPr>
-          <p:cNvPr id="37" name="Shape 28"/>
-          <p:cNvSpPr/>
-          <p:nvPr/>
-        </p:nvSpPr>
-        <p:spPr>
-          <a:xfrm>
-            <a:off x="7086600" y="3657600"/>
-            <a:ext cx="2011680" cy="731520"/>
-          </a:xfrm>
-          <a:prstGeom prst="roundRect">
-            <a:avLst>
-              <a:gd name="adj" fmla="val 7500"/>
-            </a:avLst>
-          </a:prstGeom>
-          <a:solidFill>
-            <a:schemeClr val="bg2"/>
-          </a:solidFill>
-          <a:ln/>
-        </p:spPr>
-      </p:sp>
-      <p:sp>
-        <p:nvSpPr>
-          <p:cNvPr id="38" name="Text 29"/>
-          <p:cNvSpPr txBox="1"/>
-          <p:nvPr/>
-        </p:nvSpPr>
-        <p:spPr>
-          <a:xfrm>
-            <a:off x="7251192" y="3730752"/>
-            <a:ext cx="1737360" cy="347472"/>
-          </a:xfrm>
-          <a:prstGeom prst="rect">
-            <a:avLst/>
-          </a:prstGeom>
-          <a:noFill/>
-          <a:ln/>
-        </p:spPr>
-        <p:txBody>
-          <a:bodyPr wrap="square" lIns="0" tIns="0" rIns="0" bIns="0" rtlCol="0" anchor="t"/>
-          <a:lstStyle/>
-          <a:p>
-            <a:pPr indent="0" marL="0">
-              <a:buNone/>
-            </a:pPr>
-            <a:r>
-              <a:rPr lang="en-GB" altLang="en-US" sz="1800" b="1" dirty="0">
-                <a:solidFill>
-                  <a:schemeClr val="tx1"/>
-                </a:solidFill>
-              </a:rPr>
-              <a:t>64</a:t>
-            </a:r>
-            <a:endParaRPr lang="en-GB" sz="1800" dirty="0"/>
-          </a:p>
-        </p:txBody>
-      </p:sp>
-      <p:sp>
-        <p:nvSpPr>
-          <p:cNvPr id="39" name="Text 30"/>
-          <p:cNvSpPr txBox="1"/>
-          <p:nvPr/>
-        </p:nvSpPr>
-        <p:spPr>
-          <a:xfrm>
-            <a:off x="7251192" y="4096512"/>
-            <a:ext cx="1783080" cy="201168"/>
-          </a:xfrm>
-          <a:prstGeom prst="rect">
-            <a:avLst/>
-          </a:prstGeom>
-          <a:noFill/>
-          <a:ln/>
-        </p:spPr>
-        <p:txBody>
-          <a:bodyPr wrap="square" lIns="0" tIns="0" rIns="0" bIns="0" rtlCol="0" anchor="t"/>
-          <a:lstStyle/>
-          <a:p>
-            <a:pPr indent="0" marL="0">
-              <a:buNone/>
-            </a:pPr>
-            <a:r>
-              <a:rPr lang="en-GB" altLang="en-US" sz="1000" dirty="0">
-                <a:solidFill>
-                  <a:schemeClr val="tx2"/>
-                </a:solidFill>
-              </a:rPr>
-              <a:t>Posts checked against the brief</a:t>
-            </a:r>
-            <a:endParaRPr lang="en-GB" sz="1000" dirty="0"/>
-          </a:p>
-        </p:txBody>
-      </p:sp>
-      <p:sp>
-        <p:nvSpPr>
-          <p:cNvPr id="40" name="Shape 31"/>
-          <p:cNvSpPr/>
-          <p:nvPr/>
-        </p:nvSpPr>
-        <p:spPr>
-          <a:xfrm>
-            <a:off x="9208008" y="3657600"/>
-            <a:ext cx="2011680" cy="731520"/>
-          </a:xfrm>
-          <a:prstGeom prst="roundRect">
-            <a:avLst>
-              <a:gd name="adj" fmla="val 7500"/>
-            </a:avLst>
-          </a:prstGeom>
-          <a:solidFill>
-            <a:schemeClr val="bg2"/>
-          </a:solidFill>
-          <a:ln/>
-        </p:spPr>
-      </p:sp>
-      <p:sp>
-        <p:nvSpPr>
-          <p:cNvPr id="41" name="Text 32"/>
-          <p:cNvSpPr txBox="1"/>
-          <p:nvPr/>
-        </p:nvSpPr>
-        <p:spPr>
-          <a:xfrm>
-            <a:off x="9372600" y="3730752"/>
-            <a:ext cx="1737360" cy="347472"/>
-          </a:xfrm>
-          <a:prstGeom prst="rect">
-            <a:avLst/>
-          </a:prstGeom>
-          <a:noFill/>
-          <a:ln/>
-        </p:spPr>
-        <p:txBody>
-          <a:bodyPr wrap="square" lIns="0" tIns="0" rIns="0" bIns="0" rtlCol="0" anchor="t"/>
-          <a:lstStyle/>
-          <a:p>
-            <a:pPr indent="0" marL="0">
-              <a:buNone/>
-            </a:pPr>
-            <a:r>
-              <a:rPr lang="en-GB" altLang="en-US" sz="1800" b="1" dirty="0">
-                <a:solidFill>
-                  <a:schemeClr val="tx1"/>
-                </a:solidFill>
-              </a:rPr>
-              <a:t>18</a:t>
-            </a:r>
-            <a:endParaRPr lang="en-GB" sz="1800" dirty="0"/>
-          </a:p>
-        </p:txBody>
-      </p:sp>
-      <p:sp>
-        <p:nvSpPr>
-          <p:cNvPr id="42" name="Text 33"/>
-          <p:cNvSpPr txBox="1"/>
-          <p:nvPr/>
-        </p:nvSpPr>
-        <p:spPr>
-          <a:xfrm>
-            <a:off x="9372600" y="4096512"/>
-            <a:ext cx="1783080" cy="201168"/>
-          </a:xfrm>
-          <a:prstGeom prst="rect">
-            <a:avLst/>
-          </a:prstGeom>
-          <a:noFill/>
-          <a:ln/>
-        </p:spPr>
-        <p:txBody>
-          <a:bodyPr wrap="square" lIns="0" tIns="0" rIns="0" bIns="0" rtlCol="0" anchor="t"/>
-          <a:lstStyle/>
-          <a:p>
-            <a:pPr indent="0" marL="0">
-              <a:buNone/>
-            </a:pPr>
-            <a:r>
-              <a:rPr lang="en-GB" altLang="en-US" sz="1000" dirty="0">
-                <a:solidFill>
-                  <a:schemeClr val="tx2"/>
-                </a:solidFill>
-              </a:rPr>
-              <a:t>Creators</a:t>
-            </a:r>
-            <a:endParaRPr lang="en-GB" sz="1000" dirty="0"/>
-          </a:p>
-        </p:txBody>
-      </p:sp>
-      <p:sp>
-        <p:nvSpPr>
-          <p:cNvPr id="43" name="Text 34"/>
-          <p:cNvSpPr txBox="1"/>
-          <p:nvPr/>
-        </p:nvSpPr>
-        <p:spPr>
-          <a:xfrm>
-            <a:off x="7086600" y="4572000"/>
-            <a:ext cx="2743200" cy="201168"/>
-          </a:xfrm>
-          <a:prstGeom prst="rect">
-            <a:avLst/>
-          </a:prstGeom>
-          <a:noFill/>
-          <a:ln/>
-        </p:spPr>
-        <p:txBody>
-          <a:bodyPr wrap="square" lIns="0" tIns="0" rIns="0" bIns="0" rtlCol="0" anchor="t"/>
-          <a:lstStyle/>
-          <a:p>
-            <a:pPr indent="0" marL="0">
-              <a:buNone/>
-            </a:pPr>
-            <a:r>
-              <a:rPr lang="en-GB" altLang="en-US" sz="900" b="1" spc="300" kern="0" dirty="0">
-                <a:solidFill>
-                  <a:schemeClr val="accent3"/>
-                </a:solidFill>
-              </a:rPr>
-              <a:t>VIEWS BY PLATFORM</a:t>
-            </a:r>
-            <a:endParaRPr lang="en-GB" sz="900" dirty="0"/>
-          </a:p>
-        </p:txBody>
-      </p:sp>
-      <p:sp>
-        <p:nvSpPr>
-          <p:cNvPr id="44" name="Text 35"/>
-          <p:cNvSpPr txBox="1"/>
-          <p:nvPr/>
-        </p:nvSpPr>
-        <p:spPr>
-          <a:xfrm>
-            <a:off x="7086600" y="4864608"/>
-            <a:ext cx="1005840" cy="219456"/>
-          </a:xfrm>
-          <a:prstGeom prst="rect">
-            <a:avLst/>
-          </a:prstGeom>
-          <a:noFill/>
-          <a:ln/>
-        </p:spPr>
-        <p:txBody>
-          <a:bodyPr wrap="square" lIns="0" tIns="0" rIns="0" bIns="0" rtlCol="0" anchor="ctr"/>
-          <a:lstStyle/>
-          <a:p>
-            <a:pPr indent="0" marL="0">
-              <a:buNone/>
-            </a:pPr>
-            <a:r>
-              <a:rPr lang="en-GB" altLang="en-US" sz="1000" dirty="0">
-                <a:solidFill>
-                  <a:schemeClr val="tx2"/>
-                </a:solidFill>
-              </a:rPr>
-              <a:t>Instagram</a:t>
-            </a:r>
-            <a:endParaRPr lang="en-GB" sz="1000" dirty="0"/>
-          </a:p>
-        </p:txBody>
-      </p:sp>
-      <p:sp>
-        <p:nvSpPr>
-          <p:cNvPr id="45" name="Shape 36"/>
-          <p:cNvSpPr/>
-          <p:nvPr/>
-        </p:nvSpPr>
-        <p:spPr>
-          <a:xfrm>
-            <a:off x="8138160" y="4901184"/>
-            <a:ext cx="2468880" cy="146304"/>
-          </a:xfrm>
-          <a:prstGeom prst="roundRect">
-            <a:avLst>
-              <a:gd name="adj" fmla="val 18750"/>
-            </a:avLst>
-          </a:prstGeom>
-          <a:solidFill>
-            <a:schemeClr val="accent2"/>
-          </a:solidFill>
-          <a:ln/>
-        </p:spPr>
-      </p:sp>
-      <p:sp>
-        <p:nvSpPr>
-          <p:cNvPr id="46" name="Text 37"/>
-          <p:cNvSpPr txBox="1"/>
-          <p:nvPr/>
-        </p:nvSpPr>
-        <p:spPr>
-          <a:xfrm>
-            <a:off x="10698480" y="4864608"/>
-            <a:ext cx="548640" cy="219456"/>
-          </a:xfrm>
-          <a:prstGeom prst="rect">
-            <a:avLst/>
-          </a:prstGeom>
-          <a:noFill/>
-          <a:ln/>
-        </p:spPr>
-        <p:txBody>
-          <a:bodyPr wrap="square" lIns="0" tIns="0" rIns="0" bIns="0" rtlCol="0" anchor="ctr"/>
-          <a:lstStyle/>
-          <a:p>
-            <a:pPr indent="0" marL="0">
-              <a:buNone/>
-            </a:pPr>
-            <a:r>
-              <a:rPr lang="en-GB" altLang="en-US" sz="1000" b="1" dirty="0">
-                <a:solidFill>
-                  <a:schemeClr val="tx1"/>
-                </a:solidFill>
-              </a:rPr>
-              <a:t>52%</a:t>
-            </a:r>
-            <a:endParaRPr lang="en-GB" sz="1000" dirty="0"/>
-          </a:p>
-        </p:txBody>
-      </p:sp>
-      <p:sp>
-        <p:nvSpPr>
-          <p:cNvPr id="47" name="Text 38"/>
-          <p:cNvSpPr txBox="1"/>
-          <p:nvPr/>
-        </p:nvSpPr>
-        <p:spPr>
-          <a:xfrm>
-            <a:off x="7086600" y="5193792"/>
-            <a:ext cx="1005840" cy="219456"/>
-          </a:xfrm>
-          <a:prstGeom prst="rect">
-            <a:avLst/>
-          </a:prstGeom>
-          <a:noFill/>
-          <a:ln/>
-        </p:spPr>
-        <p:txBody>
-          <a:bodyPr wrap="square" lIns="0" tIns="0" rIns="0" bIns="0" rtlCol="0" anchor="ctr"/>
-          <a:lstStyle/>
-          <a:p>
-            <a:pPr indent="0" marL="0">
-              <a:buNone/>
-            </a:pPr>
-            <a:r>
-              <a:rPr lang="en-GB" altLang="en-US" sz="1000" dirty="0">
-                <a:solidFill>
-                  <a:schemeClr val="tx2"/>
-                </a:solidFill>
-              </a:rPr>
-              <a:t>TikTok</a:t>
-            </a:r>
-            <a:endParaRPr lang="en-GB" sz="1000" dirty="0"/>
-          </a:p>
-        </p:txBody>
-      </p:sp>
-      <p:sp>
-        <p:nvSpPr>
-          <p:cNvPr id="48" name="Shape 39"/>
-          <p:cNvSpPr/>
-          <p:nvPr/>
-        </p:nvSpPr>
-        <p:spPr>
-          <a:xfrm>
-            <a:off x="8138160" y="5230368"/>
-            <a:ext cx="1804182" cy="146304"/>
-          </a:xfrm>
-          <a:prstGeom prst="roundRect">
-            <a:avLst>
-              <a:gd name="adj" fmla="val 18750"/>
-            </a:avLst>
-          </a:prstGeom>
-          <a:solidFill>
-            <a:schemeClr val="accent1"/>
-          </a:solidFill>
-          <a:ln/>
-        </p:spPr>
-      </p:sp>
-      <p:sp>
-        <p:nvSpPr>
-          <p:cNvPr id="49" name="Text 40"/>
-          <p:cNvSpPr txBox="1"/>
-          <p:nvPr/>
-        </p:nvSpPr>
-        <p:spPr>
-          <a:xfrm>
-            <a:off x="10033782" y="5193792"/>
-            <a:ext cx="548640" cy="219456"/>
-          </a:xfrm>
-          <a:prstGeom prst="rect">
-            <a:avLst/>
-          </a:prstGeom>
-          <a:noFill/>
-          <a:ln/>
-        </p:spPr>
-        <p:txBody>
-          <a:bodyPr wrap="square" lIns="0" tIns="0" rIns="0" bIns="0" rtlCol="0" anchor="ctr"/>
-          <a:lstStyle/>
-          <a:p>
-            <a:pPr indent="0" marL="0">
-              <a:buNone/>
-            </a:pPr>
-            <a:r>
-              <a:rPr lang="en-GB" altLang="en-US" sz="1000" b="1" dirty="0">
-                <a:solidFill>
-                  <a:schemeClr val="tx1"/>
-                </a:solidFill>
-              </a:rPr>
-              <a:t>38%</a:t>
-            </a:r>
-            <a:endParaRPr lang="en-GB" sz="1000" dirty="0"/>
-          </a:p>
-        </p:txBody>
-      </p:sp>
-      <p:sp>
-        <p:nvSpPr>
-          <p:cNvPr id="50" name="Text 41"/>
-          <p:cNvSpPr txBox="1"/>
-          <p:nvPr/>
-        </p:nvSpPr>
-        <p:spPr>
-          <a:xfrm>
-            <a:off x="7086600" y="5522976"/>
-            <a:ext cx="1005840" cy="219456"/>
-          </a:xfrm>
-          <a:prstGeom prst="rect">
-            <a:avLst/>
-          </a:prstGeom>
-          <a:noFill/>
-          <a:ln/>
-        </p:spPr>
-        <p:txBody>
-          <a:bodyPr wrap="square" lIns="0" tIns="0" rIns="0" bIns="0" rtlCol="0" anchor="ctr"/>
-          <a:lstStyle/>
-          <a:p>
-            <a:pPr indent="0" marL="0">
-              <a:buNone/>
-            </a:pPr>
-            <a:r>
-              <a:rPr lang="en-GB" altLang="en-US" sz="1000" dirty="0">
-                <a:solidFill>
-                  <a:schemeClr val="tx2"/>
-                </a:solidFill>
-              </a:rPr>
-              <a:t>YouTube</a:t>
-            </a:r>
-            <a:endParaRPr lang="en-GB" sz="1000" dirty="0"/>
-          </a:p>
-        </p:txBody>
-      </p:sp>
-      <p:sp>
-        <p:nvSpPr>
-          <p:cNvPr id="51" name="Shape 42"/>
-          <p:cNvSpPr/>
-          <p:nvPr/>
-        </p:nvSpPr>
-        <p:spPr>
-          <a:xfrm>
-            <a:off x="8138160" y="5559552"/>
-            <a:ext cx="474785" cy="146304"/>
-          </a:xfrm>
-          <a:prstGeom prst="roundRect">
-            <a:avLst>
-              <a:gd name="adj" fmla="val 18750"/>
-            </a:avLst>
-          </a:prstGeom>
-          <a:solidFill>
-            <a:schemeClr val="accent1"/>
-          </a:solidFill>
-          <a:ln/>
-        </p:spPr>
-      </p:sp>
-      <p:sp>
-        <p:nvSpPr>
-          <p:cNvPr id="52" name="Text 43"/>
-          <p:cNvSpPr txBox="1"/>
-          <p:nvPr/>
-        </p:nvSpPr>
-        <p:spPr>
-          <a:xfrm>
-            <a:off x="8704385" y="5522976"/>
-            <a:ext cx="548640" cy="219456"/>
-          </a:xfrm>
-          <a:prstGeom prst="rect">
-            <a:avLst/>
-          </a:prstGeom>
-          <a:noFill/>
-          <a:ln/>
-        </p:spPr>
-        <p:txBody>
-          <a:bodyPr wrap="square" lIns="0" tIns="0" rIns="0" bIns="0" rtlCol="0" anchor="ctr"/>
-          <a:lstStyle/>
-          <a:p>
-            <a:pPr indent="0" marL="0">
-              <a:buNone/>
-            </a:pPr>
-            <a:r>
-              <a:rPr lang="en-GB" altLang="en-US" sz="1000" b="1" dirty="0">
-                <a:solidFill>
-                  <a:schemeClr val="tx1"/>
-                </a:solidFill>
-              </a:rPr>
-              <a:t>10%</a:t>
-            </a:r>
-            <a:endParaRPr lang="en-GB" sz="1000" dirty="0"/>
-          </a:p>
-        </p:txBody>
-      </p:sp>
-      <p:sp>
-        <p:nvSpPr>
-          <p:cNvPr id="53" name="Text 44"/>
-          <p:cNvSpPr txBox="1"/>
-          <p:nvPr/>
-        </p:nvSpPr>
-        <p:spPr>
-          <a:xfrm>
-            <a:off x="7086600" y="5779008"/>
-            <a:ext cx="2926080" cy="201168"/>
-          </a:xfrm>
-          <a:prstGeom prst="rect">
-            <a:avLst/>
-          </a:prstGeom>
-          <a:noFill/>
-          <a:ln/>
-        </p:spPr>
-        <p:txBody>
-          <a:bodyPr wrap="square" lIns="0" tIns="0" rIns="0" bIns="0" rtlCol="0" anchor="t"/>
-          <a:lstStyle/>
-          <a:p>
-            <a:pPr indent="0" marL="0">
-              <a:buNone/>
-            </a:pPr>
-            <a:r>
-              <a:rPr lang="en-GB" altLang="en-US" sz="1000" b="1" i="1" dirty="0">
-                <a:solidFill>
-                  <a:schemeClr val="accent3"/>
-                </a:solidFill>
-              </a:rPr>
-              <a:t>Sample layout. Figures are illustrative.</a:t>
-            </a:r>
-            <a:endParaRPr lang="en-GB" sz="1000" dirty="0"/>
-          </a:p>
-        </p:txBody>
-      </p:sp>
-      <p:sp>
-        <p:nvSpPr>
-          <p:cNvPr id="54" name="Text 45"/>
-          <p:cNvSpPr txBox="1"/>
-          <p:nvPr/>
-        </p:nvSpPr>
-        <p:spPr>
-          <a:xfrm>
-            <a:off x="10222992" y="5779008"/>
-            <a:ext cx="1005840" cy="201168"/>
-          </a:xfrm>
-          <a:prstGeom prst="rect">
-            <a:avLst/>
-          </a:prstGeom>
-          <a:noFill/>
-          <a:ln/>
-        </p:spPr>
-        <p:txBody>
-          <a:bodyPr wrap="square" lIns="0" tIns="0" rIns="0" bIns="0" rtlCol="0" anchor="t"/>
-          <a:lstStyle/>
-          <a:p>
-            <a:pPr algn="r" indent="0" marL="0">
-              <a:buNone/>
-            </a:pPr>
-            <a:r>
-              <a:rPr lang="en-GB" altLang="en-US" sz="1000" b="1" u="sng" dirty="0">
-                <a:solidFill>
-                  <a:schemeClr val="accent3"/>
-                </a:solidFill>
-                <a:hlinkClick r:id="rId8" action="ppaction://hlinksldjump" tooltip="Sample report, page 2">
-                  <a:extLst>
-                    <a:ext uri="{A12FA001-AC4F-418D-AE19-62706E023703}">
-                      <ahyp:hlinkClr xmlns:ahyp="http://schemas.microsoft.com/office/drawing/2018/hyperlinkcolor" val="tx"/>
-                    </a:ext>
-                  </a:extLst>
-                </a:hlinkClick>
-              </a:rPr>
-              <a:t>Page 2  →</a:t>
-            </a:r>
-            <a:endParaRPr lang="en-GB" sz="1000" dirty="0"/>
+            <a:pPr algn="ctr" indent="0" marL="0">
+              <a:buNone/>
+            </a:pPr>
+            <a:r>
+              <a:rPr lang="en-GB" altLang="en-US" sz="1100" dirty="0">
+                <a:solidFill>
+                  <a:schemeClr val="accent4"/>
+                </a:solidFill>
+              </a:rPr>
+              <a:t>27 and 28 December 2026  ·  Marcory Zone 4</a:t>
+            </a:r>
+            <a:endParaRPr lang="en-GB" sz="1100" dirty="0"/>
           </a:p>
         </p:txBody>
       </p:sp>

--- a/proposition-deck/AToure Mother Africa Festival Proposal.pptx
+++ b/proposition-deck/AToure Mother Africa Festival Proposal.pptx
@@ -118,50 +118,50 @@
   <p:extLst>
     <p:ext uri="{521415D9-36F7-43E2-AB2F-B90AF26B5E84}">
       <p14:sectionLst xmlns:p14="http://schemas.microsoft.com/office/powerpoint/2010/main">
-        <p14:section name="Opening" id="{80000311-732c-2d10-74c1-8efbadcfd056}">
+        <p14:section name="Opening" id="{380a37e7-f4f1-a850-bd9c-f4e641fbccc8}">
           <p14:sldIdLst>
             <p14:sldId id="256"/>
           </p14:sldIdLst>
         </p14:section>
-        <p14:section name="Where we stand" id="{1663daec-388d-495c-fe94-427393a3f80f}">
+        <p14:section name="Where we stand" id="{0bb156a8-2274-c3c6-0544-a10804c3d700}">
           <p14:sldIdLst>
             <p14:sldId id="257"/>
             <p14:sldId id="258"/>
           </p14:sldIdLst>
         </p14:section>
-        <p14:section name="The AToure answer" id="{c4371925-ff2f-1cea-2456-8ca85570c1b7}">
+        <p14:section name="The AToure answer" id="{16f5454e-abac-c531-4c45-582d39c208de}">
           <p14:sldIdLst>
             <p14:sldId id="259"/>
             <p14:sldId id="260"/>
           </p14:sldIdLst>
         </p14:section>
-        <p14:section name="Visibility" id="{c4edc138-bade-a0e0-46d3-34e86f8c404c}">
+        <p14:section name="Visibility" id="{c4255278-f614-1b78-5300-959afaf00ab5}">
           <p14:sldIdLst>
             <p14:sldId id="261"/>
             <p14:sldId id="262"/>
           </p14:sldIdLst>
         </p14:section>
-        <p14:section name="The visibility report" id="{5dda36f6-aa59-b648-bb8b-fadc0856c663}">
+        <p14:section name="The visibility report" id="{f6165aa1-aa15-6176-96fe-583225500903}">
           <p14:sldIdLst>
             <p14:sldId id="263"/>
           </p14:sldIdLst>
         </p14:section>
-        <p14:section name="The proposal" id="{f715338a-5bd7-82c4-3c5f-fc8150f012a6}">
+        <p14:section name="The proposal" id="{dd1f0347-5f57-3449-8350-29d684f4ca99}">
           <p14:sldIdLst>
             <p14:sldId id="264"/>
           </p14:sldIdLst>
         </p14:section>
-        <p14:section name="Proof" id="{6149dafd-314a-ad9b-edce-93772ad636da}">
+        <p14:section name="Proof" id="{d67804b5-9706-a2a1-cc2e-119bf0c6f9b1}">
           <p14:sldIdLst>
             <p14:sldId id="265"/>
           </p14:sldIdLst>
         </p14:section>
-        <p14:section name="The ask" id="{1f219f9a-85e9-adac-4f90-dd4e91e6f4aa}">
+        <p14:section name="The ask" id="{5c094c9b-ca54-cf73-1f1a-d67fcbca994a}">
           <p14:sldIdLst>
             <p14:sldId id="266"/>
           </p14:sldIdLst>
         </p14:section>
-        <p14:section name="Appendix" id="{9394e37a-130a-0729-3c1f-061fea9af12c}">
+        <p14:section name="Appendix" id="{17e873f7-0897-60f2-1852-3d6b24924842}">
           <p14:sldIdLst>
             <p14:sldId id="267"/>
           </p14:sldIdLst>
@@ -570,7 +570,7 @@
           <a:p>
             <a:r>
               <a:rPr lang="en-US" dirty="0"/>
-              <a:t>Thank the Mother Africa team for the time. This proposal is about one thing: making the visibility that creators bring to the festival provable, so the festival can show it to sponsors. Everything on the next slide comes from the festival’s own posters and press material, so ask the team to correct anything we have wrong.</a:t>
+              <a:t>Thank the Mother Africa team for the time. This proposal is about one thing: making the visibility that creators bring to the festival provable, so the festival can show it to sponsors. Everything on the next slide comes from the festival’s own posters and press material, so ask the team to correct anything we have wrong. The pictures on the cover and on slides 5, 6 and 9 are illustrations, not photographs of the festival.</a:t>
             </a:r>
             <a:endParaRPr lang="en-US" dirty="0"/>
           </a:p>
@@ -1274,7 +1274,7 @@
           <a:p>
             <a:r>
               <a:rPr lang="en-US" dirty="0"/>
-              <a:t>Visibility comes in three waves. The build up runs about five weeks and has one job: sell tickets. The two festival nights are about live reach, making people who are not there wish they were. The afterglow keeps Mother Africa in feeds into January and gives sponsors content to point to. If the festival plans a 2027 announcement, the afterglow is where it lands.</a:t>
+              <a:t>Visibility comes in three waves. The build up runs about five weeks and has one job: sell tickets. The two festival nights are about live reach, making people who are not there wish they were. The afterglow keeps Mother Africa in feeds into January and gives sponsors content to point to. If the festival plans a 2027 announcement, the afterglow is where it lands. Every wave sits in one content calendar, approved by the festival before anything goes live. The pictures are illustrations.</a:t>
             </a:r>
             <a:endParaRPr lang="en-US" dirty="0"/>
           </a:p>
@@ -1693,7 +1693,7 @@
         <p:spPr>
           <a:xfrm>
             <a:off x="548640" y="2377440"/>
-            <a:ext cx="6949440" cy="1600200"/>
+            <a:ext cx="4846320" cy="1600200"/>
           </a:xfrm>
           <a:prstGeom prst="rect">
             <a:avLst/>
@@ -1709,7 +1709,7 @@
                 <a:spcPct val="95000"/>
               </a:lnSpc>
               <a:buNone/>
-              <a:defRPr lang="en-US" sz="5000" dirty="0">
+              <a:defRPr lang="en-US" sz="4600" dirty="0">
                 <a:solidFill>
                   <a:schemeClr val="bg1"/>
                 </a:solidFill>
@@ -1723,7 +1723,7 @@
               </a:lnSpc>
               <a:buNone/>
             </a:pPr>
-            <a:endParaRPr lang="en-US" sz="5000" dirty="0"/>
+            <a:endParaRPr lang="en-US" sz="4600" dirty="0"/>
           </a:p>
         </p:txBody>
       </p:sp>
@@ -3034,7 +3034,7 @@
       </p:grpSpPr>
       <p:pic>
         <p:nvPicPr>
-          <p:cNvPr id="2" name="Background stripes" descr="/home/user/Mother-Africa/proposition-deck/build/assets/stripes.png">    </p:cNvPr>
+          <p:cNvPr id="2" name="Photo ai_phone" descr="Illustration: a festival goer films the stage on her phone, among a crowd of raised phones">    </p:cNvPr>
           <p:cNvPicPr>
             <a:picLocks noChangeAspect="1"/>
           </p:cNvPicPr>
@@ -3048,39 +3048,17 @@
         </p:blipFill>
         <p:spPr>
           <a:xfrm>
-            <a:off x="0" y="0"/>
-            <a:ext cx="12191695" cy="6858000"/>
+            <a:off x="0" y="-634898"/>
+            <a:ext cx="12191695" cy="8127797"/>
           </a:xfrm>
           <a:prstGeom prst="rect">
             <a:avLst/>
           </a:prstGeom>
         </p:spPr>
       </p:pic>
-      <p:sp>
-        <p:nvSpPr>
-          <p:cNvPr id="3" name="Shape 0"/>
-          <p:cNvSpPr/>
-          <p:nvPr/>
-        </p:nvSpPr>
-        <p:spPr>
-          <a:xfrm>
-            <a:off x="8362372" y="1472184"/>
-            <a:ext cx="3134380" cy="4206240"/>
-          </a:xfrm>
-          <a:prstGeom prst="rect">
-            <a:avLst/>
-          </a:prstGeom>
-          <a:ln w="15875">
-            <a:solidFill>
-              <a:schemeClr val="accent1"/>
-            </a:solidFill>
-            <a:prstDash val="solid"/>
-          </a:ln>
-        </p:spPr>
-      </p:sp>
       <p:pic>
         <p:nvPicPr>
-          <p:cNvPr id="4" name="Photo poster2026" descr="Mother Africa Festival 2026 poster: Davido, 27 and 28 December, Marcory Zone 4, Abidjan, 5th edition anniversary">    </p:cNvPr>
+          <p:cNvPr id="3" name="Fade overlay" descr="preencoded.png">    </p:cNvPr>
           <p:cNvPicPr>
             <a:picLocks noChangeAspect="1"/>
           </p:cNvPicPr>
@@ -3094,152 +3072,17 @@
         </p:blipFill>
         <p:spPr>
           <a:xfrm>
-            <a:off x="8508676" y="1325880"/>
-            <a:ext cx="3134380" cy="4206240"/>
+            <a:off x="0" y="0"/>
+            <a:ext cx="6949440" cy="6858000"/>
           </a:xfrm>
           <a:prstGeom prst="rect">
             <a:avLst/>
           </a:prstGeom>
         </p:spPr>
       </p:pic>
-      <p:sp>
-        <p:nvSpPr>
-          <p:cNvPr id="5" name="Text 0"/>
-          <p:cNvSpPr/>
-          <p:nvPr>
-            <p:ph idx="100" type="title" hasCustomPrompt="1"/>
-          </p:nvPr>
-        </p:nvSpPr>
-        <p:spPr>
-          <a:xfrm>
-            <a:off x="548640" y="2377440"/>
-            <a:ext cx="6949440" cy="1600200"/>
-          </a:xfrm>
-          <a:prstGeom prst="rect">
-            <a:avLst/>
-          </a:prstGeom>
-          <a:noFill/>
-          <a:ln/>
-        </p:spPr>
-        <p:txBody>
-          <a:bodyPr wrap="square" lIns="0" tIns="0" rIns="0" bIns="0" rtlCol="0" anchor="t"/>
-          <a:lstStyle/>
-          <a:p>
-            <a:pPr algn="l" indent="0" marL="0">
-              <a:lnSpc>
-                <a:spcPct val="95000"/>
-              </a:lnSpc>
-              <a:buNone/>
-            </a:pPr>
-            <a:r>
-              <a:rPr lang="en-GB" altLang="en-US" sz="5000" dirty="0">
-                <a:solidFill>
-                  <a:schemeClr val="bg1"/>
-                </a:solidFill>
-              </a:rPr>
-              <a:t>Maximising Mother Africa visibility</a:t>
-            </a:r>
-            <a:endParaRPr lang="en-GB" sz="5000" dirty="0"/>
-          </a:p>
-        </p:txBody>
-      </p:sp>
-      <p:sp>
-        <p:nvSpPr>
-          <p:cNvPr id="6" name="Text 0"/>
-          <p:cNvSpPr/>
-          <p:nvPr>
-            <p:ph idx="101" type="body" hasCustomPrompt="1"/>
-          </p:nvPr>
-        </p:nvSpPr>
-        <p:spPr>
-          <a:xfrm>
-            <a:off x="548640" y="4206240"/>
-            <a:ext cx="5760720" cy="1371600"/>
-          </a:xfrm>
-          <a:prstGeom prst="rect">
-            <a:avLst/>
-          </a:prstGeom>
-          <a:noFill/>
-          <a:ln/>
-        </p:spPr>
-        <p:txBody>
-          <a:bodyPr wrap="square" lIns="0" tIns="0" rIns="0" bIns="0" rtlCol="0" anchor="t"/>
-          <a:lstStyle/>
-          <a:p>
-            <a:pPr algn="l" indent="0" marL="0">
-              <a:lnSpc>
-                <a:spcPct val="115000"/>
-              </a:lnSpc>
-              <a:buNone/>
-            </a:pPr>
-            <a:r>
-              <a:rPr lang="en-GB" altLang="en-US" sz="1600" dirty="0">
-                <a:solidFill>
-                  <a:schemeClr val="accent5"/>
-                </a:solidFill>
-              </a:rPr>
-              <a:t>A proposal for the 5th edition of Mother Africa Festival: talent access, creator management on the ground and one visibility report.</a:t>
-            </a:r>
-            <a:endParaRPr lang="en-GB" sz="1600" dirty="0"/>
-          </a:p>
-          <a:p>
-            <a:pPr algn="l" indent="0" marL="0">
-              <a:lnSpc>
-                <a:spcPct val="115000"/>
-              </a:lnSpc>
-              <a:buNone/>
-            </a:pPr>
-            <a:r>
-              <a:rPr lang="en-GB" altLang="en-US" sz="1600" dirty="0">
-                <a:solidFill>
-                  <a:schemeClr val="accent5"/>
-                </a:solidFill>
-              </a:rPr>
-              <a:t>27 and 28 December 2026, Marcory Zone 4, Abidjan.</a:t>
-            </a:r>
-            <a:endParaRPr lang="en-GB" sz="1600" dirty="0"/>
-          </a:p>
-        </p:txBody>
-      </p:sp>
-      <p:sp>
-        <p:nvSpPr>
-          <p:cNvPr id="8" name="Text 3"/>
-          <p:cNvSpPr txBox="1"/>
-          <p:nvPr/>
-        </p:nvSpPr>
-        <p:spPr>
-          <a:xfrm>
-            <a:off x="548640" y="411480"/>
-            <a:ext cx="3657600" cy="237744"/>
-          </a:xfrm>
-          <a:prstGeom prst="rect">
-            <a:avLst/>
-          </a:prstGeom>
-          <a:noFill/>
-          <a:ln/>
-        </p:spPr>
-        <p:txBody>
-          <a:bodyPr wrap="square" lIns="0" tIns="0" rIns="0" bIns="0" rtlCol="0" anchor="t"/>
-          <a:lstStyle/>
-          <a:p>
-            <a:pPr indent="0" marL="0">
-              <a:buNone/>
-            </a:pPr>
-            <a:r>
-              <a:rPr lang="en-GB" altLang="en-US" sz="1000" dirty="0">
-                <a:solidFill>
-                  <a:schemeClr val="accent5"/>
-                </a:solidFill>
-              </a:rPr>
-              <a:t>atoureconsulting.com</a:t>
-            </a:r>
-            <a:endParaRPr lang="en-GB" sz="1000" dirty="0"/>
-          </a:p>
-        </p:txBody>
-      </p:sp>
       <p:pic>
         <p:nvPicPr>
-          <p:cNvPr id="9" name="Image 2" descr="AToure Management &amp; Consulting">    </p:cNvPr>
+          <p:cNvPr id="4" name="Fade overlay" descr="preencoded.png">    </p:cNvPr>
           <p:cNvPicPr>
             <a:picLocks noChangeAspect="1"/>
           </p:cNvPicPr>
@@ -3253,8 +3096,8 @@
         </p:blipFill>
         <p:spPr>
           <a:xfrm>
-            <a:off x="548640" y="1371600"/>
-            <a:ext cx="2377440" cy="380390"/>
+            <a:off x="0" y="4846320"/>
+            <a:ext cx="12191695" cy="2011680"/>
           </a:xfrm>
           <a:prstGeom prst="rect">
             <a:avLst/>
@@ -3263,43 +3106,84 @@
       </p:pic>
       <p:sp>
         <p:nvSpPr>
-          <p:cNvPr id="10" name="Text 4"/>
-          <p:cNvSpPr txBox="1"/>
-          <p:nvPr/>
-        </p:nvSpPr>
-        <p:spPr>
-          <a:xfrm>
-            <a:off x="3017520" y="1261872"/>
-            <a:ext cx="365760" cy="365760"/>
-          </a:xfrm>
-          <a:prstGeom prst="rect">
-            <a:avLst/>
-          </a:prstGeom>
-          <a:noFill/>
-          <a:ln/>
-        </p:spPr>
-        <p:txBody>
-          <a:bodyPr wrap="square" lIns="0" tIns="0" rIns="0" bIns="0" rtlCol="0" anchor="ctr"/>
-          <a:lstStyle/>
-          <a:p>
-            <a:pPr algn="ctr" indent="0" marL="0">
-              <a:buNone/>
-            </a:pPr>
-            <a:r>
-              <a:rPr lang="en-GB" altLang="en-US" sz="2000" dirty="0">
-                <a:solidFill>
-                  <a:schemeClr val="accent1"/>
-                </a:solidFill>
-              </a:rPr>
-              <a:t>×</a:t>
-            </a:r>
-            <a:endParaRPr lang="en-GB" sz="2000" dirty="0"/>
+          <p:cNvPr id="5" name="Text 0"/>
+          <p:cNvSpPr/>
+          <p:nvPr>
+            <p:ph idx="100" type="title" hasCustomPrompt="1"/>
+          </p:nvPr>
+        </p:nvSpPr>
+        <p:spPr>
+          <a:xfrm>
+            <a:off x="548640" y="2377440"/>
+            <a:ext cx="4846320" cy="1600200"/>
+          </a:xfrm>
+          <a:prstGeom prst="rect">
+            <a:avLst/>
+          </a:prstGeom>
+          <a:noFill/>
+          <a:ln/>
+        </p:spPr>
+        <p:txBody>
+          <a:bodyPr wrap="square" lIns="0" tIns="0" rIns="0" bIns="0" rtlCol="0" anchor="t"/>
+          <a:lstStyle/>
+          <a:p>
+            <a:pPr algn="l" indent="0" marL="0">
+              <a:lnSpc>
+                <a:spcPct val="95000"/>
+              </a:lnSpc>
+              <a:buNone/>
+            </a:pPr>
+            <a:r>
+              <a:rPr lang="en-GB" altLang="en-US" sz="4600" dirty="0">
+                <a:solidFill>
+                  <a:schemeClr val="bg1"/>
+                </a:solidFill>
+              </a:rPr>
+              <a:t>Maximising Mother Africa visibility</a:t>
+            </a:r>
+            <a:endParaRPr lang="en-GB" sz="4600" dirty="0"/>
+          </a:p>
+        </p:txBody>
+      </p:sp>
+      <p:sp>
+        <p:nvSpPr>
+          <p:cNvPr id="7" name="Text 1"/>
+          <p:cNvSpPr txBox="1"/>
+          <p:nvPr/>
+        </p:nvSpPr>
+        <p:spPr>
+          <a:xfrm>
+            <a:off x="548640" y="411480"/>
+            <a:ext cx="3657600" cy="237744"/>
+          </a:xfrm>
+          <a:prstGeom prst="rect">
+            <a:avLst/>
+          </a:prstGeom>
+          <a:noFill/>
+          <a:ln/>
+        </p:spPr>
+        <p:txBody>
+          <a:bodyPr wrap="square" lIns="0" tIns="0" rIns="0" bIns="0" rtlCol="0" anchor="t"/>
+          <a:lstStyle/>
+          <a:p>
+            <a:pPr indent="0" marL="0">
+              <a:buNone/>
+            </a:pPr>
+            <a:r>
+              <a:rPr lang="en-GB" altLang="en-US" sz="1000" dirty="0">
+                <a:solidFill>
+                  <a:schemeClr val="accent5"/>
+                </a:solidFill>
+              </a:rPr>
+              <a:t>atoureconsulting.com</a:t>
+            </a:r>
+            <a:endParaRPr lang="en-GB" sz="1000" dirty="0"/>
           </a:p>
         </p:txBody>
       </p:sp>
       <p:pic>
         <p:nvPicPr>
-          <p:cNvPr id="11" name="Image 3" descr="Mother Africa Festival">    </p:cNvPr>
+          <p:cNvPr id="8" name="Image 3" descr="AToure Management &amp; Consulting">    </p:cNvPr>
           <p:cNvPicPr>
             <a:picLocks noChangeAspect="1"/>
           </p:cNvPicPr>
@@ -3313,6 +3197,66 @@
         </p:blipFill>
         <p:spPr>
           <a:xfrm>
+            <a:off x="548640" y="1371600"/>
+            <a:ext cx="2377440" cy="380390"/>
+          </a:xfrm>
+          <a:prstGeom prst="rect">
+            <a:avLst/>
+          </a:prstGeom>
+        </p:spPr>
+      </p:pic>
+      <p:sp>
+        <p:nvSpPr>
+          <p:cNvPr id="9" name="Text 2"/>
+          <p:cNvSpPr txBox="1"/>
+          <p:nvPr/>
+        </p:nvSpPr>
+        <p:spPr>
+          <a:xfrm>
+            <a:off x="3017520" y="1261872"/>
+            <a:ext cx="365760" cy="365760"/>
+          </a:xfrm>
+          <a:prstGeom prst="rect">
+            <a:avLst/>
+          </a:prstGeom>
+          <a:noFill/>
+          <a:ln/>
+        </p:spPr>
+        <p:txBody>
+          <a:bodyPr wrap="square" lIns="0" tIns="0" rIns="0" bIns="0" rtlCol="0" anchor="ctr"/>
+          <a:lstStyle/>
+          <a:p>
+            <a:pPr algn="ctr" indent="0" marL="0">
+              <a:buNone/>
+            </a:pPr>
+            <a:r>
+              <a:rPr lang="en-GB" altLang="en-US" sz="2000" dirty="0">
+                <a:solidFill>
+                  <a:schemeClr val="accent1"/>
+                </a:solidFill>
+              </a:rPr>
+              <a:t>×</a:t>
+            </a:r>
+            <a:endParaRPr lang="en-GB" sz="2000" dirty="0"/>
+          </a:p>
+        </p:txBody>
+      </p:sp>
+      <p:pic>
+        <p:nvPicPr>
+          <p:cNvPr id="10" name="Image 4" descr="Mother Africa Festival">    </p:cNvPr>
+          <p:cNvPicPr>
+            <a:picLocks noChangeAspect="1"/>
+          </p:cNvPicPr>
+          <p:nvPr/>
+        </p:nvPicPr>
+        <p:blipFill>
+          <a:blip r:embed="rId5"/>
+          <a:stretch>
+            <a:fillRect/>
+          </a:stretch>
+        </p:blipFill>
+        <p:spPr>
+          <a:xfrm>
             <a:off x="3474720" y="1005840"/>
             <a:ext cx="1224254" cy="868680"/>
           </a:xfrm>
@@ -3323,7 +3267,82 @@
       </p:pic>
       <p:sp>
         <p:nvSpPr>
-          <p:cNvPr id="12" name="Shape 5"/>
+          <p:cNvPr id="11" name="Text 3"/>
+          <p:cNvSpPr txBox="1"/>
+          <p:nvPr/>
+        </p:nvSpPr>
+        <p:spPr>
+          <a:xfrm>
+            <a:off x="548640" y="4224528"/>
+            <a:ext cx="4480560" cy="868680"/>
+          </a:xfrm>
+          <a:prstGeom prst="rect">
+            <a:avLst/>
+          </a:prstGeom>
+          <a:noFill/>
+          <a:ln/>
+        </p:spPr>
+        <p:txBody>
+          <a:bodyPr wrap="square" lIns="0" tIns="0" rIns="0" bIns="0" rtlCol="0" anchor="t"/>
+          <a:lstStyle/>
+          <a:p>
+            <a:pPr indent="0" marL="0">
+              <a:lnSpc>
+                <a:spcPct val="115000"/>
+              </a:lnSpc>
+              <a:buNone/>
+            </a:pPr>
+            <a:r>
+              <a:rPr lang="en-GB" altLang="en-US" sz="1500" dirty="0">
+                <a:solidFill>
+                  <a:schemeClr val="bg1"/>
+                </a:solidFill>
+              </a:rPr>
+              <a:t>A proposal for the 5th edition of Mother Africa Festival: talent access, creator management on the ground and one visibility report.</a:t>
+            </a:r>
+            <a:endParaRPr lang="en-GB" sz="1500" dirty="0"/>
+          </a:p>
+        </p:txBody>
+      </p:sp>
+      <p:sp>
+        <p:nvSpPr>
+          <p:cNvPr id="12" name="Text 4"/>
+          <p:cNvSpPr txBox="1"/>
+          <p:nvPr/>
+        </p:nvSpPr>
+        <p:spPr>
+          <a:xfrm>
+            <a:off x="548640" y="5138928"/>
+            <a:ext cx="4480560" cy="274320"/>
+          </a:xfrm>
+          <a:prstGeom prst="rect">
+            <a:avLst/>
+          </a:prstGeom>
+          <a:noFill/>
+          <a:ln/>
+        </p:spPr>
+        <p:txBody>
+          <a:bodyPr wrap="square" lIns="0" tIns="0" rIns="0" bIns="0" rtlCol="0" anchor="t"/>
+          <a:lstStyle/>
+          <a:p>
+            <a:pPr indent="0" marL="0">
+              <a:buNone/>
+            </a:pPr>
+            <a:r>
+              <a:rPr lang="en-GB" altLang="en-US" sz="1500" b="1" dirty="0">
+                <a:solidFill>
+                  <a:schemeClr val="accent4"/>
+                </a:solidFill>
+              </a:rPr>
+              <a:t>27 and 28 December 2026, Marcory Zone 4, Abidjan.</a:t>
+            </a:r>
+            <a:endParaRPr lang="en-GB" sz="1500" dirty="0"/>
+          </a:p>
+        </p:txBody>
+      </p:sp>
+      <p:sp>
+        <p:nvSpPr>
+          <p:cNvPr id="13" name="Shape 5"/>
           <p:cNvSpPr/>
           <p:nvPr/>
         </p:nvSpPr>
@@ -3346,7 +3365,7 @@
       </p:sp>
       <p:sp>
         <p:nvSpPr>
-          <p:cNvPr id="13" name="Text 6"/>
+          <p:cNvPr id="14" name="Text 6"/>
           <p:cNvSpPr txBox="1"/>
           <p:nvPr/>
         </p:nvSpPr>
@@ -3377,6 +3396,39 @@
               <a:t>Prepared by Baba Touré, Director  ·  30.10.2026</a:t>
             </a:r>
             <a:endParaRPr lang="en-GB" sz="1200" dirty="0"/>
+          </a:p>
+        </p:txBody>
+      </p:sp>
+      <p:sp>
+        <p:nvSpPr>
+          <p:cNvPr id="15" name="Text 0"/>
+          <p:cNvSpPr/>
+          <p:nvPr>
+            <p:ph idx="101" type="body" hasCustomPrompt="1"/>
+          </p:nvPr>
+        </p:nvSpPr>
+        <p:spPr>
+          <a:xfrm>
+            <a:off x="548640" y="4206240"/>
+            <a:ext cx="5760720" cy="1371600"/>
+          </a:xfrm>
+          <a:prstGeom prst="rect">
+            <a:avLst/>
+          </a:prstGeom>
+          <a:noFill/>
+          <a:ln/>
+        </p:spPr>
+        <p:txBody>
+          <a:bodyPr wrap="square" lIns="0" tIns="0" rIns="0" bIns="0" rtlCol="0" anchor="t"/>
+          <a:lstStyle/>
+          <a:p>
+            <a:pPr algn="l" indent="0" marL="0">
+              <a:lnSpc>
+                <a:spcPct val="115000"/>
+              </a:lnSpc>
+              <a:buNone/>
+            </a:pPr>
+            <a:endParaRPr lang="en-US" sz="1600" dirty="0"/>
           </a:p>
         </p:txBody>
       </p:sp>
@@ -14894,7 +14946,7 @@
         <p:spPr>
           <a:xfrm>
             <a:off x="548640" y="4709160"/>
-            <a:ext cx="5486400" cy="1463040"/>
+            <a:ext cx="4572000" cy="1463040"/>
           </a:xfrm>
           <a:prstGeom prst="roundRect">
             <a:avLst>
@@ -14916,7 +14968,7 @@
         <p:spPr>
           <a:xfrm>
             <a:off x="822960" y="4846320"/>
-            <a:ext cx="4572000" cy="256032"/>
+            <a:ext cx="4023360" cy="256032"/>
           </a:xfrm>
           <a:prstGeom prst="rect">
             <a:avLst/>
@@ -14952,7 +15004,7 @@
         <p:spPr>
           <a:xfrm>
             <a:off x="822960" y="5138928"/>
-            <a:ext cx="5029200" cy="548640"/>
+            <a:ext cx="4160520" cy="548640"/>
           </a:xfrm>
           <a:prstGeom prst="rect">
             <a:avLst/>
@@ -14972,14 +15024,14 @@
               <a:buChar char="•"/>
             </a:pPr>
             <a:r>
-              <a:rPr lang="en-GB" altLang="en-US" sz="1300" dirty="0">
+              <a:rPr lang="en-GB" altLang="en-US" sz="1200" dirty="0">
                 <a:solidFill>
                   <a:schemeClr val="bg1"/>
                 </a:solidFill>
               </a:rPr>
-              <a:t>Every creator checked against the brief within 48 hours</a:t>
-            </a:r>
-            <a:endParaRPr lang="en-GB" sz="1300" dirty="0"/>
+              <a:t>Every creator checked against the brief in 48 hours</a:t>
+            </a:r>
+            <a:endParaRPr lang="en-GB" sz="1200" dirty="0"/>
           </a:p>
           <a:p>
             <a:pPr marL="177800" indent="-177800">
@@ -14990,14 +15042,14 @@
               <a:buChar char="•"/>
             </a:pPr>
             <a:r>
-              <a:rPr lang="en-GB" altLang="en-US" sz="1300" dirty="0">
+              <a:rPr lang="en-GB" altLang="en-US" sz="1200" dirty="0">
                 <a:solidFill>
                   <a:schemeClr val="bg1"/>
                 </a:solidFill>
               </a:rPr>
-              <a:t>Analytics collected by screen recording, not screenshots</a:t>
-            </a:r>
-            <a:endParaRPr lang="en-GB" sz="1300" dirty="0"/>
+              <a:t>Analytics collected by screen recording</a:t>
+            </a:r>
+            <a:endParaRPr lang="en-GB" sz="1200" dirty="0"/>
           </a:p>
         </p:txBody>
       </p:sp>
@@ -15039,7 +15091,7 @@
       </p:sp>
       <p:pic>
         <p:nvPicPr>
-          <p:cNvPr id="46" name="Image 2" descr="preencoded.png">    </p:cNvPr>
+          <p:cNvPr id="46" name="Photo ai_briefing" descr="Illustration: a production manager briefs creators with a tablet backstage before the doors open">    </p:cNvPr>
           <p:cNvPicPr>
             <a:picLocks noChangeAspect="1"/>
           </p:cNvPicPr>
@@ -15053,53 +15105,17 @@
         </p:blipFill>
         <p:spPr>
           <a:xfrm>
-            <a:off x="6355080" y="4818888"/>
-            <a:ext cx="274320" cy="274320"/>
+            <a:off x="5394960" y="4709160"/>
+            <a:ext cx="2599578" cy="1463040"/>
           </a:xfrm>
           <a:prstGeom prst="rect">
             <a:avLst/>
           </a:prstGeom>
         </p:spPr>
       </p:pic>
-      <p:sp>
-        <p:nvSpPr>
-          <p:cNvPr id="47" name="Text 41"/>
-          <p:cNvSpPr txBox="1"/>
-          <p:nvPr/>
-        </p:nvSpPr>
-        <p:spPr>
-          <a:xfrm>
-            <a:off x="6766560" y="4800600"/>
-            <a:ext cx="4846320" cy="365760"/>
-          </a:xfrm>
-          <a:prstGeom prst="rect">
-            <a:avLst/>
-          </a:prstGeom>
-          <a:noFill/>
-          <a:ln/>
-        </p:spPr>
-        <p:txBody>
-          <a:bodyPr wrap="square" lIns="0" tIns="0" rIns="0" bIns="0" rtlCol="0" anchor="t"/>
-          <a:lstStyle/>
-          <a:p>
-            <a:pPr indent="0" marL="0">
-              <a:buNone/>
-            </a:pPr>
-            <a:r>
-              <a:rPr lang="en-GB" altLang="en-US" sz="1400" dirty="0">
-                <a:solidFill>
-                  <a:schemeClr val="tx1"/>
-                </a:solidFill>
-              </a:rPr>
-              <a:t>One point of contact for the festival team</a:t>
-            </a:r>
-            <a:endParaRPr lang="en-GB" sz="1400" dirty="0"/>
-          </a:p>
-        </p:txBody>
-      </p:sp>
       <p:pic>
         <p:nvPicPr>
-          <p:cNvPr id="48" name="Image 3" descr="preencoded.png">    </p:cNvPr>
+          <p:cNvPr id="47" name="Image 3" descr="preencoded.png">    </p:cNvPr>
           <p:cNvPicPr>
             <a:picLocks noChangeAspect="1"/>
           </p:cNvPicPr>
@@ -15113,8 +15129,8 @@
         </p:blipFill>
         <p:spPr>
           <a:xfrm>
-            <a:off x="6355080" y="5294376"/>
-            <a:ext cx="274320" cy="274320"/>
+            <a:off x="8268858" y="4727448"/>
+            <a:ext cx="256032" cy="256032"/>
           </a:xfrm>
           <a:prstGeom prst="rect">
             <a:avLst/>
@@ -15123,14 +15139,14 @@
       </p:pic>
       <p:sp>
         <p:nvSpPr>
-          <p:cNvPr id="49" name="Text 42"/>
-          <p:cNvSpPr txBox="1"/>
-          <p:nvPr/>
-        </p:nvSpPr>
-        <p:spPr>
-          <a:xfrm>
-            <a:off x="6766560" y="5276088"/>
-            <a:ext cx="4846320" cy="365760"/>
+          <p:cNvPr id="48" name="Text 41"/>
+          <p:cNvSpPr txBox="1"/>
+          <p:nvPr/>
+        </p:nvSpPr>
+        <p:spPr>
+          <a:xfrm>
+            <a:off x="8634618" y="4709160"/>
+            <a:ext cx="3008437" cy="438912"/>
           </a:xfrm>
           <a:prstGeom prst="rect">
             <a:avLst/>
@@ -15146,20 +15162,20 @@
               <a:buNone/>
             </a:pPr>
             <a:r>
-              <a:rPr lang="en-GB" altLang="en-US" sz="1400" dirty="0">
+              <a:rPr lang="en-GB" altLang="en-US" sz="1250" dirty="0">
                 <a:solidFill>
                   <a:schemeClr val="tx1"/>
                 </a:solidFill>
               </a:rPr>
-              <a:t>A shared tracker of every creator and every post</a:t>
-            </a:r>
-            <a:endParaRPr lang="en-GB" sz="1400" dirty="0"/>
+              <a:t>One point of contact for the festival team</a:t>
+            </a:r>
+            <a:endParaRPr lang="en-GB" sz="1250" dirty="0"/>
           </a:p>
         </p:txBody>
       </p:sp>
       <p:pic>
         <p:nvPicPr>
-          <p:cNvPr id="50" name="Image 4" descr="preencoded.png">    </p:cNvPr>
+          <p:cNvPr id="49" name="Image 4" descr="preencoded.png">    </p:cNvPr>
           <p:cNvPicPr>
             <a:picLocks noChangeAspect="1"/>
           </p:cNvPicPr>
@@ -15173,8 +15189,8 @@
         </p:blipFill>
         <p:spPr>
           <a:xfrm>
-            <a:off x="6355080" y="5769864"/>
-            <a:ext cx="274320" cy="274320"/>
+            <a:off x="8268858" y="5230368"/>
+            <a:ext cx="256032" cy="256032"/>
           </a:xfrm>
           <a:prstGeom prst="rect">
             <a:avLst/>
@@ -15183,14 +15199,14 @@
       </p:pic>
       <p:sp>
         <p:nvSpPr>
-          <p:cNvPr id="51" name="Text 43"/>
-          <p:cNvSpPr txBox="1"/>
-          <p:nvPr/>
-        </p:nvSpPr>
-        <p:spPr>
-          <a:xfrm>
-            <a:off x="6766560" y="5751576"/>
-            <a:ext cx="4846320" cy="365760"/>
+          <p:cNvPr id="50" name="Text 42"/>
+          <p:cNvSpPr txBox="1"/>
+          <p:nvPr/>
+        </p:nvSpPr>
+        <p:spPr>
+          <a:xfrm>
+            <a:off x="8634618" y="5212080"/>
+            <a:ext cx="3008437" cy="438912"/>
           </a:xfrm>
           <a:prstGeom prst="rect">
             <a:avLst/>
@@ -15206,14 +15222,74 @@
               <a:buNone/>
             </a:pPr>
             <a:r>
-              <a:rPr lang="en-GB" altLang="en-US" sz="1400" dirty="0">
+              <a:rPr lang="en-GB" altLang="en-US" sz="1250" dirty="0">
                 <a:solidFill>
                   <a:schemeClr val="tx1"/>
                 </a:solidFill>
               </a:rPr>
+              <a:t>A shared tracker of every creator and every post</a:t>
+            </a:r>
+            <a:endParaRPr lang="en-GB" sz="1250" dirty="0"/>
+          </a:p>
+        </p:txBody>
+      </p:sp>
+      <p:pic>
+        <p:nvPicPr>
+          <p:cNvPr id="51" name="Image 5" descr="preencoded.png">    </p:cNvPr>
+          <p:cNvPicPr>
+            <a:picLocks noChangeAspect="1"/>
+          </p:cNvPicPr>
+          <p:nvPr/>
+        </p:nvPicPr>
+        <p:blipFill>
+          <a:blip r:embed="rId6"/>
+          <a:stretch>
+            <a:fillRect/>
+          </a:stretch>
+        </p:blipFill>
+        <p:spPr>
+          <a:xfrm>
+            <a:off x="8268858" y="5733288"/>
+            <a:ext cx="256032" cy="256032"/>
+          </a:xfrm>
+          <a:prstGeom prst="rect">
+            <a:avLst/>
+          </a:prstGeom>
+        </p:spPr>
+      </p:pic>
+      <p:sp>
+        <p:nvSpPr>
+          <p:cNvPr id="52" name="Text 43"/>
+          <p:cNvSpPr txBox="1"/>
+          <p:nvPr/>
+        </p:nvSpPr>
+        <p:spPr>
+          <a:xfrm>
+            <a:off x="8634618" y="5715000"/>
+            <a:ext cx="3008437" cy="438912"/>
+          </a:xfrm>
+          <a:prstGeom prst="rect">
+            <a:avLst/>
+          </a:prstGeom>
+          <a:noFill/>
+          <a:ln/>
+        </p:spPr>
+        <p:txBody>
+          <a:bodyPr wrap="square" lIns="0" tIns="0" rIns="0" bIns="0" rtlCol="0" anchor="t"/>
+          <a:lstStyle/>
+          <a:p>
+            <a:pPr indent="0" marL="0">
+              <a:buNone/>
+            </a:pPr>
+            <a:r>
+              <a:rPr lang="en-GB" altLang="en-US" sz="1250" dirty="0">
+                <a:solidFill>
+                  <a:schemeClr val="tx1"/>
+                </a:solidFill>
+              </a:rPr>
               <a:t>Brand safety rules agreed with you before anyone posts</a:t>
             </a:r>
-            <a:endParaRPr lang="en-GB" sz="1400" dirty="0"/>
+            <a:endParaRPr lang="en-GB" sz="1250" dirty="0"/>
           </a:p>
         </p:txBody>
       </p:sp>
@@ -15558,12 +15634,12 @@
         </p:nvSpPr>
         <p:spPr>
           <a:xfrm>
-            <a:off x="548640" y="2286000"/>
-            <a:ext cx="4218127" cy="2971800"/>
+            <a:off x="548640" y="2240280"/>
+            <a:ext cx="4218127" cy="3931920"/>
           </a:xfrm>
           <a:prstGeom prst="roundRect">
             <a:avLst>
-              <a:gd name="adj" fmla="val 3077"/>
+              <a:gd name="adj" fmla="val 2326"/>
             </a:avLst>
           </a:prstGeom>
           <a:solidFill>
@@ -15572,15 +15648,39 @@
           <a:ln/>
         </p:spPr>
       </p:sp>
-      <p:sp>
-        <p:nvSpPr>
-          <p:cNvPr id="13" name="Text 7"/>
-          <p:cNvSpPr txBox="1"/>
-          <p:nvPr/>
-        </p:nvSpPr>
-        <p:spPr>
-          <a:xfrm>
-            <a:off x="822960" y="2542032"/>
+      <p:pic>
+        <p:nvPicPr>
+          <p:cNvPr id="13" name="Photo ai_grwm" descr="Illustration: a creator records a get ready with me video before the festival">    </p:cNvPr>
+          <p:cNvPicPr>
+            <a:picLocks noChangeAspect="1"/>
+          </p:cNvPicPr>
+          <p:nvPr/>
+        </p:nvPicPr>
+        <p:blipFill>
+          <a:blip r:embed="rId4"/>
+          <a:stretch>
+            <a:fillRect/>
+          </a:stretch>
+        </p:blipFill>
+        <p:spPr>
+          <a:xfrm>
+            <a:off x="822960" y="2487168"/>
+            <a:ext cx="1783080" cy="1188720"/>
+          </a:xfrm>
+          <a:prstGeom prst="rect">
+            <a:avLst/>
+          </a:prstGeom>
+        </p:spPr>
+      </p:pic>
+      <p:sp>
+        <p:nvSpPr>
+          <p:cNvPr id="14" name="Text 7"/>
+          <p:cNvSpPr txBox="1"/>
+          <p:nvPr/>
+        </p:nvSpPr>
+        <p:spPr>
+          <a:xfrm>
+            <a:off x="822960" y="3822192"/>
             <a:ext cx="3669487" cy="256032"/>
           </a:xfrm>
           <a:prstGeom prst="rect">
@@ -15610,14 +15710,14 @@
       </p:sp>
       <p:sp>
         <p:nvSpPr>
-          <p:cNvPr id="14" name="Text 8"/>
-          <p:cNvSpPr txBox="1"/>
-          <p:nvPr/>
-        </p:nvSpPr>
-        <p:spPr>
-          <a:xfrm>
-            <a:off x="822960" y="2852928"/>
-            <a:ext cx="3669487" cy="457200"/>
+          <p:cNvPr id="15" name="Text 8"/>
+          <p:cNvSpPr txBox="1"/>
+          <p:nvPr/>
+        </p:nvSpPr>
+        <p:spPr>
+          <a:xfrm>
+            <a:off x="822960" y="4069080"/>
+            <a:ext cx="3669487" cy="411480"/>
           </a:xfrm>
           <a:prstGeom prst="rect">
             <a:avLst/>
@@ -15633,7 +15733,7 @@
               <a:buNone/>
             </a:pPr>
             <a:r>
-              <a:rPr lang="en-GB" altLang="en-US" sz="2600" dirty="0">
+              <a:rPr lang="en-GB" altLang="en-US" sz="2400" dirty="0">
                 <a:solidFill>
                   <a:schemeClr val="bg1"/>
                 </a:solidFill>
@@ -15643,20 +15743,20 @@
               </a:rPr>
               <a:t>Build up</a:t>
             </a:r>
-            <a:endParaRPr lang="en-GB" sz="2600" dirty="0"/>
-          </a:p>
-        </p:txBody>
-      </p:sp>
-      <p:sp>
-        <p:nvSpPr>
-          <p:cNvPr id="15" name="Text 9"/>
-          <p:cNvSpPr txBox="1"/>
-          <p:nvPr/>
-        </p:nvSpPr>
-        <p:spPr>
-          <a:xfrm>
-            <a:off x="822960" y="3383280"/>
-            <a:ext cx="3669487" cy="320040"/>
+            <a:endParaRPr lang="en-GB" sz="2400" dirty="0"/>
+          </a:p>
+        </p:txBody>
+      </p:sp>
+      <p:sp>
+        <p:nvSpPr>
+          <p:cNvPr id="16" name="Text 9"/>
+          <p:cNvSpPr txBox="1"/>
+          <p:nvPr/>
+        </p:nvSpPr>
+        <p:spPr>
+          <a:xfrm>
+            <a:off x="822960" y="4526280"/>
+            <a:ext cx="3669487" cy="292608"/>
           </a:xfrm>
           <a:prstGeom prst="rect">
             <a:avLst/>
@@ -15672,27 +15772,27 @@
               <a:buNone/>
             </a:pPr>
             <a:r>
-              <a:rPr lang="en-GB" altLang="en-US" sz="1400" b="1" dirty="0">
+              <a:rPr lang="en-GB" altLang="en-US" sz="1300" b="1" dirty="0">
                 <a:solidFill>
                   <a:schemeClr val="accent4"/>
                 </a:solidFill>
               </a:rPr>
               <a:t>Goal: awareness and ticket sales</a:t>
             </a:r>
-            <a:endParaRPr lang="en-GB" sz="1400" dirty="0"/>
-          </a:p>
-        </p:txBody>
-      </p:sp>
-      <p:sp>
-        <p:nvSpPr>
-          <p:cNvPr id="16" name="Text 10"/>
-          <p:cNvSpPr txBox="1"/>
-          <p:nvPr/>
-        </p:nvSpPr>
-        <p:spPr>
-          <a:xfrm>
-            <a:off x="822960" y="3840480"/>
-            <a:ext cx="3669487" cy="1325880"/>
+            <a:endParaRPr lang="en-GB" sz="1300" dirty="0"/>
+          </a:p>
+        </p:txBody>
+      </p:sp>
+      <p:sp>
+        <p:nvSpPr>
+          <p:cNvPr id="17" name="Text 10"/>
+          <p:cNvSpPr txBox="1"/>
+          <p:nvPr/>
+        </p:nvSpPr>
+        <p:spPr>
+          <a:xfrm>
+            <a:off x="822960" y="4892040"/>
+            <a:ext cx="3669487" cy="1188720"/>
           </a:xfrm>
           <a:prstGeom prst="rect">
             <a:avLst/>
@@ -15706,80 +15806,80 @@
           <a:p>
             <a:pPr marL="177800" indent="-177800">
               <a:spcAft>
-                <a:spcPts val="600"/>
+                <a:spcPts val="400"/>
               </a:spcAft>
               <a:buSzPct val="100000"/>
               <a:buChar char="•"/>
             </a:pPr>
             <a:r>
-              <a:rPr lang="en-GB" altLang="en-US" sz="1300" dirty="0">
+              <a:rPr lang="en-GB" altLang="en-US" sz="1250" dirty="0">
                 <a:solidFill>
                   <a:schemeClr val="accent5"/>
                 </a:solidFill>
               </a:rPr>
               <a:t>Creator lineup announced</a:t>
             </a:r>
-            <a:endParaRPr lang="en-GB" sz="1300" dirty="0"/>
+            <a:endParaRPr lang="en-GB" sz="1250" dirty="0"/>
           </a:p>
           <a:p>
             <a:pPr marL="177800" indent="-177800">
               <a:spcAft>
-                <a:spcPts val="600"/>
+                <a:spcPts val="400"/>
               </a:spcAft>
               <a:buSzPct val="100000"/>
               <a:buChar char="•"/>
             </a:pPr>
             <a:r>
-              <a:rPr lang="en-GB" altLang="en-US" sz="1300" dirty="0">
+              <a:rPr lang="en-GB" altLang="en-US" sz="1250" dirty="0">
                 <a:solidFill>
                   <a:schemeClr val="accent5"/>
                 </a:solidFill>
               </a:rPr>
               <a:t>Davido countdown</a:t>
             </a:r>
-            <a:endParaRPr lang="en-GB" sz="1300" dirty="0"/>
+            <a:endParaRPr lang="en-GB" sz="1250" dirty="0"/>
           </a:p>
           <a:p>
             <a:pPr marL="177800" indent="-177800">
               <a:spcAft>
-                <a:spcPts val="600"/>
+                <a:spcPts val="400"/>
               </a:spcAft>
               <a:buSzPct val="100000"/>
               <a:buChar char="•"/>
             </a:pPr>
             <a:r>
-              <a:rPr lang="en-GB" altLang="en-US" sz="1300" dirty="0">
+              <a:rPr lang="en-GB" altLang="en-US" sz="1250" dirty="0">
                 <a:solidFill>
                   <a:schemeClr val="accent5"/>
                 </a:solidFill>
               </a:rPr>
               <a:t>Weekly ticket pushes with tracked links</a:t>
             </a:r>
-            <a:endParaRPr lang="en-GB" sz="1300" dirty="0"/>
+            <a:endParaRPr lang="en-GB" sz="1250" dirty="0"/>
           </a:p>
           <a:p>
             <a:pPr marL="177800" indent="-177800">
               <a:spcAft>
-                <a:spcPts val="600"/>
+                <a:spcPts val="400"/>
               </a:spcAft>
               <a:buSzPct val="100000"/>
               <a:buChar char="•"/>
             </a:pPr>
             <a:r>
-              <a:rPr lang="en-GB" altLang="en-US" sz="1300" dirty="0">
+              <a:rPr lang="en-GB" altLang="en-US" sz="1250" dirty="0">
                 <a:solidFill>
                   <a:schemeClr val="accent5"/>
                 </a:solidFill>
               </a:rPr>
               <a:t>A last call before Christmas</a:t>
             </a:r>
-            <a:endParaRPr lang="en-GB" sz="1300" dirty="0"/>
-          </a:p>
-        </p:txBody>
-      </p:sp>
-      <p:sp>
-        <p:nvSpPr>
-          <p:cNvPr id="17" name="Shape 11"/>
+            <a:endParaRPr lang="en-GB" sz="1250" dirty="0"/>
+          </a:p>
+        </p:txBody>
+      </p:sp>
+      <p:sp>
+        <p:nvSpPr>
+          <p:cNvPr id="18" name="Shape 11"/>
           <p:cNvSpPr/>
           <p:nvPr/>
         </p:nvSpPr>
@@ -15799,18 +15899,18 @@
       </p:sp>
       <p:sp>
         <p:nvSpPr>
-          <p:cNvPr id="18" name="Shape 12"/>
+          <p:cNvPr id="19" name="Shape 12"/>
           <p:cNvSpPr/>
           <p:nvPr/>
         </p:nvSpPr>
         <p:spPr>
           <a:xfrm>
-            <a:off x="5041087" y="2286000"/>
-            <a:ext cx="3163824" cy="2971800"/>
+            <a:off x="5041087" y="2240280"/>
+            <a:ext cx="3163824" cy="3931920"/>
           </a:xfrm>
           <a:prstGeom prst="roundRect">
             <a:avLst>
-              <a:gd name="adj" fmla="val 3077"/>
+              <a:gd name="adj" fmla="val 2890"/>
             </a:avLst>
           </a:prstGeom>
           <a:solidFill>
@@ -15819,15 +15919,39 @@
           <a:ln/>
         </p:spPr>
       </p:sp>
-      <p:sp>
-        <p:nvSpPr>
-          <p:cNvPr id="19" name="Text 13"/>
-          <p:cNvSpPr txBox="1"/>
-          <p:nvPr/>
-        </p:nvSpPr>
-        <p:spPr>
-          <a:xfrm>
-            <a:off x="5315407" y="2542032"/>
+      <p:pic>
+        <p:nvPicPr>
+          <p:cNvPr id="20" name="Photo ai_floor" descr="Illustration: a creator films himself on a gimbal in the festival crowd">    </p:cNvPr>
+          <p:cNvPicPr>
+            <a:picLocks noChangeAspect="1"/>
+          </p:cNvPicPr>
+          <p:nvPr/>
+        </p:nvPicPr>
+        <p:blipFill>
+          <a:blip r:embed="rId5"/>
+          <a:stretch>
+            <a:fillRect/>
+          </a:stretch>
+        </p:blipFill>
+        <p:spPr>
+          <a:xfrm>
+            <a:off x="5315407" y="2487168"/>
+            <a:ext cx="2114404" cy="1188720"/>
+          </a:xfrm>
+          <a:prstGeom prst="rect">
+            <a:avLst/>
+          </a:prstGeom>
+        </p:spPr>
+      </p:pic>
+      <p:sp>
+        <p:nvSpPr>
+          <p:cNvPr id="21" name="Text 13"/>
+          <p:cNvSpPr txBox="1"/>
+          <p:nvPr/>
+        </p:nvSpPr>
+        <p:spPr>
+          <a:xfrm>
+            <a:off x="5315407" y="3822192"/>
             <a:ext cx="2615184" cy="256032"/>
           </a:xfrm>
           <a:prstGeom prst="rect">
@@ -15857,14 +15981,14 @@
       </p:sp>
       <p:sp>
         <p:nvSpPr>
-          <p:cNvPr id="20" name="Text 14"/>
-          <p:cNvSpPr txBox="1"/>
-          <p:nvPr/>
-        </p:nvSpPr>
-        <p:spPr>
-          <a:xfrm>
-            <a:off x="5315407" y="2852928"/>
-            <a:ext cx="2615184" cy="457200"/>
+          <p:cNvPr id="22" name="Text 14"/>
+          <p:cNvSpPr txBox="1"/>
+          <p:nvPr/>
+        </p:nvSpPr>
+        <p:spPr>
+          <a:xfrm>
+            <a:off x="5315407" y="4069080"/>
+            <a:ext cx="2615184" cy="411480"/>
           </a:xfrm>
           <a:prstGeom prst="rect">
             <a:avLst/>
@@ -15880,7 +16004,7 @@
               <a:buNone/>
             </a:pPr>
             <a:r>
-              <a:rPr lang="en-GB" altLang="en-US" sz="2600" dirty="0">
+              <a:rPr lang="en-GB" altLang="en-US" sz="2400" dirty="0">
                 <a:solidFill>
                   <a:schemeClr val="tx1"/>
                 </a:solidFill>
@@ -15890,20 +16014,20 @@
               </a:rPr>
               <a:t>Festival nights</a:t>
             </a:r>
-            <a:endParaRPr lang="en-GB" sz="2600" dirty="0"/>
-          </a:p>
-        </p:txBody>
-      </p:sp>
-      <p:sp>
-        <p:nvSpPr>
-          <p:cNvPr id="21" name="Text 15"/>
-          <p:cNvSpPr txBox="1"/>
-          <p:nvPr/>
-        </p:nvSpPr>
-        <p:spPr>
-          <a:xfrm>
-            <a:off x="5315407" y="3383280"/>
-            <a:ext cx="2615184" cy="320040"/>
+            <a:endParaRPr lang="en-GB" sz="2400" dirty="0"/>
+          </a:p>
+        </p:txBody>
+      </p:sp>
+      <p:sp>
+        <p:nvSpPr>
+          <p:cNvPr id="23" name="Text 15"/>
+          <p:cNvSpPr txBox="1"/>
+          <p:nvPr/>
+        </p:nvSpPr>
+        <p:spPr>
+          <a:xfrm>
+            <a:off x="5315407" y="4526280"/>
+            <a:ext cx="2615184" cy="292608"/>
           </a:xfrm>
           <a:prstGeom prst="rect">
             <a:avLst/>
@@ -15919,27 +16043,27 @@
               <a:buNone/>
             </a:pPr>
             <a:r>
-              <a:rPr lang="en-GB" altLang="en-US" sz="1400" b="1" dirty="0">
+              <a:rPr lang="en-GB" altLang="en-US" sz="1300" b="1" dirty="0">
                 <a:solidFill>
                   <a:schemeClr val="tx1"/>
                 </a:solidFill>
               </a:rPr>
               <a:t>Goal: live attention</a:t>
             </a:r>
-            <a:endParaRPr lang="en-GB" sz="1400" dirty="0"/>
-          </a:p>
-        </p:txBody>
-      </p:sp>
-      <p:sp>
-        <p:nvSpPr>
-          <p:cNvPr id="22" name="Text 16"/>
-          <p:cNvSpPr txBox="1"/>
-          <p:nvPr/>
-        </p:nvSpPr>
-        <p:spPr>
-          <a:xfrm>
-            <a:off x="5315407" y="3840480"/>
-            <a:ext cx="2615184" cy="1325880"/>
+            <a:endParaRPr lang="en-GB" sz="1300" dirty="0"/>
+          </a:p>
+        </p:txBody>
+      </p:sp>
+      <p:sp>
+        <p:nvSpPr>
+          <p:cNvPr id="24" name="Text 16"/>
+          <p:cNvSpPr txBox="1"/>
+          <p:nvPr/>
+        </p:nvSpPr>
+        <p:spPr>
+          <a:xfrm>
+            <a:off x="5315407" y="4892040"/>
+            <a:ext cx="2615184" cy="1188720"/>
           </a:xfrm>
           <a:prstGeom prst="rect">
             <a:avLst/>
@@ -15953,80 +16077,80 @@
           <a:p>
             <a:pPr marL="177800" indent="-177800">
               <a:spcAft>
-                <a:spcPts val="600"/>
+                <a:spcPts val="400"/>
               </a:spcAft>
               <a:buSzPct val="100000"/>
               <a:buChar char="•"/>
             </a:pPr>
             <a:r>
-              <a:rPr lang="en-GB" altLang="en-US" sz="1300" dirty="0">
+              <a:rPr lang="en-GB" altLang="en-US" sz="1250" dirty="0">
                 <a:solidFill>
                   <a:schemeClr val="tx1"/>
                 </a:solidFill>
               </a:rPr>
               <a:t>Arrivals and festival looks</a:t>
             </a:r>
-            <a:endParaRPr lang="en-GB" sz="1300" dirty="0"/>
+            <a:endParaRPr lang="en-GB" sz="1250" dirty="0"/>
           </a:p>
           <a:p>
             <a:pPr marL="177800" indent="-177800">
               <a:spcAft>
-                <a:spcPts val="600"/>
+                <a:spcPts val="400"/>
               </a:spcAft>
               <a:buSzPct val="100000"/>
               <a:buChar char="•"/>
             </a:pPr>
             <a:r>
-              <a:rPr lang="en-GB" altLang="en-US" sz="1300" dirty="0">
+              <a:rPr lang="en-GB" altLang="en-US" sz="1250" dirty="0">
                 <a:solidFill>
                   <a:schemeClr val="tx1"/>
                 </a:solidFill>
               </a:rPr>
               <a:t>Crowd POV during headline sets</a:t>
             </a:r>
-            <a:endParaRPr lang="en-GB" sz="1300" dirty="0"/>
+            <a:endParaRPr lang="en-GB" sz="1250" dirty="0"/>
           </a:p>
           <a:p>
             <a:pPr marL="177800" indent="-177800">
               <a:spcAft>
-                <a:spcPts val="600"/>
+                <a:spcPts val="400"/>
               </a:spcAft>
               <a:buSzPct val="100000"/>
               <a:buChar char="•"/>
             </a:pPr>
             <a:r>
-              <a:rPr lang="en-GB" altLang="en-US" sz="1300" dirty="0">
+              <a:rPr lang="en-GB" altLang="en-US" sz="1250" dirty="0">
                 <a:solidFill>
                   <a:schemeClr val="tx1"/>
                 </a:solidFill>
               </a:rPr>
               <a:t>Sponsor activations in shot</a:t>
             </a:r>
-            <a:endParaRPr lang="en-GB" sz="1300" dirty="0"/>
+            <a:endParaRPr lang="en-GB" sz="1250" dirty="0"/>
           </a:p>
           <a:p>
             <a:pPr marL="177800" indent="-177800">
               <a:spcAft>
-                <a:spcPts val="600"/>
+                <a:spcPts val="400"/>
               </a:spcAft>
               <a:buSzPct val="100000"/>
               <a:buChar char="•"/>
             </a:pPr>
             <a:r>
-              <a:rPr lang="en-GB" altLang="en-US" sz="1300" dirty="0">
+              <a:rPr lang="en-GB" altLang="en-US" sz="1250" dirty="0">
                 <a:solidFill>
                   <a:schemeClr val="tx1"/>
                 </a:solidFill>
               </a:rPr>
               <a:t>A recap each night</a:t>
             </a:r>
-            <a:endParaRPr lang="en-GB" sz="1300" dirty="0"/>
-          </a:p>
-        </p:txBody>
-      </p:sp>
-      <p:sp>
-        <p:nvSpPr>
-          <p:cNvPr id="23" name="Shape 17"/>
+            <a:endParaRPr lang="en-GB" sz="1250" dirty="0"/>
+          </a:p>
+        </p:txBody>
+      </p:sp>
+      <p:sp>
+        <p:nvSpPr>
+          <p:cNvPr id="25" name="Shape 17"/>
           <p:cNvSpPr/>
           <p:nvPr/>
         </p:nvSpPr>
@@ -16046,18 +16170,18 @@
       </p:sp>
       <p:sp>
         <p:nvSpPr>
-          <p:cNvPr id="24" name="Shape 18"/>
+          <p:cNvPr id="26" name="Shape 18"/>
           <p:cNvSpPr/>
           <p:nvPr/>
         </p:nvSpPr>
         <p:spPr>
           <a:xfrm>
-            <a:off x="8479231" y="2286000"/>
-            <a:ext cx="3163824" cy="2971800"/>
+            <a:off x="8479231" y="2240280"/>
+            <a:ext cx="3163824" cy="3931920"/>
           </a:xfrm>
           <a:prstGeom prst="roundRect">
             <a:avLst>
-              <a:gd name="adj" fmla="val 3077"/>
+              <a:gd name="adj" fmla="val 2890"/>
             </a:avLst>
           </a:prstGeom>
           <a:solidFill>
@@ -16066,15 +16190,39 @@
           <a:ln/>
         </p:spPr>
       </p:sp>
-      <p:sp>
-        <p:nvSpPr>
-          <p:cNvPr id="25" name="Text 19"/>
-          <p:cNvSpPr txBox="1"/>
-          <p:nvPr/>
-        </p:nvSpPr>
-        <p:spPr>
-          <a:xfrm>
-            <a:off x="8753551" y="2542032"/>
+      <p:pic>
+        <p:nvPicPr>
+          <p:cNvPr id="27" name="Photo ai_afterglow" descr="Illustration: a creator edits a recap reel on a balcony the morning after">    </p:cNvPr>
+          <p:cNvPicPr>
+            <a:picLocks noChangeAspect="1"/>
+          </p:cNvPicPr>
+          <p:nvPr/>
+        </p:nvPicPr>
+        <p:blipFill>
+          <a:blip r:embed="rId6"/>
+          <a:stretch>
+            <a:fillRect/>
+          </a:stretch>
+        </p:blipFill>
+        <p:spPr>
+          <a:xfrm>
+            <a:off x="8753551" y="2487168"/>
+            <a:ext cx="1559321" cy="1188720"/>
+          </a:xfrm>
+          <a:prstGeom prst="rect">
+            <a:avLst/>
+          </a:prstGeom>
+        </p:spPr>
+      </p:pic>
+      <p:sp>
+        <p:nvSpPr>
+          <p:cNvPr id="28" name="Text 19"/>
+          <p:cNvSpPr txBox="1"/>
+          <p:nvPr/>
+        </p:nvSpPr>
+        <p:spPr>
+          <a:xfrm>
+            <a:off x="8753551" y="3822192"/>
             <a:ext cx="2615184" cy="256032"/>
           </a:xfrm>
           <a:prstGeom prst="rect">
@@ -16104,14 +16252,14 @@
       </p:sp>
       <p:sp>
         <p:nvSpPr>
-          <p:cNvPr id="26" name="Text 20"/>
-          <p:cNvSpPr txBox="1"/>
-          <p:nvPr/>
-        </p:nvSpPr>
-        <p:spPr>
-          <a:xfrm>
-            <a:off x="8753551" y="2852928"/>
-            <a:ext cx="2615184" cy="457200"/>
+          <p:cNvPr id="29" name="Text 20"/>
+          <p:cNvSpPr txBox="1"/>
+          <p:nvPr/>
+        </p:nvSpPr>
+        <p:spPr>
+          <a:xfrm>
+            <a:off x="8753551" y="4069080"/>
+            <a:ext cx="2615184" cy="411480"/>
           </a:xfrm>
           <a:prstGeom prst="rect">
             <a:avLst/>
@@ -16127,7 +16275,7 @@
               <a:buNone/>
             </a:pPr>
             <a:r>
-              <a:rPr lang="en-GB" altLang="en-US" sz="2600" dirty="0">
+              <a:rPr lang="en-GB" altLang="en-US" sz="2400" dirty="0">
                 <a:solidFill>
                   <a:schemeClr val="bg1"/>
                 </a:solidFill>
@@ -16137,20 +16285,20 @@
               </a:rPr>
               <a:t>Afterglow</a:t>
             </a:r>
-            <a:endParaRPr lang="en-GB" sz="2600" dirty="0"/>
-          </a:p>
-        </p:txBody>
-      </p:sp>
-      <p:sp>
-        <p:nvSpPr>
-          <p:cNvPr id="27" name="Text 21"/>
-          <p:cNvSpPr txBox="1"/>
-          <p:nvPr/>
-        </p:nvSpPr>
-        <p:spPr>
-          <a:xfrm>
-            <a:off x="8753551" y="3383280"/>
-            <a:ext cx="2615184" cy="320040"/>
+            <a:endParaRPr lang="en-GB" sz="2400" dirty="0"/>
+          </a:p>
+        </p:txBody>
+      </p:sp>
+      <p:sp>
+        <p:nvSpPr>
+          <p:cNvPr id="30" name="Text 21"/>
+          <p:cNvSpPr txBox="1"/>
+          <p:nvPr/>
+        </p:nvSpPr>
+        <p:spPr>
+          <a:xfrm>
+            <a:off x="8753551" y="4526280"/>
+            <a:ext cx="2615184" cy="292608"/>
           </a:xfrm>
           <a:prstGeom prst="rect">
             <a:avLst/>
@@ -16166,27 +16314,27 @@
               <a:buNone/>
             </a:pPr>
             <a:r>
-              <a:rPr lang="en-GB" altLang="en-US" sz="1400" b="1" dirty="0">
+              <a:rPr lang="en-GB" altLang="en-US" sz="1300" b="1" dirty="0">
                 <a:solidFill>
                   <a:schemeClr val="accent4"/>
                 </a:solidFill>
               </a:rPr>
               <a:t>Goal: keep the story alive</a:t>
             </a:r>
-            <a:endParaRPr lang="en-GB" sz="1400" dirty="0"/>
-          </a:p>
-        </p:txBody>
-      </p:sp>
-      <p:sp>
-        <p:nvSpPr>
-          <p:cNvPr id="28" name="Text 22"/>
-          <p:cNvSpPr txBox="1"/>
-          <p:nvPr/>
-        </p:nvSpPr>
-        <p:spPr>
-          <a:xfrm>
-            <a:off x="8753551" y="3840480"/>
-            <a:ext cx="2615184" cy="1325880"/>
+            <a:endParaRPr lang="en-GB" sz="1300" dirty="0"/>
+          </a:p>
+        </p:txBody>
+      </p:sp>
+      <p:sp>
+        <p:nvSpPr>
+          <p:cNvPr id="31" name="Text 22"/>
+          <p:cNvSpPr txBox="1"/>
+          <p:nvPr/>
+        </p:nvSpPr>
+        <p:spPr>
+          <a:xfrm>
+            <a:off x="8753551" y="4892040"/>
+            <a:ext cx="2615184" cy="1188720"/>
           </a:xfrm>
           <a:prstGeom prst="rect">
             <a:avLst/>
@@ -16200,133 +16348,74 @@
           <a:p>
             <a:pPr marL="177800" indent="-177800">
               <a:spcAft>
-                <a:spcPts val="600"/>
+                <a:spcPts val="400"/>
               </a:spcAft>
               <a:buSzPct val="100000"/>
               <a:buChar char="•"/>
             </a:pPr>
             <a:r>
-              <a:rPr lang="en-GB" altLang="en-US" sz="1300" dirty="0">
+              <a:rPr lang="en-GB" altLang="en-US" sz="1250" dirty="0">
                 <a:solidFill>
                   <a:schemeClr val="accent5"/>
                 </a:solidFill>
               </a:rPr>
               <a:t>Recap reels and best of edits</a:t>
             </a:r>
-            <a:endParaRPr lang="en-GB" sz="1300" dirty="0"/>
+            <a:endParaRPr lang="en-GB" sz="1250" dirty="0"/>
           </a:p>
           <a:p>
             <a:pPr marL="177800" indent="-177800">
               <a:spcAft>
-                <a:spcPts val="600"/>
+                <a:spcPts val="400"/>
               </a:spcAft>
               <a:buSzPct val="100000"/>
               <a:buChar char="•"/>
             </a:pPr>
             <a:r>
-              <a:rPr lang="en-GB" altLang="en-US" sz="1300" dirty="0">
+              <a:rPr lang="en-GB" altLang="en-US" sz="1250" dirty="0">
                 <a:solidFill>
                   <a:schemeClr val="accent5"/>
                 </a:solidFill>
               </a:rPr>
               <a:t>Creator thank you posts</a:t>
             </a:r>
-            <a:endParaRPr lang="en-GB" sz="1300" dirty="0"/>
+            <a:endParaRPr lang="en-GB" sz="1250" dirty="0"/>
           </a:p>
           <a:p>
             <a:pPr marL="177800" indent="-177800">
               <a:spcAft>
-                <a:spcPts val="600"/>
+                <a:spcPts val="400"/>
               </a:spcAft>
               <a:buSzPct val="100000"/>
               <a:buChar char="•"/>
             </a:pPr>
             <a:r>
-              <a:rPr lang="en-GB" altLang="en-US" sz="1300" dirty="0">
+              <a:rPr lang="en-GB" altLang="en-US" sz="1250" dirty="0">
                 <a:solidFill>
                   <a:schemeClr val="accent5"/>
                 </a:solidFill>
               </a:rPr>
-              <a:t>Results shared with fans and partners</a:t>
-            </a:r>
-            <a:endParaRPr lang="en-GB" sz="1300" dirty="0"/>
+              <a:t>Results shared with partners</a:t>
+            </a:r>
+            <a:endParaRPr lang="en-GB" sz="1250" dirty="0"/>
           </a:p>
           <a:p>
             <a:pPr marL="177800" indent="-177800">
               <a:spcAft>
-                <a:spcPts val="600"/>
+                <a:spcPts val="400"/>
               </a:spcAft>
               <a:buSzPct val="100000"/>
               <a:buChar char="•"/>
             </a:pPr>
             <a:r>
-              <a:rPr lang="en-GB" altLang="en-US" sz="1300" dirty="0">
+              <a:rPr lang="en-GB" altLang="en-US" sz="1250" dirty="0">
                 <a:solidFill>
                   <a:schemeClr val="accent5"/>
                 </a:solidFill>
               </a:rPr>
-              <a:t>A 2027 save the date, if planned</a:t>
-            </a:r>
-            <a:endParaRPr lang="en-GB" sz="1300" dirty="0"/>
-          </a:p>
-        </p:txBody>
-      </p:sp>
-      <p:sp>
-        <p:nvSpPr>
-          <p:cNvPr id="29" name="Shape 23"/>
-          <p:cNvSpPr/>
-          <p:nvPr/>
-        </p:nvSpPr>
-        <p:spPr>
-          <a:xfrm>
-            <a:off x="548640" y="5532120"/>
-            <a:ext cx="54864" cy="548640"/>
-          </a:xfrm>
-          <a:prstGeom prst="rect">
-            <a:avLst/>
-          </a:prstGeom>
-          <a:solidFill>
-            <a:schemeClr val="accent1"/>
-          </a:solidFill>
-          <a:ln/>
-        </p:spPr>
-      </p:sp>
-      <p:sp>
-        <p:nvSpPr>
-          <p:cNvPr id="30" name="Text 24"/>
-          <p:cNvSpPr txBox="1"/>
-          <p:nvPr/>
-        </p:nvSpPr>
-        <p:spPr>
-          <a:xfrm>
-            <a:off x="777240" y="5532120"/>
-            <a:ext cx="10789920" cy="548640"/>
-          </a:xfrm>
-          <a:prstGeom prst="rect">
-            <a:avLst/>
-          </a:prstGeom>
-          <a:noFill/>
-          <a:ln/>
-        </p:spPr>
-        <p:txBody>
-          <a:bodyPr wrap="square" lIns="0" tIns="0" rIns="0" bIns="0" rtlCol="0" anchor="ctr"/>
-          <a:lstStyle/>
-          <a:p>
-            <a:pPr indent="0" marL="0">
-              <a:buNone/>
-            </a:pPr>
-            <a:r>
-              <a:rPr lang="en-GB" altLang="en-US" sz="2000" dirty="0">
-                <a:solidFill>
-                  <a:schemeClr val="bg1"/>
-                </a:solidFill>
-                <a:latin typeface="+mj-lt" pitchFamily="34" charset="0"/>
-                <a:ea typeface="+mj-lt" pitchFamily="34" charset="-122"/>
-                <a:cs typeface="+mj-lt" pitchFamily="34" charset="-120"/>
-              </a:rPr>
-              <a:t>Every wave sits in one content calendar, approved by the festival before anything goes live.</a:t>
-            </a:r>
-            <a:endParaRPr lang="en-GB" sz="2000" dirty="0"/>
+              <a:t>A 2027 save the date</a:t>
+            </a:r>
+            <a:endParaRPr lang="en-GB" sz="1250" dirty="0"/>
           </a:p>
         </p:txBody>
       </p:sp>
@@ -19861,31 +19950,9 @@
           </a:p>
         </p:txBody>
       </p:sp>
-      <p:sp>
-        <p:nvSpPr>
-          <p:cNvPr id="18" name="Shape 13"/>
-          <p:cNvSpPr/>
-          <p:nvPr/>
-        </p:nvSpPr>
-        <p:spPr>
-          <a:xfrm>
-            <a:off x="7452360" y="1783080"/>
-            <a:ext cx="4190695" cy="4251960"/>
-          </a:xfrm>
-          <a:prstGeom prst="roundRect">
-            <a:avLst>
-              <a:gd name="adj" fmla="val 2182"/>
-            </a:avLst>
-          </a:prstGeom>
-          <a:solidFill>
-            <a:schemeClr val="tx1"/>
-          </a:solidFill>
-          <a:ln/>
-        </p:spPr>
-      </p:sp>
       <p:pic>
         <p:nvPicPr>
-          <p:cNvPr id="19" name="Image 2" descr="Mother Africa Festival">    </p:cNvPr>
+          <p:cNvPr id="18" name="Photo ai_pass" descr="Illustration: a Mother Africa Festival creator accreditation pass on a lanyard">    </p:cNvPr>
           <p:cNvPicPr>
             <a:picLocks noChangeAspect="1"/>
           </p:cNvPicPr>
@@ -19899,8 +19966,8 @@
         </p:blipFill>
         <p:spPr>
           <a:xfrm>
-            <a:off x="8548974" y="2240280"/>
-            <a:ext cx="1997467" cy="1417320"/>
+            <a:off x="7452360" y="1783080"/>
+            <a:ext cx="4190695" cy="3143021"/>
           </a:xfrm>
           <a:prstGeom prst="rect">
             <a:avLst/>
@@ -19909,43 +19976,29 @@
       </p:pic>
       <p:sp>
         <p:nvSpPr>
-          <p:cNvPr id="20" name="Text 14"/>
-          <p:cNvSpPr txBox="1"/>
-          <p:nvPr/>
-        </p:nvSpPr>
-        <p:spPr>
-          <a:xfrm>
-            <a:off x="7452360" y="3749040"/>
-            <a:ext cx="4190695" cy="548640"/>
-          </a:xfrm>
-          <a:prstGeom prst="rect">
-            <a:avLst/>
-          </a:prstGeom>
-          <a:noFill/>
-          <a:ln/>
-        </p:spPr>
-        <p:txBody>
-          <a:bodyPr wrap="square" lIns="0" tIns="0" rIns="0" bIns="0" rtlCol="0" anchor="ctr"/>
-          <a:lstStyle/>
-          <a:p>
-            <a:pPr algn="ctr" indent="0" marL="0">
-              <a:buNone/>
-            </a:pPr>
-            <a:r>
-              <a:rPr lang="en-GB" altLang="en-US" sz="3000" dirty="0">
-                <a:solidFill>
-                  <a:schemeClr val="accent1"/>
-                </a:solidFill>
-              </a:rPr>
-              <a:t>×</a:t>
-            </a:r>
-            <a:endParaRPr lang="en-GB" sz="3000" dirty="0"/>
-          </a:p>
-        </p:txBody>
+          <p:cNvPr id="19" name="Shape 13"/>
+          <p:cNvSpPr/>
+          <p:nvPr/>
+        </p:nvSpPr>
+        <p:spPr>
+          <a:xfrm>
+            <a:off x="7452360" y="5063261"/>
+            <a:ext cx="4190695" cy="971779"/>
+          </a:xfrm>
+          <a:prstGeom prst="roundRect">
+            <a:avLst>
+              <a:gd name="adj" fmla="val 7528"/>
+            </a:avLst>
+          </a:prstGeom>
+          <a:solidFill>
+            <a:schemeClr val="tx1"/>
+          </a:solidFill>
+          <a:ln/>
+        </p:spPr>
       </p:sp>
       <p:pic>
         <p:nvPicPr>
-          <p:cNvPr id="21" name="Image 3" descr="AToure Management &amp; Consulting">    </p:cNvPr>
+          <p:cNvPr id="20" name="Image 3" descr="Mother Africa Festival">    </p:cNvPr>
           <p:cNvPicPr>
             <a:picLocks noChangeAspect="1"/>
           </p:cNvPicPr>
@@ -19959,8 +20012,8 @@
         </p:blipFill>
         <p:spPr>
           <a:xfrm>
-            <a:off x="7993228" y="4480560"/>
-            <a:ext cx="3108960" cy="497434"/>
+            <a:off x="7726680" y="5265687"/>
+            <a:ext cx="798987" cy="566928"/>
           </a:xfrm>
           <a:prstGeom prst="rect">
             <a:avLst/>
@@ -19969,40 +20022,64 @@
       </p:pic>
       <p:sp>
         <p:nvSpPr>
-          <p:cNvPr id="22" name="Text 15"/>
-          <p:cNvSpPr txBox="1"/>
-          <p:nvPr/>
-        </p:nvSpPr>
-        <p:spPr>
-          <a:xfrm>
-            <a:off x="7452360" y="5349240"/>
-            <a:ext cx="4190695" cy="274320"/>
-          </a:xfrm>
-          <a:prstGeom prst="rect">
-            <a:avLst/>
-          </a:prstGeom>
-          <a:noFill/>
-          <a:ln/>
-        </p:spPr>
-        <p:txBody>
-          <a:bodyPr wrap="square" lIns="0" tIns="0" rIns="0" bIns="0" rtlCol="0" anchor="t"/>
+          <p:cNvPr id="21" name="Text 14"/>
+          <p:cNvSpPr txBox="1"/>
+          <p:nvPr/>
+        </p:nvSpPr>
+        <p:spPr>
+          <a:xfrm>
+            <a:off x="8595360" y="5063261"/>
+            <a:ext cx="365760" cy="971779"/>
+          </a:xfrm>
+          <a:prstGeom prst="rect">
+            <a:avLst/>
+          </a:prstGeom>
+          <a:noFill/>
+          <a:ln/>
+        </p:spPr>
+        <p:txBody>
+          <a:bodyPr wrap="square" lIns="0" tIns="0" rIns="0" bIns="0" rtlCol="0" anchor="ctr"/>
           <a:lstStyle/>
           <a:p>
             <a:pPr algn="ctr" indent="0" marL="0">
               <a:buNone/>
             </a:pPr>
             <a:r>
-              <a:rPr lang="en-GB" altLang="en-US" sz="1100" dirty="0">
-                <a:solidFill>
-                  <a:schemeClr val="accent4"/>
-                </a:solidFill>
-              </a:rPr>
-              <a:t>27 and 28 December 2026  ·  Marcory Zone 4</a:t>
-            </a:r>
-            <a:endParaRPr lang="en-GB" sz="1100" dirty="0"/>
-          </a:p>
-        </p:txBody>
-      </p:sp>
+              <a:rPr lang="en-GB" altLang="en-US" sz="2000" dirty="0">
+                <a:solidFill>
+                  <a:schemeClr val="accent1"/>
+                </a:solidFill>
+              </a:rPr>
+              <a:t>×</a:t>
+            </a:r>
+            <a:endParaRPr lang="en-GB" sz="2000" dirty="0"/>
+          </a:p>
+        </p:txBody>
+      </p:sp>
+      <p:pic>
+        <p:nvPicPr>
+          <p:cNvPr id="22" name="Image 4" descr="AToure Management &amp; Consulting">    </p:cNvPr>
+          <p:cNvPicPr>
+            <a:picLocks noChangeAspect="1"/>
+          </p:cNvPicPr>
+          <p:nvPr/>
+        </p:nvPicPr>
+        <p:blipFill>
+          <a:blip r:embed="rId5"/>
+          <a:stretch>
+            <a:fillRect/>
+          </a:stretch>
+        </p:blipFill>
+        <p:spPr>
+          <a:xfrm>
+            <a:off x="9098280" y="5366271"/>
+            <a:ext cx="2286000" cy="365760"/>
+          </a:xfrm>
+          <a:prstGeom prst="rect">
+            <a:avLst/>
+          </a:prstGeom>
+        </p:spPr>
+      </p:pic>
       <p:sp>
         <p:nvSpPr>
           <p:cNvPr id="25" name="Slide Number Placeholder 0"/>

--- a/proposition-deck/AToure Mother Africa Festival Proposal.pptx
+++ b/proposition-deck/AToure Mother Africa Festival Proposal.pptx
@@ -16,10 +16,9 @@
     <p:sldId id="264" r:id="rId10"/>
     <p:sldId id="265" r:id="rId11"/>
     <p:sldId id="266" r:id="rId12"/>
-    <p:sldId id="267" r:id="rId13"/>
   </p:sldIdLst>
   <p:notesMasterIdLst>
-    <p:notesMasterId r:id="rId14"/>
+    <p:notesMasterId r:id="rId13"/>
   </p:notesMasterIdLst>
   <p:sldSz cx="12192000" cy="6858000"/>
   <p:notesSz cx="6858000" cy="12192000"/>
@@ -118,52 +117,47 @@
   <p:extLst>
     <p:ext uri="{521415D9-36F7-43E2-AB2F-B90AF26B5E84}">
       <p14:sectionLst xmlns:p14="http://schemas.microsoft.com/office/powerpoint/2010/main">
-        <p14:section name="Opening" id="{380a37e7-f4f1-a850-bd9c-f4e641fbccc8}">
+        <p14:section name="Opening" id="{1eb86a44-7a0b-e7e3-0b89-cb4d53aff943}">
           <p14:sldIdLst>
             <p14:sldId id="256"/>
           </p14:sldIdLst>
         </p14:section>
-        <p14:section name="Where we stand" id="{0bb156a8-2274-c3c6-0544-a10804c3d700}">
+        <p14:section name="Where we stand" id="{7029d9de-2c04-b6cf-b9d9-8ccc6802cca6}">
           <p14:sldIdLst>
             <p14:sldId id="257"/>
             <p14:sldId id="258"/>
           </p14:sldIdLst>
         </p14:section>
-        <p14:section name="The AToure answer" id="{16f5454e-abac-c531-4c45-582d39c208de}">
+        <p14:section name="The AToure answer" id="{87491a9c-85d8-05ca-0e2b-5145e72222e6}">
           <p14:sldIdLst>
             <p14:sldId id="259"/>
             <p14:sldId id="260"/>
           </p14:sldIdLst>
         </p14:section>
-        <p14:section name="Visibility" id="{c4255278-f614-1b78-5300-959afaf00ab5}">
+        <p14:section name="Visibility" id="{da48e200-257d-9e06-8b15-4f3c04b8f353}">
           <p14:sldIdLst>
             <p14:sldId id="261"/>
             <p14:sldId id="262"/>
           </p14:sldIdLst>
         </p14:section>
-        <p14:section name="The visibility report" id="{f6165aa1-aa15-6176-96fe-583225500903}">
+        <p14:section name="The visibility report" id="{5acb7f96-fb58-be1e-c8a3-dbf626f887f0}">
           <p14:sldIdLst>
             <p14:sldId id="263"/>
           </p14:sldIdLst>
         </p14:section>
-        <p14:section name="The proposal" id="{dd1f0347-5f57-3449-8350-29d684f4ca99}">
+        <p14:section name="The proposal" id="{68b8d319-229d-adcb-9a11-9890514cc90e}">
           <p14:sldIdLst>
             <p14:sldId id="264"/>
           </p14:sldIdLst>
         </p14:section>
-        <p14:section name="Proof" id="{d67804b5-9706-a2a1-cc2e-119bf0c6f9b1}">
+        <p14:section name="Proof" id="{24c74560-ee27-3b0e-66fb-a7f68f4150d7}">
           <p14:sldIdLst>
             <p14:sldId id="265"/>
           </p14:sldIdLst>
         </p14:section>
-        <p14:section name="The ask" id="{5c094c9b-ca54-cf73-1f1a-d67fcbca994a}">
+        <p14:section name="The ask" id="{26654fff-2668-1dd5-3230-7931ee253e16}">
           <p14:sldIdLst>
             <p14:sldId id="266"/>
-          </p14:sldIdLst>
-        </p14:section>
-        <p14:section name="Appendix" id="{17e873f7-0897-60f2-1852-3d6b24924842}">
-          <p14:sldIdLst>
-            <p14:sldId id="267"/>
           </p14:sldIdLst>
         </p14:section>
       </p14:sectionLst>
@@ -658,7 +652,7 @@
           <a:p>
             <a:r>
               <a:rPr lang="en-US" dirty="0"/>
-              <a:t>This is not a new capability. In Abidjan, AToure built the IShowSpeed operation from zero. In Morocco it delivered the AFCON mascot reveal with CAF and the Royal Moroccan Football Federation. The Ashton Hall tour covered five countries, managed end to end.</a:t>
+              <a:t>This is not a new capability. In Côte d’Ivoire, AToure built the IShowSpeed operation from zero, with a direct relationship with the Minister of Tourism. In Morocco it delivered the AFCON Final mascot reveal with CAF and the Royal Moroccan Football Federation. The Ashton Hall Africa Tour covered five countries, managed end to end: Ghana, Cameroon, Nigeria, Benin and Rwanda.</a:t>
             </a:r>
             <a:endParaRPr lang="en-US" dirty="0"/>
           </a:p>
@@ -746,7 +740,7 @@
           <a:p>
             <a:r>
               <a:rPr lang="en-US" dirty="0"/>
-              <a:t>Close here. To be ready for 27 December, the work starts on Monday 2 November. Four steps: confirm the scope and targets this week, approve the shortlist by 13 November, creators signed and briefed by 20 November, build up content live from 23 November. Do not read past this slide: let the ask land, and let the Mother Africa team respond.</a:t>
+              <a:t>Close here. Four steps: confirm the scope and agree the targets, approve the creator shortlist, sign and brief the creators, and the build up content goes live. Do not read past this slide: let the ask land, and let the Mother Africa team respond.</a:t>
             </a:r>
             <a:endParaRPr lang="en-US" dirty="0"/>
           </a:p>
@@ -770,94 +764,6 @@
             <a:fld id="{F7021451-1387-4CA6-816F-3879F97B5CBC}" type="slidenum">
               <a:rPr lang="en-US"/>
               <a:t>11</a:t>
-            </a:fld>
-            <a:endParaRPr lang="en-US"/>
-          </a:p>
-        </p:txBody>
-      </p:sp>
-    </p:spTree>
-    <p:extLst>
-      <p:ext uri="{BB962C8B-B14F-4D97-AF65-F5344CB8AC3E}">
-        <p14:creationId xmlns:p14="http://schemas.microsoft.com/office/powerpoint/2010/main" val="1024086991"/>
-      </p:ext>
-    </p:extLst>
-  </p:cSld>
-  <p:clrMapOvr>
-    <a:masterClrMapping/>
-  </p:clrMapOvr>
-</p:notes>
-</file>
-
-<file path=ppt/notesSlides/notesSlide12.xml><?xml version="1.0" encoding="utf-8"?>
-<p:notes xmlns:a="http://schemas.openxmlformats.org/drawingml/2006/main" xmlns:r="http://schemas.openxmlformats.org/officeDocument/2006/relationships" xmlns:p="http://schemas.openxmlformats.org/presentationml/2006/main">
-  <p:cSld>
-    <p:spTree>
-      <p:nvGrpSpPr>
-        <p:cNvPr id="1" name=""/>
-        <p:cNvGrpSpPr/>
-        <p:nvPr/>
-      </p:nvGrpSpPr>
-      <p:grpSpPr>
-        <a:xfrm>
-          <a:off x="0" y="0"/>
-          <a:ext cx="0" cy="0"/>
-          <a:chOff x="0" y="0"/>
-          <a:chExt cx="0" cy="0"/>
-        </a:xfrm>
-      </p:grpSpPr>
-      <p:sp>
-        <p:nvSpPr>
-          <p:cNvPr id="2" name="Slide Image Placeholder 1"/>
-          <p:cNvSpPr>
-            <a:spLocks noGrp="1" noRot="1" noChangeAspect="1"/>
-          </p:cNvSpPr>
-          <p:nvPr>
-            <p:ph type="sldImg"/>
-          </p:nvPr>
-        </p:nvSpPr>
-        <p:spPr/>
-      </p:sp>
-      <p:sp>
-        <p:nvSpPr>
-          <p:cNvPr id="3" name="Notes Placeholder 2"/>
-          <p:cNvSpPr>
-            <a:spLocks noGrp="1"/>
-          </p:cNvSpPr>
-          <p:nvPr>
-            <p:ph type="body" idx="1"/>
-          </p:nvPr>
-        </p:nvSpPr>
-        <p:spPr/>
-        <p:txBody>
-          <a:bodyPr/>
-          <a:lstStyle/>
-          <a:p>
-            <a:r>
-              <a:rPr lang="en-US" dirty="0"/>
-              <a:t>Page 2 of the sample report, to show the depth behind the headline numbers: every creator with posts, views, interactions and ticket clicks, where the audience was, and what each partner received. The figures are illustrative and add up to page 1; they are not a forecast. The full report also lists every post with its link and time, and ends with recommendations for the next edition.</a:t>
-            </a:r>
-            <a:endParaRPr lang="en-US" dirty="0"/>
-          </a:p>
-        </p:txBody>
-      </p:sp>
-      <p:sp>
-        <p:nvSpPr>
-          <p:cNvPr id="4" name="Slide Number Placeholder 3"/>
-          <p:cNvSpPr>
-            <a:spLocks noGrp="1"/>
-          </p:cNvSpPr>
-          <p:nvPr>
-            <p:ph type="sldNum" sz="quarter" idx="10"/>
-          </p:nvPr>
-        </p:nvSpPr>
-        <p:spPr/>
-        <p:txBody>
-          <a:bodyPr/>
-          <a:lstStyle/>
-          <a:p>
-            <a:fld id="{F7021451-1387-4CA6-816F-3879F97B5CBC}" type="slidenum">
-              <a:rPr lang="en-US"/>
-              <a:t>12</a:t>
             </a:fld>
             <a:endParaRPr lang="en-US"/>
           </a:p>
@@ -1450,7 +1356,7 @@
           <a:p>
             <a:r>
               <a:rPr lang="en-US" dirty="0"/>
-              <a:t>Three fixed dates. A one page weekly pulse during the build up, so effort moves to the creators who are working. A check 48 hours after the festival: who posted, where, against which brief. The full report on day 14, by 11 January 2027, as a PDF for the board and sponsors with a web version. The page on the right is a sample layout: its figures are illustrative, to show the format, and are not a forecast for the festival.</a:t>
+              <a:t>Three fixed points. Every creator post from the build up is tracked as it goes live, so the report covers the weeks before the festival, not only the two nights. A check 48 hours after the festival: who posted, where, against which brief. The full report on day 14, by 11 January 2027, as a PDF for the board and sponsors with a web version. The page on the right is a sample layout: its figures are illustrative, to show the format, and are not a forecast for the festival.</a:t>
             </a:r>
             <a:endParaRPr lang="en-US" dirty="0"/>
           </a:p>
@@ -1538,7 +1444,7 @@
           <a:p>
             <a:r>
               <a:rPr lang="en-US" dirty="0"/>
-              <a:t>This is a trial, not a long term ask. One edition: AToure runs the creators and delivers one full report on a fixed date. The trial is what earns the conversation about 2027. There is no price on this slide on purpose: scope and fees are agreed once the festival says yes.</a:t>
+              <a:t>This is a trial, not a long term ask. If the festival already works with creators, they stay: AToure manages them on the ground with any new ones, puts every creator on a contract with deliverables for the event, tracks every post from the build up and delivers one full report on a fixed date. The trial is what earns the conversation about 2027. There is no price on this slide on purpose: scope and fees are agreed once the festival says yes.</a:t>
             </a:r>
             <a:endParaRPr lang="en-US" dirty="0"/>
           </a:p>
@@ -3139,7 +3045,7 @@
                   <a:schemeClr val="bg1"/>
                 </a:solidFill>
               </a:rPr>
-              <a:t>Maximising Mother Africa visibility</a:t>
+              <a:t>Maximising Mother Africa Visibility</a:t>
             </a:r>
             <a:endParaRPr lang="en-GB" sz="4600" dirty="0"/>
           </a:p>
@@ -3306,43 +3212,7 @@
       </p:sp>
       <p:sp>
         <p:nvSpPr>
-          <p:cNvPr id="12" name="Text 4"/>
-          <p:cNvSpPr txBox="1"/>
-          <p:nvPr/>
-        </p:nvSpPr>
-        <p:spPr>
-          <a:xfrm>
-            <a:off x="548640" y="5138928"/>
-            <a:ext cx="4480560" cy="274320"/>
-          </a:xfrm>
-          <a:prstGeom prst="rect">
-            <a:avLst/>
-          </a:prstGeom>
-          <a:noFill/>
-          <a:ln/>
-        </p:spPr>
-        <p:txBody>
-          <a:bodyPr wrap="square" lIns="0" tIns="0" rIns="0" bIns="0" rtlCol="0" anchor="t"/>
-          <a:lstStyle/>
-          <a:p>
-            <a:pPr indent="0" marL="0">
-              <a:buNone/>
-            </a:pPr>
-            <a:r>
-              <a:rPr lang="en-GB" altLang="en-US" sz="1500" b="1" dirty="0">
-                <a:solidFill>
-                  <a:schemeClr val="accent4"/>
-                </a:solidFill>
-              </a:rPr>
-              <a:t>27 and 28 December 2026, Marcory Zone 4, Abidjan.</a:t>
-            </a:r>
-            <a:endParaRPr lang="en-GB" sz="1500" dirty="0"/>
-          </a:p>
-        </p:txBody>
-      </p:sp>
-      <p:sp>
-        <p:nvSpPr>
-          <p:cNvPr id="13" name="Shape 5"/>
+          <p:cNvPr id="12" name="Shape 4"/>
           <p:cNvSpPr/>
           <p:nvPr/>
         </p:nvSpPr>
@@ -3365,7 +3235,7 @@
       </p:sp>
       <p:sp>
         <p:nvSpPr>
-          <p:cNvPr id="14" name="Text 6"/>
+          <p:cNvPr id="13" name="Text 5"/>
           <p:cNvSpPr txBox="1"/>
           <p:nvPr/>
         </p:nvSpPr>
@@ -3401,7 +3271,7 @@
       </p:sp>
       <p:sp>
         <p:nvSpPr>
-          <p:cNvPr id="15" name="Text 0"/>
+          <p:cNvPr id="14" name="Text 0"/>
           <p:cNvSpPr/>
           <p:nvPr>
             <p:ph idx="101" type="body" hasCustomPrompt="1"/>
@@ -3587,7 +3457,7 @@
                   <a:schemeClr val="bg1"/>
                 </a:solidFill>
               </a:rPr>
-              <a:t>We have built and tracked this before</a:t>
+              <a:t>This is not a new capability: we have built &amp; tracked before</a:t>
             </a:r>
             <a:endParaRPr lang="en-GB" sz="3800" dirty="0"/>
           </a:p>
@@ -3677,9 +3547,29 @@
           </a:prstGeom>
         </p:spPr>
       </p:pic>
+      <p:sp>
+        <p:nvSpPr>
+          <p:cNvPr id="10" name="Shape 4"/>
+          <p:cNvSpPr/>
+          <p:nvPr/>
+        </p:nvSpPr>
+        <p:spPr>
+          <a:xfrm>
+            <a:off x="548640" y="2057400"/>
+            <a:ext cx="3511296" cy="3931920"/>
+          </a:xfrm>
+          <a:prstGeom prst="rect">
+            <a:avLst/>
+          </a:prstGeom>
+          <a:solidFill>
+            <a:schemeClr val="accent6"/>
+          </a:solidFill>
+          <a:ln/>
+        </p:spPr>
+      </p:sp>
       <p:pic>
         <p:nvPicPr>
-          <p:cNvPr id="10" name="Photo speed_ci" descr="IShowSpeed in Côte d’Ivoire, Abidjan">    </p:cNvPr>
+          <p:cNvPr id="11" name="Photo card_ci" descr="IShowSpeed in Côte d’Ivoire, Abidjan">    </p:cNvPr>
           <p:cNvPicPr>
             <a:picLocks noChangeAspect="1"/>
           </p:cNvPicPr>
@@ -3693,8 +3583,8 @@
         </p:blipFill>
         <p:spPr>
           <a:xfrm>
-            <a:off x="548640" y="1783080"/>
-            <a:ext cx="4929872" cy="3429000"/>
+            <a:off x="548640" y="2057400"/>
+            <a:ext cx="3511296" cy="2468356"/>
           </a:xfrm>
           <a:prstGeom prst="rect">
             <a:avLst/>
@@ -3703,139 +3593,135 @@
       </p:pic>
       <p:sp>
         <p:nvSpPr>
-          <p:cNvPr id="11" name="Shape 4"/>
+          <p:cNvPr id="12" name="Text 5"/>
+          <p:cNvSpPr txBox="1"/>
+          <p:nvPr/>
+        </p:nvSpPr>
+        <p:spPr>
+          <a:xfrm>
+            <a:off x="777240" y="4662916"/>
+            <a:ext cx="3054096" cy="347472"/>
+          </a:xfrm>
+          <a:prstGeom prst="rect">
+            <a:avLst/>
+          </a:prstGeom>
+          <a:noFill/>
+          <a:ln/>
+        </p:spPr>
+        <p:txBody>
+          <a:bodyPr wrap="square" lIns="0" tIns="0" rIns="0" bIns="0" rtlCol="0" anchor="t"/>
+          <a:lstStyle/>
+          <a:p>
+            <a:pPr indent="0" marL="0">
+              <a:buNone/>
+            </a:pPr>
+            <a:r>
+              <a:rPr lang="en-GB" altLang="en-US" sz="1050" b="1" spc="100" kern="0" dirty="0">
+                <a:solidFill>
+                  <a:schemeClr val="accent1"/>
+                </a:solidFill>
+              </a:rPr>
+              <a:t>CÔTE D’IVOIRE, ISHOWSPEED TOUR</a:t>
+            </a:r>
+            <a:endParaRPr lang="en-GB" sz="1050" dirty="0"/>
+          </a:p>
+        </p:txBody>
+      </p:sp>
+      <p:sp>
+        <p:nvSpPr>
+          <p:cNvPr id="13" name="Text 6"/>
+          <p:cNvSpPr txBox="1"/>
+          <p:nvPr/>
+        </p:nvSpPr>
+        <p:spPr>
+          <a:xfrm>
+            <a:off x="777240" y="5028676"/>
+            <a:ext cx="3054096" cy="411480"/>
+          </a:xfrm>
+          <a:prstGeom prst="rect">
+            <a:avLst/>
+          </a:prstGeom>
+          <a:noFill/>
+          <a:ln/>
+        </p:spPr>
+        <p:txBody>
+          <a:bodyPr wrap="square" lIns="0" tIns="0" rIns="0" bIns="0" rtlCol="0" anchor="t"/>
+          <a:lstStyle/>
+          <a:p>
+            <a:pPr indent="0" marL="0">
+              <a:buNone/>
+            </a:pPr>
+            <a:r>
+              <a:rPr lang="en-GB" altLang="en-US" sz="2600" b="1" dirty="0">
+                <a:solidFill>
+                  <a:schemeClr val="bg1"/>
+                </a:solidFill>
+              </a:rPr>
+              <a:t>55.8 Million</a:t>
+            </a:r>
+            <a:endParaRPr lang="en-GB" sz="2600" dirty="0"/>
+          </a:p>
+        </p:txBody>
+      </p:sp>
+      <p:sp>
+        <p:nvSpPr>
+          <p:cNvPr id="14" name="Text 7"/>
+          <p:cNvSpPr txBox="1"/>
+          <p:nvPr/>
+        </p:nvSpPr>
+        <p:spPr>
+          <a:xfrm>
+            <a:off x="777240" y="5458444"/>
+            <a:ext cx="3054096" cy="502920"/>
+          </a:xfrm>
+          <a:prstGeom prst="rect">
+            <a:avLst/>
+          </a:prstGeom>
+          <a:noFill/>
+          <a:ln/>
+        </p:spPr>
+        <p:txBody>
+          <a:bodyPr wrap="square" lIns="0" tIns="0" rIns="0" bIns="0" rtlCol="0" anchor="t"/>
+          <a:lstStyle/>
+          <a:p>
+            <a:pPr indent="0" marL="0">
+              <a:buNone/>
+            </a:pPr>
+            <a:r>
+              <a:rPr lang="en-GB" altLang="en-US" sz="1150" dirty="0">
+                <a:solidFill>
+                  <a:schemeClr val="accent5"/>
+                </a:solidFill>
+              </a:rPr>
+              <a:t>Instagram views, with a direct relationship with the Minister of Tourism</a:t>
+            </a:r>
+            <a:endParaRPr lang="en-GB" sz="1150" dirty="0"/>
+          </a:p>
+        </p:txBody>
+      </p:sp>
+      <p:sp>
+        <p:nvSpPr>
+          <p:cNvPr id="15" name="Shape 8"/>
           <p:cNvSpPr/>
           <p:nvPr/>
         </p:nvSpPr>
         <p:spPr>
           <a:xfrm>
-            <a:off x="658368" y="4809744"/>
-            <a:ext cx="796442" cy="292608"/>
-          </a:xfrm>
-          <a:prstGeom prst="roundRect">
-            <a:avLst>
-              <a:gd name="adj" fmla="val 18750"/>
-            </a:avLst>
+            <a:off x="4338828" y="2057400"/>
+            <a:ext cx="3511296" cy="3931920"/>
+          </a:xfrm>
+          <a:prstGeom prst="rect">
+            <a:avLst/>
           </a:prstGeom>
           <a:solidFill>
-            <a:schemeClr val="tx1">
-              <a:alpha val="70000"/>
-            </a:schemeClr>
+            <a:schemeClr val="accent6"/>
           </a:solidFill>
           <a:ln/>
         </p:spPr>
-      </p:sp>
-      <p:sp>
-        <p:nvSpPr>
-          <p:cNvPr id="12" name="Text 5"/>
-          <p:cNvSpPr txBox="1"/>
-          <p:nvPr/>
-        </p:nvSpPr>
-        <p:spPr>
-          <a:xfrm>
-            <a:off x="658368" y="4809744"/>
-            <a:ext cx="796442" cy="292608"/>
-          </a:xfrm>
-          <a:prstGeom prst="rect">
-            <a:avLst/>
-          </a:prstGeom>
-          <a:noFill/>
-          <a:ln/>
-        </p:spPr>
-        <p:txBody>
-          <a:bodyPr wrap="square" lIns="0" tIns="0" rIns="0" bIns="0" rtlCol="0" anchor="ctr"/>
-          <a:lstStyle/>
-          <a:p>
-            <a:pPr algn="ctr" indent="0" marL="0">
-              <a:buNone/>
-            </a:pPr>
-            <a:r>
-              <a:rPr lang="en-GB" altLang="en-US" sz="1000" dirty="0">
-                <a:solidFill>
-                  <a:schemeClr val="bg1"/>
-                </a:solidFill>
-              </a:rPr>
-              <a:t>Abidjan</a:t>
-            </a:r>
-            <a:endParaRPr lang="en-GB" sz="1000" dirty="0"/>
-          </a:p>
-        </p:txBody>
-      </p:sp>
-      <p:sp>
-        <p:nvSpPr>
-          <p:cNvPr id="13" name="Text 6"/>
-          <p:cNvSpPr txBox="1"/>
-          <p:nvPr/>
-        </p:nvSpPr>
-        <p:spPr>
-          <a:xfrm>
-            <a:off x="548640" y="5321808"/>
-            <a:ext cx="4929872" cy="411480"/>
-          </a:xfrm>
-          <a:prstGeom prst="rect">
-            <a:avLst/>
-          </a:prstGeom>
-          <a:noFill/>
-          <a:ln/>
-        </p:spPr>
-        <p:txBody>
-          <a:bodyPr wrap="square" lIns="0" tIns="0" rIns="0" bIns="0" rtlCol="0" anchor="t"/>
-          <a:lstStyle/>
-          <a:p>
-            <a:pPr indent="0" marL="0">
-              <a:buNone/>
-            </a:pPr>
-            <a:r>
-              <a:rPr lang="en-GB" altLang="en-US" sz="2600" dirty="0">
-                <a:solidFill>
-                  <a:schemeClr val="accent4"/>
-                </a:solidFill>
-              </a:rPr>
-              <a:t>55.8M</a:t>
-            </a:r>
-            <a:endParaRPr lang="en-GB" sz="2600" dirty="0"/>
-          </a:p>
-        </p:txBody>
-      </p:sp>
-      <p:sp>
-        <p:nvSpPr>
-          <p:cNvPr id="14" name="Text 7"/>
-          <p:cNvSpPr txBox="1"/>
-          <p:nvPr/>
-        </p:nvSpPr>
-        <p:spPr>
-          <a:xfrm>
-            <a:off x="548640" y="5733288"/>
-            <a:ext cx="4929872" cy="347472"/>
-          </a:xfrm>
-          <a:prstGeom prst="rect">
-            <a:avLst/>
-          </a:prstGeom>
-          <a:noFill/>
-          <a:ln/>
-        </p:spPr>
-        <p:txBody>
-          <a:bodyPr wrap="square" lIns="0" tIns="0" rIns="0" bIns="0" rtlCol="0" anchor="t"/>
-          <a:lstStyle/>
-          <a:p>
-            <a:pPr indent="0" marL="0">
-              <a:buNone/>
-            </a:pPr>
-            <a:r>
-              <a:rPr lang="en-GB" altLang="en-US" sz="1050" dirty="0">
-                <a:solidFill>
-                  <a:schemeClr val="accent5"/>
-                </a:solidFill>
-              </a:rPr>
-              <a:t>Instagram views on one reel. IShowSpeed in Côte d’Ivoire.</a:t>
-            </a:r>
-            <a:endParaRPr lang="en-GB" sz="1050" dirty="0"/>
-          </a:p>
-        </p:txBody>
       </p:sp>
       <p:pic>
         <p:nvPicPr>
-          <p:cNvPr id="15" name="Photo speed_ma" descr="IShowSpeed in Morocco for the AFCON 2025 Final">    </p:cNvPr>
+          <p:cNvPr id="16" name="Photo card_ma" descr="IShowSpeed in Morocco for the AFCON 2025 Final">    </p:cNvPr>
           <p:cNvPicPr>
             <a:picLocks noChangeAspect="1"/>
           </p:cNvPicPr>
@@ -3849,8 +3735,8 @@
         </p:blipFill>
         <p:spPr>
           <a:xfrm>
-            <a:off x="6044279" y="1783080"/>
-            <a:ext cx="2289810" cy="3429000"/>
+            <a:off x="4338828" y="2057400"/>
+            <a:ext cx="3511296" cy="2468424"/>
           </a:xfrm>
           <a:prstGeom prst="rect">
             <a:avLst/>
@@ -3859,139 +3745,135 @@
       </p:pic>
       <p:sp>
         <p:nvSpPr>
-          <p:cNvPr id="16" name="Shape 8"/>
+          <p:cNvPr id="17" name="Text 9"/>
+          <p:cNvSpPr txBox="1"/>
+          <p:nvPr/>
+        </p:nvSpPr>
+        <p:spPr>
+          <a:xfrm>
+            <a:off x="4567428" y="4662984"/>
+            <a:ext cx="3054096" cy="347472"/>
+          </a:xfrm>
+          <a:prstGeom prst="rect">
+            <a:avLst/>
+          </a:prstGeom>
+          <a:noFill/>
+          <a:ln/>
+        </p:spPr>
+        <p:txBody>
+          <a:bodyPr wrap="square" lIns="0" tIns="0" rIns="0" bIns="0" rtlCol="0" anchor="t"/>
+          <a:lstStyle/>
+          <a:p>
+            <a:pPr indent="0" marL="0">
+              <a:buNone/>
+            </a:pPr>
+            <a:r>
+              <a:rPr lang="en-GB" altLang="en-US" sz="1050" b="1" spc="100" kern="0" dirty="0">
+                <a:solidFill>
+                  <a:schemeClr val="accent4"/>
+                </a:solidFill>
+              </a:rPr>
+              <a:t>MOROCCO, AFCON FINAL: ISHOWSPEED TOUR</a:t>
+            </a:r>
+            <a:endParaRPr lang="en-GB" sz="1050" dirty="0"/>
+          </a:p>
+        </p:txBody>
+      </p:sp>
+      <p:sp>
+        <p:nvSpPr>
+          <p:cNvPr id="18" name="Text 10"/>
+          <p:cNvSpPr txBox="1"/>
+          <p:nvPr/>
+        </p:nvSpPr>
+        <p:spPr>
+          <a:xfrm>
+            <a:off x="4567428" y="5028744"/>
+            <a:ext cx="3054096" cy="411480"/>
+          </a:xfrm>
+          <a:prstGeom prst="rect">
+            <a:avLst/>
+          </a:prstGeom>
+          <a:noFill/>
+          <a:ln/>
+        </p:spPr>
+        <p:txBody>
+          <a:bodyPr wrap="square" lIns="0" tIns="0" rIns="0" bIns="0" rtlCol="0" anchor="t"/>
+          <a:lstStyle/>
+          <a:p>
+            <a:pPr indent="0" marL="0">
+              <a:buNone/>
+            </a:pPr>
+            <a:r>
+              <a:rPr lang="en-GB" altLang="en-US" sz="2600" b="1" dirty="0">
+                <a:solidFill>
+                  <a:schemeClr val="bg1"/>
+                </a:solidFill>
+              </a:rPr>
+              <a:t>16 Million</a:t>
+            </a:r>
+            <a:endParaRPr lang="en-GB" sz="2600" dirty="0"/>
+          </a:p>
+        </p:txBody>
+      </p:sp>
+      <p:sp>
+        <p:nvSpPr>
+          <p:cNvPr id="19" name="Text 11"/>
+          <p:cNvSpPr txBox="1"/>
+          <p:nvPr/>
+        </p:nvSpPr>
+        <p:spPr>
+          <a:xfrm>
+            <a:off x="4567428" y="5458512"/>
+            <a:ext cx="3054096" cy="502920"/>
+          </a:xfrm>
+          <a:prstGeom prst="rect">
+            <a:avLst/>
+          </a:prstGeom>
+          <a:noFill/>
+          <a:ln/>
+        </p:spPr>
+        <p:txBody>
+          <a:bodyPr wrap="square" lIns="0" tIns="0" rIns="0" bIns="0" rtlCol="0" anchor="t"/>
+          <a:lstStyle/>
+          <a:p>
+            <a:pPr indent="0" marL="0">
+              <a:buNone/>
+            </a:pPr>
+            <a:r>
+              <a:rPr lang="en-GB" altLang="en-US" sz="1150" dirty="0">
+                <a:solidFill>
+                  <a:schemeClr val="accent5"/>
+                </a:solidFill>
+              </a:rPr>
+              <a:t>Live stream views, delivered with CAF and the Royal Moroccan Football Federation</a:t>
+            </a:r>
+            <a:endParaRPr lang="en-GB" sz="1150" dirty="0"/>
+          </a:p>
+        </p:txBody>
+      </p:sp>
+      <p:sp>
+        <p:nvSpPr>
+          <p:cNvPr id="20" name="Shape 12"/>
           <p:cNvSpPr/>
           <p:nvPr/>
         </p:nvSpPr>
         <p:spPr>
           <a:xfrm>
-            <a:off x="6154007" y="4809744"/>
-            <a:ext cx="1664208" cy="292608"/>
-          </a:xfrm>
-          <a:prstGeom prst="roundRect">
-            <a:avLst>
-              <a:gd name="adj" fmla="val 18750"/>
-            </a:avLst>
+            <a:off x="8129016" y="2057400"/>
+            <a:ext cx="3511296" cy="3931920"/>
+          </a:xfrm>
+          <a:prstGeom prst="rect">
+            <a:avLst/>
           </a:prstGeom>
           <a:solidFill>
-            <a:schemeClr val="tx1">
-              <a:alpha val="70000"/>
-            </a:schemeClr>
+            <a:schemeClr val="accent6"/>
           </a:solidFill>
           <a:ln/>
         </p:spPr>
-      </p:sp>
-      <p:sp>
-        <p:nvSpPr>
-          <p:cNvPr id="17" name="Text 9"/>
-          <p:cNvSpPr txBox="1"/>
-          <p:nvPr/>
-        </p:nvSpPr>
-        <p:spPr>
-          <a:xfrm>
-            <a:off x="6154007" y="4809744"/>
-            <a:ext cx="1664208" cy="292608"/>
-          </a:xfrm>
-          <a:prstGeom prst="rect">
-            <a:avLst/>
-          </a:prstGeom>
-          <a:noFill/>
-          <a:ln/>
-        </p:spPr>
-        <p:txBody>
-          <a:bodyPr wrap="square" lIns="0" tIns="0" rIns="0" bIns="0" rtlCol="0" anchor="ctr"/>
-          <a:lstStyle/>
-          <a:p>
-            <a:pPr algn="ctr" indent="0" marL="0">
-              <a:buNone/>
-            </a:pPr>
-            <a:r>
-              <a:rPr lang="en-GB" altLang="en-US" sz="1000" dirty="0">
-                <a:solidFill>
-                  <a:schemeClr val="bg1"/>
-                </a:solidFill>
-              </a:rPr>
-              <a:t>Morocco, AFCON Final</a:t>
-            </a:r>
-            <a:endParaRPr lang="en-GB" sz="1000" dirty="0"/>
-          </a:p>
-        </p:txBody>
-      </p:sp>
-      <p:sp>
-        <p:nvSpPr>
-          <p:cNvPr id="18" name="Text 10"/>
-          <p:cNvSpPr txBox="1"/>
-          <p:nvPr/>
-        </p:nvSpPr>
-        <p:spPr>
-          <a:xfrm>
-            <a:off x="6044279" y="5321808"/>
-            <a:ext cx="2289810" cy="411480"/>
-          </a:xfrm>
-          <a:prstGeom prst="rect">
-            <a:avLst/>
-          </a:prstGeom>
-          <a:noFill/>
-          <a:ln/>
-        </p:spPr>
-        <p:txBody>
-          <a:bodyPr wrap="square" lIns="0" tIns="0" rIns="0" bIns="0" rtlCol="0" anchor="t"/>
-          <a:lstStyle/>
-          <a:p>
-            <a:pPr indent="0" marL="0">
-              <a:buNone/>
-            </a:pPr>
-            <a:r>
-              <a:rPr lang="en-GB" altLang="en-US" sz="2600" dirty="0">
-                <a:solidFill>
-                  <a:schemeClr val="accent4"/>
-                </a:solidFill>
-              </a:rPr>
-              <a:t>16M</a:t>
-            </a:r>
-            <a:endParaRPr lang="en-GB" sz="2600" dirty="0"/>
-          </a:p>
-        </p:txBody>
-      </p:sp>
-      <p:sp>
-        <p:nvSpPr>
-          <p:cNvPr id="19" name="Text 11"/>
-          <p:cNvSpPr txBox="1"/>
-          <p:nvPr/>
-        </p:nvSpPr>
-        <p:spPr>
-          <a:xfrm>
-            <a:off x="6044279" y="5733288"/>
-            <a:ext cx="2289810" cy="347472"/>
-          </a:xfrm>
-          <a:prstGeom prst="rect">
-            <a:avLst/>
-          </a:prstGeom>
-          <a:noFill/>
-          <a:ln/>
-        </p:spPr>
-        <p:txBody>
-          <a:bodyPr wrap="square" lIns="0" tIns="0" rIns="0" bIns="0" rtlCol="0" anchor="t"/>
-          <a:lstStyle/>
-          <a:p>
-            <a:pPr indent="0" marL="0">
-              <a:buNone/>
-            </a:pPr>
-            <a:r>
-              <a:rPr lang="en-GB" altLang="en-US" sz="1050" dirty="0">
-                <a:solidFill>
-                  <a:schemeClr val="accent5"/>
-                </a:solidFill>
-              </a:rPr>
-              <a:t>Live stream views of the AFCON mascot reveal.</a:t>
-            </a:r>
-            <a:endParaRPr lang="en-GB" sz="1050" dirty="0"/>
-          </a:p>
-        </p:txBody>
       </p:sp>
       <p:pic>
         <p:nvPicPr>
-          <p:cNvPr id="20" name="Photo ashton" descr="Ashton Hall Africa Tour, Nigeria leg">    </p:cNvPr>
+          <p:cNvPr id="21" name="Photo card_ashton" descr="Ashton Hall Africa Tour, Nigeria leg">    </p:cNvPr>
           <p:cNvPicPr>
             <a:picLocks noChangeAspect="1"/>
           </p:cNvPicPr>
@@ -4005,8 +3887,8 @@
         </p:blipFill>
         <p:spPr>
           <a:xfrm>
-            <a:off x="8899855" y="1783080"/>
-            <a:ext cx="2743200" cy="3429000"/>
+            <a:off x="8129016" y="2057400"/>
+            <a:ext cx="3511296" cy="2468235"/>
           </a:xfrm>
           <a:prstGeom prst="rect">
             <a:avLst/>
@@ -4015,74 +3897,86 @@
       </p:pic>
       <p:sp>
         <p:nvSpPr>
-          <p:cNvPr id="21" name="Shape 12"/>
-          <p:cNvSpPr/>
-          <p:nvPr/>
-        </p:nvSpPr>
-        <p:spPr>
-          <a:xfrm>
-            <a:off x="9009583" y="4809744"/>
-            <a:ext cx="662940" cy="292608"/>
-          </a:xfrm>
-          <a:prstGeom prst="roundRect">
-            <a:avLst>
-              <a:gd name="adj" fmla="val 18750"/>
-            </a:avLst>
-          </a:prstGeom>
-          <a:solidFill>
-            <a:schemeClr val="tx1">
-              <a:alpha val="70000"/>
-            </a:schemeClr>
-          </a:solidFill>
-          <a:ln/>
-        </p:spPr>
-      </p:sp>
-      <p:sp>
-        <p:nvSpPr>
           <p:cNvPr id="22" name="Text 13"/>
           <p:cNvSpPr txBox="1"/>
           <p:nvPr/>
         </p:nvSpPr>
         <p:spPr>
           <a:xfrm>
-            <a:off x="9009583" y="4809744"/>
-            <a:ext cx="662940" cy="292608"/>
-          </a:xfrm>
-          <a:prstGeom prst="rect">
-            <a:avLst/>
-          </a:prstGeom>
-          <a:noFill/>
-          <a:ln/>
-        </p:spPr>
-        <p:txBody>
-          <a:bodyPr wrap="square" lIns="0" tIns="0" rIns="0" bIns="0" rtlCol="0" anchor="ctr"/>
-          <a:lstStyle/>
-          <a:p>
-            <a:pPr algn="ctr" indent="0" marL="0">
-              <a:buNone/>
-            </a:pPr>
-            <a:r>
-              <a:rPr lang="en-GB" altLang="en-US" sz="1000" dirty="0">
+            <a:off x="8357616" y="4662795"/>
+            <a:ext cx="3054096" cy="347472"/>
+          </a:xfrm>
+          <a:prstGeom prst="rect">
+            <a:avLst/>
+          </a:prstGeom>
+          <a:noFill/>
+          <a:ln/>
+        </p:spPr>
+        <p:txBody>
+          <a:bodyPr wrap="square" lIns="0" tIns="0" rIns="0" bIns="0" rtlCol="0" anchor="t"/>
+          <a:lstStyle/>
+          <a:p>
+            <a:pPr indent="0" marL="0">
+              <a:buNone/>
+            </a:pPr>
+            <a:r>
+              <a:rPr lang="en-GB" altLang="en-US" sz="1050" b="1" spc="100" kern="0" dirty="0">
+                <a:solidFill>
+                  <a:schemeClr val="accent5"/>
+                </a:solidFill>
+              </a:rPr>
+              <a:t>ASHTON HALL AFRICA TOUR</a:t>
+            </a:r>
+            <a:endParaRPr lang="en-GB" sz="1050" dirty="0"/>
+          </a:p>
+        </p:txBody>
+      </p:sp>
+      <p:sp>
+        <p:nvSpPr>
+          <p:cNvPr id="23" name="Text 14"/>
+          <p:cNvSpPr txBox="1"/>
+          <p:nvPr/>
+        </p:nvSpPr>
+        <p:spPr>
+          <a:xfrm>
+            <a:off x="8357616" y="5028555"/>
+            <a:ext cx="3054096" cy="411480"/>
+          </a:xfrm>
+          <a:prstGeom prst="rect">
+            <a:avLst/>
+          </a:prstGeom>
+          <a:noFill/>
+          <a:ln/>
+        </p:spPr>
+        <p:txBody>
+          <a:bodyPr wrap="square" lIns="0" tIns="0" rIns="0" bIns="0" rtlCol="0" anchor="t"/>
+          <a:lstStyle/>
+          <a:p>
+            <a:pPr indent="0" marL="0">
+              <a:buNone/>
+            </a:pPr>
+            <a:r>
+              <a:rPr lang="en-GB" altLang="en-US" sz="2600" b="1" dirty="0">
                 <a:solidFill>
                   <a:schemeClr val="bg1"/>
                 </a:solidFill>
               </a:rPr>
-              <a:t>Lagos</a:t>
-            </a:r>
-            <a:endParaRPr lang="en-GB" sz="1000" dirty="0"/>
-          </a:p>
-        </p:txBody>
-      </p:sp>
-      <p:sp>
-        <p:nvSpPr>
-          <p:cNvPr id="23" name="Text 14"/>
-          <p:cNvSpPr txBox="1"/>
-          <p:nvPr/>
-        </p:nvSpPr>
-        <p:spPr>
-          <a:xfrm>
-            <a:off x="8899855" y="5321808"/>
-            <a:ext cx="2743200" cy="411480"/>
+              <a:t>1.57 Billion</a:t>
+            </a:r>
+            <a:endParaRPr lang="en-GB" sz="2600" dirty="0"/>
+          </a:p>
+        </p:txBody>
+      </p:sp>
+      <p:sp>
+        <p:nvSpPr>
+          <p:cNvPr id="24" name="Text 15"/>
+          <p:cNvSpPr txBox="1"/>
+          <p:nvPr/>
+        </p:nvSpPr>
+        <p:spPr>
+          <a:xfrm>
+            <a:off x="8357616" y="5458323"/>
+            <a:ext cx="3054096" cy="502920"/>
           </a:xfrm>
           <a:prstGeom prst="rect">
             <a:avLst/>
@@ -4098,50 +3992,14 @@
               <a:buNone/>
             </a:pPr>
             <a:r>
-              <a:rPr lang="en-GB" altLang="en-US" sz="2600" dirty="0">
-                <a:solidFill>
-                  <a:schemeClr val="accent4"/>
-                </a:solidFill>
-              </a:rPr>
-              <a:t>1.57B</a:t>
-            </a:r>
-            <a:endParaRPr lang="en-GB" sz="2600" dirty="0"/>
-          </a:p>
-        </p:txBody>
-      </p:sp>
-      <p:sp>
-        <p:nvSpPr>
-          <p:cNvPr id="24" name="Text 15"/>
-          <p:cNvSpPr txBox="1"/>
-          <p:nvPr/>
-        </p:nvSpPr>
-        <p:spPr>
-          <a:xfrm>
-            <a:off x="8899855" y="5733288"/>
-            <a:ext cx="2743200" cy="347472"/>
-          </a:xfrm>
-          <a:prstGeom prst="rect">
-            <a:avLst/>
-          </a:prstGeom>
-          <a:noFill/>
-          <a:ln/>
-        </p:spPr>
-        <p:txBody>
-          <a:bodyPr wrap="square" lIns="0" tIns="0" rIns="0" bIns="0" rtlCol="0" anchor="t"/>
-          <a:lstStyle/>
-          <a:p>
-            <a:pPr indent="0" marL="0">
-              <a:buNone/>
-            </a:pPr>
-            <a:r>
-              <a:rPr lang="en-GB" altLang="en-US" sz="1050" dirty="0">
+              <a:rPr lang="en-GB" altLang="en-US" sz="1150" dirty="0">
                 <a:solidFill>
                   <a:schemeClr val="accent5"/>
                 </a:solidFill>
               </a:rPr>
-              <a:t>Tour views across five countries, managed end to end.</a:t>
-            </a:r>
-            <a:endParaRPr lang="en-GB" sz="1050" dirty="0"/>
+              <a:t>Total views, five countries managed end to end: Ghana, Cameroon, Nigeria, Benin, Rwanda</a:t>
+            </a:r>
+            <a:endParaRPr lang="en-GB" sz="1150" dirty="0"/>
           </a:p>
         </p:txBody>
       </p:sp>
@@ -4153,7 +4011,7 @@
         </p:nvSpPr>
         <p:spPr>
           <a:xfrm>
-            <a:off x="548640" y="6144768"/>
+            <a:off x="548640" y="6108192"/>
             <a:ext cx="11094415" cy="201168"/>
           </a:xfrm>
           <a:prstGeom prst="rect">
@@ -4386,7 +4244,7 @@
         </p:nvSpPr>
         <p:spPr>
           <a:xfrm>
-            <a:off x="548640" y="2148840"/>
+            <a:off x="548640" y="2240280"/>
             <a:ext cx="457200" cy="457200"/>
           </a:xfrm>
           <a:prstGeom prst="ellipse">
@@ -4406,7 +4264,7 @@
         </p:nvSpPr>
         <p:spPr>
           <a:xfrm>
-            <a:off x="548640" y="2148840"/>
+            <a:off x="548640" y="2240280"/>
             <a:ext cx="457200" cy="457200"/>
           </a:xfrm>
           <a:prstGeom prst="rect">
@@ -4442,17 +4300,17 @@
         </p:nvSpPr>
         <p:spPr>
           <a:xfrm>
-            <a:off x="1188720" y="2112264"/>
-            <a:ext cx="5943600" cy="329184"/>
-          </a:xfrm>
-          <a:prstGeom prst="rect">
-            <a:avLst/>
-          </a:prstGeom>
-          <a:noFill/>
-          <a:ln/>
-        </p:spPr>
-        <p:txBody>
-          <a:bodyPr wrap="square" lIns="0" tIns="0" rIns="0" bIns="0" rtlCol="0" anchor="t"/>
+            <a:off x="1188720" y="2240280"/>
+            <a:ext cx="5943600" cy="457200"/>
+          </a:xfrm>
+          <a:prstGeom prst="rect">
+            <a:avLst/>
+          </a:prstGeom>
+          <a:noFill/>
+          <a:ln/>
+        </p:spPr>
+        <p:txBody>
+          <a:bodyPr wrap="square" lIns="0" tIns="0" rIns="0" bIns="0" rtlCol="0" anchor="ctr"/>
           <a:lstStyle/>
           <a:p>
             <a:pPr indent="0" marL="0">
@@ -4475,49 +4333,13 @@
       </p:sp>
       <p:sp>
         <p:nvSpPr>
-          <p:cNvPr id="10" name="Text 5"/>
-          <p:cNvSpPr txBox="1"/>
-          <p:nvPr/>
-        </p:nvSpPr>
-        <p:spPr>
-          <a:xfrm>
-            <a:off x="1188720" y="2441448"/>
-            <a:ext cx="5943600" cy="237744"/>
-          </a:xfrm>
-          <a:prstGeom prst="rect">
-            <a:avLst/>
-          </a:prstGeom>
-          <a:noFill/>
-          <a:ln/>
-        </p:spPr>
-        <p:txBody>
-          <a:bodyPr wrap="square" lIns="0" tIns="0" rIns="0" bIns="0" rtlCol="0" anchor="t"/>
-          <a:lstStyle/>
-          <a:p>
-            <a:pPr indent="0" marL="0">
-              <a:buNone/>
-            </a:pPr>
-            <a:r>
-              <a:rPr lang="en-GB" altLang="en-US" sz="1200" dirty="0">
-                <a:solidFill>
-                  <a:schemeClr val="accent4"/>
-                </a:solidFill>
-              </a:rPr>
-              <a:t>This week</a:t>
-            </a:r>
-            <a:endParaRPr lang="en-GB" sz="1200" dirty="0"/>
-          </a:p>
-        </p:txBody>
-      </p:sp>
-      <p:sp>
-        <p:nvSpPr>
-          <p:cNvPr id="11" name="Shape 6"/>
+          <p:cNvPr id="10" name="Shape 5"/>
           <p:cNvSpPr/>
           <p:nvPr/>
         </p:nvSpPr>
         <p:spPr>
           <a:xfrm>
-            <a:off x="548640" y="2880360"/>
+            <a:off x="548640" y="2926080"/>
             <a:ext cx="457200" cy="457200"/>
           </a:xfrm>
           <a:prstGeom prst="ellipse">
@@ -4531,14 +4353,50 @@
       </p:sp>
       <p:sp>
         <p:nvSpPr>
+          <p:cNvPr id="11" name="Text 6"/>
+          <p:cNvSpPr txBox="1"/>
+          <p:nvPr/>
+        </p:nvSpPr>
+        <p:spPr>
+          <a:xfrm>
+            <a:off x="548640" y="2926080"/>
+            <a:ext cx="457200" cy="457200"/>
+          </a:xfrm>
+          <a:prstGeom prst="rect">
+            <a:avLst/>
+          </a:prstGeom>
+          <a:noFill/>
+          <a:ln/>
+        </p:spPr>
+        <p:txBody>
+          <a:bodyPr wrap="square" lIns="0" tIns="0" rIns="0" bIns="0" rtlCol="0" anchor="ctr"/>
+          <a:lstStyle/>
+          <a:p>
+            <a:pPr algn="ctr" indent="0" marL="0">
+              <a:buNone/>
+            </a:pPr>
+            <a:r>
+              <a:rPr lang="en-GB" altLang="en-US" sz="1400" b="1" dirty="0">
+                <a:solidFill>
+                  <a:schemeClr val="tx1"/>
+                </a:solidFill>
+              </a:rPr>
+              <a:t>2</a:t>
+            </a:r>
+            <a:endParaRPr lang="en-GB" sz="1400" dirty="0"/>
+          </a:p>
+        </p:txBody>
+      </p:sp>
+      <p:sp>
+        <p:nvSpPr>
           <p:cNvPr id="12" name="Text 7"/>
           <p:cNvSpPr txBox="1"/>
           <p:nvPr/>
         </p:nvSpPr>
         <p:spPr>
           <a:xfrm>
-            <a:off x="548640" y="2880360"/>
-            <a:ext cx="457200" cy="457200"/>
+            <a:off x="1188720" y="2926080"/>
+            <a:ext cx="5943600" cy="457200"/>
           </a:xfrm>
           <a:prstGeom prst="rect">
             <a:avLst/>
@@ -4548,42 +4406,6 @@
         </p:spPr>
         <p:txBody>
           <a:bodyPr wrap="square" lIns="0" tIns="0" rIns="0" bIns="0" rtlCol="0" anchor="ctr"/>
-          <a:lstStyle/>
-          <a:p>
-            <a:pPr algn="ctr" indent="0" marL="0">
-              <a:buNone/>
-            </a:pPr>
-            <a:r>
-              <a:rPr lang="en-GB" altLang="en-US" sz="1400" b="1" dirty="0">
-                <a:solidFill>
-                  <a:schemeClr val="tx1"/>
-                </a:solidFill>
-              </a:rPr>
-              <a:t>2</a:t>
-            </a:r>
-            <a:endParaRPr lang="en-GB" sz="1400" dirty="0"/>
-          </a:p>
-        </p:txBody>
-      </p:sp>
-      <p:sp>
-        <p:nvSpPr>
-          <p:cNvPr id="13" name="Text 8"/>
-          <p:cNvSpPr txBox="1"/>
-          <p:nvPr/>
-        </p:nvSpPr>
-        <p:spPr>
-          <a:xfrm>
-            <a:off x="1188720" y="2843784"/>
-            <a:ext cx="5943600" cy="329184"/>
-          </a:xfrm>
-          <a:prstGeom prst="rect">
-            <a:avLst/>
-          </a:prstGeom>
-          <a:noFill/>
-          <a:ln/>
-        </p:spPr>
-        <p:txBody>
-          <a:bodyPr wrap="square" lIns="0" tIns="0" rIns="0" bIns="0" rtlCol="0" anchor="t"/>
           <a:lstStyle/>
           <a:p>
             <a:pPr indent="0" marL="0">
@@ -4606,43 +4428,7 @@
       </p:sp>
       <p:sp>
         <p:nvSpPr>
-          <p:cNvPr id="14" name="Text 9"/>
-          <p:cNvSpPr txBox="1"/>
-          <p:nvPr/>
-        </p:nvSpPr>
-        <p:spPr>
-          <a:xfrm>
-            <a:off x="1188720" y="3172968"/>
-            <a:ext cx="5943600" cy="237744"/>
-          </a:xfrm>
-          <a:prstGeom prst="rect">
-            <a:avLst/>
-          </a:prstGeom>
-          <a:noFill/>
-          <a:ln/>
-        </p:spPr>
-        <p:txBody>
-          <a:bodyPr wrap="square" lIns="0" tIns="0" rIns="0" bIns="0" rtlCol="0" anchor="t"/>
-          <a:lstStyle/>
-          <a:p>
-            <a:pPr indent="0" marL="0">
-              <a:buNone/>
-            </a:pPr>
-            <a:r>
-              <a:rPr lang="en-GB" altLang="en-US" sz="1200" dirty="0">
-                <a:solidFill>
-                  <a:schemeClr val="accent4"/>
-                </a:solidFill>
-              </a:rPr>
-              <a:t>By Friday 13 November</a:t>
-            </a:r>
-            <a:endParaRPr lang="en-GB" sz="1200" dirty="0"/>
-          </a:p>
-        </p:txBody>
-      </p:sp>
-      <p:sp>
-        <p:nvSpPr>
-          <p:cNvPr id="15" name="Shape 10"/>
+          <p:cNvPr id="13" name="Shape 8"/>
           <p:cNvSpPr/>
           <p:nvPr/>
         </p:nvSpPr>
@@ -4662,7 +4448,7 @@
       </p:sp>
       <p:sp>
         <p:nvSpPr>
-          <p:cNvPr id="16" name="Text 11"/>
+          <p:cNvPr id="14" name="Text 9"/>
           <p:cNvSpPr txBox="1"/>
           <p:nvPr/>
         </p:nvSpPr>
@@ -4698,23 +4484,23 @@
       </p:sp>
       <p:sp>
         <p:nvSpPr>
-          <p:cNvPr id="17" name="Text 12"/>
-          <p:cNvSpPr txBox="1"/>
-          <p:nvPr/>
-        </p:nvSpPr>
-        <p:spPr>
-          <a:xfrm>
-            <a:off x="1188720" y="3575304"/>
-            <a:ext cx="5943600" cy="329184"/>
-          </a:xfrm>
-          <a:prstGeom prst="rect">
-            <a:avLst/>
-          </a:prstGeom>
-          <a:noFill/>
-          <a:ln/>
-        </p:spPr>
-        <p:txBody>
-          <a:bodyPr wrap="square" lIns="0" tIns="0" rIns="0" bIns="0" rtlCol="0" anchor="t"/>
+          <p:cNvPr id="15" name="Text 10"/>
+          <p:cNvSpPr txBox="1"/>
+          <p:nvPr/>
+        </p:nvSpPr>
+        <p:spPr>
+          <a:xfrm>
+            <a:off x="1188720" y="3611880"/>
+            <a:ext cx="5943600" cy="457200"/>
+          </a:xfrm>
+          <a:prstGeom prst="rect">
+            <a:avLst/>
+          </a:prstGeom>
+          <a:noFill/>
+          <a:ln/>
+        </p:spPr>
+        <p:txBody>
+          <a:bodyPr wrap="square" lIns="0" tIns="0" rIns="0" bIns="0" rtlCol="0" anchor="ctr"/>
           <a:lstStyle/>
           <a:p>
             <a:pPr indent="0" marL="0">
@@ -4737,49 +4523,13 @@
       </p:sp>
       <p:sp>
         <p:nvSpPr>
-          <p:cNvPr id="18" name="Text 13"/>
-          <p:cNvSpPr txBox="1"/>
-          <p:nvPr/>
-        </p:nvSpPr>
-        <p:spPr>
-          <a:xfrm>
-            <a:off x="1188720" y="3904488"/>
-            <a:ext cx="5943600" cy="237744"/>
-          </a:xfrm>
-          <a:prstGeom prst="rect">
-            <a:avLst/>
-          </a:prstGeom>
-          <a:noFill/>
-          <a:ln/>
-        </p:spPr>
-        <p:txBody>
-          <a:bodyPr wrap="square" lIns="0" tIns="0" rIns="0" bIns="0" rtlCol="0" anchor="t"/>
-          <a:lstStyle/>
-          <a:p>
-            <a:pPr indent="0" marL="0">
-              <a:buNone/>
-            </a:pPr>
-            <a:r>
-              <a:rPr lang="en-GB" altLang="en-US" sz="1200" dirty="0">
-                <a:solidFill>
-                  <a:schemeClr val="accent4"/>
-                </a:solidFill>
-              </a:rPr>
-              <a:t>By Friday 20 November</a:t>
-            </a:r>
-            <a:endParaRPr lang="en-GB" sz="1200" dirty="0"/>
-          </a:p>
-        </p:txBody>
-      </p:sp>
-      <p:sp>
-        <p:nvSpPr>
-          <p:cNvPr id="19" name="Shape 14"/>
+          <p:cNvPr id="16" name="Shape 11"/>
           <p:cNvSpPr/>
           <p:nvPr/>
         </p:nvSpPr>
         <p:spPr>
           <a:xfrm>
-            <a:off x="548640" y="4343400"/>
+            <a:off x="548640" y="4297680"/>
             <a:ext cx="457200" cy="457200"/>
           </a:xfrm>
           <a:prstGeom prst="ellipse">
@@ -4793,13 +4543,13 @@
       </p:sp>
       <p:sp>
         <p:nvSpPr>
-          <p:cNvPr id="20" name="Text 15"/>
-          <p:cNvSpPr txBox="1"/>
-          <p:nvPr/>
-        </p:nvSpPr>
-        <p:spPr>
-          <a:xfrm>
-            <a:off x="548640" y="4343400"/>
+          <p:cNvPr id="17" name="Text 12"/>
+          <p:cNvSpPr txBox="1"/>
+          <p:nvPr/>
+        </p:nvSpPr>
+        <p:spPr>
+          <a:xfrm>
+            <a:off x="548640" y="4297680"/>
             <a:ext cx="457200" cy="457200"/>
           </a:xfrm>
           <a:prstGeom prst="rect">
@@ -4829,23 +4579,23 @@
       </p:sp>
       <p:sp>
         <p:nvSpPr>
-          <p:cNvPr id="21" name="Text 16"/>
-          <p:cNvSpPr txBox="1"/>
-          <p:nvPr/>
-        </p:nvSpPr>
-        <p:spPr>
-          <a:xfrm>
-            <a:off x="1188720" y="4306824"/>
-            <a:ext cx="5943600" cy="329184"/>
-          </a:xfrm>
-          <a:prstGeom prst="rect">
-            <a:avLst/>
-          </a:prstGeom>
-          <a:noFill/>
-          <a:ln/>
-        </p:spPr>
-        <p:txBody>
-          <a:bodyPr wrap="square" lIns="0" tIns="0" rIns="0" bIns="0" rtlCol="0" anchor="t"/>
+          <p:cNvPr id="18" name="Text 13"/>
+          <p:cNvSpPr txBox="1"/>
+          <p:nvPr/>
+        </p:nvSpPr>
+        <p:spPr>
+          <a:xfrm>
+            <a:off x="1188720" y="4297680"/>
+            <a:ext cx="5943600" cy="457200"/>
+          </a:xfrm>
+          <a:prstGeom prst="rect">
+            <a:avLst/>
+          </a:prstGeom>
+          <a:noFill/>
+          <a:ln/>
+        </p:spPr>
+        <p:txBody>
+          <a:bodyPr wrap="square" lIns="0" tIns="0" rIns="0" bIns="0" rtlCol="0" anchor="ctr"/>
           <a:lstStyle/>
           <a:p>
             <a:pPr indent="0" marL="0">
@@ -4868,43 +4618,7 @@
       </p:sp>
       <p:sp>
         <p:nvSpPr>
-          <p:cNvPr id="22" name="Text 17"/>
-          <p:cNvSpPr txBox="1"/>
-          <p:nvPr/>
-        </p:nvSpPr>
-        <p:spPr>
-          <a:xfrm>
-            <a:off x="1188720" y="4636008"/>
-            <a:ext cx="5943600" cy="237744"/>
-          </a:xfrm>
-          <a:prstGeom prst="rect">
-            <a:avLst/>
-          </a:prstGeom>
-          <a:noFill/>
-          <a:ln/>
-        </p:spPr>
-        <p:txBody>
-          <a:bodyPr wrap="square" lIns="0" tIns="0" rIns="0" bIns="0" rtlCol="0" anchor="t"/>
-          <a:lstStyle/>
-          <a:p>
-            <a:pPr indent="0" marL="0">
-              <a:buNone/>
-            </a:pPr>
-            <a:r>
-              <a:rPr lang="en-GB" altLang="en-US" sz="1200" dirty="0">
-                <a:solidFill>
-                  <a:schemeClr val="accent4"/>
-                </a:solidFill>
-              </a:rPr>
-              <a:t>From Monday 23 November</a:t>
-            </a:r>
-            <a:endParaRPr lang="en-GB" sz="1200" dirty="0"/>
-          </a:p>
-        </p:txBody>
-      </p:sp>
-      <p:sp>
-        <p:nvSpPr>
-          <p:cNvPr id="23" name="Shape 18"/>
+          <p:cNvPr id="19" name="Shape 14"/>
           <p:cNvSpPr/>
           <p:nvPr/>
         </p:nvSpPr>
@@ -4927,7 +4641,7 @@
       </p:sp>
       <p:sp>
         <p:nvSpPr>
-          <p:cNvPr id="24" name="Text 19"/>
+          <p:cNvPr id="20" name="Text 15"/>
           <p:cNvSpPr txBox="1"/>
           <p:nvPr/>
         </p:nvSpPr>
@@ -4963,7 +4677,7 @@
       </p:sp>
       <p:sp>
         <p:nvSpPr>
-          <p:cNvPr id="25" name="Text 20"/>
+          <p:cNvPr id="21" name="Text 16"/>
           <p:cNvSpPr txBox="1"/>
           <p:nvPr/>
         </p:nvSpPr>
@@ -4999,7 +4713,7 @@
       </p:sp>
       <p:sp>
         <p:nvSpPr>
-          <p:cNvPr id="26" name="Text 21"/>
+          <p:cNvPr id="22" name="Text 17"/>
           <p:cNvSpPr txBox="1"/>
           <p:nvPr/>
         </p:nvSpPr>
@@ -5035,7 +4749,7 @@
       </p:sp>
       <p:sp>
         <p:nvSpPr>
-          <p:cNvPr id="27" name="Text 22"/>
+          <p:cNvPr id="23" name="Text 18"/>
           <p:cNvSpPr txBox="1"/>
           <p:nvPr/>
         </p:nvSpPr>
@@ -5071,7 +4785,7 @@
       </p:sp>
       <p:sp>
         <p:nvSpPr>
-          <p:cNvPr id="28" name="Text 23"/>
+          <p:cNvPr id="24" name="Text 19"/>
           <p:cNvSpPr txBox="1"/>
           <p:nvPr/>
         </p:nvSpPr>
@@ -5107,7 +4821,7 @@
       </p:sp>
       <p:sp>
         <p:nvSpPr>
-          <p:cNvPr id="29" name="Text 24"/>
+          <p:cNvPr id="25" name="Text 20"/>
           <p:cNvSpPr txBox="1"/>
           <p:nvPr/>
         </p:nvSpPr>
@@ -5143,7 +4857,7 @@
       </p:sp>
       <p:sp>
         <p:nvSpPr>
-          <p:cNvPr id="30" name="Text 25"/>
+          <p:cNvPr id="26" name="Text 21"/>
           <p:cNvSpPr txBox="1"/>
           <p:nvPr/>
         </p:nvSpPr>
@@ -5179,7 +4893,7 @@
       </p:sp>
       <p:pic>
         <p:nvPicPr>
-          <p:cNvPr id="31" name="Image 2" descr="AToure Management &amp; Consulting">    </p:cNvPr>
+          <p:cNvPr id="27" name="Image 2" descr="AToure Management &amp; Consulting">    </p:cNvPr>
           <p:cNvPicPr>
             <a:picLocks noChangeAspect="1"/>
           </p:cNvPicPr>
@@ -5201,4404 +4915,6 @@
           </a:prstGeom>
         </p:spPr>
       </p:pic>
-    </p:spTree>
-  </p:cSld>
-  <p:clrMapOvr>
-    <a:masterClrMapping/>
-  </p:clrMapOvr>
-</p:sld>
-</file>
-
-<file path=ppt/slides/slide12.xml><?xml version="1.0" encoding="utf-8"?>
-<p:sld xmlns:a="http://schemas.openxmlformats.org/drawingml/2006/main" xmlns:r="http://schemas.openxmlformats.org/officeDocument/2006/relationships" xmlns:p="http://schemas.openxmlformats.org/presentationml/2006/main">
-  <p:cSld name="Slide 12">
-    <p:spTree>
-      <p:nvGrpSpPr>
-        <p:cNvPr id="1" name=""/>
-        <p:cNvGrpSpPr/>
-        <p:nvPr/>
-      </p:nvGrpSpPr>
-      <p:grpSpPr>
-        <a:xfrm>
-          <a:off x="0" y="0"/>
-          <a:ext cx="0" cy="0"/>
-          <a:chOff x="0" y="0"/>
-          <a:chExt cx="0" cy="0"/>
-        </a:xfrm>
-      </p:grpSpPr>
-      <p:sp>
-        <p:nvSpPr>
-          <p:cNvPr id="2" name="Text 0"/>
-          <p:cNvSpPr/>
-          <p:nvPr>
-            <p:ph idx="100" type="body" hasCustomPrompt="1"/>
-          </p:nvPr>
-        </p:nvSpPr>
-        <p:spPr>
-          <a:xfrm>
-            <a:off x="548640" y="411480"/>
-            <a:ext cx="11094415" cy="256032"/>
-          </a:xfrm>
-          <a:prstGeom prst="rect">
-            <a:avLst/>
-          </a:prstGeom>
-          <a:noFill/>
-          <a:ln/>
-        </p:spPr>
-        <p:txBody>
-          <a:bodyPr wrap="square" lIns="0" tIns="0" rIns="0" bIns="0" rtlCol="0" anchor="t"/>
-          <a:lstStyle/>
-          <a:p>
-            <a:pPr algn="l" indent="0" marL="0">
-              <a:buNone/>
-            </a:pPr>
-            <a:r>
-              <a:rPr lang="en-GB" altLang="en-US" sz="1100" b="1" spc="300" kern="0" dirty="0">
-                <a:solidFill>
-                  <a:schemeClr val="accent3"/>
-                </a:solidFill>
-              </a:rPr>
-              <a:t>APPENDIX  ·  SAMPLE REPORT, PAGE 2</a:t>
-            </a:r>
-            <a:endParaRPr lang="en-GB" sz="1100" dirty="0"/>
-          </a:p>
-        </p:txBody>
-      </p:sp>
-      <p:sp>
-        <p:nvSpPr>
-          <p:cNvPr id="3" name="Text 0"/>
-          <p:cNvSpPr/>
-          <p:nvPr>
-            <p:ph idx="101" type="title" hasCustomPrompt="1"/>
-          </p:nvPr>
-        </p:nvSpPr>
-        <p:spPr>
-          <a:xfrm>
-            <a:off x="548640" y="676656"/>
-            <a:ext cx="11094415" cy="777240"/>
-          </a:xfrm>
-          <a:prstGeom prst="rect">
-            <a:avLst/>
-          </a:prstGeom>
-          <a:noFill/>
-          <a:ln/>
-        </p:spPr>
-        <p:txBody>
-          <a:bodyPr wrap="square" lIns="0" tIns="0" rIns="0" bIns="0" rtlCol="0" anchor="t"/>
-          <a:lstStyle/>
-          <a:p>
-            <a:pPr algn="l" indent="0" marL="0">
-              <a:buNone/>
-            </a:pPr>
-            <a:r>
-              <a:rPr lang="en-GB" altLang="en-US" sz="3800" dirty="0">
-                <a:solidFill>
-                  <a:schemeClr val="tx1"/>
-                </a:solidFill>
-              </a:rPr>
-              <a:t>Every number breaks down, creator by creator</a:t>
-            </a:r>
-            <a:endParaRPr lang="en-GB" sz="3800" dirty="0"/>
-          </a:p>
-        </p:txBody>
-      </p:sp>
-      <p:pic>
-        <p:nvPicPr>
-          <p:cNvPr id="5" name="Image 0" descr="AToure Management &amp; Consulting">    </p:cNvPr>
-          <p:cNvPicPr>
-            <a:picLocks noChangeAspect="1"/>
-          </p:cNvPicPr>
-          <p:nvPr/>
-        </p:nvPicPr>
-        <p:blipFill>
-          <a:blip r:embed="rId1"/>
-          <a:stretch>
-            <a:fillRect/>
-          </a:stretch>
-        </p:blipFill>
-        <p:spPr>
-          <a:xfrm>
-            <a:off x="9098280" y="301752"/>
-            <a:ext cx="1417320" cy="226771"/>
-          </a:xfrm>
-          <a:prstGeom prst="rect">
-            <a:avLst/>
-          </a:prstGeom>
-        </p:spPr>
-      </p:pic>
-      <p:sp>
-        <p:nvSpPr>
-          <p:cNvPr id="6" name="Text 2"/>
-          <p:cNvSpPr txBox="1"/>
-          <p:nvPr/>
-        </p:nvSpPr>
-        <p:spPr>
-          <a:xfrm>
-            <a:off x="10570464" y="246888"/>
-            <a:ext cx="329184" cy="329184"/>
-          </a:xfrm>
-          <a:prstGeom prst="rect">
-            <a:avLst/>
-          </a:prstGeom>
-          <a:noFill/>
-          <a:ln/>
-        </p:spPr>
-        <p:txBody>
-          <a:bodyPr wrap="square" lIns="0" tIns="0" rIns="0" bIns="0" rtlCol="0" anchor="ctr"/>
-          <a:lstStyle/>
-          <a:p>
-            <a:pPr algn="ctr" indent="0" marL="0">
-              <a:buNone/>
-            </a:pPr>
-            <a:r>
-              <a:rPr lang="en-GB" altLang="en-US" sz="1600" dirty="0">
-                <a:solidFill>
-                  <a:schemeClr val="accent3"/>
-                </a:solidFill>
-              </a:rPr>
-              <a:t>×</a:t>
-            </a:r>
-            <a:endParaRPr lang="en-GB" sz="1600" dirty="0"/>
-          </a:p>
-        </p:txBody>
-      </p:sp>
-      <p:pic>
-        <p:nvPicPr>
-          <p:cNvPr id="7" name="Image 1" descr="Mother Africa Festival">    </p:cNvPr>
-          <p:cNvPicPr>
-            <a:picLocks noChangeAspect="1"/>
-          </p:cNvPicPr>
-          <p:nvPr/>
-        </p:nvPicPr>
-        <p:blipFill>
-          <a:blip r:embed="rId2"/>
-          <a:stretch>
-            <a:fillRect/>
-          </a:stretch>
-        </p:blipFill>
-        <p:spPr>
-          <a:xfrm>
-            <a:off x="10984687" y="182880"/>
-            <a:ext cx="657231" cy="466344"/>
-          </a:xfrm>
-          <a:prstGeom prst="rect">
-            <a:avLst/>
-          </a:prstGeom>
-        </p:spPr>
-      </p:pic>
-      <p:sp>
-        <p:nvSpPr>
-          <p:cNvPr id="8" name="Shape 3"/>
-          <p:cNvSpPr/>
-          <p:nvPr/>
-        </p:nvSpPr>
-        <p:spPr>
-          <a:xfrm>
-            <a:off x="548640" y="1783080"/>
-            <a:ext cx="11094415" cy="4434840"/>
-          </a:xfrm>
-          <a:prstGeom prst="roundRect">
-            <a:avLst>
-              <a:gd name="adj" fmla="val 1649"/>
-            </a:avLst>
-          </a:prstGeom>
-          <a:solidFill>
-            <a:schemeClr val="bg1"/>
-          </a:solidFill>
-          <a:ln w="9525">
-            <a:solidFill>
-              <a:schemeClr val="tx2">
-                <a:alpha val="28000"/>
-              </a:schemeClr>
-            </a:solidFill>
-            <a:prstDash val="solid"/>
-          </a:ln>
-          <a:effectLst>
-            <a:outerShdw sx="100000" sy="100000" kx="0" ky="0" algn="bl" rotWithShape="0" blurRad="127000" dist="38100" dir="5400000">
-              <a:srgbClr val="133524">
-                <a:alpha val="10000"/>
-              </a:srgbClr>
-            </a:outerShdw>
-          </a:effectLst>
-        </p:spPr>
-      </p:sp>
-      <p:sp>
-        <p:nvSpPr>
-          <p:cNvPr id="9" name="Text 4"/>
-          <p:cNvSpPr txBox="1"/>
-          <p:nvPr/>
-        </p:nvSpPr>
-        <p:spPr>
-          <a:xfrm>
-            <a:off x="822960" y="1984248"/>
-            <a:ext cx="3657600" cy="201168"/>
-          </a:xfrm>
-          <a:prstGeom prst="rect">
-            <a:avLst/>
-          </a:prstGeom>
-          <a:noFill/>
-          <a:ln/>
-        </p:spPr>
-        <p:txBody>
-          <a:bodyPr wrap="square" lIns="0" tIns="0" rIns="0" bIns="0" rtlCol="0" anchor="t"/>
-          <a:lstStyle/>
-          <a:p>
-            <a:pPr indent="0" marL="0">
-              <a:buNone/>
-            </a:pPr>
-            <a:r>
-              <a:rPr lang="en-GB" altLang="en-US" sz="900" b="1" spc="300" kern="0" dirty="0">
-                <a:solidFill>
-                  <a:schemeClr val="accent3"/>
-                </a:solidFill>
-              </a:rPr>
-              <a:t>VISIBILITY REPORT  ·  PAGE 2</a:t>
-            </a:r>
-            <a:endParaRPr lang="en-GB" sz="900" dirty="0"/>
-          </a:p>
-        </p:txBody>
-      </p:sp>
-      <p:sp>
-        <p:nvSpPr>
-          <p:cNvPr id="10" name="Text 5"/>
-          <p:cNvSpPr txBox="1"/>
-          <p:nvPr/>
-        </p:nvSpPr>
-        <p:spPr>
-          <a:xfrm>
-            <a:off x="822960" y="2185416"/>
-            <a:ext cx="5486400" cy="365760"/>
-          </a:xfrm>
-          <a:prstGeom prst="rect">
-            <a:avLst/>
-          </a:prstGeom>
-          <a:noFill/>
-          <a:ln/>
-        </p:spPr>
-        <p:txBody>
-          <a:bodyPr wrap="square" lIns="0" tIns="0" rIns="0" bIns="0" rtlCol="0" anchor="t"/>
-          <a:lstStyle/>
-          <a:p>
-            <a:pPr indent="0" marL="0">
-              <a:buNone/>
-            </a:pPr>
-            <a:r>
-              <a:rPr lang="en-GB" altLang="en-US" sz="1800" dirty="0">
-                <a:solidFill>
-                  <a:schemeClr val="tx1"/>
-                </a:solidFill>
-                <a:latin typeface="+mj-lt" pitchFamily="34" charset="0"/>
-                <a:ea typeface="+mj-lt" pitchFamily="34" charset="-122"/>
-                <a:cs typeface="+mj-lt" pitchFamily="34" charset="-120"/>
-              </a:rPr>
-              <a:t>Mother Africa Festival 2026</a:t>
-            </a:r>
-            <a:endParaRPr lang="en-GB" sz="1800" dirty="0"/>
-          </a:p>
-        </p:txBody>
-      </p:sp>
-      <p:pic>
-        <p:nvPicPr>
-          <p:cNvPr id="11" name="Image 2" descr="Mother Africa Festival">    </p:cNvPr>
-          <p:cNvPicPr>
-            <a:picLocks noChangeAspect="1"/>
-          </p:cNvPicPr>
-          <p:nvPr/>
-        </p:nvPicPr>
-        <p:blipFill>
-          <a:blip r:embed="rId3"/>
-          <a:stretch>
-            <a:fillRect/>
-          </a:stretch>
-        </p:blipFill>
-        <p:spPr>
-          <a:xfrm>
-            <a:off x="10865815" y="1984248"/>
-            <a:ext cx="541249" cy="384048"/>
-          </a:xfrm>
-          <a:prstGeom prst="rect">
-            <a:avLst/>
-          </a:prstGeom>
-        </p:spPr>
-      </p:pic>
-      <p:sp>
-        <p:nvSpPr>
-          <p:cNvPr id="12" name="Shape 6"/>
-          <p:cNvSpPr/>
-          <p:nvPr/>
-        </p:nvSpPr>
-        <p:spPr>
-          <a:xfrm>
-            <a:off x="822960" y="2624328"/>
-            <a:ext cx="10545775" cy="0"/>
-          </a:xfrm>
-          <a:prstGeom prst="line">
-            <a:avLst/>
-          </a:prstGeom>
-          <a:noFill/>
-          <a:ln w="12700">
-            <a:solidFill>
-              <a:schemeClr val="accent1"/>
-            </a:solidFill>
-            <a:prstDash val="solid"/>
-          </a:ln>
-        </p:spPr>
-      </p:sp>
-      <p:sp>
-        <p:nvSpPr>
-          <p:cNvPr id="13" name="Text 7"/>
-          <p:cNvSpPr txBox="1"/>
-          <p:nvPr/>
-        </p:nvSpPr>
-        <p:spPr>
-          <a:xfrm>
-            <a:off x="822960" y="2770632"/>
-            <a:ext cx="3657600" cy="256032"/>
-          </a:xfrm>
-          <a:prstGeom prst="rect">
-            <a:avLst/>
-          </a:prstGeom>
-          <a:noFill/>
-          <a:ln/>
-        </p:spPr>
-        <p:txBody>
-          <a:bodyPr wrap="square" lIns="0" tIns="0" rIns="0" bIns="0" rtlCol="0" anchor="t"/>
-          <a:lstStyle/>
-          <a:p>
-            <a:pPr indent="0" marL="0">
-              <a:buNone/>
-            </a:pPr>
-            <a:r>
-              <a:rPr lang="en-GB" altLang="en-US" sz="1100" b="1" spc="300" kern="0" dirty="0">
-                <a:solidFill>
-                  <a:schemeClr val="accent3"/>
-                </a:solidFill>
-              </a:rPr>
-              <a:t>BY CREATOR</a:t>
-            </a:r>
-            <a:endParaRPr lang="en-GB" sz="1100" dirty="0"/>
-          </a:p>
-        </p:txBody>
-      </p:sp>
-      <p:graphicFrame>
-        <p:nvGraphicFramePr>
-          <p:cNvPr id="13" name="Sample table by creator"/>
-          <p:cNvGraphicFramePr>
-            <a:graphicFrameLocks noGrp="1"/>
-          </p:cNvGraphicFramePr>
-          <p:nvPr>
-            <p:extLst>
-              <p:ext uri="{D42A27DB-BD31-4B8C-83A1-F6EECF244321}">
-                <p14:modId xmlns:p14="http://schemas.microsoft.com/office/powerpoint/2010/main" val="1579011935"/>
-              </p:ext>
-            </p:extLst>
-          </p:nvPr>
-        </p:nvGraphicFramePr>
-        <p:xfrm>
-          <a:off x="822960" y="3026664"/>
-          <a:ext cx="6126480" cy="914400"/>
-        </p:xfrm>
-        <a:graphic>
-          <a:graphicData uri="http://schemas.openxmlformats.org/drawingml/2006/table">
-            <a:tbl>
-              <a:tblPr/>
-              <a:tblGrid>
-                <a:gridCol w="1828800"/>
-                <a:gridCol w="731520"/>
-                <a:gridCol w="1188720"/>
-                <a:gridCol w="1188720"/>
-                <a:gridCol w="1188720"/>
-              </a:tblGrid>
-              <a:tr h="274320">
-                <a:tc>
-                  <a:txBody>
-                    <a:bodyPr/>
-                    <a:lstStyle/>
-                    <a:p>
-                      <a:pPr indent="0" marL="0">
-                        <a:buNone/>
-                      </a:pPr>
-                      <a:r>
-                        <a:rPr lang="en-US" sz="1000" b="1" dirty="0">
-                          <a:solidFill>
-                            <a:schemeClr val="bg1"/>
-                          </a:solidFill>
-                        </a:rPr>
-                        <a:t>Creator</a:t>
-                      </a:r>
-                      <a:endParaRPr lang="en-US" sz="1000" dirty="0"/>
-                    </a:p>
-                  </a:txBody>
-                  <a:tcPr marL="128016" marR="128016" marT="54864" marB="54864" anchor="ctr">
-                    <a:lnL w="9525" cap="flat" cmpd="sng" algn="ctr">
-                      <a:solidFill>
-                        <a:srgbClr val="E3EDE6"/>
-                      </a:solidFill>
-                      <a:prstDash val="solid"/>
-                      <a:round/>
-                      <a:headEnd type="none" w="med" len="med"/>
-                      <a:tailEnd type="none" w="med" len="med"/>
-                    </a:lnL>
-                    <a:lnR w="9525" cap="flat" cmpd="sng" algn="ctr">
-                      <a:solidFill>
-                        <a:srgbClr val="E3EDE6"/>
-                      </a:solidFill>
-                      <a:prstDash val="solid"/>
-                      <a:round/>
-                      <a:headEnd type="none" w="med" len="med"/>
-                      <a:tailEnd type="none" w="med" len="med"/>
-                    </a:lnR>
-                    <a:lnT w="9525" cap="flat" cmpd="sng" algn="ctr">
-                      <a:solidFill>
-                        <a:srgbClr val="E3EDE6"/>
-                      </a:solidFill>
-                      <a:prstDash val="solid"/>
-                      <a:round/>
-                      <a:headEnd type="none" w="med" len="med"/>
-                      <a:tailEnd type="none" w="med" len="med"/>
-                    </a:lnT>
-                    <a:lnB w="9525" cap="flat" cmpd="sng" algn="ctr">
-                      <a:solidFill>
-                        <a:srgbClr val="E3EDE6"/>
-                      </a:solidFill>
-                      <a:prstDash val="solid"/>
-                      <a:round/>
-                      <a:headEnd type="none" w="med" len="med"/>
-                      <a:tailEnd type="none" w="med" len="med"/>
-                    </a:lnB>
-                    <a:solidFill>
-                      <a:schemeClr val="tx1"/>
-                    </a:solidFill>
-                  </a:tcPr>
-                </a:tc>
-                <a:tc>
-                  <a:txBody>
-                    <a:bodyPr/>
-                    <a:lstStyle/>
-                    <a:p>
-                      <a:pPr indent="0" marL="0">
-                        <a:buNone/>
-                      </a:pPr>
-                      <a:r>
-                        <a:rPr lang="en-US" sz="1000" b="1" dirty="0">
-                          <a:solidFill>
-                            <a:schemeClr val="bg1"/>
-                          </a:solidFill>
-                        </a:rPr>
-                        <a:t>Posts</a:t>
-                      </a:r>
-                      <a:endParaRPr lang="en-US" sz="1000" dirty="0"/>
-                    </a:p>
-                  </a:txBody>
-                  <a:tcPr marL="128016" marR="128016" marT="54864" marB="54864" anchor="ctr">
-                    <a:lnL w="9525" cap="flat" cmpd="sng" algn="ctr">
-                      <a:solidFill>
-                        <a:srgbClr val="E3EDE6"/>
-                      </a:solidFill>
-                      <a:prstDash val="solid"/>
-                      <a:round/>
-                      <a:headEnd type="none" w="med" len="med"/>
-                      <a:tailEnd type="none" w="med" len="med"/>
-                    </a:lnL>
-                    <a:lnR w="9525" cap="flat" cmpd="sng" algn="ctr">
-                      <a:solidFill>
-                        <a:srgbClr val="E3EDE6"/>
-                      </a:solidFill>
-                      <a:prstDash val="solid"/>
-                      <a:round/>
-                      <a:headEnd type="none" w="med" len="med"/>
-                      <a:tailEnd type="none" w="med" len="med"/>
-                    </a:lnR>
-                    <a:lnT w="9525" cap="flat" cmpd="sng" algn="ctr">
-                      <a:solidFill>
-                        <a:srgbClr val="E3EDE6"/>
-                      </a:solidFill>
-                      <a:prstDash val="solid"/>
-                      <a:round/>
-                      <a:headEnd type="none" w="med" len="med"/>
-                      <a:tailEnd type="none" w="med" len="med"/>
-                    </a:lnT>
-                    <a:lnB w="9525" cap="flat" cmpd="sng" algn="ctr">
-                      <a:solidFill>
-                        <a:srgbClr val="E3EDE6"/>
-                      </a:solidFill>
-                      <a:prstDash val="solid"/>
-                      <a:round/>
-                      <a:headEnd type="none" w="med" len="med"/>
-                      <a:tailEnd type="none" w="med" len="med"/>
-                    </a:lnB>
-                    <a:solidFill>
-                      <a:schemeClr val="tx1"/>
-                    </a:solidFill>
-                  </a:tcPr>
-                </a:tc>
-                <a:tc>
-                  <a:txBody>
-                    <a:bodyPr/>
-                    <a:lstStyle/>
-                    <a:p>
-                      <a:pPr indent="0" marL="0">
-                        <a:buNone/>
-                      </a:pPr>
-                      <a:r>
-                        <a:rPr lang="en-US" sz="1000" b="1" dirty="0">
-                          <a:solidFill>
-                            <a:schemeClr val="bg1"/>
-                          </a:solidFill>
-                        </a:rPr>
-                        <a:t>Views</a:t>
-                      </a:r>
-                      <a:endParaRPr lang="en-US" sz="1000" dirty="0"/>
-                    </a:p>
-                  </a:txBody>
-                  <a:tcPr marL="128016" marR="128016" marT="54864" marB="54864" anchor="ctr">
-                    <a:lnL w="9525" cap="flat" cmpd="sng" algn="ctr">
-                      <a:solidFill>
-                        <a:srgbClr val="E3EDE6"/>
-                      </a:solidFill>
-                      <a:prstDash val="solid"/>
-                      <a:round/>
-                      <a:headEnd type="none" w="med" len="med"/>
-                      <a:tailEnd type="none" w="med" len="med"/>
-                    </a:lnL>
-                    <a:lnR w="9525" cap="flat" cmpd="sng" algn="ctr">
-                      <a:solidFill>
-                        <a:srgbClr val="E3EDE6"/>
-                      </a:solidFill>
-                      <a:prstDash val="solid"/>
-                      <a:round/>
-                      <a:headEnd type="none" w="med" len="med"/>
-                      <a:tailEnd type="none" w="med" len="med"/>
-                    </a:lnR>
-                    <a:lnT w="9525" cap="flat" cmpd="sng" algn="ctr">
-                      <a:solidFill>
-                        <a:srgbClr val="E3EDE6"/>
-                      </a:solidFill>
-                      <a:prstDash val="solid"/>
-                      <a:round/>
-                      <a:headEnd type="none" w="med" len="med"/>
-                      <a:tailEnd type="none" w="med" len="med"/>
-                    </a:lnT>
-                    <a:lnB w="9525" cap="flat" cmpd="sng" algn="ctr">
-                      <a:solidFill>
-                        <a:srgbClr val="E3EDE6"/>
-                      </a:solidFill>
-                      <a:prstDash val="solid"/>
-                      <a:round/>
-                      <a:headEnd type="none" w="med" len="med"/>
-                      <a:tailEnd type="none" w="med" len="med"/>
-                    </a:lnB>
-                    <a:solidFill>
-                      <a:schemeClr val="tx1"/>
-                    </a:solidFill>
-                  </a:tcPr>
-                </a:tc>
-                <a:tc>
-                  <a:txBody>
-                    <a:bodyPr/>
-                    <a:lstStyle/>
-                    <a:p>
-                      <a:pPr indent="0" marL="0">
-                        <a:buNone/>
-                      </a:pPr>
-                      <a:r>
-                        <a:rPr lang="en-US" sz="1000" b="1" dirty="0">
-                          <a:solidFill>
-                            <a:schemeClr val="bg1"/>
-                          </a:solidFill>
-                        </a:rPr>
-                        <a:t>Interactions</a:t>
-                      </a:r>
-                      <a:endParaRPr lang="en-US" sz="1000" dirty="0"/>
-                    </a:p>
-                  </a:txBody>
-                  <a:tcPr marL="128016" marR="128016" marT="54864" marB="54864" anchor="ctr">
-                    <a:lnL w="9525" cap="flat" cmpd="sng" algn="ctr">
-                      <a:solidFill>
-                        <a:srgbClr val="E3EDE6"/>
-                      </a:solidFill>
-                      <a:prstDash val="solid"/>
-                      <a:round/>
-                      <a:headEnd type="none" w="med" len="med"/>
-                      <a:tailEnd type="none" w="med" len="med"/>
-                    </a:lnL>
-                    <a:lnR w="9525" cap="flat" cmpd="sng" algn="ctr">
-                      <a:solidFill>
-                        <a:srgbClr val="E3EDE6"/>
-                      </a:solidFill>
-                      <a:prstDash val="solid"/>
-                      <a:round/>
-                      <a:headEnd type="none" w="med" len="med"/>
-                      <a:tailEnd type="none" w="med" len="med"/>
-                    </a:lnR>
-                    <a:lnT w="9525" cap="flat" cmpd="sng" algn="ctr">
-                      <a:solidFill>
-                        <a:srgbClr val="E3EDE6"/>
-                      </a:solidFill>
-                      <a:prstDash val="solid"/>
-                      <a:round/>
-                      <a:headEnd type="none" w="med" len="med"/>
-                      <a:tailEnd type="none" w="med" len="med"/>
-                    </a:lnT>
-                    <a:lnB w="9525" cap="flat" cmpd="sng" algn="ctr">
-                      <a:solidFill>
-                        <a:srgbClr val="E3EDE6"/>
-                      </a:solidFill>
-                      <a:prstDash val="solid"/>
-                      <a:round/>
-                      <a:headEnd type="none" w="med" len="med"/>
-                      <a:tailEnd type="none" w="med" len="med"/>
-                    </a:lnB>
-                    <a:solidFill>
-                      <a:schemeClr val="tx1"/>
-                    </a:solidFill>
-                  </a:tcPr>
-                </a:tc>
-                <a:tc>
-                  <a:txBody>
-                    <a:bodyPr/>
-                    <a:lstStyle/>
-                    <a:p>
-                      <a:pPr indent="0" marL="0">
-                        <a:buNone/>
-                      </a:pPr>
-                      <a:r>
-                        <a:rPr lang="en-US" sz="1000" b="1" dirty="0">
-                          <a:solidFill>
-                            <a:schemeClr val="bg1"/>
-                          </a:solidFill>
-                        </a:rPr>
-                        <a:t>Ticket clicks</a:t>
-                      </a:r>
-                      <a:endParaRPr lang="en-US" sz="1000" dirty="0"/>
-                    </a:p>
-                  </a:txBody>
-                  <a:tcPr marL="128016" marR="128016" marT="54864" marB="54864" anchor="ctr">
-                    <a:lnL w="9525" cap="flat" cmpd="sng" algn="ctr">
-                      <a:solidFill>
-                        <a:srgbClr val="E3EDE6"/>
-                      </a:solidFill>
-                      <a:prstDash val="solid"/>
-                      <a:round/>
-                      <a:headEnd type="none" w="med" len="med"/>
-                      <a:tailEnd type="none" w="med" len="med"/>
-                    </a:lnL>
-                    <a:lnR w="9525" cap="flat" cmpd="sng" algn="ctr">
-                      <a:solidFill>
-                        <a:srgbClr val="E3EDE6"/>
-                      </a:solidFill>
-                      <a:prstDash val="solid"/>
-                      <a:round/>
-                      <a:headEnd type="none" w="med" len="med"/>
-                      <a:tailEnd type="none" w="med" len="med"/>
-                    </a:lnR>
-                    <a:lnT w="9525" cap="flat" cmpd="sng" algn="ctr">
-                      <a:solidFill>
-                        <a:srgbClr val="E3EDE6"/>
-                      </a:solidFill>
-                      <a:prstDash val="solid"/>
-                      <a:round/>
-                      <a:headEnd type="none" w="med" len="med"/>
-                      <a:tailEnd type="none" w="med" len="med"/>
-                    </a:lnT>
-                    <a:lnB w="9525" cap="flat" cmpd="sng" algn="ctr">
-                      <a:solidFill>
-                        <a:srgbClr val="E3EDE6"/>
-                      </a:solidFill>
-                      <a:prstDash val="solid"/>
-                      <a:round/>
-                      <a:headEnd type="none" w="med" len="med"/>
-                      <a:tailEnd type="none" w="med" len="med"/>
-                    </a:lnB>
-                    <a:solidFill>
-                      <a:schemeClr val="tx1"/>
-                    </a:solidFill>
-                  </a:tcPr>
-                </a:tc>
-              </a:tr>
-              <a:tr h="274320">
-                <a:tc>
-                  <a:txBody>
-                    <a:bodyPr/>
-                    <a:lstStyle/>
-                    <a:p>
-                      <a:pPr indent="0" marL="0">
-                        <a:buNone/>
-                      </a:pPr>
-                      <a:r>
-                        <a:rPr lang="en-US" sz="1000" b="1" dirty="0">
-                          <a:solidFill>
-                            <a:schemeClr val="tx1"/>
-                          </a:solidFill>
-                        </a:rPr>
-                        <a:t>Creator A</a:t>
-                      </a:r>
-                      <a:endParaRPr lang="en-US" sz="1000" dirty="0"/>
-                    </a:p>
-                  </a:txBody>
-                  <a:tcPr marL="128016" marR="128016" marT="54864" marB="54864" anchor="ctr">
-                    <a:lnL w="9525" cap="flat" cmpd="sng" algn="ctr">
-                      <a:solidFill>
-                        <a:srgbClr val="E3EDE6"/>
-                      </a:solidFill>
-                      <a:prstDash val="solid"/>
-                      <a:round/>
-                      <a:headEnd type="none" w="med" len="med"/>
-                      <a:tailEnd type="none" w="med" len="med"/>
-                    </a:lnL>
-                    <a:lnR w="9525" cap="flat" cmpd="sng" algn="ctr">
-                      <a:solidFill>
-                        <a:srgbClr val="E3EDE6"/>
-                      </a:solidFill>
-                      <a:prstDash val="solid"/>
-                      <a:round/>
-                      <a:headEnd type="none" w="med" len="med"/>
-                      <a:tailEnd type="none" w="med" len="med"/>
-                    </a:lnR>
-                    <a:lnT w="9525" cap="flat" cmpd="sng" algn="ctr">
-                      <a:solidFill>
-                        <a:srgbClr val="E3EDE6"/>
-                      </a:solidFill>
-                      <a:prstDash val="solid"/>
-                      <a:round/>
-                      <a:headEnd type="none" w="med" len="med"/>
-                      <a:tailEnd type="none" w="med" len="med"/>
-                    </a:lnT>
-                    <a:lnB w="9525" cap="flat" cmpd="sng" algn="ctr">
-                      <a:solidFill>
-                        <a:srgbClr val="E3EDE6"/>
-                      </a:solidFill>
-                      <a:prstDash val="solid"/>
-                      <a:round/>
-                      <a:headEnd type="none" w="med" len="med"/>
-                      <a:tailEnd type="none" w="med" len="med"/>
-                    </a:lnB>
-                    <a:solidFill>
-                      <a:schemeClr val="bg1"/>
-                    </a:solidFill>
-                  </a:tcPr>
-                </a:tc>
-                <a:tc>
-                  <a:txBody>
-                    <a:bodyPr/>
-                    <a:lstStyle/>
-                    <a:p>
-                      <a:pPr indent="0" marL="0">
-                        <a:buNone/>
-                      </a:pPr>
-                      <a:r>
-                        <a:rPr lang="en-US" sz="1000" dirty="0">
-                          <a:solidFill>
-                            <a:schemeClr val="tx2"/>
-                          </a:solidFill>
-                        </a:rPr>
-                        <a:t>6</a:t>
-                      </a:r>
-                      <a:endParaRPr lang="en-US" sz="1000" dirty="0"/>
-                    </a:p>
-                  </a:txBody>
-                  <a:tcPr marL="128016" marR="128016" marT="54864" marB="54864" anchor="ctr">
-                    <a:lnL w="9525" cap="flat" cmpd="sng" algn="ctr">
-                      <a:solidFill>
-                        <a:srgbClr val="E3EDE6"/>
-                      </a:solidFill>
-                      <a:prstDash val="solid"/>
-                      <a:round/>
-                      <a:headEnd type="none" w="med" len="med"/>
-                      <a:tailEnd type="none" w="med" len="med"/>
-                    </a:lnL>
-                    <a:lnR w="9525" cap="flat" cmpd="sng" algn="ctr">
-                      <a:solidFill>
-                        <a:srgbClr val="E3EDE6"/>
-                      </a:solidFill>
-                      <a:prstDash val="solid"/>
-                      <a:round/>
-                      <a:headEnd type="none" w="med" len="med"/>
-                      <a:tailEnd type="none" w="med" len="med"/>
-                    </a:lnR>
-                    <a:lnT w="9525" cap="flat" cmpd="sng" algn="ctr">
-                      <a:solidFill>
-                        <a:srgbClr val="E3EDE6"/>
-                      </a:solidFill>
-                      <a:prstDash val="solid"/>
-                      <a:round/>
-                      <a:headEnd type="none" w="med" len="med"/>
-                      <a:tailEnd type="none" w="med" len="med"/>
-                    </a:lnT>
-                    <a:lnB w="9525" cap="flat" cmpd="sng" algn="ctr">
-                      <a:solidFill>
-                        <a:srgbClr val="E3EDE6"/>
-                      </a:solidFill>
-                      <a:prstDash val="solid"/>
-                      <a:round/>
-                      <a:headEnd type="none" w="med" len="med"/>
-                      <a:tailEnd type="none" w="med" len="med"/>
-                    </a:lnB>
-                    <a:solidFill>
-                      <a:schemeClr val="bg1"/>
-                    </a:solidFill>
-                  </a:tcPr>
-                </a:tc>
-                <a:tc>
-                  <a:txBody>
-                    <a:bodyPr/>
-                    <a:lstStyle/>
-                    <a:p>
-                      <a:pPr indent="0" marL="0">
-                        <a:buNone/>
-                      </a:pPr>
-                      <a:r>
-                        <a:rPr lang="en-US" sz="1000" dirty="0">
-                          <a:solidFill>
-                            <a:schemeClr val="tx2"/>
-                          </a:solidFill>
-                        </a:rPr>
-                        <a:t>820,000</a:t>
-                      </a:r>
-                      <a:endParaRPr lang="en-US" sz="1000" dirty="0"/>
-                    </a:p>
-                  </a:txBody>
-                  <a:tcPr marL="128016" marR="128016" marT="54864" marB="54864" anchor="ctr">
-                    <a:lnL w="9525" cap="flat" cmpd="sng" algn="ctr">
-                      <a:solidFill>
-                        <a:srgbClr val="E3EDE6"/>
-                      </a:solidFill>
-                      <a:prstDash val="solid"/>
-                      <a:round/>
-                      <a:headEnd type="none" w="med" len="med"/>
-                      <a:tailEnd type="none" w="med" len="med"/>
-                    </a:lnL>
-                    <a:lnR w="9525" cap="flat" cmpd="sng" algn="ctr">
-                      <a:solidFill>
-                        <a:srgbClr val="E3EDE6"/>
-                      </a:solidFill>
-                      <a:prstDash val="solid"/>
-                      <a:round/>
-                      <a:headEnd type="none" w="med" len="med"/>
-                      <a:tailEnd type="none" w="med" len="med"/>
-                    </a:lnR>
-                    <a:lnT w="9525" cap="flat" cmpd="sng" algn="ctr">
-                      <a:solidFill>
-                        <a:srgbClr val="E3EDE6"/>
-                      </a:solidFill>
-                      <a:prstDash val="solid"/>
-                      <a:round/>
-                      <a:headEnd type="none" w="med" len="med"/>
-                      <a:tailEnd type="none" w="med" len="med"/>
-                    </a:lnT>
-                    <a:lnB w="9525" cap="flat" cmpd="sng" algn="ctr">
-                      <a:solidFill>
-                        <a:srgbClr val="E3EDE6"/>
-                      </a:solidFill>
-                      <a:prstDash val="solid"/>
-                      <a:round/>
-                      <a:headEnd type="none" w="med" len="med"/>
-                      <a:tailEnd type="none" w="med" len="med"/>
-                    </a:lnB>
-                    <a:solidFill>
-                      <a:schemeClr val="bg1"/>
-                    </a:solidFill>
-                  </a:tcPr>
-                </a:tc>
-                <a:tc>
-                  <a:txBody>
-                    <a:bodyPr/>
-                    <a:lstStyle/>
-                    <a:p>
-                      <a:pPr indent="0" marL="0">
-                        <a:buNone/>
-                      </a:pPr>
-                      <a:r>
-                        <a:rPr lang="en-US" sz="1000" dirty="0">
-                          <a:solidFill>
-                            <a:schemeClr val="tx2"/>
-                          </a:solidFill>
-                        </a:rPr>
-                        <a:t>61,000</a:t>
-                      </a:r>
-                      <a:endParaRPr lang="en-US" sz="1000" dirty="0"/>
-                    </a:p>
-                  </a:txBody>
-                  <a:tcPr marL="128016" marR="128016" marT="54864" marB="54864" anchor="ctr">
-                    <a:lnL w="9525" cap="flat" cmpd="sng" algn="ctr">
-                      <a:solidFill>
-                        <a:srgbClr val="E3EDE6"/>
-                      </a:solidFill>
-                      <a:prstDash val="solid"/>
-                      <a:round/>
-                      <a:headEnd type="none" w="med" len="med"/>
-                      <a:tailEnd type="none" w="med" len="med"/>
-                    </a:lnL>
-                    <a:lnR w="9525" cap="flat" cmpd="sng" algn="ctr">
-                      <a:solidFill>
-                        <a:srgbClr val="E3EDE6"/>
-                      </a:solidFill>
-                      <a:prstDash val="solid"/>
-                      <a:round/>
-                      <a:headEnd type="none" w="med" len="med"/>
-                      <a:tailEnd type="none" w="med" len="med"/>
-                    </a:lnR>
-                    <a:lnT w="9525" cap="flat" cmpd="sng" algn="ctr">
-                      <a:solidFill>
-                        <a:srgbClr val="E3EDE6"/>
-                      </a:solidFill>
-                      <a:prstDash val="solid"/>
-                      <a:round/>
-                      <a:headEnd type="none" w="med" len="med"/>
-                      <a:tailEnd type="none" w="med" len="med"/>
-                    </a:lnT>
-                    <a:lnB w="9525" cap="flat" cmpd="sng" algn="ctr">
-                      <a:solidFill>
-                        <a:srgbClr val="E3EDE6"/>
-                      </a:solidFill>
-                      <a:prstDash val="solid"/>
-                      <a:round/>
-                      <a:headEnd type="none" w="med" len="med"/>
-                      <a:tailEnd type="none" w="med" len="med"/>
-                    </a:lnB>
-                    <a:solidFill>
-                      <a:schemeClr val="bg1"/>
-                    </a:solidFill>
-                  </a:tcPr>
-                </a:tc>
-                <a:tc>
-                  <a:txBody>
-                    <a:bodyPr/>
-                    <a:lstStyle/>
-                    <a:p>
-                      <a:pPr indent="0" marL="0">
-                        <a:buNone/>
-                      </a:pPr>
-                      <a:r>
-                        <a:rPr lang="en-US" sz="1000" dirty="0">
-                          <a:solidFill>
-                            <a:schemeClr val="tx2"/>
-                          </a:solidFill>
-                        </a:rPr>
-                        <a:t>2,100</a:t>
-                      </a:r>
-                      <a:endParaRPr lang="en-US" sz="1000" dirty="0"/>
-                    </a:p>
-                  </a:txBody>
-                  <a:tcPr marL="128016" marR="128016" marT="54864" marB="54864" anchor="ctr">
-                    <a:lnL w="9525" cap="flat" cmpd="sng" algn="ctr">
-                      <a:solidFill>
-                        <a:srgbClr val="E3EDE6"/>
-                      </a:solidFill>
-                      <a:prstDash val="solid"/>
-                      <a:round/>
-                      <a:headEnd type="none" w="med" len="med"/>
-                      <a:tailEnd type="none" w="med" len="med"/>
-                    </a:lnL>
-                    <a:lnR w="9525" cap="flat" cmpd="sng" algn="ctr">
-                      <a:solidFill>
-                        <a:srgbClr val="E3EDE6"/>
-                      </a:solidFill>
-                      <a:prstDash val="solid"/>
-                      <a:round/>
-                      <a:headEnd type="none" w="med" len="med"/>
-                      <a:tailEnd type="none" w="med" len="med"/>
-                    </a:lnR>
-                    <a:lnT w="9525" cap="flat" cmpd="sng" algn="ctr">
-                      <a:solidFill>
-                        <a:srgbClr val="E3EDE6"/>
-                      </a:solidFill>
-                      <a:prstDash val="solid"/>
-                      <a:round/>
-                      <a:headEnd type="none" w="med" len="med"/>
-                      <a:tailEnd type="none" w="med" len="med"/>
-                    </a:lnT>
-                    <a:lnB w="9525" cap="flat" cmpd="sng" algn="ctr">
-                      <a:solidFill>
-                        <a:srgbClr val="E3EDE6"/>
-                      </a:solidFill>
-                      <a:prstDash val="solid"/>
-                      <a:round/>
-                      <a:headEnd type="none" w="med" len="med"/>
-                      <a:tailEnd type="none" w="med" len="med"/>
-                    </a:lnB>
-                    <a:solidFill>
-                      <a:schemeClr val="bg1"/>
-                    </a:solidFill>
-                  </a:tcPr>
-                </a:tc>
-              </a:tr>
-              <a:tr h="274320">
-                <a:tc>
-                  <a:txBody>
-                    <a:bodyPr/>
-                    <a:lstStyle/>
-                    <a:p>
-                      <a:pPr indent="0" marL="0">
-                        <a:buNone/>
-                      </a:pPr>
-                      <a:r>
-                        <a:rPr lang="en-US" sz="1000" b="1" dirty="0">
-                          <a:solidFill>
-                            <a:schemeClr val="tx1"/>
-                          </a:solidFill>
-                        </a:rPr>
-                        <a:t>Creator B</a:t>
-                      </a:r>
-                      <a:endParaRPr lang="en-US" sz="1000" dirty="0"/>
-                    </a:p>
-                  </a:txBody>
-                  <a:tcPr marL="128016" marR="128016" marT="54864" marB="54864" anchor="ctr">
-                    <a:lnL w="9525" cap="flat" cmpd="sng" algn="ctr">
-                      <a:solidFill>
-                        <a:srgbClr val="E3EDE6"/>
-                      </a:solidFill>
-                      <a:prstDash val="solid"/>
-                      <a:round/>
-                      <a:headEnd type="none" w="med" len="med"/>
-                      <a:tailEnd type="none" w="med" len="med"/>
-                    </a:lnL>
-                    <a:lnR w="9525" cap="flat" cmpd="sng" algn="ctr">
-                      <a:solidFill>
-                        <a:srgbClr val="E3EDE6"/>
-                      </a:solidFill>
-                      <a:prstDash val="solid"/>
-                      <a:round/>
-                      <a:headEnd type="none" w="med" len="med"/>
-                      <a:tailEnd type="none" w="med" len="med"/>
-                    </a:lnR>
-                    <a:lnT w="9525" cap="flat" cmpd="sng" algn="ctr">
-                      <a:solidFill>
-                        <a:srgbClr val="E3EDE6"/>
-                      </a:solidFill>
-                      <a:prstDash val="solid"/>
-                      <a:round/>
-                      <a:headEnd type="none" w="med" len="med"/>
-                      <a:tailEnd type="none" w="med" len="med"/>
-                    </a:lnT>
-                    <a:lnB w="9525" cap="flat" cmpd="sng" algn="ctr">
-                      <a:solidFill>
-                        <a:srgbClr val="E3EDE6"/>
-                      </a:solidFill>
-                      <a:prstDash val="solid"/>
-                      <a:round/>
-                      <a:headEnd type="none" w="med" len="med"/>
-                      <a:tailEnd type="none" w="med" len="med"/>
-                    </a:lnB>
-                    <a:solidFill>
-                      <a:schemeClr val="bg1"/>
-                    </a:solidFill>
-                  </a:tcPr>
-                </a:tc>
-                <a:tc>
-                  <a:txBody>
-                    <a:bodyPr/>
-                    <a:lstStyle/>
-                    <a:p>
-                      <a:pPr indent="0" marL="0">
-                        <a:buNone/>
-                      </a:pPr>
-                      <a:r>
-                        <a:rPr lang="en-US" sz="1000" dirty="0">
-                          <a:solidFill>
-                            <a:schemeClr val="tx2"/>
-                          </a:solidFill>
-                        </a:rPr>
-                        <a:t>5</a:t>
-                      </a:r>
-                      <a:endParaRPr lang="en-US" sz="1000" dirty="0"/>
-                    </a:p>
-                  </a:txBody>
-                  <a:tcPr marL="128016" marR="128016" marT="54864" marB="54864" anchor="ctr">
-                    <a:lnL w="9525" cap="flat" cmpd="sng" algn="ctr">
-                      <a:solidFill>
-                        <a:srgbClr val="E3EDE6"/>
-                      </a:solidFill>
-                      <a:prstDash val="solid"/>
-                      <a:round/>
-                      <a:headEnd type="none" w="med" len="med"/>
-                      <a:tailEnd type="none" w="med" len="med"/>
-                    </a:lnL>
-                    <a:lnR w="9525" cap="flat" cmpd="sng" algn="ctr">
-                      <a:solidFill>
-                        <a:srgbClr val="E3EDE6"/>
-                      </a:solidFill>
-                      <a:prstDash val="solid"/>
-                      <a:round/>
-                      <a:headEnd type="none" w="med" len="med"/>
-                      <a:tailEnd type="none" w="med" len="med"/>
-                    </a:lnR>
-                    <a:lnT w="9525" cap="flat" cmpd="sng" algn="ctr">
-                      <a:solidFill>
-                        <a:srgbClr val="E3EDE6"/>
-                      </a:solidFill>
-                      <a:prstDash val="solid"/>
-                      <a:round/>
-                      <a:headEnd type="none" w="med" len="med"/>
-                      <a:tailEnd type="none" w="med" len="med"/>
-                    </a:lnT>
-                    <a:lnB w="9525" cap="flat" cmpd="sng" algn="ctr">
-                      <a:solidFill>
-                        <a:srgbClr val="E3EDE6"/>
-                      </a:solidFill>
-                      <a:prstDash val="solid"/>
-                      <a:round/>
-                      <a:headEnd type="none" w="med" len="med"/>
-                      <a:tailEnd type="none" w="med" len="med"/>
-                    </a:lnB>
-                    <a:solidFill>
-                      <a:schemeClr val="bg1"/>
-                    </a:solidFill>
-                  </a:tcPr>
-                </a:tc>
-                <a:tc>
-                  <a:txBody>
-                    <a:bodyPr/>
-                    <a:lstStyle/>
-                    <a:p>
-                      <a:pPr indent="0" marL="0">
-                        <a:buNone/>
-                      </a:pPr>
-                      <a:r>
-                        <a:rPr lang="en-US" sz="1000" dirty="0">
-                          <a:solidFill>
-                            <a:schemeClr val="tx2"/>
-                          </a:solidFill>
-                        </a:rPr>
-                        <a:t>610,000</a:t>
-                      </a:r>
-                      <a:endParaRPr lang="en-US" sz="1000" dirty="0"/>
-                    </a:p>
-                  </a:txBody>
-                  <a:tcPr marL="128016" marR="128016" marT="54864" marB="54864" anchor="ctr">
-                    <a:lnL w="9525" cap="flat" cmpd="sng" algn="ctr">
-                      <a:solidFill>
-                        <a:srgbClr val="E3EDE6"/>
-                      </a:solidFill>
-                      <a:prstDash val="solid"/>
-                      <a:round/>
-                      <a:headEnd type="none" w="med" len="med"/>
-                      <a:tailEnd type="none" w="med" len="med"/>
-                    </a:lnL>
-                    <a:lnR w="9525" cap="flat" cmpd="sng" algn="ctr">
-                      <a:solidFill>
-                        <a:srgbClr val="E3EDE6"/>
-                      </a:solidFill>
-                      <a:prstDash val="solid"/>
-                      <a:round/>
-                      <a:headEnd type="none" w="med" len="med"/>
-                      <a:tailEnd type="none" w="med" len="med"/>
-                    </a:lnR>
-                    <a:lnT w="9525" cap="flat" cmpd="sng" algn="ctr">
-                      <a:solidFill>
-                        <a:srgbClr val="E3EDE6"/>
-                      </a:solidFill>
-                      <a:prstDash val="solid"/>
-                      <a:round/>
-                      <a:headEnd type="none" w="med" len="med"/>
-                      <a:tailEnd type="none" w="med" len="med"/>
-                    </a:lnT>
-                    <a:lnB w="9525" cap="flat" cmpd="sng" algn="ctr">
-                      <a:solidFill>
-                        <a:srgbClr val="E3EDE6"/>
-                      </a:solidFill>
-                      <a:prstDash val="solid"/>
-                      <a:round/>
-                      <a:headEnd type="none" w="med" len="med"/>
-                      <a:tailEnd type="none" w="med" len="med"/>
-                    </a:lnB>
-                    <a:solidFill>
-                      <a:schemeClr val="bg1"/>
-                    </a:solidFill>
-                  </a:tcPr>
-                </a:tc>
-                <a:tc>
-                  <a:txBody>
-                    <a:bodyPr/>
-                    <a:lstStyle/>
-                    <a:p>
-                      <a:pPr indent="0" marL="0">
-                        <a:buNone/>
-                      </a:pPr>
-                      <a:r>
-                        <a:rPr lang="en-US" sz="1000" dirty="0">
-                          <a:solidFill>
-                            <a:schemeClr val="tx2"/>
-                          </a:solidFill>
-                        </a:rPr>
-                        <a:t>48,500</a:t>
-                      </a:r>
-                      <a:endParaRPr lang="en-US" sz="1000" dirty="0"/>
-                    </a:p>
-                  </a:txBody>
-                  <a:tcPr marL="128016" marR="128016" marT="54864" marB="54864" anchor="ctr">
-                    <a:lnL w="9525" cap="flat" cmpd="sng" algn="ctr">
-                      <a:solidFill>
-                        <a:srgbClr val="E3EDE6"/>
-                      </a:solidFill>
-                      <a:prstDash val="solid"/>
-                      <a:round/>
-                      <a:headEnd type="none" w="med" len="med"/>
-                      <a:tailEnd type="none" w="med" len="med"/>
-                    </a:lnL>
-                    <a:lnR w="9525" cap="flat" cmpd="sng" algn="ctr">
-                      <a:solidFill>
-                        <a:srgbClr val="E3EDE6"/>
-                      </a:solidFill>
-                      <a:prstDash val="solid"/>
-                      <a:round/>
-                      <a:headEnd type="none" w="med" len="med"/>
-                      <a:tailEnd type="none" w="med" len="med"/>
-                    </a:lnR>
-                    <a:lnT w="9525" cap="flat" cmpd="sng" algn="ctr">
-                      <a:solidFill>
-                        <a:srgbClr val="E3EDE6"/>
-                      </a:solidFill>
-                      <a:prstDash val="solid"/>
-                      <a:round/>
-                      <a:headEnd type="none" w="med" len="med"/>
-                      <a:tailEnd type="none" w="med" len="med"/>
-                    </a:lnT>
-                    <a:lnB w="9525" cap="flat" cmpd="sng" algn="ctr">
-                      <a:solidFill>
-                        <a:srgbClr val="E3EDE6"/>
-                      </a:solidFill>
-                      <a:prstDash val="solid"/>
-                      <a:round/>
-                      <a:headEnd type="none" w="med" len="med"/>
-                      <a:tailEnd type="none" w="med" len="med"/>
-                    </a:lnB>
-                    <a:solidFill>
-                      <a:schemeClr val="bg1"/>
-                    </a:solidFill>
-                  </a:tcPr>
-                </a:tc>
-                <a:tc>
-                  <a:txBody>
-                    <a:bodyPr/>
-                    <a:lstStyle/>
-                    <a:p>
-                      <a:pPr indent="0" marL="0">
-                        <a:buNone/>
-                      </a:pPr>
-                      <a:r>
-                        <a:rPr lang="en-US" sz="1000" dirty="0">
-                          <a:solidFill>
-                            <a:schemeClr val="tx2"/>
-                          </a:solidFill>
-                        </a:rPr>
-                        <a:t>1,650</a:t>
-                      </a:r>
-                      <a:endParaRPr lang="en-US" sz="1000" dirty="0"/>
-                    </a:p>
-                  </a:txBody>
-                  <a:tcPr marL="128016" marR="128016" marT="54864" marB="54864" anchor="ctr">
-                    <a:lnL w="9525" cap="flat" cmpd="sng" algn="ctr">
-                      <a:solidFill>
-                        <a:srgbClr val="E3EDE6"/>
-                      </a:solidFill>
-                      <a:prstDash val="solid"/>
-                      <a:round/>
-                      <a:headEnd type="none" w="med" len="med"/>
-                      <a:tailEnd type="none" w="med" len="med"/>
-                    </a:lnL>
-                    <a:lnR w="9525" cap="flat" cmpd="sng" algn="ctr">
-                      <a:solidFill>
-                        <a:srgbClr val="E3EDE6"/>
-                      </a:solidFill>
-                      <a:prstDash val="solid"/>
-                      <a:round/>
-                      <a:headEnd type="none" w="med" len="med"/>
-                      <a:tailEnd type="none" w="med" len="med"/>
-                    </a:lnR>
-                    <a:lnT w="9525" cap="flat" cmpd="sng" algn="ctr">
-                      <a:solidFill>
-                        <a:srgbClr val="E3EDE6"/>
-                      </a:solidFill>
-                      <a:prstDash val="solid"/>
-                      <a:round/>
-                      <a:headEnd type="none" w="med" len="med"/>
-                      <a:tailEnd type="none" w="med" len="med"/>
-                    </a:lnT>
-                    <a:lnB w="9525" cap="flat" cmpd="sng" algn="ctr">
-                      <a:solidFill>
-                        <a:srgbClr val="E3EDE6"/>
-                      </a:solidFill>
-                      <a:prstDash val="solid"/>
-                      <a:round/>
-                      <a:headEnd type="none" w="med" len="med"/>
-                      <a:tailEnd type="none" w="med" len="med"/>
-                    </a:lnB>
-                    <a:solidFill>
-                      <a:schemeClr val="bg1"/>
-                    </a:solidFill>
-                  </a:tcPr>
-                </a:tc>
-              </a:tr>
-              <a:tr h="274320">
-                <a:tc>
-                  <a:txBody>
-                    <a:bodyPr/>
-                    <a:lstStyle/>
-                    <a:p>
-                      <a:pPr indent="0" marL="0">
-                        <a:buNone/>
-                      </a:pPr>
-                      <a:r>
-                        <a:rPr lang="en-US" sz="1000" b="1" dirty="0">
-                          <a:solidFill>
-                            <a:schemeClr val="tx1"/>
-                          </a:solidFill>
-                        </a:rPr>
-                        <a:t>Creator C</a:t>
-                      </a:r>
-                      <a:endParaRPr lang="en-US" sz="1000" dirty="0"/>
-                    </a:p>
-                  </a:txBody>
-                  <a:tcPr marL="128016" marR="128016" marT="54864" marB="54864" anchor="ctr">
-                    <a:lnL w="9525" cap="flat" cmpd="sng" algn="ctr">
-                      <a:solidFill>
-                        <a:srgbClr val="E3EDE6"/>
-                      </a:solidFill>
-                      <a:prstDash val="solid"/>
-                      <a:round/>
-                      <a:headEnd type="none" w="med" len="med"/>
-                      <a:tailEnd type="none" w="med" len="med"/>
-                    </a:lnL>
-                    <a:lnR w="9525" cap="flat" cmpd="sng" algn="ctr">
-                      <a:solidFill>
-                        <a:srgbClr val="E3EDE6"/>
-                      </a:solidFill>
-                      <a:prstDash val="solid"/>
-                      <a:round/>
-                      <a:headEnd type="none" w="med" len="med"/>
-                      <a:tailEnd type="none" w="med" len="med"/>
-                    </a:lnR>
-                    <a:lnT w="9525" cap="flat" cmpd="sng" algn="ctr">
-                      <a:solidFill>
-                        <a:srgbClr val="E3EDE6"/>
-                      </a:solidFill>
-                      <a:prstDash val="solid"/>
-                      <a:round/>
-                      <a:headEnd type="none" w="med" len="med"/>
-                      <a:tailEnd type="none" w="med" len="med"/>
-                    </a:lnT>
-                    <a:lnB w="9525" cap="flat" cmpd="sng" algn="ctr">
-                      <a:solidFill>
-                        <a:srgbClr val="E3EDE6"/>
-                      </a:solidFill>
-                      <a:prstDash val="solid"/>
-                      <a:round/>
-                      <a:headEnd type="none" w="med" len="med"/>
-                      <a:tailEnd type="none" w="med" len="med"/>
-                    </a:lnB>
-                    <a:solidFill>
-                      <a:schemeClr val="bg1"/>
-                    </a:solidFill>
-                  </a:tcPr>
-                </a:tc>
-                <a:tc>
-                  <a:txBody>
-                    <a:bodyPr/>
-                    <a:lstStyle/>
-                    <a:p>
-                      <a:pPr indent="0" marL="0">
-                        <a:buNone/>
-                      </a:pPr>
-                      <a:r>
-                        <a:rPr lang="en-US" sz="1000" dirty="0">
-                          <a:solidFill>
-                            <a:schemeClr val="tx2"/>
-                          </a:solidFill>
-                        </a:rPr>
-                        <a:t>4</a:t>
-                      </a:r>
-                      <a:endParaRPr lang="en-US" sz="1000" dirty="0"/>
-                    </a:p>
-                  </a:txBody>
-                  <a:tcPr marL="128016" marR="128016" marT="54864" marB="54864" anchor="ctr">
-                    <a:lnL w="9525" cap="flat" cmpd="sng" algn="ctr">
-                      <a:solidFill>
-                        <a:srgbClr val="E3EDE6"/>
-                      </a:solidFill>
-                      <a:prstDash val="solid"/>
-                      <a:round/>
-                      <a:headEnd type="none" w="med" len="med"/>
-                      <a:tailEnd type="none" w="med" len="med"/>
-                    </a:lnL>
-                    <a:lnR w="9525" cap="flat" cmpd="sng" algn="ctr">
-                      <a:solidFill>
-                        <a:srgbClr val="E3EDE6"/>
-                      </a:solidFill>
-                      <a:prstDash val="solid"/>
-                      <a:round/>
-                      <a:headEnd type="none" w="med" len="med"/>
-                      <a:tailEnd type="none" w="med" len="med"/>
-                    </a:lnR>
-                    <a:lnT w="9525" cap="flat" cmpd="sng" algn="ctr">
-                      <a:solidFill>
-                        <a:srgbClr val="E3EDE6"/>
-                      </a:solidFill>
-                      <a:prstDash val="solid"/>
-                      <a:round/>
-                      <a:headEnd type="none" w="med" len="med"/>
-                      <a:tailEnd type="none" w="med" len="med"/>
-                    </a:lnT>
-                    <a:lnB w="9525" cap="flat" cmpd="sng" algn="ctr">
-                      <a:solidFill>
-                        <a:srgbClr val="E3EDE6"/>
-                      </a:solidFill>
-                      <a:prstDash val="solid"/>
-                      <a:round/>
-                      <a:headEnd type="none" w="med" len="med"/>
-                      <a:tailEnd type="none" w="med" len="med"/>
-                    </a:lnB>
-                    <a:solidFill>
-                      <a:schemeClr val="bg1"/>
-                    </a:solidFill>
-                  </a:tcPr>
-                </a:tc>
-                <a:tc>
-                  <a:txBody>
-                    <a:bodyPr/>
-                    <a:lstStyle/>
-                    <a:p>
-                      <a:pPr indent="0" marL="0">
-                        <a:buNone/>
-                      </a:pPr>
-                      <a:r>
-                        <a:rPr lang="en-US" sz="1000" dirty="0">
-                          <a:solidFill>
-                            <a:schemeClr val="tx2"/>
-                          </a:solidFill>
-                        </a:rPr>
-                        <a:t>455,000</a:t>
-                      </a:r>
-                      <a:endParaRPr lang="en-US" sz="1000" dirty="0"/>
-                    </a:p>
-                  </a:txBody>
-                  <a:tcPr marL="128016" marR="128016" marT="54864" marB="54864" anchor="ctr">
-                    <a:lnL w="9525" cap="flat" cmpd="sng" algn="ctr">
-                      <a:solidFill>
-                        <a:srgbClr val="E3EDE6"/>
-                      </a:solidFill>
-                      <a:prstDash val="solid"/>
-                      <a:round/>
-                      <a:headEnd type="none" w="med" len="med"/>
-                      <a:tailEnd type="none" w="med" len="med"/>
-                    </a:lnL>
-                    <a:lnR w="9525" cap="flat" cmpd="sng" algn="ctr">
-                      <a:solidFill>
-                        <a:srgbClr val="E3EDE6"/>
-                      </a:solidFill>
-                      <a:prstDash val="solid"/>
-                      <a:round/>
-                      <a:headEnd type="none" w="med" len="med"/>
-                      <a:tailEnd type="none" w="med" len="med"/>
-                    </a:lnR>
-                    <a:lnT w="9525" cap="flat" cmpd="sng" algn="ctr">
-                      <a:solidFill>
-                        <a:srgbClr val="E3EDE6"/>
-                      </a:solidFill>
-                      <a:prstDash val="solid"/>
-                      <a:round/>
-                      <a:headEnd type="none" w="med" len="med"/>
-                      <a:tailEnd type="none" w="med" len="med"/>
-                    </a:lnT>
-                    <a:lnB w="9525" cap="flat" cmpd="sng" algn="ctr">
-                      <a:solidFill>
-                        <a:srgbClr val="E3EDE6"/>
-                      </a:solidFill>
-                      <a:prstDash val="solid"/>
-                      <a:round/>
-                      <a:headEnd type="none" w="med" len="med"/>
-                      <a:tailEnd type="none" w="med" len="med"/>
-                    </a:lnB>
-                    <a:solidFill>
-                      <a:schemeClr val="bg1"/>
-                    </a:solidFill>
-                  </a:tcPr>
-                </a:tc>
-                <a:tc>
-                  <a:txBody>
-                    <a:bodyPr/>
-                    <a:lstStyle/>
-                    <a:p>
-                      <a:pPr indent="0" marL="0">
-                        <a:buNone/>
-                      </a:pPr>
-                      <a:r>
-                        <a:rPr lang="en-US" sz="1000" dirty="0">
-                          <a:solidFill>
-                            <a:schemeClr val="tx2"/>
-                          </a:solidFill>
-                        </a:rPr>
-                        <a:t>39,200</a:t>
-                      </a:r>
-                      <a:endParaRPr lang="en-US" sz="1000" dirty="0"/>
-                    </a:p>
-                  </a:txBody>
-                  <a:tcPr marL="128016" marR="128016" marT="54864" marB="54864" anchor="ctr">
-                    <a:lnL w="9525" cap="flat" cmpd="sng" algn="ctr">
-                      <a:solidFill>
-                        <a:srgbClr val="E3EDE6"/>
-                      </a:solidFill>
-                      <a:prstDash val="solid"/>
-                      <a:round/>
-                      <a:headEnd type="none" w="med" len="med"/>
-                      <a:tailEnd type="none" w="med" len="med"/>
-                    </a:lnL>
-                    <a:lnR w="9525" cap="flat" cmpd="sng" algn="ctr">
-                      <a:solidFill>
-                        <a:srgbClr val="E3EDE6"/>
-                      </a:solidFill>
-                      <a:prstDash val="solid"/>
-                      <a:round/>
-                      <a:headEnd type="none" w="med" len="med"/>
-                      <a:tailEnd type="none" w="med" len="med"/>
-                    </a:lnR>
-                    <a:lnT w="9525" cap="flat" cmpd="sng" algn="ctr">
-                      <a:solidFill>
-                        <a:srgbClr val="E3EDE6"/>
-                      </a:solidFill>
-                      <a:prstDash val="solid"/>
-                      <a:round/>
-                      <a:headEnd type="none" w="med" len="med"/>
-                      <a:tailEnd type="none" w="med" len="med"/>
-                    </a:lnT>
-                    <a:lnB w="9525" cap="flat" cmpd="sng" algn="ctr">
-                      <a:solidFill>
-                        <a:srgbClr val="E3EDE6"/>
-                      </a:solidFill>
-                      <a:prstDash val="solid"/>
-                      <a:round/>
-                      <a:headEnd type="none" w="med" len="med"/>
-                      <a:tailEnd type="none" w="med" len="med"/>
-                    </a:lnB>
-                    <a:solidFill>
-                      <a:schemeClr val="bg1"/>
-                    </a:solidFill>
-                  </a:tcPr>
-                </a:tc>
-                <a:tc>
-                  <a:txBody>
-                    <a:bodyPr/>
-                    <a:lstStyle/>
-                    <a:p>
-                      <a:pPr indent="0" marL="0">
-                        <a:buNone/>
-                      </a:pPr>
-                      <a:r>
-                        <a:rPr lang="en-US" sz="1000" dirty="0">
-                          <a:solidFill>
-                            <a:schemeClr val="tx2"/>
-                          </a:solidFill>
-                        </a:rPr>
-                        <a:t>1,240</a:t>
-                      </a:r>
-                      <a:endParaRPr lang="en-US" sz="1000" dirty="0"/>
-                    </a:p>
-                  </a:txBody>
-                  <a:tcPr marL="128016" marR="128016" marT="54864" marB="54864" anchor="ctr">
-                    <a:lnL w="9525" cap="flat" cmpd="sng" algn="ctr">
-                      <a:solidFill>
-                        <a:srgbClr val="E3EDE6"/>
-                      </a:solidFill>
-                      <a:prstDash val="solid"/>
-                      <a:round/>
-                      <a:headEnd type="none" w="med" len="med"/>
-                      <a:tailEnd type="none" w="med" len="med"/>
-                    </a:lnL>
-                    <a:lnR w="9525" cap="flat" cmpd="sng" algn="ctr">
-                      <a:solidFill>
-                        <a:srgbClr val="E3EDE6"/>
-                      </a:solidFill>
-                      <a:prstDash val="solid"/>
-                      <a:round/>
-                      <a:headEnd type="none" w="med" len="med"/>
-                      <a:tailEnd type="none" w="med" len="med"/>
-                    </a:lnR>
-                    <a:lnT w="9525" cap="flat" cmpd="sng" algn="ctr">
-                      <a:solidFill>
-                        <a:srgbClr val="E3EDE6"/>
-                      </a:solidFill>
-                      <a:prstDash val="solid"/>
-                      <a:round/>
-                      <a:headEnd type="none" w="med" len="med"/>
-                      <a:tailEnd type="none" w="med" len="med"/>
-                    </a:lnT>
-                    <a:lnB w="9525" cap="flat" cmpd="sng" algn="ctr">
-                      <a:solidFill>
-                        <a:srgbClr val="E3EDE6"/>
-                      </a:solidFill>
-                      <a:prstDash val="solid"/>
-                      <a:round/>
-                      <a:headEnd type="none" w="med" len="med"/>
-                      <a:tailEnd type="none" w="med" len="med"/>
-                    </a:lnB>
-                    <a:solidFill>
-                      <a:schemeClr val="bg1"/>
-                    </a:solidFill>
-                  </a:tcPr>
-                </a:tc>
-              </a:tr>
-              <a:tr h="274320">
-                <a:tc>
-                  <a:txBody>
-                    <a:bodyPr/>
-                    <a:lstStyle/>
-                    <a:p>
-                      <a:pPr indent="0" marL="0">
-                        <a:buNone/>
-                      </a:pPr>
-                      <a:r>
-                        <a:rPr lang="en-US" sz="1000" b="1" dirty="0">
-                          <a:solidFill>
-                            <a:schemeClr val="tx1"/>
-                          </a:solidFill>
-                        </a:rPr>
-                        <a:t>Creator D</a:t>
-                      </a:r>
-                      <a:endParaRPr lang="en-US" sz="1000" dirty="0"/>
-                    </a:p>
-                  </a:txBody>
-                  <a:tcPr marL="128016" marR="128016" marT="54864" marB="54864" anchor="ctr">
-                    <a:lnL w="9525" cap="flat" cmpd="sng" algn="ctr">
-                      <a:solidFill>
-                        <a:srgbClr val="E3EDE6"/>
-                      </a:solidFill>
-                      <a:prstDash val="solid"/>
-                      <a:round/>
-                      <a:headEnd type="none" w="med" len="med"/>
-                      <a:tailEnd type="none" w="med" len="med"/>
-                    </a:lnL>
-                    <a:lnR w="9525" cap="flat" cmpd="sng" algn="ctr">
-                      <a:solidFill>
-                        <a:srgbClr val="E3EDE6"/>
-                      </a:solidFill>
-                      <a:prstDash val="solid"/>
-                      <a:round/>
-                      <a:headEnd type="none" w="med" len="med"/>
-                      <a:tailEnd type="none" w="med" len="med"/>
-                    </a:lnR>
-                    <a:lnT w="9525" cap="flat" cmpd="sng" algn="ctr">
-                      <a:solidFill>
-                        <a:srgbClr val="E3EDE6"/>
-                      </a:solidFill>
-                      <a:prstDash val="solid"/>
-                      <a:round/>
-                      <a:headEnd type="none" w="med" len="med"/>
-                      <a:tailEnd type="none" w="med" len="med"/>
-                    </a:lnT>
-                    <a:lnB w="9525" cap="flat" cmpd="sng" algn="ctr">
-                      <a:solidFill>
-                        <a:srgbClr val="E3EDE6"/>
-                      </a:solidFill>
-                      <a:prstDash val="solid"/>
-                      <a:round/>
-                      <a:headEnd type="none" w="med" len="med"/>
-                      <a:tailEnd type="none" w="med" len="med"/>
-                    </a:lnB>
-                    <a:solidFill>
-                      <a:schemeClr val="bg1"/>
-                    </a:solidFill>
-                  </a:tcPr>
-                </a:tc>
-                <a:tc>
-                  <a:txBody>
-                    <a:bodyPr/>
-                    <a:lstStyle/>
-                    <a:p>
-                      <a:pPr indent="0" marL="0">
-                        <a:buNone/>
-                      </a:pPr>
-                      <a:r>
-                        <a:rPr lang="en-US" sz="1000" dirty="0">
-                          <a:solidFill>
-                            <a:schemeClr val="tx2"/>
-                          </a:solidFill>
-                        </a:rPr>
-                        <a:t>4</a:t>
-                      </a:r>
-                      <a:endParaRPr lang="en-US" sz="1000" dirty="0"/>
-                    </a:p>
-                  </a:txBody>
-                  <a:tcPr marL="128016" marR="128016" marT="54864" marB="54864" anchor="ctr">
-                    <a:lnL w="9525" cap="flat" cmpd="sng" algn="ctr">
-                      <a:solidFill>
-                        <a:srgbClr val="E3EDE6"/>
-                      </a:solidFill>
-                      <a:prstDash val="solid"/>
-                      <a:round/>
-                      <a:headEnd type="none" w="med" len="med"/>
-                      <a:tailEnd type="none" w="med" len="med"/>
-                    </a:lnL>
-                    <a:lnR w="9525" cap="flat" cmpd="sng" algn="ctr">
-                      <a:solidFill>
-                        <a:srgbClr val="E3EDE6"/>
-                      </a:solidFill>
-                      <a:prstDash val="solid"/>
-                      <a:round/>
-                      <a:headEnd type="none" w="med" len="med"/>
-                      <a:tailEnd type="none" w="med" len="med"/>
-                    </a:lnR>
-                    <a:lnT w="9525" cap="flat" cmpd="sng" algn="ctr">
-                      <a:solidFill>
-                        <a:srgbClr val="E3EDE6"/>
-                      </a:solidFill>
-                      <a:prstDash val="solid"/>
-                      <a:round/>
-                      <a:headEnd type="none" w="med" len="med"/>
-                      <a:tailEnd type="none" w="med" len="med"/>
-                    </a:lnT>
-                    <a:lnB w="9525" cap="flat" cmpd="sng" algn="ctr">
-                      <a:solidFill>
-                        <a:srgbClr val="E3EDE6"/>
-                      </a:solidFill>
-                      <a:prstDash val="solid"/>
-                      <a:round/>
-                      <a:headEnd type="none" w="med" len="med"/>
-                      <a:tailEnd type="none" w="med" len="med"/>
-                    </a:lnB>
-                    <a:solidFill>
-                      <a:schemeClr val="bg1"/>
-                    </a:solidFill>
-                  </a:tcPr>
-                </a:tc>
-                <a:tc>
-                  <a:txBody>
-                    <a:bodyPr/>
-                    <a:lstStyle/>
-                    <a:p>
-                      <a:pPr indent="0" marL="0">
-                        <a:buNone/>
-                      </a:pPr>
-                      <a:r>
-                        <a:rPr lang="en-US" sz="1000" dirty="0">
-                          <a:solidFill>
-                            <a:schemeClr val="tx2"/>
-                          </a:solidFill>
-                        </a:rPr>
-                        <a:t>380,000</a:t>
-                      </a:r>
-                      <a:endParaRPr lang="en-US" sz="1000" dirty="0"/>
-                    </a:p>
-                  </a:txBody>
-                  <a:tcPr marL="128016" marR="128016" marT="54864" marB="54864" anchor="ctr">
-                    <a:lnL w="9525" cap="flat" cmpd="sng" algn="ctr">
-                      <a:solidFill>
-                        <a:srgbClr val="E3EDE6"/>
-                      </a:solidFill>
-                      <a:prstDash val="solid"/>
-                      <a:round/>
-                      <a:headEnd type="none" w="med" len="med"/>
-                      <a:tailEnd type="none" w="med" len="med"/>
-                    </a:lnL>
-                    <a:lnR w="9525" cap="flat" cmpd="sng" algn="ctr">
-                      <a:solidFill>
-                        <a:srgbClr val="E3EDE6"/>
-                      </a:solidFill>
-                      <a:prstDash val="solid"/>
-                      <a:round/>
-                      <a:headEnd type="none" w="med" len="med"/>
-                      <a:tailEnd type="none" w="med" len="med"/>
-                    </a:lnR>
-                    <a:lnT w="9525" cap="flat" cmpd="sng" algn="ctr">
-                      <a:solidFill>
-                        <a:srgbClr val="E3EDE6"/>
-                      </a:solidFill>
-                      <a:prstDash val="solid"/>
-                      <a:round/>
-                      <a:headEnd type="none" w="med" len="med"/>
-                      <a:tailEnd type="none" w="med" len="med"/>
-                    </a:lnT>
-                    <a:lnB w="9525" cap="flat" cmpd="sng" algn="ctr">
-                      <a:solidFill>
-                        <a:srgbClr val="E3EDE6"/>
-                      </a:solidFill>
-                      <a:prstDash val="solid"/>
-                      <a:round/>
-                      <a:headEnd type="none" w="med" len="med"/>
-                      <a:tailEnd type="none" w="med" len="med"/>
-                    </a:lnB>
-                    <a:solidFill>
-                      <a:schemeClr val="bg1"/>
-                    </a:solidFill>
-                  </a:tcPr>
-                </a:tc>
-                <a:tc>
-                  <a:txBody>
-                    <a:bodyPr/>
-                    <a:lstStyle/>
-                    <a:p>
-                      <a:pPr indent="0" marL="0">
-                        <a:buNone/>
-                      </a:pPr>
-                      <a:r>
-                        <a:rPr lang="en-US" sz="1000" dirty="0">
-                          <a:solidFill>
-                            <a:schemeClr val="tx2"/>
-                          </a:solidFill>
-                        </a:rPr>
-                        <a:t>27,800</a:t>
-                      </a:r>
-                      <a:endParaRPr lang="en-US" sz="1000" dirty="0"/>
-                    </a:p>
-                  </a:txBody>
-                  <a:tcPr marL="128016" marR="128016" marT="54864" marB="54864" anchor="ctr">
-                    <a:lnL w="9525" cap="flat" cmpd="sng" algn="ctr">
-                      <a:solidFill>
-                        <a:srgbClr val="E3EDE6"/>
-                      </a:solidFill>
-                      <a:prstDash val="solid"/>
-                      <a:round/>
-                      <a:headEnd type="none" w="med" len="med"/>
-                      <a:tailEnd type="none" w="med" len="med"/>
-                    </a:lnL>
-                    <a:lnR w="9525" cap="flat" cmpd="sng" algn="ctr">
-                      <a:solidFill>
-                        <a:srgbClr val="E3EDE6"/>
-                      </a:solidFill>
-                      <a:prstDash val="solid"/>
-                      <a:round/>
-                      <a:headEnd type="none" w="med" len="med"/>
-                      <a:tailEnd type="none" w="med" len="med"/>
-                    </a:lnR>
-                    <a:lnT w="9525" cap="flat" cmpd="sng" algn="ctr">
-                      <a:solidFill>
-                        <a:srgbClr val="E3EDE6"/>
-                      </a:solidFill>
-                      <a:prstDash val="solid"/>
-                      <a:round/>
-                      <a:headEnd type="none" w="med" len="med"/>
-                      <a:tailEnd type="none" w="med" len="med"/>
-                    </a:lnT>
-                    <a:lnB w="9525" cap="flat" cmpd="sng" algn="ctr">
-                      <a:solidFill>
-                        <a:srgbClr val="E3EDE6"/>
-                      </a:solidFill>
-                      <a:prstDash val="solid"/>
-                      <a:round/>
-                      <a:headEnd type="none" w="med" len="med"/>
-                      <a:tailEnd type="none" w="med" len="med"/>
-                    </a:lnB>
-                    <a:solidFill>
-                      <a:schemeClr val="bg1"/>
-                    </a:solidFill>
-                  </a:tcPr>
-                </a:tc>
-                <a:tc>
-                  <a:txBody>
-                    <a:bodyPr/>
-                    <a:lstStyle/>
-                    <a:p>
-                      <a:pPr indent="0" marL="0">
-                        <a:buNone/>
-                      </a:pPr>
-                      <a:r>
-                        <a:rPr lang="en-US" sz="1000" dirty="0">
-                          <a:solidFill>
-                            <a:schemeClr val="tx2"/>
-                          </a:solidFill>
-                        </a:rPr>
-                        <a:t>980</a:t>
-                      </a:r>
-                      <a:endParaRPr lang="en-US" sz="1000" dirty="0"/>
-                    </a:p>
-                  </a:txBody>
-                  <a:tcPr marL="128016" marR="128016" marT="54864" marB="54864" anchor="ctr">
-                    <a:lnL w="9525" cap="flat" cmpd="sng" algn="ctr">
-                      <a:solidFill>
-                        <a:srgbClr val="E3EDE6"/>
-                      </a:solidFill>
-                      <a:prstDash val="solid"/>
-                      <a:round/>
-                      <a:headEnd type="none" w="med" len="med"/>
-                      <a:tailEnd type="none" w="med" len="med"/>
-                    </a:lnL>
-                    <a:lnR w="9525" cap="flat" cmpd="sng" algn="ctr">
-                      <a:solidFill>
-                        <a:srgbClr val="E3EDE6"/>
-                      </a:solidFill>
-                      <a:prstDash val="solid"/>
-                      <a:round/>
-                      <a:headEnd type="none" w="med" len="med"/>
-                      <a:tailEnd type="none" w="med" len="med"/>
-                    </a:lnR>
-                    <a:lnT w="9525" cap="flat" cmpd="sng" algn="ctr">
-                      <a:solidFill>
-                        <a:srgbClr val="E3EDE6"/>
-                      </a:solidFill>
-                      <a:prstDash val="solid"/>
-                      <a:round/>
-                      <a:headEnd type="none" w="med" len="med"/>
-                      <a:tailEnd type="none" w="med" len="med"/>
-                    </a:lnT>
-                    <a:lnB w="9525" cap="flat" cmpd="sng" algn="ctr">
-                      <a:solidFill>
-                        <a:srgbClr val="E3EDE6"/>
-                      </a:solidFill>
-                      <a:prstDash val="solid"/>
-                      <a:round/>
-                      <a:headEnd type="none" w="med" len="med"/>
-                      <a:tailEnd type="none" w="med" len="med"/>
-                    </a:lnB>
-                    <a:solidFill>
-                      <a:schemeClr val="bg1"/>
-                    </a:solidFill>
-                  </a:tcPr>
-                </a:tc>
-              </a:tr>
-              <a:tr h="274320">
-                <a:tc>
-                  <a:txBody>
-                    <a:bodyPr/>
-                    <a:lstStyle/>
-                    <a:p>
-                      <a:pPr indent="0" marL="0">
-                        <a:buNone/>
-                      </a:pPr>
-                      <a:r>
-                        <a:rPr lang="en-US" sz="1000" b="1" dirty="0">
-                          <a:solidFill>
-                            <a:schemeClr val="tx1"/>
-                          </a:solidFill>
-                        </a:rPr>
-                        <a:t>Creator E</a:t>
-                      </a:r>
-                      <a:endParaRPr lang="en-US" sz="1000" dirty="0"/>
-                    </a:p>
-                  </a:txBody>
-                  <a:tcPr marL="128016" marR="128016" marT="54864" marB="54864" anchor="ctr">
-                    <a:lnL w="9525" cap="flat" cmpd="sng" algn="ctr">
-                      <a:solidFill>
-                        <a:srgbClr val="E3EDE6"/>
-                      </a:solidFill>
-                      <a:prstDash val="solid"/>
-                      <a:round/>
-                      <a:headEnd type="none" w="med" len="med"/>
-                      <a:tailEnd type="none" w="med" len="med"/>
-                    </a:lnL>
-                    <a:lnR w="9525" cap="flat" cmpd="sng" algn="ctr">
-                      <a:solidFill>
-                        <a:srgbClr val="E3EDE6"/>
-                      </a:solidFill>
-                      <a:prstDash val="solid"/>
-                      <a:round/>
-                      <a:headEnd type="none" w="med" len="med"/>
-                      <a:tailEnd type="none" w="med" len="med"/>
-                    </a:lnR>
-                    <a:lnT w="9525" cap="flat" cmpd="sng" algn="ctr">
-                      <a:solidFill>
-                        <a:srgbClr val="E3EDE6"/>
-                      </a:solidFill>
-                      <a:prstDash val="solid"/>
-                      <a:round/>
-                      <a:headEnd type="none" w="med" len="med"/>
-                      <a:tailEnd type="none" w="med" len="med"/>
-                    </a:lnT>
-                    <a:lnB w="9525" cap="flat" cmpd="sng" algn="ctr">
-                      <a:solidFill>
-                        <a:srgbClr val="E3EDE6"/>
-                      </a:solidFill>
-                      <a:prstDash val="solid"/>
-                      <a:round/>
-                      <a:headEnd type="none" w="med" len="med"/>
-                      <a:tailEnd type="none" w="med" len="med"/>
-                    </a:lnB>
-                    <a:solidFill>
-                      <a:schemeClr val="bg1"/>
-                    </a:solidFill>
-                  </a:tcPr>
-                </a:tc>
-                <a:tc>
-                  <a:txBody>
-                    <a:bodyPr/>
-                    <a:lstStyle/>
-                    <a:p>
-                      <a:pPr indent="0" marL="0">
-                        <a:buNone/>
-                      </a:pPr>
-                      <a:r>
-                        <a:rPr lang="en-US" sz="1000" dirty="0">
-                          <a:solidFill>
-                            <a:schemeClr val="tx2"/>
-                          </a:solidFill>
-                        </a:rPr>
-                        <a:t>3</a:t>
-                      </a:r>
-                      <a:endParaRPr lang="en-US" sz="1000" dirty="0"/>
-                    </a:p>
-                  </a:txBody>
-                  <a:tcPr marL="128016" marR="128016" marT="54864" marB="54864" anchor="ctr">
-                    <a:lnL w="9525" cap="flat" cmpd="sng" algn="ctr">
-                      <a:solidFill>
-                        <a:srgbClr val="E3EDE6"/>
-                      </a:solidFill>
-                      <a:prstDash val="solid"/>
-                      <a:round/>
-                      <a:headEnd type="none" w="med" len="med"/>
-                      <a:tailEnd type="none" w="med" len="med"/>
-                    </a:lnL>
-                    <a:lnR w="9525" cap="flat" cmpd="sng" algn="ctr">
-                      <a:solidFill>
-                        <a:srgbClr val="E3EDE6"/>
-                      </a:solidFill>
-                      <a:prstDash val="solid"/>
-                      <a:round/>
-                      <a:headEnd type="none" w="med" len="med"/>
-                      <a:tailEnd type="none" w="med" len="med"/>
-                    </a:lnR>
-                    <a:lnT w="9525" cap="flat" cmpd="sng" algn="ctr">
-                      <a:solidFill>
-                        <a:srgbClr val="E3EDE6"/>
-                      </a:solidFill>
-                      <a:prstDash val="solid"/>
-                      <a:round/>
-                      <a:headEnd type="none" w="med" len="med"/>
-                      <a:tailEnd type="none" w="med" len="med"/>
-                    </a:lnT>
-                    <a:lnB w="9525" cap="flat" cmpd="sng" algn="ctr">
-                      <a:solidFill>
-                        <a:srgbClr val="E3EDE6"/>
-                      </a:solidFill>
-                      <a:prstDash val="solid"/>
-                      <a:round/>
-                      <a:headEnd type="none" w="med" len="med"/>
-                      <a:tailEnd type="none" w="med" len="med"/>
-                    </a:lnB>
-                    <a:solidFill>
-                      <a:schemeClr val="bg1"/>
-                    </a:solidFill>
-                  </a:tcPr>
-                </a:tc>
-                <a:tc>
-                  <a:txBody>
-                    <a:bodyPr/>
-                    <a:lstStyle/>
-                    <a:p>
-                      <a:pPr indent="0" marL="0">
-                        <a:buNone/>
-                      </a:pPr>
-                      <a:r>
-                        <a:rPr lang="en-US" sz="1000" dirty="0">
-                          <a:solidFill>
-                            <a:schemeClr val="tx2"/>
-                          </a:solidFill>
-                        </a:rPr>
-                        <a:t>290,000</a:t>
-                      </a:r>
-                      <a:endParaRPr lang="en-US" sz="1000" dirty="0"/>
-                    </a:p>
-                  </a:txBody>
-                  <a:tcPr marL="128016" marR="128016" marT="54864" marB="54864" anchor="ctr">
-                    <a:lnL w="9525" cap="flat" cmpd="sng" algn="ctr">
-                      <a:solidFill>
-                        <a:srgbClr val="E3EDE6"/>
-                      </a:solidFill>
-                      <a:prstDash val="solid"/>
-                      <a:round/>
-                      <a:headEnd type="none" w="med" len="med"/>
-                      <a:tailEnd type="none" w="med" len="med"/>
-                    </a:lnL>
-                    <a:lnR w="9525" cap="flat" cmpd="sng" algn="ctr">
-                      <a:solidFill>
-                        <a:srgbClr val="E3EDE6"/>
-                      </a:solidFill>
-                      <a:prstDash val="solid"/>
-                      <a:round/>
-                      <a:headEnd type="none" w="med" len="med"/>
-                      <a:tailEnd type="none" w="med" len="med"/>
-                    </a:lnR>
-                    <a:lnT w="9525" cap="flat" cmpd="sng" algn="ctr">
-                      <a:solidFill>
-                        <a:srgbClr val="E3EDE6"/>
-                      </a:solidFill>
-                      <a:prstDash val="solid"/>
-                      <a:round/>
-                      <a:headEnd type="none" w="med" len="med"/>
-                      <a:tailEnd type="none" w="med" len="med"/>
-                    </a:lnT>
-                    <a:lnB w="9525" cap="flat" cmpd="sng" algn="ctr">
-                      <a:solidFill>
-                        <a:srgbClr val="E3EDE6"/>
-                      </a:solidFill>
-                      <a:prstDash val="solid"/>
-                      <a:round/>
-                      <a:headEnd type="none" w="med" len="med"/>
-                      <a:tailEnd type="none" w="med" len="med"/>
-                    </a:lnB>
-                    <a:solidFill>
-                      <a:schemeClr val="bg1"/>
-                    </a:solidFill>
-                  </a:tcPr>
-                </a:tc>
-                <a:tc>
-                  <a:txBody>
-                    <a:bodyPr/>
-                    <a:lstStyle/>
-                    <a:p>
-                      <a:pPr indent="0" marL="0">
-                        <a:buNone/>
-                      </a:pPr>
-                      <a:r>
-                        <a:rPr lang="en-US" sz="1000" dirty="0">
-                          <a:solidFill>
-                            <a:schemeClr val="tx2"/>
-                          </a:solidFill>
-                        </a:rPr>
-                        <a:t>22,100</a:t>
-                      </a:r>
-                      <a:endParaRPr lang="en-US" sz="1000" dirty="0"/>
-                    </a:p>
-                  </a:txBody>
-                  <a:tcPr marL="128016" marR="128016" marT="54864" marB="54864" anchor="ctr">
-                    <a:lnL w="9525" cap="flat" cmpd="sng" algn="ctr">
-                      <a:solidFill>
-                        <a:srgbClr val="E3EDE6"/>
-                      </a:solidFill>
-                      <a:prstDash val="solid"/>
-                      <a:round/>
-                      <a:headEnd type="none" w="med" len="med"/>
-                      <a:tailEnd type="none" w="med" len="med"/>
-                    </a:lnL>
-                    <a:lnR w="9525" cap="flat" cmpd="sng" algn="ctr">
-                      <a:solidFill>
-                        <a:srgbClr val="E3EDE6"/>
-                      </a:solidFill>
-                      <a:prstDash val="solid"/>
-                      <a:round/>
-                      <a:headEnd type="none" w="med" len="med"/>
-                      <a:tailEnd type="none" w="med" len="med"/>
-                    </a:lnR>
-                    <a:lnT w="9525" cap="flat" cmpd="sng" algn="ctr">
-                      <a:solidFill>
-                        <a:srgbClr val="E3EDE6"/>
-                      </a:solidFill>
-                      <a:prstDash val="solid"/>
-                      <a:round/>
-                      <a:headEnd type="none" w="med" len="med"/>
-                      <a:tailEnd type="none" w="med" len="med"/>
-                    </a:lnT>
-                    <a:lnB w="9525" cap="flat" cmpd="sng" algn="ctr">
-                      <a:solidFill>
-                        <a:srgbClr val="E3EDE6"/>
-                      </a:solidFill>
-                      <a:prstDash val="solid"/>
-                      <a:round/>
-                      <a:headEnd type="none" w="med" len="med"/>
-                      <a:tailEnd type="none" w="med" len="med"/>
-                    </a:lnB>
-                    <a:solidFill>
-                      <a:schemeClr val="bg1"/>
-                    </a:solidFill>
-                  </a:tcPr>
-                </a:tc>
-                <a:tc>
-                  <a:txBody>
-                    <a:bodyPr/>
-                    <a:lstStyle/>
-                    <a:p>
-                      <a:pPr indent="0" marL="0">
-                        <a:buNone/>
-                      </a:pPr>
-                      <a:r>
-                        <a:rPr lang="en-US" sz="1000" dirty="0">
-                          <a:solidFill>
-                            <a:schemeClr val="tx2"/>
-                          </a:solidFill>
-                        </a:rPr>
-                        <a:t>730</a:t>
-                      </a:r>
-                      <a:endParaRPr lang="en-US" sz="1000" dirty="0"/>
-                    </a:p>
-                  </a:txBody>
-                  <a:tcPr marL="128016" marR="128016" marT="54864" marB="54864" anchor="ctr">
-                    <a:lnL w="9525" cap="flat" cmpd="sng" algn="ctr">
-                      <a:solidFill>
-                        <a:srgbClr val="E3EDE6"/>
-                      </a:solidFill>
-                      <a:prstDash val="solid"/>
-                      <a:round/>
-                      <a:headEnd type="none" w="med" len="med"/>
-                      <a:tailEnd type="none" w="med" len="med"/>
-                    </a:lnL>
-                    <a:lnR w="9525" cap="flat" cmpd="sng" algn="ctr">
-                      <a:solidFill>
-                        <a:srgbClr val="E3EDE6"/>
-                      </a:solidFill>
-                      <a:prstDash val="solid"/>
-                      <a:round/>
-                      <a:headEnd type="none" w="med" len="med"/>
-                      <a:tailEnd type="none" w="med" len="med"/>
-                    </a:lnR>
-                    <a:lnT w="9525" cap="flat" cmpd="sng" algn="ctr">
-                      <a:solidFill>
-                        <a:srgbClr val="E3EDE6"/>
-                      </a:solidFill>
-                      <a:prstDash val="solid"/>
-                      <a:round/>
-                      <a:headEnd type="none" w="med" len="med"/>
-                      <a:tailEnd type="none" w="med" len="med"/>
-                    </a:lnT>
-                    <a:lnB w="9525" cap="flat" cmpd="sng" algn="ctr">
-                      <a:solidFill>
-                        <a:srgbClr val="E3EDE6"/>
-                      </a:solidFill>
-                      <a:prstDash val="solid"/>
-                      <a:round/>
-                      <a:headEnd type="none" w="med" len="med"/>
-                      <a:tailEnd type="none" w="med" len="med"/>
-                    </a:lnB>
-                    <a:solidFill>
-                      <a:schemeClr val="bg1"/>
-                    </a:solidFill>
-                  </a:tcPr>
-                </a:tc>
-              </a:tr>
-              <a:tr h="274320">
-                <a:tc>
-                  <a:txBody>
-                    <a:bodyPr/>
-                    <a:lstStyle/>
-                    <a:p>
-                      <a:pPr indent="0" marL="0">
-                        <a:buNone/>
-                      </a:pPr>
-                      <a:r>
-                        <a:rPr lang="en-US" sz="1000" b="1" dirty="0">
-                          <a:solidFill>
-                            <a:schemeClr val="tx1"/>
-                          </a:solidFill>
-                        </a:rPr>
-                        <a:t>13 other creators</a:t>
-                      </a:r>
-                      <a:endParaRPr lang="en-US" sz="1000" dirty="0"/>
-                    </a:p>
-                  </a:txBody>
-                  <a:tcPr marL="128016" marR="128016" marT="54864" marB="54864" anchor="ctr">
-                    <a:lnL w="9525" cap="flat" cmpd="sng" algn="ctr">
-                      <a:solidFill>
-                        <a:srgbClr val="E3EDE6"/>
-                      </a:solidFill>
-                      <a:prstDash val="solid"/>
-                      <a:round/>
-                      <a:headEnd type="none" w="med" len="med"/>
-                      <a:tailEnd type="none" w="med" len="med"/>
-                    </a:lnL>
-                    <a:lnR w="9525" cap="flat" cmpd="sng" algn="ctr">
-                      <a:solidFill>
-                        <a:srgbClr val="E3EDE6"/>
-                      </a:solidFill>
-                      <a:prstDash val="solid"/>
-                      <a:round/>
-                      <a:headEnd type="none" w="med" len="med"/>
-                      <a:tailEnd type="none" w="med" len="med"/>
-                    </a:lnR>
-                    <a:lnT w="9525" cap="flat" cmpd="sng" algn="ctr">
-                      <a:solidFill>
-                        <a:srgbClr val="E3EDE6"/>
-                      </a:solidFill>
-                      <a:prstDash val="solid"/>
-                      <a:round/>
-                      <a:headEnd type="none" w="med" len="med"/>
-                      <a:tailEnd type="none" w="med" len="med"/>
-                    </a:lnT>
-                    <a:lnB w="9525" cap="flat" cmpd="sng" algn="ctr">
-                      <a:solidFill>
-                        <a:srgbClr val="E3EDE6"/>
-                      </a:solidFill>
-                      <a:prstDash val="solid"/>
-                      <a:round/>
-                      <a:headEnd type="none" w="med" len="med"/>
-                      <a:tailEnd type="none" w="med" len="med"/>
-                    </a:lnB>
-                    <a:solidFill>
-                      <a:schemeClr val="bg1"/>
-                    </a:solidFill>
-                  </a:tcPr>
-                </a:tc>
-                <a:tc>
-                  <a:txBody>
-                    <a:bodyPr/>
-                    <a:lstStyle/>
-                    <a:p>
-                      <a:pPr indent="0" marL="0">
-                        <a:buNone/>
-                      </a:pPr>
-                      <a:r>
-                        <a:rPr lang="en-US" sz="1000" dirty="0">
-                          <a:solidFill>
-                            <a:schemeClr val="tx2"/>
-                          </a:solidFill>
-                        </a:rPr>
-                        <a:t>42</a:t>
-                      </a:r>
-                      <a:endParaRPr lang="en-US" sz="1000" dirty="0"/>
-                    </a:p>
-                  </a:txBody>
-                  <a:tcPr marL="128016" marR="128016" marT="54864" marB="54864" anchor="ctr">
-                    <a:lnL w="9525" cap="flat" cmpd="sng" algn="ctr">
-                      <a:solidFill>
-                        <a:srgbClr val="E3EDE6"/>
-                      </a:solidFill>
-                      <a:prstDash val="solid"/>
-                      <a:round/>
-                      <a:headEnd type="none" w="med" len="med"/>
-                      <a:tailEnd type="none" w="med" len="med"/>
-                    </a:lnL>
-                    <a:lnR w="9525" cap="flat" cmpd="sng" algn="ctr">
-                      <a:solidFill>
-                        <a:srgbClr val="E3EDE6"/>
-                      </a:solidFill>
-                      <a:prstDash val="solid"/>
-                      <a:round/>
-                      <a:headEnd type="none" w="med" len="med"/>
-                      <a:tailEnd type="none" w="med" len="med"/>
-                    </a:lnR>
-                    <a:lnT w="9525" cap="flat" cmpd="sng" algn="ctr">
-                      <a:solidFill>
-                        <a:srgbClr val="E3EDE6"/>
-                      </a:solidFill>
-                      <a:prstDash val="solid"/>
-                      <a:round/>
-                      <a:headEnd type="none" w="med" len="med"/>
-                      <a:tailEnd type="none" w="med" len="med"/>
-                    </a:lnT>
-                    <a:lnB w="9525" cap="flat" cmpd="sng" algn="ctr">
-                      <a:solidFill>
-                        <a:srgbClr val="E3EDE6"/>
-                      </a:solidFill>
-                      <a:prstDash val="solid"/>
-                      <a:round/>
-                      <a:headEnd type="none" w="med" len="med"/>
-                      <a:tailEnd type="none" w="med" len="med"/>
-                    </a:lnB>
-                    <a:solidFill>
-                      <a:schemeClr val="bg1"/>
-                    </a:solidFill>
-                  </a:tcPr>
-                </a:tc>
-                <a:tc>
-                  <a:txBody>
-                    <a:bodyPr/>
-                    <a:lstStyle/>
-                    <a:p>
-                      <a:pPr indent="0" marL="0">
-                        <a:buNone/>
-                      </a:pPr>
-                      <a:r>
-                        <a:rPr lang="en-US" sz="1000" dirty="0">
-                          <a:solidFill>
-                            <a:schemeClr val="tx2"/>
-                          </a:solidFill>
-                        </a:rPr>
-                        <a:t>645,000</a:t>
-                      </a:r>
-                      <a:endParaRPr lang="en-US" sz="1000" dirty="0"/>
-                    </a:p>
-                  </a:txBody>
-                  <a:tcPr marL="128016" marR="128016" marT="54864" marB="54864" anchor="ctr">
-                    <a:lnL w="9525" cap="flat" cmpd="sng" algn="ctr">
-                      <a:solidFill>
-                        <a:srgbClr val="E3EDE6"/>
-                      </a:solidFill>
-                      <a:prstDash val="solid"/>
-                      <a:round/>
-                      <a:headEnd type="none" w="med" len="med"/>
-                      <a:tailEnd type="none" w="med" len="med"/>
-                    </a:lnL>
-                    <a:lnR w="9525" cap="flat" cmpd="sng" algn="ctr">
-                      <a:solidFill>
-                        <a:srgbClr val="E3EDE6"/>
-                      </a:solidFill>
-                      <a:prstDash val="solid"/>
-                      <a:round/>
-                      <a:headEnd type="none" w="med" len="med"/>
-                      <a:tailEnd type="none" w="med" len="med"/>
-                    </a:lnR>
-                    <a:lnT w="9525" cap="flat" cmpd="sng" algn="ctr">
-                      <a:solidFill>
-                        <a:srgbClr val="E3EDE6"/>
-                      </a:solidFill>
-                      <a:prstDash val="solid"/>
-                      <a:round/>
-                      <a:headEnd type="none" w="med" len="med"/>
-                      <a:tailEnd type="none" w="med" len="med"/>
-                    </a:lnT>
-                    <a:lnB w="9525" cap="flat" cmpd="sng" algn="ctr">
-                      <a:solidFill>
-                        <a:srgbClr val="E3EDE6"/>
-                      </a:solidFill>
-                      <a:prstDash val="solid"/>
-                      <a:round/>
-                      <a:headEnd type="none" w="med" len="med"/>
-                      <a:tailEnd type="none" w="med" len="med"/>
-                    </a:lnB>
-                    <a:solidFill>
-                      <a:schemeClr val="bg1"/>
-                    </a:solidFill>
-                  </a:tcPr>
-                </a:tc>
-                <a:tc>
-                  <a:txBody>
-                    <a:bodyPr/>
-                    <a:lstStyle/>
-                    <a:p>
-                      <a:pPr indent="0" marL="0">
-                        <a:buNone/>
-                      </a:pPr>
-                      <a:r>
-                        <a:rPr lang="en-US" sz="1000" dirty="0">
-                          <a:solidFill>
-                            <a:schemeClr val="tx2"/>
-                          </a:solidFill>
-                        </a:rPr>
-                        <a:t>51,400</a:t>
-                      </a:r>
-                      <a:endParaRPr lang="en-US" sz="1000" dirty="0"/>
-                    </a:p>
-                  </a:txBody>
-                  <a:tcPr marL="128016" marR="128016" marT="54864" marB="54864" anchor="ctr">
-                    <a:lnL w="9525" cap="flat" cmpd="sng" algn="ctr">
-                      <a:solidFill>
-                        <a:srgbClr val="E3EDE6"/>
-                      </a:solidFill>
-                      <a:prstDash val="solid"/>
-                      <a:round/>
-                      <a:headEnd type="none" w="med" len="med"/>
-                      <a:tailEnd type="none" w="med" len="med"/>
-                    </a:lnL>
-                    <a:lnR w="9525" cap="flat" cmpd="sng" algn="ctr">
-                      <a:solidFill>
-                        <a:srgbClr val="E3EDE6"/>
-                      </a:solidFill>
-                      <a:prstDash val="solid"/>
-                      <a:round/>
-                      <a:headEnd type="none" w="med" len="med"/>
-                      <a:tailEnd type="none" w="med" len="med"/>
-                    </a:lnR>
-                    <a:lnT w="9525" cap="flat" cmpd="sng" algn="ctr">
-                      <a:solidFill>
-                        <a:srgbClr val="E3EDE6"/>
-                      </a:solidFill>
-                      <a:prstDash val="solid"/>
-                      <a:round/>
-                      <a:headEnd type="none" w="med" len="med"/>
-                      <a:tailEnd type="none" w="med" len="med"/>
-                    </a:lnT>
-                    <a:lnB w="9525" cap="flat" cmpd="sng" algn="ctr">
-                      <a:solidFill>
-                        <a:srgbClr val="E3EDE6"/>
-                      </a:solidFill>
-                      <a:prstDash val="solid"/>
-                      <a:round/>
-                      <a:headEnd type="none" w="med" len="med"/>
-                      <a:tailEnd type="none" w="med" len="med"/>
-                    </a:lnB>
-                    <a:solidFill>
-                      <a:schemeClr val="bg1"/>
-                    </a:solidFill>
-                  </a:tcPr>
-                </a:tc>
-                <a:tc>
-                  <a:txBody>
-                    <a:bodyPr/>
-                    <a:lstStyle/>
-                    <a:p>
-                      <a:pPr indent="0" marL="0">
-                        <a:buNone/>
-                      </a:pPr>
-                      <a:r>
-                        <a:rPr lang="en-US" sz="1000" dirty="0">
-                          <a:solidFill>
-                            <a:schemeClr val="tx2"/>
-                          </a:solidFill>
-                        </a:rPr>
-                        <a:t>2,700</a:t>
-                      </a:r>
-                      <a:endParaRPr lang="en-US" sz="1000" dirty="0"/>
-                    </a:p>
-                  </a:txBody>
-                  <a:tcPr marL="128016" marR="128016" marT="54864" marB="54864" anchor="ctr">
-                    <a:lnL w="9525" cap="flat" cmpd="sng" algn="ctr">
-                      <a:solidFill>
-                        <a:srgbClr val="E3EDE6"/>
-                      </a:solidFill>
-                      <a:prstDash val="solid"/>
-                      <a:round/>
-                      <a:headEnd type="none" w="med" len="med"/>
-                      <a:tailEnd type="none" w="med" len="med"/>
-                    </a:lnL>
-                    <a:lnR w="9525" cap="flat" cmpd="sng" algn="ctr">
-                      <a:solidFill>
-                        <a:srgbClr val="E3EDE6"/>
-                      </a:solidFill>
-                      <a:prstDash val="solid"/>
-                      <a:round/>
-                      <a:headEnd type="none" w="med" len="med"/>
-                      <a:tailEnd type="none" w="med" len="med"/>
-                    </a:lnR>
-                    <a:lnT w="9525" cap="flat" cmpd="sng" algn="ctr">
-                      <a:solidFill>
-                        <a:srgbClr val="E3EDE6"/>
-                      </a:solidFill>
-                      <a:prstDash val="solid"/>
-                      <a:round/>
-                      <a:headEnd type="none" w="med" len="med"/>
-                      <a:tailEnd type="none" w="med" len="med"/>
-                    </a:lnT>
-                    <a:lnB w="9525" cap="flat" cmpd="sng" algn="ctr">
-                      <a:solidFill>
-                        <a:srgbClr val="E3EDE6"/>
-                      </a:solidFill>
-                      <a:prstDash val="solid"/>
-                      <a:round/>
-                      <a:headEnd type="none" w="med" len="med"/>
-                      <a:tailEnd type="none" w="med" len="med"/>
-                    </a:lnB>
-                    <a:solidFill>
-                      <a:schemeClr val="bg1"/>
-                    </a:solidFill>
-                  </a:tcPr>
-                </a:tc>
-              </a:tr>
-              <a:tr h="274320">
-                <a:tc>
-                  <a:txBody>
-                    <a:bodyPr/>
-                    <a:lstStyle/>
-                    <a:p>
-                      <a:pPr indent="0" marL="0">
-                        <a:buNone/>
-                      </a:pPr>
-                      <a:r>
-                        <a:rPr lang="en-US" sz="1000" b="1" dirty="0">
-                          <a:solidFill>
-                            <a:schemeClr val="tx1"/>
-                          </a:solidFill>
-                        </a:rPr>
-                        <a:t>Total</a:t>
-                      </a:r>
-                      <a:endParaRPr lang="en-US" sz="1000" dirty="0"/>
-                    </a:p>
-                  </a:txBody>
-                  <a:tcPr marL="128016" marR="128016" marT="54864" marB="54864" anchor="ctr">
-                    <a:lnL w="9525" cap="flat" cmpd="sng" algn="ctr">
-                      <a:solidFill>
-                        <a:srgbClr val="E3EDE6"/>
-                      </a:solidFill>
-                      <a:prstDash val="solid"/>
-                      <a:round/>
-                      <a:headEnd type="none" w="med" len="med"/>
-                      <a:tailEnd type="none" w="med" len="med"/>
-                    </a:lnL>
-                    <a:lnR w="9525" cap="flat" cmpd="sng" algn="ctr">
-                      <a:solidFill>
-                        <a:srgbClr val="E3EDE6"/>
-                      </a:solidFill>
-                      <a:prstDash val="solid"/>
-                      <a:round/>
-                      <a:headEnd type="none" w="med" len="med"/>
-                      <a:tailEnd type="none" w="med" len="med"/>
-                    </a:lnR>
-                    <a:lnT w="9525" cap="flat" cmpd="sng" algn="ctr">
-                      <a:solidFill>
-                        <a:srgbClr val="E3EDE6"/>
-                      </a:solidFill>
-                      <a:prstDash val="solid"/>
-                      <a:round/>
-                      <a:headEnd type="none" w="med" len="med"/>
-                      <a:tailEnd type="none" w="med" len="med"/>
-                    </a:lnT>
-                    <a:lnB w="9525" cap="flat" cmpd="sng" algn="ctr">
-                      <a:solidFill>
-                        <a:srgbClr val="E3EDE6"/>
-                      </a:solidFill>
-                      <a:prstDash val="solid"/>
-                      <a:round/>
-                      <a:headEnd type="none" w="med" len="med"/>
-                      <a:tailEnd type="none" w="med" len="med"/>
-                    </a:lnB>
-                    <a:solidFill>
-                      <a:schemeClr val="bg1"/>
-                    </a:solidFill>
-                  </a:tcPr>
-                </a:tc>
-                <a:tc>
-                  <a:txBody>
-                    <a:bodyPr/>
-                    <a:lstStyle/>
-                    <a:p>
-                      <a:pPr indent="0" marL="0">
-                        <a:buNone/>
-                      </a:pPr>
-                      <a:r>
-                        <a:rPr lang="en-US" sz="1000" dirty="0">
-                          <a:solidFill>
-                            <a:schemeClr val="tx2"/>
-                          </a:solidFill>
-                        </a:rPr>
-                        <a:t>64</a:t>
-                      </a:r>
-                      <a:endParaRPr lang="en-US" sz="1000" dirty="0"/>
-                    </a:p>
-                  </a:txBody>
-                  <a:tcPr marL="128016" marR="128016" marT="54864" marB="54864" anchor="ctr">
-                    <a:lnL w="9525" cap="flat" cmpd="sng" algn="ctr">
-                      <a:solidFill>
-                        <a:srgbClr val="E3EDE6"/>
-                      </a:solidFill>
-                      <a:prstDash val="solid"/>
-                      <a:round/>
-                      <a:headEnd type="none" w="med" len="med"/>
-                      <a:tailEnd type="none" w="med" len="med"/>
-                    </a:lnL>
-                    <a:lnR w="9525" cap="flat" cmpd="sng" algn="ctr">
-                      <a:solidFill>
-                        <a:srgbClr val="E3EDE6"/>
-                      </a:solidFill>
-                      <a:prstDash val="solid"/>
-                      <a:round/>
-                      <a:headEnd type="none" w="med" len="med"/>
-                      <a:tailEnd type="none" w="med" len="med"/>
-                    </a:lnR>
-                    <a:lnT w="9525" cap="flat" cmpd="sng" algn="ctr">
-                      <a:solidFill>
-                        <a:srgbClr val="E3EDE6"/>
-                      </a:solidFill>
-                      <a:prstDash val="solid"/>
-                      <a:round/>
-                      <a:headEnd type="none" w="med" len="med"/>
-                      <a:tailEnd type="none" w="med" len="med"/>
-                    </a:lnT>
-                    <a:lnB w="9525" cap="flat" cmpd="sng" algn="ctr">
-                      <a:solidFill>
-                        <a:srgbClr val="E3EDE6"/>
-                      </a:solidFill>
-                      <a:prstDash val="solid"/>
-                      <a:round/>
-                      <a:headEnd type="none" w="med" len="med"/>
-                      <a:tailEnd type="none" w="med" len="med"/>
-                    </a:lnB>
-                    <a:solidFill>
-                      <a:schemeClr val="bg1"/>
-                    </a:solidFill>
-                  </a:tcPr>
-                </a:tc>
-                <a:tc>
-                  <a:txBody>
-                    <a:bodyPr/>
-                    <a:lstStyle/>
-                    <a:p>
-                      <a:pPr indent="0" marL="0">
-                        <a:buNone/>
-                      </a:pPr>
-                      <a:r>
-                        <a:rPr lang="en-US" sz="1000" dirty="0">
-                          <a:solidFill>
-                            <a:schemeClr val="tx2"/>
-                          </a:solidFill>
-                        </a:rPr>
-                        <a:t>3,200,000</a:t>
-                      </a:r>
-                      <a:endParaRPr lang="en-US" sz="1000" dirty="0"/>
-                    </a:p>
-                  </a:txBody>
-                  <a:tcPr marL="128016" marR="128016" marT="54864" marB="54864" anchor="ctr">
-                    <a:lnL w="9525" cap="flat" cmpd="sng" algn="ctr">
-                      <a:solidFill>
-                        <a:srgbClr val="E3EDE6"/>
-                      </a:solidFill>
-                      <a:prstDash val="solid"/>
-                      <a:round/>
-                      <a:headEnd type="none" w="med" len="med"/>
-                      <a:tailEnd type="none" w="med" len="med"/>
-                    </a:lnL>
-                    <a:lnR w="9525" cap="flat" cmpd="sng" algn="ctr">
-                      <a:solidFill>
-                        <a:srgbClr val="E3EDE6"/>
-                      </a:solidFill>
-                      <a:prstDash val="solid"/>
-                      <a:round/>
-                      <a:headEnd type="none" w="med" len="med"/>
-                      <a:tailEnd type="none" w="med" len="med"/>
-                    </a:lnR>
-                    <a:lnT w="9525" cap="flat" cmpd="sng" algn="ctr">
-                      <a:solidFill>
-                        <a:srgbClr val="E3EDE6"/>
-                      </a:solidFill>
-                      <a:prstDash val="solid"/>
-                      <a:round/>
-                      <a:headEnd type="none" w="med" len="med"/>
-                      <a:tailEnd type="none" w="med" len="med"/>
-                    </a:lnT>
-                    <a:lnB w="9525" cap="flat" cmpd="sng" algn="ctr">
-                      <a:solidFill>
-                        <a:srgbClr val="E3EDE6"/>
-                      </a:solidFill>
-                      <a:prstDash val="solid"/>
-                      <a:round/>
-                      <a:headEnd type="none" w="med" len="med"/>
-                      <a:tailEnd type="none" w="med" len="med"/>
-                    </a:lnB>
-                    <a:solidFill>
-                      <a:schemeClr val="bg1"/>
-                    </a:solidFill>
-                  </a:tcPr>
-                </a:tc>
-                <a:tc>
-                  <a:txBody>
-                    <a:bodyPr/>
-                    <a:lstStyle/>
-                    <a:p>
-                      <a:pPr indent="0" marL="0">
-                        <a:buNone/>
-                      </a:pPr>
-                      <a:r>
-                        <a:rPr lang="en-US" sz="1000" dirty="0">
-                          <a:solidFill>
-                            <a:schemeClr val="tx2"/>
-                          </a:solidFill>
-                        </a:rPr>
-                        <a:t>250,000</a:t>
-                      </a:r>
-                      <a:endParaRPr lang="en-US" sz="1000" dirty="0"/>
-                    </a:p>
-                  </a:txBody>
-                  <a:tcPr marL="128016" marR="128016" marT="54864" marB="54864" anchor="ctr">
-                    <a:lnL w="9525" cap="flat" cmpd="sng" algn="ctr">
-                      <a:solidFill>
-                        <a:srgbClr val="E3EDE6"/>
-                      </a:solidFill>
-                      <a:prstDash val="solid"/>
-                      <a:round/>
-                      <a:headEnd type="none" w="med" len="med"/>
-                      <a:tailEnd type="none" w="med" len="med"/>
-                    </a:lnL>
-                    <a:lnR w="9525" cap="flat" cmpd="sng" algn="ctr">
-                      <a:solidFill>
-                        <a:srgbClr val="E3EDE6"/>
-                      </a:solidFill>
-                      <a:prstDash val="solid"/>
-                      <a:round/>
-                      <a:headEnd type="none" w="med" len="med"/>
-                      <a:tailEnd type="none" w="med" len="med"/>
-                    </a:lnR>
-                    <a:lnT w="9525" cap="flat" cmpd="sng" algn="ctr">
-                      <a:solidFill>
-                        <a:srgbClr val="E3EDE6"/>
-                      </a:solidFill>
-                      <a:prstDash val="solid"/>
-                      <a:round/>
-                      <a:headEnd type="none" w="med" len="med"/>
-                      <a:tailEnd type="none" w="med" len="med"/>
-                    </a:lnT>
-                    <a:lnB w="9525" cap="flat" cmpd="sng" algn="ctr">
-                      <a:solidFill>
-                        <a:srgbClr val="E3EDE6"/>
-                      </a:solidFill>
-                      <a:prstDash val="solid"/>
-                      <a:round/>
-                      <a:headEnd type="none" w="med" len="med"/>
-                      <a:tailEnd type="none" w="med" len="med"/>
-                    </a:lnB>
-                    <a:solidFill>
-                      <a:schemeClr val="bg1"/>
-                    </a:solidFill>
-                  </a:tcPr>
-                </a:tc>
-                <a:tc>
-                  <a:txBody>
-                    <a:bodyPr/>
-                    <a:lstStyle/>
-                    <a:p>
-                      <a:pPr indent="0" marL="0">
-                        <a:buNone/>
-                      </a:pPr>
-                      <a:r>
-                        <a:rPr lang="en-US" sz="1000" dirty="0">
-                          <a:solidFill>
-                            <a:schemeClr val="tx2"/>
-                          </a:solidFill>
-                        </a:rPr>
-                        <a:t>9,400</a:t>
-                      </a:r>
-                      <a:endParaRPr lang="en-US" sz="1000" dirty="0"/>
-                    </a:p>
-                  </a:txBody>
-                  <a:tcPr marL="128016" marR="128016" marT="54864" marB="54864" anchor="ctr">
-                    <a:lnL w="9525" cap="flat" cmpd="sng" algn="ctr">
-                      <a:solidFill>
-                        <a:srgbClr val="E3EDE6"/>
-                      </a:solidFill>
-                      <a:prstDash val="solid"/>
-                      <a:round/>
-                      <a:headEnd type="none" w="med" len="med"/>
-                      <a:tailEnd type="none" w="med" len="med"/>
-                    </a:lnL>
-                    <a:lnR w="9525" cap="flat" cmpd="sng" algn="ctr">
-                      <a:solidFill>
-                        <a:srgbClr val="E3EDE6"/>
-                      </a:solidFill>
-                      <a:prstDash val="solid"/>
-                      <a:round/>
-                      <a:headEnd type="none" w="med" len="med"/>
-                      <a:tailEnd type="none" w="med" len="med"/>
-                    </a:lnR>
-                    <a:lnT w="9525" cap="flat" cmpd="sng" algn="ctr">
-                      <a:solidFill>
-                        <a:srgbClr val="E3EDE6"/>
-                      </a:solidFill>
-                      <a:prstDash val="solid"/>
-                      <a:round/>
-                      <a:headEnd type="none" w="med" len="med"/>
-                      <a:tailEnd type="none" w="med" len="med"/>
-                    </a:lnT>
-                    <a:lnB w="9525" cap="flat" cmpd="sng" algn="ctr">
-                      <a:solidFill>
-                        <a:srgbClr val="E3EDE6"/>
-                      </a:solidFill>
-                      <a:prstDash val="solid"/>
-                      <a:round/>
-                      <a:headEnd type="none" w="med" len="med"/>
-                      <a:tailEnd type="none" w="med" len="med"/>
-                    </a:lnB>
-                    <a:solidFill>
-                      <a:schemeClr val="bg1"/>
-                    </a:solidFill>
-                  </a:tcPr>
-                </a:tc>
-              </a:tr>
-            </a:tbl>
-          </a:graphicData>
-        </a:graphic>
-      </p:graphicFrame>
-      <p:sp>
-        <p:nvSpPr>
-          <p:cNvPr id="15" name="Text 8"/>
-          <p:cNvSpPr txBox="1"/>
-          <p:nvPr/>
-        </p:nvSpPr>
-        <p:spPr>
-          <a:xfrm>
-            <a:off x="822960" y="5486400"/>
-            <a:ext cx="6309360" cy="384048"/>
-          </a:xfrm>
-          <a:prstGeom prst="rect">
-            <a:avLst/>
-          </a:prstGeom>
-          <a:noFill/>
-          <a:ln/>
-        </p:spPr>
-        <p:txBody>
-          <a:bodyPr wrap="square" lIns="0" tIns="0" rIns="0" bIns="0" rtlCol="0" anchor="t"/>
-          <a:lstStyle/>
-          <a:p>
-            <a:pPr indent="0" marL="0">
-              <a:buNone/>
-            </a:pPr>
-            <a:r>
-              <a:rPr lang="en-GB" altLang="en-US" sz="1000" dirty="0">
-                <a:solidFill>
-                  <a:schemeClr val="tx2"/>
-                </a:solidFill>
-              </a:rPr>
-              <a:t>The full report also lists every post with its link, platform and time, and ends with recommendations. Every figure comes from creator analytics, tracked links or ticketing data; anything modelled is labelled estimated.</a:t>
-            </a:r>
-            <a:endParaRPr lang="en-GB" sz="1000" dirty="0"/>
-          </a:p>
-        </p:txBody>
-      </p:sp>
-      <p:sp>
-        <p:nvSpPr>
-          <p:cNvPr id="16" name="Text 9"/>
-          <p:cNvSpPr txBox="1"/>
-          <p:nvPr/>
-        </p:nvSpPr>
-        <p:spPr>
-          <a:xfrm>
-            <a:off x="7269480" y="2770632"/>
-            <a:ext cx="2743200" cy="256032"/>
-          </a:xfrm>
-          <a:prstGeom prst="rect">
-            <a:avLst/>
-          </a:prstGeom>
-          <a:noFill/>
-          <a:ln/>
-        </p:spPr>
-        <p:txBody>
-          <a:bodyPr wrap="square" lIns="0" tIns="0" rIns="0" bIns="0" rtlCol="0" anchor="t"/>
-          <a:lstStyle/>
-          <a:p>
-            <a:pPr indent="0" marL="0">
-              <a:buNone/>
-            </a:pPr>
-            <a:r>
-              <a:rPr lang="en-GB" altLang="en-US" sz="1100" b="1" spc="300" kern="0" dirty="0">
-                <a:solidFill>
-                  <a:schemeClr val="accent3"/>
-                </a:solidFill>
-              </a:rPr>
-              <a:t>AUDIENCE</a:t>
-            </a:r>
-            <a:endParaRPr lang="en-GB" sz="1100" dirty="0"/>
-          </a:p>
-        </p:txBody>
-      </p:sp>
-      <p:sp>
-        <p:nvSpPr>
-          <p:cNvPr id="17" name="Text 10"/>
-          <p:cNvSpPr txBox="1"/>
-          <p:nvPr/>
-        </p:nvSpPr>
-        <p:spPr>
-          <a:xfrm>
-            <a:off x="7269480" y="3063240"/>
-            <a:ext cx="1417320" cy="219456"/>
-          </a:xfrm>
-          <a:prstGeom prst="rect">
-            <a:avLst/>
-          </a:prstGeom>
-          <a:noFill/>
-          <a:ln/>
-        </p:spPr>
-        <p:txBody>
-          <a:bodyPr wrap="square" lIns="0" tIns="0" rIns="0" bIns="0" rtlCol="0" anchor="ctr"/>
-          <a:lstStyle/>
-          <a:p>
-            <a:pPr indent="0" marL="0">
-              <a:buNone/>
-            </a:pPr>
-            <a:r>
-              <a:rPr lang="en-GB" altLang="en-US" sz="1000" dirty="0">
-                <a:solidFill>
-                  <a:schemeClr val="tx2"/>
-                </a:solidFill>
-              </a:rPr>
-              <a:t>Côte d’Ivoire</a:t>
-            </a:r>
-            <a:endParaRPr lang="en-GB" sz="1000" dirty="0"/>
-          </a:p>
-        </p:txBody>
-      </p:sp>
-      <p:sp>
-        <p:nvSpPr>
-          <p:cNvPr id="18" name="Shape 11"/>
-          <p:cNvSpPr/>
-          <p:nvPr/>
-        </p:nvSpPr>
-        <p:spPr>
-          <a:xfrm>
-            <a:off x="8732520" y="3099816"/>
-            <a:ext cx="1737360" cy="146304"/>
-          </a:xfrm>
-          <a:prstGeom prst="roundRect">
-            <a:avLst>
-              <a:gd name="adj" fmla="val 18750"/>
-            </a:avLst>
-          </a:prstGeom>
-          <a:solidFill>
-            <a:schemeClr val="accent2"/>
-          </a:solidFill>
-          <a:ln/>
-        </p:spPr>
-      </p:sp>
-      <p:sp>
-        <p:nvSpPr>
-          <p:cNvPr id="19" name="Text 12"/>
-          <p:cNvSpPr txBox="1"/>
-          <p:nvPr/>
-        </p:nvSpPr>
-        <p:spPr>
-          <a:xfrm>
-            <a:off x="10561320" y="3063240"/>
-            <a:ext cx="548640" cy="219456"/>
-          </a:xfrm>
-          <a:prstGeom prst="rect">
-            <a:avLst/>
-          </a:prstGeom>
-          <a:noFill/>
-          <a:ln/>
-        </p:spPr>
-        <p:txBody>
-          <a:bodyPr wrap="square" lIns="0" tIns="0" rIns="0" bIns="0" rtlCol="0" anchor="ctr"/>
-          <a:lstStyle/>
-          <a:p>
-            <a:pPr indent="0" marL="0">
-              <a:buNone/>
-            </a:pPr>
-            <a:r>
-              <a:rPr lang="en-GB" altLang="en-US" sz="1000" b="1" dirty="0">
-                <a:solidFill>
-                  <a:schemeClr val="tx1"/>
-                </a:solidFill>
-              </a:rPr>
-              <a:t>58%</a:t>
-            </a:r>
-            <a:endParaRPr lang="en-GB" sz="1000" dirty="0"/>
-          </a:p>
-        </p:txBody>
-      </p:sp>
-      <p:sp>
-        <p:nvSpPr>
-          <p:cNvPr id="20" name="Text 13"/>
-          <p:cNvSpPr txBox="1"/>
-          <p:nvPr/>
-        </p:nvSpPr>
-        <p:spPr>
-          <a:xfrm>
-            <a:off x="7269480" y="3374136"/>
-            <a:ext cx="1417320" cy="219456"/>
-          </a:xfrm>
-          <a:prstGeom prst="rect">
-            <a:avLst/>
-          </a:prstGeom>
-          <a:noFill/>
-          <a:ln/>
-        </p:spPr>
-        <p:txBody>
-          <a:bodyPr wrap="square" lIns="0" tIns="0" rIns="0" bIns="0" rtlCol="0" anchor="ctr"/>
-          <a:lstStyle/>
-          <a:p>
-            <a:pPr indent="0" marL="0">
-              <a:buNone/>
-            </a:pPr>
-            <a:r>
-              <a:rPr lang="en-GB" altLang="en-US" sz="1000" dirty="0">
-                <a:solidFill>
-                  <a:schemeClr val="tx2"/>
-                </a:solidFill>
-              </a:rPr>
-              <a:t>Diaspora abroad</a:t>
-            </a:r>
-            <a:endParaRPr lang="en-GB" sz="1000" dirty="0"/>
-          </a:p>
-        </p:txBody>
-      </p:sp>
-      <p:sp>
-        <p:nvSpPr>
-          <p:cNvPr id="21" name="Shape 14"/>
-          <p:cNvSpPr/>
-          <p:nvPr/>
-        </p:nvSpPr>
-        <p:spPr>
-          <a:xfrm>
-            <a:off x="8732520" y="3410712"/>
-            <a:ext cx="718908" cy="146304"/>
-          </a:xfrm>
-          <a:prstGeom prst="roundRect">
-            <a:avLst>
-              <a:gd name="adj" fmla="val 18750"/>
-            </a:avLst>
-          </a:prstGeom>
-          <a:solidFill>
-            <a:schemeClr val="accent1"/>
-          </a:solidFill>
-          <a:ln/>
-        </p:spPr>
-      </p:sp>
-      <p:sp>
-        <p:nvSpPr>
-          <p:cNvPr id="22" name="Text 15"/>
-          <p:cNvSpPr txBox="1"/>
-          <p:nvPr/>
-        </p:nvSpPr>
-        <p:spPr>
-          <a:xfrm>
-            <a:off x="9542868" y="3374136"/>
-            <a:ext cx="548640" cy="219456"/>
-          </a:xfrm>
-          <a:prstGeom prst="rect">
-            <a:avLst/>
-          </a:prstGeom>
-          <a:noFill/>
-          <a:ln/>
-        </p:spPr>
-        <p:txBody>
-          <a:bodyPr wrap="square" lIns="0" tIns="0" rIns="0" bIns="0" rtlCol="0" anchor="ctr"/>
-          <a:lstStyle/>
-          <a:p>
-            <a:pPr indent="0" marL="0">
-              <a:buNone/>
-            </a:pPr>
-            <a:r>
-              <a:rPr lang="en-GB" altLang="en-US" sz="1000" b="1" dirty="0">
-                <a:solidFill>
-                  <a:schemeClr val="tx1"/>
-                </a:solidFill>
-              </a:rPr>
-              <a:t>24%</a:t>
-            </a:r>
-            <a:endParaRPr lang="en-GB" sz="1000" dirty="0"/>
-          </a:p>
-        </p:txBody>
-      </p:sp>
-      <p:sp>
-        <p:nvSpPr>
-          <p:cNvPr id="23" name="Text 16"/>
-          <p:cNvSpPr txBox="1"/>
-          <p:nvPr/>
-        </p:nvSpPr>
-        <p:spPr>
-          <a:xfrm>
-            <a:off x="7269480" y="3685032"/>
-            <a:ext cx="1417320" cy="219456"/>
-          </a:xfrm>
-          <a:prstGeom prst="rect">
-            <a:avLst/>
-          </a:prstGeom>
-          <a:noFill/>
-          <a:ln/>
-        </p:spPr>
-        <p:txBody>
-          <a:bodyPr wrap="square" lIns="0" tIns="0" rIns="0" bIns="0" rtlCol="0" anchor="ctr"/>
-          <a:lstStyle/>
-          <a:p>
-            <a:pPr indent="0" marL="0">
-              <a:buNone/>
-            </a:pPr>
-            <a:r>
-              <a:rPr lang="en-GB" altLang="en-US" sz="1000" dirty="0">
-                <a:solidFill>
-                  <a:schemeClr val="tx2"/>
-                </a:solidFill>
-              </a:rPr>
-              <a:t>Rest of Africa</a:t>
-            </a:r>
-            <a:endParaRPr lang="en-GB" sz="1000" dirty="0"/>
-          </a:p>
-        </p:txBody>
-      </p:sp>
-      <p:sp>
-        <p:nvSpPr>
-          <p:cNvPr id="24" name="Shape 17"/>
-          <p:cNvSpPr/>
-          <p:nvPr/>
-        </p:nvSpPr>
-        <p:spPr>
-          <a:xfrm>
-            <a:off x="8732520" y="3721608"/>
-            <a:ext cx="539181" cy="146304"/>
-          </a:xfrm>
-          <a:prstGeom prst="roundRect">
-            <a:avLst>
-              <a:gd name="adj" fmla="val 18750"/>
-            </a:avLst>
-          </a:prstGeom>
-          <a:solidFill>
-            <a:schemeClr val="accent1"/>
-          </a:solidFill>
-          <a:ln/>
-        </p:spPr>
-      </p:sp>
-      <p:sp>
-        <p:nvSpPr>
-          <p:cNvPr id="25" name="Text 18"/>
-          <p:cNvSpPr txBox="1"/>
-          <p:nvPr/>
-        </p:nvSpPr>
-        <p:spPr>
-          <a:xfrm>
-            <a:off x="9363141" y="3685032"/>
-            <a:ext cx="548640" cy="219456"/>
-          </a:xfrm>
-          <a:prstGeom prst="rect">
-            <a:avLst/>
-          </a:prstGeom>
-          <a:noFill/>
-          <a:ln/>
-        </p:spPr>
-        <p:txBody>
-          <a:bodyPr wrap="square" lIns="0" tIns="0" rIns="0" bIns="0" rtlCol="0" anchor="ctr"/>
-          <a:lstStyle/>
-          <a:p>
-            <a:pPr indent="0" marL="0">
-              <a:buNone/>
-            </a:pPr>
-            <a:r>
-              <a:rPr lang="en-GB" altLang="en-US" sz="1000" b="1" dirty="0">
-                <a:solidFill>
-                  <a:schemeClr val="tx1"/>
-                </a:solidFill>
-              </a:rPr>
-              <a:t>18%</a:t>
-            </a:r>
-            <a:endParaRPr lang="en-GB" sz="1000" dirty="0"/>
-          </a:p>
-        </p:txBody>
-      </p:sp>
-      <p:sp>
-        <p:nvSpPr>
-          <p:cNvPr id="26" name="Text 19"/>
-          <p:cNvSpPr txBox="1"/>
-          <p:nvPr/>
-        </p:nvSpPr>
-        <p:spPr>
-          <a:xfrm>
-            <a:off x="7269480" y="4069080"/>
-            <a:ext cx="2743200" cy="256032"/>
-          </a:xfrm>
-          <a:prstGeom prst="rect">
-            <a:avLst/>
-          </a:prstGeom>
-          <a:noFill/>
-          <a:ln/>
-        </p:spPr>
-        <p:txBody>
-          <a:bodyPr wrap="square" lIns="0" tIns="0" rIns="0" bIns="0" rtlCol="0" anchor="t"/>
-          <a:lstStyle/>
-          <a:p>
-            <a:pPr indent="0" marL="0">
-              <a:buNone/>
-            </a:pPr>
-            <a:r>
-              <a:rPr lang="en-GB" altLang="en-US" sz="1100" b="1" spc="300" kern="0" dirty="0">
-                <a:solidFill>
-                  <a:schemeClr val="accent3"/>
-                </a:solidFill>
-              </a:rPr>
-              <a:t>SPONSOR VALUE</a:t>
-            </a:r>
-            <a:endParaRPr lang="en-GB" sz="1100" dirty="0"/>
-          </a:p>
-        </p:txBody>
-      </p:sp>
-      <p:graphicFrame>
-        <p:nvGraphicFramePr>
-          <p:cNvPr id="25" name="Sample table by sponsor"/>
-          <p:cNvGraphicFramePr>
-            <a:graphicFrameLocks noGrp="1"/>
-          </p:cNvGraphicFramePr>
-          <p:nvPr>
-            <p:extLst>
-              <p:ext uri="{D42A27DB-BD31-4B8C-83A1-F6EECF244321}">
-                <p14:modId xmlns:p14="http://schemas.microsoft.com/office/powerpoint/2010/main" val="1579011935"/>
-              </p:ext>
-            </p:extLst>
-          </p:nvPr>
-        </p:nvGraphicFramePr>
-        <p:xfrm>
-          <a:off x="7269480" y="4343400"/>
-          <a:ext cx="4099255" cy="914400"/>
-        </p:xfrm>
-        <a:graphic>
-          <a:graphicData uri="http://schemas.openxmlformats.org/drawingml/2006/table">
-            <a:tbl>
-              <a:tblPr/>
-              <a:tblGrid>
-                <a:gridCol w="960120"/>
-                <a:gridCol w="868680"/>
-                <a:gridCol w="914400"/>
-                <a:gridCol w="1356055"/>
-              </a:tblGrid>
-              <a:tr h="274320">
-                <a:tc>
-                  <a:txBody>
-                    <a:bodyPr/>
-                    <a:lstStyle/>
-                    <a:p>
-                      <a:pPr indent="0" marL="0">
-                        <a:buNone/>
-                      </a:pPr>
-                      <a:r>
-                        <a:rPr lang="en-US" sz="1000" b="1" dirty="0">
-                          <a:solidFill>
-                            <a:schemeClr val="bg1"/>
-                          </a:solidFill>
-                        </a:rPr>
-                        <a:t>Partner</a:t>
-                      </a:r>
-                      <a:endParaRPr lang="en-US" sz="1000" dirty="0"/>
-                    </a:p>
-                  </a:txBody>
-                  <a:tcPr marL="128016" marR="128016" marT="54864" marB="54864" anchor="ctr">
-                    <a:lnL w="9525" cap="flat" cmpd="sng" algn="ctr">
-                      <a:solidFill>
-                        <a:srgbClr val="E3EDE6"/>
-                      </a:solidFill>
-                      <a:prstDash val="solid"/>
-                      <a:round/>
-                      <a:headEnd type="none" w="med" len="med"/>
-                      <a:tailEnd type="none" w="med" len="med"/>
-                    </a:lnL>
-                    <a:lnR w="9525" cap="flat" cmpd="sng" algn="ctr">
-                      <a:solidFill>
-                        <a:srgbClr val="E3EDE6"/>
-                      </a:solidFill>
-                      <a:prstDash val="solid"/>
-                      <a:round/>
-                      <a:headEnd type="none" w="med" len="med"/>
-                      <a:tailEnd type="none" w="med" len="med"/>
-                    </a:lnR>
-                    <a:lnT w="9525" cap="flat" cmpd="sng" algn="ctr">
-                      <a:solidFill>
-                        <a:srgbClr val="E3EDE6"/>
-                      </a:solidFill>
-                      <a:prstDash val="solid"/>
-                      <a:round/>
-                      <a:headEnd type="none" w="med" len="med"/>
-                      <a:tailEnd type="none" w="med" len="med"/>
-                    </a:lnT>
-                    <a:lnB w="9525" cap="flat" cmpd="sng" algn="ctr">
-                      <a:solidFill>
-                        <a:srgbClr val="E3EDE6"/>
-                      </a:solidFill>
-                      <a:prstDash val="solid"/>
-                      <a:round/>
-                      <a:headEnd type="none" w="med" len="med"/>
-                      <a:tailEnd type="none" w="med" len="med"/>
-                    </a:lnB>
-                    <a:solidFill>
-                      <a:schemeClr val="tx1"/>
-                    </a:solidFill>
-                  </a:tcPr>
-                </a:tc>
-                <a:tc>
-                  <a:txBody>
-                    <a:bodyPr/>
-                    <a:lstStyle/>
-                    <a:p>
-                      <a:pPr indent="0" marL="0">
-                        <a:buNone/>
-                      </a:pPr>
-                      <a:r>
-                        <a:rPr lang="en-US" sz="1000" b="1" dirty="0">
-                          <a:solidFill>
-                            <a:schemeClr val="bg1"/>
-                          </a:solidFill>
-                        </a:rPr>
-                        <a:t>Moments</a:t>
-                      </a:r>
-                      <a:endParaRPr lang="en-US" sz="1000" dirty="0"/>
-                    </a:p>
-                  </a:txBody>
-                  <a:tcPr marL="128016" marR="128016" marT="54864" marB="54864" anchor="ctr">
-                    <a:lnL w="9525" cap="flat" cmpd="sng" algn="ctr">
-                      <a:solidFill>
-                        <a:srgbClr val="E3EDE6"/>
-                      </a:solidFill>
-                      <a:prstDash val="solid"/>
-                      <a:round/>
-                      <a:headEnd type="none" w="med" len="med"/>
-                      <a:tailEnd type="none" w="med" len="med"/>
-                    </a:lnL>
-                    <a:lnR w="9525" cap="flat" cmpd="sng" algn="ctr">
-                      <a:solidFill>
-                        <a:srgbClr val="E3EDE6"/>
-                      </a:solidFill>
-                      <a:prstDash val="solid"/>
-                      <a:round/>
-                      <a:headEnd type="none" w="med" len="med"/>
-                      <a:tailEnd type="none" w="med" len="med"/>
-                    </a:lnR>
-                    <a:lnT w="9525" cap="flat" cmpd="sng" algn="ctr">
-                      <a:solidFill>
-                        <a:srgbClr val="E3EDE6"/>
-                      </a:solidFill>
-                      <a:prstDash val="solid"/>
-                      <a:round/>
-                      <a:headEnd type="none" w="med" len="med"/>
-                      <a:tailEnd type="none" w="med" len="med"/>
-                    </a:lnT>
-                    <a:lnB w="9525" cap="flat" cmpd="sng" algn="ctr">
-                      <a:solidFill>
-                        <a:srgbClr val="E3EDE6"/>
-                      </a:solidFill>
-                      <a:prstDash val="solid"/>
-                      <a:round/>
-                      <a:headEnd type="none" w="med" len="med"/>
-                      <a:tailEnd type="none" w="med" len="med"/>
-                    </a:lnB>
-                    <a:solidFill>
-                      <a:schemeClr val="tx1"/>
-                    </a:solidFill>
-                  </a:tcPr>
-                </a:tc>
-                <a:tc>
-                  <a:txBody>
-                    <a:bodyPr/>
-                    <a:lstStyle/>
-                    <a:p>
-                      <a:pPr indent="0" marL="0">
-                        <a:buNone/>
-                      </a:pPr>
-                      <a:r>
-                        <a:rPr lang="en-US" sz="1000" b="1" dirty="0">
-                          <a:solidFill>
-                            <a:schemeClr val="bg1"/>
-                          </a:solidFill>
-                        </a:rPr>
-                        <a:t>Screen time</a:t>
-                      </a:r>
-                      <a:endParaRPr lang="en-US" sz="1000" dirty="0"/>
-                    </a:p>
-                  </a:txBody>
-                  <a:tcPr marL="128016" marR="128016" marT="54864" marB="54864" anchor="ctr">
-                    <a:lnL w="9525" cap="flat" cmpd="sng" algn="ctr">
-                      <a:solidFill>
-                        <a:srgbClr val="E3EDE6"/>
-                      </a:solidFill>
-                      <a:prstDash val="solid"/>
-                      <a:round/>
-                      <a:headEnd type="none" w="med" len="med"/>
-                      <a:tailEnd type="none" w="med" len="med"/>
-                    </a:lnL>
-                    <a:lnR w="9525" cap="flat" cmpd="sng" algn="ctr">
-                      <a:solidFill>
-                        <a:srgbClr val="E3EDE6"/>
-                      </a:solidFill>
-                      <a:prstDash val="solid"/>
-                      <a:round/>
-                      <a:headEnd type="none" w="med" len="med"/>
-                      <a:tailEnd type="none" w="med" len="med"/>
-                    </a:lnR>
-                    <a:lnT w="9525" cap="flat" cmpd="sng" algn="ctr">
-                      <a:solidFill>
-                        <a:srgbClr val="E3EDE6"/>
-                      </a:solidFill>
-                      <a:prstDash val="solid"/>
-                      <a:round/>
-                      <a:headEnd type="none" w="med" len="med"/>
-                      <a:tailEnd type="none" w="med" len="med"/>
-                    </a:lnT>
-                    <a:lnB w="9525" cap="flat" cmpd="sng" algn="ctr">
-                      <a:solidFill>
-                        <a:srgbClr val="E3EDE6"/>
-                      </a:solidFill>
-                      <a:prstDash val="solid"/>
-                      <a:round/>
-                      <a:headEnd type="none" w="med" len="med"/>
-                      <a:tailEnd type="none" w="med" len="med"/>
-                    </a:lnB>
-                    <a:solidFill>
-                      <a:schemeClr val="tx1"/>
-                    </a:solidFill>
-                  </a:tcPr>
-                </a:tc>
-                <a:tc>
-                  <a:txBody>
-                    <a:bodyPr/>
-                    <a:lstStyle/>
-                    <a:p>
-                      <a:pPr indent="0" marL="0">
-                        <a:buNone/>
-                      </a:pPr>
-                      <a:r>
-                        <a:rPr lang="en-US" sz="1000" b="1" dirty="0">
-                          <a:solidFill>
-                            <a:schemeClr val="bg1"/>
-                          </a:solidFill>
-                        </a:rPr>
-                        <a:t>Media value, estimated</a:t>
-                      </a:r>
-                      <a:endParaRPr lang="en-US" sz="1000" dirty="0"/>
-                    </a:p>
-                  </a:txBody>
-                  <a:tcPr marL="128016" marR="128016" marT="54864" marB="54864" anchor="ctr">
-                    <a:lnL w="9525" cap="flat" cmpd="sng" algn="ctr">
-                      <a:solidFill>
-                        <a:srgbClr val="E3EDE6"/>
-                      </a:solidFill>
-                      <a:prstDash val="solid"/>
-                      <a:round/>
-                      <a:headEnd type="none" w="med" len="med"/>
-                      <a:tailEnd type="none" w="med" len="med"/>
-                    </a:lnL>
-                    <a:lnR w="9525" cap="flat" cmpd="sng" algn="ctr">
-                      <a:solidFill>
-                        <a:srgbClr val="E3EDE6"/>
-                      </a:solidFill>
-                      <a:prstDash val="solid"/>
-                      <a:round/>
-                      <a:headEnd type="none" w="med" len="med"/>
-                      <a:tailEnd type="none" w="med" len="med"/>
-                    </a:lnR>
-                    <a:lnT w="9525" cap="flat" cmpd="sng" algn="ctr">
-                      <a:solidFill>
-                        <a:srgbClr val="E3EDE6"/>
-                      </a:solidFill>
-                      <a:prstDash val="solid"/>
-                      <a:round/>
-                      <a:headEnd type="none" w="med" len="med"/>
-                      <a:tailEnd type="none" w="med" len="med"/>
-                    </a:lnT>
-                    <a:lnB w="9525" cap="flat" cmpd="sng" algn="ctr">
-                      <a:solidFill>
-                        <a:srgbClr val="E3EDE6"/>
-                      </a:solidFill>
-                      <a:prstDash val="solid"/>
-                      <a:round/>
-                      <a:headEnd type="none" w="med" len="med"/>
-                      <a:tailEnd type="none" w="med" len="med"/>
-                    </a:lnB>
-                    <a:solidFill>
-                      <a:schemeClr val="tx1"/>
-                    </a:solidFill>
-                  </a:tcPr>
-                </a:tc>
-              </a:tr>
-              <a:tr h="274320">
-                <a:tc>
-                  <a:txBody>
-                    <a:bodyPr/>
-                    <a:lstStyle/>
-                    <a:p>
-                      <a:pPr indent="0" marL="0">
-                        <a:buNone/>
-                      </a:pPr>
-                      <a:r>
-                        <a:rPr lang="en-US" sz="1000" b="1" dirty="0">
-                          <a:solidFill>
-                            <a:schemeClr val="tx1"/>
-                          </a:solidFill>
-                        </a:rPr>
-                        <a:t>Partner A</a:t>
-                      </a:r>
-                      <a:endParaRPr lang="en-US" sz="1000" dirty="0"/>
-                    </a:p>
-                  </a:txBody>
-                  <a:tcPr marL="128016" marR="128016" marT="54864" marB="54864" anchor="ctr">
-                    <a:lnL w="9525" cap="flat" cmpd="sng" algn="ctr">
-                      <a:solidFill>
-                        <a:srgbClr val="E3EDE6"/>
-                      </a:solidFill>
-                      <a:prstDash val="solid"/>
-                      <a:round/>
-                      <a:headEnd type="none" w="med" len="med"/>
-                      <a:tailEnd type="none" w="med" len="med"/>
-                    </a:lnL>
-                    <a:lnR w="9525" cap="flat" cmpd="sng" algn="ctr">
-                      <a:solidFill>
-                        <a:srgbClr val="E3EDE6"/>
-                      </a:solidFill>
-                      <a:prstDash val="solid"/>
-                      <a:round/>
-                      <a:headEnd type="none" w="med" len="med"/>
-                      <a:tailEnd type="none" w="med" len="med"/>
-                    </a:lnR>
-                    <a:lnT w="9525" cap="flat" cmpd="sng" algn="ctr">
-                      <a:solidFill>
-                        <a:srgbClr val="E3EDE6"/>
-                      </a:solidFill>
-                      <a:prstDash val="solid"/>
-                      <a:round/>
-                      <a:headEnd type="none" w="med" len="med"/>
-                      <a:tailEnd type="none" w="med" len="med"/>
-                    </a:lnT>
-                    <a:lnB w="9525" cap="flat" cmpd="sng" algn="ctr">
-                      <a:solidFill>
-                        <a:srgbClr val="E3EDE6"/>
-                      </a:solidFill>
-                      <a:prstDash val="solid"/>
-                      <a:round/>
-                      <a:headEnd type="none" w="med" len="med"/>
-                      <a:tailEnd type="none" w="med" len="med"/>
-                    </a:lnB>
-                    <a:solidFill>
-                      <a:schemeClr val="bg1"/>
-                    </a:solidFill>
-                  </a:tcPr>
-                </a:tc>
-                <a:tc>
-                  <a:txBody>
-                    <a:bodyPr/>
-                    <a:lstStyle/>
-                    <a:p>
-                      <a:pPr indent="0" marL="0">
-                        <a:buNone/>
-                      </a:pPr>
-                      <a:r>
-                        <a:rPr lang="en-US" sz="1000" dirty="0">
-                          <a:solidFill>
-                            <a:schemeClr val="tx2"/>
-                          </a:solidFill>
-                        </a:rPr>
-                        <a:t>42</a:t>
-                      </a:r>
-                      <a:endParaRPr lang="en-US" sz="1000" dirty="0"/>
-                    </a:p>
-                  </a:txBody>
-                  <a:tcPr marL="128016" marR="128016" marT="54864" marB="54864" anchor="ctr">
-                    <a:lnL w="9525" cap="flat" cmpd="sng" algn="ctr">
-                      <a:solidFill>
-                        <a:srgbClr val="E3EDE6"/>
-                      </a:solidFill>
-                      <a:prstDash val="solid"/>
-                      <a:round/>
-                      <a:headEnd type="none" w="med" len="med"/>
-                      <a:tailEnd type="none" w="med" len="med"/>
-                    </a:lnL>
-                    <a:lnR w="9525" cap="flat" cmpd="sng" algn="ctr">
-                      <a:solidFill>
-                        <a:srgbClr val="E3EDE6"/>
-                      </a:solidFill>
-                      <a:prstDash val="solid"/>
-                      <a:round/>
-                      <a:headEnd type="none" w="med" len="med"/>
-                      <a:tailEnd type="none" w="med" len="med"/>
-                    </a:lnR>
-                    <a:lnT w="9525" cap="flat" cmpd="sng" algn="ctr">
-                      <a:solidFill>
-                        <a:srgbClr val="E3EDE6"/>
-                      </a:solidFill>
-                      <a:prstDash val="solid"/>
-                      <a:round/>
-                      <a:headEnd type="none" w="med" len="med"/>
-                      <a:tailEnd type="none" w="med" len="med"/>
-                    </a:lnT>
-                    <a:lnB w="9525" cap="flat" cmpd="sng" algn="ctr">
-                      <a:solidFill>
-                        <a:srgbClr val="E3EDE6"/>
-                      </a:solidFill>
-                      <a:prstDash val="solid"/>
-                      <a:round/>
-                      <a:headEnd type="none" w="med" len="med"/>
-                      <a:tailEnd type="none" w="med" len="med"/>
-                    </a:lnB>
-                    <a:solidFill>
-                      <a:schemeClr val="bg1"/>
-                    </a:solidFill>
-                  </a:tcPr>
-                </a:tc>
-                <a:tc>
-                  <a:txBody>
-                    <a:bodyPr/>
-                    <a:lstStyle/>
-                    <a:p>
-                      <a:pPr indent="0" marL="0">
-                        <a:buNone/>
-                      </a:pPr>
-                      <a:r>
-                        <a:rPr lang="en-US" sz="1000" dirty="0">
-                          <a:solidFill>
-                            <a:schemeClr val="tx2"/>
-                          </a:solidFill>
-                        </a:rPr>
-                        <a:t>6 min 10 s</a:t>
-                      </a:r>
-                      <a:endParaRPr lang="en-US" sz="1000" dirty="0"/>
-                    </a:p>
-                  </a:txBody>
-                  <a:tcPr marL="128016" marR="128016" marT="54864" marB="54864" anchor="ctr">
-                    <a:lnL w="9525" cap="flat" cmpd="sng" algn="ctr">
-                      <a:solidFill>
-                        <a:srgbClr val="E3EDE6"/>
-                      </a:solidFill>
-                      <a:prstDash val="solid"/>
-                      <a:round/>
-                      <a:headEnd type="none" w="med" len="med"/>
-                      <a:tailEnd type="none" w="med" len="med"/>
-                    </a:lnL>
-                    <a:lnR w="9525" cap="flat" cmpd="sng" algn="ctr">
-                      <a:solidFill>
-                        <a:srgbClr val="E3EDE6"/>
-                      </a:solidFill>
-                      <a:prstDash val="solid"/>
-                      <a:round/>
-                      <a:headEnd type="none" w="med" len="med"/>
-                      <a:tailEnd type="none" w="med" len="med"/>
-                    </a:lnR>
-                    <a:lnT w="9525" cap="flat" cmpd="sng" algn="ctr">
-                      <a:solidFill>
-                        <a:srgbClr val="E3EDE6"/>
-                      </a:solidFill>
-                      <a:prstDash val="solid"/>
-                      <a:round/>
-                      <a:headEnd type="none" w="med" len="med"/>
-                      <a:tailEnd type="none" w="med" len="med"/>
-                    </a:lnT>
-                    <a:lnB w="9525" cap="flat" cmpd="sng" algn="ctr">
-                      <a:solidFill>
-                        <a:srgbClr val="E3EDE6"/>
-                      </a:solidFill>
-                      <a:prstDash val="solid"/>
-                      <a:round/>
-                      <a:headEnd type="none" w="med" len="med"/>
-                      <a:tailEnd type="none" w="med" len="med"/>
-                    </a:lnB>
-                    <a:solidFill>
-                      <a:schemeClr val="bg1"/>
-                    </a:solidFill>
-                  </a:tcPr>
-                </a:tc>
-                <a:tc>
-                  <a:txBody>
-                    <a:bodyPr/>
-                    <a:lstStyle/>
-                    <a:p>
-                      <a:pPr indent="0" marL="0">
-                        <a:buNone/>
-                      </a:pPr>
-                      <a:r>
-                        <a:rPr lang="en-US" sz="1000" dirty="0">
-                          <a:solidFill>
-                            <a:schemeClr val="tx2"/>
-                          </a:solidFill>
-                        </a:rPr>
-                        <a:t>18.5M FCFA</a:t>
-                      </a:r>
-                      <a:endParaRPr lang="en-US" sz="1000" dirty="0"/>
-                    </a:p>
-                  </a:txBody>
-                  <a:tcPr marL="128016" marR="128016" marT="54864" marB="54864" anchor="ctr">
-                    <a:lnL w="9525" cap="flat" cmpd="sng" algn="ctr">
-                      <a:solidFill>
-                        <a:srgbClr val="E3EDE6"/>
-                      </a:solidFill>
-                      <a:prstDash val="solid"/>
-                      <a:round/>
-                      <a:headEnd type="none" w="med" len="med"/>
-                      <a:tailEnd type="none" w="med" len="med"/>
-                    </a:lnL>
-                    <a:lnR w="9525" cap="flat" cmpd="sng" algn="ctr">
-                      <a:solidFill>
-                        <a:srgbClr val="E3EDE6"/>
-                      </a:solidFill>
-                      <a:prstDash val="solid"/>
-                      <a:round/>
-                      <a:headEnd type="none" w="med" len="med"/>
-                      <a:tailEnd type="none" w="med" len="med"/>
-                    </a:lnR>
-                    <a:lnT w="9525" cap="flat" cmpd="sng" algn="ctr">
-                      <a:solidFill>
-                        <a:srgbClr val="E3EDE6"/>
-                      </a:solidFill>
-                      <a:prstDash val="solid"/>
-                      <a:round/>
-                      <a:headEnd type="none" w="med" len="med"/>
-                      <a:tailEnd type="none" w="med" len="med"/>
-                    </a:lnT>
-                    <a:lnB w="9525" cap="flat" cmpd="sng" algn="ctr">
-                      <a:solidFill>
-                        <a:srgbClr val="E3EDE6"/>
-                      </a:solidFill>
-                      <a:prstDash val="solid"/>
-                      <a:round/>
-                      <a:headEnd type="none" w="med" len="med"/>
-                      <a:tailEnd type="none" w="med" len="med"/>
-                    </a:lnB>
-                    <a:solidFill>
-                      <a:schemeClr val="bg1"/>
-                    </a:solidFill>
-                  </a:tcPr>
-                </a:tc>
-              </a:tr>
-              <a:tr h="274320">
-                <a:tc>
-                  <a:txBody>
-                    <a:bodyPr/>
-                    <a:lstStyle/>
-                    <a:p>
-                      <a:pPr indent="0" marL="0">
-                        <a:buNone/>
-                      </a:pPr>
-                      <a:r>
-                        <a:rPr lang="en-US" sz="1000" b="1" dirty="0">
-                          <a:solidFill>
-                            <a:schemeClr val="tx1"/>
-                          </a:solidFill>
-                        </a:rPr>
-                        <a:t>Partner B</a:t>
-                      </a:r>
-                      <a:endParaRPr lang="en-US" sz="1000" dirty="0"/>
-                    </a:p>
-                  </a:txBody>
-                  <a:tcPr marL="128016" marR="128016" marT="54864" marB="54864" anchor="ctr">
-                    <a:lnL w="9525" cap="flat" cmpd="sng" algn="ctr">
-                      <a:solidFill>
-                        <a:srgbClr val="E3EDE6"/>
-                      </a:solidFill>
-                      <a:prstDash val="solid"/>
-                      <a:round/>
-                      <a:headEnd type="none" w="med" len="med"/>
-                      <a:tailEnd type="none" w="med" len="med"/>
-                    </a:lnL>
-                    <a:lnR w="9525" cap="flat" cmpd="sng" algn="ctr">
-                      <a:solidFill>
-                        <a:srgbClr val="E3EDE6"/>
-                      </a:solidFill>
-                      <a:prstDash val="solid"/>
-                      <a:round/>
-                      <a:headEnd type="none" w="med" len="med"/>
-                      <a:tailEnd type="none" w="med" len="med"/>
-                    </a:lnR>
-                    <a:lnT w="9525" cap="flat" cmpd="sng" algn="ctr">
-                      <a:solidFill>
-                        <a:srgbClr val="E3EDE6"/>
-                      </a:solidFill>
-                      <a:prstDash val="solid"/>
-                      <a:round/>
-                      <a:headEnd type="none" w="med" len="med"/>
-                      <a:tailEnd type="none" w="med" len="med"/>
-                    </a:lnT>
-                    <a:lnB w="9525" cap="flat" cmpd="sng" algn="ctr">
-                      <a:solidFill>
-                        <a:srgbClr val="E3EDE6"/>
-                      </a:solidFill>
-                      <a:prstDash val="solid"/>
-                      <a:round/>
-                      <a:headEnd type="none" w="med" len="med"/>
-                      <a:tailEnd type="none" w="med" len="med"/>
-                    </a:lnB>
-                    <a:solidFill>
-                      <a:schemeClr val="bg1"/>
-                    </a:solidFill>
-                  </a:tcPr>
-                </a:tc>
-                <a:tc>
-                  <a:txBody>
-                    <a:bodyPr/>
-                    <a:lstStyle/>
-                    <a:p>
-                      <a:pPr indent="0" marL="0">
-                        <a:buNone/>
-                      </a:pPr>
-                      <a:r>
-                        <a:rPr lang="en-US" sz="1000" dirty="0">
-                          <a:solidFill>
-                            <a:schemeClr val="tx2"/>
-                          </a:solidFill>
-                        </a:rPr>
-                        <a:t>31</a:t>
-                      </a:r>
-                      <a:endParaRPr lang="en-US" sz="1000" dirty="0"/>
-                    </a:p>
-                  </a:txBody>
-                  <a:tcPr marL="128016" marR="128016" marT="54864" marB="54864" anchor="ctr">
-                    <a:lnL w="9525" cap="flat" cmpd="sng" algn="ctr">
-                      <a:solidFill>
-                        <a:srgbClr val="E3EDE6"/>
-                      </a:solidFill>
-                      <a:prstDash val="solid"/>
-                      <a:round/>
-                      <a:headEnd type="none" w="med" len="med"/>
-                      <a:tailEnd type="none" w="med" len="med"/>
-                    </a:lnL>
-                    <a:lnR w="9525" cap="flat" cmpd="sng" algn="ctr">
-                      <a:solidFill>
-                        <a:srgbClr val="E3EDE6"/>
-                      </a:solidFill>
-                      <a:prstDash val="solid"/>
-                      <a:round/>
-                      <a:headEnd type="none" w="med" len="med"/>
-                      <a:tailEnd type="none" w="med" len="med"/>
-                    </a:lnR>
-                    <a:lnT w="9525" cap="flat" cmpd="sng" algn="ctr">
-                      <a:solidFill>
-                        <a:srgbClr val="E3EDE6"/>
-                      </a:solidFill>
-                      <a:prstDash val="solid"/>
-                      <a:round/>
-                      <a:headEnd type="none" w="med" len="med"/>
-                      <a:tailEnd type="none" w="med" len="med"/>
-                    </a:lnT>
-                    <a:lnB w="9525" cap="flat" cmpd="sng" algn="ctr">
-                      <a:solidFill>
-                        <a:srgbClr val="E3EDE6"/>
-                      </a:solidFill>
-                      <a:prstDash val="solid"/>
-                      <a:round/>
-                      <a:headEnd type="none" w="med" len="med"/>
-                      <a:tailEnd type="none" w="med" len="med"/>
-                    </a:lnB>
-                    <a:solidFill>
-                      <a:schemeClr val="bg1"/>
-                    </a:solidFill>
-                  </a:tcPr>
-                </a:tc>
-                <a:tc>
-                  <a:txBody>
-                    <a:bodyPr/>
-                    <a:lstStyle/>
-                    <a:p>
-                      <a:pPr indent="0" marL="0">
-                        <a:buNone/>
-                      </a:pPr>
-                      <a:r>
-                        <a:rPr lang="en-US" sz="1000" dirty="0">
-                          <a:solidFill>
-                            <a:schemeClr val="tx2"/>
-                          </a:solidFill>
-                        </a:rPr>
-                        <a:t>4 min 25 s</a:t>
-                      </a:r>
-                      <a:endParaRPr lang="en-US" sz="1000" dirty="0"/>
-                    </a:p>
-                  </a:txBody>
-                  <a:tcPr marL="128016" marR="128016" marT="54864" marB="54864" anchor="ctr">
-                    <a:lnL w="9525" cap="flat" cmpd="sng" algn="ctr">
-                      <a:solidFill>
-                        <a:srgbClr val="E3EDE6"/>
-                      </a:solidFill>
-                      <a:prstDash val="solid"/>
-                      <a:round/>
-                      <a:headEnd type="none" w="med" len="med"/>
-                      <a:tailEnd type="none" w="med" len="med"/>
-                    </a:lnL>
-                    <a:lnR w="9525" cap="flat" cmpd="sng" algn="ctr">
-                      <a:solidFill>
-                        <a:srgbClr val="E3EDE6"/>
-                      </a:solidFill>
-                      <a:prstDash val="solid"/>
-                      <a:round/>
-                      <a:headEnd type="none" w="med" len="med"/>
-                      <a:tailEnd type="none" w="med" len="med"/>
-                    </a:lnR>
-                    <a:lnT w="9525" cap="flat" cmpd="sng" algn="ctr">
-                      <a:solidFill>
-                        <a:srgbClr val="E3EDE6"/>
-                      </a:solidFill>
-                      <a:prstDash val="solid"/>
-                      <a:round/>
-                      <a:headEnd type="none" w="med" len="med"/>
-                      <a:tailEnd type="none" w="med" len="med"/>
-                    </a:lnT>
-                    <a:lnB w="9525" cap="flat" cmpd="sng" algn="ctr">
-                      <a:solidFill>
-                        <a:srgbClr val="E3EDE6"/>
-                      </a:solidFill>
-                      <a:prstDash val="solid"/>
-                      <a:round/>
-                      <a:headEnd type="none" w="med" len="med"/>
-                      <a:tailEnd type="none" w="med" len="med"/>
-                    </a:lnB>
-                    <a:solidFill>
-                      <a:schemeClr val="bg1"/>
-                    </a:solidFill>
-                  </a:tcPr>
-                </a:tc>
-                <a:tc>
-                  <a:txBody>
-                    <a:bodyPr/>
-                    <a:lstStyle/>
-                    <a:p>
-                      <a:pPr indent="0" marL="0">
-                        <a:buNone/>
-                      </a:pPr>
-                      <a:r>
-                        <a:rPr lang="en-US" sz="1000" dirty="0">
-                          <a:solidFill>
-                            <a:schemeClr val="tx2"/>
-                          </a:solidFill>
-                        </a:rPr>
-                        <a:t>12.7M FCFA</a:t>
-                      </a:r>
-                      <a:endParaRPr lang="en-US" sz="1000" dirty="0"/>
-                    </a:p>
-                  </a:txBody>
-                  <a:tcPr marL="128016" marR="128016" marT="54864" marB="54864" anchor="ctr">
-                    <a:lnL w="9525" cap="flat" cmpd="sng" algn="ctr">
-                      <a:solidFill>
-                        <a:srgbClr val="E3EDE6"/>
-                      </a:solidFill>
-                      <a:prstDash val="solid"/>
-                      <a:round/>
-                      <a:headEnd type="none" w="med" len="med"/>
-                      <a:tailEnd type="none" w="med" len="med"/>
-                    </a:lnL>
-                    <a:lnR w="9525" cap="flat" cmpd="sng" algn="ctr">
-                      <a:solidFill>
-                        <a:srgbClr val="E3EDE6"/>
-                      </a:solidFill>
-                      <a:prstDash val="solid"/>
-                      <a:round/>
-                      <a:headEnd type="none" w="med" len="med"/>
-                      <a:tailEnd type="none" w="med" len="med"/>
-                    </a:lnR>
-                    <a:lnT w="9525" cap="flat" cmpd="sng" algn="ctr">
-                      <a:solidFill>
-                        <a:srgbClr val="E3EDE6"/>
-                      </a:solidFill>
-                      <a:prstDash val="solid"/>
-                      <a:round/>
-                      <a:headEnd type="none" w="med" len="med"/>
-                      <a:tailEnd type="none" w="med" len="med"/>
-                    </a:lnT>
-                    <a:lnB w="9525" cap="flat" cmpd="sng" algn="ctr">
-                      <a:solidFill>
-                        <a:srgbClr val="E3EDE6"/>
-                      </a:solidFill>
-                      <a:prstDash val="solid"/>
-                      <a:round/>
-                      <a:headEnd type="none" w="med" len="med"/>
-                      <a:tailEnd type="none" w="med" len="med"/>
-                    </a:lnB>
-                    <a:solidFill>
-                      <a:schemeClr val="bg1"/>
-                    </a:solidFill>
-                  </a:tcPr>
-                </a:tc>
-              </a:tr>
-              <a:tr h="274320">
-                <a:tc>
-                  <a:txBody>
-                    <a:bodyPr/>
-                    <a:lstStyle/>
-                    <a:p>
-                      <a:pPr indent="0" marL="0">
-                        <a:buNone/>
-                      </a:pPr>
-                      <a:r>
-                        <a:rPr lang="en-US" sz="1000" b="1" dirty="0">
-                          <a:solidFill>
-                            <a:schemeClr val="tx1"/>
-                          </a:solidFill>
-                        </a:rPr>
-                        <a:t>Partner C</a:t>
-                      </a:r>
-                      <a:endParaRPr lang="en-US" sz="1000" dirty="0"/>
-                    </a:p>
-                  </a:txBody>
-                  <a:tcPr marL="128016" marR="128016" marT="54864" marB="54864" anchor="ctr">
-                    <a:lnL w="9525" cap="flat" cmpd="sng" algn="ctr">
-                      <a:solidFill>
-                        <a:srgbClr val="E3EDE6"/>
-                      </a:solidFill>
-                      <a:prstDash val="solid"/>
-                      <a:round/>
-                      <a:headEnd type="none" w="med" len="med"/>
-                      <a:tailEnd type="none" w="med" len="med"/>
-                    </a:lnL>
-                    <a:lnR w="9525" cap="flat" cmpd="sng" algn="ctr">
-                      <a:solidFill>
-                        <a:srgbClr val="E3EDE6"/>
-                      </a:solidFill>
-                      <a:prstDash val="solid"/>
-                      <a:round/>
-                      <a:headEnd type="none" w="med" len="med"/>
-                      <a:tailEnd type="none" w="med" len="med"/>
-                    </a:lnR>
-                    <a:lnT w="9525" cap="flat" cmpd="sng" algn="ctr">
-                      <a:solidFill>
-                        <a:srgbClr val="E3EDE6"/>
-                      </a:solidFill>
-                      <a:prstDash val="solid"/>
-                      <a:round/>
-                      <a:headEnd type="none" w="med" len="med"/>
-                      <a:tailEnd type="none" w="med" len="med"/>
-                    </a:lnT>
-                    <a:lnB w="9525" cap="flat" cmpd="sng" algn="ctr">
-                      <a:solidFill>
-                        <a:srgbClr val="E3EDE6"/>
-                      </a:solidFill>
-                      <a:prstDash val="solid"/>
-                      <a:round/>
-                      <a:headEnd type="none" w="med" len="med"/>
-                      <a:tailEnd type="none" w="med" len="med"/>
-                    </a:lnB>
-                    <a:solidFill>
-                      <a:schemeClr val="bg1"/>
-                    </a:solidFill>
-                  </a:tcPr>
-                </a:tc>
-                <a:tc>
-                  <a:txBody>
-                    <a:bodyPr/>
-                    <a:lstStyle/>
-                    <a:p>
-                      <a:pPr indent="0" marL="0">
-                        <a:buNone/>
-                      </a:pPr>
-                      <a:r>
-                        <a:rPr lang="en-US" sz="1000" dirty="0">
-                          <a:solidFill>
-                            <a:schemeClr val="tx2"/>
-                          </a:solidFill>
-                        </a:rPr>
-                        <a:t>18</a:t>
-                      </a:r>
-                      <a:endParaRPr lang="en-US" sz="1000" dirty="0"/>
-                    </a:p>
-                  </a:txBody>
-                  <a:tcPr marL="128016" marR="128016" marT="54864" marB="54864" anchor="ctr">
-                    <a:lnL w="9525" cap="flat" cmpd="sng" algn="ctr">
-                      <a:solidFill>
-                        <a:srgbClr val="E3EDE6"/>
-                      </a:solidFill>
-                      <a:prstDash val="solid"/>
-                      <a:round/>
-                      <a:headEnd type="none" w="med" len="med"/>
-                      <a:tailEnd type="none" w="med" len="med"/>
-                    </a:lnL>
-                    <a:lnR w="9525" cap="flat" cmpd="sng" algn="ctr">
-                      <a:solidFill>
-                        <a:srgbClr val="E3EDE6"/>
-                      </a:solidFill>
-                      <a:prstDash val="solid"/>
-                      <a:round/>
-                      <a:headEnd type="none" w="med" len="med"/>
-                      <a:tailEnd type="none" w="med" len="med"/>
-                    </a:lnR>
-                    <a:lnT w="9525" cap="flat" cmpd="sng" algn="ctr">
-                      <a:solidFill>
-                        <a:srgbClr val="E3EDE6"/>
-                      </a:solidFill>
-                      <a:prstDash val="solid"/>
-                      <a:round/>
-                      <a:headEnd type="none" w="med" len="med"/>
-                      <a:tailEnd type="none" w="med" len="med"/>
-                    </a:lnT>
-                    <a:lnB w="9525" cap="flat" cmpd="sng" algn="ctr">
-                      <a:solidFill>
-                        <a:srgbClr val="E3EDE6"/>
-                      </a:solidFill>
-                      <a:prstDash val="solid"/>
-                      <a:round/>
-                      <a:headEnd type="none" w="med" len="med"/>
-                      <a:tailEnd type="none" w="med" len="med"/>
-                    </a:lnB>
-                    <a:solidFill>
-                      <a:schemeClr val="bg1"/>
-                    </a:solidFill>
-                  </a:tcPr>
-                </a:tc>
-                <a:tc>
-                  <a:txBody>
-                    <a:bodyPr/>
-                    <a:lstStyle/>
-                    <a:p>
-                      <a:pPr indent="0" marL="0">
-                        <a:buNone/>
-                      </a:pPr>
-                      <a:r>
-                        <a:rPr lang="en-US" sz="1000" dirty="0">
-                          <a:solidFill>
-                            <a:schemeClr val="tx2"/>
-                          </a:solidFill>
-                        </a:rPr>
-                        <a:t>2 min 40 s</a:t>
-                      </a:r>
-                      <a:endParaRPr lang="en-US" sz="1000" dirty="0"/>
-                    </a:p>
-                  </a:txBody>
-                  <a:tcPr marL="128016" marR="128016" marT="54864" marB="54864" anchor="ctr">
-                    <a:lnL w="9525" cap="flat" cmpd="sng" algn="ctr">
-                      <a:solidFill>
-                        <a:srgbClr val="E3EDE6"/>
-                      </a:solidFill>
-                      <a:prstDash val="solid"/>
-                      <a:round/>
-                      <a:headEnd type="none" w="med" len="med"/>
-                      <a:tailEnd type="none" w="med" len="med"/>
-                    </a:lnL>
-                    <a:lnR w="9525" cap="flat" cmpd="sng" algn="ctr">
-                      <a:solidFill>
-                        <a:srgbClr val="E3EDE6"/>
-                      </a:solidFill>
-                      <a:prstDash val="solid"/>
-                      <a:round/>
-                      <a:headEnd type="none" w="med" len="med"/>
-                      <a:tailEnd type="none" w="med" len="med"/>
-                    </a:lnR>
-                    <a:lnT w="9525" cap="flat" cmpd="sng" algn="ctr">
-                      <a:solidFill>
-                        <a:srgbClr val="E3EDE6"/>
-                      </a:solidFill>
-                      <a:prstDash val="solid"/>
-                      <a:round/>
-                      <a:headEnd type="none" w="med" len="med"/>
-                      <a:tailEnd type="none" w="med" len="med"/>
-                    </a:lnT>
-                    <a:lnB w="9525" cap="flat" cmpd="sng" algn="ctr">
-                      <a:solidFill>
-                        <a:srgbClr val="E3EDE6"/>
-                      </a:solidFill>
-                      <a:prstDash val="solid"/>
-                      <a:round/>
-                      <a:headEnd type="none" w="med" len="med"/>
-                      <a:tailEnd type="none" w="med" len="med"/>
-                    </a:lnB>
-                    <a:solidFill>
-                      <a:schemeClr val="bg1"/>
-                    </a:solidFill>
-                  </a:tcPr>
-                </a:tc>
-                <a:tc>
-                  <a:txBody>
-                    <a:bodyPr/>
-                    <a:lstStyle/>
-                    <a:p>
-                      <a:pPr indent="0" marL="0">
-                        <a:buNone/>
-                      </a:pPr>
-                      <a:r>
-                        <a:rPr lang="en-US" sz="1000" dirty="0">
-                          <a:solidFill>
-                            <a:schemeClr val="tx2"/>
-                          </a:solidFill>
-                        </a:rPr>
-                        <a:t>7.3M FCFA</a:t>
-                      </a:r>
-                      <a:endParaRPr lang="en-US" sz="1000" dirty="0"/>
-                    </a:p>
-                  </a:txBody>
-                  <a:tcPr marL="128016" marR="128016" marT="54864" marB="54864" anchor="ctr">
-                    <a:lnL w="9525" cap="flat" cmpd="sng" algn="ctr">
-                      <a:solidFill>
-                        <a:srgbClr val="E3EDE6"/>
-                      </a:solidFill>
-                      <a:prstDash val="solid"/>
-                      <a:round/>
-                      <a:headEnd type="none" w="med" len="med"/>
-                      <a:tailEnd type="none" w="med" len="med"/>
-                    </a:lnL>
-                    <a:lnR w="9525" cap="flat" cmpd="sng" algn="ctr">
-                      <a:solidFill>
-                        <a:srgbClr val="E3EDE6"/>
-                      </a:solidFill>
-                      <a:prstDash val="solid"/>
-                      <a:round/>
-                      <a:headEnd type="none" w="med" len="med"/>
-                      <a:tailEnd type="none" w="med" len="med"/>
-                    </a:lnR>
-                    <a:lnT w="9525" cap="flat" cmpd="sng" algn="ctr">
-                      <a:solidFill>
-                        <a:srgbClr val="E3EDE6"/>
-                      </a:solidFill>
-                      <a:prstDash val="solid"/>
-                      <a:round/>
-                      <a:headEnd type="none" w="med" len="med"/>
-                      <a:tailEnd type="none" w="med" len="med"/>
-                    </a:lnT>
-                    <a:lnB w="9525" cap="flat" cmpd="sng" algn="ctr">
-                      <a:solidFill>
-                        <a:srgbClr val="E3EDE6"/>
-                      </a:solidFill>
-                      <a:prstDash val="solid"/>
-                      <a:round/>
-                      <a:headEnd type="none" w="med" len="med"/>
-                      <a:tailEnd type="none" w="med" len="med"/>
-                    </a:lnB>
-                    <a:solidFill>
-                      <a:schemeClr val="bg1"/>
-                    </a:solidFill>
-                  </a:tcPr>
-                </a:tc>
-              </a:tr>
-            </a:tbl>
-          </a:graphicData>
-        </a:graphic>
-      </p:graphicFrame>
-      <p:sp>
-        <p:nvSpPr>
-          <p:cNvPr id="28" name="Text 20"/>
-          <p:cNvSpPr txBox="1"/>
-          <p:nvPr/>
-        </p:nvSpPr>
-        <p:spPr>
-          <a:xfrm>
-            <a:off x="822960" y="5925312"/>
-            <a:ext cx="3657600" cy="219456"/>
-          </a:xfrm>
-          <a:prstGeom prst="rect">
-            <a:avLst/>
-          </a:prstGeom>
-          <a:noFill/>
-          <a:ln/>
-        </p:spPr>
-        <p:txBody>
-          <a:bodyPr wrap="square" lIns="0" tIns="0" rIns="0" bIns="0" rtlCol="0" anchor="t"/>
-          <a:lstStyle/>
-          <a:p>
-            <a:pPr indent="0" marL="0">
-              <a:buNone/>
-            </a:pPr>
-            <a:r>
-              <a:rPr lang="en-GB" altLang="en-US" sz="1000" b="1" i="1" dirty="0">
-                <a:solidFill>
-                  <a:schemeClr val="accent3"/>
-                </a:solidFill>
-              </a:rPr>
-              <a:t>Sample layout. Figures are illustrative.</a:t>
-            </a:r>
-            <a:endParaRPr lang="en-GB" sz="1000" dirty="0"/>
-          </a:p>
-        </p:txBody>
-      </p:sp>
-      <p:sp>
-        <p:nvSpPr>
-          <p:cNvPr id="29" name="Text 21"/>
-          <p:cNvSpPr txBox="1"/>
-          <p:nvPr/>
-        </p:nvSpPr>
-        <p:spPr>
-          <a:xfrm>
-            <a:off x="9539935" y="5925312"/>
-            <a:ext cx="1828800" cy="219456"/>
-          </a:xfrm>
-          <a:prstGeom prst="rect">
-            <a:avLst/>
-          </a:prstGeom>
-          <a:noFill/>
-          <a:ln/>
-        </p:spPr>
-        <p:txBody>
-          <a:bodyPr wrap="square" lIns="0" tIns="0" rIns="0" bIns="0" rtlCol="0" anchor="t"/>
-          <a:lstStyle/>
-          <a:p>
-            <a:pPr algn="r" indent="0" marL="0">
-              <a:buNone/>
-            </a:pPr>
-            <a:r>
-              <a:rPr lang="en-GB" altLang="en-US" sz="1000" b="1" u="sng" dirty="0">
-                <a:solidFill>
-                  <a:schemeClr val="accent3"/>
-                </a:solidFill>
-                <a:hlinkClick r:id="rId4" action="ppaction://hlinksldjump" tooltip="Back to the report">
-                  <a:extLst>
-                    <a:ext uri="{A12FA001-AC4F-418D-AE19-62706E023703}">
-                      <ahyp:hlinkClr xmlns:ahyp="http://schemas.microsoft.com/office/drawing/2018/hyperlinkcolor" val="tx"/>
-                    </a:ext>
-                  </a:extLst>
-                </a:hlinkClick>
-              </a:rPr>
-              <a:t>←  Back to page 1</a:t>
-            </a:r>
-            <a:endParaRPr lang="en-GB" sz="1000" dirty="0"/>
-          </a:p>
-        </p:txBody>
-      </p:sp>
-      <p:sp>
-        <p:nvSpPr>
-          <p:cNvPr id="25" name="Slide Number Placeholder 0"/>
-          <p:cNvSpPr>
-            <a:spLocks noGrp="1"/>
-          </p:cNvSpPr>
-          <p:nvPr>
-            <p:ph type="sldNum" sz="quarter" idx="4294967295"/>
-          </p:nvPr>
-        </p:nvSpPr>
-        <p:spPr>
-          <a:xfrm>
-            <a:off x="11094415" y="6437376"/>
-            <a:ext cx="548640" cy="237744"/>
-          </a:xfrm>
-          <a:prstGeom prst="rect">
-            <a:avLst/>
-          </a:prstGeom>
-          <a:extLst>
-            <a:ext uri="{C572A759-6A51-4108-AA02-DFA0A04FC94B}">
-              <ma14:wrappingTextBoxFlag xmlns:ma14="http://schemas.microsoft.com/office/mac/drawingml/2011/main" val="0"/>
-            </a:ext>
-          </a:extLst>
-        </p:spPr>
-        <p:txBody>
-          <a:bodyPr lIns="0" tIns="0" rIns="0" bIns="0"/>
-          <a:lstStyle>
-            <a:lvl1pPr>
-              <a:defRPr sz="1000">
-                <a:solidFill>
-                  <a:schemeClr val="tx2"/>
-                </a:solidFill>
-              </a:defRPr>
-            </a:lvl1pPr>
-          </a:lstStyle>
-          <a:p>
-            <a:pPr algn="r"/>
-            <a:fld id="{F7021451-1387-4CA6-816F-3879F97B5CBC}" type="slidenum">
-              <a:rPr b="0" lang="en-US"/>
-              <a:t>12</a:t>
-            </a:fld>
-            <a:endParaRPr lang="en-US"/>
-          </a:p>
-        </p:txBody>
-      </p:sp>
     </p:spTree>
   </p:cSld>
   <p:clrMapOvr>
@@ -9694,7 +5010,7 @@
                   <a:schemeClr val="tx1"/>
                 </a:solidFill>
               </a:rPr>
-              <a:t>Four editions in, this is already working</a:t>
+              <a:t>4 editions in, the business model is already working</a:t>
             </a:r>
             <a:endParaRPr lang="en-GB" sz="3800" dirty="0"/>
           </a:p>
@@ -14632,7 +9948,7 @@
                 <a:ea typeface="+mj-lt" pitchFamily="34" charset="-122"/>
                 <a:cs typeface="+mj-lt" pitchFamily="34" charset="-120"/>
               </a:rPr>
-              <a:t>Accredit</a:t>
+              <a:t>Accreditation</a:t>
             </a:r>
             <a:endParaRPr lang="en-GB" sz="1900" dirty="0"/>
           </a:p>
@@ -17986,7 +13302,7 @@
                 <a:ea typeface="+mj-lt" pitchFamily="34" charset="-122"/>
                 <a:cs typeface="+mj-lt" pitchFamily="34" charset="-120"/>
               </a:rPr>
-              <a:t>Weekly pulse</a:t>
+              <a:t>Tracked from the first post</a:t>
             </a:r>
             <a:endParaRPr lang="en-GB" sz="2200" dirty="0"/>
           </a:p>
@@ -18022,7 +13338,7 @@
                   <a:schemeClr val="accent3"/>
                 </a:solidFill>
               </a:rPr>
-              <a:t>EVERY MONDAY IN THE BUILD UP</a:t>
+              <a:t>BEFORE THE FESTIVAL</a:t>
             </a:r>
             <a:endParaRPr lang="en-GB" sz="1100" dirty="0"/>
           </a:p>
@@ -18058,7 +13374,7 @@
                   <a:schemeClr val="tx2"/>
                 </a:solidFill>
               </a:rPr>
-              <a:t>One page: posts live, views, top creators, ticket links used and what changes next.</a:t>
+              <a:t>Every creator post in the build up is logged and tracked, so the report covers the weeks before the event too.</a:t>
             </a:r>
             <a:endParaRPr lang="en-GB" sz="1400" dirty="0"/>
           </a:p>
@@ -18376,41 +13692,72 @@
       </p:sp>
       <p:sp>
         <p:nvSpPr>
-          <p:cNvPr id="23" name="Shape 15"/>
+          <p:cNvPr id="23" name="Text 15"/>
+          <p:cNvSpPr txBox="1"/>
+          <p:nvPr/>
+        </p:nvSpPr>
+        <p:spPr>
+          <a:xfrm>
+            <a:off x="1371600" y="5596128"/>
+            <a:ext cx="5120640" cy="457200"/>
+          </a:xfrm>
+          <a:prstGeom prst="rect">
+            <a:avLst/>
+          </a:prstGeom>
+          <a:noFill/>
+          <a:ln/>
+        </p:spPr>
+        <p:txBody>
+          <a:bodyPr wrap="square" lIns="0" tIns="0" rIns="0" bIns="0" rtlCol="0" anchor="t"/>
+          <a:lstStyle/>
+          <a:p>
+            <a:pPr indent="0" marL="0">
+              <a:buNone/>
+            </a:pPr>
+            <a:r>
+              <a:rPr lang="en-GB" altLang="en-US" sz="1200" b="1" dirty="0">
+                <a:solidFill>
+                  <a:schemeClr val="accent3"/>
+                </a:solidFill>
+              </a:rPr>
+              <a:t>The full report runs to several pages: every creator, every post, audiences and a page per sponsor.</a:t>
+            </a:r>
+            <a:endParaRPr lang="en-GB" sz="1200" dirty="0"/>
+          </a:p>
+        </p:txBody>
+      </p:sp>
+      <p:sp>
+        <p:nvSpPr>
+          <p:cNvPr id="24" name="Shape 16"/>
           <p:cNvSpPr/>
           <p:nvPr/>
         </p:nvSpPr>
         <p:spPr>
           <a:xfrm>
-            <a:off x="1371600" y="5833872"/>
-            <a:ext cx="4114800" cy="384048"/>
+            <a:off x="6812280" y="1737360"/>
+            <a:ext cx="4690872" cy="365760"/>
           </a:xfrm>
           <a:prstGeom prst="roundRect">
             <a:avLst>
-              <a:gd name="adj" fmla="val 50000"/>
+              <a:gd name="adj" fmla="val 15000"/>
             </a:avLst>
           </a:prstGeom>
           <a:solidFill>
-            <a:schemeClr val="bg1"/>
+            <a:schemeClr val="accent2"/>
           </a:solidFill>
-          <a:ln w="12700">
-            <a:solidFill>
-              <a:schemeClr val="accent3"/>
-            </a:solidFill>
-            <a:prstDash val="solid"/>
-          </a:ln>
-        </p:spPr>
-      </p:sp>
-      <p:sp>
-        <p:nvSpPr>
-          <p:cNvPr id="24" name="Text 16"/>
-          <p:cNvSpPr txBox="1"/>
-          <p:nvPr/>
-        </p:nvSpPr>
-        <p:spPr>
-          <a:xfrm>
-            <a:off x="1371600" y="5833872"/>
-            <a:ext cx="4114800" cy="384048"/>
+          <a:ln/>
+        </p:spPr>
+      </p:sp>
+      <p:sp>
+        <p:nvSpPr>
+          <p:cNvPr id="25" name="Text 17"/>
+          <p:cNvSpPr txBox="1"/>
+          <p:nvPr/>
+        </p:nvSpPr>
+        <p:spPr>
+          <a:xfrm>
+            <a:off x="6812280" y="1737360"/>
+            <a:ext cx="4690872" cy="365760"/>
           </a:xfrm>
           <a:prstGeom prst="rect">
             <a:avLst/>
@@ -18426,38 +13773,31 @@
               <a:buNone/>
             </a:pPr>
             <a:r>
-              <a:rPr lang="en-GB" altLang="en-US" sz="1200" b="1" u="sng" dirty="0">
-                <a:solidFill>
-                  <a:schemeClr val="accent3"/>
-                </a:solidFill>
-                <a:hlinkClick r:id="rId6" action="ppaction://hlinksldjump" tooltip="Sample report, page 2">
-                  <a:extLst>
-                    <a:ext uri="{A12FA001-AC4F-418D-AE19-62706E023703}">
-                      <ahyp:hlinkClr xmlns:ahyp="http://schemas.microsoft.com/office/drawing/2018/hyperlinkcolor" val="tx"/>
-                    </a:ext>
-                  </a:extLst>
-                </a:hlinkClick>
-              </a:rPr>
-              <a:t>See page 2: the detailed breakdown  →</a:t>
-            </a:r>
-            <a:endParaRPr lang="en-GB" sz="1200" dirty="0"/>
-          </a:p>
-        </p:txBody>
-      </p:sp>
-      <p:sp>
-        <p:nvSpPr>
-          <p:cNvPr id="25" name="Sample report page 2"/>
+              <a:rPr lang="en-GB" altLang="en-US" sz="1000" b="1" spc="100" kern="0" dirty="0">
+                <a:solidFill>
+                  <a:schemeClr val="tx1"/>
+                </a:solidFill>
+              </a:rPr>
+              <a:t>SAMPLE LAYOUT  ·  FIGURES ARE ILLUSTRATIVE</a:t>
+            </a:r>
+            <a:endParaRPr lang="en-GB" sz="1000" dirty="0"/>
+          </a:p>
+        </p:txBody>
+      </p:sp>
+      <p:sp>
+        <p:nvSpPr>
+          <p:cNvPr id="26" name="Sample report page 2"/>
           <p:cNvSpPr/>
           <p:nvPr/>
         </p:nvSpPr>
         <p:spPr>
           <a:xfrm>
-            <a:off x="6949440" y="1874520"/>
-            <a:ext cx="4690872" cy="4343400"/>
+            <a:off x="6922008" y="2322576"/>
+            <a:ext cx="4690872" cy="3931920"/>
           </a:xfrm>
           <a:prstGeom prst="roundRect">
             <a:avLst>
-              <a:gd name="adj" fmla="val 1684"/>
+              <a:gd name="adj" fmla="val 1860"/>
             </a:avLst>
           </a:prstGeom>
           <a:solidFill>
@@ -18475,18 +13815,18 @@
       </p:sp>
       <p:sp>
         <p:nvSpPr>
-          <p:cNvPr id="26" name="Shape 18"/>
+          <p:cNvPr id="27" name="Shape 19"/>
           <p:cNvSpPr/>
           <p:nvPr/>
         </p:nvSpPr>
         <p:spPr>
           <a:xfrm>
-            <a:off x="6812280" y="1737360"/>
-            <a:ext cx="4690872" cy="4343400"/>
+            <a:off x="6812280" y="2212848"/>
+            <a:ext cx="4690872" cy="3931920"/>
           </a:xfrm>
           <a:prstGeom prst="roundRect">
             <a:avLst>
-              <a:gd name="adj" fmla="val 1684"/>
+              <a:gd name="adj" fmla="val 1860"/>
             </a:avLst>
           </a:prstGeom>
           <a:solidFill>
@@ -18511,13 +13851,13 @@
       </p:sp>
       <p:sp>
         <p:nvSpPr>
-          <p:cNvPr id="27" name="Text 19"/>
-          <p:cNvSpPr txBox="1"/>
-          <p:nvPr/>
-        </p:nvSpPr>
-        <p:spPr>
-          <a:xfrm>
-            <a:off x="7086600" y="1965960"/>
+          <p:cNvPr id="28" name="Text 20"/>
+          <p:cNvSpPr txBox="1"/>
+          <p:nvPr/>
+        </p:nvSpPr>
+        <p:spPr>
+          <a:xfrm>
+            <a:off x="7086600" y="2414016"/>
             <a:ext cx="3291840" cy="201168"/>
           </a:xfrm>
           <a:prstGeom prst="rect">
@@ -18547,13 +13887,13 @@
       </p:sp>
       <p:sp>
         <p:nvSpPr>
-          <p:cNvPr id="28" name="Text 20"/>
-          <p:cNvSpPr txBox="1"/>
-          <p:nvPr/>
-        </p:nvSpPr>
-        <p:spPr>
-          <a:xfrm>
-            <a:off x="7086600" y="2167128"/>
+          <p:cNvPr id="29" name="Text 21"/>
+          <p:cNvSpPr txBox="1"/>
+          <p:nvPr/>
+        </p:nvSpPr>
+        <p:spPr>
+          <a:xfrm>
+            <a:off x="7086600" y="2596896"/>
             <a:ext cx="3657600" cy="365760"/>
           </a:xfrm>
           <a:prstGeom prst="rect">
@@ -18586,21 +13926,21 @@
       </p:sp>
       <p:pic>
         <p:nvPicPr>
-          <p:cNvPr id="29" name="Image 5" descr="Mother Africa Festival">    </p:cNvPr>
+          <p:cNvPr id="30" name="Image 5" descr="Mother Africa Festival">    </p:cNvPr>
           <p:cNvPicPr>
             <a:picLocks noChangeAspect="1"/>
           </p:cNvPicPr>
           <p:nvPr/>
         </p:nvPicPr>
         <p:blipFill>
-          <a:blip r:embed="rId7"/>
+          <a:blip r:embed="rId6"/>
           <a:stretch>
             <a:fillRect/>
           </a:stretch>
         </p:blipFill>
         <p:spPr>
           <a:xfrm>
-            <a:off x="10725912" y="1965960"/>
+            <a:off x="10725912" y="2395728"/>
             <a:ext cx="541249" cy="384048"/>
           </a:xfrm>
           <a:prstGeom prst="rect">
@@ -18610,13 +13950,13 @@
       </p:pic>
       <p:sp>
         <p:nvSpPr>
-          <p:cNvPr id="30" name="Shape 21"/>
+          <p:cNvPr id="31" name="Shape 22"/>
           <p:cNvSpPr/>
           <p:nvPr/>
         </p:nvSpPr>
         <p:spPr>
           <a:xfrm>
-            <a:off x="7086600" y="2606040"/>
+            <a:off x="7086600" y="3017520"/>
             <a:ext cx="4142232" cy="0"/>
           </a:xfrm>
           <a:prstGeom prst="line">
@@ -18633,18 +13973,18 @@
       </p:sp>
       <p:sp>
         <p:nvSpPr>
-          <p:cNvPr id="31" name="Shape 22"/>
+          <p:cNvPr id="32" name="Shape 23"/>
           <p:cNvSpPr/>
           <p:nvPr/>
         </p:nvSpPr>
         <p:spPr>
           <a:xfrm>
-            <a:off x="7086600" y="2788920"/>
-            <a:ext cx="2011680" cy="731520"/>
+            <a:off x="7086600" y="3145536"/>
+            <a:ext cx="2011680" cy="713232"/>
           </a:xfrm>
           <a:prstGeom prst="roundRect">
             <a:avLst>
-              <a:gd name="adj" fmla="val 7500"/>
+              <a:gd name="adj" fmla="val 7692"/>
             </a:avLst>
           </a:prstGeom>
           <a:solidFill>
@@ -18655,13 +13995,13 @@
       </p:sp>
       <p:sp>
         <p:nvSpPr>
-          <p:cNvPr id="32" name="Text 23"/>
-          <p:cNvSpPr txBox="1"/>
-          <p:nvPr/>
-        </p:nvSpPr>
-        <p:spPr>
-          <a:xfrm>
-            <a:off x="7251192" y="2862072"/>
+          <p:cNvPr id="33" name="Text 24"/>
+          <p:cNvSpPr txBox="1"/>
+          <p:nvPr/>
+        </p:nvSpPr>
+        <p:spPr>
+          <a:xfrm>
+            <a:off x="7251192" y="3209544"/>
             <a:ext cx="1737360" cy="347472"/>
           </a:xfrm>
           <a:prstGeom prst="rect">
@@ -18691,13 +14031,13 @@
       </p:sp>
       <p:sp>
         <p:nvSpPr>
-          <p:cNvPr id="33" name="Text 24"/>
-          <p:cNvSpPr txBox="1"/>
-          <p:nvPr/>
-        </p:nvSpPr>
-        <p:spPr>
-          <a:xfrm>
-            <a:off x="7251192" y="3227832"/>
+          <p:cNvPr id="34" name="Text 25"/>
+          <p:cNvSpPr txBox="1"/>
+          <p:nvPr/>
+        </p:nvSpPr>
+        <p:spPr>
+          <a:xfrm>
+            <a:off x="7251192" y="3566160"/>
             <a:ext cx="1783080" cy="201168"/>
           </a:xfrm>
           <a:prstGeom prst="rect">
@@ -18727,18 +14067,18 @@
       </p:sp>
       <p:sp>
         <p:nvSpPr>
-          <p:cNvPr id="34" name="Shape 25"/>
+          <p:cNvPr id="35" name="Shape 26"/>
           <p:cNvSpPr/>
           <p:nvPr/>
         </p:nvSpPr>
         <p:spPr>
           <a:xfrm>
-            <a:off x="9208008" y="2788920"/>
-            <a:ext cx="2011680" cy="731520"/>
+            <a:off x="9208008" y="3145536"/>
+            <a:ext cx="2011680" cy="713232"/>
           </a:xfrm>
           <a:prstGeom prst="roundRect">
             <a:avLst>
-              <a:gd name="adj" fmla="val 7500"/>
+              <a:gd name="adj" fmla="val 7692"/>
             </a:avLst>
           </a:prstGeom>
           <a:solidFill>
@@ -18749,13 +14089,13 @@
       </p:sp>
       <p:sp>
         <p:nvSpPr>
-          <p:cNvPr id="35" name="Text 26"/>
-          <p:cNvSpPr txBox="1"/>
-          <p:nvPr/>
-        </p:nvSpPr>
-        <p:spPr>
-          <a:xfrm>
-            <a:off x="9372600" y="2862072"/>
+          <p:cNvPr id="36" name="Text 27"/>
+          <p:cNvSpPr txBox="1"/>
+          <p:nvPr/>
+        </p:nvSpPr>
+        <p:spPr>
+          <a:xfrm>
+            <a:off x="9372600" y="3209544"/>
             <a:ext cx="1737360" cy="347472"/>
           </a:xfrm>
           <a:prstGeom prst="rect">
@@ -18785,13 +14125,13 @@
       </p:sp>
       <p:sp>
         <p:nvSpPr>
-          <p:cNvPr id="36" name="Text 27"/>
-          <p:cNvSpPr txBox="1"/>
-          <p:nvPr/>
-        </p:nvSpPr>
-        <p:spPr>
-          <a:xfrm>
-            <a:off x="9372600" y="3227832"/>
+          <p:cNvPr id="37" name="Text 28"/>
+          <p:cNvSpPr txBox="1"/>
+          <p:nvPr/>
+        </p:nvSpPr>
+        <p:spPr>
+          <a:xfrm>
+            <a:off x="9372600" y="3566160"/>
             <a:ext cx="1783080" cy="201168"/>
           </a:xfrm>
           <a:prstGeom prst="rect">
@@ -18821,18 +14161,18 @@
       </p:sp>
       <p:sp>
         <p:nvSpPr>
-          <p:cNvPr id="37" name="Shape 28"/>
+          <p:cNvPr id="38" name="Shape 29"/>
           <p:cNvSpPr/>
           <p:nvPr/>
         </p:nvSpPr>
         <p:spPr>
           <a:xfrm>
-            <a:off x="7086600" y="3657600"/>
-            <a:ext cx="2011680" cy="731520"/>
+            <a:off x="7086600" y="3950208"/>
+            <a:ext cx="2011680" cy="713232"/>
           </a:xfrm>
           <a:prstGeom prst="roundRect">
             <a:avLst>
-              <a:gd name="adj" fmla="val 7500"/>
+              <a:gd name="adj" fmla="val 7692"/>
             </a:avLst>
           </a:prstGeom>
           <a:solidFill>
@@ -18843,13 +14183,13 @@
       </p:sp>
       <p:sp>
         <p:nvSpPr>
-          <p:cNvPr id="38" name="Text 29"/>
-          <p:cNvSpPr txBox="1"/>
-          <p:nvPr/>
-        </p:nvSpPr>
-        <p:spPr>
-          <a:xfrm>
-            <a:off x="7251192" y="3730752"/>
+          <p:cNvPr id="39" name="Text 30"/>
+          <p:cNvSpPr txBox="1"/>
+          <p:nvPr/>
+        </p:nvSpPr>
+        <p:spPr>
+          <a:xfrm>
+            <a:off x="7251192" y="4014216"/>
             <a:ext cx="1737360" cy="347472"/>
           </a:xfrm>
           <a:prstGeom prst="rect">
@@ -18879,13 +14219,13 @@
       </p:sp>
       <p:sp>
         <p:nvSpPr>
-          <p:cNvPr id="39" name="Text 30"/>
-          <p:cNvSpPr txBox="1"/>
-          <p:nvPr/>
-        </p:nvSpPr>
-        <p:spPr>
-          <a:xfrm>
-            <a:off x="7251192" y="4096512"/>
+          <p:cNvPr id="40" name="Text 31"/>
+          <p:cNvSpPr txBox="1"/>
+          <p:nvPr/>
+        </p:nvSpPr>
+        <p:spPr>
+          <a:xfrm>
+            <a:off x="7251192" y="4370832"/>
             <a:ext cx="1783080" cy="201168"/>
           </a:xfrm>
           <a:prstGeom prst="rect">
@@ -18915,18 +14255,18 @@
       </p:sp>
       <p:sp>
         <p:nvSpPr>
-          <p:cNvPr id="40" name="Shape 31"/>
+          <p:cNvPr id="41" name="Shape 32"/>
           <p:cNvSpPr/>
           <p:nvPr/>
         </p:nvSpPr>
         <p:spPr>
           <a:xfrm>
-            <a:off x="9208008" y="3657600"/>
-            <a:ext cx="2011680" cy="731520"/>
+            <a:off x="9208008" y="3950208"/>
+            <a:ext cx="2011680" cy="713232"/>
           </a:xfrm>
           <a:prstGeom prst="roundRect">
             <a:avLst>
-              <a:gd name="adj" fmla="val 7500"/>
+              <a:gd name="adj" fmla="val 7692"/>
             </a:avLst>
           </a:prstGeom>
           <a:solidFill>
@@ -18937,13 +14277,13 @@
       </p:sp>
       <p:sp>
         <p:nvSpPr>
-          <p:cNvPr id="41" name="Text 32"/>
-          <p:cNvSpPr txBox="1"/>
-          <p:nvPr/>
-        </p:nvSpPr>
-        <p:spPr>
-          <a:xfrm>
-            <a:off x="9372600" y="3730752"/>
+          <p:cNvPr id="42" name="Text 33"/>
+          <p:cNvSpPr txBox="1"/>
+          <p:nvPr/>
+        </p:nvSpPr>
+        <p:spPr>
+          <a:xfrm>
+            <a:off x="9372600" y="4014216"/>
             <a:ext cx="1737360" cy="347472"/>
           </a:xfrm>
           <a:prstGeom prst="rect">
@@ -18973,13 +14313,13 @@
       </p:sp>
       <p:sp>
         <p:nvSpPr>
-          <p:cNvPr id="42" name="Text 33"/>
-          <p:cNvSpPr txBox="1"/>
-          <p:nvPr/>
-        </p:nvSpPr>
-        <p:spPr>
-          <a:xfrm>
-            <a:off x="9372600" y="4096512"/>
+          <p:cNvPr id="43" name="Text 34"/>
+          <p:cNvSpPr txBox="1"/>
+          <p:nvPr/>
+        </p:nvSpPr>
+        <p:spPr>
+          <a:xfrm>
+            <a:off x="9372600" y="4370832"/>
             <a:ext cx="1783080" cy="201168"/>
           </a:xfrm>
           <a:prstGeom prst="rect">
@@ -19009,13 +14349,13 @@
       </p:sp>
       <p:sp>
         <p:nvSpPr>
-          <p:cNvPr id="43" name="Text 34"/>
-          <p:cNvSpPr txBox="1"/>
-          <p:nvPr/>
-        </p:nvSpPr>
-        <p:spPr>
-          <a:xfrm>
-            <a:off x="7086600" y="4572000"/>
+          <p:cNvPr id="44" name="Text 35"/>
+          <p:cNvSpPr txBox="1"/>
+          <p:nvPr/>
+        </p:nvSpPr>
+        <p:spPr>
+          <a:xfrm>
+            <a:off x="7086600" y="4828032"/>
             <a:ext cx="2743200" cy="201168"/>
           </a:xfrm>
           <a:prstGeom prst="rect">
@@ -19045,13 +14385,13 @@
       </p:sp>
       <p:sp>
         <p:nvSpPr>
-          <p:cNvPr id="44" name="Text 35"/>
-          <p:cNvSpPr txBox="1"/>
-          <p:nvPr/>
-        </p:nvSpPr>
-        <p:spPr>
-          <a:xfrm>
-            <a:off x="7086600" y="4864608"/>
+          <p:cNvPr id="45" name="Text 36"/>
+          <p:cNvSpPr txBox="1"/>
+          <p:nvPr/>
+        </p:nvSpPr>
+        <p:spPr>
+          <a:xfrm>
+            <a:off x="7086600" y="5102352"/>
             <a:ext cx="1005840" cy="219456"/>
           </a:xfrm>
           <a:prstGeom prst="rect">
@@ -19081,13 +14421,13 @@
       </p:sp>
       <p:sp>
         <p:nvSpPr>
-          <p:cNvPr id="45" name="Shape 36"/>
+          <p:cNvPr id="46" name="Shape 37"/>
           <p:cNvSpPr/>
           <p:nvPr/>
         </p:nvSpPr>
         <p:spPr>
           <a:xfrm>
-            <a:off x="8138160" y="4901184"/>
+            <a:off x="8138160" y="5138928"/>
             <a:ext cx="2468880" cy="146304"/>
           </a:xfrm>
           <a:prstGeom prst="roundRect">
@@ -19103,13 +14443,13 @@
       </p:sp>
       <p:sp>
         <p:nvSpPr>
-          <p:cNvPr id="46" name="Text 37"/>
-          <p:cNvSpPr txBox="1"/>
-          <p:nvPr/>
-        </p:nvSpPr>
-        <p:spPr>
-          <a:xfrm>
-            <a:off x="10698480" y="4864608"/>
+          <p:cNvPr id="47" name="Text 38"/>
+          <p:cNvSpPr txBox="1"/>
+          <p:nvPr/>
+        </p:nvSpPr>
+        <p:spPr>
+          <a:xfrm>
+            <a:off x="10698480" y="5102352"/>
             <a:ext cx="548640" cy="219456"/>
           </a:xfrm>
           <a:prstGeom prst="rect">
@@ -19139,13 +14479,13 @@
       </p:sp>
       <p:sp>
         <p:nvSpPr>
-          <p:cNvPr id="47" name="Text 38"/>
-          <p:cNvSpPr txBox="1"/>
-          <p:nvPr/>
-        </p:nvSpPr>
-        <p:spPr>
-          <a:xfrm>
-            <a:off x="7086600" y="5193792"/>
+          <p:cNvPr id="48" name="Text 39"/>
+          <p:cNvSpPr txBox="1"/>
+          <p:nvPr/>
+        </p:nvSpPr>
+        <p:spPr>
+          <a:xfrm>
+            <a:off x="7086600" y="5394960"/>
             <a:ext cx="1005840" cy="219456"/>
           </a:xfrm>
           <a:prstGeom prst="rect">
@@ -19175,13 +14515,13 @@
       </p:sp>
       <p:sp>
         <p:nvSpPr>
-          <p:cNvPr id="48" name="Shape 39"/>
+          <p:cNvPr id="49" name="Shape 40"/>
           <p:cNvSpPr/>
           <p:nvPr/>
         </p:nvSpPr>
         <p:spPr>
           <a:xfrm>
-            <a:off x="8138160" y="5230368"/>
+            <a:off x="8138160" y="5431536"/>
             <a:ext cx="1804182" cy="146304"/>
           </a:xfrm>
           <a:prstGeom prst="roundRect">
@@ -19197,13 +14537,13 @@
       </p:sp>
       <p:sp>
         <p:nvSpPr>
-          <p:cNvPr id="49" name="Text 40"/>
-          <p:cNvSpPr txBox="1"/>
-          <p:nvPr/>
-        </p:nvSpPr>
-        <p:spPr>
-          <a:xfrm>
-            <a:off x="10033782" y="5193792"/>
+          <p:cNvPr id="50" name="Text 41"/>
+          <p:cNvSpPr txBox="1"/>
+          <p:nvPr/>
+        </p:nvSpPr>
+        <p:spPr>
+          <a:xfrm>
+            <a:off x="10033782" y="5394960"/>
             <a:ext cx="548640" cy="219456"/>
           </a:xfrm>
           <a:prstGeom prst="rect">
@@ -19233,13 +14573,13 @@
       </p:sp>
       <p:sp>
         <p:nvSpPr>
-          <p:cNvPr id="50" name="Text 41"/>
-          <p:cNvSpPr txBox="1"/>
-          <p:nvPr/>
-        </p:nvSpPr>
-        <p:spPr>
-          <a:xfrm>
-            <a:off x="7086600" y="5522976"/>
+          <p:cNvPr id="51" name="Text 42"/>
+          <p:cNvSpPr txBox="1"/>
+          <p:nvPr/>
+        </p:nvSpPr>
+        <p:spPr>
+          <a:xfrm>
+            <a:off x="7086600" y="5687568"/>
             <a:ext cx="1005840" cy="219456"/>
           </a:xfrm>
           <a:prstGeom prst="rect">
@@ -19269,13 +14609,13 @@
       </p:sp>
       <p:sp>
         <p:nvSpPr>
-          <p:cNvPr id="51" name="Shape 42"/>
+          <p:cNvPr id="52" name="Shape 43"/>
           <p:cNvSpPr/>
           <p:nvPr/>
         </p:nvSpPr>
         <p:spPr>
           <a:xfrm>
-            <a:off x="8138160" y="5559552"/>
+            <a:off x="8138160" y="5724144"/>
             <a:ext cx="474785" cy="146304"/>
           </a:xfrm>
           <a:prstGeom prst="roundRect">
@@ -19291,13 +14631,13 @@
       </p:sp>
       <p:sp>
         <p:nvSpPr>
-          <p:cNvPr id="52" name="Text 43"/>
-          <p:cNvSpPr txBox="1"/>
-          <p:nvPr/>
-        </p:nvSpPr>
-        <p:spPr>
-          <a:xfrm>
-            <a:off x="8704385" y="5522976"/>
+          <p:cNvPr id="53" name="Text 44"/>
+          <p:cNvSpPr txBox="1"/>
+          <p:nvPr/>
+        </p:nvSpPr>
+        <p:spPr>
+          <a:xfrm>
+            <a:off x="8704385" y="5687568"/>
             <a:ext cx="548640" cy="219456"/>
           </a:xfrm>
           <a:prstGeom prst="rect">
@@ -19320,85 +14660,6 @@
                 </a:solidFill>
               </a:rPr>
               <a:t>10%</a:t>
-            </a:r>
-            <a:endParaRPr lang="en-GB" sz="1000" dirty="0"/>
-          </a:p>
-        </p:txBody>
-      </p:sp>
-      <p:sp>
-        <p:nvSpPr>
-          <p:cNvPr id="53" name="Text 44"/>
-          <p:cNvSpPr txBox="1"/>
-          <p:nvPr/>
-        </p:nvSpPr>
-        <p:spPr>
-          <a:xfrm>
-            <a:off x="7086600" y="5779008"/>
-            <a:ext cx="2926080" cy="201168"/>
-          </a:xfrm>
-          <a:prstGeom prst="rect">
-            <a:avLst/>
-          </a:prstGeom>
-          <a:noFill/>
-          <a:ln/>
-        </p:spPr>
-        <p:txBody>
-          <a:bodyPr wrap="square" lIns="0" tIns="0" rIns="0" bIns="0" rtlCol="0" anchor="t"/>
-          <a:lstStyle/>
-          <a:p>
-            <a:pPr indent="0" marL="0">
-              <a:buNone/>
-            </a:pPr>
-            <a:r>
-              <a:rPr lang="en-GB" altLang="en-US" sz="1000" b="1" i="1" dirty="0">
-                <a:solidFill>
-                  <a:schemeClr val="accent3"/>
-                </a:solidFill>
-              </a:rPr>
-              <a:t>Sample layout. Figures are illustrative.</a:t>
-            </a:r>
-            <a:endParaRPr lang="en-GB" sz="1000" dirty="0"/>
-          </a:p>
-        </p:txBody>
-      </p:sp>
-      <p:sp>
-        <p:nvSpPr>
-          <p:cNvPr id="54" name="Text 45"/>
-          <p:cNvSpPr txBox="1"/>
-          <p:nvPr/>
-        </p:nvSpPr>
-        <p:spPr>
-          <a:xfrm>
-            <a:off x="10222992" y="5779008"/>
-            <a:ext cx="1005840" cy="201168"/>
-          </a:xfrm>
-          <a:prstGeom prst="rect">
-            <a:avLst/>
-          </a:prstGeom>
-          <a:noFill/>
-          <a:ln/>
-        </p:spPr>
-        <p:txBody>
-          <a:bodyPr wrap="square" lIns="0" tIns="0" rIns="0" bIns="0" rtlCol="0" anchor="t"/>
-          <a:lstStyle/>
-          <a:p>
-            <a:pPr algn="r" indent="0" marL="0">
-              <a:buNone/>
-            </a:pPr>
-            <a:r>
-              <a:rPr lang="en-GB" altLang="en-US" sz="1000" b="1" u="sng" dirty="0">
-                <a:solidFill>
-                  <a:schemeClr val="accent3"/>
-                </a:solidFill>
-                <a:hlinkClick r:id="rId8" action="ppaction://hlinksldjump" tooltip="Sample report, page 2">
-                  <a:extLst>
-                    <a:ext uri="{A12FA001-AC4F-418D-AE19-62706E023703}">
-                      <ahyp:hlinkClr xmlns:ahyp="http://schemas.microsoft.com/office/drawing/2018/hyperlinkcolor" val="tx"/>
-                    </a:ext>
-                  </a:extLst>
-                </a:hlinkClick>
-              </a:rPr>
-              <a:t>Page 2  →</a:t>
             </a:r>
             <a:endParaRPr lang="en-GB" sz="1000" dirty="0"/>
           </a:p>
@@ -19643,7 +14904,7 @@
         <p:spPr>
           <a:xfrm>
             <a:off x="548640" y="1783080"/>
-            <a:ext cx="6492240" cy="868680"/>
+            <a:ext cx="6492240" cy="731520"/>
           </a:xfrm>
           <a:prstGeom prst="rect">
             <a:avLst/>
@@ -19662,14 +14923,14 @@
               <a:buNone/>
             </a:pPr>
             <a:r>
-              <a:rPr lang="en-GB" altLang="en-US" sz="1600" dirty="0">
+              <a:rPr lang="en-GB" altLang="en-US" sz="1500" dirty="0">
                 <a:solidFill>
                   <a:schemeClr val="tx2"/>
                 </a:solidFill>
               </a:rPr>
-              <a:t>AToure manages the creator activation for the 5th edition and delivers a full visibility report on the festival, built to go to sponsors and partners.</a:t>
-            </a:r>
-            <a:endParaRPr lang="en-GB" sz="1600" dirty="0"/>
+              <a:t>AToure works with the creators Mother Africa already has, adds the ones it needs, and delivers a full visibility report built for sponsors and partners.</a:t>
+            </a:r>
+            <a:endParaRPr lang="en-GB" sz="1500" dirty="0"/>
           </a:p>
         </p:txBody>
       </p:sp>
@@ -19681,8 +14942,8 @@
         </p:nvSpPr>
         <p:spPr>
           <a:xfrm>
-            <a:off x="548640" y="2834640"/>
-            <a:ext cx="6492240" cy="384048"/>
+            <a:off x="548640" y="2606040"/>
+            <a:ext cx="6492240" cy="347472"/>
           </a:xfrm>
           <a:prstGeom prst="rect">
             <a:avLst/>
@@ -19701,8 +14962,8 @@
         </p:nvSpPr>
         <p:spPr>
           <a:xfrm>
-            <a:off x="777240" y="2834640"/>
-            <a:ext cx="6035040" cy="384048"/>
+            <a:off x="777240" y="2606040"/>
+            <a:ext cx="6035040" cy="347472"/>
           </a:xfrm>
           <a:prstGeom prst="rect">
             <a:avLst/>
@@ -19718,14 +14979,14 @@
               <a:buNone/>
             </a:pPr>
             <a:r>
-              <a:rPr lang="en-GB" altLang="en-US" sz="1200" b="1" spc="300" kern="0" dirty="0">
+              <a:rPr lang="en-GB" altLang="en-US" sz="1150" b="1" spc="300" kern="0" dirty="0">
                 <a:solidFill>
                   <a:schemeClr val="tx1"/>
                 </a:solidFill>
               </a:rPr>
-              <a:t>THE ACTIVATION</a:t>
-            </a:r>
-            <a:endParaRPr lang="en-GB" sz="1200" dirty="0"/>
+              <a:t>CREATORS ALREADY ON BOARD</a:t>
+            </a:r>
+            <a:endParaRPr lang="en-GB" sz="1150" dirty="0"/>
           </a:p>
         </p:txBody>
       </p:sp>
@@ -19737,8 +14998,8 @@
         </p:nvSpPr>
         <p:spPr>
           <a:xfrm>
-            <a:off x="548640" y="3218688"/>
-            <a:ext cx="6492240" cy="777240"/>
+            <a:off x="548640" y="2953512"/>
+            <a:ext cx="6492240" cy="621792"/>
           </a:xfrm>
           <a:prstGeom prst="rect">
             <a:avLst/>
@@ -19764,8 +15025,8 @@
         </p:nvSpPr>
         <p:spPr>
           <a:xfrm>
-            <a:off x="777240" y="3291840"/>
-            <a:ext cx="6035040" cy="640080"/>
+            <a:off x="777240" y="3017520"/>
+            <a:ext cx="6035040" cy="512064"/>
           </a:xfrm>
           <a:prstGeom prst="rect">
             <a:avLst/>
@@ -19781,14 +15042,14 @@
               <a:buNone/>
             </a:pPr>
             <a:r>
-              <a:rPr lang="en-GB" altLang="en-US" sz="1500" dirty="0">
+              <a:rPr lang="en-GB" altLang="en-US" sz="1400" dirty="0">
                 <a:solidFill>
                   <a:schemeClr val="tx1"/>
                 </a:solidFill>
               </a:rPr>
-              <a:t>Creators matched to the festival’s audiences, managed on the ground before, during and after 27 and 28 December.</a:t>
-            </a:r>
-            <a:endParaRPr lang="en-GB" sz="1500" dirty="0"/>
+              <a:t>Creators the festival has already activated stay. AToure manages them on the ground, alongside any new ones.</a:t>
+            </a:r>
+            <a:endParaRPr lang="en-GB" sz="1400" dirty="0"/>
           </a:p>
         </p:txBody>
       </p:sp>
@@ -19800,14 +15061,14 @@
         </p:nvSpPr>
         <p:spPr>
           <a:xfrm>
-            <a:off x="548640" y="4160520"/>
-            <a:ext cx="6492240" cy="384048"/>
+            <a:off x="548640" y="3685032"/>
+            <a:ext cx="6492240" cy="347472"/>
           </a:xfrm>
           <a:prstGeom prst="rect">
             <a:avLst/>
           </a:prstGeom>
           <a:solidFill>
-            <a:schemeClr val="accent2"/>
+            <a:schemeClr val="accent1"/>
           </a:solidFill>
           <a:ln/>
         </p:spPr>
@@ -19820,8 +15081,8 @@
         </p:nvSpPr>
         <p:spPr>
           <a:xfrm>
-            <a:off x="777240" y="4160520"/>
-            <a:ext cx="6035040" cy="384048"/>
+            <a:off x="777240" y="3685032"/>
+            <a:ext cx="6035040" cy="347472"/>
           </a:xfrm>
           <a:prstGeom prst="rect">
             <a:avLst/>
@@ -19837,14 +15098,14 @@
               <a:buNone/>
             </a:pPr>
             <a:r>
-              <a:rPr lang="en-GB" altLang="en-US" sz="1200" b="1" spc="300" kern="0" dirty="0">
+              <a:rPr lang="en-GB" altLang="en-US" sz="1150" b="1" spc="300" kern="0" dirty="0">
                 <a:solidFill>
                   <a:schemeClr val="tx1"/>
                 </a:solidFill>
               </a:rPr>
-              <a:t>THE REPORT</a:t>
-            </a:r>
-            <a:endParaRPr lang="en-GB" sz="1200" dirty="0"/>
+              <a:t>A CONTRACT WITH DELIVERABLES</a:t>
+            </a:r>
+            <a:endParaRPr lang="en-GB" sz="1150" dirty="0"/>
           </a:p>
         </p:txBody>
       </p:sp>
@@ -19856,8 +15117,8 @@
         </p:nvSpPr>
         <p:spPr>
           <a:xfrm>
-            <a:off x="548640" y="4544568"/>
-            <a:ext cx="6492240" cy="777240"/>
+            <a:off x="548640" y="4032504"/>
+            <a:ext cx="6492240" cy="621792"/>
           </a:xfrm>
           <a:prstGeom prst="rect">
             <a:avLst/>
@@ -19883,8 +15144,8 @@
         </p:nvSpPr>
         <p:spPr>
           <a:xfrm>
-            <a:off x="777240" y="4617720"/>
-            <a:ext cx="6035040" cy="640080"/>
+            <a:off x="777240" y="4096512"/>
+            <a:ext cx="6035040" cy="512064"/>
           </a:xfrm>
           <a:prstGeom prst="rect">
             <a:avLst/>
@@ -19900,27 +15161,146 @@
               <a:buNone/>
             </a:pPr>
             <a:r>
-              <a:rPr lang="en-GB" altLang="en-US" sz="1500" dirty="0">
+              <a:rPr lang="en-GB" altLang="en-US" sz="1400" dirty="0">
                 <a:solidFill>
                   <a:schemeClr val="tx1"/>
                 </a:solidFill>
               </a:rPr>
-              <a:t>A check at 48 hours and the full report on day 14, built for the festival team and for every sponsor.</a:t>
-            </a:r>
-            <a:endParaRPr lang="en-GB" sz="1500" dirty="0"/>
-          </a:p>
-        </p:txBody>
-      </p:sp>
-      <p:sp>
-        <p:nvSpPr>
-          <p:cNvPr id="17" name="Text 12"/>
-          <p:cNvSpPr txBox="1"/>
-          <p:nvPr/>
-        </p:nvSpPr>
-        <p:spPr>
-          <a:xfrm>
-            <a:off x="548640" y="5532120"/>
-            <a:ext cx="6492240" cy="502920"/>
+              <a:t>Every creator on a contract for the event: posts, platforms, timing and the ticket link, agreed in writing.</a:t>
+            </a:r>
+            <a:endParaRPr lang="en-GB" sz="1400" dirty="0"/>
+          </a:p>
+        </p:txBody>
+      </p:sp>
+      <p:sp>
+        <p:nvSpPr>
+          <p:cNvPr id="17" name="Shape 12"/>
+          <p:cNvSpPr/>
+          <p:nvPr/>
+        </p:nvSpPr>
+        <p:spPr>
+          <a:xfrm>
+            <a:off x="548640" y="4764024"/>
+            <a:ext cx="6492240" cy="347472"/>
+          </a:xfrm>
+          <a:prstGeom prst="rect">
+            <a:avLst/>
+          </a:prstGeom>
+          <a:solidFill>
+            <a:schemeClr val="accent2"/>
+          </a:solidFill>
+          <a:ln/>
+        </p:spPr>
+      </p:sp>
+      <p:sp>
+        <p:nvSpPr>
+          <p:cNvPr id="18" name="Text 13"/>
+          <p:cNvSpPr txBox="1"/>
+          <p:nvPr/>
+        </p:nvSpPr>
+        <p:spPr>
+          <a:xfrm>
+            <a:off x="777240" y="4764024"/>
+            <a:ext cx="6035040" cy="347472"/>
+          </a:xfrm>
+          <a:prstGeom prst="rect">
+            <a:avLst/>
+          </a:prstGeom>
+          <a:noFill/>
+          <a:ln/>
+        </p:spPr>
+        <p:txBody>
+          <a:bodyPr wrap="square" lIns="0" tIns="0" rIns="0" bIns="0" rtlCol="0" anchor="ctr"/>
+          <a:lstStyle/>
+          <a:p>
+            <a:pPr indent="0" marL="0">
+              <a:buNone/>
+            </a:pPr>
+            <a:r>
+              <a:rPr lang="en-GB" altLang="en-US" sz="1150" b="1" spc="300" kern="0" dirty="0">
+                <a:solidFill>
+                  <a:schemeClr val="tx1"/>
+                </a:solidFill>
+              </a:rPr>
+              <a:t>THE REPORT</a:t>
+            </a:r>
+            <a:endParaRPr lang="en-GB" sz="1150" dirty="0"/>
+          </a:p>
+        </p:txBody>
+      </p:sp>
+      <p:sp>
+        <p:nvSpPr>
+          <p:cNvPr id="19" name="Shape 14"/>
+          <p:cNvSpPr/>
+          <p:nvPr/>
+        </p:nvSpPr>
+        <p:spPr>
+          <a:xfrm>
+            <a:off x="548640" y="5111496"/>
+            <a:ext cx="6492240" cy="621792"/>
+          </a:xfrm>
+          <a:prstGeom prst="rect">
+            <a:avLst/>
+          </a:prstGeom>
+          <a:solidFill>
+            <a:schemeClr val="bg1"/>
+          </a:solidFill>
+          <a:ln w="9525">
+            <a:solidFill>
+              <a:schemeClr val="tx2">
+                <a:alpha val="28000"/>
+              </a:schemeClr>
+            </a:solidFill>
+            <a:prstDash val="solid"/>
+          </a:ln>
+        </p:spPr>
+      </p:sp>
+      <p:sp>
+        <p:nvSpPr>
+          <p:cNvPr id="20" name="Text 15"/>
+          <p:cNvSpPr txBox="1"/>
+          <p:nvPr/>
+        </p:nvSpPr>
+        <p:spPr>
+          <a:xfrm>
+            <a:off x="777240" y="5175504"/>
+            <a:ext cx="6035040" cy="512064"/>
+          </a:xfrm>
+          <a:prstGeom prst="rect">
+            <a:avLst/>
+          </a:prstGeom>
+          <a:noFill/>
+          <a:ln/>
+        </p:spPr>
+        <p:txBody>
+          <a:bodyPr wrap="square" lIns="0" tIns="0" rIns="0" bIns="0" rtlCol="0" anchor="t"/>
+          <a:lstStyle/>
+          <a:p>
+            <a:pPr indent="0" marL="0">
+              <a:buNone/>
+            </a:pPr>
+            <a:r>
+              <a:rPr lang="en-GB" altLang="en-US" sz="1400" dirty="0">
+                <a:solidFill>
+                  <a:schemeClr val="tx1"/>
+                </a:solidFill>
+              </a:rPr>
+              <a:t>Every post tracked from the build up, a check at 48 hours and the full report on day 14.</a:t>
+            </a:r>
+            <a:endParaRPr lang="en-GB" sz="1400" dirty="0"/>
+          </a:p>
+        </p:txBody>
+      </p:sp>
+      <p:sp>
+        <p:nvSpPr>
+          <p:cNvPr id="21" name="Text 16"/>
+          <p:cNvSpPr txBox="1"/>
+          <p:nvPr/>
+        </p:nvSpPr>
+        <p:spPr>
+          <a:xfrm>
+            <a:off x="548640" y="5852160"/>
+            <a:ext cx="6492240" cy="384048"/>
           </a:xfrm>
           <a:prstGeom prst="rect">
             <a:avLst/>
@@ -19944,7 +15324,7 @@
                 <a:ea typeface="+mj-lt" pitchFamily="34" charset="-122"/>
                 <a:cs typeface="+mj-lt" pitchFamily="34" charset="-120"/>
               </a:rPr>
-              <a:t>A trial, not a long term commitment. It is what earns the conversation about 2027.</a:t>
+              <a:t>A trial, not a long term commitment.</a:t>
             </a:r>
             <a:endParaRPr lang="en-GB" sz="1900" dirty="0"/>
           </a:p>
@@ -19952,7 +15332,7 @@
       </p:sp>
       <p:pic>
         <p:nvPicPr>
-          <p:cNvPr id="18" name="Photo ai_pass" descr="Illustration: a Mother Africa Festival creator accreditation pass on a lanyard">    </p:cNvPr>
+          <p:cNvPr id="22" name="Photo ai_pass" descr="Illustration: a Mother Africa Festival creator accreditation pass on a lanyard">    </p:cNvPr>
           <p:cNvPicPr>
             <a:picLocks noChangeAspect="1"/>
           </p:cNvPicPr>
@@ -19976,7 +15356,7 @@
       </p:pic>
       <p:sp>
         <p:nvSpPr>
-          <p:cNvPr id="19" name="Shape 13"/>
+          <p:cNvPr id="23" name="Shape 17"/>
           <p:cNvSpPr/>
           <p:nvPr/>
         </p:nvSpPr>
@@ -19998,7 +15378,7 @@
       </p:sp>
       <p:pic>
         <p:nvPicPr>
-          <p:cNvPr id="20" name="Image 3" descr="Mother Africa Festival">    </p:cNvPr>
+          <p:cNvPr id="24" name="Image 3" descr="Mother Africa Festival">    </p:cNvPr>
           <p:cNvPicPr>
             <a:picLocks noChangeAspect="1"/>
           </p:cNvPicPr>
@@ -20022,7 +15402,7 @@
       </p:pic>
       <p:sp>
         <p:nvSpPr>
-          <p:cNvPr id="21" name="Text 14"/>
+          <p:cNvPr id="25" name="Text 18"/>
           <p:cNvSpPr txBox="1"/>
           <p:nvPr/>
         </p:nvSpPr>
@@ -20058,7 +15438,7 @@
       </p:sp>
       <p:pic>
         <p:nvPicPr>
-          <p:cNvPr id="22" name="Image 4" descr="AToure Management &amp; Consulting">    </p:cNvPr>
+          <p:cNvPr id="26" name="Image 4" descr="AToure Management &amp; Consulting">    </p:cNvPr>
           <p:cNvPicPr>
             <a:picLocks noChangeAspect="1"/>
           </p:cNvPicPr>
